--- a/Thesis_Presentation.pptx
+++ b/Thesis_Presentation.pptx
@@ -10,8 +10,8 @@
     <p:sldId id="271" r:id="rId4"/>
     <p:sldId id="259" r:id="rId5"/>
     <p:sldId id="264" r:id="rId6"/>
-    <p:sldId id="260" r:id="rId7"/>
-    <p:sldId id="280" r:id="rId8"/>
+    <p:sldId id="280" r:id="rId7"/>
+    <p:sldId id="260" r:id="rId8"/>
     <p:sldId id="263" r:id="rId9"/>
     <p:sldId id="270" r:id="rId10"/>
     <p:sldId id="281" r:id="rId11"/>
@@ -25,12 +25,13 @@
     <p:sldId id="268" r:id="rId19"/>
     <p:sldId id="279" r:id="rId20"/>
     <p:sldId id="267" r:id="rId21"/>
-    <p:sldId id="276" r:id="rId22"/>
-    <p:sldId id="284" r:id="rId23"/>
-    <p:sldId id="285" r:id="rId24"/>
-    <p:sldId id="288" r:id="rId25"/>
-    <p:sldId id="277" r:id="rId26"/>
-    <p:sldId id="278" r:id="rId27"/>
+    <p:sldId id="291" r:id="rId22"/>
+    <p:sldId id="276" r:id="rId23"/>
+    <p:sldId id="284" r:id="rId24"/>
+    <p:sldId id="285" r:id="rId25"/>
+    <p:sldId id="288" r:id="rId26"/>
+    <p:sldId id="277" r:id="rId27"/>
+    <p:sldId id="278" r:id="rId28"/>
   </p:sldIdLst>
   <p:sldSz cx="12192000" cy="6858000"/>
   <p:notesSz cx="6858000" cy="9144000"/>
@@ -139,8 +140,8 @@
             <p14:sldId id="271"/>
             <p14:sldId id="259"/>
             <p14:sldId id="264"/>
+            <p14:sldId id="280"/>
             <p14:sldId id="260"/>
-            <p14:sldId id="280"/>
             <p14:sldId id="263"/>
             <p14:sldId id="270"/>
             <p14:sldId id="281"/>
@@ -154,6 +155,7 @@
             <p14:sldId id="268"/>
             <p14:sldId id="279"/>
             <p14:sldId id="267"/>
+            <p14:sldId id="291"/>
             <p14:sldId id="276"/>
             <p14:sldId id="284"/>
             <p14:sldId id="285"/>
@@ -174,7 +176,7 @@
 <file path=ppt/revisionInfo.xml><?xml version="1.0" encoding="utf-8"?>
 <p1510:revInfo xmlns:a="http://schemas.openxmlformats.org/drawingml/2006/main" xmlns:r="http://schemas.openxmlformats.org/officeDocument/2006/relationships" xmlns:p1510="http://schemas.microsoft.com/office/powerpoint/2015/10/main">
   <p1510:revLst>
-    <p1510:client id="{6F7D2D08-A2CD-4302-88FB-740D1140D192}" v="1411" dt="2025-10-28T01:51:00.937"/>
+    <p1510:client id="{6F7D2D08-A2CD-4302-88FB-740D1140D192}" v="1474" dt="2025-10-31T15:18:18.253"/>
   </p1510:revLst>
 </p1510:revInfo>
 </file>
@@ -184,18 +186,18 @@
   <pc:docChgLst>
     <pc:chgData name="Evgenia Andreou" userId="8e89e74f621e7047" providerId="LiveId" clId="{EF53017E-E624-4052-9F70-6403551E244D}"/>
     <pc:docChg chg="undo redo custSel addSld delSld modSld sldOrd modMainMaster addSection delSection modSection">
-      <pc:chgData name="Evgenia Andreou" userId="8e89e74f621e7047" providerId="LiveId" clId="{EF53017E-E624-4052-9F70-6403551E244D}" dt="2025-10-28T02:18:39.407" v="33670" actId="20577"/>
+      <pc:chgData name="Evgenia Andreou" userId="8e89e74f621e7047" providerId="LiveId" clId="{EF53017E-E624-4052-9F70-6403551E244D}" dt="2025-11-05T00:25:55.388" v="34953" actId="20577"/>
       <pc:docMkLst>
         <pc:docMk/>
       </pc:docMkLst>
       <pc:sldChg chg="addSp delSp modSp new mod setBg">
-        <pc:chgData name="Evgenia Andreou" userId="8e89e74f621e7047" providerId="LiveId" clId="{EF53017E-E624-4052-9F70-6403551E244D}" dt="2025-10-28T00:49:10.689" v="33145" actId="20577"/>
+        <pc:chgData name="Evgenia Andreou" userId="8e89e74f621e7047" providerId="LiveId" clId="{EF53017E-E624-4052-9F70-6403551E244D}" dt="2025-10-31T15:19:06.238" v="34920" actId="1076"/>
         <pc:sldMkLst>
           <pc:docMk/>
           <pc:sldMk cId="568867521" sldId="257"/>
         </pc:sldMkLst>
         <pc:spChg chg="add del mod">
-          <ac:chgData name="Evgenia Andreou" userId="8e89e74f621e7047" providerId="LiveId" clId="{EF53017E-E624-4052-9F70-6403551E244D}" dt="2025-10-27T22:48:16.903" v="30482" actId="207"/>
+          <ac:chgData name="Evgenia Andreou" userId="8e89e74f621e7047" providerId="LiveId" clId="{EF53017E-E624-4052-9F70-6403551E244D}" dt="2025-10-31T15:18:02.298" v="34874" actId="113"/>
           <ac:spMkLst>
             <pc:docMk/>
             <pc:sldMk cId="568867521" sldId="257"/>
@@ -203,76 +205,44 @@
           </ac:spMkLst>
         </pc:spChg>
         <pc:spChg chg="add mod">
-          <ac:chgData name="Evgenia Andreou" userId="8e89e74f621e7047" providerId="LiveId" clId="{EF53017E-E624-4052-9F70-6403551E244D}" dt="2025-10-28T00:49:10.689" v="33145" actId="20577"/>
+          <ac:chgData name="Evgenia Andreou" userId="8e89e74f621e7047" providerId="LiveId" clId="{EF53017E-E624-4052-9F70-6403551E244D}" dt="2025-10-31T15:19:05.486" v="34918" actId="1076"/>
           <ac:spMkLst>
             <pc:docMk/>
             <pc:sldMk cId="568867521" sldId="257"/>
             <ac:spMk id="4" creationId="{DA253F5B-969C-ED7C-E6DD-0409268E6EFB}"/>
           </ac:spMkLst>
         </pc:spChg>
-        <pc:spChg chg="add del mod">
-          <ac:chgData name="Evgenia Andreou" userId="8e89e74f621e7047" providerId="LiveId" clId="{EF53017E-E624-4052-9F70-6403551E244D}" dt="2025-10-27T22:48:35.322" v="30484" actId="478"/>
+        <pc:spChg chg="add mod">
+          <ac:chgData name="Evgenia Andreou" userId="8e89e74f621e7047" providerId="LiveId" clId="{EF53017E-E624-4052-9F70-6403551E244D}" dt="2025-10-31T15:19:05.841" v="34919" actId="1076"/>
           <ac:spMkLst>
             <pc:docMk/>
             <pc:sldMk cId="568867521" sldId="257"/>
-            <ac:spMk id="6" creationId="{66E63F8F-7CDD-502D-6F0E-38DE324CE4D2}"/>
+            <ac:spMk id="5" creationId="{7F59F5FB-A94B-31DE-2AAA-445E59F01FC2}"/>
           </ac:spMkLst>
         </pc:spChg>
         <pc:picChg chg="add mod">
-          <ac:chgData name="Evgenia Andreou" userId="8e89e74f621e7047" providerId="LiveId" clId="{EF53017E-E624-4052-9F70-6403551E244D}" dt="2025-10-27T21:30:05.678" v="28787" actId="14100"/>
+          <ac:chgData name="Evgenia Andreou" userId="8e89e74f621e7047" providerId="LiveId" clId="{EF53017E-E624-4052-9F70-6403551E244D}" dt="2025-10-31T15:19:06.238" v="34920" actId="1076"/>
           <ac:picMkLst>
             <pc:docMk/>
             <pc:sldMk cId="568867521" sldId="257"/>
             <ac:picMk id="2" creationId="{5D46DE69-A32F-DC72-8928-3B97AD27BEA8}"/>
           </ac:picMkLst>
         </pc:picChg>
-        <pc:picChg chg="add del mod">
-          <ac:chgData name="Evgenia Andreou" userId="8e89e74f621e7047" providerId="LiveId" clId="{EF53017E-E624-4052-9F70-6403551E244D}" dt="2025-10-27T21:29:55.760" v="28782" actId="478"/>
-          <ac:picMkLst>
-            <pc:docMk/>
-            <pc:sldMk cId="568867521" sldId="257"/>
-            <ac:picMk id="5" creationId="{640D1803-8150-CAD8-031A-2FBAFFCD8E65}"/>
-          </ac:picMkLst>
-        </pc:picChg>
       </pc:sldChg>
       <pc:sldChg chg="addSp delSp modSp new mod ord setBg">
-        <pc:chgData name="Evgenia Andreou" userId="8e89e74f621e7047" providerId="LiveId" clId="{EF53017E-E624-4052-9F70-6403551E244D}" dt="2025-10-27T22:48:10.519" v="30481" actId="207"/>
+        <pc:chgData name="Evgenia Andreou" userId="8e89e74f621e7047" providerId="LiveId" clId="{EF53017E-E624-4052-9F70-6403551E244D}" dt="2025-10-31T15:17:52.574" v="34873" actId="692"/>
         <pc:sldMkLst>
           <pc:docMk/>
           <pc:sldMk cId="1223022622" sldId="258"/>
         </pc:sldMkLst>
         <pc:spChg chg="mod">
-          <ac:chgData name="Evgenia Andreou" userId="8e89e74f621e7047" providerId="LiveId" clId="{EF53017E-E624-4052-9F70-6403551E244D}" dt="2025-10-27T22:48:10.519" v="30481" actId="207"/>
+          <ac:chgData name="Evgenia Andreou" userId="8e89e74f621e7047" providerId="LiveId" clId="{EF53017E-E624-4052-9F70-6403551E244D}" dt="2025-10-31T15:17:52.574" v="34873" actId="692"/>
           <ac:spMkLst>
             <pc:docMk/>
             <pc:sldMk cId="1223022622" sldId="258"/>
             <ac:spMk id="2" creationId="{68F7CEDF-EFB3-C401-7155-FB36C7BDA927}"/>
           </ac:spMkLst>
         </pc:spChg>
-        <pc:spChg chg="add del">
-          <ac:chgData name="Evgenia Andreou" userId="8e89e74f621e7047" providerId="LiveId" clId="{EF53017E-E624-4052-9F70-6403551E244D}" dt="2025-10-27T21:27:57.385" v="28760" actId="26606"/>
-          <ac:spMkLst>
-            <pc:docMk/>
-            <pc:sldMk cId="1223022622" sldId="258"/>
-            <ac:spMk id="10" creationId="{50D1D739-EDC4-4BE6-A073-9B157E1F9069}"/>
-          </ac:spMkLst>
-        </pc:spChg>
-        <pc:spChg chg="add del">
-          <ac:chgData name="Evgenia Andreou" userId="8e89e74f621e7047" providerId="LiveId" clId="{EF53017E-E624-4052-9F70-6403551E244D}" dt="2025-10-27T21:27:57.385" v="28760" actId="26606"/>
-          <ac:spMkLst>
-            <pc:docMk/>
-            <pc:sldMk cId="1223022622" sldId="258"/>
-            <ac:spMk id="12" creationId="{6CDD35A4-E546-4AF3-A8B9-AC24C5C9FA70}"/>
-          </ac:spMkLst>
-        </pc:spChg>
-        <pc:picChg chg="add del mod modCrop">
-          <ac:chgData name="Evgenia Andreou" userId="8e89e74f621e7047" providerId="LiveId" clId="{EF53017E-E624-4052-9F70-6403551E244D}" dt="2025-10-27T21:27:27.905" v="28756" actId="478"/>
-          <ac:picMkLst>
-            <pc:docMk/>
-            <pc:sldMk cId="1223022622" sldId="258"/>
-            <ac:picMk id="3" creationId="{57CAA8E1-B682-7871-AB00-72A2D1931990}"/>
-          </ac:picMkLst>
-        </pc:picChg>
         <pc:picChg chg="add mod">
           <ac:chgData name="Evgenia Andreou" userId="8e89e74f621e7047" providerId="LiveId" clId="{EF53017E-E624-4052-9F70-6403551E244D}" dt="2025-10-27T22:32:06.554" v="29331" actId="1076"/>
           <ac:picMkLst>
@@ -305,14 +275,14 @@
           </ac:spMkLst>
         </pc:spChg>
       </pc:sldChg>
-      <pc:sldChg chg="addSp delSp modSp new mod setBg modClrScheme chgLayout">
-        <pc:chgData name="Evgenia Andreou" userId="8e89e74f621e7047" providerId="LiveId" clId="{EF53017E-E624-4052-9F70-6403551E244D}" dt="2025-10-27T22:58:06.727" v="30654" actId="14100"/>
+      <pc:sldChg chg="addSp delSp modSp new mod ord setBg modClrScheme chgLayout">
+        <pc:chgData name="Evgenia Andreou" userId="8e89e74f621e7047" providerId="LiveId" clId="{EF53017E-E624-4052-9F70-6403551E244D}" dt="2025-10-29T16:07:12.248" v="34666" actId="20577"/>
         <pc:sldMkLst>
           <pc:docMk/>
           <pc:sldMk cId="3253723412" sldId="260"/>
         </pc:sldMkLst>
         <pc:spChg chg="add mod">
-          <ac:chgData name="Evgenia Andreou" userId="8e89e74f621e7047" providerId="LiveId" clId="{EF53017E-E624-4052-9F70-6403551E244D}" dt="2025-10-27T22:58:06.727" v="30654" actId="14100"/>
+          <ac:chgData name="Evgenia Andreou" userId="8e89e74f621e7047" providerId="LiveId" clId="{EF53017E-E624-4052-9F70-6403551E244D}" dt="2025-10-29T16:03:40.991" v="34565" actId="255"/>
           <ac:spMkLst>
             <pc:docMk/>
             <pc:sldMk cId="3253723412" sldId="260"/>
@@ -320,7 +290,7 @@
           </ac:spMkLst>
         </pc:spChg>
         <pc:spChg chg="add mod">
-          <ac:chgData name="Evgenia Andreou" userId="8e89e74f621e7047" providerId="LiveId" clId="{EF53017E-E624-4052-9F70-6403551E244D}" dt="2025-10-27T22:57:33.810" v="30632" actId="1076"/>
+          <ac:chgData name="Evgenia Andreou" userId="8e89e74f621e7047" providerId="LiveId" clId="{EF53017E-E624-4052-9F70-6403551E244D}" dt="2025-10-29T16:02:39.018" v="34557" actId="255"/>
           <ac:spMkLst>
             <pc:docMk/>
             <pc:sldMk cId="3253723412" sldId="260"/>
@@ -328,7 +298,7 @@
           </ac:spMkLst>
         </pc:spChg>
         <pc:spChg chg="add mod">
-          <ac:chgData name="Evgenia Andreou" userId="8e89e74f621e7047" providerId="LiveId" clId="{EF53017E-E624-4052-9F70-6403551E244D}" dt="2025-10-27T22:57:36.596" v="30633" actId="1076"/>
+          <ac:chgData name="Evgenia Andreou" userId="8e89e74f621e7047" providerId="LiveId" clId="{EF53017E-E624-4052-9F70-6403551E244D}" dt="2025-10-29T16:07:12.248" v="34666" actId="20577"/>
           <ac:spMkLst>
             <pc:docMk/>
             <pc:sldMk cId="3253723412" sldId="260"/>
@@ -336,11 +306,27 @@
           </ac:spMkLst>
         </pc:spChg>
         <pc:spChg chg="add mod">
-          <ac:chgData name="Evgenia Andreou" userId="8e89e74f621e7047" providerId="LiveId" clId="{EF53017E-E624-4052-9F70-6403551E244D}" dt="2025-10-27T22:58:06.727" v="30654" actId="14100"/>
+          <ac:chgData name="Evgenia Andreou" userId="8e89e74f621e7047" providerId="LiveId" clId="{EF53017E-E624-4052-9F70-6403551E244D}" dt="2025-10-29T16:03:07.890" v="34564" actId="1036"/>
           <ac:spMkLst>
             <pc:docMk/>
             <pc:sldMk cId="3253723412" sldId="260"/>
             <ac:spMk id="5" creationId="{E7DEE60B-D404-7827-DCD6-007CA5735B35}"/>
+          </ac:spMkLst>
+        </pc:spChg>
+        <pc:spChg chg="add mod">
+          <ac:chgData name="Evgenia Andreou" userId="8e89e74f621e7047" providerId="LiveId" clId="{EF53017E-E624-4052-9F70-6403551E244D}" dt="2025-10-29T16:03:47.848" v="34575" actId="20577"/>
+          <ac:spMkLst>
+            <pc:docMk/>
+            <pc:sldMk cId="3253723412" sldId="260"/>
+            <ac:spMk id="6" creationId="{CD9BB61E-EA88-626A-DB6A-1C88B5382EEA}"/>
+          </ac:spMkLst>
+        </pc:spChg>
+        <pc:spChg chg="add mod">
+          <ac:chgData name="Evgenia Andreou" userId="8e89e74f621e7047" providerId="LiveId" clId="{EF53017E-E624-4052-9F70-6403551E244D}" dt="2025-10-29T16:05:21.690" v="34587" actId="120"/>
+          <ac:spMkLst>
+            <pc:docMk/>
+            <pc:sldMk cId="3253723412" sldId="260"/>
+            <ac:spMk id="7" creationId="{CDDFCFBD-9E04-ECFB-B1C3-F69CFF2F9ACF}"/>
           </ac:spMkLst>
         </pc:spChg>
       </pc:sldChg>
@@ -438,86 +424,6 @@
             <ac:spMk id="31" creationId="{E4151066-3F48-9700-D69C-E46E31D40C83}"/>
           </ac:spMkLst>
         </pc:spChg>
-        <pc:spChg chg="del mod">
-          <ac:chgData name="Evgenia Andreou" userId="8e89e74f621e7047" providerId="LiveId" clId="{EF53017E-E624-4052-9F70-6403551E244D}" dt="2025-10-27T22:05:25.327" v="29151" actId="478"/>
-          <ac:spMkLst>
-            <pc:docMk/>
-            <pc:sldMk cId="1363710211" sldId="262"/>
-            <ac:spMk id="48" creationId="{59307BED-4FA4-9677-7182-9759FCDD1FAC}"/>
-          </ac:spMkLst>
-        </pc:spChg>
-        <pc:spChg chg="del mod">
-          <ac:chgData name="Evgenia Andreou" userId="8e89e74f621e7047" providerId="LiveId" clId="{EF53017E-E624-4052-9F70-6403551E244D}" dt="2025-10-27T22:09:12.469" v="29203" actId="478"/>
-          <ac:spMkLst>
-            <pc:docMk/>
-            <pc:sldMk cId="1363710211" sldId="262"/>
-            <ac:spMk id="49" creationId="{40B10CA0-1D8F-03C6-6C82-0C2AF266E014}"/>
-          </ac:spMkLst>
-        </pc:spChg>
-        <pc:spChg chg="del mod">
-          <ac:chgData name="Evgenia Andreou" userId="8e89e74f621e7047" providerId="LiveId" clId="{EF53017E-E624-4052-9F70-6403551E244D}" dt="2025-10-27T22:08:18.775" v="29187" actId="478"/>
-          <ac:spMkLst>
-            <pc:docMk/>
-            <pc:sldMk cId="1363710211" sldId="262"/>
-            <ac:spMk id="50" creationId="{10E261A7-102E-0102-FCCE-3EEC34CF7775}"/>
-          </ac:spMkLst>
-        </pc:spChg>
-        <pc:spChg chg="add del mod">
-          <ac:chgData name="Evgenia Andreou" userId="8e89e74f621e7047" providerId="LiveId" clId="{EF53017E-E624-4052-9F70-6403551E244D}" dt="2025-10-27T22:08:04.108" v="29176" actId="478"/>
-          <ac:spMkLst>
-            <pc:docMk/>
-            <pc:sldMk cId="1363710211" sldId="262"/>
-            <ac:spMk id="55" creationId="{081AC4B7-598C-2F88-A032-2294E11EBD73}"/>
-          </ac:spMkLst>
-        </pc:spChg>
-        <pc:spChg chg="add del mod">
-          <ac:chgData name="Evgenia Andreou" userId="8e89e74f621e7047" providerId="LiveId" clId="{EF53017E-E624-4052-9F70-6403551E244D}" dt="2025-10-27T22:10:17.640" v="29222" actId="478"/>
-          <ac:spMkLst>
-            <pc:docMk/>
-            <pc:sldMk cId="1363710211" sldId="262"/>
-            <ac:spMk id="56" creationId="{F38E0F4D-3906-4595-112D-2B289BE983BA}"/>
-          </ac:spMkLst>
-        </pc:spChg>
-        <pc:spChg chg="del mod">
-          <ac:chgData name="Evgenia Andreou" userId="8e89e74f621e7047" providerId="LiveId" clId="{EF53017E-E624-4052-9F70-6403551E244D}" dt="2025-10-27T22:07:30.909" v="29169" actId="478"/>
-          <ac:spMkLst>
-            <pc:docMk/>
-            <pc:sldMk cId="1363710211" sldId="262"/>
-            <ac:spMk id="57" creationId="{2C62390F-44DD-BBB5-91FD-0CB05D102B80}"/>
-          </ac:spMkLst>
-        </pc:spChg>
-        <pc:spChg chg="del mod">
-          <ac:chgData name="Evgenia Andreou" userId="8e89e74f621e7047" providerId="LiveId" clId="{EF53017E-E624-4052-9F70-6403551E244D}" dt="2025-10-27T22:05:33.944" v="29153" actId="478"/>
-          <ac:spMkLst>
-            <pc:docMk/>
-            <pc:sldMk cId="1363710211" sldId="262"/>
-            <ac:spMk id="58" creationId="{1AE321AC-F7DE-7AA1-AE9D-9F27C85FBEBF}"/>
-          </ac:spMkLst>
-        </pc:spChg>
-        <pc:spChg chg="del mod">
-          <ac:chgData name="Evgenia Andreou" userId="8e89e74f621e7047" providerId="LiveId" clId="{EF53017E-E624-4052-9F70-6403551E244D}" dt="2025-10-27T22:08:02.016" v="29175" actId="478"/>
-          <ac:spMkLst>
-            <pc:docMk/>
-            <pc:sldMk cId="1363710211" sldId="262"/>
-            <ac:spMk id="59" creationId="{ABD9FE42-4E36-8E07-F6E6-77DF311CE98A}"/>
-          </ac:spMkLst>
-        </pc:spChg>
-        <pc:spChg chg="add del mod">
-          <ac:chgData name="Evgenia Andreou" userId="8e89e74f621e7047" providerId="LiveId" clId="{EF53017E-E624-4052-9F70-6403551E244D}" dt="2025-10-27T22:07:46.026" v="29172" actId="478"/>
-          <ac:spMkLst>
-            <pc:docMk/>
-            <pc:sldMk cId="1363710211" sldId="262"/>
-            <ac:spMk id="60" creationId="{8B89AC4E-F7F8-2B91-208F-81BBB9E91841}"/>
-          </ac:spMkLst>
-        </pc:spChg>
-        <pc:spChg chg="add del mod">
-          <ac:chgData name="Evgenia Andreou" userId="8e89e74f621e7047" providerId="LiveId" clId="{EF53017E-E624-4052-9F70-6403551E244D}" dt="2025-10-27T22:07:43.378" v="29171" actId="478"/>
-          <ac:spMkLst>
-            <pc:docMk/>
-            <pc:sldMk cId="1363710211" sldId="262"/>
-            <ac:spMk id="61" creationId="{79F4F368-F421-D566-55EC-19445D0F38B6}"/>
-          </ac:spMkLst>
-        </pc:spChg>
         <pc:spChg chg="add mod">
           <ac:chgData name="Evgenia Andreou" userId="8e89e74f621e7047" providerId="LiveId" clId="{EF53017E-E624-4052-9F70-6403551E244D}" dt="2025-10-27T23:06:02.343" v="30783" actId="1038"/>
           <ac:spMkLst>
@@ -548,14 +454,6 @@
             <pc:docMk/>
             <pc:sldMk cId="1363710211" sldId="262"/>
             <ac:spMk id="65" creationId="{BC395692-D7A5-4CC4-921A-B43C008650B1}"/>
-          </ac:spMkLst>
-        </pc:spChg>
-        <pc:spChg chg="add del mod">
-          <ac:chgData name="Evgenia Andreou" userId="8e89e74f621e7047" providerId="LiveId" clId="{EF53017E-E624-4052-9F70-6403551E244D}" dt="2025-10-27T22:10:33.056" v="29228" actId="478"/>
-          <ac:spMkLst>
-            <pc:docMk/>
-            <pc:sldMk cId="1363710211" sldId="262"/>
-            <ac:spMk id="86" creationId="{F81FE769-DE8F-1B11-F876-C5419C6A0A11}"/>
           </ac:spMkLst>
         </pc:spChg>
         <pc:spChg chg="add mod">
@@ -720,7 +618,7 @@
         </pc:cxnChg>
       </pc:sldChg>
       <pc:sldChg chg="addSp delSp modSp new mod setBg modClrScheme chgLayout">
-        <pc:chgData name="Evgenia Andreou" userId="8e89e74f621e7047" providerId="LiveId" clId="{EF53017E-E624-4052-9F70-6403551E244D}" dt="2025-10-27T23:00:50.194" v="30715" actId="207"/>
+        <pc:chgData name="Evgenia Andreou" userId="8e89e74f621e7047" providerId="LiveId" clId="{EF53017E-E624-4052-9F70-6403551E244D}" dt="2025-10-29T15:58:31.933" v="34498" actId="20577"/>
         <pc:sldMkLst>
           <pc:docMk/>
           <pc:sldMk cId="2711995207" sldId="263"/>
@@ -734,7 +632,7 @@
           </ac:spMkLst>
         </pc:spChg>
         <pc:spChg chg="add mod ord">
-          <ac:chgData name="Evgenia Andreou" userId="8e89e74f621e7047" providerId="LiveId" clId="{EF53017E-E624-4052-9F70-6403551E244D}" dt="2025-10-27T23:00:50.194" v="30715" actId="207"/>
+          <ac:chgData name="Evgenia Andreou" userId="8e89e74f621e7047" providerId="LiveId" clId="{EF53017E-E624-4052-9F70-6403551E244D}" dt="2025-10-29T15:58:31.933" v="34498" actId="20577"/>
           <ac:spMkLst>
             <pc:docMk/>
             <pc:sldMk cId="2711995207" sldId="263"/>
@@ -743,7 +641,7 @@
         </pc:spChg>
       </pc:sldChg>
       <pc:sldChg chg="addSp delSp modSp new mod setBg modClrScheme chgLayout">
-        <pc:chgData name="Evgenia Andreou" userId="8e89e74f621e7047" providerId="LiveId" clId="{EF53017E-E624-4052-9F70-6403551E244D}" dt="2025-10-27T22:58:38.547" v="30665" actId="14100"/>
+        <pc:chgData name="Evgenia Andreou" userId="8e89e74f621e7047" providerId="LiveId" clId="{EF53017E-E624-4052-9F70-6403551E244D}" dt="2025-10-29T15:59:38.939" v="34499" actId="242"/>
         <pc:sldMkLst>
           <pc:docMk/>
           <pc:sldMk cId="872456864" sldId="264"/>
@@ -765,7 +663,7 @@
           </ac:spMkLst>
         </pc:spChg>
         <pc:spChg chg="add mod ord">
-          <ac:chgData name="Evgenia Andreou" userId="8e89e74f621e7047" providerId="LiveId" clId="{EF53017E-E624-4052-9F70-6403551E244D}" dt="2025-10-27T22:58:22.543" v="30661" actId="1076"/>
+          <ac:chgData name="Evgenia Andreou" userId="8e89e74f621e7047" providerId="LiveId" clId="{EF53017E-E624-4052-9F70-6403551E244D}" dt="2025-10-29T15:59:38.939" v="34499" actId="242"/>
           <ac:spMkLst>
             <pc:docMk/>
             <pc:sldMk cId="872456864" sldId="264"/>
@@ -774,7 +672,7 @@
         </pc:spChg>
       </pc:sldChg>
       <pc:sldChg chg="addSp delSp modSp new mod setBg modClrScheme chgLayout">
-        <pc:chgData name="Evgenia Andreou" userId="8e89e74f621e7047" providerId="LiveId" clId="{EF53017E-E624-4052-9F70-6403551E244D}" dt="2025-10-28T01:29:13.790" v="33517" actId="20577"/>
+        <pc:chgData name="Evgenia Andreou" userId="8e89e74f621e7047" providerId="LiveId" clId="{EF53017E-E624-4052-9F70-6403551E244D}" dt="2025-11-05T00:25:55.388" v="34953" actId="20577"/>
         <pc:sldMkLst>
           <pc:docMk/>
           <pc:sldMk cId="1969514135" sldId="266"/>
@@ -788,7 +686,7 @@
           </ac:spMkLst>
         </pc:spChg>
         <pc:graphicFrameChg chg="add mod modGraphic">
-          <ac:chgData name="Evgenia Andreou" userId="8e89e74f621e7047" providerId="LiveId" clId="{EF53017E-E624-4052-9F70-6403551E244D}" dt="2025-10-28T01:29:13.790" v="33517" actId="20577"/>
+          <ac:chgData name="Evgenia Andreou" userId="8e89e74f621e7047" providerId="LiveId" clId="{EF53017E-E624-4052-9F70-6403551E244D}" dt="2025-11-05T00:25:55.388" v="34953" actId="20577"/>
           <ac:graphicFrameMkLst>
             <pc:docMk/>
             <pc:sldMk cId="1969514135" sldId="266"/>
@@ -796,24 +694,16 @@
           </ac:graphicFrameMkLst>
         </pc:graphicFrameChg>
         <pc:graphicFrameChg chg="add mod modGraphic">
-          <ac:chgData name="Evgenia Andreou" userId="8e89e74f621e7047" providerId="LiveId" clId="{EF53017E-E624-4052-9F70-6403551E244D}" dt="2025-10-28T01:27:12.545" v="33460" actId="20577"/>
+          <ac:chgData name="Evgenia Andreou" userId="8e89e74f621e7047" providerId="LiveId" clId="{EF53017E-E624-4052-9F70-6403551E244D}" dt="2025-11-05T00:25:12.752" v="34937" actId="20577"/>
           <ac:graphicFrameMkLst>
             <pc:docMk/>
             <pc:sldMk cId="1969514135" sldId="266"/>
             <ac:graphicFrameMk id="20" creationId="{97A848B3-A454-77E9-2411-EE831EF40542}"/>
           </ac:graphicFrameMkLst>
         </pc:graphicFrameChg>
-        <pc:cxnChg chg="add del mod">
-          <ac:chgData name="Evgenia Andreou" userId="8e89e74f621e7047" providerId="LiveId" clId="{EF53017E-E624-4052-9F70-6403551E244D}" dt="2025-10-27T23:08:53.124" v="30800" actId="478"/>
-          <ac:cxnSpMkLst>
-            <pc:docMk/>
-            <pc:sldMk cId="1969514135" sldId="266"/>
-            <ac:cxnSpMk id="23" creationId="{42E6D7F1-480D-196A-1DF3-C90C8D4F1BF7}"/>
-          </ac:cxnSpMkLst>
-        </pc:cxnChg>
       </pc:sldChg>
       <pc:sldChg chg="addSp delSp modSp new mod ord setBg">
-        <pc:chgData name="Evgenia Andreou" userId="8e89e74f621e7047" providerId="LiveId" clId="{EF53017E-E624-4052-9F70-6403551E244D}" dt="2025-10-28T02:18:39.407" v="33670" actId="20577"/>
+        <pc:chgData name="Evgenia Andreou" userId="8e89e74f621e7047" providerId="LiveId" clId="{EF53017E-E624-4052-9F70-6403551E244D}" dt="2025-10-28T08:04:46.650" v="33718" actId="1036"/>
         <pc:sldMkLst>
           <pc:docMk/>
           <pc:sldMk cId="4231469208" sldId="267"/>
@@ -835,7 +725,7 @@
           </ac:spMkLst>
         </pc:spChg>
         <pc:spChg chg="add mod">
-          <ac:chgData name="Evgenia Andreou" userId="8e89e74f621e7047" providerId="LiveId" clId="{EF53017E-E624-4052-9F70-6403551E244D}" dt="2025-10-28T00:12:59.733" v="32298" actId="255"/>
+          <ac:chgData name="Evgenia Andreou" userId="8e89e74f621e7047" providerId="LiveId" clId="{EF53017E-E624-4052-9F70-6403551E244D}" dt="2025-10-28T08:04:46.650" v="33718" actId="1036"/>
           <ac:spMkLst>
             <pc:docMk/>
             <pc:sldMk cId="4231469208" sldId="267"/>
@@ -896,14 +786,6 @@
           <pc:docMk/>
           <pc:sldMk cId="2732646992" sldId="269"/>
         </pc:sldMkLst>
-        <pc:spChg chg="del mod">
-          <ac:chgData name="Evgenia Andreou" userId="8e89e74f621e7047" providerId="LiveId" clId="{EF53017E-E624-4052-9F70-6403551E244D}" dt="2025-10-27T23:52:06.836" v="31704" actId="478"/>
-          <ac:spMkLst>
-            <pc:docMk/>
-            <pc:sldMk cId="2732646992" sldId="269"/>
-            <ac:spMk id="3" creationId="{6F632D25-C12C-AD1F-8350-99DDF3642E48}"/>
-          </ac:spMkLst>
-        </pc:spChg>
         <pc:spChg chg="mod">
           <ac:chgData name="Evgenia Andreou" userId="8e89e74f621e7047" providerId="LiveId" clId="{EF53017E-E624-4052-9F70-6403551E244D}" dt="2025-10-27T23:53:29.449" v="31729" actId="20577"/>
           <ac:spMkLst>
@@ -930,21 +812,13 @@
         </pc:spChg>
       </pc:sldChg>
       <pc:sldChg chg="addSp delSp modSp new mod ord setBg">
-        <pc:chgData name="Evgenia Andreou" userId="8e89e74f621e7047" providerId="LiveId" clId="{EF53017E-E624-4052-9F70-6403551E244D}" dt="2025-10-27T23:01:26.506" v="30723" actId="207"/>
+        <pc:chgData name="Evgenia Andreou" userId="8e89e74f621e7047" providerId="LiveId" clId="{EF53017E-E624-4052-9F70-6403551E244D}" dt="2025-10-31T15:17:18.034" v="34870" actId="1582"/>
         <pc:sldMkLst>
           <pc:docMk/>
           <pc:sldMk cId="2295317214" sldId="270"/>
         </pc:sldMkLst>
-        <pc:spChg chg="del mod">
-          <ac:chgData name="Evgenia Andreou" userId="8e89e74f621e7047" providerId="LiveId" clId="{EF53017E-E624-4052-9F70-6403551E244D}" dt="2025-10-27T21:54:00.683" v="29064" actId="478"/>
-          <ac:spMkLst>
-            <pc:docMk/>
-            <pc:sldMk cId="2295317214" sldId="270"/>
-            <ac:spMk id="2" creationId="{309DCB67-04C1-40E3-1963-550929F13B21}"/>
-          </ac:spMkLst>
-        </pc:spChg>
         <pc:spChg chg="add mod">
-          <ac:chgData name="Evgenia Andreou" userId="8e89e74f621e7047" providerId="LiveId" clId="{EF53017E-E624-4052-9F70-6403551E244D}" dt="2025-10-27T23:01:26.506" v="30723" actId="207"/>
+          <ac:chgData name="Evgenia Andreou" userId="8e89e74f621e7047" providerId="LiveId" clId="{EF53017E-E624-4052-9F70-6403551E244D}" dt="2025-10-31T15:17:18.034" v="34870" actId="1582"/>
           <ac:spMkLst>
             <pc:docMk/>
             <pc:sldMk cId="2295317214" sldId="270"/>
@@ -953,13 +827,13 @@
         </pc:spChg>
       </pc:sldChg>
       <pc:sldChg chg="modSp new mod setBg">
-        <pc:chgData name="Evgenia Andreou" userId="8e89e74f621e7047" providerId="LiveId" clId="{EF53017E-E624-4052-9F70-6403551E244D}" dt="2025-10-27T22:59:19.991" v="30690"/>
+        <pc:chgData name="Evgenia Andreou" userId="8e89e74f621e7047" providerId="LiveId" clId="{EF53017E-E624-4052-9F70-6403551E244D}" dt="2025-10-31T15:17:28.839" v="34871" actId="1582"/>
         <pc:sldMkLst>
           <pc:docMk/>
           <pc:sldMk cId="2301623070" sldId="271"/>
         </pc:sldMkLst>
         <pc:spChg chg="mod">
-          <ac:chgData name="Evgenia Andreou" userId="8e89e74f621e7047" providerId="LiveId" clId="{EF53017E-E624-4052-9F70-6403551E244D}" dt="2025-10-27T22:59:19.991" v="30690"/>
+          <ac:chgData name="Evgenia Andreou" userId="8e89e74f621e7047" providerId="LiveId" clId="{EF53017E-E624-4052-9F70-6403551E244D}" dt="2025-10-31T15:17:28.839" v="34871" actId="1582"/>
           <ac:spMkLst>
             <pc:docMk/>
             <pc:sldMk cId="2301623070" sldId="271"/>
@@ -968,13 +842,13 @@
         </pc:spChg>
       </pc:sldChg>
       <pc:sldChg chg="delSp modSp new mod">
-        <pc:chgData name="Evgenia Andreou" userId="8e89e74f621e7047" providerId="LiveId" clId="{EF53017E-E624-4052-9F70-6403551E244D}" dt="2025-10-27T23:53:56.349" v="31734" actId="1076"/>
+        <pc:chgData name="Evgenia Andreou" userId="8e89e74f621e7047" providerId="LiveId" clId="{EF53017E-E624-4052-9F70-6403551E244D}" dt="2025-10-31T15:17:07.410" v="34869" actId="1582"/>
         <pc:sldMkLst>
           <pc:docMk/>
           <pc:sldMk cId="322220874" sldId="273"/>
         </pc:sldMkLst>
         <pc:spChg chg="mod">
-          <ac:chgData name="Evgenia Andreou" userId="8e89e74f621e7047" providerId="LiveId" clId="{EF53017E-E624-4052-9F70-6403551E244D}" dt="2025-10-27T23:53:56.349" v="31734" actId="1076"/>
+          <ac:chgData name="Evgenia Andreou" userId="8e89e74f621e7047" providerId="LiveId" clId="{EF53017E-E624-4052-9F70-6403551E244D}" dt="2025-10-31T15:17:07.410" v="34869" actId="1582"/>
           <ac:spMkLst>
             <pc:docMk/>
             <pc:sldMk cId="322220874" sldId="273"/>
@@ -1030,7 +904,7 @@
         </pc:picChg>
       </pc:sldChg>
       <pc:sldChg chg="addSp delSp modSp new mod ord modShow">
-        <pc:chgData name="Evgenia Andreou" userId="8e89e74f621e7047" providerId="LiveId" clId="{EF53017E-E624-4052-9F70-6403551E244D}" dt="2025-10-27T23:48:06.554" v="31559" actId="1076"/>
+        <pc:chgData name="Evgenia Andreou" userId="8e89e74f621e7047" providerId="LiveId" clId="{EF53017E-E624-4052-9F70-6403551E244D}" dt="2025-10-28T08:01:11.467" v="33717" actId="20577"/>
         <pc:sldMkLst>
           <pc:docMk/>
           <pc:sldMk cId="311389722" sldId="275"/>
@@ -1044,7 +918,7 @@
           </ac:spMkLst>
         </pc:spChg>
         <pc:spChg chg="mod">
-          <ac:chgData name="Evgenia Andreou" userId="8e89e74f621e7047" providerId="LiveId" clId="{EF53017E-E624-4052-9F70-6403551E244D}" dt="2025-10-27T23:48:04.351" v="31558" actId="1076"/>
+          <ac:chgData name="Evgenia Andreou" userId="8e89e74f621e7047" providerId="LiveId" clId="{EF53017E-E624-4052-9F70-6403551E244D}" dt="2025-10-28T08:01:11.467" v="33717" actId="20577"/>
           <ac:spMkLst>
             <pc:docMk/>
             <pc:sldMk cId="311389722" sldId="275"/>
@@ -1180,7 +1054,7 @@
         </pc:picChg>
       </pc:sldChg>
       <pc:sldChg chg="addSp delSp modSp new mod">
-        <pc:chgData name="Evgenia Andreou" userId="8e89e74f621e7047" providerId="LiveId" clId="{EF53017E-E624-4052-9F70-6403551E244D}" dt="2025-10-28T00:37:44.092" v="32974" actId="20577"/>
+        <pc:chgData name="Evgenia Andreou" userId="8e89e74f621e7047" providerId="LiveId" clId="{EF53017E-E624-4052-9F70-6403551E244D}" dt="2025-10-29T15:53:23.152" v="34393" actId="20577"/>
         <pc:sldMkLst>
           <pc:docMk/>
           <pc:sldMk cId="2946716891" sldId="277"/>
@@ -1194,7 +1068,7 @@
           </ac:spMkLst>
         </pc:spChg>
         <pc:spChg chg="mod">
-          <ac:chgData name="Evgenia Andreou" userId="8e89e74f621e7047" providerId="LiveId" clId="{EF53017E-E624-4052-9F70-6403551E244D}" dt="2025-10-28T00:37:19.747" v="32946" actId="6549"/>
+          <ac:chgData name="Evgenia Andreou" userId="8e89e74f621e7047" providerId="LiveId" clId="{EF53017E-E624-4052-9F70-6403551E244D}" dt="2025-10-29T14:48:37.088" v="33955" actId="113"/>
           <ac:spMkLst>
             <pc:docMk/>
             <pc:sldMk cId="2946716891" sldId="277"/>
@@ -1202,27 +1076,11 @@
           </ac:spMkLst>
         </pc:spChg>
         <pc:spChg chg="mod">
-          <ac:chgData name="Evgenia Andreou" userId="8e89e74f621e7047" providerId="LiveId" clId="{EF53017E-E624-4052-9F70-6403551E244D}" dt="2025-10-28T00:37:44.092" v="32974" actId="20577"/>
+          <ac:chgData name="Evgenia Andreou" userId="8e89e74f621e7047" providerId="LiveId" clId="{EF53017E-E624-4052-9F70-6403551E244D}" dt="2025-10-29T15:53:23.152" v="34393" actId="20577"/>
           <ac:spMkLst>
             <pc:docMk/>
             <pc:sldMk cId="2946716891" sldId="277"/>
             <ac:spMk id="4" creationId="{401DE421-F807-3BEB-AAE2-D3F1FCDFEE89}"/>
-          </ac:spMkLst>
-        </pc:spChg>
-        <pc:spChg chg="add del mod">
-          <ac:chgData name="Evgenia Andreou" userId="8e89e74f621e7047" providerId="LiveId" clId="{EF53017E-E624-4052-9F70-6403551E244D}" dt="2025-10-28T00:35:09.532" v="32874"/>
-          <ac:spMkLst>
-            <pc:docMk/>
-            <pc:sldMk cId="2946716891" sldId="277"/>
-            <ac:spMk id="5" creationId="{5F366FE4-96F8-6E1E-493C-17CAEA87D97F}"/>
-          </ac:spMkLst>
-        </pc:spChg>
-        <pc:spChg chg="add del">
-          <ac:chgData name="Evgenia Andreou" userId="8e89e74f621e7047" providerId="LiveId" clId="{EF53017E-E624-4052-9F70-6403551E244D}" dt="2025-10-28T00:35:12.006" v="32876" actId="22"/>
-          <ac:spMkLst>
-            <pc:docMk/>
-            <pc:sldMk cId="2946716891" sldId="277"/>
-            <ac:spMk id="7" creationId="{550098B6-970C-F3F0-28D0-75BD222ECE72}"/>
           </ac:spMkLst>
         </pc:spChg>
         <pc:spChg chg="add mod">
@@ -1243,7 +1101,7 @@
         </pc:spChg>
       </pc:sldChg>
       <pc:sldChg chg="addSp delSp modSp new mod">
-        <pc:chgData name="Evgenia Andreou" userId="8e89e74f621e7047" providerId="LiveId" clId="{EF53017E-E624-4052-9F70-6403551E244D}" dt="2025-10-28T02:02:46.423" v="33595" actId="255"/>
+        <pc:chgData name="Evgenia Andreou" userId="8e89e74f621e7047" providerId="LiveId" clId="{EF53017E-E624-4052-9F70-6403551E244D}" dt="2025-11-01T00:35:45.792" v="34933" actId="20577"/>
         <pc:sldMkLst>
           <pc:docMk/>
           <pc:sldMk cId="1725771169" sldId="278"/>
@@ -1257,7 +1115,7 @@
           </ac:spMkLst>
         </pc:spChg>
         <pc:spChg chg="mod">
-          <ac:chgData name="Evgenia Andreou" userId="8e89e74f621e7047" providerId="LiveId" clId="{EF53017E-E624-4052-9F70-6403551E244D}" dt="2025-10-28T02:02:46.423" v="33595" actId="255"/>
+          <ac:chgData name="Evgenia Andreou" userId="8e89e74f621e7047" providerId="LiveId" clId="{EF53017E-E624-4052-9F70-6403551E244D}" dt="2025-11-01T00:35:45.792" v="34933" actId="20577"/>
           <ac:spMkLst>
             <pc:docMk/>
             <pc:sldMk cId="1725771169" sldId="278"/>
@@ -1273,7 +1131,7 @@
           </ac:spMkLst>
         </pc:spChg>
         <pc:spChg chg="add mod">
-          <ac:chgData name="Evgenia Andreou" userId="8e89e74f621e7047" providerId="LiveId" clId="{EF53017E-E624-4052-9F70-6403551E244D}" dt="2025-10-28T00:48:40.558" v="33144" actId="20577"/>
+          <ac:chgData name="Evgenia Andreou" userId="8e89e74f621e7047" providerId="LiveId" clId="{EF53017E-E624-4052-9F70-6403551E244D}" dt="2025-10-29T15:49:12.207" v="34308" actId="1036"/>
           <ac:spMkLst>
             <pc:docMk/>
             <pc:sldMk cId="1725771169" sldId="278"/>
@@ -1319,22 +1177,6 @@
             <ac:picMk id="22" creationId="{6F175C6F-61CC-06A2-A4BC-6ECC39FBD98A}"/>
           </ac:picMkLst>
         </pc:picChg>
-        <pc:picChg chg="add del mod">
-          <ac:chgData name="Evgenia Andreou" userId="8e89e74f621e7047" providerId="LiveId" clId="{EF53017E-E624-4052-9F70-6403551E244D}" dt="2025-10-28T00:15:56.398" v="32335" actId="478"/>
-          <ac:picMkLst>
-            <pc:docMk/>
-            <pc:sldMk cId="1267936960" sldId="279"/>
-            <ac:picMk id="28" creationId="{6AAC3F08-54F2-62EA-DACA-DC6E55DC9F00}"/>
-          </ac:picMkLst>
-        </pc:picChg>
-        <pc:picChg chg="add del mod">
-          <ac:chgData name="Evgenia Andreou" userId="8e89e74f621e7047" providerId="LiveId" clId="{EF53017E-E624-4052-9F70-6403551E244D}" dt="2025-10-28T00:16:25.044" v="32343" actId="478"/>
-          <ac:picMkLst>
-            <pc:docMk/>
-            <pc:sldMk cId="1267936960" sldId="279"/>
-            <ac:picMk id="29" creationId="{D0986D5D-A04A-94E2-B442-4349224E9AF7}"/>
-          </ac:picMkLst>
-        </pc:picChg>
         <pc:picChg chg="add mod">
           <ac:chgData name="Evgenia Andreou" userId="8e89e74f621e7047" providerId="LiveId" clId="{EF53017E-E624-4052-9F70-6403551E244D}" dt="2025-10-28T00:23:17.499" v="32451" actId="1440"/>
           <ac:picMkLst>
@@ -1344,8 +1186,8 @@
           </ac:picMkLst>
         </pc:picChg>
       </pc:sldChg>
-      <pc:sldChg chg="addSp modSp new mod setBg modClrScheme chgLayout">
-        <pc:chgData name="Evgenia Andreou" userId="8e89e74f621e7047" providerId="LiveId" clId="{EF53017E-E624-4052-9F70-6403551E244D}" dt="2025-10-27T22:57:57.142" v="30649" actId="27636"/>
+      <pc:sldChg chg="addSp delSp modSp new mod setBg modClrScheme chgLayout">
+        <pc:chgData name="Evgenia Andreou" userId="8e89e74f621e7047" providerId="LiveId" clId="{EF53017E-E624-4052-9F70-6403551E244D}" dt="2025-10-29T16:00:55.708" v="34526" actId="21"/>
         <pc:sldMkLst>
           <pc:docMk/>
           <pc:sldMk cId="2646428108" sldId="280"/>
@@ -1359,27 +1201,11 @@
           </ac:spMkLst>
         </pc:spChg>
         <pc:spChg chg="add mod ord">
-          <ac:chgData name="Evgenia Andreou" userId="8e89e74f621e7047" providerId="LiveId" clId="{EF53017E-E624-4052-9F70-6403551E244D}" dt="2025-10-27T22:57:10.510" v="30628" actId="1076"/>
+          <ac:chgData name="Evgenia Andreou" userId="8e89e74f621e7047" providerId="LiveId" clId="{EF53017E-E624-4052-9F70-6403551E244D}" dt="2025-10-29T15:55:31.141" v="34438" actId="20577"/>
           <ac:spMkLst>
             <pc:docMk/>
             <pc:sldMk cId="2646428108" sldId="280"/>
             <ac:spMk id="3" creationId="{B0C37985-7345-9CF5-2D16-CDB3C376723F}"/>
-          </ac:spMkLst>
-        </pc:spChg>
-        <pc:spChg chg="add mod">
-          <ac:chgData name="Evgenia Andreou" userId="8e89e74f621e7047" providerId="LiveId" clId="{EF53017E-E624-4052-9F70-6403551E244D}" dt="2025-10-27T22:57:01.566" v="30627" actId="1076"/>
-          <ac:spMkLst>
-            <pc:docMk/>
-            <pc:sldMk cId="2646428108" sldId="280"/>
-            <ac:spMk id="4" creationId="{CDDFCFBD-9E04-ECFB-B1C3-F69CFF2F9ACF}"/>
-          </ac:spMkLst>
-        </pc:spChg>
-        <pc:spChg chg="add mod">
-          <ac:chgData name="Evgenia Andreou" userId="8e89e74f621e7047" providerId="LiveId" clId="{EF53017E-E624-4052-9F70-6403551E244D}" dt="2025-10-27T22:57:57.141" v="30648" actId="14100"/>
-          <ac:spMkLst>
-            <pc:docMk/>
-            <pc:sldMk cId="2646428108" sldId="280"/>
-            <ac:spMk id="5" creationId="{CD9BB61E-EA88-626A-DB6A-1C88B5382EEA}"/>
           </ac:spMkLst>
         </pc:spChg>
         <pc:spChg chg="add mod">
@@ -1400,7 +1226,7 @@
         </pc:spChg>
       </pc:sldChg>
       <pc:sldChg chg="addSp delSp modSp new mod setBg">
-        <pc:chgData name="Evgenia Andreou" userId="8e89e74f621e7047" providerId="LiveId" clId="{EF53017E-E624-4052-9F70-6403551E244D}" dt="2025-10-28T01:19:26.643" v="33374" actId="20577"/>
+        <pc:chgData name="Evgenia Andreou" userId="8e89e74f621e7047" providerId="LiveId" clId="{EF53017E-E624-4052-9F70-6403551E244D}" dt="2025-10-29T15:57:22.376" v="34489" actId="20577"/>
         <pc:sldMkLst>
           <pc:docMk/>
           <pc:sldMk cId="2935283230" sldId="281"/>
@@ -1419,14 +1245,6 @@
             <pc:docMk/>
             <pc:sldMk cId="2935283230" sldId="281"/>
             <ac:spMk id="3" creationId="{9770C937-D67E-0A40-7F75-05BDEA92620B}"/>
-          </ac:spMkLst>
-        </pc:spChg>
-        <pc:spChg chg="add mod">
-          <ac:chgData name="Evgenia Andreou" userId="8e89e74f621e7047" providerId="LiveId" clId="{EF53017E-E624-4052-9F70-6403551E244D}" dt="2025-10-27T21:54:31.995" v="29071"/>
-          <ac:spMkLst>
-            <pc:docMk/>
-            <pc:sldMk cId="2935283230" sldId="281"/>
-            <ac:spMk id="4" creationId="{4AF33C83-AA3B-05A3-31E0-EE04F88C5A58}"/>
           </ac:spMkLst>
         </pc:spChg>
         <pc:spChg chg="add mod">
@@ -1454,7 +1272,7 @@
           </ac:spMkLst>
         </pc:spChg>
         <pc:spChg chg="add mod">
-          <ac:chgData name="Evgenia Andreou" userId="8e89e74f621e7047" providerId="LiveId" clId="{EF53017E-E624-4052-9F70-6403551E244D}" dt="2025-10-28T01:19:26.643" v="33374" actId="20577"/>
+          <ac:chgData name="Evgenia Andreou" userId="8e89e74f621e7047" providerId="LiveId" clId="{EF53017E-E624-4052-9F70-6403551E244D}" dt="2025-10-29T15:57:22.376" v="34489" actId="20577"/>
           <ac:spMkLst>
             <pc:docMk/>
             <pc:sldMk cId="2935283230" sldId="281"/>
@@ -1463,7 +1281,7 @@
         </pc:spChg>
       </pc:sldChg>
       <pc:sldChg chg="addSp delSp modSp new mod ord">
-        <pc:chgData name="Evgenia Andreou" userId="8e89e74f621e7047" providerId="LiveId" clId="{EF53017E-E624-4052-9F70-6403551E244D}" dt="2025-10-28T01:51:02.384" v="33549" actId="27636"/>
+        <pc:chgData name="Evgenia Andreou" userId="8e89e74f621e7047" providerId="LiveId" clId="{EF53017E-E624-4052-9F70-6403551E244D}" dt="2025-10-31T15:10:00.147" v="34840" actId="20577"/>
         <pc:sldMkLst>
           <pc:docMk/>
           <pc:sldMk cId="1583996442" sldId="284"/>
@@ -1477,7 +1295,7 @@
           </ac:spMkLst>
         </pc:spChg>
         <pc:spChg chg="add mod">
-          <ac:chgData name="Evgenia Andreou" userId="8e89e74f621e7047" providerId="LiveId" clId="{EF53017E-E624-4052-9F70-6403551E244D}" dt="2025-10-28T01:51:02.384" v="33549" actId="27636"/>
+          <ac:chgData name="Evgenia Andreou" userId="8e89e74f621e7047" providerId="LiveId" clId="{EF53017E-E624-4052-9F70-6403551E244D}" dt="2025-10-31T15:09:41.068" v="34838" actId="6549"/>
           <ac:spMkLst>
             <pc:docMk/>
             <pc:sldMk cId="1583996442" sldId="284"/>
@@ -1485,7 +1303,7 @@
           </ac:spMkLst>
         </pc:spChg>
         <pc:spChg chg="add mod">
-          <ac:chgData name="Evgenia Andreou" userId="8e89e74f621e7047" providerId="LiveId" clId="{EF53017E-E624-4052-9F70-6403551E244D}" dt="2025-10-28T01:51:02.381" v="33548" actId="27636"/>
+          <ac:chgData name="Evgenia Andreou" userId="8e89e74f621e7047" providerId="LiveId" clId="{EF53017E-E624-4052-9F70-6403551E244D}" dt="2025-10-31T15:10:00.147" v="34840" actId="20577"/>
           <ac:spMkLst>
             <pc:docMk/>
             <pc:sldMk cId="1583996442" sldId="284"/>
@@ -1494,13 +1312,13 @@
         </pc:spChg>
       </pc:sldChg>
       <pc:sldChg chg="delSp modSp new mod">
-        <pc:chgData name="Evgenia Andreou" userId="8e89e74f621e7047" providerId="LiveId" clId="{EF53017E-E624-4052-9F70-6403551E244D}" dt="2025-10-28T00:20:46.356" v="32418" actId="1076"/>
+        <pc:chgData name="Evgenia Andreou" userId="8e89e74f621e7047" providerId="LiveId" clId="{EF53017E-E624-4052-9F70-6403551E244D}" dt="2025-10-31T15:16:52.617" v="34868" actId="1582"/>
         <pc:sldMkLst>
           <pc:docMk/>
           <pc:sldMk cId="1947621257" sldId="285"/>
         </pc:sldMkLst>
         <pc:spChg chg="mod">
-          <ac:chgData name="Evgenia Andreou" userId="8e89e74f621e7047" providerId="LiveId" clId="{EF53017E-E624-4052-9F70-6403551E244D}" dt="2025-10-28T00:20:46.356" v="32418" actId="1076"/>
+          <ac:chgData name="Evgenia Andreou" userId="8e89e74f621e7047" providerId="LiveId" clId="{EF53017E-E624-4052-9F70-6403551E244D}" dt="2025-10-31T15:16:52.617" v="34868" actId="1582"/>
           <ac:spMkLst>
             <pc:docMk/>
             <pc:sldMk cId="1947621257" sldId="285"/>
@@ -1531,85 +1349,14 @@
           </ac:spMkLst>
         </pc:spChg>
       </pc:sldChg>
-      <pc:sldChg chg="addSp delSp modSp new del mod ord setBg">
-        <pc:chgData name="Evgenia Andreou" userId="8e89e74f621e7047" providerId="LiveId" clId="{EF53017E-E624-4052-9F70-6403551E244D}" dt="2025-10-27T23:33:56.386" v="31282" actId="2696"/>
-        <pc:sldMkLst>
-          <pc:docMk/>
-          <pc:sldMk cId="3830437061" sldId="289"/>
-        </pc:sldMkLst>
-        <pc:spChg chg="mod">
-          <ac:chgData name="Evgenia Andreou" userId="8e89e74f621e7047" providerId="LiveId" clId="{EF53017E-E624-4052-9F70-6403551E244D}" dt="2025-10-27T23:18:10.790" v="30940" actId="692"/>
-          <ac:spMkLst>
-            <pc:docMk/>
-            <pc:sldMk cId="3830437061" sldId="289"/>
-            <ac:spMk id="2" creationId="{25AFCAEF-3E01-ECE0-5645-11458B460E0B}"/>
-          </ac:spMkLst>
-        </pc:spChg>
-        <pc:spChg chg="del mod">
-          <ac:chgData name="Evgenia Andreou" userId="8e89e74f621e7047" providerId="LiveId" clId="{EF53017E-E624-4052-9F70-6403551E244D}" dt="2025-10-27T23:33:29.926" v="31278" actId="478"/>
-          <ac:spMkLst>
-            <pc:docMk/>
-            <pc:sldMk cId="3830437061" sldId="289"/>
-            <ac:spMk id="4" creationId="{56CF2FDF-502C-5D01-C3E4-63B727FB7DD5}"/>
-          </ac:spMkLst>
-        </pc:spChg>
-        <pc:spChg chg="add del mod">
-          <ac:chgData name="Evgenia Andreou" userId="8e89e74f621e7047" providerId="LiveId" clId="{EF53017E-E624-4052-9F70-6403551E244D}" dt="2025-10-27T23:33:32.235" v="31279" actId="478"/>
-          <ac:spMkLst>
-            <pc:docMk/>
-            <pc:sldMk cId="3830437061" sldId="289"/>
-            <ac:spMk id="5" creationId="{41D1185D-EE31-27AA-E67B-68027FAD5218}"/>
-          </ac:spMkLst>
-        </pc:spChg>
-        <pc:picChg chg="add mod ord">
-          <ac:chgData name="Evgenia Andreou" userId="8e89e74f621e7047" providerId="LiveId" clId="{EF53017E-E624-4052-9F70-6403551E244D}" dt="2025-10-27T23:33:50.401" v="31281" actId="14100"/>
-          <ac:picMkLst>
-            <pc:docMk/>
-            <pc:sldMk cId="3830437061" sldId="289"/>
-            <ac:picMk id="6" creationId="{E8F25B79-77F5-B9FD-F3BD-ABC1CCD2EDBE}"/>
-          </ac:picMkLst>
-        </pc:picChg>
-        <pc:picChg chg="add mod">
-          <ac:chgData name="Evgenia Andreou" userId="8e89e74f621e7047" providerId="LiveId" clId="{EF53017E-E624-4052-9F70-6403551E244D}" dt="2025-10-27T23:33:50.401" v="31281" actId="14100"/>
-          <ac:picMkLst>
-            <pc:docMk/>
-            <pc:sldMk cId="3830437061" sldId="289"/>
-            <ac:picMk id="8" creationId="{D3F433D3-5CFA-6940-7A2C-756A58B933D6}"/>
-          </ac:picMkLst>
-        </pc:picChg>
-        <pc:picChg chg="add mod">
-          <ac:chgData name="Evgenia Andreou" userId="8e89e74f621e7047" providerId="LiveId" clId="{EF53017E-E624-4052-9F70-6403551E244D}" dt="2025-10-27T23:33:50.401" v="31281" actId="14100"/>
-          <ac:picMkLst>
-            <pc:docMk/>
-            <pc:sldMk cId="3830437061" sldId="289"/>
-            <ac:picMk id="10" creationId="{0A77FD6E-1028-9A63-0F5F-FAB76B243B2C}"/>
-          </ac:picMkLst>
-        </pc:picChg>
-        <pc:picChg chg="add mod">
-          <ac:chgData name="Evgenia Andreou" userId="8e89e74f621e7047" providerId="LiveId" clId="{EF53017E-E624-4052-9F70-6403551E244D}" dt="2025-10-27T23:33:50.401" v="31281" actId="14100"/>
-          <ac:picMkLst>
-            <pc:docMk/>
-            <pc:sldMk cId="3830437061" sldId="289"/>
-            <ac:picMk id="11" creationId="{93469FEA-F210-45B3-92A9-EEAE481DBC6C}"/>
-          </ac:picMkLst>
-        </pc:picChg>
-        <pc:picChg chg="add mod">
-          <ac:chgData name="Evgenia Andreou" userId="8e89e74f621e7047" providerId="LiveId" clId="{EF53017E-E624-4052-9F70-6403551E244D}" dt="2025-10-27T23:33:50.401" v="31281" actId="14100"/>
-          <ac:picMkLst>
-            <pc:docMk/>
-            <pc:sldMk cId="3830437061" sldId="289"/>
-            <ac:picMk id="12" creationId="{15F988DF-C682-B2A4-1312-FDC9AADA5309}"/>
-          </ac:picMkLst>
-        </pc:picChg>
-      </pc:sldChg>
       <pc:sldChg chg="addSp delSp modSp new mod">
-        <pc:chgData name="Evgenia Andreou" userId="8e89e74f621e7047" providerId="LiveId" clId="{EF53017E-E624-4052-9F70-6403551E244D}" dt="2025-10-28T01:38:33.975" v="33537" actId="14100"/>
+        <pc:chgData name="Evgenia Andreou" userId="8e89e74f621e7047" providerId="LiveId" clId="{EF53017E-E624-4052-9F70-6403551E244D}" dt="2025-10-31T15:05:37.674" v="34793" actId="1076"/>
         <pc:sldMkLst>
           <pc:docMk/>
           <pc:sldMk cId="1568349809" sldId="290"/>
         </pc:sldMkLst>
         <pc:spChg chg="mod">
-          <ac:chgData name="Evgenia Andreou" userId="8e89e74f621e7047" providerId="LiveId" clId="{EF53017E-E624-4052-9F70-6403551E244D}" dt="2025-10-27T23:54:25.560" v="31740" actId="692"/>
+          <ac:chgData name="Evgenia Andreou" userId="8e89e74f621e7047" providerId="LiveId" clId="{EF53017E-E624-4052-9F70-6403551E244D}" dt="2025-10-31T15:05:37.674" v="34793" actId="1076"/>
           <ac:spMkLst>
             <pc:docMk/>
             <pc:sldMk cId="1568349809" sldId="290"/>
@@ -1617,7 +1364,7 @@
           </ac:spMkLst>
         </pc:spChg>
         <pc:spChg chg="mod">
-          <ac:chgData name="Evgenia Andreou" userId="8e89e74f621e7047" providerId="LiveId" clId="{EF53017E-E624-4052-9F70-6403551E244D}" dt="2025-10-28T01:36:16.166" v="33519" actId="20577"/>
+          <ac:chgData name="Evgenia Andreou" userId="8e89e74f621e7047" providerId="LiveId" clId="{EF53017E-E624-4052-9F70-6403551E244D}" dt="2025-10-31T15:05:06.333" v="34780" actId="1076"/>
           <ac:spMkLst>
             <pc:docMk/>
             <pc:sldMk cId="1568349809" sldId="290"/>
@@ -1625,27 +1372,42 @@
           </ac:spMkLst>
         </pc:spChg>
         <pc:spChg chg="add mod">
-          <ac:chgData name="Evgenia Andreou" userId="8e89e74f621e7047" providerId="LiveId" clId="{EF53017E-E624-4052-9F70-6403551E244D}" dt="2025-10-28T00:05:01.716" v="32185" actId="20577"/>
+          <ac:chgData name="Evgenia Andreou" userId="8e89e74f621e7047" providerId="LiveId" clId="{EF53017E-E624-4052-9F70-6403551E244D}" dt="2025-10-31T15:05:09.021" v="34781" actId="1076"/>
           <ac:spMkLst>
             <pc:docMk/>
             <pc:sldMk cId="1568349809" sldId="290"/>
             <ac:spMk id="4" creationId="{BCDF1454-93C9-84FC-C387-A62EDE27D4BC}"/>
           </ac:spMkLst>
         </pc:spChg>
+      </pc:sldChg>
+      <pc:sldChg chg="addSp delSp modSp new mod">
+        <pc:chgData name="Evgenia Andreou" userId="8e89e74f621e7047" providerId="LiveId" clId="{EF53017E-E624-4052-9F70-6403551E244D}" dt="2025-10-31T15:08:58.378" v="34827" actId="1440"/>
+        <pc:sldMkLst>
+          <pc:docMk/>
+          <pc:sldMk cId="3019405516" sldId="291"/>
+        </pc:sldMkLst>
         <pc:spChg chg="add mod">
-          <ac:chgData name="Evgenia Andreou" userId="8e89e74f621e7047" providerId="LiveId" clId="{EF53017E-E624-4052-9F70-6403551E244D}" dt="2025-10-28T00:02:03.226" v="31967" actId="1076"/>
+          <ac:chgData name="Evgenia Andreou" userId="8e89e74f621e7047" providerId="LiveId" clId="{EF53017E-E624-4052-9F70-6403551E244D}" dt="2025-10-31T15:08:42.708" v="34826" actId="255"/>
           <ac:spMkLst>
             <pc:docMk/>
-            <pc:sldMk cId="1568349809" sldId="290"/>
+            <pc:sldMk cId="3019405516" sldId="291"/>
             <ac:spMk id="5" creationId="{C718A182-FD34-0FCF-F841-2D21F0DFE300}"/>
           </ac:spMkLst>
         </pc:spChg>
-        <pc:picChg chg="add mod modCrop">
-          <ac:chgData name="Evgenia Andreou" userId="8e89e74f621e7047" providerId="LiveId" clId="{EF53017E-E624-4052-9F70-6403551E244D}" dt="2025-10-28T01:38:33.975" v="33537" actId="14100"/>
+        <pc:spChg chg="add mod">
+          <ac:chgData name="Evgenia Andreou" userId="8e89e74f621e7047" providerId="LiveId" clId="{EF53017E-E624-4052-9F70-6403551E244D}" dt="2025-10-31T15:05:27.440" v="34792" actId="1076"/>
+          <ac:spMkLst>
+            <pc:docMk/>
+            <pc:sldMk cId="3019405516" sldId="291"/>
+            <ac:spMk id="7" creationId="{259B178F-70A2-E2FE-5F28-1D58CF945F1E}"/>
+          </ac:spMkLst>
+        </pc:spChg>
+        <pc:picChg chg="add mod">
+          <ac:chgData name="Evgenia Andreou" userId="8e89e74f621e7047" providerId="LiveId" clId="{EF53017E-E624-4052-9F70-6403551E244D}" dt="2025-10-31T15:08:58.378" v="34827" actId="1440"/>
           <ac:picMkLst>
             <pc:docMk/>
-            <pc:sldMk cId="1568349809" sldId="290"/>
-            <ac:picMk id="6" creationId="{F4471C82-ADA5-C4D3-8E86-45E8013E4C50}"/>
+            <pc:sldMk cId="3019405516" sldId="291"/>
+            <ac:picMk id="11" creationId="{DC1F51DB-A1C3-E7AE-73E7-24425577EC79}"/>
           </ac:picMkLst>
         </pc:picChg>
       </pc:sldChg>
@@ -3257,90 +3019,6 @@
         </a:p>
       </dgm:t>
     </dgm:pt>
-    <dgm:pt modelId="{E03138E3-52EE-4CD0-8E3C-F0F8C0C28D99}">
-      <dgm:prSet custT="1"/>
-      <dgm:spPr>
-        <a:solidFill>
-          <a:schemeClr val="accent5">
-            <a:lumMod val="50000"/>
-          </a:schemeClr>
-        </a:solidFill>
-      </dgm:spPr>
-      <dgm:t>
-        <a:bodyPr/>
-        <a:lstStyle/>
-        <a:p>
-          <a:r>
-            <a:rPr lang="en-US" sz="1800" dirty="0"/>
-            <a:t>Data Sources</a:t>
-          </a:r>
-          <a:endParaRPr lang="en-GB" sz="1800" dirty="0"/>
-        </a:p>
-      </dgm:t>
-    </dgm:pt>
-    <dgm:pt modelId="{9B4391B9-3A32-470F-9B43-6CD3A86645B1}" type="parTrans" cxnId="{A951CBC3-2547-4FE9-B31D-2616C6EC2D7D}">
-      <dgm:prSet/>
-      <dgm:spPr/>
-      <dgm:t>
-        <a:bodyPr/>
-        <a:lstStyle/>
-        <a:p>
-          <a:endParaRPr lang="en-GB"/>
-        </a:p>
-      </dgm:t>
-    </dgm:pt>
-    <dgm:pt modelId="{554A85A0-E1F5-4872-A1E2-8F392D73FAC7}" type="sibTrans" cxnId="{A951CBC3-2547-4FE9-B31D-2616C6EC2D7D}">
-      <dgm:prSet/>
-      <dgm:spPr/>
-      <dgm:t>
-        <a:bodyPr/>
-        <a:lstStyle/>
-        <a:p>
-          <a:endParaRPr lang="en-GB"/>
-        </a:p>
-      </dgm:t>
-    </dgm:pt>
-    <dgm:pt modelId="{70B035EA-BDBD-4B4F-9C51-74DEC3B46254}">
-      <dgm:prSet custT="1"/>
-      <dgm:spPr>
-        <a:ln>
-          <a:noFill/>
-        </a:ln>
-      </dgm:spPr>
-      <dgm:t>
-        <a:bodyPr/>
-        <a:lstStyle/>
-        <a:p>
-          <a:r>
-            <a:rPr lang="en-US" sz="1500" dirty="0"/>
-            <a:t>AACT bd | CSV Clinical Trials.gov</a:t>
-          </a:r>
-          <a:endParaRPr lang="en-GB" sz="1500" dirty="0"/>
-        </a:p>
-      </dgm:t>
-    </dgm:pt>
-    <dgm:pt modelId="{49B493E8-4FBC-43B0-8670-7848ED053197}" type="parTrans" cxnId="{184FB2BD-EA0B-4F88-B8DC-81E26C56F6C3}">
-      <dgm:prSet/>
-      <dgm:spPr/>
-      <dgm:t>
-        <a:bodyPr/>
-        <a:lstStyle/>
-        <a:p>
-          <a:endParaRPr lang="en-GB"/>
-        </a:p>
-      </dgm:t>
-    </dgm:pt>
-    <dgm:pt modelId="{265D8544-366D-46EF-B8E6-7D48848F0F7A}" type="sibTrans" cxnId="{184FB2BD-EA0B-4F88-B8DC-81E26C56F6C3}">
-      <dgm:prSet/>
-      <dgm:spPr/>
-      <dgm:t>
-        <a:bodyPr/>
-        <a:lstStyle/>
-        <a:p>
-          <a:endParaRPr lang="en-GB"/>
-        </a:p>
-      </dgm:t>
-    </dgm:pt>
     <dgm:pt modelId="{2F2A67E8-ACD9-4C73-881C-0F727D32AE95}">
       <dgm:prSet custT="1"/>
       <dgm:spPr>
@@ -3396,14 +3074,19 @@
         <a:p>
           <a:r>
             <a:rPr lang="en-GB" sz="1500" dirty="0"/>
-            <a:t>Missing values : </a:t>
+            <a:t>Missing: </a:t>
           </a:r>
-          <a:br>
-            <a:rPr lang="en-GB" sz="1500" dirty="0"/>
-          </a:br>
           <a:r>
             <a:rPr lang="en-US" sz="1500" dirty="0"/>
-            <a:t>CSV+bd, Reg. Expr. Text Mining, Merge levels, level creation (e.g., other), Drop</a:t>
+            <a:t>csv+bd, RegEx, Merge/Create levels (e.g</a:t>
+          </a:r>
+          <a:r>
+            <a:rPr lang="en-US" sz="1500"/>
+            <a:t>., Other</a:t>
+          </a:r>
+          <a:r>
+            <a:rPr lang="en-US" sz="1500" dirty="0"/>
+            <a:t>), Drop</a:t>
           </a:r>
           <a:endParaRPr lang="en-GB" sz="1500" dirty="0"/>
         </a:p>
@@ -3587,50 +3270,6 @@
       </dgm:t>
     </dgm:pt>
     <dgm:pt modelId="{062818EF-31D5-4693-AAFD-92006D82850B}" type="sibTrans" cxnId="{E93DC782-50DD-4B43-A967-4FD2741569FB}">
-      <dgm:prSet/>
-      <dgm:spPr/>
-      <dgm:t>
-        <a:bodyPr/>
-        <a:lstStyle/>
-        <a:p>
-          <a:endParaRPr lang="en-GB"/>
-        </a:p>
-      </dgm:t>
-    </dgm:pt>
-    <dgm:pt modelId="{5BAE0173-1193-4CBE-A1BB-134D3B5341F6}">
-      <dgm:prSet custT="1"/>
-      <dgm:spPr>
-        <a:ln>
-          <a:noFill/>
-        </a:ln>
-      </dgm:spPr>
-      <dgm:t>
-        <a:bodyPr/>
-        <a:lstStyle/>
-        <a:p>
-          <a:pPr algn="ctr">
-            <a:buNone/>
-          </a:pPr>
-          <a:r>
-            <a:rPr lang="en-US" sz="1500" b="1" dirty="0"/>
-            <a:t>Train Set</a:t>
-          </a:r>
-          <a:endParaRPr lang="en-GB" sz="1500" b="1" dirty="0"/>
-        </a:p>
-      </dgm:t>
-    </dgm:pt>
-    <dgm:pt modelId="{C4B21ADE-2B93-45FF-8316-D7C57A7A4BBA}" type="parTrans" cxnId="{A9931D6E-BF0B-4053-9E6A-A687BA69F3C2}">
-      <dgm:prSet/>
-      <dgm:spPr/>
-      <dgm:t>
-        <a:bodyPr/>
-        <a:lstStyle/>
-        <a:p>
-          <a:endParaRPr lang="en-GB"/>
-        </a:p>
-      </dgm:t>
-    </dgm:pt>
-    <dgm:pt modelId="{B9F20E84-B838-470F-A2DF-02AD59B397A9}" type="sibTrans" cxnId="{A9931D6E-BF0B-4053-9E6A-A687BA69F3C2}">
       <dgm:prSet/>
       <dgm:spPr/>
       <dgm:t>
@@ -3837,47 +3476,6 @@
         </a:p>
       </dgm:t>
     </dgm:pt>
-    <dgm:pt modelId="{2F7A7128-86C4-4AA6-BDD2-C0F06335F019}">
-      <dgm:prSet custT="1"/>
-      <dgm:spPr>
-        <a:ln>
-          <a:noFill/>
-        </a:ln>
-      </dgm:spPr>
-      <dgm:t>
-        <a:bodyPr/>
-        <a:lstStyle/>
-        <a:p>
-          <a:pPr algn="l"/>
-          <a:r>
-            <a:rPr lang="en-GB" sz="1500" dirty="0"/>
-            <a:t>Outliers (not excluded)</a:t>
-          </a:r>
-        </a:p>
-      </dgm:t>
-    </dgm:pt>
-    <dgm:pt modelId="{D99736A6-12EE-4BAE-87C7-CBC8D7CA2323}" type="parTrans" cxnId="{757E0FFC-7697-480C-AAD2-988F62C08C3D}">
-      <dgm:prSet/>
-      <dgm:spPr/>
-      <dgm:t>
-        <a:bodyPr/>
-        <a:lstStyle/>
-        <a:p>
-          <a:endParaRPr lang="en-GB"/>
-        </a:p>
-      </dgm:t>
-    </dgm:pt>
-    <dgm:pt modelId="{80D44254-ED36-4ABC-9111-50A9B5934201}" type="sibTrans" cxnId="{757E0FFC-7697-480C-AAD2-988F62C08C3D}">
-      <dgm:prSet/>
-      <dgm:spPr/>
-      <dgm:t>
-        <a:bodyPr/>
-        <a:lstStyle/>
-        <a:p>
-          <a:endParaRPr lang="en-GB"/>
-        </a:p>
-      </dgm:t>
-    </dgm:pt>
     <dgm:pt modelId="{F6495C03-6AD7-4361-A689-0928FC2AEC71}">
       <dgm:prSet custT="1"/>
       <dgm:spPr>
@@ -4019,25 +3617,17 @@
           </a:pPr>
           <a:r>
             <a:rPr lang="en-US" sz="1500" dirty="0"/>
-            <a:t>Feature Selection Exploratory </a:t>
+            <a:t>Feature Selection Exploratory Analysis </a:t>
           </a:r>
           <a:r>
-            <a:rPr lang="en-US" sz="1500"/>
-            <a:t>Analysis </a:t>
-          </a:r>
-          <a:r>
-            <a:rPr lang="en-US" sz="1500">
+            <a:rPr lang="en-US" sz="1500" dirty="0">
               <a:sym typeface="Wingdings" panose="05000000000000000000" pitchFamily="2" charset="2"/>
             </a:rPr>
             <a:t> </a:t>
           </a:r>
           <a:r>
-            <a:rPr lang="en-US" sz="1500"/>
-            <a:t>Train </a:t>
-          </a:r>
-          <a:r>
             <a:rPr lang="en-US" sz="1500" dirty="0"/>
-            <a:t>set </a:t>
+            <a:t>Train set </a:t>
           </a:r>
           <a:r>
             <a:rPr lang="en-US" sz="1500" dirty="0">
@@ -4184,10 +3774,106 @@
     <dgm:pt modelId="{2D013C74-74E5-4DFB-B92E-91C1BB182B2C}" type="parTrans" cxnId="{B542F609-81FD-46D5-89CF-E3A1534847AC}">
       <dgm:prSet/>
       <dgm:spPr/>
+      <dgm:t>
+        <a:bodyPr/>
+        <a:lstStyle/>
+        <a:p>
+          <a:endParaRPr lang="en-GB"/>
+        </a:p>
+      </dgm:t>
     </dgm:pt>
     <dgm:pt modelId="{102EBBBE-72A9-474B-A5F6-DBC6ED957DEC}" type="sibTrans" cxnId="{B542F609-81FD-46D5-89CF-E3A1534847AC}">
       <dgm:prSet/>
       <dgm:spPr/>
+      <dgm:t>
+        <a:bodyPr/>
+        <a:lstStyle/>
+        <a:p>
+          <a:endParaRPr lang="en-GB"/>
+        </a:p>
+      </dgm:t>
+    </dgm:pt>
+    <dgm:pt modelId="{2F7A7128-86C4-4AA6-BDD2-C0F06335F019}">
+      <dgm:prSet custT="1"/>
+      <dgm:spPr>
+        <a:ln>
+          <a:noFill/>
+        </a:ln>
+      </dgm:spPr>
+      <dgm:t>
+        <a:bodyPr/>
+        <a:lstStyle/>
+        <a:p>
+          <a:pPr algn="l"/>
+          <a:r>
+            <a:rPr lang="en-GB" sz="1500" dirty="0"/>
+            <a:t>Outliers</a:t>
+          </a:r>
+        </a:p>
+      </dgm:t>
+    </dgm:pt>
+    <dgm:pt modelId="{D99736A6-12EE-4BAE-87C7-CBC8D7CA2323}" type="parTrans" cxnId="{C00F8421-F747-485C-B1B5-20EB97E9EFA4}">
+      <dgm:prSet/>
+      <dgm:spPr/>
+      <dgm:t>
+        <a:bodyPr/>
+        <a:lstStyle/>
+        <a:p>
+          <a:endParaRPr lang="en-GB"/>
+        </a:p>
+      </dgm:t>
+    </dgm:pt>
+    <dgm:pt modelId="{80D44254-ED36-4ABC-9111-50A9B5934201}" type="sibTrans" cxnId="{C00F8421-F747-485C-B1B5-20EB97E9EFA4}">
+      <dgm:prSet/>
+      <dgm:spPr/>
+      <dgm:t>
+        <a:bodyPr/>
+        <a:lstStyle/>
+        <a:p>
+          <a:endParaRPr lang="en-GB"/>
+        </a:p>
+      </dgm:t>
+    </dgm:pt>
+    <dgm:pt modelId="{41BFD59F-BCE8-4528-89E9-3A56209A83CF}">
+      <dgm:prSet custT="1"/>
+      <dgm:spPr>
+        <a:ln>
+          <a:noFill/>
+        </a:ln>
+      </dgm:spPr>
+      <dgm:t>
+        <a:bodyPr/>
+        <a:lstStyle/>
+        <a:p>
+          <a:r>
+            <a:rPr lang="en-US" sz="1500" dirty="0"/>
+            <a:t>MICE</a:t>
+          </a:r>
+          <a:endParaRPr lang="en-GB" sz="1500" dirty="0"/>
+        </a:p>
+      </dgm:t>
+    </dgm:pt>
+    <dgm:pt modelId="{8F617046-C929-4038-9DBA-EEA6F63BC264}" type="parTrans" cxnId="{94E13D95-EABA-4C09-B8F0-F87DC066E057}">
+      <dgm:prSet/>
+      <dgm:spPr/>
+      <dgm:t>
+        <a:bodyPr/>
+        <a:lstStyle/>
+        <a:p>
+          <a:endParaRPr lang="en-GB"/>
+        </a:p>
+      </dgm:t>
+    </dgm:pt>
+    <dgm:pt modelId="{07400CBA-8D5C-4660-AD31-3C2719B11C77}" type="sibTrans" cxnId="{94E13D95-EABA-4C09-B8F0-F87DC066E057}">
+      <dgm:prSet/>
+      <dgm:spPr/>
+      <dgm:t>
+        <a:bodyPr/>
+        <a:lstStyle/>
+        <a:p>
+          <a:endParaRPr lang="en-GB"/>
+        </a:p>
+      </dgm:t>
     </dgm:pt>
     <dgm:pt modelId="{8C50726C-E90C-4FFA-B6A0-2ED37CF63F64}" type="pres">
       <dgm:prSet presAssocID="{F0F13D87-64B0-41AD-8624-57471FE85796}" presName="Name0" presStyleCnt="0">
@@ -4199,37 +3885,12 @@
       </dgm:prSet>
       <dgm:spPr/>
     </dgm:pt>
-    <dgm:pt modelId="{CFBECFF3-9CDE-4645-A2D4-716BE8A1134D}" type="pres">
-      <dgm:prSet presAssocID="{E03138E3-52EE-4CD0-8E3C-F0F8C0C28D99}" presName="linNode" presStyleCnt="0"/>
-      <dgm:spPr/>
-    </dgm:pt>
-    <dgm:pt modelId="{90CDA8DC-6CB2-49A7-A18C-F0D302BDC675}" type="pres">
-      <dgm:prSet presAssocID="{E03138E3-52EE-4CD0-8E3C-F0F8C0C28D99}" presName="parentText" presStyleLbl="node1" presStyleIdx="0" presStyleCnt="3">
-        <dgm:presLayoutVars>
-          <dgm:chMax val="1"/>
-          <dgm:bulletEnabled val="1"/>
-        </dgm:presLayoutVars>
-      </dgm:prSet>
-      <dgm:spPr/>
-    </dgm:pt>
-    <dgm:pt modelId="{C2B29FA8-9630-4575-8343-B620FEB2808E}" type="pres">
-      <dgm:prSet presAssocID="{E03138E3-52EE-4CD0-8E3C-F0F8C0C28D99}" presName="descendantText" presStyleLbl="alignAccFollowNode1" presStyleIdx="0" presStyleCnt="3" custScaleX="139293" custScaleY="96773">
-        <dgm:presLayoutVars>
-          <dgm:bulletEnabled val="1"/>
-        </dgm:presLayoutVars>
-      </dgm:prSet>
-      <dgm:spPr/>
-    </dgm:pt>
-    <dgm:pt modelId="{75662B48-2F8F-4342-873D-1832B8C6C1A0}" type="pres">
-      <dgm:prSet presAssocID="{554A85A0-E1F5-4872-A1E2-8F392D73FAC7}" presName="sp" presStyleCnt="0"/>
-      <dgm:spPr/>
-    </dgm:pt>
     <dgm:pt modelId="{796ABD26-0390-4B39-A62D-E35ED7901557}" type="pres">
       <dgm:prSet presAssocID="{2F2A67E8-ACD9-4C73-881C-0F727D32AE95}" presName="linNode" presStyleCnt="0"/>
       <dgm:spPr/>
     </dgm:pt>
     <dgm:pt modelId="{20EFAA17-3592-4F78-AEAE-2CD118F957A5}" type="pres">
-      <dgm:prSet presAssocID="{2F2A67E8-ACD9-4C73-881C-0F727D32AE95}" presName="parentText" presStyleLbl="node1" presStyleIdx="1" presStyleCnt="3" custScaleY="248226">
+      <dgm:prSet presAssocID="{2F2A67E8-ACD9-4C73-881C-0F727D32AE95}" presName="parentText" presStyleLbl="node1" presStyleIdx="0" presStyleCnt="2" custScaleY="248226">
         <dgm:presLayoutVars>
           <dgm:chMax val="1"/>
           <dgm:bulletEnabled val="1"/>
@@ -4238,7 +3899,7 @@
       <dgm:spPr/>
     </dgm:pt>
     <dgm:pt modelId="{EFC1B403-9E6E-4411-9B69-79A1584C7937}" type="pres">
-      <dgm:prSet presAssocID="{2F2A67E8-ACD9-4C73-881C-0F727D32AE95}" presName="descendantText" presStyleLbl="alignAccFollowNode1" presStyleIdx="1" presStyleCnt="3" custScaleX="139293" custScaleY="315431">
+      <dgm:prSet presAssocID="{2F2A67E8-ACD9-4C73-881C-0F727D32AE95}" presName="descendantText" presStyleLbl="alignAccFollowNode1" presStyleIdx="0" presStyleCnt="2" custScaleX="139293" custScaleY="315431">
         <dgm:presLayoutVars>
           <dgm:bulletEnabled val="1"/>
         </dgm:presLayoutVars>
@@ -4254,7 +3915,7 @@
       <dgm:spPr/>
     </dgm:pt>
     <dgm:pt modelId="{9E95D006-3A52-4C9F-915C-CE452CD5CD7D}" type="pres">
-      <dgm:prSet presAssocID="{8B6C3B02-9B97-4461-849D-8C27B7EC535B}" presName="parentText" presStyleLbl="node1" presStyleIdx="2" presStyleCnt="3" custScaleY="767568">
+      <dgm:prSet presAssocID="{8B6C3B02-9B97-4461-849D-8C27B7EC535B}" presName="parentText" presStyleLbl="node1" presStyleIdx="1" presStyleCnt="2" custScaleY="767568">
         <dgm:presLayoutVars>
           <dgm:chMax val="1"/>
           <dgm:bulletEnabled val="1"/>
@@ -4263,7 +3924,7 @@
       <dgm:spPr/>
     </dgm:pt>
     <dgm:pt modelId="{4E062ED7-C8B7-4731-A7F1-BE128EC98711}" type="pres">
-      <dgm:prSet presAssocID="{8B6C3B02-9B97-4461-849D-8C27B7EC535B}" presName="descendantText" presStyleLbl="alignAccFollowNode1" presStyleIdx="2" presStyleCnt="3" custScaleX="139293" custScaleY="965065">
+      <dgm:prSet presAssocID="{8B6C3B02-9B97-4461-849D-8C27B7EC535B}" presName="descendantText" presStyleLbl="alignAccFollowNode1" presStyleIdx="1" presStyleCnt="2" custScaleX="139293" custScaleY="965065">
         <dgm:presLayoutVars>
           <dgm:bulletEnabled val="1"/>
         </dgm:presLayoutVars>
@@ -4273,57 +3934,49 @@
   </dgm:ptLst>
   <dgm:cxnLst>
     <dgm:cxn modelId="{14E21D00-452E-4C18-9C41-7960E487344B}" type="presOf" srcId="{F0F13D87-64B0-41AD-8624-57471FE85796}" destId="{8C50726C-E90C-4FFA-B6A0-2ED37CF63F64}" srcOrd="0" destOrd="0" presId="urn:microsoft.com/office/officeart/2005/8/layout/vList5"/>
-    <dgm:cxn modelId="{12FE6C09-00C6-4A02-B542-575FE8B0B255}" srcId="{F0F13D87-64B0-41AD-8624-57471FE85796}" destId="{2F2A67E8-ACD9-4C73-881C-0F727D32AE95}" srcOrd="1" destOrd="0" parTransId="{A275FB55-100D-41BA-A526-40603876FD22}" sibTransId="{7C0B296B-2A0D-4999-A0C4-2B03AA5E5374}"/>
-    <dgm:cxn modelId="{B542F609-81FD-46D5-89CF-E3A1534847AC}" srcId="{8B6C3B02-9B97-4461-849D-8C27B7EC535B}" destId="{548D4458-7DA4-42BF-86CB-3786593BAF27}" srcOrd="9" destOrd="0" parTransId="{2D013C74-74E5-4DFB-B92E-91C1BB182B2C}" sibTransId="{102EBBBE-72A9-474B-A5F6-DBC6ED957DEC}"/>
-    <dgm:cxn modelId="{DC1CAB21-8192-497A-9935-3FFC17EF5D09}" type="presOf" srcId="{70B035EA-BDBD-4B4F-9C51-74DEC3B46254}" destId="{C2B29FA8-9630-4575-8343-B620FEB2808E}" srcOrd="0" destOrd="0" presId="urn:microsoft.com/office/officeart/2005/8/layout/vList5"/>
-    <dgm:cxn modelId="{EE732523-ACD9-4AD5-A411-721BE0F6D66C}" type="presOf" srcId="{A721B64A-F78D-438C-BD03-ED79A0A4204A}" destId="{4E062ED7-C8B7-4731-A7F1-BE128EC98711}" srcOrd="0" destOrd="5" presId="urn:microsoft.com/office/officeart/2005/8/layout/vList5"/>
-    <dgm:cxn modelId="{146F6C26-4015-4DA9-8404-95817393F548}" srcId="{8B6C3B02-9B97-4461-849D-8C27B7EC535B}" destId="{A73C65EF-8050-4781-9786-5BD8A1480F39}" srcOrd="7" destOrd="0" parTransId="{E07FC5C9-A259-4284-BDBA-D45C46A85CC3}" sibTransId="{D4457C39-6E2F-43ED-8335-21E4513D7C66}"/>
-    <dgm:cxn modelId="{8305C026-5BF9-441E-B9A2-6ED76E8FA070}" type="presOf" srcId="{A73C65EF-8050-4781-9786-5BD8A1480F39}" destId="{4E062ED7-C8B7-4731-A7F1-BE128EC98711}" srcOrd="0" destOrd="7" presId="urn:microsoft.com/office/officeart/2005/8/layout/vList5"/>
-    <dgm:cxn modelId="{0DE1DA2C-C4D8-42B2-82CF-2F0B80D321AC}" type="presOf" srcId="{9859F3EE-39FB-4155-A17B-10BBAC08A1CE}" destId="{4E062ED7-C8B7-4731-A7F1-BE128EC98711}" srcOrd="0" destOrd="10" presId="urn:microsoft.com/office/officeart/2005/8/layout/vList5"/>
-    <dgm:cxn modelId="{757F0432-51CC-4821-BD0B-74C4AA6C00FF}" srcId="{8B6C3B02-9B97-4461-849D-8C27B7EC535B}" destId="{F6495C03-6AD7-4361-A689-0928FC2AEC71}" srcOrd="11" destOrd="0" parTransId="{D191F338-3668-4712-8214-6BE1418556B2}" sibTransId="{AA018E8A-AF1C-47A2-A9C4-2B498C2408A7}"/>
-    <dgm:cxn modelId="{2A193935-218E-4083-9D43-BAE16F4D0718}" srcId="{8B6C3B02-9B97-4461-849D-8C27B7EC535B}" destId="{EE9714C7-57A7-46DA-B827-05B4168FDFC5}" srcOrd="12" destOrd="0" parTransId="{2CC95BB5-5B79-42EB-907E-DAB5A8BA0298}" sibTransId="{22620D68-D15F-4F8C-9CB8-89D4654ECBF3}"/>
-    <dgm:cxn modelId="{B6C53D39-3492-4B49-8F49-12949C517CB7}" type="presOf" srcId="{E03138E3-52EE-4CD0-8E3C-F0F8C0C28D99}" destId="{90CDA8DC-6CB2-49A7-A18C-F0D302BDC675}" srcOrd="0" destOrd="0" presId="urn:microsoft.com/office/officeart/2005/8/layout/vList5"/>
-    <dgm:cxn modelId="{75AB083C-1B8F-4842-9590-26B60EB3663F}" srcId="{8B6C3B02-9B97-4461-849D-8C27B7EC535B}" destId="{9859F3EE-39FB-4155-A17B-10BBAC08A1CE}" srcOrd="10" destOrd="0" parTransId="{3B4190E0-AADF-475E-B5CB-549B6724E78A}" sibTransId="{81A30B17-09B7-4B5D-8B46-82B8627B3E24}"/>
-    <dgm:cxn modelId="{02B59940-76D4-44CD-B093-5E255D8B8128}" srcId="{F0F13D87-64B0-41AD-8624-57471FE85796}" destId="{8B6C3B02-9B97-4461-849D-8C27B7EC535B}" srcOrd="2" destOrd="0" parTransId="{50481D48-BE32-402B-B97D-BE0B16A178F3}" sibTransId="{0362A28F-AA87-4D8E-9250-A7830272AD07}"/>
+    <dgm:cxn modelId="{12FE6C09-00C6-4A02-B542-575FE8B0B255}" srcId="{F0F13D87-64B0-41AD-8624-57471FE85796}" destId="{2F2A67E8-ACD9-4C73-881C-0F727D32AE95}" srcOrd="0" destOrd="0" parTransId="{A275FB55-100D-41BA-A526-40603876FD22}" sibTransId="{7C0B296B-2A0D-4999-A0C4-2B03AA5E5374}"/>
+    <dgm:cxn modelId="{B542F609-81FD-46D5-89CF-E3A1534847AC}" srcId="{8B6C3B02-9B97-4461-849D-8C27B7EC535B}" destId="{548D4458-7DA4-42BF-86CB-3786593BAF27}" srcOrd="8" destOrd="0" parTransId="{2D013C74-74E5-4DFB-B92E-91C1BB182B2C}" sibTransId="{102EBBBE-72A9-474B-A5F6-DBC6ED957DEC}"/>
+    <dgm:cxn modelId="{C00F8421-F747-485C-B1B5-20EB97E9EFA4}" srcId="{8B6C3B02-9B97-4461-849D-8C27B7EC535B}" destId="{2F7A7128-86C4-4AA6-BDD2-C0F06335F019}" srcOrd="7" destOrd="0" parTransId="{D99736A6-12EE-4BAE-87C7-CBC8D7CA2323}" sibTransId="{80D44254-ED36-4ABC-9111-50A9B5934201}"/>
+    <dgm:cxn modelId="{EE732523-ACD9-4AD5-A411-721BE0F6D66C}" type="presOf" srcId="{A721B64A-F78D-438C-BD03-ED79A0A4204A}" destId="{4E062ED7-C8B7-4731-A7F1-BE128EC98711}" srcOrd="0" destOrd="4" presId="urn:microsoft.com/office/officeart/2005/8/layout/vList5"/>
+    <dgm:cxn modelId="{146F6C26-4015-4DA9-8404-95817393F548}" srcId="{8B6C3B02-9B97-4461-849D-8C27B7EC535B}" destId="{A73C65EF-8050-4781-9786-5BD8A1480F39}" srcOrd="6" destOrd="0" parTransId="{E07FC5C9-A259-4284-BDBA-D45C46A85CC3}" sibTransId="{D4457C39-6E2F-43ED-8335-21E4513D7C66}"/>
+    <dgm:cxn modelId="{8305C026-5BF9-441E-B9A2-6ED76E8FA070}" type="presOf" srcId="{A73C65EF-8050-4781-9786-5BD8A1480F39}" destId="{4E062ED7-C8B7-4731-A7F1-BE128EC98711}" srcOrd="0" destOrd="6" presId="urn:microsoft.com/office/officeart/2005/8/layout/vList5"/>
+    <dgm:cxn modelId="{0DE1DA2C-C4D8-42B2-82CF-2F0B80D321AC}" type="presOf" srcId="{9859F3EE-39FB-4155-A17B-10BBAC08A1CE}" destId="{4E062ED7-C8B7-4731-A7F1-BE128EC98711}" srcOrd="0" destOrd="9" presId="urn:microsoft.com/office/officeart/2005/8/layout/vList5"/>
+    <dgm:cxn modelId="{757F0432-51CC-4821-BD0B-74C4AA6C00FF}" srcId="{8B6C3B02-9B97-4461-849D-8C27B7EC535B}" destId="{F6495C03-6AD7-4361-A689-0928FC2AEC71}" srcOrd="10" destOrd="0" parTransId="{D191F338-3668-4712-8214-6BE1418556B2}" sibTransId="{AA018E8A-AF1C-47A2-A9C4-2B498C2408A7}"/>
+    <dgm:cxn modelId="{2A193935-218E-4083-9D43-BAE16F4D0718}" srcId="{8B6C3B02-9B97-4461-849D-8C27B7EC535B}" destId="{EE9714C7-57A7-46DA-B827-05B4168FDFC5}" srcOrd="11" destOrd="0" parTransId="{2CC95BB5-5B79-42EB-907E-DAB5A8BA0298}" sibTransId="{22620D68-D15F-4F8C-9CB8-89D4654ECBF3}"/>
+    <dgm:cxn modelId="{75AB083C-1B8F-4842-9590-26B60EB3663F}" srcId="{8B6C3B02-9B97-4461-849D-8C27B7EC535B}" destId="{9859F3EE-39FB-4155-A17B-10BBAC08A1CE}" srcOrd="9" destOrd="0" parTransId="{3B4190E0-AADF-475E-B5CB-549B6724E78A}" sibTransId="{81A30B17-09B7-4B5D-8B46-82B8627B3E24}"/>
+    <dgm:cxn modelId="{02B59940-76D4-44CD-B093-5E255D8B8128}" srcId="{F0F13D87-64B0-41AD-8624-57471FE85796}" destId="{8B6C3B02-9B97-4461-849D-8C27B7EC535B}" srcOrd="1" destOrd="0" parTransId="{50481D48-BE32-402B-B97D-BE0B16A178F3}" sibTransId="{0362A28F-AA87-4D8E-9250-A7830272AD07}"/>
+    <dgm:cxn modelId="{CA2E395C-B318-4E2E-AA5C-FE4919B7B26A}" type="presOf" srcId="{41BFD59F-BCE8-4528-89E9-3A56209A83CF}" destId="{EFC1B403-9E6E-4411-9B69-79A1584C7937}" srcOrd="0" destOrd="2" presId="urn:microsoft.com/office/officeart/2005/8/layout/vList5"/>
     <dgm:cxn modelId="{2115EB43-AED9-4C7C-93CF-B85E01E16247}" srcId="{2F2A67E8-ACD9-4C73-881C-0F727D32AE95}" destId="{6685804A-377E-4143-859E-8D132C381ECF}" srcOrd="1" destOrd="0" parTransId="{F5C6F6E8-45D3-4854-8B35-3294023BC47D}" sibTransId="{BF8EC071-F2DF-44DA-A21B-1A8CE3A4C61B}"/>
-    <dgm:cxn modelId="{83BAAA44-D43F-4D35-8D28-FD85187C07BC}" type="presOf" srcId="{F6495C03-6AD7-4361-A689-0928FC2AEC71}" destId="{4E062ED7-C8B7-4731-A7F1-BE128EC98711}" srcOrd="0" destOrd="11" presId="urn:microsoft.com/office/officeart/2005/8/layout/vList5"/>
-    <dgm:cxn modelId="{1F480846-2667-4241-9F3B-7AF9FCFFF1F3}" srcId="{8B6C3B02-9B97-4461-849D-8C27B7EC535B}" destId="{A721B64A-F78D-438C-BD03-ED79A0A4204A}" srcOrd="5" destOrd="0" parTransId="{78C91161-6F7F-4398-B89C-D80D89BC273D}" sibTransId="{94D94A6E-FBF5-4F36-B66B-5C7A69F3C861}"/>
-    <dgm:cxn modelId="{A9931D6E-BF0B-4053-9E6A-A687BA69F3C2}" srcId="{8B6C3B02-9B97-4461-849D-8C27B7EC535B}" destId="{5BAE0173-1193-4CBE-A1BB-134D3B5341F6}" srcOrd="2" destOrd="0" parTransId="{C4B21ADE-2B93-45FF-8316-D7C57A7A4BBA}" sibTransId="{B9F20E84-B838-470F-A2DF-02AD59B397A9}"/>
+    <dgm:cxn modelId="{83BAAA44-D43F-4D35-8D28-FD85187C07BC}" type="presOf" srcId="{F6495C03-6AD7-4361-A689-0928FC2AEC71}" destId="{4E062ED7-C8B7-4731-A7F1-BE128EC98711}" srcOrd="0" destOrd="10" presId="urn:microsoft.com/office/officeart/2005/8/layout/vList5"/>
+    <dgm:cxn modelId="{1F480846-2667-4241-9F3B-7AF9FCFFF1F3}" srcId="{8B6C3B02-9B97-4461-849D-8C27B7EC535B}" destId="{A721B64A-F78D-438C-BD03-ED79A0A4204A}" srcOrd="4" destOrd="0" parTransId="{78C91161-6F7F-4398-B89C-D80D89BC273D}" sibTransId="{94D94A6E-FBF5-4F36-B66B-5C7A69F3C861}"/>
     <dgm:cxn modelId="{608C324E-7E80-4BF4-8A54-C2C2D7187346}" type="presOf" srcId="{6685804A-377E-4143-859E-8D132C381ECF}" destId="{EFC1B403-9E6E-4411-9B69-79A1584C7937}" srcOrd="0" destOrd="1" presId="urn:microsoft.com/office/officeart/2005/8/layout/vList5"/>
     <dgm:cxn modelId="{454DAC6E-6DA6-4456-AAAB-C6BF68406A55}" type="presOf" srcId="{35BB0A4F-EA77-413C-9E84-DEBFB93A1E88}" destId="{EFC1B403-9E6E-4411-9B69-79A1584C7937}" srcOrd="0" destOrd="0" presId="urn:microsoft.com/office/officeart/2005/8/layout/vList5"/>
     <dgm:cxn modelId="{7BF0174F-4C35-49BA-9B87-409C838CA9D4}" type="presOf" srcId="{C80325A7-6A8F-44B1-B610-6BEE0FD37FF7}" destId="{4E062ED7-C8B7-4731-A7F1-BE128EC98711}" srcOrd="0" destOrd="0" presId="urn:microsoft.com/office/officeart/2005/8/layout/vList5"/>
     <dgm:cxn modelId="{E8435856-52A4-4837-AFEB-C91AB4BC5B44}" type="presOf" srcId="{8B6C3B02-9B97-4461-849D-8C27B7EC535B}" destId="{9E95D006-3A52-4C9F-915C-CE452CD5CD7D}" srcOrd="0" destOrd="0" presId="urn:microsoft.com/office/officeart/2005/8/layout/vList5"/>
-    <dgm:cxn modelId="{9B9D6459-437A-4A42-9D84-8563F4490703}" srcId="{8B6C3B02-9B97-4461-849D-8C27B7EC535B}" destId="{1688AF18-54DB-407D-8233-10E50E64F3E5}" srcOrd="13" destOrd="0" parTransId="{F25CF874-0A6B-4416-8181-47F2F3C3EF9A}" sibTransId="{0DE5D095-46C2-4184-8B2C-F4298A713DBE}"/>
-    <dgm:cxn modelId="{70AC627A-0D04-4D63-B275-A96E3A86E275}" type="presOf" srcId="{1688AF18-54DB-407D-8233-10E50E64F3E5}" destId="{4E062ED7-C8B7-4731-A7F1-BE128EC98711}" srcOrd="0" destOrd="13" presId="urn:microsoft.com/office/officeart/2005/8/layout/vList5"/>
-    <dgm:cxn modelId="{69219F7A-A4D9-4054-AF0D-0C3689464BDD}" type="presOf" srcId="{3856962B-EAC1-4008-B520-A3E0E0F14824}" destId="{EFC1B403-9E6E-4411-9B69-79A1584C7937}" srcOrd="0" destOrd="2" presId="urn:microsoft.com/office/officeart/2005/8/layout/vList5"/>
+    <dgm:cxn modelId="{9B9D6459-437A-4A42-9D84-8563F4490703}" srcId="{8B6C3B02-9B97-4461-849D-8C27B7EC535B}" destId="{1688AF18-54DB-407D-8233-10E50E64F3E5}" srcOrd="12" destOrd="0" parTransId="{F25CF874-0A6B-4416-8181-47F2F3C3EF9A}" sibTransId="{0DE5D095-46C2-4184-8B2C-F4298A713DBE}"/>
+    <dgm:cxn modelId="{70AC627A-0D04-4D63-B275-A96E3A86E275}" type="presOf" srcId="{1688AF18-54DB-407D-8233-10E50E64F3E5}" destId="{4E062ED7-C8B7-4731-A7F1-BE128EC98711}" srcOrd="0" destOrd="12" presId="urn:microsoft.com/office/officeart/2005/8/layout/vList5"/>
+    <dgm:cxn modelId="{69219F7A-A4D9-4054-AF0D-0C3689464BDD}" type="presOf" srcId="{3856962B-EAC1-4008-B520-A3E0E0F14824}" destId="{EFC1B403-9E6E-4411-9B69-79A1584C7937}" srcOrd="0" destOrd="3" presId="urn:microsoft.com/office/officeart/2005/8/layout/vList5"/>
     <dgm:cxn modelId="{E2A17C7E-3D95-41AA-9F9F-74B88C49C7E8}" srcId="{8B6C3B02-9B97-4461-849D-8C27B7EC535B}" destId="{C80325A7-6A8F-44B1-B610-6BEE0FD37FF7}" srcOrd="0" destOrd="0" parTransId="{08452F9F-4BD9-4B0C-B864-3DD8DC2A2AEE}" sibTransId="{336CBB3D-D79F-42E7-9597-B23C06F58606}"/>
     <dgm:cxn modelId="{E93DC782-50DD-4B43-A967-4FD2741569FB}" srcId="{8B6C3B02-9B97-4461-849D-8C27B7EC535B}" destId="{798C2C10-662F-4E75-A5B5-D79146484269}" srcOrd="1" destOrd="0" parTransId="{763728CA-2134-4677-A743-846554DEF5FC}" sibTransId="{062818EF-31D5-4693-AAFD-92006D82850B}"/>
     <dgm:cxn modelId="{6C6FC389-867B-4E86-A3B1-05298DAC166B}" type="presOf" srcId="{798C2C10-662F-4E75-A5B5-D79146484269}" destId="{4E062ED7-C8B7-4731-A7F1-BE128EC98711}" srcOrd="0" destOrd="1" presId="urn:microsoft.com/office/officeart/2005/8/layout/vList5"/>
-    <dgm:cxn modelId="{48306590-A74B-4794-B526-E913004DC442}" type="presOf" srcId="{548D4458-7DA4-42BF-86CB-3786593BAF27}" destId="{4E062ED7-C8B7-4731-A7F1-BE128EC98711}" srcOrd="0" destOrd="9" presId="urn:microsoft.com/office/officeart/2005/8/layout/vList5"/>
-    <dgm:cxn modelId="{0C2158A2-BB52-43EC-9670-EA6E9B0D6DEB}" srcId="{8B6C3B02-9B97-4461-849D-8C27B7EC535B}" destId="{234162C5-F557-440D-8194-2CBB2D4E4B54}" srcOrd="4" destOrd="0" parTransId="{BA6555F0-D897-4216-9648-02AFA7A4E6CF}" sibTransId="{59A8B4E3-45A5-4543-ACC1-40C24D025A51}"/>
-    <dgm:cxn modelId="{81F09BB9-F0A8-4D26-9C8C-78D3DDFF58E4}" srcId="{8B6C3B02-9B97-4461-849D-8C27B7EC535B}" destId="{4A8BA3F3-42C0-41EA-917D-9DDF709CADEA}" srcOrd="6" destOrd="0" parTransId="{1E327B02-6FCB-40C3-BF05-CDA992C2D02D}" sibTransId="{E09862E0-6EE9-45CD-BBC4-0365F337E1F9}"/>
-    <dgm:cxn modelId="{184FB2BD-EA0B-4F88-B8DC-81E26C56F6C3}" srcId="{E03138E3-52EE-4CD0-8E3C-F0F8C0C28D99}" destId="{70B035EA-BDBD-4B4F-9C51-74DEC3B46254}" srcOrd="0" destOrd="0" parTransId="{49B493E8-4FBC-43B0-8670-7848ED053197}" sibTransId="{265D8544-366D-46EF-B8E6-7D48848F0F7A}"/>
-    <dgm:cxn modelId="{A951CBC3-2547-4FE9-B31D-2616C6EC2D7D}" srcId="{F0F13D87-64B0-41AD-8624-57471FE85796}" destId="{E03138E3-52EE-4CD0-8E3C-F0F8C0C28D99}" srcOrd="0" destOrd="0" parTransId="{9B4391B9-3A32-470F-9B43-6CD3A86645B1}" sibTransId="{554A85A0-E1F5-4872-A1E2-8F392D73FAC7}"/>
-    <dgm:cxn modelId="{483BF8C4-DBC4-4E2A-B0F4-02F0FF1B5C8E}" type="presOf" srcId="{4A8BA3F3-42C0-41EA-917D-9DDF709CADEA}" destId="{4E062ED7-C8B7-4731-A7F1-BE128EC98711}" srcOrd="0" destOrd="6" presId="urn:microsoft.com/office/officeart/2005/8/layout/vList5"/>
-    <dgm:cxn modelId="{984175CA-7143-4631-870D-2ECAC958E798}" type="presOf" srcId="{2F7A7128-86C4-4AA6-BDD2-C0F06335F019}" destId="{4E062ED7-C8B7-4731-A7F1-BE128EC98711}" srcOrd="0" destOrd="8" presId="urn:microsoft.com/office/officeart/2005/8/layout/vList5"/>
-    <dgm:cxn modelId="{420B62D3-FE4F-40A0-B131-C8DF3D0C141F}" srcId="{8B6C3B02-9B97-4461-849D-8C27B7EC535B}" destId="{12639EF0-BB1A-4373-80A6-973906E4B20F}" srcOrd="3" destOrd="0" parTransId="{34C1F691-A67B-43DA-AE71-CA2D5125F70E}" sibTransId="{39822BD4-F533-401C-B29B-EA82A20EF2F0}"/>
-    <dgm:cxn modelId="{25777DD8-CE07-4CF1-B5DF-967A167FC9B2}" type="presOf" srcId="{5BAE0173-1193-4CBE-A1BB-134D3B5341F6}" destId="{4E062ED7-C8B7-4731-A7F1-BE128EC98711}" srcOrd="0" destOrd="2" presId="urn:microsoft.com/office/officeart/2005/8/layout/vList5"/>
+    <dgm:cxn modelId="{48306590-A74B-4794-B526-E913004DC442}" type="presOf" srcId="{548D4458-7DA4-42BF-86CB-3786593BAF27}" destId="{4E062ED7-C8B7-4731-A7F1-BE128EC98711}" srcOrd="0" destOrd="8" presId="urn:microsoft.com/office/officeart/2005/8/layout/vList5"/>
+    <dgm:cxn modelId="{94E13D95-EABA-4C09-B8F0-F87DC066E057}" srcId="{2F2A67E8-ACD9-4C73-881C-0F727D32AE95}" destId="{41BFD59F-BCE8-4528-89E9-3A56209A83CF}" srcOrd="2" destOrd="0" parTransId="{8F617046-C929-4038-9DBA-EEA6F63BC264}" sibTransId="{07400CBA-8D5C-4660-AD31-3C2719B11C77}"/>
+    <dgm:cxn modelId="{0C2158A2-BB52-43EC-9670-EA6E9B0D6DEB}" srcId="{8B6C3B02-9B97-4461-849D-8C27B7EC535B}" destId="{234162C5-F557-440D-8194-2CBB2D4E4B54}" srcOrd="3" destOrd="0" parTransId="{BA6555F0-D897-4216-9648-02AFA7A4E6CF}" sibTransId="{59A8B4E3-45A5-4543-ACC1-40C24D025A51}"/>
+    <dgm:cxn modelId="{81F09BB9-F0A8-4D26-9C8C-78D3DDFF58E4}" srcId="{8B6C3B02-9B97-4461-849D-8C27B7EC535B}" destId="{4A8BA3F3-42C0-41EA-917D-9DDF709CADEA}" srcOrd="5" destOrd="0" parTransId="{1E327B02-6FCB-40C3-BF05-CDA992C2D02D}" sibTransId="{E09862E0-6EE9-45CD-BBC4-0365F337E1F9}"/>
+    <dgm:cxn modelId="{483BF8C4-DBC4-4E2A-B0F4-02F0FF1B5C8E}" type="presOf" srcId="{4A8BA3F3-42C0-41EA-917D-9DDF709CADEA}" destId="{4E062ED7-C8B7-4731-A7F1-BE128EC98711}" srcOrd="0" destOrd="5" presId="urn:microsoft.com/office/officeart/2005/8/layout/vList5"/>
+    <dgm:cxn modelId="{420B62D3-FE4F-40A0-B131-C8DF3D0C141F}" srcId="{8B6C3B02-9B97-4461-849D-8C27B7EC535B}" destId="{12639EF0-BB1A-4373-80A6-973906E4B20F}" srcOrd="2" destOrd="0" parTransId="{34C1F691-A67B-43DA-AE71-CA2D5125F70E}" sibTransId="{39822BD4-F533-401C-B29B-EA82A20EF2F0}"/>
     <dgm:cxn modelId="{FE6114DA-E6B4-465B-967B-43E233EA321A}" srcId="{2F2A67E8-ACD9-4C73-881C-0F727D32AE95}" destId="{35BB0A4F-EA77-413C-9E84-DEBFB93A1E88}" srcOrd="0" destOrd="0" parTransId="{D5ED6B98-9411-4F4F-8541-4763B0D1ABCB}" sibTransId="{68D557F7-03D8-49BF-88C8-BA7F7C13F7C3}"/>
-    <dgm:cxn modelId="{B13D22DA-DD85-4425-9996-67F0893F0255}" type="presOf" srcId="{234162C5-F557-440D-8194-2CBB2D4E4B54}" destId="{4E062ED7-C8B7-4731-A7F1-BE128EC98711}" srcOrd="0" destOrd="4" presId="urn:microsoft.com/office/officeart/2005/8/layout/vList5"/>
-    <dgm:cxn modelId="{9DDA48DA-3C17-4B15-861D-9FB9429F1310}" type="presOf" srcId="{12639EF0-BB1A-4373-80A6-973906E4B20F}" destId="{4E062ED7-C8B7-4731-A7F1-BE128EC98711}" srcOrd="0" destOrd="3" presId="urn:microsoft.com/office/officeart/2005/8/layout/vList5"/>
-    <dgm:cxn modelId="{FE501EEB-45DE-42A0-BE8D-5CA17D973E26}" type="presOf" srcId="{EE9714C7-57A7-46DA-B827-05B4168FDFC5}" destId="{4E062ED7-C8B7-4731-A7F1-BE128EC98711}" srcOrd="0" destOrd="12" presId="urn:microsoft.com/office/officeart/2005/8/layout/vList5"/>
+    <dgm:cxn modelId="{B13D22DA-DD85-4425-9996-67F0893F0255}" type="presOf" srcId="{234162C5-F557-440D-8194-2CBB2D4E4B54}" destId="{4E062ED7-C8B7-4731-A7F1-BE128EC98711}" srcOrd="0" destOrd="3" presId="urn:microsoft.com/office/officeart/2005/8/layout/vList5"/>
+    <dgm:cxn modelId="{9DDA48DA-3C17-4B15-861D-9FB9429F1310}" type="presOf" srcId="{12639EF0-BB1A-4373-80A6-973906E4B20F}" destId="{4E062ED7-C8B7-4731-A7F1-BE128EC98711}" srcOrd="0" destOrd="2" presId="urn:microsoft.com/office/officeart/2005/8/layout/vList5"/>
+    <dgm:cxn modelId="{FE501EEB-45DE-42A0-BE8D-5CA17D973E26}" type="presOf" srcId="{EE9714C7-57A7-46DA-B827-05B4168FDFC5}" destId="{4E062ED7-C8B7-4731-A7F1-BE128EC98711}" srcOrd="0" destOrd="11" presId="urn:microsoft.com/office/officeart/2005/8/layout/vList5"/>
     <dgm:cxn modelId="{E1987AED-FAC2-4A88-8949-016BDBE1E577}" type="presOf" srcId="{2F2A67E8-ACD9-4C73-881C-0F727D32AE95}" destId="{20EFAA17-3592-4F78-AEAE-2CD118F957A5}" srcOrd="0" destOrd="0" presId="urn:microsoft.com/office/officeart/2005/8/layout/vList5"/>
-    <dgm:cxn modelId="{44EBCAF3-F437-48D4-A2D2-339BAEAA1051}" srcId="{2F2A67E8-ACD9-4C73-881C-0F727D32AE95}" destId="{3856962B-EAC1-4008-B520-A3E0E0F14824}" srcOrd="2" destOrd="0" parTransId="{23053E62-2C06-49F6-B7A6-62D49056C07E}" sibTransId="{C1F24D7A-1C3E-401D-A2EB-77F86B809DCA}"/>
-    <dgm:cxn modelId="{757E0FFC-7697-480C-AAD2-988F62C08C3D}" srcId="{8B6C3B02-9B97-4461-849D-8C27B7EC535B}" destId="{2F7A7128-86C4-4AA6-BDD2-C0F06335F019}" srcOrd="8" destOrd="0" parTransId="{D99736A6-12EE-4BAE-87C7-CBC8D7CA2323}" sibTransId="{80D44254-ED36-4ABC-9111-50A9B5934201}"/>
-    <dgm:cxn modelId="{FE451DF5-F3E1-4E9D-ABED-8ABB838583AA}" type="presParOf" srcId="{8C50726C-E90C-4FFA-B6A0-2ED37CF63F64}" destId="{CFBECFF3-9CDE-4645-A2D4-716BE8A1134D}" srcOrd="0" destOrd="0" presId="urn:microsoft.com/office/officeart/2005/8/layout/vList5"/>
-    <dgm:cxn modelId="{ABC38442-B783-4DBF-AE20-CC6B92642123}" type="presParOf" srcId="{CFBECFF3-9CDE-4645-A2D4-716BE8A1134D}" destId="{90CDA8DC-6CB2-49A7-A18C-F0D302BDC675}" srcOrd="0" destOrd="0" presId="urn:microsoft.com/office/officeart/2005/8/layout/vList5"/>
-    <dgm:cxn modelId="{A68AF0FB-EFD8-4DA8-87DC-D4708577334C}" type="presParOf" srcId="{CFBECFF3-9CDE-4645-A2D4-716BE8A1134D}" destId="{C2B29FA8-9630-4575-8343-B620FEB2808E}" srcOrd="1" destOrd="0" presId="urn:microsoft.com/office/officeart/2005/8/layout/vList5"/>
-    <dgm:cxn modelId="{CB238C17-5A0F-4278-8017-606B1E890E57}" type="presParOf" srcId="{8C50726C-E90C-4FFA-B6A0-2ED37CF63F64}" destId="{75662B48-2F8F-4342-873D-1832B8C6C1A0}" srcOrd="1" destOrd="0" presId="urn:microsoft.com/office/officeart/2005/8/layout/vList5"/>
-    <dgm:cxn modelId="{0898E643-84BC-4444-98F5-10F22C018DA9}" type="presParOf" srcId="{8C50726C-E90C-4FFA-B6A0-2ED37CF63F64}" destId="{796ABD26-0390-4B39-A62D-E35ED7901557}" srcOrd="2" destOrd="0" presId="urn:microsoft.com/office/officeart/2005/8/layout/vList5"/>
+    <dgm:cxn modelId="{44EBCAF3-F437-48D4-A2D2-339BAEAA1051}" srcId="{2F2A67E8-ACD9-4C73-881C-0F727D32AE95}" destId="{3856962B-EAC1-4008-B520-A3E0E0F14824}" srcOrd="3" destOrd="0" parTransId="{23053E62-2C06-49F6-B7A6-62D49056C07E}" sibTransId="{C1F24D7A-1C3E-401D-A2EB-77F86B809DCA}"/>
+    <dgm:cxn modelId="{CB4329F8-377A-4878-B985-8CD9D1BDC248}" type="presOf" srcId="{2F7A7128-86C4-4AA6-BDD2-C0F06335F019}" destId="{4E062ED7-C8B7-4731-A7F1-BE128EC98711}" srcOrd="0" destOrd="7" presId="urn:microsoft.com/office/officeart/2005/8/layout/vList5"/>
+    <dgm:cxn modelId="{0898E643-84BC-4444-98F5-10F22C018DA9}" type="presParOf" srcId="{8C50726C-E90C-4FFA-B6A0-2ED37CF63F64}" destId="{796ABD26-0390-4B39-A62D-E35ED7901557}" srcOrd="0" destOrd="0" presId="urn:microsoft.com/office/officeart/2005/8/layout/vList5"/>
     <dgm:cxn modelId="{A671792A-35BA-44B2-8D4C-47463C93833A}" type="presParOf" srcId="{796ABD26-0390-4B39-A62D-E35ED7901557}" destId="{20EFAA17-3592-4F78-AEAE-2CD118F957A5}" srcOrd="0" destOrd="0" presId="urn:microsoft.com/office/officeart/2005/8/layout/vList5"/>
     <dgm:cxn modelId="{A8B88065-7789-42A7-A8DD-C9A8EEC873E4}" type="presParOf" srcId="{796ABD26-0390-4B39-A62D-E35ED7901557}" destId="{EFC1B403-9E6E-4411-9B69-79A1584C7937}" srcOrd="1" destOrd="0" presId="urn:microsoft.com/office/officeart/2005/8/layout/vList5"/>
-    <dgm:cxn modelId="{B9547007-A460-4114-B49B-50BE53B726D4}" type="presParOf" srcId="{8C50726C-E90C-4FFA-B6A0-2ED37CF63F64}" destId="{B2A8BB8D-8794-49FC-B132-74637F2E5B23}" srcOrd="3" destOrd="0" presId="urn:microsoft.com/office/officeart/2005/8/layout/vList5"/>
-    <dgm:cxn modelId="{7D8A0A3A-AE05-450B-89F7-9193E0C122F5}" type="presParOf" srcId="{8C50726C-E90C-4FFA-B6A0-2ED37CF63F64}" destId="{39BA3085-98BD-4984-9C38-AFDA18857722}" srcOrd="4" destOrd="0" presId="urn:microsoft.com/office/officeart/2005/8/layout/vList5"/>
+    <dgm:cxn modelId="{B9547007-A460-4114-B49B-50BE53B726D4}" type="presParOf" srcId="{8C50726C-E90C-4FFA-B6A0-2ED37CF63F64}" destId="{B2A8BB8D-8794-49FC-B132-74637F2E5B23}" srcOrd="1" destOrd="0" presId="urn:microsoft.com/office/officeart/2005/8/layout/vList5"/>
+    <dgm:cxn modelId="{7D8A0A3A-AE05-450B-89F7-9193E0C122F5}" type="presParOf" srcId="{8C50726C-E90C-4FFA-B6A0-2ED37CF63F64}" destId="{39BA3085-98BD-4984-9C38-AFDA18857722}" srcOrd="2" destOrd="0" presId="urn:microsoft.com/office/officeart/2005/8/layout/vList5"/>
     <dgm:cxn modelId="{290D0EFF-5378-402A-88A3-27ECFEB8310A}" type="presParOf" srcId="{39BA3085-98BD-4984-9C38-AFDA18857722}" destId="{9E95D006-3A52-4C9F-915C-CE452CD5CD7D}" srcOrd="0" destOrd="0" presId="urn:microsoft.com/office/officeart/2005/8/layout/vList5"/>
     <dgm:cxn modelId="{A2AAB46C-2AF6-40F3-8AF2-8101114694BD}" type="presParOf" srcId="{39BA3085-98BD-4984-9C38-AFDA18857722}" destId="{4E062ED7-C8B7-4731-A7F1-BE128EC98711}" srcOrd="1" destOrd="0" presId="urn:microsoft.com/office/officeart/2005/8/layout/vList5"/>
   </dgm:cxnLst>
@@ -4455,7 +4108,7 @@
         <a:p>
           <a:r>
             <a:rPr lang="en-US" sz="1500" dirty="0"/>
-            <a:t>Random Under Sample : Class Imbalance</a:t>
+            <a:t>Random Under Sample (Imbalance)</a:t>
           </a:r>
           <a:endParaRPr lang="en-GB" sz="1500" dirty="0"/>
         </a:p>
@@ -4501,7 +4154,7 @@
         <a:p>
           <a:r>
             <a:rPr lang="en-US" b="0" dirty="0"/>
-            <a:t>Models</a:t>
+            <a:t>Statistical Analysis</a:t>
           </a:r>
           <a:endParaRPr lang="en-GB" dirty="0"/>
         </a:p>
@@ -4586,7 +4239,7 @@
         <a:p>
           <a:r>
             <a:rPr lang="en-US" sz="1500" dirty="0"/>
-            <a:t>Logistic, Elastic Net, LDA, QDA </a:t>
+            <a:t>Logistic, LDA, QDA </a:t>
           </a:r>
           <a:endParaRPr lang="en-GB" sz="1500" dirty="0"/>
         </a:p>
@@ -4714,7 +4367,7 @@
         <a:p>
           <a:r>
             <a:rPr lang="en-US" sz="1500" dirty="0"/>
-            <a:t>K-Fold CV</a:t>
+            <a:t>5 K-Fold CV</a:t>
           </a:r>
           <a:endParaRPr lang="en-GB" sz="1500" dirty="0"/>
         </a:p>
@@ -5021,7 +4674,7 @@
           </a:pPr>
           <a:r>
             <a:rPr lang="en-GB" sz="1500" b="0" dirty="0"/>
-            <a:t>Pruned tree, Random Forest</a:t>
+            <a:t>Random Forest</a:t>
           </a:r>
         </a:p>
       </dgm:t>
@@ -5154,7 +4807,7 @@
         <a:p>
           <a:r>
             <a:rPr lang="en-US" sz="1500" dirty="0"/>
-            <a:t>Dummies (Completed = 0, Terminated = 1)</a:t>
+            <a:t>Completed = 0, Terminated = 1</a:t>
           </a:r>
           <a:endParaRPr lang="en-GB" sz="1500" dirty="0"/>
         </a:p>
@@ -5236,7 +4889,7 @@
         <a:p>
           <a:r>
             <a:rPr lang="en-US" sz="1500" dirty="0"/>
-            <a:t>Min-Max Scaler (positive values)</a:t>
+            <a:t>Min-Max Scaler</a:t>
           </a:r>
           <a:endParaRPr lang="en-GB" sz="1500" dirty="0"/>
         </a:p>
@@ -5254,6 +4907,47 @@
       </dgm:t>
     </dgm:pt>
     <dgm:pt modelId="{87F311EB-1BD1-485C-8B14-143C4767ABB4}" type="sibTrans" cxnId="{D1968A85-9847-47EC-AB41-2BD8CA92798B}">
+      <dgm:prSet/>
+      <dgm:spPr/>
+      <dgm:t>
+        <a:bodyPr/>
+        <a:lstStyle/>
+        <a:p>
+          <a:endParaRPr lang="en-GB"/>
+        </a:p>
+      </dgm:t>
+    </dgm:pt>
+    <dgm:pt modelId="{685943C9-8272-4FDD-92D1-BD463F4484C1}">
+      <dgm:prSet custT="1"/>
+      <dgm:spPr>
+        <a:ln>
+          <a:noFill/>
+        </a:ln>
+      </dgm:spPr>
+      <dgm:t>
+        <a:bodyPr/>
+        <a:lstStyle/>
+        <a:p>
+          <a:r>
+            <a:rPr lang="en-US" sz="1500" dirty="0"/>
+            <a:t>VIF</a:t>
+          </a:r>
+          <a:endParaRPr lang="en-GB" sz="1500" dirty="0"/>
+        </a:p>
+      </dgm:t>
+    </dgm:pt>
+    <dgm:pt modelId="{145BAE05-C89D-41CB-A7CC-B1804696510A}" type="parTrans" cxnId="{9A1DFDFF-8F08-43BF-B4F8-5A7E67284CD6}">
+      <dgm:prSet/>
+      <dgm:spPr/>
+      <dgm:t>
+        <a:bodyPr/>
+        <a:lstStyle/>
+        <a:p>
+          <a:endParaRPr lang="en-GB"/>
+        </a:p>
+      </dgm:t>
+    </dgm:pt>
+    <dgm:pt modelId="{81A2362E-F051-4A5C-937C-C29D68FD3C4D}" type="sibTrans" cxnId="{9A1DFDFF-8F08-43BF-B4F8-5A7E67284CD6}">
       <dgm:prSet/>
       <dgm:spPr/>
       <dgm:t>
@@ -5379,7 +5073,7 @@
       <dgm:spPr/>
     </dgm:pt>
     <dgm:pt modelId="{931D566F-3CC3-4DF1-B1AF-B7DE9820E2D9}" type="pres">
-      <dgm:prSet presAssocID="{9B2B852C-EAA3-47DA-A8FA-B03219776D86}" presName="parentText" presStyleLbl="node1" presStyleIdx="4" presStyleCnt="5" custScaleY="140833">
+      <dgm:prSet presAssocID="{9B2B852C-EAA3-47DA-A8FA-B03219776D86}" presName="parentText" presStyleLbl="node1" presStyleIdx="4" presStyleCnt="5" custScaleY="184297">
         <dgm:presLayoutVars>
           <dgm:chMax val="1"/>
           <dgm:bulletEnabled val="1"/>
@@ -5388,7 +5082,7 @@
       <dgm:spPr/>
     </dgm:pt>
     <dgm:pt modelId="{7FCCB0FB-B29E-4A63-AD5D-91FA8360F37E}" type="pres">
-      <dgm:prSet presAssocID="{9B2B852C-EAA3-47DA-A8FA-B03219776D86}" presName="descendantText" presStyleLbl="alignAccFollowNode1" presStyleIdx="4" presStyleCnt="5" custScaleY="170367">
+      <dgm:prSet presAssocID="{9B2B852C-EAA3-47DA-A8FA-B03219776D86}" presName="descendantText" presStyleLbl="alignAccFollowNode1" presStyleIdx="4" presStyleCnt="5" custScaleY="231750">
         <dgm:presLayoutVars>
           <dgm:bulletEnabled val="1"/>
         </dgm:presLayoutVars>
@@ -5427,6 +5121,7 @@
     <dgm:cxn modelId="{E81AA497-6888-4180-AE35-3749BCB5485A}" srcId="{176F5F4A-EC9C-4A9A-886D-E7B8DA9A977B}" destId="{F12D6B66-34DC-4337-B102-DB57C2339F09}" srcOrd="1" destOrd="0" parTransId="{40748F3D-EEE0-47AA-B0DE-427980EA5578}" sibTransId="{7793A5FF-AE58-45EF-8124-611C104F08B3}"/>
     <dgm:cxn modelId="{1E5BDE99-46DC-4AF5-8736-D0031529D62F}" type="presOf" srcId="{704B54DE-7AF4-4CB4-B608-23986912A49B}" destId="{45F4CA9F-B6AE-440A-846E-C46613653CA3}" srcOrd="0" destOrd="0" presId="urn:microsoft.com/office/officeart/2005/8/layout/vList5"/>
     <dgm:cxn modelId="{D18816A2-C861-4B11-ADAC-D7DD319C1BDA}" srcId="{ECAB65BA-2CCB-47FA-90F0-12502F7CD667}" destId="{C17AEEAA-6BF3-4E08-B01D-1AF2529D908A}" srcOrd="5" destOrd="0" parTransId="{76262691-2D34-4904-8849-FB15ABAE9BE6}" sibTransId="{5D2B15A5-D1C4-4698-B821-B67BBF8BC8F3}"/>
+    <dgm:cxn modelId="{9B4BA5A3-9782-40D8-99C4-B360C5C2A9B4}" type="presOf" srcId="{685943C9-8272-4FDD-92D1-BD463F4484C1}" destId="{45F4CA9F-B6AE-440A-846E-C46613653CA3}" srcOrd="0" destOrd="3" presId="urn:microsoft.com/office/officeart/2005/8/layout/vList5"/>
     <dgm:cxn modelId="{042E20AD-4D35-41C8-A7AA-E75C9DA3F1F5}" srcId="{176F5F4A-EC9C-4A9A-886D-E7B8DA9A977B}" destId="{B5A5478C-0343-4268-BCA9-21C859FD435A}" srcOrd="0" destOrd="0" parTransId="{93F7AD26-2974-4D96-B707-9534BC42BA9C}" sibTransId="{813128D8-D87A-4AA3-A069-80A4FC9CD7B4}"/>
     <dgm:cxn modelId="{CB6C10B6-1A65-433E-8634-E3ED426DEB18}" srcId="{7622099B-C41C-408D-A09C-4C036F524DB3}" destId="{9B2B852C-EAA3-47DA-A8FA-B03219776D86}" srcOrd="4" destOrd="0" parTransId="{3946658C-70C2-415C-B4E6-80B0DF88B1D8}" sibTransId="{A162B4E3-799D-41D8-91A4-BDB9FDF5E130}"/>
     <dgm:cxn modelId="{0F0520BA-C7F4-44E5-A8F7-BD02723706EE}" type="presOf" srcId="{775A0E56-45E5-4F2F-8BB2-03888CBCA43E}" destId="{EAB654AF-3E2D-4818-B670-E9647EFD3FB1}" srcOrd="0" destOrd="0" presId="urn:microsoft.com/office/officeart/2005/8/layout/vList5"/>
@@ -5440,6 +5135,7 @@
     <dgm:cxn modelId="{60A747EB-17A6-4C30-96A1-CCA6A610E13A}" type="presOf" srcId="{35F4F4C7-D747-40EE-878A-7A3383C1A93F}" destId="{C6BB41D9-E81B-4360-A83F-7686DB121D4E}" srcOrd="0" destOrd="0" presId="urn:microsoft.com/office/officeart/2005/8/layout/vList5"/>
     <dgm:cxn modelId="{C172C7F5-BA9C-4BB9-8259-F4B1498BFE88}" srcId="{7622099B-C41C-408D-A09C-4C036F524DB3}" destId="{ECAB65BA-2CCB-47FA-90F0-12502F7CD667}" srcOrd="2" destOrd="0" parTransId="{2912F7AE-6121-4AE1-8137-BCE86CA0E436}" sibTransId="{913F1ADE-97C3-454B-ACCF-AFAA92708741}"/>
     <dgm:cxn modelId="{C14BD9FC-B08E-4F82-891E-E7EAB3DD2A87}" type="presOf" srcId="{176F5F4A-EC9C-4A9A-886D-E7B8DA9A977B}" destId="{55F269E7-8569-4A8D-93B1-BA701EEFCDFF}" srcOrd="0" destOrd="0" presId="urn:microsoft.com/office/officeart/2005/8/layout/vList5"/>
+    <dgm:cxn modelId="{9A1DFDFF-8F08-43BF-B4F8-5A7E67284CD6}" srcId="{775A0E56-45E5-4F2F-8BB2-03888CBCA43E}" destId="{685943C9-8272-4FDD-92D1-BD463F4484C1}" srcOrd="3" destOrd="0" parTransId="{145BAE05-C89D-41CB-A7CC-B1804696510A}" sibTransId="{81A2362E-F051-4A5C-937C-C29D68FD3C4D}"/>
     <dgm:cxn modelId="{2F9719D8-63CF-4ED7-8AEE-2D3DF667B6B9}" type="presParOf" srcId="{07638703-1C65-454E-AA9A-E84CCA6DD2B5}" destId="{B6902EAA-8BF8-45C4-B924-C9485753A1BF}" srcOrd="0" destOrd="0" presId="urn:microsoft.com/office/officeart/2005/8/layout/vList5"/>
     <dgm:cxn modelId="{AEA57737-BD58-4A5B-8F58-D7026B94DAAC}" type="presParOf" srcId="{B6902EAA-8BF8-45C4-B924-C9485753A1BF}" destId="{48CB45E5-79AD-4179-ABE2-58D4594A1DDA}" srcOrd="0" destOrd="0" presId="urn:microsoft.com/office/officeart/2005/8/layout/vList5"/>
     <dgm:cxn modelId="{47C24C43-08CC-4CEA-8D97-8DC4867B64F6}" type="presParOf" srcId="{B6902EAA-8BF8-45C4-B924-C9485753A1BF}" destId="{C6BB41D9-E81B-4360-A83F-7686DB121D4E}" srcOrd="1" destOrd="0" presId="urn:microsoft.com/office/officeart/2005/8/layout/vList5"/>
@@ -5482,167 +5178,6 @@
       <dsp:cNvGrpSpPr/>
     </dsp:nvGrpSpPr>
     <dsp:grpSpPr/>
-    <dsp:sp modelId="{C2B29FA8-9630-4575-8343-B620FEB2808E}">
-      <dsp:nvSpPr>
-        <dsp:cNvPr id="0" name=""/>
-        <dsp:cNvSpPr/>
-      </dsp:nvSpPr>
-      <dsp:spPr>
-        <a:xfrm rot="5400000">
-          <a:off x="3562541" y="-1820738"/>
-          <a:ext cx="403572" cy="4163959"/>
-        </a:xfrm>
-        <a:prstGeom prst="round2SameRect">
-          <a:avLst/>
-        </a:prstGeom>
-        <a:solidFill>
-          <a:schemeClr val="accent1">
-            <a:alpha val="90000"/>
-            <a:tint val="40000"/>
-            <a:hueOff val="0"/>
-            <a:satOff val="0"/>
-            <a:lumOff val="0"/>
-            <a:alphaOff val="0"/>
-          </a:schemeClr>
-        </a:solidFill>
-        <a:ln w="12700" cap="flat" cmpd="sng" algn="ctr">
-          <a:noFill/>
-          <a:prstDash val="solid"/>
-          <a:miter lim="800000"/>
-        </a:ln>
-        <a:effectLst/>
-        <a:scene3d>
-          <a:camera prst="orthographicFront"/>
-          <a:lightRig rig="threePt" dir="t">
-            <a:rot lat="0" lon="0" rev="7500000"/>
-          </a:lightRig>
-        </a:scene3d>
-        <a:sp3d extrusionH="190500" prstMaterial="dkEdge">
-          <a:bevelT w="120650" h="38100" prst="relaxedInset"/>
-          <a:bevelB w="120650" h="57150" prst="relaxedInset"/>
-          <a:contourClr>
-            <a:schemeClr val="bg1"/>
-          </a:contourClr>
-        </a:sp3d>
-      </dsp:spPr>
-      <dsp:style>
-        <a:lnRef idx="1">
-          <a:scrgbClr r="0" g="0" b="0"/>
-        </a:lnRef>
-        <a:fillRef idx="1">
-          <a:scrgbClr r="0" g="0" b="0"/>
-        </a:fillRef>
-        <a:effectRef idx="2">
-          <a:scrgbClr r="0" g="0" b="0"/>
-        </a:effectRef>
-        <a:fontRef idx="minor"/>
-      </dsp:style>
-      <dsp:txBody>
-        <a:bodyPr spcFirstLastPara="0" vert="horz" wrap="square" lIns="247650" tIns="123825" rIns="247650" bIns="123825" numCol="1" spcCol="1270" anchor="ctr" anchorCtr="0">
-          <a:noAutofit/>
-        </a:bodyPr>
-        <a:lstStyle/>
-        <a:p>
-          <a:pPr marL="114300" lvl="1" indent="-114300" algn="l" defTabSz="666750">
-            <a:lnSpc>
-              <a:spcPct val="90000"/>
-            </a:lnSpc>
-            <a:spcBef>
-              <a:spcPct val="0"/>
-            </a:spcBef>
-            <a:spcAft>
-              <a:spcPct val="15000"/>
-            </a:spcAft>
-            <a:buChar char="•"/>
-          </a:pPr>
-          <a:r>
-            <a:rPr lang="en-US" sz="1500" kern="1200" dirty="0"/>
-            <a:t>AACT bd | CSV Clinical Trials.gov</a:t>
-          </a:r>
-          <a:endParaRPr lang="en-GB" sz="1500" kern="1200" dirty="0"/>
-        </a:p>
-      </dsp:txBody>
-      <dsp:txXfrm rot="-5400000">
-        <a:off x="1682348" y="79156"/>
-        <a:ext cx="4144258" cy="364170"/>
-      </dsp:txXfrm>
-    </dsp:sp>
-    <dsp:sp modelId="{90CDA8DC-6CB2-49A7-A18C-F0D302BDC675}">
-      <dsp:nvSpPr>
-        <dsp:cNvPr id="0" name=""/>
-        <dsp:cNvSpPr/>
-      </dsp:nvSpPr>
-      <dsp:spPr>
-        <a:xfrm>
-          <a:off x="837" y="597"/>
-          <a:ext cx="1681510" cy="521287"/>
-        </a:xfrm>
-        <a:prstGeom prst="roundRect">
-          <a:avLst/>
-        </a:prstGeom>
-        <a:solidFill>
-          <a:schemeClr val="accent5">
-            <a:lumMod val="50000"/>
-          </a:schemeClr>
-        </a:solidFill>
-        <a:ln>
-          <a:noFill/>
-        </a:ln>
-        <a:effectLst/>
-        <a:scene3d>
-          <a:camera prst="orthographicFront"/>
-          <a:lightRig rig="threePt" dir="t">
-            <a:rot lat="0" lon="0" rev="7500000"/>
-          </a:lightRig>
-        </a:scene3d>
-        <a:sp3d prstMaterial="plastic">
-          <a:bevelT w="127000" h="25400" prst="relaxedInset"/>
-        </a:sp3d>
-      </dsp:spPr>
-      <dsp:style>
-        <a:lnRef idx="0">
-          <a:scrgbClr r="0" g="0" b="0"/>
-        </a:lnRef>
-        <a:fillRef idx="3">
-          <a:scrgbClr r="0" g="0" b="0"/>
-        </a:fillRef>
-        <a:effectRef idx="2">
-          <a:scrgbClr r="0" g="0" b="0"/>
-        </a:effectRef>
-        <a:fontRef idx="minor">
-          <a:schemeClr val="lt1"/>
-        </a:fontRef>
-      </dsp:style>
-      <dsp:txBody>
-        <a:bodyPr spcFirstLastPara="0" vert="horz" wrap="square" lIns="68580" tIns="34290" rIns="68580" bIns="34290" numCol="1" spcCol="1270" anchor="ctr" anchorCtr="0">
-          <a:noAutofit/>
-        </a:bodyPr>
-        <a:lstStyle/>
-        <a:p>
-          <a:pPr marL="0" lvl="0" indent="0" algn="ctr" defTabSz="800100">
-            <a:lnSpc>
-              <a:spcPct val="90000"/>
-            </a:lnSpc>
-            <a:spcBef>
-              <a:spcPct val="0"/>
-            </a:spcBef>
-            <a:spcAft>
-              <a:spcPct val="35000"/>
-            </a:spcAft>
-            <a:buNone/>
-          </a:pPr>
-          <a:r>
-            <a:rPr lang="en-US" sz="1800" kern="1200" dirty="0"/>
-            <a:t>Data Sources</a:t>
-          </a:r>
-          <a:endParaRPr lang="en-GB" sz="1800" kern="1200" dirty="0"/>
-        </a:p>
-      </dsp:txBody>
-      <dsp:txXfrm>
-        <a:off x="26284" y="26044"/>
-        <a:ext cx="1630616" cy="470393"/>
-      </dsp:txXfrm>
-    </dsp:sp>
     <dsp:sp modelId="{EFC1B403-9E6E-4411-9B69-79A1584C7937}">
       <dsp:nvSpPr>
         <dsp:cNvPr id="0" name=""/>
@@ -5650,8 +5185,8 @@
       </dsp:nvSpPr>
       <dsp:spPr>
         <a:xfrm rot="5400000">
-          <a:off x="3106607" y="-876309"/>
-          <a:ext cx="1315441" cy="4163959"/>
+          <a:off x="3040106" y="-1354763"/>
+          <a:ext cx="1448443" cy="4163959"/>
         </a:xfrm>
         <a:prstGeom prst="round2SameRect">
           <a:avLst/>
@@ -5718,14 +5253,19 @@
           </a:pPr>
           <a:r>
             <a:rPr lang="en-GB" sz="1500" kern="1200" dirty="0"/>
-            <a:t>Missing values : </a:t>
+            <a:t>Missing: </a:t>
           </a:r>
-          <a:br>
-            <a:rPr lang="en-GB" sz="1500" kern="1200" dirty="0"/>
-          </a:br>
           <a:r>
             <a:rPr lang="en-US" sz="1500" kern="1200" dirty="0"/>
-            <a:t>CSV+bd, Reg. Expr. Text Mining, Merge levels, level creation (e.g., other), Drop</a:t>
+            <a:t>csv+bd, RegEx, Merge/Create levels (e.g</a:t>
+          </a:r>
+          <a:r>
+            <a:rPr lang="en-US" sz="1500" kern="1200"/>
+            <a:t>., Other</a:t>
+          </a:r>
+          <a:r>
+            <a:rPr lang="en-US" sz="1500" kern="1200" dirty="0"/>
+            <a:t>), Drop</a:t>
           </a:r>
           <a:endParaRPr lang="en-GB" sz="1500" kern="1200" dirty="0"/>
         </a:p>
@@ -5762,14 +5302,33 @@
           </a:pPr>
           <a:r>
             <a:rPr lang="en-US" sz="1500" kern="1200" dirty="0"/>
+            <a:t>MICE</a:t>
+          </a:r>
+          <a:endParaRPr lang="en-GB" sz="1500" kern="1200" dirty="0"/>
+        </a:p>
+        <a:p>
+          <a:pPr marL="114300" lvl="1" indent="-114300" algn="l" defTabSz="666750">
+            <a:lnSpc>
+              <a:spcPct val="90000"/>
+            </a:lnSpc>
+            <a:spcBef>
+              <a:spcPct val="0"/>
+            </a:spcBef>
+            <a:spcAft>
+              <a:spcPct val="15000"/>
+            </a:spcAft>
+            <a:buChar char="•"/>
+          </a:pPr>
+          <a:r>
+            <a:rPr lang="en-US" sz="1500" kern="1200" dirty="0"/>
             <a:t>df1, df2, df3, df4 ~ Phase</a:t>
           </a:r>
           <a:endParaRPr lang="en-GB" sz="1500" kern="1200" dirty="0"/>
         </a:p>
       </dsp:txBody>
       <dsp:txXfrm rot="-5400000">
-        <a:off x="1682349" y="612164"/>
-        <a:ext cx="4099744" cy="1187011"/>
+        <a:off x="1682349" y="73701"/>
+        <a:ext cx="4093252" cy="1307029"/>
       </dsp:txXfrm>
     </dsp:sp>
     <dsp:sp modelId="{20EFAA17-3592-4F78-AEAE-2CD118F957A5}">
@@ -5779,8 +5338,8 @@
       </dsp:nvSpPr>
       <dsp:spPr>
         <a:xfrm>
-          <a:off x="837" y="558684"/>
-          <a:ext cx="1681510" cy="1293970"/>
+          <a:off x="837" y="14815"/>
+          <a:ext cx="1681510" cy="1424801"/>
         </a:xfrm>
         <a:prstGeom prst="roundRect">
           <a:avLst/>
@@ -5843,8 +5402,8 @@
         </a:p>
       </dsp:txBody>
       <dsp:txXfrm>
-        <a:off x="64003" y="621850"/>
-        <a:ext cx="1555178" cy="1167638"/>
+        <a:off x="70390" y="84368"/>
+        <a:ext cx="1542404" cy="1285695"/>
       </dsp:txXfrm>
     </dsp:sp>
     <dsp:sp modelId="{4E062ED7-C8B7-4731-A7F1-BE128EC98711}">
@@ -5854,8 +5413,8 @@
       </dsp:nvSpPr>
       <dsp:spPr>
         <a:xfrm rot="5400000">
-          <a:off x="1752022" y="1819780"/>
-          <a:ext cx="4024610" cy="4163959"/>
+          <a:off x="1548562" y="1613923"/>
+          <a:ext cx="4431530" cy="4163959"/>
         </a:xfrm>
         <a:prstGeom prst="round2SameRect">
           <a:avLst/>
@@ -5944,25 +5503,6 @@
             <a:t>Frequency tables</a:t>
           </a:r>
           <a:endParaRPr lang="en-GB" sz="1500" kern="1200" dirty="0"/>
-        </a:p>
-        <a:p>
-          <a:pPr marL="114300" lvl="1" indent="-114300" algn="ctr" defTabSz="666750">
-            <a:lnSpc>
-              <a:spcPct val="90000"/>
-            </a:lnSpc>
-            <a:spcBef>
-              <a:spcPct val="0"/>
-            </a:spcBef>
-            <a:spcAft>
-              <a:spcPct val="15000"/>
-            </a:spcAft>
-            <a:buNone/>
-          </a:pPr>
-          <a:r>
-            <a:rPr lang="en-US" sz="1500" b="1" kern="1200" dirty="0"/>
-            <a:t>Train Set</a:t>
-          </a:r>
-          <a:endParaRPr lang="en-GB" sz="1500" b="1" kern="1200" dirty="0"/>
         </a:p>
         <a:p>
           <a:pPr marL="114300" lvl="1" indent="-114300" algn="l" defTabSz="666750">
@@ -6102,7 +5642,7 @@
           </a:pPr>
           <a:r>
             <a:rPr lang="en-GB" sz="1500" kern="1200" dirty="0"/>
-            <a:t>Outliers (not excluded)</a:t>
+            <a:t>Outliers</a:t>
           </a:r>
         </a:p>
         <a:p>
@@ -6192,25 +5732,17 @@
           </a:pPr>
           <a:r>
             <a:rPr lang="en-US" sz="1500" kern="1200" dirty="0"/>
-            <a:t>Feature Selection Exploratory </a:t>
+            <a:t>Feature Selection Exploratory Analysis </a:t>
           </a:r>
           <a:r>
-            <a:rPr lang="en-US" sz="1500" kern="1200"/>
-            <a:t>Analysis </a:t>
-          </a:r>
-          <a:r>
-            <a:rPr lang="en-US" sz="1500" kern="1200">
+            <a:rPr lang="en-US" sz="1500" kern="1200" dirty="0">
               <a:sym typeface="Wingdings" panose="05000000000000000000" pitchFamily="2" charset="2"/>
             </a:rPr>
             <a:t> </a:t>
           </a:r>
           <a:r>
-            <a:rPr lang="en-US" sz="1500" kern="1200"/>
-            <a:t>Train </a:t>
-          </a:r>
-          <a:r>
             <a:rPr lang="en-US" sz="1500" kern="1200" dirty="0"/>
-            <a:t>set </a:t>
+            <a:t>Train set </a:t>
           </a:r>
           <a:r>
             <a:rPr lang="en-US" sz="1500" kern="1200" dirty="0">
@@ -6230,8 +5762,8 @@
         </a:p>
       </dsp:txBody>
       <dsp:txXfrm rot="-5400000">
-        <a:off x="1682348" y="2085920"/>
-        <a:ext cx="3967494" cy="3631680"/>
+        <a:off x="1682347" y="1683406"/>
+        <a:ext cx="3960691" cy="4024994"/>
       </dsp:txXfrm>
     </dsp:sp>
     <dsp:sp modelId="{9E95D006-3A52-4C9F-915C-CE452CD5CD7D}">
@@ -6241,8 +5773,8 @@
       </dsp:nvSpPr>
       <dsp:spPr>
         <a:xfrm>
-          <a:off x="837" y="1901142"/>
-          <a:ext cx="1681510" cy="4001235"/>
+          <a:off x="837" y="1493006"/>
+          <a:ext cx="1681510" cy="4405792"/>
         </a:xfrm>
         <a:prstGeom prst="roundRect">
           <a:avLst/>
@@ -6305,8 +5837,8 @@
         </a:p>
       </dsp:txBody>
       <dsp:txXfrm>
-        <a:off x="82922" y="1983227"/>
-        <a:ext cx="1517340" cy="3837065"/>
+        <a:off x="82922" y="1575091"/>
+        <a:ext cx="1517340" cy="4241622"/>
       </dsp:txXfrm>
     </dsp:sp>
   </dsp:spTree>
@@ -6328,8 +5860,8 @@
       </dsp:nvSpPr>
       <dsp:spPr>
         <a:xfrm rot="5400000">
-          <a:off x="3602654" y="-1478045"/>
-          <a:ext cx="746809" cy="3742172"/>
+          <a:off x="3623052" y="-1502225"/>
+          <a:ext cx="706011" cy="3742172"/>
         </a:xfrm>
         <a:prstGeom prst="round2SameRect">
           <a:avLst/>
@@ -6389,14 +5921,14 @@
           </a:pPr>
           <a:r>
             <a:rPr lang="en-US" sz="1500" kern="1200" dirty="0"/>
-            <a:t>Dummies (Completed = 0, Terminated = 1)</a:t>
+            <a:t>Completed = 0, Terminated = 1</a:t>
           </a:r>
           <a:endParaRPr lang="en-GB" sz="1500" kern="1200" dirty="0"/>
         </a:p>
       </dsp:txBody>
       <dsp:txXfrm rot="-5400000">
-        <a:off x="2104973" y="56092"/>
-        <a:ext cx="3705716" cy="673897"/>
+        <a:off x="2104972" y="50320"/>
+        <a:ext cx="3707707" cy="637081"/>
       </dsp:txXfrm>
     </dsp:sp>
     <dsp:sp modelId="{48CB45E5-79AD-4179-ABE2-58D4594A1DDA}">
@@ -6407,7 +5939,7 @@
       <dsp:spPr>
         <a:xfrm>
           <a:off x="2020" y="0"/>
-          <a:ext cx="2104972" cy="779765"/>
+          <a:ext cx="2104972" cy="737166"/>
         </a:xfrm>
         <a:prstGeom prst="roundRect">
           <a:avLst/>
@@ -6471,8 +6003,8 @@
         </a:p>
       </dsp:txBody>
       <dsp:txXfrm>
-        <a:off x="40085" y="38065"/>
-        <a:ext cx="2028842" cy="703635"/>
+        <a:off x="38005" y="35985"/>
+        <a:ext cx="2033002" cy="665196"/>
       </dsp:txXfrm>
     </dsp:sp>
     <dsp:sp modelId="{45F4CA9F-B6AE-440A-846E-C46613653CA3}">
@@ -6482,8 +6014,8 @@
       </dsp:nvSpPr>
       <dsp:spPr>
         <a:xfrm rot="5400000">
-          <a:off x="3397333" y="-474559"/>
-          <a:ext cx="1141925" cy="3734867"/>
+          <a:off x="3428525" y="-553359"/>
+          <a:ext cx="1079542" cy="3734867"/>
         </a:xfrm>
         <a:prstGeom prst="round2SameRect">
           <a:avLst/>
@@ -6569,7 +6101,7 @@
           </a:pPr>
           <a:r>
             <a:rPr lang="en-US" sz="1500" kern="1200" dirty="0"/>
-            <a:t>Random Under Sample : Class Imbalance</a:t>
+            <a:t>Random Under Sample (Imbalance)</a:t>
           </a:r>
           <a:endParaRPr lang="en-GB" sz="1500" kern="1200" dirty="0"/>
         </a:p>
@@ -6588,14 +6120,33 @@
           </a:pPr>
           <a:r>
             <a:rPr lang="en-US" sz="1500" kern="1200" dirty="0"/>
-            <a:t>Min-Max Scaler (positive values)</a:t>
+            <a:t>Min-Max Scaler</a:t>
+          </a:r>
+          <a:endParaRPr lang="en-GB" sz="1500" kern="1200" dirty="0"/>
+        </a:p>
+        <a:p>
+          <a:pPr marL="114300" lvl="1" indent="-114300" algn="l" defTabSz="666750">
+            <a:lnSpc>
+              <a:spcPct val="90000"/>
+            </a:lnSpc>
+            <a:spcBef>
+              <a:spcPct val="0"/>
+            </a:spcBef>
+            <a:spcAft>
+              <a:spcPct val="15000"/>
+            </a:spcAft>
+            <a:buChar char="•"/>
+          </a:pPr>
+          <a:r>
+            <a:rPr lang="en-US" sz="1500" kern="1200" dirty="0"/>
+            <a:t>VIF</a:t>
           </a:r>
           <a:endParaRPr lang="en-GB" sz="1500" kern="1200" dirty="0"/>
         </a:p>
       </dsp:txBody>
       <dsp:txXfrm rot="-5400000">
-        <a:off x="2100862" y="877656"/>
-        <a:ext cx="3679123" cy="1030437"/>
+        <a:off x="2100863" y="827002"/>
+        <a:ext cx="3682168" cy="974144"/>
       </dsp:txXfrm>
     </dsp:sp>
     <dsp:sp modelId="{EAB654AF-3E2D-4818-B670-E9647EFD3FB1}">
@@ -6605,8 +6156,8 @@
       </dsp:nvSpPr>
       <dsp:spPr>
         <a:xfrm>
-          <a:off x="2016" y="867835"/>
-          <a:ext cx="2100862" cy="1043762"/>
+          <a:off x="2016" y="817717"/>
+          <a:ext cx="2100862" cy="986742"/>
         </a:xfrm>
         <a:prstGeom prst="roundRect">
           <a:avLst/>
@@ -6670,8 +6221,8 @@
         </a:p>
       </dsp:txBody>
       <dsp:txXfrm>
-        <a:off x="52968" y="918787"/>
-        <a:ext cx="1998958" cy="941858"/>
+        <a:off x="50185" y="865886"/>
+        <a:ext cx="2004524" cy="890404"/>
       </dsp:txXfrm>
     </dsp:sp>
     <dsp:sp modelId="{528CCE5E-2722-4EFC-B855-9221185C70A7}">
@@ -6681,8 +6232,8 @@
       </dsp:nvSpPr>
       <dsp:spPr>
         <a:xfrm rot="5400000">
-          <a:off x="3034899" y="1095536"/>
-          <a:ext cx="1866795" cy="3734867"/>
+          <a:off x="3085890" y="930961"/>
+          <a:ext cx="1764812" cy="3734867"/>
         </a:xfrm>
         <a:prstGeom prst="round2SameRect">
           <a:avLst/>
@@ -6768,7 +6319,7 @@
           </a:pPr>
           <a:r>
             <a:rPr lang="en-US" sz="1500" kern="1200" dirty="0"/>
-            <a:t>Logistic, Elastic Net, LDA, QDA </a:t>
+            <a:t>Logistic, LDA, QDA </a:t>
           </a:r>
           <a:endParaRPr lang="en-GB" sz="1500" kern="1200" dirty="0"/>
         </a:p>
@@ -6827,7 +6378,7 @@
           </a:pPr>
           <a:r>
             <a:rPr lang="en-GB" sz="1500" b="0" kern="1200" dirty="0"/>
-            <a:t>Pruned tree, Random Forest</a:t>
+            <a:t>Random Forest</a:t>
           </a:r>
         </a:p>
         <a:p>
@@ -6851,8 +6402,8 @@
         </a:p>
       </dsp:txBody>
       <dsp:txXfrm rot="-5400000">
-        <a:off x="2100864" y="2120701"/>
-        <a:ext cx="3643738" cy="1684537"/>
+        <a:off x="2100863" y="2002140"/>
+        <a:ext cx="3648716" cy="1592510"/>
       </dsp:txXfrm>
     </dsp:sp>
     <dsp:sp modelId="{347B65B5-D951-4BD4-80BE-FAE3D7D0B395}">
@@ -6862,8 +6413,8 @@
       </dsp:nvSpPr>
       <dsp:spPr>
         <a:xfrm>
-          <a:off x="2016" y="1999667"/>
-          <a:ext cx="2100862" cy="1920288"/>
+          <a:off x="2016" y="1887717"/>
+          <a:ext cx="2100862" cy="1815383"/>
         </a:xfrm>
         <a:prstGeom prst="roundRect">
           <a:avLst/>
@@ -6921,14 +6472,14 @@
           </a:pPr>
           <a:r>
             <a:rPr lang="en-US" sz="1600" b="0" kern="1200" dirty="0"/>
-            <a:t>Models</a:t>
+            <a:t>Statistical Analysis</a:t>
           </a:r>
           <a:endParaRPr lang="en-GB" sz="1600" kern="1200" dirty="0"/>
         </a:p>
       </dsp:txBody>
       <dsp:txXfrm>
-        <a:off x="95757" y="2093408"/>
-        <a:ext cx="1913380" cy="1732806"/>
+        <a:off x="90636" y="1976337"/>
+        <a:ext cx="1923622" cy="1638143"/>
       </dsp:txXfrm>
     </dsp:sp>
     <dsp:sp modelId="{26C00646-3EB8-4E4A-8296-CA3B860AC9B0}">
@@ -6938,8 +6489,8 @@
       </dsp:nvSpPr>
       <dsp:spPr>
         <a:xfrm rot="5400000">
-          <a:off x="3562173" y="2500792"/>
-          <a:ext cx="812247" cy="3734867"/>
+          <a:off x="3584359" y="2259449"/>
+          <a:ext cx="767874" cy="3734867"/>
         </a:xfrm>
         <a:prstGeom prst="round2SameRect">
           <a:avLst/>
@@ -7025,14 +6576,14 @@
           </a:pPr>
           <a:r>
             <a:rPr lang="en-US" sz="1500" kern="1200" dirty="0"/>
-            <a:t>K-Fold CV</a:t>
+            <a:t>5 K-Fold CV</a:t>
           </a:r>
           <a:endParaRPr lang="en-GB" sz="1500" kern="1200" dirty="0"/>
         </a:p>
       </dsp:txBody>
       <dsp:txXfrm rot="-5400000">
-        <a:off x="2100864" y="4001753"/>
-        <a:ext cx="3695216" cy="732945"/>
+        <a:off x="2100863" y="3780431"/>
+        <a:ext cx="3697382" cy="692904"/>
       </dsp:txXfrm>
     </dsp:sp>
     <dsp:sp modelId="{55F269E7-8569-4A8D-93B1-BA701EEFCDFF}">
@@ -7042,8 +6593,8 @@
       </dsp:nvSpPr>
       <dsp:spPr>
         <a:xfrm>
-          <a:off x="2016" y="3975185"/>
-          <a:ext cx="2100862" cy="779765"/>
+          <a:off x="2016" y="3755313"/>
+          <a:ext cx="2100862" cy="737166"/>
         </a:xfrm>
         <a:prstGeom prst="roundRect">
           <a:avLst/>
@@ -7107,8 +6658,8 @@
         </a:p>
       </dsp:txBody>
       <dsp:txXfrm>
-        <a:off x="40081" y="4013250"/>
-        <a:ext cx="2024732" cy="703635"/>
+        <a:off x="38001" y="3791298"/>
+        <a:ext cx="2028892" cy="665196"/>
       </dsp:txXfrm>
     </dsp:sp>
     <dsp:sp modelId="{7FCCB0FB-B29E-4A63-AD5D-91FA8360F37E}">
@@ -7118,8 +6669,8 @@
       </dsp:nvSpPr>
       <dsp:spPr>
         <a:xfrm rot="5400000">
-          <a:off x="3440790" y="3493162"/>
-          <a:ext cx="1062769" cy="3738518"/>
+          <a:off x="3288822" y="3361772"/>
+          <a:ext cx="1366707" cy="3738518"/>
         </a:xfrm>
         <a:prstGeom prst="round2SameRect">
           <a:avLst/>
@@ -7249,8 +6800,8 @@
         </a:p>
       </dsp:txBody>
       <dsp:txXfrm rot="-5400000">
-        <a:off x="2102916" y="4882916"/>
-        <a:ext cx="3686638" cy="959009"/>
+        <a:off x="2102917" y="4614395"/>
+        <a:ext cx="3671801" cy="1233273"/>
       </dsp:txXfrm>
     </dsp:sp>
     <dsp:sp modelId="{931D566F-3CC3-4DF1-B1AF-B7DE9820E2D9}">
@@ -7260,8 +6811,8 @@
       </dsp:nvSpPr>
       <dsp:spPr>
         <a:xfrm>
-          <a:off x="0" y="4813337"/>
-          <a:ext cx="2102916" cy="1098166"/>
+          <a:off x="0" y="4551743"/>
+          <a:ext cx="2102916" cy="1358576"/>
         </a:xfrm>
         <a:prstGeom prst="roundRect">
           <a:avLst/>
@@ -7329,8 +6880,8 @@
         </a:p>
       </dsp:txBody>
       <dsp:txXfrm>
-        <a:off x="53608" y="4866945"/>
-        <a:ext cx="1995700" cy="990950"/>
+        <a:off x="66320" y="4618063"/>
+        <a:ext cx="1970276" cy="1225936"/>
       </dsp:txXfrm>
     </dsp:sp>
   </dsp:spTree>
@@ -10476,7 +10027,7 @@
           <a:p>
             <a:fld id="{C1A9776D-B584-4D4B-981C-FA97E36C0636}" type="datetimeFigureOut">
               <a:rPr lang="en-GB" smtClean="0"/>
-              <a:t>22/10/2025</a:t>
+              <a:t>03/11/2025</a:t>
             </a:fld>
             <a:endParaRPr lang="en-GB"/>
           </a:p>
@@ -10676,7 +10227,7 @@
           <a:p>
             <a:fld id="{C1A9776D-B584-4D4B-981C-FA97E36C0636}" type="datetimeFigureOut">
               <a:rPr lang="en-GB" smtClean="0"/>
-              <a:t>22/10/2025</a:t>
+              <a:t>03/11/2025</a:t>
             </a:fld>
             <a:endParaRPr lang="en-GB"/>
           </a:p>
@@ -10886,7 +10437,7 @@
           <a:p>
             <a:fld id="{C1A9776D-B584-4D4B-981C-FA97E36C0636}" type="datetimeFigureOut">
               <a:rPr lang="en-GB" smtClean="0"/>
-              <a:t>22/10/2025</a:t>
+              <a:t>03/11/2025</a:t>
             </a:fld>
             <a:endParaRPr lang="en-GB"/>
           </a:p>
@@ -11086,7 +10637,7 @@
           <a:p>
             <a:fld id="{C1A9776D-B584-4D4B-981C-FA97E36C0636}" type="datetimeFigureOut">
               <a:rPr lang="en-GB" smtClean="0"/>
-              <a:t>22/10/2025</a:t>
+              <a:t>03/11/2025</a:t>
             </a:fld>
             <a:endParaRPr lang="en-GB"/>
           </a:p>
@@ -11362,7 +10913,7 @@
           <a:p>
             <a:fld id="{C1A9776D-B584-4D4B-981C-FA97E36C0636}" type="datetimeFigureOut">
               <a:rPr lang="en-GB" smtClean="0"/>
-              <a:t>22/10/2025</a:t>
+              <a:t>03/11/2025</a:t>
             </a:fld>
             <a:endParaRPr lang="en-GB"/>
           </a:p>
@@ -11630,7 +11181,7 @@
           <a:p>
             <a:fld id="{C1A9776D-B584-4D4B-981C-FA97E36C0636}" type="datetimeFigureOut">
               <a:rPr lang="en-GB" smtClean="0"/>
-              <a:t>22/10/2025</a:t>
+              <a:t>03/11/2025</a:t>
             </a:fld>
             <a:endParaRPr lang="en-GB"/>
           </a:p>
@@ -12045,7 +11596,7 @@
           <a:p>
             <a:fld id="{C1A9776D-B584-4D4B-981C-FA97E36C0636}" type="datetimeFigureOut">
               <a:rPr lang="en-GB" smtClean="0"/>
-              <a:t>22/10/2025</a:t>
+              <a:t>03/11/2025</a:t>
             </a:fld>
             <a:endParaRPr lang="en-GB"/>
           </a:p>
@@ -12187,7 +11738,7 @@
           <a:p>
             <a:fld id="{C1A9776D-B584-4D4B-981C-FA97E36C0636}" type="datetimeFigureOut">
               <a:rPr lang="en-GB" smtClean="0"/>
-              <a:t>22/10/2025</a:t>
+              <a:t>03/11/2025</a:t>
             </a:fld>
             <a:endParaRPr lang="en-GB"/>
           </a:p>
@@ -12300,7 +11851,7 @@
           <a:p>
             <a:fld id="{C1A9776D-B584-4D4B-981C-FA97E36C0636}" type="datetimeFigureOut">
               <a:rPr lang="en-GB" smtClean="0"/>
-              <a:t>22/10/2025</a:t>
+              <a:t>03/11/2025</a:t>
             </a:fld>
             <a:endParaRPr lang="en-GB"/>
           </a:p>
@@ -12613,7 +12164,7 @@
           <a:p>
             <a:fld id="{C1A9776D-B584-4D4B-981C-FA97E36C0636}" type="datetimeFigureOut">
               <a:rPr lang="en-GB" smtClean="0"/>
-              <a:t>22/10/2025</a:t>
+              <a:t>03/11/2025</a:t>
             </a:fld>
             <a:endParaRPr lang="en-GB"/>
           </a:p>
@@ -12902,7 +12453,7 @@
           <a:p>
             <a:fld id="{C1A9776D-B584-4D4B-981C-FA97E36C0636}" type="datetimeFigureOut">
               <a:rPr lang="en-GB" smtClean="0"/>
-              <a:t>22/10/2025</a:t>
+              <a:t>03/11/2025</a:t>
             </a:fld>
             <a:endParaRPr lang="en-GB"/>
           </a:p>
@@ -13158,7 +12709,7 @@
           <a:p>
             <a:fld id="{C1A9776D-B584-4D4B-981C-FA97E36C0636}" type="datetimeFigureOut">
               <a:rPr lang="en-GB" smtClean="0"/>
-              <a:t>22/10/2025</a:t>
+              <a:t>03/11/2025</a:t>
             </a:fld>
             <a:endParaRPr lang="en-GB"/>
           </a:p>
@@ -13597,7 +13148,9 @@
             <a:ext cx="10515600" cy="2051613"/>
           </a:xfrm>
           <a:ln>
-            <a:noFill/>
+            <a:solidFill>
+              <a:schemeClr val="tx1"/>
+            </a:solidFill>
           </a:ln>
         </p:spPr>
         <p:txBody>
@@ -14472,7 +14025,7 @@
         </p:nvSpPr>
         <p:spPr>
           <a:xfrm>
-            <a:off x="686765" y="5393438"/>
+            <a:off x="609600" y="5393438"/>
             <a:ext cx="10972800" cy="1192557"/>
           </a:xfrm>
           <a:prstGeom prst="rect">
@@ -14653,13 +14206,19 @@
           <a:p>
             <a:r>
               <a:rPr lang="en-US" sz="2000" dirty="0"/>
-              <a:t>Imbalanced towards Completed/Terminated ≈ 85:15</a:t>
+              <a:t>Imbalanced dataset Completed/Terminated ≈ 85:15</a:t>
             </a:r>
           </a:p>
           <a:p>
             <a:r>
               <a:rPr lang="en-GB" sz="2000" dirty="0"/>
-              <a:t>Skew real world data</a:t>
+              <a:t>Skewed real world data</a:t>
+            </a:r>
+          </a:p>
+          <a:p>
+            <a:r>
+              <a:rPr lang="en-GB" sz="2000" dirty="0"/>
+              <a:t>Many missing, inaccurate registries</a:t>
             </a:r>
           </a:p>
         </p:txBody>
@@ -16985,7 +16544,7 @@
             <p:ph sz="half" idx="1"/>
             <p:extLst>
               <p:ext uri="{D42A27DB-BD31-4B8C-83A1-F6EECF244321}">
-                <p14:modId xmlns:p14="http://schemas.microsoft.com/office/powerpoint/2010/main" val="446039592"/>
+                <p14:modId xmlns:p14="http://schemas.microsoft.com/office/powerpoint/2010/main" val="1199024067"/>
               </p:ext>
             </p:extLst>
           </p:nvPr>
@@ -17016,7 +16575,7 @@
             <p:ph sz="half" idx="2"/>
             <p:extLst>
               <p:ext uri="{D42A27DB-BD31-4B8C-83A1-F6EECF244321}">
-                <p14:modId xmlns:p14="http://schemas.microsoft.com/office/powerpoint/2010/main" val="3795742"/>
+                <p14:modId xmlns:p14="http://schemas.microsoft.com/office/powerpoint/2010/main" val="4279998502"/>
               </p:ext>
             </p:extLst>
           </p:nvPr>
@@ -17659,7 +17218,7 @@
           <a:p>
             <a:r>
               <a:rPr lang="en-US" sz="2000" dirty="0"/>
-              <a:t>EPV (Events per variable for minority outcome): ≥20 </a:t>
+              <a:t>EPV (Events per variable for minority outcome): ≥25 </a:t>
             </a:r>
           </a:p>
           <a:p>
@@ -18650,11 +18209,21 @@
             <a:off x="609600" y="685800"/>
             <a:ext cx="10972800" cy="5486400"/>
           </a:xfrm>
-          <a:ln>
+          <a:prstGeom prst="plaque">
+            <a:avLst/>
+          </a:prstGeom>
+          <a:ln w="19050">
             <a:solidFill>
               <a:schemeClr val="tx1"/>
             </a:solidFill>
           </a:ln>
+          <a:effectLst>
+            <a:outerShdw blurRad="63500" sx="102000" sy="102000" algn="ctr" rotWithShape="0">
+              <a:prstClr val="black">
+                <a:alpha val="40000"/>
+              </a:prstClr>
+            </a:outerShdw>
+          </a:effectLst>
         </p:spPr>
         <p:txBody>
           <a:bodyPr>
@@ -18718,7 +18287,7 @@
         </p:nvSpPr>
         <p:spPr>
           <a:xfrm>
-            <a:off x="609600" y="353549"/>
+            <a:off x="609600" y="582148"/>
             <a:ext cx="10972800" cy="457200"/>
           </a:xfrm>
           <a:ln>
@@ -18736,7 +18305,7 @@
             <a:pPr algn="ctr"/>
             <a:r>
               <a:rPr lang="en-US" sz="3000" b="1" dirty="0"/>
-              <a:t>Evaluation Metrics</a:t>
+              <a:t>Models’ Evaluation Metrics </a:t>
             </a:r>
             <a:endParaRPr lang="en-GB" sz="3000" b="1" dirty="0"/>
           </a:p>
@@ -18760,8 +18329,8 @@
         </p:nvSpPr>
         <p:spPr>
           <a:xfrm>
-            <a:off x="609600" y="1738003"/>
-            <a:ext cx="5332071" cy="4471035"/>
+            <a:off x="609601" y="2323308"/>
+            <a:ext cx="10972798" cy="3470605"/>
           </a:xfrm>
           <a:ln>
             <a:solidFill>
@@ -18775,52 +18344,35 @@
           </a:bodyPr>
           <a:lstStyle/>
           <a:p>
-            <a:pPr marL="0" indent="0" algn="ctr">
-              <a:buNone/>
-            </a:pPr>
-            <a:r>
-              <a:rPr lang="en-US" sz="2500" b="1" dirty="0"/>
-              <a:t>Models</a:t>
-            </a:r>
-          </a:p>
-          <a:p>
-            <a:r>
-              <a:rPr lang="en-US" sz="2000" b="1" dirty="0"/>
-              <a:t>AUC</a:t>
-            </a:r>
-          </a:p>
-          <a:p>
-            <a:pPr lvl="1"/>
-            <a:r>
-              <a:rPr lang="en-US" sz="2000" b="1" dirty="0"/>
-              <a:t>ROC Curve: </a:t>
-            </a:r>
-            <a:r>
-              <a:rPr lang="en-US" sz="2000" dirty="0"/>
+            <a:r>
+              <a:rPr lang="en-US" sz="2400" b="1" dirty="0"/>
+              <a:t>ROC AUC: </a:t>
+            </a:r>
+            <a:r>
+              <a:rPr lang="en-US" sz="2400" dirty="0"/>
               <a:t>Imbalanced Dataset towards minority class</a:t>
             </a:r>
-            <a:endParaRPr lang="en-US" sz="2000" dirty="0">
+            <a:endParaRPr lang="en-US" sz="2400" dirty="0">
               <a:sym typeface="Wingdings" panose="05000000000000000000" pitchFamily="2" charset="2"/>
             </a:endParaRPr>
           </a:p>
           <a:p>
-            <a:pPr lvl="1"/>
-            <a:r>
-              <a:rPr lang="en-US" sz="2000" b="1" dirty="0"/>
-              <a:t>PR Curve: ✓ </a:t>
-            </a:r>
-            <a:r>
-              <a:rPr lang="en-US" sz="2000" dirty="0"/>
+            <a:r>
+              <a:rPr lang="en-US" sz="2400" b="1" dirty="0"/>
+              <a:t>PR AUC : ✓ </a:t>
+            </a:r>
+            <a:r>
+              <a:rPr lang="en-US" sz="2400" dirty="0"/>
               <a:t>Imbalanced dataset </a:t>
             </a:r>
             <a:r>
-              <a:rPr lang="en-US" sz="2000" dirty="0">
+              <a:rPr lang="en-US" sz="2400" dirty="0">
                 <a:sym typeface="Wingdings" panose="05000000000000000000" pitchFamily="2" charset="2"/>
               </a:rPr>
               <a:t> </a:t>
             </a:r>
             <a:r>
-              <a:rPr lang="en-US" sz="2000" dirty="0"/>
+              <a:rPr lang="en-US" sz="2400" dirty="0"/>
               <a:t>performance decreased</a:t>
             </a:r>
           </a:p>
@@ -18853,341 +18405,6 @@
               <a:rPr lang="en-US" sz="2000" dirty="0"/>
               <a:t>Imbalanced Dataset</a:t>
             </a:r>
-          </a:p>
-        </p:txBody>
-      </p:sp>
-      <p:sp>
-        <p:nvSpPr>
-          <p:cNvPr id="5" name="Content Placeholder 2">
-            <a:extLst>
-              <a:ext uri="{FF2B5EF4-FFF2-40B4-BE49-F238E27FC236}">
-                <a16:creationId xmlns:a16="http://schemas.microsoft.com/office/drawing/2014/main" id="{C718A182-FD34-0FCF-F841-2D21F0DFE300}"/>
-              </a:ext>
-            </a:extLst>
-          </p:cNvPr>
-          <p:cNvSpPr txBox="1">
-            <a:spLocks/>
-          </p:cNvSpPr>
-          <p:nvPr/>
-        </p:nvSpPr>
-        <p:spPr>
-          <a:xfrm>
-            <a:off x="6250328" y="1738003"/>
-            <a:ext cx="5332071" cy="4471035"/>
-          </a:xfrm>
-          <a:prstGeom prst="rect">
-            <a:avLst/>
-          </a:prstGeom>
-          <a:ln>
-            <a:solidFill>
-              <a:schemeClr val="tx1"/>
-            </a:solidFill>
-          </a:ln>
-        </p:spPr>
-        <p:txBody>
-          <a:bodyPr vert="horz" lIns="91440" tIns="45720" rIns="91440" bIns="45720" rtlCol="0" anchor="ctr">
-            <a:noAutofit/>
-          </a:bodyPr>
-          <a:lstStyle>
-            <a:lvl1pPr marL="228600" indent="-228600" algn="l" defTabSz="914400" rtl="0" eaLnBrk="1" latinLnBrk="0" hangingPunct="1">
-              <a:lnSpc>
-                <a:spcPct val="90000"/>
-              </a:lnSpc>
-              <a:spcBef>
-                <a:spcPts val="1000"/>
-              </a:spcBef>
-              <a:buFont typeface="Arial" panose="020B0604020202020204" pitchFamily="34" charset="0"/>
-              <a:buChar char="•"/>
-              <a:defRPr sz="2800" kern="1200">
-                <a:solidFill>
-                  <a:schemeClr val="tx1"/>
-                </a:solidFill>
-                <a:latin typeface="+mn-lt"/>
-                <a:ea typeface="+mn-ea"/>
-                <a:cs typeface="+mn-cs"/>
-              </a:defRPr>
-            </a:lvl1pPr>
-            <a:lvl2pPr marL="685800" indent="-228600" algn="l" defTabSz="914400" rtl="0" eaLnBrk="1" latinLnBrk="0" hangingPunct="1">
-              <a:lnSpc>
-                <a:spcPct val="90000"/>
-              </a:lnSpc>
-              <a:spcBef>
-                <a:spcPts val="500"/>
-              </a:spcBef>
-              <a:buFont typeface="Arial" panose="020B0604020202020204" pitchFamily="34" charset="0"/>
-              <a:buChar char="•"/>
-              <a:defRPr sz="2400" kern="1200">
-                <a:solidFill>
-                  <a:schemeClr val="tx1"/>
-                </a:solidFill>
-                <a:latin typeface="+mn-lt"/>
-                <a:ea typeface="+mn-ea"/>
-                <a:cs typeface="+mn-cs"/>
-              </a:defRPr>
-            </a:lvl2pPr>
-            <a:lvl3pPr marL="1143000" indent="-228600" algn="l" defTabSz="914400" rtl="0" eaLnBrk="1" latinLnBrk="0" hangingPunct="1">
-              <a:lnSpc>
-                <a:spcPct val="90000"/>
-              </a:lnSpc>
-              <a:spcBef>
-                <a:spcPts val="500"/>
-              </a:spcBef>
-              <a:buFont typeface="Arial" panose="020B0604020202020204" pitchFamily="34" charset="0"/>
-              <a:buChar char="•"/>
-              <a:defRPr sz="2000" kern="1200">
-                <a:solidFill>
-                  <a:schemeClr val="tx1"/>
-                </a:solidFill>
-                <a:latin typeface="+mn-lt"/>
-                <a:ea typeface="+mn-ea"/>
-                <a:cs typeface="+mn-cs"/>
-              </a:defRPr>
-            </a:lvl3pPr>
-            <a:lvl4pPr marL="1600200" indent="-228600" algn="l" defTabSz="914400" rtl="0" eaLnBrk="1" latinLnBrk="0" hangingPunct="1">
-              <a:lnSpc>
-                <a:spcPct val="90000"/>
-              </a:lnSpc>
-              <a:spcBef>
-                <a:spcPts val="500"/>
-              </a:spcBef>
-              <a:buFont typeface="Arial" panose="020B0604020202020204" pitchFamily="34" charset="0"/>
-              <a:buChar char="•"/>
-              <a:defRPr sz="1800" kern="1200">
-                <a:solidFill>
-                  <a:schemeClr val="tx1"/>
-                </a:solidFill>
-                <a:latin typeface="+mn-lt"/>
-                <a:ea typeface="+mn-ea"/>
-                <a:cs typeface="+mn-cs"/>
-              </a:defRPr>
-            </a:lvl4pPr>
-            <a:lvl5pPr marL="2057400" indent="-228600" algn="l" defTabSz="914400" rtl="0" eaLnBrk="1" latinLnBrk="0" hangingPunct="1">
-              <a:lnSpc>
-                <a:spcPct val="90000"/>
-              </a:lnSpc>
-              <a:spcBef>
-                <a:spcPts val="500"/>
-              </a:spcBef>
-              <a:buFont typeface="Arial" panose="020B0604020202020204" pitchFamily="34" charset="0"/>
-              <a:buChar char="•"/>
-              <a:defRPr sz="1800" kern="1200">
-                <a:solidFill>
-                  <a:schemeClr val="tx1"/>
-                </a:solidFill>
-                <a:latin typeface="+mn-lt"/>
-                <a:ea typeface="+mn-ea"/>
-                <a:cs typeface="+mn-cs"/>
-              </a:defRPr>
-            </a:lvl5pPr>
-            <a:lvl6pPr marL="2514600" indent="-228600" algn="l" defTabSz="914400" rtl="0" eaLnBrk="1" latinLnBrk="0" hangingPunct="1">
-              <a:lnSpc>
-                <a:spcPct val="90000"/>
-              </a:lnSpc>
-              <a:spcBef>
-                <a:spcPts val="500"/>
-              </a:spcBef>
-              <a:buFont typeface="Arial" panose="020B0604020202020204" pitchFamily="34" charset="0"/>
-              <a:buChar char="•"/>
-              <a:defRPr sz="1800" kern="1200">
-                <a:solidFill>
-                  <a:schemeClr val="tx1"/>
-                </a:solidFill>
-                <a:latin typeface="+mn-lt"/>
-                <a:ea typeface="+mn-ea"/>
-                <a:cs typeface="+mn-cs"/>
-              </a:defRPr>
-            </a:lvl6pPr>
-            <a:lvl7pPr marL="2971800" indent="-228600" algn="l" defTabSz="914400" rtl="0" eaLnBrk="1" latinLnBrk="0" hangingPunct="1">
-              <a:lnSpc>
-                <a:spcPct val="90000"/>
-              </a:lnSpc>
-              <a:spcBef>
-                <a:spcPts val="500"/>
-              </a:spcBef>
-              <a:buFont typeface="Arial" panose="020B0604020202020204" pitchFamily="34" charset="0"/>
-              <a:buChar char="•"/>
-              <a:defRPr sz="1800" kern="1200">
-                <a:solidFill>
-                  <a:schemeClr val="tx1"/>
-                </a:solidFill>
-                <a:latin typeface="+mn-lt"/>
-                <a:ea typeface="+mn-ea"/>
-                <a:cs typeface="+mn-cs"/>
-              </a:defRPr>
-            </a:lvl7pPr>
-            <a:lvl8pPr marL="3429000" indent="-228600" algn="l" defTabSz="914400" rtl="0" eaLnBrk="1" latinLnBrk="0" hangingPunct="1">
-              <a:lnSpc>
-                <a:spcPct val="90000"/>
-              </a:lnSpc>
-              <a:spcBef>
-                <a:spcPts val="500"/>
-              </a:spcBef>
-              <a:buFont typeface="Arial" panose="020B0604020202020204" pitchFamily="34" charset="0"/>
-              <a:buChar char="•"/>
-              <a:defRPr sz="1800" kern="1200">
-                <a:solidFill>
-                  <a:schemeClr val="tx1"/>
-                </a:solidFill>
-                <a:latin typeface="+mn-lt"/>
-                <a:ea typeface="+mn-ea"/>
-                <a:cs typeface="+mn-cs"/>
-              </a:defRPr>
-            </a:lvl8pPr>
-            <a:lvl9pPr marL="3886200" indent="-228600" algn="l" defTabSz="914400" rtl="0" eaLnBrk="1" latinLnBrk="0" hangingPunct="1">
-              <a:lnSpc>
-                <a:spcPct val="90000"/>
-              </a:lnSpc>
-              <a:spcBef>
-                <a:spcPts val="500"/>
-              </a:spcBef>
-              <a:buFont typeface="Arial" panose="020B0604020202020204" pitchFamily="34" charset="0"/>
-              <a:buChar char="•"/>
-              <a:defRPr sz="1800" kern="1200">
-                <a:solidFill>
-                  <a:schemeClr val="tx1"/>
-                </a:solidFill>
-                <a:latin typeface="+mn-lt"/>
-                <a:ea typeface="+mn-ea"/>
-                <a:cs typeface="+mn-cs"/>
-              </a:defRPr>
-            </a:lvl9pPr>
-          </a:lstStyle>
-          <a:p>
-            <a:pPr marL="0" indent="0" algn="ctr">
-              <a:buFont typeface="Arial" panose="020B0604020202020204" pitchFamily="34" charset="0"/>
-              <a:buNone/>
-            </a:pPr>
-            <a:r>
-              <a:rPr lang="en-GB" sz="2500" b="1" dirty="0"/>
-              <a:t>Features</a:t>
-            </a:r>
-            <a:r>
-              <a:rPr lang="en-GB" sz="2500" dirty="0"/>
-              <a:t> </a:t>
-            </a:r>
-          </a:p>
-          <a:p>
-            <a:r>
-              <a:rPr lang="en-GB" sz="2000" b="1" dirty="0"/>
-              <a:t>SHAP plots</a:t>
-            </a:r>
-          </a:p>
-          <a:p>
-            <a:pPr lvl="1"/>
-            <a:r>
-              <a:rPr lang="en-GB" sz="2000" dirty="0"/>
-              <a:t>ML interpretability</a:t>
-            </a:r>
-          </a:p>
-          <a:p>
-            <a:pPr lvl="1"/>
-            <a:r>
-              <a:rPr lang="en-GB" sz="2000" dirty="0"/>
-              <a:t>Data Points: </a:t>
-            </a:r>
-            <a:r>
-              <a:rPr lang="el-GR" sz="2000" dirty="0"/>
-              <a:t>φ</a:t>
-            </a:r>
-            <a:r>
-              <a:rPr lang="en-US" sz="2000" dirty="0"/>
-              <a:t> values</a:t>
-            </a:r>
-            <a:endParaRPr lang="en-GB" sz="2000" dirty="0"/>
-          </a:p>
-          <a:p>
-            <a:pPr lvl="2">
-              <a:buClr>
-                <a:schemeClr val="tx1"/>
-              </a:buClr>
-              <a:buFont typeface="Courier New" panose="02070309020205020404" pitchFamily="49" charset="0"/>
-              <a:buChar char="o"/>
-            </a:pPr>
-            <a:r>
-              <a:rPr lang="en-GB" dirty="0">
-                <a:solidFill>
-                  <a:schemeClr val="accent5"/>
-                </a:solidFill>
-              </a:rPr>
-              <a:t>Pink</a:t>
-            </a:r>
-            <a:r>
-              <a:rPr lang="en-GB" dirty="0">
-                <a:solidFill>
-                  <a:schemeClr val="accent5">
-                    <a:lumMod val="75000"/>
-                  </a:schemeClr>
-                </a:solidFill>
-              </a:rPr>
-              <a:t> </a:t>
-            </a:r>
-            <a:r>
-              <a:rPr lang="en-GB" dirty="0">
-                <a:sym typeface="Wingdings" panose="05000000000000000000" pitchFamily="2" charset="2"/>
-              </a:rPr>
-              <a:t> High feature’s values </a:t>
-            </a:r>
-          </a:p>
-          <a:p>
-            <a:pPr lvl="2">
-              <a:buClr>
-                <a:schemeClr val="tx1"/>
-              </a:buClr>
-              <a:buFont typeface="Courier New" panose="02070309020205020404" pitchFamily="49" charset="0"/>
-              <a:buChar char="o"/>
-            </a:pPr>
-            <a:r>
-              <a:rPr lang="en-GB" dirty="0">
-                <a:solidFill>
-                  <a:schemeClr val="tx2">
-                    <a:lumMod val="75000"/>
-                    <a:lumOff val="25000"/>
-                  </a:schemeClr>
-                </a:solidFill>
-                <a:sym typeface="Wingdings" panose="05000000000000000000" pitchFamily="2" charset="2"/>
-              </a:rPr>
-              <a:t>Blue</a:t>
-            </a:r>
-            <a:r>
-              <a:rPr lang="en-GB" dirty="0">
-                <a:sym typeface="Wingdings" panose="05000000000000000000" pitchFamily="2" charset="2"/>
-              </a:rPr>
-              <a:t>  Low feature’s values</a:t>
-            </a:r>
-          </a:p>
-          <a:p>
-            <a:pPr lvl="1"/>
-            <a:r>
-              <a:rPr lang="en-GB" sz="2000" dirty="0">
-                <a:sym typeface="Wingdings" panose="05000000000000000000" pitchFamily="2" charset="2"/>
-              </a:rPr>
-              <a:t>X-axis</a:t>
-            </a:r>
-          </a:p>
-          <a:p>
-            <a:pPr lvl="2">
-              <a:buFont typeface="Courier New" panose="02070309020205020404" pitchFamily="49" charset="0"/>
-              <a:buChar char="o"/>
-            </a:pPr>
-            <a:r>
-              <a:rPr lang="en-GB" dirty="0">
-                <a:sym typeface="Wingdings" panose="05000000000000000000" pitchFamily="2" charset="2"/>
-              </a:rPr>
-              <a:t>Right  Positive contribution to termination log-Odds</a:t>
-            </a:r>
-          </a:p>
-          <a:p>
-            <a:pPr lvl="2">
-              <a:buFont typeface="Courier New" panose="02070309020205020404" pitchFamily="49" charset="0"/>
-              <a:buChar char="o"/>
-            </a:pPr>
-            <a:r>
-              <a:rPr lang="en-GB" dirty="0">
-                <a:sym typeface="Wingdings" panose="05000000000000000000" pitchFamily="2" charset="2"/>
-              </a:rPr>
-              <a:t>Left  Negative contribution to termination log-Odds</a:t>
-            </a:r>
-            <a:endParaRPr lang="en-GB" dirty="0"/>
           </a:p>
         </p:txBody>
       </p:sp>
@@ -19205,7 +18422,7 @@
         </p:nvSpPr>
         <p:spPr>
           <a:xfrm>
-            <a:off x="609599" y="1064087"/>
+            <a:off x="609600" y="1366973"/>
             <a:ext cx="10972799" cy="400110"/>
           </a:xfrm>
           <a:prstGeom prst="rect">
@@ -19234,43 +18451,6 @@
           </a:p>
         </p:txBody>
       </p:sp>
-      <p:pic>
-        <p:nvPicPr>
-          <p:cNvPr id="6" name="Picture 5">
-            <a:extLst>
-              <a:ext uri="{FF2B5EF4-FFF2-40B4-BE49-F238E27FC236}">
-                <a16:creationId xmlns:a16="http://schemas.microsoft.com/office/drawing/2014/main" id="{F4471C82-ADA5-C4D3-8E86-45E8013E4C50}"/>
-              </a:ext>
-            </a:extLst>
-          </p:cNvPr>
-          <p:cNvPicPr>
-            <a:picLocks noChangeAspect="1"/>
-          </p:cNvPicPr>
-          <p:nvPr/>
-        </p:nvPicPr>
-        <p:blipFill>
-          <a:blip r:embed="rId2"/>
-          <a:srcRect l="46688"/>
-          <a:stretch>
-            <a:fillRect/>
-          </a:stretch>
-        </p:blipFill>
-        <p:spPr>
-          <a:xfrm>
-            <a:off x="9595413" y="1717535"/>
-            <a:ext cx="1986985" cy="1894258"/>
-          </a:xfrm>
-          <a:prstGeom prst="rect">
-            <a:avLst/>
-          </a:prstGeom>
-          <a:ln>
-            <a:noFill/>
-          </a:ln>
-          <a:effectLst>
-            <a:softEdge rad="112500"/>
-          </a:effectLst>
-        </p:spPr>
-      </p:pic>
     </p:spTree>
     <p:extLst>
       <p:ext uri="{BB962C8B-B14F-4D97-AF65-F5344CB8AC3E}">
@@ -19786,17 +18966,17 @@
           <a:p>
             <a:pPr algn="ctr"/>
             <a:r>
-              <a:rPr lang="el-GR" sz="1800" dirty="0"/>
+              <a:rPr lang="el-GR" sz="1800" b="1" dirty="0"/>
               <a:t>Φοιτητής/τρια: Ανδρέου Ευγενία</a:t>
             </a:r>
           </a:p>
           <a:p>
             <a:pPr algn="ctr"/>
             <a:r>
-              <a:rPr lang="el-GR" sz="1800" dirty="0"/>
+              <a:rPr lang="el-GR" sz="1800" b="1" dirty="0"/>
               <a:t>Επιβλέπων Καθηγητής: Δεναξάς Σπυρίδων</a:t>
             </a:r>
-            <a:endParaRPr lang="en-GB" sz="1800" dirty="0"/>
+            <a:endParaRPr lang="en-GB" sz="1800" b="1" dirty="0"/>
           </a:p>
         </p:txBody>
       </p:sp>
@@ -19816,7 +18996,7 @@
         </p:nvSpPr>
         <p:spPr>
           <a:xfrm>
-            <a:off x="609600" y="2477123"/>
+            <a:off x="609600" y="2674891"/>
             <a:ext cx="10972800" cy="2558004"/>
           </a:xfrm>
           <a:prstGeom prst="rect">
@@ -19882,7 +19062,7 @@
         </p:blipFill>
         <p:spPr>
           <a:xfrm>
-            <a:off x="838199" y="543140"/>
+            <a:off x="609600" y="438968"/>
             <a:ext cx="3247663" cy="1090818"/>
           </a:xfrm>
           <a:prstGeom prst="rect">
@@ -19896,6 +19076,48 @@
           </a:effectLst>
         </p:spPr>
       </p:pic>
+      <p:sp>
+        <p:nvSpPr>
+          <p:cNvPr id="5" name="Title 1">
+            <a:extLst>
+              <a:ext uri="{FF2B5EF4-FFF2-40B4-BE49-F238E27FC236}">
+                <a16:creationId xmlns:a16="http://schemas.microsoft.com/office/drawing/2014/main" id="{7F59F5FB-A94B-31DE-2AAA-445E59F01FC2}"/>
+              </a:ext>
+            </a:extLst>
+          </p:cNvPr>
+          <p:cNvSpPr>
+            <a:spLocks noGrp="1"/>
+          </p:cNvSpPr>
+          <p:nvPr>
+            <p:ph type="title"/>
+          </p:nvPr>
+        </p:nvSpPr>
+        <p:spPr>
+          <a:xfrm>
+            <a:off x="609600" y="1919818"/>
+            <a:ext cx="10972800" cy="457200"/>
+          </a:xfrm>
+          <a:ln>
+            <a:solidFill>
+              <a:schemeClr val="tx1"/>
+            </a:solidFill>
+          </a:ln>
+        </p:spPr>
+        <p:txBody>
+          <a:bodyPr>
+            <a:noAutofit/>
+          </a:bodyPr>
+          <a:lstStyle/>
+          <a:p>
+            <a:pPr algn="ctr"/>
+            <a:r>
+              <a:rPr lang="en-US" sz="3000" b="1" dirty="0"/>
+              <a:t>Title</a:t>
+            </a:r>
+            <a:endParaRPr lang="el-GR" sz="3000" b="1" dirty="0"/>
+          </a:p>
+        </p:txBody>
+      </p:sp>
     </p:spTree>
     <p:extLst>
       <p:ext uri="{BB962C8B-B14F-4D97-AF65-F5344CB8AC3E}">
@@ -20099,15 +19321,7 @@
             <a:pPr lvl="1"/>
             <a:r>
               <a:rPr lang="en-US" sz="2300" dirty="0"/>
-              <a:t>Boost</a:t>
-            </a:r>
-            <a:r>
-              <a:rPr lang="en-US" sz="2300"/>
-              <a:t>: Not </a:t>
-            </a:r>
-            <a:r>
-              <a:rPr lang="en-US" sz="2300" dirty="0"/>
-              <a:t>proper HPO </a:t>
+              <a:t>Boost: Not proper HPO </a:t>
             </a:r>
             <a:r>
               <a:rPr lang="en-US" sz="2300" dirty="0">
@@ -20162,7 +19376,7 @@
         </p:nvSpPr>
         <p:spPr>
           <a:xfrm>
-            <a:off x="609600" y="5915204"/>
+            <a:off x="609600" y="5926779"/>
             <a:ext cx="10972800" cy="400110"/>
           </a:xfrm>
           <a:prstGeom prst="rect">
@@ -20209,6 +19423,435 @@
 </file>
 
 <file path=ppt/slides/slide21.xml><?xml version="1.0" encoding="utf-8"?>
+<p:sld xmlns:a="http://schemas.openxmlformats.org/drawingml/2006/main" xmlns:r="http://schemas.openxmlformats.org/officeDocument/2006/relationships" xmlns:p="http://schemas.openxmlformats.org/presentationml/2006/main">
+  <p:cSld>
+    <p:spTree>
+      <p:nvGrpSpPr>
+        <p:cNvPr id="1" name=""/>
+        <p:cNvGrpSpPr/>
+        <p:nvPr/>
+      </p:nvGrpSpPr>
+      <p:grpSpPr>
+        <a:xfrm>
+          <a:off x="0" y="0"/>
+          <a:ext cx="0" cy="0"/>
+          <a:chOff x="0" y="0"/>
+          <a:chExt cx="0" cy="0"/>
+        </a:xfrm>
+      </p:grpSpPr>
+      <p:sp>
+        <p:nvSpPr>
+          <p:cNvPr id="5" name="Content Placeholder 2">
+            <a:extLst>
+              <a:ext uri="{FF2B5EF4-FFF2-40B4-BE49-F238E27FC236}">
+                <a16:creationId xmlns:a16="http://schemas.microsoft.com/office/drawing/2014/main" id="{C718A182-FD34-0FCF-F841-2D21F0DFE300}"/>
+              </a:ext>
+            </a:extLst>
+          </p:cNvPr>
+          <p:cNvSpPr txBox="1">
+            <a:spLocks/>
+          </p:cNvSpPr>
+          <p:nvPr/>
+        </p:nvSpPr>
+        <p:spPr>
+          <a:xfrm>
+            <a:off x="609600" y="1551498"/>
+            <a:ext cx="7168587" cy="4471035"/>
+          </a:xfrm>
+          <a:prstGeom prst="rect">
+            <a:avLst/>
+          </a:prstGeom>
+          <a:ln>
+            <a:solidFill>
+              <a:schemeClr val="tx1"/>
+            </a:solidFill>
+          </a:ln>
+        </p:spPr>
+        <p:txBody>
+          <a:bodyPr vert="horz" lIns="91440" tIns="45720" rIns="91440" bIns="45720" rtlCol="0" anchor="ctr">
+            <a:noAutofit/>
+          </a:bodyPr>
+          <a:lstStyle>
+            <a:lvl1pPr marL="228600" indent="-228600" algn="l" defTabSz="914400" rtl="0" eaLnBrk="1" latinLnBrk="0" hangingPunct="1">
+              <a:lnSpc>
+                <a:spcPct val="90000"/>
+              </a:lnSpc>
+              <a:spcBef>
+                <a:spcPts val="1000"/>
+              </a:spcBef>
+              <a:buFont typeface="Arial" panose="020B0604020202020204" pitchFamily="34" charset="0"/>
+              <a:buChar char="•"/>
+              <a:defRPr sz="2800" kern="1200">
+                <a:solidFill>
+                  <a:schemeClr val="tx1"/>
+                </a:solidFill>
+                <a:latin typeface="+mn-lt"/>
+                <a:ea typeface="+mn-ea"/>
+                <a:cs typeface="+mn-cs"/>
+              </a:defRPr>
+            </a:lvl1pPr>
+            <a:lvl2pPr marL="685800" indent="-228600" algn="l" defTabSz="914400" rtl="0" eaLnBrk="1" latinLnBrk="0" hangingPunct="1">
+              <a:lnSpc>
+                <a:spcPct val="90000"/>
+              </a:lnSpc>
+              <a:spcBef>
+                <a:spcPts val="500"/>
+              </a:spcBef>
+              <a:buFont typeface="Arial" panose="020B0604020202020204" pitchFamily="34" charset="0"/>
+              <a:buChar char="•"/>
+              <a:defRPr sz="2400" kern="1200">
+                <a:solidFill>
+                  <a:schemeClr val="tx1"/>
+                </a:solidFill>
+                <a:latin typeface="+mn-lt"/>
+                <a:ea typeface="+mn-ea"/>
+                <a:cs typeface="+mn-cs"/>
+              </a:defRPr>
+            </a:lvl2pPr>
+            <a:lvl3pPr marL="1143000" indent="-228600" algn="l" defTabSz="914400" rtl="0" eaLnBrk="1" latinLnBrk="0" hangingPunct="1">
+              <a:lnSpc>
+                <a:spcPct val="90000"/>
+              </a:lnSpc>
+              <a:spcBef>
+                <a:spcPts val="500"/>
+              </a:spcBef>
+              <a:buFont typeface="Arial" panose="020B0604020202020204" pitchFamily="34" charset="0"/>
+              <a:buChar char="•"/>
+              <a:defRPr sz="2000" kern="1200">
+                <a:solidFill>
+                  <a:schemeClr val="tx1"/>
+                </a:solidFill>
+                <a:latin typeface="+mn-lt"/>
+                <a:ea typeface="+mn-ea"/>
+                <a:cs typeface="+mn-cs"/>
+              </a:defRPr>
+            </a:lvl3pPr>
+            <a:lvl4pPr marL="1600200" indent="-228600" algn="l" defTabSz="914400" rtl="0" eaLnBrk="1" latinLnBrk="0" hangingPunct="1">
+              <a:lnSpc>
+                <a:spcPct val="90000"/>
+              </a:lnSpc>
+              <a:spcBef>
+                <a:spcPts val="500"/>
+              </a:spcBef>
+              <a:buFont typeface="Arial" panose="020B0604020202020204" pitchFamily="34" charset="0"/>
+              <a:buChar char="•"/>
+              <a:defRPr sz="1800" kern="1200">
+                <a:solidFill>
+                  <a:schemeClr val="tx1"/>
+                </a:solidFill>
+                <a:latin typeface="+mn-lt"/>
+                <a:ea typeface="+mn-ea"/>
+                <a:cs typeface="+mn-cs"/>
+              </a:defRPr>
+            </a:lvl4pPr>
+            <a:lvl5pPr marL="2057400" indent="-228600" algn="l" defTabSz="914400" rtl="0" eaLnBrk="1" latinLnBrk="0" hangingPunct="1">
+              <a:lnSpc>
+                <a:spcPct val="90000"/>
+              </a:lnSpc>
+              <a:spcBef>
+                <a:spcPts val="500"/>
+              </a:spcBef>
+              <a:buFont typeface="Arial" panose="020B0604020202020204" pitchFamily="34" charset="0"/>
+              <a:buChar char="•"/>
+              <a:defRPr sz="1800" kern="1200">
+                <a:solidFill>
+                  <a:schemeClr val="tx1"/>
+                </a:solidFill>
+                <a:latin typeface="+mn-lt"/>
+                <a:ea typeface="+mn-ea"/>
+                <a:cs typeface="+mn-cs"/>
+              </a:defRPr>
+            </a:lvl5pPr>
+            <a:lvl6pPr marL="2514600" indent="-228600" algn="l" defTabSz="914400" rtl="0" eaLnBrk="1" latinLnBrk="0" hangingPunct="1">
+              <a:lnSpc>
+                <a:spcPct val="90000"/>
+              </a:lnSpc>
+              <a:spcBef>
+                <a:spcPts val="500"/>
+              </a:spcBef>
+              <a:buFont typeface="Arial" panose="020B0604020202020204" pitchFamily="34" charset="0"/>
+              <a:buChar char="•"/>
+              <a:defRPr sz="1800" kern="1200">
+                <a:solidFill>
+                  <a:schemeClr val="tx1"/>
+                </a:solidFill>
+                <a:latin typeface="+mn-lt"/>
+                <a:ea typeface="+mn-ea"/>
+                <a:cs typeface="+mn-cs"/>
+              </a:defRPr>
+            </a:lvl6pPr>
+            <a:lvl7pPr marL="2971800" indent="-228600" algn="l" defTabSz="914400" rtl="0" eaLnBrk="1" latinLnBrk="0" hangingPunct="1">
+              <a:lnSpc>
+                <a:spcPct val="90000"/>
+              </a:lnSpc>
+              <a:spcBef>
+                <a:spcPts val="500"/>
+              </a:spcBef>
+              <a:buFont typeface="Arial" panose="020B0604020202020204" pitchFamily="34" charset="0"/>
+              <a:buChar char="•"/>
+              <a:defRPr sz="1800" kern="1200">
+                <a:solidFill>
+                  <a:schemeClr val="tx1"/>
+                </a:solidFill>
+                <a:latin typeface="+mn-lt"/>
+                <a:ea typeface="+mn-ea"/>
+                <a:cs typeface="+mn-cs"/>
+              </a:defRPr>
+            </a:lvl7pPr>
+            <a:lvl8pPr marL="3429000" indent="-228600" algn="l" defTabSz="914400" rtl="0" eaLnBrk="1" latinLnBrk="0" hangingPunct="1">
+              <a:lnSpc>
+                <a:spcPct val="90000"/>
+              </a:lnSpc>
+              <a:spcBef>
+                <a:spcPts val="500"/>
+              </a:spcBef>
+              <a:buFont typeface="Arial" panose="020B0604020202020204" pitchFamily="34" charset="0"/>
+              <a:buChar char="•"/>
+              <a:defRPr sz="1800" kern="1200">
+                <a:solidFill>
+                  <a:schemeClr val="tx1"/>
+                </a:solidFill>
+                <a:latin typeface="+mn-lt"/>
+                <a:ea typeface="+mn-ea"/>
+                <a:cs typeface="+mn-cs"/>
+              </a:defRPr>
+            </a:lvl8pPr>
+            <a:lvl9pPr marL="3886200" indent="-228600" algn="l" defTabSz="914400" rtl="0" eaLnBrk="1" latinLnBrk="0" hangingPunct="1">
+              <a:lnSpc>
+                <a:spcPct val="90000"/>
+              </a:lnSpc>
+              <a:spcBef>
+                <a:spcPts val="500"/>
+              </a:spcBef>
+              <a:buFont typeface="Arial" panose="020B0604020202020204" pitchFamily="34" charset="0"/>
+              <a:buChar char="•"/>
+              <a:defRPr sz="1800" kern="1200">
+                <a:solidFill>
+                  <a:schemeClr val="tx1"/>
+                </a:solidFill>
+                <a:latin typeface="+mn-lt"/>
+                <a:ea typeface="+mn-ea"/>
+                <a:cs typeface="+mn-cs"/>
+              </a:defRPr>
+            </a:lvl9pPr>
+          </a:lstStyle>
+          <a:p>
+            <a:pPr marL="0" indent="0" algn="ctr">
+              <a:buNone/>
+            </a:pPr>
+            <a:r>
+              <a:rPr lang="en-GB" sz="2000" b="1" dirty="0"/>
+              <a:t>SHAP plots</a:t>
+            </a:r>
+          </a:p>
+          <a:p>
+            <a:r>
+              <a:rPr lang="en-GB" sz="2000" dirty="0"/>
+              <a:t>ML interpretability</a:t>
+            </a:r>
+          </a:p>
+          <a:p>
+            <a:r>
+              <a:rPr lang="en-GB" sz="2000" dirty="0"/>
+              <a:t>Data Points: </a:t>
+            </a:r>
+            <a:r>
+              <a:rPr lang="el-GR" sz="2000" dirty="0"/>
+              <a:t>φ</a:t>
+            </a:r>
+            <a:r>
+              <a:rPr lang="en-US" sz="2000" dirty="0"/>
+              <a:t> values</a:t>
+            </a:r>
+            <a:endParaRPr lang="en-GB" sz="2000" dirty="0"/>
+          </a:p>
+          <a:p>
+            <a:pPr lvl="1">
+              <a:buClr>
+                <a:schemeClr val="tx1"/>
+              </a:buClr>
+              <a:buFont typeface="Courier New" panose="02070309020205020404" pitchFamily="49" charset="0"/>
+              <a:buChar char="o"/>
+            </a:pPr>
+            <a:r>
+              <a:rPr lang="en-GB" sz="2000" dirty="0">
+                <a:solidFill>
+                  <a:schemeClr val="accent5"/>
+                </a:solidFill>
+              </a:rPr>
+              <a:t>Pink</a:t>
+            </a:r>
+            <a:r>
+              <a:rPr lang="en-GB" sz="2000" dirty="0">
+                <a:solidFill>
+                  <a:schemeClr val="accent5">
+                    <a:lumMod val="75000"/>
+                  </a:schemeClr>
+                </a:solidFill>
+              </a:rPr>
+              <a:t> </a:t>
+            </a:r>
+            <a:r>
+              <a:rPr lang="en-GB" sz="2000" dirty="0">
+                <a:sym typeface="Wingdings" panose="05000000000000000000" pitchFamily="2" charset="2"/>
+              </a:rPr>
+              <a:t> High feature’s values </a:t>
+            </a:r>
+          </a:p>
+          <a:p>
+            <a:pPr lvl="1">
+              <a:buClr>
+                <a:schemeClr val="tx1"/>
+              </a:buClr>
+              <a:buFont typeface="Courier New" panose="02070309020205020404" pitchFamily="49" charset="0"/>
+              <a:buChar char="o"/>
+            </a:pPr>
+            <a:r>
+              <a:rPr lang="en-GB" sz="2000" dirty="0">
+                <a:solidFill>
+                  <a:schemeClr val="tx2">
+                    <a:lumMod val="75000"/>
+                    <a:lumOff val="25000"/>
+                  </a:schemeClr>
+                </a:solidFill>
+                <a:sym typeface="Wingdings" panose="05000000000000000000" pitchFamily="2" charset="2"/>
+              </a:rPr>
+              <a:t>Blue</a:t>
+            </a:r>
+            <a:r>
+              <a:rPr lang="en-GB" sz="2000" dirty="0">
+                <a:sym typeface="Wingdings" panose="05000000000000000000" pitchFamily="2" charset="2"/>
+              </a:rPr>
+              <a:t>  Low feature’s values</a:t>
+            </a:r>
+          </a:p>
+          <a:p>
+            <a:r>
+              <a:rPr lang="en-GB" sz="2000" dirty="0">
+                <a:sym typeface="Wingdings" panose="05000000000000000000" pitchFamily="2" charset="2"/>
+              </a:rPr>
+              <a:t>X-axis</a:t>
+            </a:r>
+          </a:p>
+          <a:p>
+            <a:pPr lvl="1">
+              <a:buFont typeface="Courier New" panose="02070309020205020404" pitchFamily="49" charset="0"/>
+              <a:buChar char="o"/>
+            </a:pPr>
+            <a:r>
+              <a:rPr lang="en-GB" sz="2000" dirty="0">
+                <a:sym typeface="Wingdings" panose="05000000000000000000" pitchFamily="2" charset="2"/>
+              </a:rPr>
+              <a:t>Right  Positive contribution to termination log-Odds</a:t>
+            </a:r>
+          </a:p>
+          <a:p>
+            <a:pPr lvl="1">
+              <a:buFont typeface="Courier New" panose="02070309020205020404" pitchFamily="49" charset="0"/>
+              <a:buChar char="o"/>
+            </a:pPr>
+            <a:r>
+              <a:rPr lang="en-GB" sz="2000" dirty="0">
+                <a:sym typeface="Wingdings" panose="05000000000000000000" pitchFamily="2" charset="2"/>
+              </a:rPr>
+              <a:t>Left  Negative contribution to termination log-Odds</a:t>
+            </a:r>
+            <a:endParaRPr lang="en-GB" sz="2000" dirty="0"/>
+          </a:p>
+        </p:txBody>
+      </p:sp>
+      <p:sp>
+        <p:nvSpPr>
+          <p:cNvPr id="7" name="Title 1">
+            <a:extLst>
+              <a:ext uri="{FF2B5EF4-FFF2-40B4-BE49-F238E27FC236}">
+                <a16:creationId xmlns:a16="http://schemas.microsoft.com/office/drawing/2014/main" id="{259B178F-70A2-E2FE-5F28-1D58CF945F1E}"/>
+              </a:ext>
+            </a:extLst>
+          </p:cNvPr>
+          <p:cNvSpPr>
+            <a:spLocks noGrp="1"/>
+          </p:cNvSpPr>
+          <p:nvPr>
+            <p:ph type="title"/>
+          </p:nvPr>
+        </p:nvSpPr>
+        <p:spPr>
+          <a:xfrm>
+            <a:off x="609600" y="546100"/>
+            <a:ext cx="10972800" cy="457200"/>
+          </a:xfrm>
+          <a:ln>
+            <a:solidFill>
+              <a:schemeClr val="tx1"/>
+            </a:solidFill>
+          </a:ln>
+        </p:spPr>
+        <p:txBody>
+          <a:bodyPr>
+            <a:noAutofit/>
+          </a:bodyPr>
+          <a:lstStyle/>
+          <a:p>
+            <a:pPr algn="ctr"/>
+            <a:r>
+              <a:rPr lang="en-US" sz="3000" b="1" dirty="0"/>
+              <a:t>Features’ Evaluation Metrics </a:t>
+            </a:r>
+            <a:endParaRPr lang="en-GB" sz="3000" b="1" dirty="0"/>
+          </a:p>
+        </p:txBody>
+      </p:sp>
+      <p:pic>
+        <p:nvPicPr>
+          <p:cNvPr id="11" name="Picture 10">
+            <a:extLst>
+              <a:ext uri="{FF2B5EF4-FFF2-40B4-BE49-F238E27FC236}">
+                <a16:creationId xmlns:a16="http://schemas.microsoft.com/office/drawing/2014/main" id="{DC1F51DB-A1C3-E7AE-73E7-24425577EC79}"/>
+              </a:ext>
+            </a:extLst>
+          </p:cNvPr>
+          <p:cNvPicPr>
+            <a:picLocks noChangeAspect="1"/>
+          </p:cNvPicPr>
+          <p:nvPr/>
+        </p:nvPicPr>
+        <p:blipFill>
+          <a:blip r:embed="rId2"/>
+          <a:stretch>
+            <a:fillRect/>
+          </a:stretch>
+        </p:blipFill>
+        <p:spPr>
+          <a:xfrm>
+            <a:off x="8005573" y="1551498"/>
+            <a:ext cx="3576828" cy="4471035"/>
+          </a:xfrm>
+          <a:prstGeom prst="rect">
+            <a:avLst/>
+          </a:prstGeom>
+          <a:ln>
+            <a:noFill/>
+          </a:ln>
+          <a:effectLst>
+            <a:softEdge rad="112500"/>
+          </a:effectLst>
+        </p:spPr>
+      </p:pic>
+    </p:spTree>
+    <p:extLst>
+      <p:ext uri="{BB962C8B-B14F-4D97-AF65-F5344CB8AC3E}">
+        <p14:creationId xmlns:p14="http://schemas.microsoft.com/office/powerpoint/2010/main" val="3019405516"/>
+      </p:ext>
+    </p:extLst>
+  </p:cSld>
+  <p:clrMapOvr>
+    <a:masterClrMapping/>
+  </p:clrMapOvr>
+</p:sld>
+</file>
+
+<file path=ppt/slides/slide22.xml><?xml version="1.0" encoding="utf-8"?>
 <p:sld xmlns:a="http://schemas.openxmlformats.org/drawingml/2006/main" xmlns:r="http://schemas.openxmlformats.org/officeDocument/2006/relationships" xmlns:p="http://schemas.openxmlformats.org/presentationml/2006/main">
   <p:cSld>
     <p:spTree>
@@ -20424,7 +20067,7 @@
 </p:sld>
 </file>
 
-<file path=ppt/slides/slide22.xml><?xml version="1.0" encoding="utf-8"?>
+<file path=ppt/slides/slide23.xml><?xml version="1.0" encoding="utf-8"?>
 <p:sld xmlns:a="http://schemas.openxmlformats.org/drawingml/2006/main" xmlns:r="http://schemas.openxmlformats.org/officeDocument/2006/relationships" xmlns:p="http://schemas.openxmlformats.org/presentationml/2006/main">
   <p:cSld>
     <p:spTree>
@@ -20511,8 +20154,8 @@
           </a:ln>
         </p:spPr>
         <p:txBody>
-          <a:bodyPr>
-            <a:normAutofit fontScale="85000" lnSpcReduction="20000"/>
+          <a:bodyPr anchor="ctr">
+            <a:normAutofit fontScale="70000" lnSpcReduction="20000"/>
           </a:bodyPr>
           <a:lstStyle/>
           <a:p>
@@ -20535,82 +20178,193 @@
               <a:rPr lang="en-US" sz="2400" dirty="0"/>
               <a:t>Enrollment </a:t>
             </a:r>
+            <a:r>
+              <a:rPr lang="en-US" sz="2400" dirty="0">
+                <a:solidFill>
+                  <a:schemeClr val="accent5"/>
+                </a:solidFill>
+              </a:rPr>
+              <a:t>-</a:t>
+            </a:r>
           </a:p>
           <a:p>
             <a:r>
               <a:rPr lang="en-US" sz="2400" dirty="0"/>
               <a:t>Enrollment x Facilities</a:t>
             </a:r>
+            <a:r>
+              <a:rPr lang="en-US" sz="2400" dirty="0">
+                <a:solidFill>
+                  <a:schemeClr val="accent5"/>
+                </a:solidFill>
+              </a:rPr>
+              <a:t> -</a:t>
+            </a:r>
+            <a:endParaRPr lang="en-US" sz="2400" dirty="0"/>
           </a:p>
           <a:p>
             <a:r>
               <a:rPr lang="en-US" sz="2400" dirty="0"/>
               <a:t>Number of Facilities</a:t>
             </a:r>
+            <a:r>
+              <a:rPr lang="en-US" sz="2400" dirty="0">
+                <a:solidFill>
+                  <a:schemeClr val="accent5"/>
+                </a:solidFill>
+              </a:rPr>
+              <a:t> +</a:t>
+            </a:r>
+            <a:endParaRPr lang="en-US" sz="2400" dirty="0"/>
           </a:p>
           <a:p>
             <a:r>
               <a:rPr lang="en-US" sz="2400" dirty="0"/>
-              <a:t>Conditions (e.g., Neoplasms)</a:t>
-            </a:r>
+              <a:t>Conditions </a:t>
+            </a:r>
+            <a:r>
+              <a:rPr lang="en-US" sz="2400" dirty="0">
+                <a:solidFill>
+                  <a:schemeClr val="accent5"/>
+                </a:solidFill>
+              </a:rPr>
+              <a:t>+</a:t>
+            </a:r>
+            <a:endParaRPr lang="en-US" sz="2400" dirty="0"/>
           </a:p>
           <a:p>
             <a:r>
               <a:rPr lang="en-US" sz="2400" dirty="0"/>
               <a:t>Enrollment x Condition</a:t>
             </a:r>
+            <a:r>
+              <a:rPr lang="en-US" sz="2400" dirty="0">
+                <a:solidFill>
+                  <a:schemeClr val="accent5"/>
+                </a:solidFill>
+              </a:rPr>
+              <a:t> +</a:t>
+            </a:r>
+          </a:p>
+          <a:p>
+            <a:r>
+              <a:rPr lang="en-US" sz="2400" dirty="0"/>
+              <a:t>Number of Arms </a:t>
+            </a:r>
+            <a:r>
+              <a:rPr lang="en-US" sz="2400" dirty="0">
+                <a:solidFill>
+                  <a:schemeClr val="accent5"/>
+                </a:solidFill>
+              </a:rPr>
+              <a:t>+</a:t>
+            </a:r>
+            <a:endParaRPr lang="en-US" sz="2400" dirty="0"/>
           </a:p>
           <a:p>
             <a:r>
               <a:rPr lang="en-GB" sz="2400" dirty="0"/>
-              <a:t>Global type of trials</a:t>
+              <a:t>Global trials</a:t>
+            </a:r>
+            <a:r>
+              <a:rPr lang="en-US" sz="2400" dirty="0">
+                <a:solidFill>
+                  <a:schemeClr val="accent5"/>
+                </a:solidFill>
+              </a:rPr>
+              <a:t> +</a:t>
             </a:r>
             <a:endParaRPr lang="en-US" sz="2400" dirty="0"/>
           </a:p>
           <a:p>
             <a:r>
               <a:rPr lang="en-US" sz="2400" dirty="0"/>
-              <a:t>Number of Adverse Events</a:t>
-            </a:r>
+              <a:t>Number of Adverse </a:t>
+            </a:r>
+            <a:r>
+              <a:rPr lang="en-US" sz="2400" dirty="0">
+                <a:solidFill>
+                  <a:schemeClr val="accent5"/>
+                </a:solidFill>
+              </a:rPr>
+              <a:t>-</a:t>
+            </a:r>
+            <a:endParaRPr lang="en-US" sz="2400" dirty="0"/>
           </a:p>
           <a:p>
             <a:r>
               <a:rPr lang="en-US" sz="2400" dirty="0"/>
               <a:t>Healthy Volunteers</a:t>
             </a:r>
+            <a:r>
+              <a:rPr lang="en-US" sz="2400" dirty="0">
+                <a:solidFill>
+                  <a:schemeClr val="accent5"/>
+                </a:solidFill>
+              </a:rPr>
+              <a:t> -</a:t>
+            </a:r>
+            <a:endParaRPr lang="en-US" sz="2400" dirty="0"/>
           </a:p>
           <a:p>
             <a:r>
               <a:rPr lang="en-US" sz="2400" dirty="0"/>
-              <a:t>Inter. Model (e.g., Parallel)</a:t>
-            </a:r>
+              <a:t>Interv. Model </a:t>
+            </a:r>
+            <a:r>
+              <a:rPr lang="en-US" sz="2400" dirty="0">
+                <a:solidFill>
+                  <a:schemeClr val="accent5"/>
+                </a:solidFill>
+              </a:rPr>
+              <a:t>+</a:t>
+            </a:r>
+            <a:endParaRPr lang="en-US" sz="2400" dirty="0"/>
           </a:p>
           <a:p>
             <a:r>
               <a:rPr lang="en-GB" sz="2400" dirty="0"/>
               <a:t>Randomization</a:t>
             </a:r>
+            <a:r>
+              <a:rPr lang="en-US" sz="2400" dirty="0">
+                <a:solidFill>
+                  <a:schemeClr val="accent5"/>
+                </a:solidFill>
+              </a:rPr>
+              <a:t> +</a:t>
+            </a:r>
+            <a:endParaRPr lang="en-GB" sz="2400" dirty="0"/>
           </a:p>
           <a:p>
             <a:r>
               <a:rPr lang="en-GB" sz="2400" dirty="0"/>
               <a:t>Number of Arms</a:t>
             </a:r>
+            <a:r>
+              <a:rPr lang="en-US" sz="2400" dirty="0">
+                <a:solidFill>
+                  <a:schemeClr val="accent5"/>
+                </a:solidFill>
+              </a:rPr>
+              <a:t> +</a:t>
+            </a:r>
+            <a:endParaRPr lang="en-GB" sz="2400" dirty="0"/>
           </a:p>
           <a:p>
             <a:r>
               <a:rPr lang="en-GB" sz="2400" dirty="0"/>
-              <a:t>Older age participants</a:t>
-            </a:r>
-          </a:p>
-          <a:p>
-            <a:pPr marL="0" indent="0">
-              <a:buNone/>
-            </a:pPr>
-            <a:endParaRPr lang="en-GB" dirty="0"/>
-          </a:p>
-          <a:p>
-            <a:endParaRPr lang="en-GB" dirty="0"/>
+              <a:t>Older aged participants </a:t>
+            </a:r>
+            <a:r>
+              <a:rPr lang="en-US" sz="2400" dirty="0">
+                <a:solidFill>
+                  <a:schemeClr val="accent5"/>
+                </a:solidFill>
+              </a:rPr>
+              <a:t>+</a:t>
+            </a:r>
+            <a:endParaRPr lang="en-GB" sz="2400" dirty="0"/>
           </a:p>
         </p:txBody>
       </p:sp>
@@ -20643,11 +20397,17 @@
         </p:spPr>
         <p:txBody>
           <a:bodyPr>
-            <a:normAutofit fontScale="85000" lnSpcReduction="20000"/>
+            <a:normAutofit fontScale="70000" lnSpcReduction="20000"/>
           </a:bodyPr>
           <a:lstStyle/>
           <a:p>
-            <a:pPr marL="0" indent="0">
+            <a:pPr marL="0" indent="0" algn="ctr">
+              <a:buNone/>
+            </a:pPr>
+            <a:endParaRPr lang="en-US" dirty="0"/>
+          </a:p>
+          <a:p>
+            <a:pPr marL="0" indent="0" algn="ctr">
               <a:buNone/>
             </a:pPr>
             <a:endParaRPr lang="en-US" dirty="0"/>
@@ -20677,7 +20437,7 @@
             </a:br>
             <a:r>
               <a:rPr lang="en-US" dirty="0"/>
-              <a:t>Phase 2,3 ~ Safety </a:t>
+              <a:t>Phase 3,4 ~ Safety </a:t>
             </a:r>
             <a:r>
               <a:rPr lang="en-US" dirty="0">
@@ -20700,14 +20460,6 @@
                 <a:sym typeface="Wingdings" panose="05000000000000000000" pitchFamily="2" charset="2"/>
               </a:rPr>
               <a:t>A trial is going to stop due to accrual fail or success.</a:t>
-            </a:r>
-          </a:p>
-          <a:p>
-            <a:r>
-              <a:rPr lang="en-US" dirty="0">
-                <a:sym typeface="Wingdings" panose="05000000000000000000" pitchFamily="2" charset="2"/>
-              </a:rPr>
-              <a:t>Analysis without ‘Withdrawn’  PR worst than random guessing.</a:t>
             </a:r>
           </a:p>
           <a:p>
@@ -20734,7 +20486,7 @@
 </p:sld>
 </file>
 
-<file path=ppt/slides/slide23.xml><?xml version="1.0" encoding="utf-8"?>
+<file path=ppt/slides/slide24.xml><?xml version="1.0" encoding="utf-8"?>
 <p:sld xmlns:a="http://schemas.openxmlformats.org/drawingml/2006/main" xmlns:r="http://schemas.openxmlformats.org/officeDocument/2006/relationships" xmlns:p="http://schemas.openxmlformats.org/presentationml/2006/main">
   <p:cSld>
     <p:spTree>
@@ -20772,11 +20524,21 @@
             <a:off x="609600" y="685800"/>
             <a:ext cx="10972800" cy="5486400"/>
           </a:xfrm>
-          <a:ln>
+          <a:prstGeom prst="plaque">
+            <a:avLst/>
+          </a:prstGeom>
+          <a:ln w="19050">
             <a:solidFill>
               <a:schemeClr val="tx1"/>
             </a:solidFill>
           </a:ln>
+          <a:effectLst>
+            <a:outerShdw blurRad="63500" sx="102000" sy="102000" algn="ctr" rotWithShape="0">
+              <a:prstClr val="black">
+                <a:alpha val="40000"/>
+              </a:prstClr>
+            </a:outerShdw>
+          </a:effectLst>
         </p:spPr>
         <p:txBody>
           <a:bodyPr>
@@ -20806,7 +20568,7 @@
 </p:sld>
 </file>
 
-<file path=ppt/slides/slide24.xml><?xml version="1.0" encoding="utf-8"?>
+<file path=ppt/slides/slide25.xml><?xml version="1.0" encoding="utf-8"?>
 <p:sld xmlns:a="http://schemas.openxmlformats.org/drawingml/2006/main" xmlns:r="http://schemas.openxmlformats.org/officeDocument/2006/relationships" xmlns:p="http://schemas.openxmlformats.org/presentationml/2006/main">
   <p:cSld>
     <p:spTree>
@@ -20969,7 +20731,7 @@
 </p:sld>
 </file>
 
-<file path=ppt/slides/slide25.xml><?xml version="1.0" encoding="utf-8"?>
+<file path=ppt/slides/slide26.xml><?xml version="1.0" encoding="utf-8"?>
 <p:sld xmlns:a="http://schemas.openxmlformats.org/drawingml/2006/main" xmlns:r="http://schemas.openxmlformats.org/officeDocument/2006/relationships" xmlns:p="http://schemas.openxmlformats.org/presentationml/2006/main">
   <p:cSld>
     <p:spTree>
@@ -21062,43 +20824,43 @@
           <a:lstStyle/>
           <a:p>
             <a:r>
-              <a:rPr lang="en-GB" sz="1800" b="1" dirty="0"/>
+              <a:rPr lang="en-GB" sz="2000" b="1" dirty="0"/>
               <a:t>Per Phases Analysis </a:t>
             </a:r>
             <a:r>
-              <a:rPr lang="en-GB" sz="1800" b="1" dirty="0">
+              <a:rPr lang="en-GB" sz="2000" b="1" dirty="0">
                 <a:sym typeface="Wingdings" panose="05000000000000000000" pitchFamily="2" charset="2"/>
               </a:rPr>
-              <a:t>&amp; All </a:t>
-            </a:r>
-            <a:r>
-              <a:rPr lang="en-GB" sz="1800" b="1" dirty="0"/>
-              <a:t>phases 1-4</a:t>
-            </a:r>
-          </a:p>
-          <a:p>
-            <a:r>
-              <a:rPr lang="en-GB" sz="1800" b="1" dirty="0"/>
+              <a:t>&amp; P</a:t>
+            </a:r>
+            <a:r>
+              <a:rPr lang="en-GB" sz="2000" b="1" dirty="0"/>
+              <a:t>hases 1-4</a:t>
+            </a:r>
+          </a:p>
+          <a:p>
+            <a:r>
+              <a:rPr lang="en-GB" sz="2000" b="1" dirty="0"/>
               <a:t>More features: </a:t>
             </a:r>
             <a:r>
-              <a:rPr lang="en-GB" sz="1800" dirty="0"/>
-              <a:t>Interactions, New (e.g., soc)</a:t>
-            </a:r>
-          </a:p>
-          <a:p>
-            <a:r>
-              <a:rPr lang="en-GB" sz="1800" b="1" dirty="0"/>
+              <a:rPr lang="en-GB" sz="2000" dirty="0"/>
+              <a:t>Interactions, New etc.</a:t>
+            </a:r>
+          </a:p>
+          <a:p>
+            <a:r>
+              <a:rPr lang="en-GB" sz="2000" b="1" dirty="0"/>
               <a:t>More models | Boosting alternatives</a:t>
             </a:r>
-            <a:endParaRPr lang="en-GB" sz="1800" b="1" dirty="0">
+            <a:endParaRPr lang="en-GB" sz="2000" b="1" dirty="0">
               <a:sym typeface="Wingdings" panose="05000000000000000000" pitchFamily="2" charset="2"/>
             </a:endParaRPr>
           </a:p>
           <a:p>
             <a:pPr lvl="1"/>
             <a:r>
-              <a:rPr lang="en-GB" sz="1800" dirty="0">
+              <a:rPr lang="en-GB" sz="2000" dirty="0">
                 <a:sym typeface="Wingdings" panose="05000000000000000000" pitchFamily="2" charset="2"/>
               </a:rPr>
               <a:t>Clinical practice impact</a:t>
@@ -21107,7 +20869,7 @@
           <a:p>
             <a:pPr lvl="1"/>
             <a:r>
-              <a:rPr lang="en-GB" sz="1800" dirty="0">
+              <a:rPr lang="en-GB" sz="2000" dirty="0">
                 <a:sym typeface="Wingdings" panose="05000000000000000000" pitchFamily="2" charset="2"/>
               </a:rPr>
               <a:t>LightBoost</a:t>
@@ -21115,25 +20877,25 @@
           </a:p>
           <a:p>
             <a:r>
-              <a:rPr lang="en-GB" sz="1800" b="1" dirty="0">
+              <a:rPr lang="en-GB" sz="2000" b="1" dirty="0">
                 <a:sym typeface="Wingdings" panose="05000000000000000000" pitchFamily="2" charset="2"/>
               </a:rPr>
               <a:t>Avoid dropping Missing data</a:t>
             </a:r>
             <a:r>
-              <a:rPr lang="en-GB" sz="1800" dirty="0">
+              <a:rPr lang="en-GB" sz="2000" dirty="0">
                 <a:sym typeface="Wingdings" panose="05000000000000000000" pitchFamily="2" charset="2"/>
               </a:rPr>
               <a:t>  </a:t>
             </a:r>
             <a:r>
-              <a:rPr lang="en-GB" sz="1800" b="1" dirty="0">
+              <a:rPr lang="en-GB" sz="2000" b="1" dirty="0">
                 <a:sym typeface="Wingdings" panose="05000000000000000000" pitchFamily="2" charset="2"/>
               </a:rPr>
               <a:t>X </a:t>
             </a:r>
             <a:r>
-              <a:rPr lang="en-GB" sz="1800" dirty="0">
+              <a:rPr lang="en-GB" sz="2000" dirty="0">
                 <a:sym typeface="Wingdings" panose="05000000000000000000" pitchFamily="2" charset="2"/>
               </a:rPr>
               <a:t>Information lost</a:t>
@@ -21141,7 +20903,7 @@
           </a:p>
           <a:p>
             <a:r>
-              <a:rPr lang="en-GB" sz="1800" b="1" dirty="0">
+              <a:rPr lang="en-GB" sz="2000" b="1" dirty="0">
                 <a:sym typeface="Wingdings" panose="05000000000000000000" pitchFamily="2" charset="2"/>
               </a:rPr>
               <a:t>Sample Size</a:t>
@@ -21150,7 +20912,7 @@
           <a:p>
             <a:pPr lvl="1"/>
             <a:r>
-              <a:rPr lang="en-GB" sz="1800" dirty="0">
+              <a:rPr lang="en-GB" sz="2000" dirty="0">
                 <a:sym typeface="Wingdings" panose="05000000000000000000" pitchFamily="2" charset="2"/>
               </a:rPr>
               <a:t>Efficiently large: 2011-2024</a:t>
@@ -21159,15 +20921,15 @@
           <a:p>
             <a:pPr lvl="1"/>
             <a:r>
-              <a:rPr lang="en-GB" sz="1800" dirty="0">
+              <a:rPr lang="en-GB" sz="2000" dirty="0">
                 <a:sym typeface="Wingdings" panose="05000000000000000000" pitchFamily="2" charset="2"/>
               </a:rPr>
-              <a:t>EPV : Unbiased coeff, Avoid overfit </a:t>
-            </a:r>
-          </a:p>
-          <a:p>
-            <a:r>
-              <a:rPr lang="en-GB" sz="1800" b="1" dirty="0">
+              <a:t>EPV : Unbiased coeff, X overfit </a:t>
+            </a:r>
+          </a:p>
+          <a:p>
+            <a:r>
+              <a:rPr lang="en-GB" sz="2000" b="1" dirty="0">
                 <a:sym typeface="Wingdings" panose="05000000000000000000" pitchFamily="2" charset="2"/>
               </a:rPr>
               <a:t>More performance Metrics</a:t>
@@ -21176,7 +20938,7 @@
           <a:p>
             <a:pPr lvl="1"/>
             <a:r>
-              <a:rPr lang="en-GB" sz="1800" dirty="0">
+              <a:rPr lang="en-GB" sz="2000" dirty="0">
                 <a:sym typeface="Wingdings" panose="05000000000000000000" pitchFamily="2" charset="2"/>
               </a:rPr>
               <a:t>MCC, BA, F1, ROC, PR Curves</a:t>
@@ -21184,7 +20946,7 @@
           </a:p>
           <a:p>
             <a:r>
-              <a:rPr lang="en-GB" sz="1800" b="1" dirty="0">
+              <a:rPr lang="en-GB" sz="2000" b="1" dirty="0">
                 <a:sym typeface="Wingdings" panose="05000000000000000000" pitchFamily="2" charset="2"/>
               </a:rPr>
               <a:t>Interpretability of ML </a:t>
@@ -21193,7 +20955,7 @@
           <a:p>
             <a:pPr lvl="1"/>
             <a:r>
-              <a:rPr lang="en-GB" sz="1800" dirty="0">
+              <a:rPr lang="en-GB" sz="2000" dirty="0">
                 <a:sym typeface="Wingdings" panose="05000000000000000000" pitchFamily="2" charset="2"/>
               </a:rPr>
               <a:t>SHAP plots</a:t>
@@ -21235,25 +20997,25 @@
           <a:lstStyle/>
           <a:p>
             <a:r>
-              <a:rPr lang="en-US" sz="1800" b="1" dirty="0"/>
+              <a:rPr lang="en-US" sz="2000" b="1" dirty="0"/>
               <a:t>Missing data </a:t>
             </a:r>
           </a:p>
           <a:p>
             <a:pPr lvl="1"/>
             <a:r>
-              <a:rPr lang="en-US" sz="1800" dirty="0"/>
-              <a:t>Regular expression text mining vs NLP</a:t>
+              <a:rPr lang="en-US" sz="2000" dirty="0"/>
+              <a:t>RegEx vs NLP</a:t>
             </a:r>
           </a:p>
           <a:p>
             <a:pPr lvl="1"/>
             <a:r>
-              <a:rPr lang="en-US" sz="1800" dirty="0"/>
+              <a:rPr lang="en-US" sz="2000" dirty="0"/>
               <a:t>Many null </a:t>
             </a:r>
             <a:r>
-              <a:rPr lang="en-US" sz="1800" dirty="0">
+              <a:rPr lang="en-US" sz="2000" dirty="0">
                 <a:sym typeface="Wingdings" panose="05000000000000000000" pitchFamily="2" charset="2"/>
               </a:rPr>
               <a:t> Drop whole features</a:t>
@@ -21261,96 +21023,99 @@
           </a:p>
           <a:p>
             <a:r>
-              <a:rPr lang="en-US" sz="1800" b="1" dirty="0">
-                <a:sym typeface="Wingdings" panose="05000000000000000000" pitchFamily="2" charset="2"/>
-              </a:rPr>
-              <a:t>Same variables per Phase</a:t>
-            </a:r>
-          </a:p>
-          <a:p>
-            <a:r>
-              <a:rPr lang="en-US" sz="1800" b="1" dirty="0"/>
+              <a:rPr lang="en-US" sz="2000" b="1" dirty="0"/>
+              <a:t>Inaccurate dataset registries : </a:t>
+            </a:r>
+            <a:r>
+              <a:rPr lang="en-US" sz="2000" dirty="0"/>
+              <a:t>Wrongly, optimally registered fields, null etc. </a:t>
+            </a:r>
+            <a:endParaRPr lang="en-US" sz="2000" dirty="0">
+              <a:sym typeface="Wingdings" panose="05000000000000000000" pitchFamily="2" charset="2"/>
+            </a:endParaRPr>
+          </a:p>
+          <a:p>
+            <a:r>
+              <a:rPr lang="en-US" sz="2000" b="1" dirty="0"/>
               <a:t>Random Under Sample  </a:t>
             </a:r>
             <a:r>
-              <a:rPr lang="en-US" sz="1800" b="1" dirty="0">
+              <a:rPr lang="en-US" sz="2000" b="1" dirty="0">
                 <a:sym typeface="Wingdings" panose="05000000000000000000" pitchFamily="2" charset="2"/>
               </a:rPr>
               <a:t> </a:t>
             </a:r>
             <a:r>
-              <a:rPr lang="en-US" sz="1800" dirty="0"/>
+              <a:rPr lang="en-US" sz="2000" dirty="0"/>
               <a:t>Information loss</a:t>
             </a:r>
           </a:p>
           <a:p>
             <a:r>
-              <a:rPr lang="en-US" sz="1800" b="1" dirty="0"/>
+              <a:rPr lang="en-US" sz="2000" b="1" dirty="0"/>
               <a:t>EPV &gt;25 </a:t>
             </a:r>
             <a:r>
-              <a:rPr lang="en-US" sz="1800" b="1" dirty="0">
+              <a:rPr lang="en-US" sz="2000" b="1" dirty="0">
                 <a:sym typeface="Wingdings" panose="05000000000000000000" pitchFamily="2" charset="2"/>
               </a:rPr>
               <a:t> </a:t>
             </a:r>
             <a:r>
-              <a:rPr lang="en-US" sz="1800" dirty="0"/>
+              <a:rPr lang="en-US" sz="2000" dirty="0"/>
               <a:t>Inefficient for ML</a:t>
             </a:r>
           </a:p>
           <a:p>
             <a:r>
-              <a:rPr lang="en-US" sz="1800" b="1" dirty="0"/>
-              <a:t>Exploratory Analysis on Logistic </a:t>
-            </a:r>
-          </a:p>
-          <a:p>
-            <a:r>
-              <a:rPr lang="en-US" sz="1800" b="1" dirty="0"/>
+              <a:rPr lang="en-US" sz="2000" b="1" dirty="0"/>
               <a:t>Models' outperformance </a:t>
             </a:r>
           </a:p>
           <a:p>
             <a:pPr lvl="1"/>
             <a:r>
-              <a:rPr lang="en-US" sz="1800" dirty="0"/>
+              <a:rPr lang="en-US" sz="2000" dirty="0"/>
               <a:t>Difference only in second decimal</a:t>
             </a:r>
           </a:p>
           <a:p>
             <a:r>
-              <a:rPr lang="en-US" sz="1800" b="1" dirty="0"/>
+              <a:rPr lang="en-US" sz="2000" b="1" dirty="0"/>
               <a:t>No field specific analysis </a:t>
             </a:r>
             <a:r>
-              <a:rPr lang="en-US" sz="1800" b="1" dirty="0">
+              <a:rPr lang="en-US" sz="2000" b="1" dirty="0">
                 <a:sym typeface="Wingdings" panose="05000000000000000000" pitchFamily="2" charset="2"/>
               </a:rPr>
               <a:t> </a:t>
             </a:r>
             <a:r>
-              <a:rPr lang="en-US" sz="1800" dirty="0">
+              <a:rPr lang="en-US" sz="2000" dirty="0">
                 <a:sym typeface="Wingdings" panose="05000000000000000000" pitchFamily="2" charset="2"/>
               </a:rPr>
-              <a:t>high dimension</a:t>
-            </a:r>
-            <a:endParaRPr lang="en-US" sz="1800" dirty="0"/>
-          </a:p>
-          <a:p>
-            <a:r>
-              <a:rPr lang="en-US" sz="1800" b="1" dirty="0"/>
-              <a:t>Phases 0, 1|2, 2|3, NA excluded</a:t>
-            </a:r>
-          </a:p>
-          <a:p>
-            <a:r>
-              <a:rPr lang="en-US" sz="1800" b="1" dirty="0"/>
-              <a:t>Study statuses excluded: </a:t>
-            </a:r>
-            <a:r>
-              <a:rPr lang="en-US" sz="1800" dirty="0"/>
-              <a:t>Terminated, Withdrawn, Suspended etc.</a:t>
+              <a:t>High dimension</a:t>
+            </a:r>
+            <a:endParaRPr lang="en-US" sz="2000" dirty="0"/>
+          </a:p>
+          <a:p>
+            <a:r>
+              <a:rPr lang="en-US" sz="2000" b="1" dirty="0"/>
+              <a:t>Phases excluded: </a:t>
+            </a:r>
+            <a:r>
+              <a:rPr lang="en-US" sz="2000" dirty="0"/>
+              <a:t>0, 1|2, 2|3, NA </a:t>
+            </a:r>
+          </a:p>
+          <a:p>
+            <a:r>
+              <a:rPr lang="en-US" sz="2000" b="1" dirty="0"/>
+              <a:t>Study status excluded: </a:t>
+            </a:r>
+            <a:r>
+              <a:rPr lang="en-US" sz="2000" dirty="0"/>
+              <a:t>Suspended etc.</a:t>
             </a:r>
           </a:p>
         </p:txBody>
@@ -21441,7 +21206,7 @@
 </p:sld>
 </file>
 
-<file path=ppt/slides/slide26.xml><?xml version="1.0" encoding="utf-8"?>
+<file path=ppt/slides/slide27.xml><?xml version="1.0" encoding="utf-8"?>
 <p:sld xmlns:a="http://schemas.openxmlformats.org/drawingml/2006/main" xmlns:r="http://schemas.openxmlformats.org/officeDocument/2006/relationships" xmlns:p="http://schemas.openxmlformats.org/presentationml/2006/main">
   <p:cSld>
     <p:spTree>
@@ -21518,8 +21283,8 @@
         </p:nvSpPr>
         <p:spPr>
           <a:xfrm>
-            <a:off x="609598" y="1646498"/>
-            <a:ext cx="10972799" cy="3565003"/>
+            <a:off x="609598" y="1613626"/>
+            <a:ext cx="10972799" cy="3884349"/>
           </a:xfrm>
           <a:ln>
             <a:solidFill>
@@ -21535,14 +21300,24 @@
           <a:p>
             <a:r>
               <a:rPr lang="en-US" sz="2000" b="1" dirty="0"/>
-              <a:t>Underlying factors of early termination induction </a:t>
+              <a:t>Underlying factors </a:t>
+            </a:r>
+            <a:r>
+              <a:rPr lang="en-US" sz="2000" b="1" dirty="0">
+                <a:sym typeface="Wingdings" panose="05000000000000000000" pitchFamily="2" charset="2"/>
+              </a:rPr>
+              <a:t> E</a:t>
+            </a:r>
+            <a:r>
+              <a:rPr lang="en-US" sz="2000" b="1" dirty="0"/>
+              <a:t>arly termination</a:t>
             </a:r>
           </a:p>
           <a:p>
             <a:pPr lvl="1"/>
             <a:r>
               <a:rPr lang="en-US" sz="2000" dirty="0"/>
-              <a:t>Interactions: Enrollment x Other Features, Funder x Intervention etc. </a:t>
+              <a:t>Interactions (Enrollment x Other Features, Funder x Intervention etc.) </a:t>
             </a:r>
           </a:p>
           <a:p>
@@ -21556,14 +21331,24 @@
             <a:pPr lvl="1"/>
             <a:r>
               <a:rPr lang="en-US" sz="2000" dirty="0"/>
-              <a:t>Features ~ Phase</a:t>
+              <a:t>Phase ~ Features</a:t>
             </a:r>
           </a:p>
           <a:p>
             <a:pPr lvl="1"/>
             <a:r>
               <a:rPr lang="en-US" sz="2000" dirty="0"/>
-              <a:t>Other Study Statuses: Withdrawn, Terminated, Suspended separately | combined</a:t>
+              <a:t>Study Status: Withdrawn, Terminated, Suspended etc. </a:t>
+            </a:r>
+            <a:r>
+              <a:rPr lang="en-US" sz="2000" dirty="0">
+                <a:sym typeface="Wingdings" panose="05000000000000000000" pitchFamily="2" charset="2"/>
+              </a:rPr>
+              <a:t> S</a:t>
+            </a:r>
+            <a:r>
+              <a:rPr lang="en-US" sz="2000" dirty="0"/>
+              <a:t>eparately | Combined</a:t>
             </a:r>
           </a:p>
           <a:p>
@@ -21579,7 +21364,7 @@
               <a:t>Interpretability</a:t>
             </a:r>
             <a:r>
-              <a:rPr lang="en-US" sz="1600" b="1" dirty="0"/>
+              <a:rPr lang="en-US" sz="2000" b="1" dirty="0"/>
               <a:t> </a:t>
             </a:r>
           </a:p>
@@ -21595,6 +21380,31 @@
               <a:rPr lang="en-US" sz="2000" dirty="0"/>
               <a:t>Literature, Registries</a:t>
             </a:r>
+          </a:p>
+          <a:p>
+            <a:r>
+              <a:rPr lang="en-US" sz="2000" b="1" dirty="0"/>
+              <a:t>Later years </a:t>
+            </a:r>
+            <a:r>
+              <a:rPr lang="en-US" sz="2000" b="1"/>
+              <a:t>trials registrations</a:t>
+            </a:r>
+            <a:r>
+              <a:rPr lang="en-US" sz="2000"/>
+              <a:t> </a:t>
+            </a:r>
+            <a:r>
+              <a:rPr lang="en-US" sz="2000" dirty="0"/>
+              <a:t>: Less optional field completion </a:t>
+            </a:r>
+            <a:r>
+              <a:rPr lang="en-US" sz="2000" dirty="0">
+                <a:sym typeface="Wingdings" panose="05000000000000000000" pitchFamily="2" charset="2"/>
+              </a:rPr>
+              <a:t> Accuracy</a:t>
+            </a:r>
+            <a:endParaRPr lang="en-US" sz="2000" dirty="0"/>
           </a:p>
         </p:txBody>
       </p:sp>
@@ -21655,7 +21465,7 @@
         </p:nvSpPr>
         <p:spPr>
           <a:xfrm>
-            <a:off x="609598" y="5587445"/>
+            <a:off x="609598" y="5797889"/>
             <a:ext cx="10972799" cy="646331"/>
           </a:xfrm>
           <a:prstGeom prst="rect">
@@ -21736,12 +21546,22 @@
             <a:off x="609600" y="685800"/>
             <a:ext cx="10972800" cy="5486400"/>
           </a:xfrm>
+          <a:prstGeom prst="plaque">
+            <a:avLst/>
+          </a:prstGeom>
           <a:noFill/>
-          <a:ln>
+          <a:ln w="19050">
             <a:solidFill>
               <a:schemeClr val="tx1"/>
             </a:solidFill>
           </a:ln>
+          <a:effectLst>
+            <a:outerShdw blurRad="63500" sx="102000" sy="102000" algn="ctr" rotWithShape="0">
+              <a:prstClr val="black">
+                <a:alpha val="40000"/>
+              </a:prstClr>
+            </a:outerShdw>
+          </a:effectLst>
         </p:spPr>
         <p:txBody>
           <a:bodyPr>
@@ -22025,7 +21845,7 @@
           </a:ln>
         </p:spPr>
         <p:txBody>
-          <a:bodyPr>
+          <a:bodyPr anchor="ctr">
             <a:noAutofit/>
           </a:bodyPr>
           <a:lstStyle/>
@@ -22519,324 +22339,6 @@
       </p:grpSpPr>
       <p:sp>
         <p:nvSpPr>
-          <p:cNvPr id="3" name="Title 1">
-            <a:extLst>
-              <a:ext uri="{FF2B5EF4-FFF2-40B4-BE49-F238E27FC236}">
-                <a16:creationId xmlns:a16="http://schemas.microsoft.com/office/drawing/2014/main" id="{364C2508-D28E-6C2B-E788-4415DE3EF595}"/>
-              </a:ext>
-            </a:extLst>
-          </p:cNvPr>
-          <p:cNvSpPr txBox="1">
-            <a:spLocks/>
-          </p:cNvSpPr>
-          <p:nvPr/>
-        </p:nvSpPr>
-        <p:spPr>
-          <a:xfrm>
-            <a:off x="609600" y="1151942"/>
-            <a:ext cx="10972800" cy="1880625"/>
-          </a:xfrm>
-          <a:prstGeom prst="rect">
-            <a:avLst/>
-          </a:prstGeom>
-          <a:ln>
-            <a:noFill/>
-          </a:ln>
-        </p:spPr>
-        <p:txBody>
-          <a:bodyPr vert="horz" lIns="91440" tIns="45720" rIns="91440" bIns="45720" rtlCol="0" anchor="ctr">
-            <a:noAutofit/>
-          </a:bodyPr>
-          <a:lstStyle>
-            <a:lvl1pPr algn="l" defTabSz="914400" rtl="0" eaLnBrk="1" latinLnBrk="0" hangingPunct="1">
-              <a:lnSpc>
-                <a:spcPct val="90000"/>
-              </a:lnSpc>
-              <a:spcBef>
-                <a:spcPct val="0"/>
-              </a:spcBef>
-              <a:buNone/>
-              <a:defRPr sz="4400" kern="1200">
-                <a:solidFill>
-                  <a:schemeClr val="tx1"/>
-                </a:solidFill>
-                <a:latin typeface="+mj-lt"/>
-                <a:ea typeface="+mj-ea"/>
-                <a:cs typeface="+mj-cs"/>
-              </a:defRPr>
-            </a:lvl1pPr>
-          </a:lstStyle>
-          <a:p>
-            <a:pPr algn="ctr"/>
-            <a:r>
-              <a:rPr lang="en-GB" sz="2400" dirty="0"/>
-              <a:t>Digital medical records. Complex datasets including large number of entries of any data types (images, text, ICD-10 codes, etc.).</a:t>
-            </a:r>
-            <a:br>
-              <a:rPr lang="en-GB" sz="2400" dirty="0"/>
-            </a:br>
-            <a:r>
-              <a:rPr lang="en-GB" sz="2400" dirty="0"/>
-              <a:t>Valuable information but also more challenging for analysis with traditional statistical models</a:t>
-            </a:r>
-          </a:p>
-        </p:txBody>
-      </p:sp>
-      <p:sp>
-        <p:nvSpPr>
-          <p:cNvPr id="4" name="Title 1">
-            <a:extLst>
-              <a:ext uri="{FF2B5EF4-FFF2-40B4-BE49-F238E27FC236}">
-                <a16:creationId xmlns:a16="http://schemas.microsoft.com/office/drawing/2014/main" id="{8E7D1FB3-01A9-C464-C45A-EB8E9A04BC4D}"/>
-              </a:ext>
-            </a:extLst>
-          </p:cNvPr>
-          <p:cNvSpPr txBox="1">
-            <a:spLocks/>
-          </p:cNvSpPr>
-          <p:nvPr/>
-        </p:nvSpPr>
-        <p:spPr>
-          <a:xfrm>
-            <a:off x="609600" y="4337025"/>
-            <a:ext cx="10972800" cy="2254234"/>
-          </a:xfrm>
-          <a:prstGeom prst="rect">
-            <a:avLst/>
-          </a:prstGeom>
-          <a:ln>
-            <a:noFill/>
-          </a:ln>
-        </p:spPr>
-        <p:txBody>
-          <a:bodyPr vert="horz" lIns="91440" tIns="45720" rIns="91440" bIns="45720" rtlCol="0" anchor="ctr">
-            <a:noAutofit/>
-          </a:bodyPr>
-          <a:lstStyle>
-            <a:lvl1pPr algn="l" defTabSz="914400" rtl="0" eaLnBrk="1" latinLnBrk="0" hangingPunct="1">
-              <a:lnSpc>
-                <a:spcPct val="90000"/>
-              </a:lnSpc>
-              <a:spcBef>
-                <a:spcPct val="0"/>
-              </a:spcBef>
-              <a:buNone/>
-              <a:defRPr sz="4400" kern="1200">
-                <a:solidFill>
-                  <a:schemeClr val="tx1"/>
-                </a:solidFill>
-                <a:latin typeface="+mj-lt"/>
-                <a:ea typeface="+mj-ea"/>
-                <a:cs typeface="+mj-cs"/>
-              </a:defRPr>
-            </a:lvl1pPr>
-          </a:lstStyle>
-          <a:p>
-            <a:pPr algn="ctr"/>
-            <a:r>
-              <a:rPr lang="en-GB" sz="2400" dirty="0"/>
-              <a:t>In 2005, the International Committee of Medical Journal Editors (ICMJE) </a:t>
-            </a:r>
-            <a:r>
-              <a:rPr lang="en-GB" sz="2400" dirty="0">
-                <a:sym typeface="Wingdings" panose="05000000000000000000" pitchFamily="2" charset="2"/>
-              </a:rPr>
-              <a:t></a:t>
-            </a:r>
-            <a:r>
-              <a:rPr lang="en-GB" sz="2400" dirty="0"/>
-              <a:t> </a:t>
-            </a:r>
-          </a:p>
-          <a:p>
-            <a:pPr algn="ctr"/>
-            <a:r>
-              <a:rPr lang="en-GB" sz="2400" dirty="0"/>
-              <a:t>CTs should be posted in Public Registries </a:t>
-            </a:r>
-            <a:r>
-              <a:rPr lang="en-GB" sz="2400" dirty="0">
-                <a:sym typeface="Wingdings" panose="05000000000000000000" pitchFamily="2" charset="2"/>
-              </a:rPr>
-              <a:t> </a:t>
-            </a:r>
-          </a:p>
-          <a:p>
-            <a:pPr algn="ctr"/>
-            <a:r>
-              <a:rPr lang="en-GB" sz="2400" dirty="0">
-                <a:sym typeface="Wingdings" panose="05000000000000000000" pitchFamily="2" charset="2"/>
-              </a:rPr>
-              <a:t>A</a:t>
-            </a:r>
-            <a:r>
-              <a:rPr lang="en-GB" sz="2400" dirty="0"/>
-              <a:t>ccurate documentation of their design </a:t>
-            </a:r>
-          </a:p>
-          <a:p>
-            <a:pPr algn="ctr"/>
-            <a:endParaRPr lang="en-GB" sz="2400" dirty="0"/>
-          </a:p>
-          <a:p>
-            <a:pPr algn="ctr"/>
-            <a:r>
-              <a:rPr lang="en-GB" sz="2400" u="sng" dirty="0">
-                <a:hlinkClick r:id="rId2">
-                  <a:extLst>
-                    <a:ext uri="{A12FA001-AC4F-418D-AE19-62706E023703}">
-                      <ahyp:hlinkClr xmlns:ahyp="http://schemas.microsoft.com/office/drawing/2018/hyperlinkcolor" val="tx"/>
-                    </a:ext>
-                  </a:extLst>
-                </a:hlinkClick>
-              </a:rPr>
-              <a:t>ClinicalTrials.gov</a:t>
-            </a:r>
-            <a:r>
-              <a:rPr lang="en-GB" sz="2400" dirty="0"/>
-              <a:t> registry is a type of EHR data regarding CTs’ information. </a:t>
-            </a:r>
-          </a:p>
-          <a:p>
-            <a:pPr algn="ctr"/>
-            <a:r>
-              <a:rPr lang="en-GB" sz="2400" dirty="0"/>
-              <a:t>It was used as data source in current study</a:t>
-            </a:r>
-            <a:endParaRPr lang="en-US" sz="2400" dirty="0"/>
-          </a:p>
-        </p:txBody>
-      </p:sp>
-      <p:sp>
-        <p:nvSpPr>
-          <p:cNvPr id="2" name="Title 1">
-            <a:extLst>
-              <a:ext uri="{FF2B5EF4-FFF2-40B4-BE49-F238E27FC236}">
-                <a16:creationId xmlns:a16="http://schemas.microsoft.com/office/drawing/2014/main" id="{8ED081B3-55DA-8B56-A28C-A5E0E86DDBDA}"/>
-              </a:ext>
-            </a:extLst>
-          </p:cNvPr>
-          <p:cNvSpPr>
-            <a:spLocks noGrp="1"/>
-          </p:cNvSpPr>
-          <p:nvPr>
-            <p:ph type="title"/>
-          </p:nvPr>
-        </p:nvSpPr>
-        <p:spPr>
-          <a:xfrm>
-            <a:off x="609600" y="370115"/>
-            <a:ext cx="10972800" cy="457200"/>
-          </a:xfrm>
-          <a:ln>
-            <a:solidFill>
-              <a:schemeClr val="tx1"/>
-            </a:solidFill>
-          </a:ln>
-        </p:spPr>
-        <p:txBody>
-          <a:bodyPr>
-            <a:noAutofit/>
-          </a:bodyPr>
-          <a:lstStyle/>
-          <a:p>
-            <a:pPr algn="ctr"/>
-            <a:r>
-              <a:rPr lang="en-US" sz="3000" b="1" dirty="0"/>
-              <a:t>Electronic Health Records </a:t>
-            </a:r>
-            <a:r>
-              <a:rPr lang="el-GR" sz="3000" b="1" dirty="0"/>
-              <a:t>– </a:t>
-            </a:r>
-            <a:r>
-              <a:rPr lang="en-US" sz="3000" b="1" dirty="0"/>
-              <a:t>EHR</a:t>
-            </a:r>
-          </a:p>
-        </p:txBody>
-      </p:sp>
-      <p:sp>
-        <p:nvSpPr>
-          <p:cNvPr id="5" name="TextBox 4">
-            <a:extLst>
-              <a:ext uri="{FF2B5EF4-FFF2-40B4-BE49-F238E27FC236}">
-                <a16:creationId xmlns:a16="http://schemas.microsoft.com/office/drawing/2014/main" id="{E7DEE60B-D404-7827-DCD6-007CA5735B35}"/>
-              </a:ext>
-            </a:extLst>
-          </p:cNvPr>
-          <p:cNvSpPr txBox="1"/>
-          <p:nvPr/>
-        </p:nvSpPr>
-        <p:spPr>
-          <a:xfrm>
-            <a:off x="609600" y="3446269"/>
-            <a:ext cx="10972800" cy="457200"/>
-          </a:xfrm>
-          <a:prstGeom prst="rect">
-            <a:avLst/>
-          </a:prstGeom>
-          <a:noFill/>
-          <a:ln cmpd="sng">
-            <a:solidFill>
-              <a:schemeClr val="tx1"/>
-            </a:solidFill>
-          </a:ln>
-        </p:spPr>
-        <p:txBody>
-          <a:bodyPr wrap="square" rtlCol="0">
-            <a:spAutoFit/>
-          </a:bodyPr>
-          <a:lstStyle/>
-          <a:p>
-            <a:pPr algn="ctr"/>
-            <a:r>
-              <a:rPr lang="en-US" sz="2500" b="1" dirty="0"/>
-              <a:t>Public Registries</a:t>
-            </a:r>
-            <a:r>
-              <a:rPr lang="el-GR" sz="2500" b="1" dirty="0"/>
-              <a:t> </a:t>
-            </a:r>
-            <a:r>
-              <a:rPr lang="en-US" sz="2500" b="1" dirty="0"/>
-              <a:t>as EHR</a:t>
-            </a:r>
-          </a:p>
-        </p:txBody>
-      </p:sp>
-    </p:spTree>
-    <p:extLst>
-      <p:ext uri="{BB962C8B-B14F-4D97-AF65-F5344CB8AC3E}">
-        <p14:creationId xmlns:p14="http://schemas.microsoft.com/office/powerpoint/2010/main" val="3253723412"/>
-      </p:ext>
-    </p:extLst>
-  </p:cSld>
-  <p:clrMapOvr>
-    <a:masterClrMapping/>
-  </p:clrMapOvr>
-</p:sld>
-</file>
-
-<file path=ppt/slides/slide7.xml><?xml version="1.0" encoding="utf-8"?>
-<p:sld xmlns:a="http://schemas.openxmlformats.org/drawingml/2006/main" xmlns:r="http://schemas.openxmlformats.org/officeDocument/2006/relationships" xmlns:p="http://schemas.openxmlformats.org/presentationml/2006/main">
-  <p:cSld>
-    <p:spTree>
-      <p:nvGrpSpPr>
-        <p:cNvPr id="1" name=""/>
-        <p:cNvGrpSpPr/>
-        <p:nvPr/>
-      </p:nvGrpSpPr>
-      <p:grpSpPr>
-        <a:xfrm>
-          <a:off x="0" y="0"/>
-          <a:ext cx="0" cy="0"/>
-          <a:chOff x="0" y="0"/>
-          <a:chExt cx="0" cy="0"/>
-        </a:xfrm>
-      </p:grpSpPr>
-      <p:sp>
-        <p:nvSpPr>
           <p:cNvPr id="2" name="Title 1">
             <a:extLst>
               <a:ext uri="{FF2B5EF4-FFF2-40B4-BE49-F238E27FC236}">
@@ -22923,7 +22425,7 @@
           <a:p>
             <a:r>
               <a:rPr lang="en-GB" dirty="0"/>
-              <a:t>Inefficient and Slow scientific progress</a:t>
+              <a:t>Inefficient and slow scientific progress</a:t>
             </a:r>
           </a:p>
           <a:p>
@@ -22951,292 +22453,6 @@
               <a:rPr lang="en-GB" dirty="0"/>
               <a:t>contribution to scientific progress, especially if relying on results</a:t>
             </a:r>
-          </a:p>
-        </p:txBody>
-      </p:sp>
-      <p:sp>
-        <p:nvSpPr>
-          <p:cNvPr id="4" name="Content Placeholder 2">
-            <a:extLst>
-              <a:ext uri="{FF2B5EF4-FFF2-40B4-BE49-F238E27FC236}">
-                <a16:creationId xmlns:a16="http://schemas.microsoft.com/office/drawing/2014/main" id="{CDDFCFBD-9E04-ECFB-B1C3-F69CFF2F9ACF}"/>
-              </a:ext>
-            </a:extLst>
-          </p:cNvPr>
-          <p:cNvSpPr txBox="1">
-            <a:spLocks/>
-          </p:cNvSpPr>
-          <p:nvPr/>
-        </p:nvSpPr>
-        <p:spPr>
-          <a:xfrm>
-            <a:off x="609606" y="3924575"/>
-            <a:ext cx="10972800" cy="1621160"/>
-          </a:xfrm>
-          <a:prstGeom prst="rect">
-            <a:avLst/>
-          </a:prstGeom>
-          <a:ln>
-            <a:noFill/>
-          </a:ln>
-        </p:spPr>
-        <p:txBody>
-          <a:bodyPr vert="horz" lIns="91440" tIns="45720" rIns="91440" bIns="45720" rtlCol="0" anchor="ctr">
-            <a:noAutofit/>
-          </a:bodyPr>
-          <a:lstStyle>
-            <a:lvl1pPr marL="228600" indent="-228600" algn="l" defTabSz="914400" rtl="0" eaLnBrk="1" latinLnBrk="0" hangingPunct="1">
-              <a:lnSpc>
-                <a:spcPct val="90000"/>
-              </a:lnSpc>
-              <a:spcBef>
-                <a:spcPts val="1000"/>
-              </a:spcBef>
-              <a:buFont typeface="Arial" panose="020B0604020202020204" pitchFamily="34" charset="0"/>
-              <a:buChar char="•"/>
-              <a:defRPr sz="2800" kern="1200">
-                <a:solidFill>
-                  <a:schemeClr val="tx1"/>
-                </a:solidFill>
-                <a:latin typeface="+mn-lt"/>
-                <a:ea typeface="+mn-ea"/>
-                <a:cs typeface="+mn-cs"/>
-              </a:defRPr>
-            </a:lvl1pPr>
-            <a:lvl2pPr marL="685800" indent="-228600" algn="l" defTabSz="914400" rtl="0" eaLnBrk="1" latinLnBrk="0" hangingPunct="1">
-              <a:lnSpc>
-                <a:spcPct val="90000"/>
-              </a:lnSpc>
-              <a:spcBef>
-                <a:spcPts val="500"/>
-              </a:spcBef>
-              <a:buFont typeface="Arial" panose="020B0604020202020204" pitchFamily="34" charset="0"/>
-              <a:buChar char="•"/>
-              <a:defRPr sz="2400" kern="1200">
-                <a:solidFill>
-                  <a:schemeClr val="tx1"/>
-                </a:solidFill>
-                <a:latin typeface="+mn-lt"/>
-                <a:ea typeface="+mn-ea"/>
-                <a:cs typeface="+mn-cs"/>
-              </a:defRPr>
-            </a:lvl2pPr>
-            <a:lvl3pPr marL="1143000" indent="-228600" algn="l" defTabSz="914400" rtl="0" eaLnBrk="1" latinLnBrk="0" hangingPunct="1">
-              <a:lnSpc>
-                <a:spcPct val="90000"/>
-              </a:lnSpc>
-              <a:spcBef>
-                <a:spcPts val="500"/>
-              </a:spcBef>
-              <a:buFont typeface="Arial" panose="020B0604020202020204" pitchFamily="34" charset="0"/>
-              <a:buChar char="•"/>
-              <a:defRPr sz="2000" kern="1200">
-                <a:solidFill>
-                  <a:schemeClr val="tx1"/>
-                </a:solidFill>
-                <a:latin typeface="+mn-lt"/>
-                <a:ea typeface="+mn-ea"/>
-                <a:cs typeface="+mn-cs"/>
-              </a:defRPr>
-            </a:lvl3pPr>
-            <a:lvl4pPr marL="1600200" indent="-228600" algn="l" defTabSz="914400" rtl="0" eaLnBrk="1" latinLnBrk="0" hangingPunct="1">
-              <a:lnSpc>
-                <a:spcPct val="90000"/>
-              </a:lnSpc>
-              <a:spcBef>
-                <a:spcPts val="500"/>
-              </a:spcBef>
-              <a:buFont typeface="Arial" panose="020B0604020202020204" pitchFamily="34" charset="0"/>
-              <a:buChar char="•"/>
-              <a:defRPr sz="1800" kern="1200">
-                <a:solidFill>
-                  <a:schemeClr val="tx1"/>
-                </a:solidFill>
-                <a:latin typeface="+mn-lt"/>
-                <a:ea typeface="+mn-ea"/>
-                <a:cs typeface="+mn-cs"/>
-              </a:defRPr>
-            </a:lvl4pPr>
-            <a:lvl5pPr marL="2057400" indent="-228600" algn="l" defTabSz="914400" rtl="0" eaLnBrk="1" latinLnBrk="0" hangingPunct="1">
-              <a:lnSpc>
-                <a:spcPct val="90000"/>
-              </a:lnSpc>
-              <a:spcBef>
-                <a:spcPts val="500"/>
-              </a:spcBef>
-              <a:buFont typeface="Arial" panose="020B0604020202020204" pitchFamily="34" charset="0"/>
-              <a:buChar char="•"/>
-              <a:defRPr sz="1800" kern="1200">
-                <a:solidFill>
-                  <a:schemeClr val="tx1"/>
-                </a:solidFill>
-                <a:latin typeface="+mn-lt"/>
-                <a:ea typeface="+mn-ea"/>
-                <a:cs typeface="+mn-cs"/>
-              </a:defRPr>
-            </a:lvl5pPr>
-            <a:lvl6pPr marL="2514600" indent="-228600" algn="l" defTabSz="914400" rtl="0" eaLnBrk="1" latinLnBrk="0" hangingPunct="1">
-              <a:lnSpc>
-                <a:spcPct val="90000"/>
-              </a:lnSpc>
-              <a:spcBef>
-                <a:spcPts val="500"/>
-              </a:spcBef>
-              <a:buFont typeface="Arial" panose="020B0604020202020204" pitchFamily="34" charset="0"/>
-              <a:buChar char="•"/>
-              <a:defRPr sz="1800" kern="1200">
-                <a:solidFill>
-                  <a:schemeClr val="tx1"/>
-                </a:solidFill>
-                <a:latin typeface="+mn-lt"/>
-                <a:ea typeface="+mn-ea"/>
-                <a:cs typeface="+mn-cs"/>
-              </a:defRPr>
-            </a:lvl6pPr>
-            <a:lvl7pPr marL="2971800" indent="-228600" algn="l" defTabSz="914400" rtl="0" eaLnBrk="1" latinLnBrk="0" hangingPunct="1">
-              <a:lnSpc>
-                <a:spcPct val="90000"/>
-              </a:lnSpc>
-              <a:spcBef>
-                <a:spcPts val="500"/>
-              </a:spcBef>
-              <a:buFont typeface="Arial" panose="020B0604020202020204" pitchFamily="34" charset="0"/>
-              <a:buChar char="•"/>
-              <a:defRPr sz="1800" kern="1200">
-                <a:solidFill>
-                  <a:schemeClr val="tx1"/>
-                </a:solidFill>
-                <a:latin typeface="+mn-lt"/>
-                <a:ea typeface="+mn-ea"/>
-                <a:cs typeface="+mn-cs"/>
-              </a:defRPr>
-            </a:lvl7pPr>
-            <a:lvl8pPr marL="3429000" indent="-228600" algn="l" defTabSz="914400" rtl="0" eaLnBrk="1" latinLnBrk="0" hangingPunct="1">
-              <a:lnSpc>
-                <a:spcPct val="90000"/>
-              </a:lnSpc>
-              <a:spcBef>
-                <a:spcPts val="500"/>
-              </a:spcBef>
-              <a:buFont typeface="Arial" panose="020B0604020202020204" pitchFamily="34" charset="0"/>
-              <a:buChar char="•"/>
-              <a:defRPr sz="1800" kern="1200">
-                <a:solidFill>
-                  <a:schemeClr val="tx1"/>
-                </a:solidFill>
-                <a:latin typeface="+mn-lt"/>
-                <a:ea typeface="+mn-ea"/>
-                <a:cs typeface="+mn-cs"/>
-              </a:defRPr>
-            </a:lvl8pPr>
-            <a:lvl9pPr marL="3886200" indent="-228600" algn="l" defTabSz="914400" rtl="0" eaLnBrk="1" latinLnBrk="0" hangingPunct="1">
-              <a:lnSpc>
-                <a:spcPct val="90000"/>
-              </a:lnSpc>
-              <a:spcBef>
-                <a:spcPts val="500"/>
-              </a:spcBef>
-              <a:buFont typeface="Arial" panose="020B0604020202020204" pitchFamily="34" charset="0"/>
-              <a:buChar char="•"/>
-              <a:defRPr sz="1800" kern="1200">
-                <a:solidFill>
-                  <a:schemeClr val="tx1"/>
-                </a:solidFill>
-                <a:latin typeface="+mn-lt"/>
-                <a:ea typeface="+mn-ea"/>
-                <a:cs typeface="+mn-cs"/>
-              </a:defRPr>
-            </a:lvl9pPr>
-          </a:lstStyle>
-          <a:p>
-            <a:pPr marL="0" indent="0" algn="ctr">
-              <a:buFont typeface="Arial" panose="020B0604020202020204" pitchFamily="34" charset="0"/>
-              <a:buNone/>
-            </a:pPr>
-            <a:r>
-              <a:rPr lang="en-GB" sz="2000" dirty="0"/>
-              <a:t>Accurate CTs’ characteristics </a:t>
-            </a:r>
-            <a:r>
-              <a:rPr lang="en-GB" sz="2000" dirty="0">
-                <a:sym typeface="Wingdings" panose="05000000000000000000" pitchFamily="2" charset="2"/>
-              </a:rPr>
-              <a:t> </a:t>
-            </a:r>
-            <a:r>
-              <a:rPr lang="en-GB" sz="2000" dirty="0"/>
-              <a:t>Registries’</a:t>
-            </a:r>
-            <a:r>
-              <a:rPr lang="en-GB" sz="2000" dirty="0">
-                <a:sym typeface="Wingdings" panose="05000000000000000000" pitchFamily="2" charset="2"/>
-              </a:rPr>
-              <a:t> </a:t>
-            </a:r>
-            <a:r>
-              <a:rPr lang="en-GB" sz="2000" dirty="0"/>
-              <a:t>Analysis → Early termination relations →</a:t>
-            </a:r>
-          </a:p>
-          <a:p>
-            <a:r>
-              <a:rPr lang="en-GB" sz="2000" dirty="0"/>
-              <a:t>Minimize problems</a:t>
-            </a:r>
-          </a:p>
-          <a:p>
-            <a:r>
-              <a:rPr lang="en-GB" sz="2000" dirty="0"/>
-              <a:t>Non-transparent registry </a:t>
-            </a:r>
-            <a:r>
-              <a:rPr lang="en-GB" sz="2000" dirty="0">
-                <a:sym typeface="Wingdings" panose="05000000000000000000" pitchFamily="2" charset="2"/>
-              </a:rPr>
-              <a:t> Unethical </a:t>
-            </a:r>
-          </a:p>
-        </p:txBody>
-      </p:sp>
-      <p:sp>
-        <p:nvSpPr>
-          <p:cNvPr id="5" name="TextBox 4">
-            <a:extLst>
-              <a:ext uri="{FF2B5EF4-FFF2-40B4-BE49-F238E27FC236}">
-                <a16:creationId xmlns:a16="http://schemas.microsoft.com/office/drawing/2014/main" id="{CD9BB61E-EA88-626A-DB6A-1C88B5382EEA}"/>
-              </a:ext>
-            </a:extLst>
-          </p:cNvPr>
-          <p:cNvSpPr txBox="1"/>
-          <p:nvPr/>
-        </p:nvSpPr>
-        <p:spPr>
-          <a:xfrm>
-            <a:off x="609606" y="3447521"/>
-            <a:ext cx="10972800" cy="457200"/>
-          </a:xfrm>
-          <a:prstGeom prst="rect">
-            <a:avLst/>
-          </a:prstGeom>
-          <a:noFill/>
-          <a:ln>
-            <a:solidFill>
-              <a:schemeClr val="tx1"/>
-            </a:solidFill>
-          </a:ln>
-        </p:spPr>
-        <p:txBody>
-          <a:bodyPr wrap="square" rtlCol="0">
-            <a:spAutoFit/>
-          </a:bodyPr>
-          <a:lstStyle/>
-          <a:p>
-            <a:pPr algn="ctr"/>
-            <a:r>
-              <a:rPr lang="en-GB" sz="2500" b="1" dirty="0"/>
-              <a:t>Significance of Accurate Clinical Trial Registration</a:t>
-            </a:r>
-            <a:endParaRPr lang="el-GR" sz="2500" b="1" dirty="0"/>
           </a:p>
         </p:txBody>
       </p:sp>
@@ -23673,6 +22889,601 @@
 </p:sld>
 </file>
 
+<file path=ppt/slides/slide7.xml><?xml version="1.0" encoding="utf-8"?>
+<p:sld xmlns:a="http://schemas.openxmlformats.org/drawingml/2006/main" xmlns:r="http://schemas.openxmlformats.org/officeDocument/2006/relationships" xmlns:p="http://schemas.openxmlformats.org/presentationml/2006/main">
+  <p:cSld>
+    <p:spTree>
+      <p:nvGrpSpPr>
+        <p:cNvPr id="1" name=""/>
+        <p:cNvGrpSpPr/>
+        <p:nvPr/>
+      </p:nvGrpSpPr>
+      <p:grpSpPr>
+        <a:xfrm>
+          <a:off x="0" y="0"/>
+          <a:ext cx="0" cy="0"/>
+          <a:chOff x="0" y="0"/>
+          <a:chExt cx="0" cy="0"/>
+        </a:xfrm>
+      </p:grpSpPr>
+      <p:sp>
+        <p:nvSpPr>
+          <p:cNvPr id="3" name="Title 1">
+            <a:extLst>
+              <a:ext uri="{FF2B5EF4-FFF2-40B4-BE49-F238E27FC236}">
+                <a16:creationId xmlns:a16="http://schemas.microsoft.com/office/drawing/2014/main" id="{364C2508-D28E-6C2B-E788-4415DE3EF595}"/>
+              </a:ext>
+            </a:extLst>
+          </p:cNvPr>
+          <p:cNvSpPr txBox="1">
+            <a:spLocks/>
+          </p:cNvSpPr>
+          <p:nvPr/>
+        </p:nvSpPr>
+        <p:spPr>
+          <a:xfrm>
+            <a:off x="609600" y="827315"/>
+            <a:ext cx="10972800" cy="1476047"/>
+          </a:xfrm>
+          <a:prstGeom prst="rect">
+            <a:avLst/>
+          </a:prstGeom>
+          <a:ln>
+            <a:noFill/>
+          </a:ln>
+        </p:spPr>
+        <p:txBody>
+          <a:bodyPr vert="horz" lIns="91440" tIns="45720" rIns="91440" bIns="45720" rtlCol="0" anchor="ctr">
+            <a:noAutofit/>
+          </a:bodyPr>
+          <a:lstStyle>
+            <a:lvl1pPr algn="l" defTabSz="914400" rtl="0" eaLnBrk="1" latinLnBrk="0" hangingPunct="1">
+              <a:lnSpc>
+                <a:spcPct val="90000"/>
+              </a:lnSpc>
+              <a:spcBef>
+                <a:spcPct val="0"/>
+              </a:spcBef>
+              <a:buNone/>
+              <a:defRPr sz="4400" kern="1200">
+                <a:solidFill>
+                  <a:schemeClr val="tx1"/>
+                </a:solidFill>
+                <a:latin typeface="+mj-lt"/>
+                <a:ea typeface="+mj-ea"/>
+                <a:cs typeface="+mj-cs"/>
+              </a:defRPr>
+            </a:lvl1pPr>
+          </a:lstStyle>
+          <a:p>
+            <a:pPr algn="ctr"/>
+            <a:r>
+              <a:rPr lang="en-GB" sz="2200" dirty="0"/>
+              <a:t>Digital medical records. Complex datasets including large number of entries of any data types (images, text, ICD-10 codes, etc.).</a:t>
+            </a:r>
+            <a:br>
+              <a:rPr lang="en-GB" sz="2200" dirty="0"/>
+            </a:br>
+            <a:r>
+              <a:rPr lang="en-GB" sz="2200" dirty="0"/>
+              <a:t>Valuable information but also more challenging for analysis with traditional statistical models</a:t>
+            </a:r>
+          </a:p>
+        </p:txBody>
+      </p:sp>
+      <p:sp>
+        <p:nvSpPr>
+          <p:cNvPr id="4" name="Title 1">
+            <a:extLst>
+              <a:ext uri="{FF2B5EF4-FFF2-40B4-BE49-F238E27FC236}">
+                <a16:creationId xmlns:a16="http://schemas.microsoft.com/office/drawing/2014/main" id="{8E7D1FB3-01A9-C464-C45A-EB8E9A04BC4D}"/>
+              </a:ext>
+            </a:extLst>
+          </p:cNvPr>
+          <p:cNvSpPr txBox="1">
+            <a:spLocks/>
+          </p:cNvSpPr>
+          <p:nvPr/>
+        </p:nvSpPr>
+        <p:spPr>
+          <a:xfrm>
+            <a:off x="609600" y="2834636"/>
+            <a:ext cx="10972800" cy="1972735"/>
+          </a:xfrm>
+          <a:prstGeom prst="rect">
+            <a:avLst/>
+          </a:prstGeom>
+          <a:ln>
+            <a:noFill/>
+          </a:ln>
+        </p:spPr>
+        <p:txBody>
+          <a:bodyPr vert="horz" lIns="91440" tIns="45720" rIns="91440" bIns="45720" rtlCol="0" anchor="ctr">
+            <a:noAutofit/>
+          </a:bodyPr>
+          <a:lstStyle>
+            <a:lvl1pPr algn="l" defTabSz="914400" rtl="0" eaLnBrk="1" latinLnBrk="0" hangingPunct="1">
+              <a:lnSpc>
+                <a:spcPct val="90000"/>
+              </a:lnSpc>
+              <a:spcBef>
+                <a:spcPct val="0"/>
+              </a:spcBef>
+              <a:buNone/>
+              <a:defRPr sz="4400" kern="1200">
+                <a:solidFill>
+                  <a:schemeClr val="tx1"/>
+                </a:solidFill>
+                <a:latin typeface="+mj-lt"/>
+                <a:ea typeface="+mj-ea"/>
+                <a:cs typeface="+mj-cs"/>
+              </a:defRPr>
+            </a:lvl1pPr>
+          </a:lstStyle>
+          <a:p>
+            <a:pPr algn="ctr"/>
+            <a:r>
+              <a:rPr lang="en-GB" sz="2200" dirty="0"/>
+              <a:t>In 2005, the International Committee of Medical Journal Editors (ICMJE) </a:t>
+            </a:r>
+            <a:r>
+              <a:rPr lang="en-GB" sz="2200" dirty="0">
+                <a:sym typeface="Wingdings" panose="05000000000000000000" pitchFamily="2" charset="2"/>
+              </a:rPr>
+              <a:t></a:t>
+            </a:r>
+            <a:r>
+              <a:rPr lang="en-GB" sz="2200" dirty="0"/>
+              <a:t> </a:t>
+            </a:r>
+          </a:p>
+          <a:p>
+            <a:pPr algn="ctr"/>
+            <a:r>
+              <a:rPr lang="en-GB" sz="2200" dirty="0"/>
+              <a:t>CTs uploaded on Public Registries </a:t>
+            </a:r>
+            <a:r>
+              <a:rPr lang="en-GB" sz="2200" dirty="0">
+                <a:sym typeface="Wingdings" panose="05000000000000000000" pitchFamily="2" charset="2"/>
+              </a:rPr>
+              <a:t>  </a:t>
+            </a:r>
+            <a:r>
+              <a:rPr lang="en-GB" sz="2200" dirty="0"/>
+              <a:t>Design transparency </a:t>
+            </a:r>
+          </a:p>
+          <a:p>
+            <a:pPr algn="ctr"/>
+            <a:endParaRPr lang="en-GB" sz="2200" dirty="0"/>
+          </a:p>
+          <a:p>
+            <a:pPr algn="ctr"/>
+            <a:r>
+              <a:rPr lang="en-GB" sz="2200" u="sng" dirty="0">
+                <a:hlinkClick r:id="rId2">
+                  <a:extLst>
+                    <a:ext uri="{A12FA001-AC4F-418D-AE19-62706E023703}">
+                      <ahyp:hlinkClr xmlns:ahyp="http://schemas.microsoft.com/office/drawing/2018/hyperlinkcolor" val="tx"/>
+                    </a:ext>
+                  </a:extLst>
+                </a:hlinkClick>
+              </a:rPr>
+              <a:t>ClinicalTrials.gov</a:t>
+            </a:r>
+            <a:r>
+              <a:rPr lang="en-GB" sz="2200" dirty="0"/>
+              <a:t> registry is a type of EHR data regarding CTs’ information. </a:t>
+            </a:r>
+          </a:p>
+          <a:p>
+            <a:pPr algn="ctr"/>
+            <a:r>
+              <a:rPr lang="en-GB" sz="2200" dirty="0"/>
+              <a:t>It was used as data source in current study</a:t>
+            </a:r>
+            <a:endParaRPr lang="en-US" sz="2200" dirty="0"/>
+          </a:p>
+        </p:txBody>
+      </p:sp>
+      <p:sp>
+        <p:nvSpPr>
+          <p:cNvPr id="2" name="Title 1">
+            <a:extLst>
+              <a:ext uri="{FF2B5EF4-FFF2-40B4-BE49-F238E27FC236}">
+                <a16:creationId xmlns:a16="http://schemas.microsoft.com/office/drawing/2014/main" id="{8ED081B3-55DA-8B56-A28C-A5E0E86DDBDA}"/>
+              </a:ext>
+            </a:extLst>
+          </p:cNvPr>
+          <p:cNvSpPr>
+            <a:spLocks noGrp="1"/>
+          </p:cNvSpPr>
+          <p:nvPr>
+            <p:ph type="title"/>
+          </p:nvPr>
+        </p:nvSpPr>
+        <p:spPr>
+          <a:xfrm>
+            <a:off x="609600" y="370115"/>
+            <a:ext cx="10972800" cy="457200"/>
+          </a:xfrm>
+          <a:ln>
+            <a:solidFill>
+              <a:schemeClr val="tx1"/>
+            </a:solidFill>
+          </a:ln>
+        </p:spPr>
+        <p:txBody>
+          <a:bodyPr>
+            <a:noAutofit/>
+          </a:bodyPr>
+          <a:lstStyle/>
+          <a:p>
+            <a:pPr algn="ctr"/>
+            <a:r>
+              <a:rPr lang="en-US" sz="2500" b="1" dirty="0"/>
+              <a:t>Electronic Health Records </a:t>
+            </a:r>
+            <a:r>
+              <a:rPr lang="el-GR" sz="2500" b="1" dirty="0"/>
+              <a:t>– </a:t>
+            </a:r>
+            <a:r>
+              <a:rPr lang="en-US" sz="2500" b="1" dirty="0"/>
+              <a:t>EHR</a:t>
+            </a:r>
+          </a:p>
+        </p:txBody>
+      </p:sp>
+      <p:sp>
+        <p:nvSpPr>
+          <p:cNvPr id="5" name="TextBox 4">
+            <a:extLst>
+              <a:ext uri="{FF2B5EF4-FFF2-40B4-BE49-F238E27FC236}">
+                <a16:creationId xmlns:a16="http://schemas.microsoft.com/office/drawing/2014/main" id="{E7DEE60B-D404-7827-DCD6-007CA5735B35}"/>
+              </a:ext>
+            </a:extLst>
+          </p:cNvPr>
+          <p:cNvSpPr txBox="1"/>
+          <p:nvPr/>
+        </p:nvSpPr>
+        <p:spPr>
+          <a:xfrm>
+            <a:off x="609600" y="2377436"/>
+            <a:ext cx="10972800" cy="457200"/>
+          </a:xfrm>
+          <a:prstGeom prst="rect">
+            <a:avLst/>
+          </a:prstGeom>
+          <a:noFill/>
+          <a:ln cmpd="sng">
+            <a:solidFill>
+              <a:schemeClr val="tx1"/>
+            </a:solidFill>
+          </a:ln>
+        </p:spPr>
+        <p:txBody>
+          <a:bodyPr wrap="square" rtlCol="0">
+            <a:spAutoFit/>
+          </a:bodyPr>
+          <a:lstStyle/>
+          <a:p>
+            <a:pPr algn="ctr"/>
+            <a:r>
+              <a:rPr lang="en-US" sz="2500" b="1" dirty="0"/>
+              <a:t>Public Registries</a:t>
+            </a:r>
+            <a:r>
+              <a:rPr lang="el-GR" sz="2500" b="1" dirty="0"/>
+              <a:t> </a:t>
+            </a:r>
+            <a:r>
+              <a:rPr lang="en-US" sz="2500" b="1" dirty="0"/>
+              <a:t>as EHR</a:t>
+            </a:r>
+          </a:p>
+        </p:txBody>
+      </p:sp>
+      <p:sp>
+        <p:nvSpPr>
+          <p:cNvPr id="6" name="TextBox 5">
+            <a:extLst>
+              <a:ext uri="{FF2B5EF4-FFF2-40B4-BE49-F238E27FC236}">
+                <a16:creationId xmlns:a16="http://schemas.microsoft.com/office/drawing/2014/main" id="{CD9BB61E-EA88-626A-DB6A-1C88B5382EEA}"/>
+              </a:ext>
+            </a:extLst>
+          </p:cNvPr>
+          <p:cNvSpPr txBox="1"/>
+          <p:nvPr/>
+        </p:nvSpPr>
+        <p:spPr>
+          <a:xfrm>
+            <a:off x="609600" y="5040773"/>
+            <a:ext cx="10972800" cy="477054"/>
+          </a:xfrm>
+          <a:prstGeom prst="rect">
+            <a:avLst/>
+          </a:prstGeom>
+          <a:noFill/>
+          <a:ln>
+            <a:solidFill>
+              <a:schemeClr val="tx1"/>
+            </a:solidFill>
+          </a:ln>
+        </p:spPr>
+        <p:txBody>
+          <a:bodyPr wrap="square" rtlCol="0">
+            <a:spAutoFit/>
+          </a:bodyPr>
+          <a:lstStyle/>
+          <a:p>
+            <a:pPr algn="ctr"/>
+            <a:r>
+              <a:rPr lang="en-GB" sz="2500" b="1" dirty="0"/>
+              <a:t>Significance of Accurate Registration</a:t>
+            </a:r>
+            <a:endParaRPr lang="el-GR" sz="2500" b="1" dirty="0"/>
+          </a:p>
+        </p:txBody>
+      </p:sp>
+      <p:sp>
+        <p:nvSpPr>
+          <p:cNvPr id="7" name="Content Placeholder 2">
+            <a:extLst>
+              <a:ext uri="{FF2B5EF4-FFF2-40B4-BE49-F238E27FC236}">
+                <a16:creationId xmlns:a16="http://schemas.microsoft.com/office/drawing/2014/main" id="{CDDFCFBD-9E04-ECFB-B1C3-F69CFF2F9ACF}"/>
+              </a:ext>
+            </a:extLst>
+          </p:cNvPr>
+          <p:cNvSpPr txBox="1">
+            <a:spLocks/>
+          </p:cNvSpPr>
+          <p:nvPr/>
+        </p:nvSpPr>
+        <p:spPr>
+          <a:xfrm>
+            <a:off x="609600" y="5497973"/>
+            <a:ext cx="10972800" cy="1201446"/>
+          </a:xfrm>
+          <a:prstGeom prst="rect">
+            <a:avLst/>
+          </a:prstGeom>
+          <a:ln>
+            <a:noFill/>
+          </a:ln>
+        </p:spPr>
+        <p:txBody>
+          <a:bodyPr vert="horz" lIns="91440" tIns="45720" rIns="91440" bIns="45720" rtlCol="0" anchor="ctr">
+            <a:noAutofit/>
+          </a:bodyPr>
+          <a:lstStyle>
+            <a:lvl1pPr marL="228600" indent="-228600" algn="l" defTabSz="914400" rtl="0" eaLnBrk="1" latinLnBrk="0" hangingPunct="1">
+              <a:lnSpc>
+                <a:spcPct val="90000"/>
+              </a:lnSpc>
+              <a:spcBef>
+                <a:spcPts val="1000"/>
+              </a:spcBef>
+              <a:buFont typeface="Arial" panose="020B0604020202020204" pitchFamily="34" charset="0"/>
+              <a:buChar char="•"/>
+              <a:defRPr sz="2800" kern="1200">
+                <a:solidFill>
+                  <a:schemeClr val="tx1"/>
+                </a:solidFill>
+                <a:latin typeface="+mn-lt"/>
+                <a:ea typeface="+mn-ea"/>
+                <a:cs typeface="+mn-cs"/>
+              </a:defRPr>
+            </a:lvl1pPr>
+            <a:lvl2pPr marL="685800" indent="-228600" algn="l" defTabSz="914400" rtl="0" eaLnBrk="1" latinLnBrk="0" hangingPunct="1">
+              <a:lnSpc>
+                <a:spcPct val="90000"/>
+              </a:lnSpc>
+              <a:spcBef>
+                <a:spcPts val="500"/>
+              </a:spcBef>
+              <a:buFont typeface="Arial" panose="020B0604020202020204" pitchFamily="34" charset="0"/>
+              <a:buChar char="•"/>
+              <a:defRPr sz="2400" kern="1200">
+                <a:solidFill>
+                  <a:schemeClr val="tx1"/>
+                </a:solidFill>
+                <a:latin typeface="+mn-lt"/>
+                <a:ea typeface="+mn-ea"/>
+                <a:cs typeface="+mn-cs"/>
+              </a:defRPr>
+            </a:lvl2pPr>
+            <a:lvl3pPr marL="1143000" indent="-228600" algn="l" defTabSz="914400" rtl="0" eaLnBrk="1" latinLnBrk="0" hangingPunct="1">
+              <a:lnSpc>
+                <a:spcPct val="90000"/>
+              </a:lnSpc>
+              <a:spcBef>
+                <a:spcPts val="500"/>
+              </a:spcBef>
+              <a:buFont typeface="Arial" panose="020B0604020202020204" pitchFamily="34" charset="0"/>
+              <a:buChar char="•"/>
+              <a:defRPr sz="2000" kern="1200">
+                <a:solidFill>
+                  <a:schemeClr val="tx1"/>
+                </a:solidFill>
+                <a:latin typeface="+mn-lt"/>
+                <a:ea typeface="+mn-ea"/>
+                <a:cs typeface="+mn-cs"/>
+              </a:defRPr>
+            </a:lvl3pPr>
+            <a:lvl4pPr marL="1600200" indent="-228600" algn="l" defTabSz="914400" rtl="0" eaLnBrk="1" latinLnBrk="0" hangingPunct="1">
+              <a:lnSpc>
+                <a:spcPct val="90000"/>
+              </a:lnSpc>
+              <a:spcBef>
+                <a:spcPts val="500"/>
+              </a:spcBef>
+              <a:buFont typeface="Arial" panose="020B0604020202020204" pitchFamily="34" charset="0"/>
+              <a:buChar char="•"/>
+              <a:defRPr sz="1800" kern="1200">
+                <a:solidFill>
+                  <a:schemeClr val="tx1"/>
+                </a:solidFill>
+                <a:latin typeface="+mn-lt"/>
+                <a:ea typeface="+mn-ea"/>
+                <a:cs typeface="+mn-cs"/>
+              </a:defRPr>
+            </a:lvl4pPr>
+            <a:lvl5pPr marL="2057400" indent="-228600" algn="l" defTabSz="914400" rtl="0" eaLnBrk="1" latinLnBrk="0" hangingPunct="1">
+              <a:lnSpc>
+                <a:spcPct val="90000"/>
+              </a:lnSpc>
+              <a:spcBef>
+                <a:spcPts val="500"/>
+              </a:spcBef>
+              <a:buFont typeface="Arial" panose="020B0604020202020204" pitchFamily="34" charset="0"/>
+              <a:buChar char="•"/>
+              <a:defRPr sz="1800" kern="1200">
+                <a:solidFill>
+                  <a:schemeClr val="tx1"/>
+                </a:solidFill>
+                <a:latin typeface="+mn-lt"/>
+                <a:ea typeface="+mn-ea"/>
+                <a:cs typeface="+mn-cs"/>
+              </a:defRPr>
+            </a:lvl5pPr>
+            <a:lvl6pPr marL="2514600" indent="-228600" algn="l" defTabSz="914400" rtl="0" eaLnBrk="1" latinLnBrk="0" hangingPunct="1">
+              <a:lnSpc>
+                <a:spcPct val="90000"/>
+              </a:lnSpc>
+              <a:spcBef>
+                <a:spcPts val="500"/>
+              </a:spcBef>
+              <a:buFont typeface="Arial" panose="020B0604020202020204" pitchFamily="34" charset="0"/>
+              <a:buChar char="•"/>
+              <a:defRPr sz="1800" kern="1200">
+                <a:solidFill>
+                  <a:schemeClr val="tx1"/>
+                </a:solidFill>
+                <a:latin typeface="+mn-lt"/>
+                <a:ea typeface="+mn-ea"/>
+                <a:cs typeface="+mn-cs"/>
+              </a:defRPr>
+            </a:lvl6pPr>
+            <a:lvl7pPr marL="2971800" indent="-228600" algn="l" defTabSz="914400" rtl="0" eaLnBrk="1" latinLnBrk="0" hangingPunct="1">
+              <a:lnSpc>
+                <a:spcPct val="90000"/>
+              </a:lnSpc>
+              <a:spcBef>
+                <a:spcPts val="500"/>
+              </a:spcBef>
+              <a:buFont typeface="Arial" panose="020B0604020202020204" pitchFamily="34" charset="0"/>
+              <a:buChar char="•"/>
+              <a:defRPr sz="1800" kern="1200">
+                <a:solidFill>
+                  <a:schemeClr val="tx1"/>
+                </a:solidFill>
+                <a:latin typeface="+mn-lt"/>
+                <a:ea typeface="+mn-ea"/>
+                <a:cs typeface="+mn-cs"/>
+              </a:defRPr>
+            </a:lvl7pPr>
+            <a:lvl8pPr marL="3429000" indent="-228600" algn="l" defTabSz="914400" rtl="0" eaLnBrk="1" latinLnBrk="0" hangingPunct="1">
+              <a:lnSpc>
+                <a:spcPct val="90000"/>
+              </a:lnSpc>
+              <a:spcBef>
+                <a:spcPts val="500"/>
+              </a:spcBef>
+              <a:buFont typeface="Arial" panose="020B0604020202020204" pitchFamily="34" charset="0"/>
+              <a:buChar char="•"/>
+              <a:defRPr sz="1800" kern="1200">
+                <a:solidFill>
+                  <a:schemeClr val="tx1"/>
+                </a:solidFill>
+                <a:latin typeface="+mn-lt"/>
+                <a:ea typeface="+mn-ea"/>
+                <a:cs typeface="+mn-cs"/>
+              </a:defRPr>
+            </a:lvl8pPr>
+            <a:lvl9pPr marL="3886200" indent="-228600" algn="l" defTabSz="914400" rtl="0" eaLnBrk="1" latinLnBrk="0" hangingPunct="1">
+              <a:lnSpc>
+                <a:spcPct val="90000"/>
+              </a:lnSpc>
+              <a:spcBef>
+                <a:spcPts val="500"/>
+              </a:spcBef>
+              <a:buFont typeface="Arial" panose="020B0604020202020204" pitchFamily="34" charset="0"/>
+              <a:buChar char="•"/>
+              <a:defRPr sz="1800" kern="1200">
+                <a:solidFill>
+                  <a:schemeClr val="tx1"/>
+                </a:solidFill>
+                <a:latin typeface="+mn-lt"/>
+                <a:ea typeface="+mn-ea"/>
+                <a:cs typeface="+mn-cs"/>
+              </a:defRPr>
+            </a:lvl9pPr>
+          </a:lstStyle>
+          <a:p>
+            <a:r>
+              <a:rPr lang="en-GB" sz="2000" dirty="0"/>
+              <a:t>CTs’ characteristics </a:t>
+            </a:r>
+            <a:r>
+              <a:rPr lang="en-GB" sz="2000" dirty="0">
+                <a:sym typeface="Wingdings" panose="05000000000000000000" pitchFamily="2" charset="2"/>
+              </a:rPr>
+              <a:t> </a:t>
+            </a:r>
+            <a:r>
+              <a:rPr lang="en-GB" sz="2000" dirty="0"/>
+              <a:t>Registries’</a:t>
+            </a:r>
+            <a:r>
+              <a:rPr lang="en-GB" sz="2000" dirty="0">
+                <a:sym typeface="Wingdings" panose="05000000000000000000" pitchFamily="2" charset="2"/>
+              </a:rPr>
+              <a:t> </a:t>
+            </a:r>
+            <a:r>
+              <a:rPr lang="en-GB" sz="2000" dirty="0"/>
+              <a:t>Analysis </a:t>
+            </a:r>
+            <a:r>
+              <a:rPr lang="en-GB" sz="2000" dirty="0">
+                <a:sym typeface="Wingdings" panose="05000000000000000000" pitchFamily="2" charset="2"/>
+              </a:rPr>
+              <a:t></a:t>
+            </a:r>
+            <a:r>
+              <a:rPr lang="en-GB" sz="2000" dirty="0"/>
+              <a:t> Early termination relations </a:t>
+            </a:r>
+          </a:p>
+          <a:p>
+            <a:r>
+              <a:rPr lang="en-GB" sz="2000" dirty="0"/>
+              <a:t>Non-transparent registry </a:t>
+            </a:r>
+            <a:r>
+              <a:rPr lang="en-GB" sz="2000" dirty="0">
+                <a:sym typeface="Wingdings" panose="05000000000000000000" pitchFamily="2" charset="2"/>
+              </a:rPr>
+              <a:t> Unethical </a:t>
+            </a:r>
+          </a:p>
+        </p:txBody>
+      </p:sp>
+    </p:spTree>
+    <p:extLst>
+      <p:ext uri="{BB962C8B-B14F-4D97-AF65-F5344CB8AC3E}">
+        <p14:creationId xmlns:p14="http://schemas.microsoft.com/office/powerpoint/2010/main" val="3253723412"/>
+      </p:ext>
+    </p:extLst>
+  </p:cSld>
+  <p:clrMapOvr>
+    <a:masterClrMapping/>
+  </p:clrMapOvr>
+</p:sld>
+</file>
+
 <file path=ppt/slides/slide8.xml><?xml version="1.0" encoding="utf-8"?>
 <p:sld xmlns:a="http://schemas.openxmlformats.org/drawingml/2006/main" xmlns:r="http://schemas.openxmlformats.org/officeDocument/2006/relationships" xmlns:p="http://schemas.openxmlformats.org/presentationml/2006/main">
   <p:cSld>
@@ -23744,12 +23555,6 @@
           <a:p>
             <a:r>
               <a:rPr lang="en-GB" sz="2500" dirty="0"/>
-              <a:t>Funder type (e.g., Industry)</a:t>
-            </a:r>
-          </a:p>
-          <a:p>
-            <a:r>
-              <a:rPr lang="en-GB" sz="2500" dirty="0"/>
               <a:t>Number of facilities </a:t>
             </a:r>
             <a:r>
@@ -23770,6 +23575,12 @@
             <a:r>
               <a:rPr lang="en-GB" sz="2500" dirty="0"/>
               <a:t>Number of Adverse Events</a:t>
+            </a:r>
+          </a:p>
+          <a:p>
+            <a:r>
+              <a:rPr lang="en-GB" sz="2500" dirty="0"/>
+              <a:t>Funder type (e.g., Industry)</a:t>
             </a:r>
           </a:p>
           <a:p>
@@ -23870,15 +23681,22 @@
             <a:off x="609600" y="685800"/>
             <a:ext cx="10972800" cy="5486400"/>
           </a:xfrm>
-          <a:prstGeom prst="rect">
+          <a:prstGeom prst="plaque">
             <a:avLst/>
           </a:prstGeom>
           <a:noFill/>
-          <a:ln>
+          <a:ln w="19050">
             <a:solidFill>
               <a:schemeClr val="tx1"/>
             </a:solidFill>
           </a:ln>
+          <a:effectLst>
+            <a:outerShdw blurRad="63500" sx="102000" sy="102000" algn="ctr" rotWithShape="0">
+              <a:prstClr val="black">
+                <a:alpha val="40000"/>
+              </a:prstClr>
+            </a:outerShdw>
+          </a:effectLst>
         </p:spPr>
         <p:txBody>
           <a:bodyPr vert="horz" lIns="91440" tIns="45720" rIns="91440" bIns="45720" rtlCol="0" anchor="ctr">

--- a/Thesis_Presentation.pptx
+++ b/Thesis_Presentation.pptx
@@ -188,7 +188,7 @@
   <pc:docChgLst>
     <pc:chgData name="Evgenia Andreou" userId="8e89e74f621e7047" providerId="LiveId" clId="{EF53017E-E624-4052-9F70-6403551E244D}"/>
     <pc:docChg chg="undo redo custSel addSld delSld modSld sldOrd modMainMaster addSection delSection modSection">
-      <pc:chgData name="Evgenia Andreou" userId="8e89e74f621e7047" providerId="LiveId" clId="{EF53017E-E624-4052-9F70-6403551E244D}" dt="2025-11-26T00:24:03.375" v="39215" actId="20577"/>
+      <pc:chgData name="Evgenia Andreou" userId="8e89e74f621e7047" providerId="LiveId" clId="{EF53017E-E624-4052-9F70-6403551E244D}" dt="2025-11-27T02:28:14.701" v="39337" actId="1440"/>
       <pc:docMkLst>
         <pc:docMk/>
       </pc:docMkLst>
@@ -245,14 +245,6 @@
             <ac:spMk id="2" creationId="{68F7CEDF-EFB3-C401-7155-FB36C7BDA927}"/>
           </ac:spMkLst>
         </pc:spChg>
-        <pc:picChg chg="add mod">
-          <ac:chgData name="Evgenia Andreou" userId="8e89e74f621e7047" providerId="LiveId" clId="{EF53017E-E624-4052-9F70-6403551E244D}" dt="2025-10-27T22:32:06.554" v="29331" actId="1076"/>
-          <ac:picMkLst>
-            <pc:docMk/>
-            <pc:sldMk cId="1223022622" sldId="258"/>
-            <ac:picMk id="5" creationId="{2939F83A-723A-089B-DABC-C6A8AD936F95}"/>
-          </ac:picMkLst>
-        </pc:picChg>
       </pc:sldChg>
       <pc:sldChg chg="addSp delSp modSp new mod ord setBg modClrScheme chgLayout">
         <pc:chgData name="Evgenia Andreou" userId="8e89e74f621e7047" providerId="LiveId" clId="{EF53017E-E624-4052-9F70-6403551E244D}" dt="2025-11-23T03:26:22.002" v="38386" actId="20577"/>
@@ -316,99 +308,11 @@
           <pc:sldMk cId="1363710211" sldId="262"/>
         </pc:sldMkLst>
         <pc:spChg chg="add mod">
-          <ac:chgData name="Evgenia Andreou" userId="8e89e74f621e7047" providerId="LiveId" clId="{EF53017E-E624-4052-9F70-6403551E244D}" dt="2025-10-27T23:06:02.343" v="30783" actId="1038"/>
-          <ac:spMkLst>
-            <pc:docMk/>
-            <pc:sldMk cId="1363710211" sldId="262"/>
-            <ac:spMk id="18" creationId="{DA1202A3-1C81-7F2E-C455-6765BD42D175}"/>
-          </ac:spMkLst>
-        </pc:spChg>
-        <pc:spChg chg="add del mod">
-          <ac:chgData name="Evgenia Andreou" userId="8e89e74f621e7047" providerId="LiveId" clId="{EF53017E-E624-4052-9F70-6403551E244D}" dt="2025-10-27T23:06:02.343" v="30783" actId="1038"/>
-          <ac:spMkLst>
-            <pc:docMk/>
-            <pc:sldMk cId="1363710211" sldId="262"/>
-            <ac:spMk id="19" creationId="{B6136405-1727-36E6-CA35-BB9A033D83BF}"/>
-          </ac:spMkLst>
-        </pc:spChg>
-        <pc:spChg chg="add del mod">
-          <ac:chgData name="Evgenia Andreou" userId="8e89e74f621e7047" providerId="LiveId" clId="{EF53017E-E624-4052-9F70-6403551E244D}" dt="2025-10-27T23:06:02.343" v="30783" actId="1038"/>
-          <ac:spMkLst>
-            <pc:docMk/>
-            <pc:sldMk cId="1363710211" sldId="262"/>
-            <ac:spMk id="20" creationId="{D3BA573A-42F1-DA45-C0FD-BC1655434B77}"/>
-          </ac:spMkLst>
-        </pc:spChg>
-        <pc:spChg chg="add mod">
-          <ac:chgData name="Evgenia Andreou" userId="8e89e74f621e7047" providerId="LiveId" clId="{EF53017E-E624-4052-9F70-6403551E244D}" dt="2025-10-27T23:05:37.279" v="30764" actId="207"/>
-          <ac:spMkLst>
-            <pc:docMk/>
-            <pc:sldMk cId="1363710211" sldId="262"/>
-            <ac:spMk id="21" creationId="{423AFC2A-4C62-4A4D-AEB3-32D858308FD1}"/>
-          </ac:spMkLst>
-        </pc:spChg>
-        <pc:spChg chg="add mod">
-          <ac:chgData name="Evgenia Andreou" userId="8e89e74f621e7047" providerId="LiveId" clId="{EF53017E-E624-4052-9F70-6403551E244D}" dt="2025-10-27T23:05:37.279" v="30764" actId="207"/>
-          <ac:spMkLst>
-            <pc:docMk/>
-            <pc:sldMk cId="1363710211" sldId="262"/>
-            <ac:spMk id="22" creationId="{EE293953-6562-5BA0-E21F-F083B2846EC4}"/>
-          </ac:spMkLst>
-        </pc:spChg>
-        <pc:spChg chg="add mod">
-          <ac:chgData name="Evgenia Andreou" userId="8e89e74f621e7047" providerId="LiveId" clId="{EF53017E-E624-4052-9F70-6403551E244D}" dt="2025-10-27T23:06:02.343" v="30783" actId="1038"/>
-          <ac:spMkLst>
-            <pc:docMk/>
-            <pc:sldMk cId="1363710211" sldId="262"/>
-            <ac:spMk id="23" creationId="{03C46B7F-8DBD-208B-12A2-4C85460F75A9}"/>
-          </ac:spMkLst>
-        </pc:spChg>
-        <pc:spChg chg="add mod">
-          <ac:chgData name="Evgenia Andreou" userId="8e89e74f621e7047" providerId="LiveId" clId="{EF53017E-E624-4052-9F70-6403551E244D}" dt="2025-10-27T23:06:02.343" v="30783" actId="1038"/>
-          <ac:spMkLst>
-            <pc:docMk/>
-            <pc:sldMk cId="1363710211" sldId="262"/>
-            <ac:spMk id="24" creationId="{E1FABA48-E7BA-FC06-2FF3-7550185F508C}"/>
-          </ac:spMkLst>
-        </pc:spChg>
-        <pc:spChg chg="add mod">
-          <ac:chgData name="Evgenia Andreou" userId="8e89e74f621e7047" providerId="LiveId" clId="{EF53017E-E624-4052-9F70-6403551E244D}" dt="2025-10-27T23:05:37.279" v="30764" actId="207"/>
-          <ac:spMkLst>
-            <pc:docMk/>
-            <pc:sldMk cId="1363710211" sldId="262"/>
-            <ac:spMk id="25" creationId="{3C9E1510-0A85-CC61-2F3A-2965E5E741DD}"/>
-          </ac:spMkLst>
-        </pc:spChg>
-        <pc:spChg chg="add del mod">
-          <ac:chgData name="Evgenia Andreou" userId="8e89e74f621e7047" providerId="LiveId" clId="{EF53017E-E624-4052-9F70-6403551E244D}" dt="2025-10-27T23:05:47.080" v="30766" actId="207"/>
-          <ac:spMkLst>
-            <pc:docMk/>
-            <pc:sldMk cId="1363710211" sldId="262"/>
-            <ac:spMk id="29" creationId="{23EC8373-4835-1D54-AC63-3CAC68B40C09}"/>
-          </ac:spMkLst>
-        </pc:spChg>
-        <pc:spChg chg="add mod">
-          <ac:chgData name="Evgenia Andreou" userId="8e89e74f621e7047" providerId="LiveId" clId="{EF53017E-E624-4052-9F70-6403551E244D}" dt="2025-10-27T23:05:47.080" v="30766" actId="207"/>
-          <ac:spMkLst>
-            <pc:docMk/>
-            <pc:sldMk cId="1363710211" sldId="262"/>
-            <ac:spMk id="30" creationId="{B089C5E8-5913-03D2-C089-2339D56123FD}"/>
-          </ac:spMkLst>
-        </pc:spChg>
-        <pc:spChg chg="add mod">
           <ac:chgData name="Evgenia Andreou" userId="8e89e74f621e7047" providerId="LiveId" clId="{EF53017E-E624-4052-9F70-6403551E244D}" dt="2025-11-23T01:18:41.088" v="37571" actId="20577"/>
           <ac:spMkLst>
             <pc:docMk/>
             <pc:sldMk cId="1363710211" sldId="262"/>
             <ac:spMk id="31" creationId="{E4151066-3F48-9700-D69C-E46E31D40C83}"/>
-          </ac:spMkLst>
-        </pc:spChg>
-        <pc:spChg chg="add mod">
-          <ac:chgData name="Evgenia Andreou" userId="8e89e74f621e7047" providerId="LiveId" clId="{EF53017E-E624-4052-9F70-6403551E244D}" dt="2025-10-27T23:06:02.343" v="30783" actId="1038"/>
-          <ac:spMkLst>
-            <pc:docMk/>
-            <pc:sldMk cId="1363710211" sldId="262"/>
-            <ac:spMk id="62" creationId="{276814B7-E327-3B1E-F177-5D0C4F86C148}"/>
           </ac:spMkLst>
         </pc:spChg>
         <pc:spChg chg="mod">
@@ -436,14 +340,6 @@
           </ac:spMkLst>
         </pc:spChg>
         <pc:spChg chg="add mod">
-          <ac:chgData name="Evgenia Andreou" userId="8e89e74f621e7047" providerId="LiveId" clId="{EF53017E-E624-4052-9F70-6403551E244D}" dt="2025-10-27T23:06:02.343" v="30783" actId="1038"/>
-          <ac:spMkLst>
-            <pc:docMk/>
-            <pc:sldMk cId="1363710211" sldId="262"/>
-            <ac:spMk id="94" creationId="{28E262A4-85BC-A987-DFF2-C03B2E4F7690}"/>
-          </ac:spMkLst>
-        </pc:spChg>
-        <pc:spChg chg="add mod">
           <ac:chgData name="Evgenia Andreou" userId="8e89e74f621e7047" providerId="LiveId" clId="{EF53017E-E624-4052-9F70-6403551E244D}" dt="2025-10-28T01:09:39.576" v="33179" actId="1035"/>
           <ac:spMkLst>
             <pc:docMk/>
@@ -459,62 +355,6 @@
             <ac:spMk id="677" creationId="{1263351C-9AB9-9F3E-1A06-CBF996165FBC}"/>
           </ac:spMkLst>
         </pc:spChg>
-        <pc:cxnChg chg="mod">
-          <ac:chgData name="Evgenia Andreou" userId="8e89e74f621e7047" providerId="LiveId" clId="{EF53017E-E624-4052-9F70-6403551E244D}" dt="2025-10-27T22:09:51.292" v="29209" actId="1076"/>
-          <ac:cxnSpMkLst>
-            <pc:docMk/>
-            <pc:sldMk cId="1363710211" sldId="262"/>
-            <ac:cxnSpMk id="68" creationId="{5E0EECE8-AB14-663A-F02F-8B737CA2E325}"/>
-          </ac:cxnSpMkLst>
-        </pc:cxnChg>
-        <pc:cxnChg chg="mod">
-          <ac:chgData name="Evgenia Andreou" userId="8e89e74f621e7047" providerId="LiveId" clId="{EF53017E-E624-4052-9F70-6403551E244D}" dt="2025-10-27T23:04:21.215" v="30748" actId="692"/>
-          <ac:cxnSpMkLst>
-            <pc:docMk/>
-            <pc:sldMk cId="1363710211" sldId="262"/>
-            <ac:cxnSpMk id="70" creationId="{53232069-8A2F-8848-7025-41FE72768F8C}"/>
-          </ac:cxnSpMkLst>
-        </pc:cxnChg>
-        <pc:cxnChg chg="mod">
-          <ac:chgData name="Evgenia Andreou" userId="8e89e74f621e7047" providerId="LiveId" clId="{EF53017E-E624-4052-9F70-6403551E244D}" dt="2025-10-27T23:04:21.215" v="30748" actId="692"/>
-          <ac:cxnSpMkLst>
-            <pc:docMk/>
-            <pc:sldMk cId="1363710211" sldId="262"/>
-            <ac:cxnSpMk id="73" creationId="{194E404E-5C6E-E5EE-A78B-BA3B2B61EEB2}"/>
-          </ac:cxnSpMkLst>
-        </pc:cxnChg>
-        <pc:cxnChg chg="mod">
-          <ac:chgData name="Evgenia Andreou" userId="8e89e74f621e7047" providerId="LiveId" clId="{EF53017E-E624-4052-9F70-6403551E244D}" dt="2025-10-27T22:07:46.026" v="29172" actId="478"/>
-          <ac:cxnSpMkLst>
-            <pc:docMk/>
-            <pc:sldMk cId="1363710211" sldId="262"/>
-            <ac:cxnSpMk id="74" creationId="{F00E1C02-3F02-6CE1-AA6B-17A0488972D1}"/>
-          </ac:cxnSpMkLst>
-        </pc:cxnChg>
-        <pc:cxnChg chg="mod">
-          <ac:chgData name="Evgenia Andreou" userId="8e89e74f621e7047" providerId="LiveId" clId="{EF53017E-E624-4052-9F70-6403551E244D}" dt="2025-10-27T23:04:21.215" v="30748" actId="692"/>
-          <ac:cxnSpMkLst>
-            <pc:docMk/>
-            <pc:sldMk cId="1363710211" sldId="262"/>
-            <ac:cxnSpMk id="75" creationId="{4CC1E783-18E4-8F6D-ECF6-34DDBB6B81E0}"/>
-          </ac:cxnSpMkLst>
-        </pc:cxnChg>
-        <pc:cxnChg chg="mod">
-          <ac:chgData name="Evgenia Andreou" userId="8e89e74f621e7047" providerId="LiveId" clId="{EF53017E-E624-4052-9F70-6403551E244D}" dt="2025-10-27T22:07:30.909" v="29169" actId="478"/>
-          <ac:cxnSpMkLst>
-            <pc:docMk/>
-            <pc:sldMk cId="1363710211" sldId="262"/>
-            <ac:cxnSpMk id="77" creationId="{4464893D-F15C-B75F-4AAC-E1B5E329FBDD}"/>
-          </ac:cxnSpMkLst>
-        </pc:cxnChg>
-        <pc:cxnChg chg="mod">
-          <ac:chgData name="Evgenia Andreou" userId="8e89e74f621e7047" providerId="LiveId" clId="{EF53017E-E624-4052-9F70-6403551E244D}" dt="2025-10-27T22:09:40.200" v="29208" actId="1076"/>
-          <ac:cxnSpMkLst>
-            <pc:docMk/>
-            <pc:sldMk cId="1363710211" sldId="262"/>
-            <ac:cxnSpMk id="78" creationId="{233F2D15-C7AE-A91A-DC48-28D5E93B476C}"/>
-          </ac:cxnSpMkLst>
-        </pc:cxnChg>
         <pc:cxnChg chg="mod">
           <ac:chgData name="Evgenia Andreou" userId="8e89e74f621e7047" providerId="LiveId" clId="{EF53017E-E624-4052-9F70-6403551E244D}" dt="2025-10-28T01:09:46.992" v="33181" actId="14100"/>
           <ac:cxnSpMkLst>
@@ -539,60 +379,12 @@
             <ac:cxnSpMk id="85" creationId="{78652D68-0DB3-6990-6918-EE78DE3D987D}"/>
           </ac:cxnSpMkLst>
         </pc:cxnChg>
-        <pc:cxnChg chg="mod">
-          <ac:chgData name="Evgenia Andreou" userId="8e89e74f621e7047" providerId="LiveId" clId="{EF53017E-E624-4052-9F70-6403551E244D}" dt="2025-10-27T23:04:21.215" v="30748" actId="692"/>
-          <ac:cxnSpMkLst>
-            <pc:docMk/>
-            <pc:sldMk cId="1363710211" sldId="262"/>
-            <ac:cxnSpMk id="87" creationId="{1132FF9E-F1BD-E667-E01F-0E0BEB517FC0}"/>
-          </ac:cxnSpMkLst>
-        </pc:cxnChg>
-        <pc:cxnChg chg="mod">
-          <ac:chgData name="Evgenia Andreou" userId="8e89e74f621e7047" providerId="LiveId" clId="{EF53017E-E624-4052-9F70-6403551E244D}" dt="2025-10-27T22:10:52.388" v="29233" actId="1076"/>
-          <ac:cxnSpMkLst>
-            <pc:docMk/>
-            <pc:sldMk cId="1363710211" sldId="262"/>
-            <ac:cxnSpMk id="91" creationId="{D878F7C9-712D-5126-FCE4-342FE5DE8A81}"/>
-          </ac:cxnSpMkLst>
-        </pc:cxnChg>
-        <pc:cxnChg chg="add mod">
-          <ac:chgData name="Evgenia Andreou" userId="8e89e74f621e7047" providerId="LiveId" clId="{EF53017E-E624-4052-9F70-6403551E244D}" dt="2025-10-27T23:04:21.215" v="30748" actId="692"/>
-          <ac:cxnSpMkLst>
-            <pc:docMk/>
-            <pc:sldMk cId="1363710211" sldId="262"/>
-            <ac:cxnSpMk id="267" creationId="{C3CC4946-4231-BDC9-1298-AA44DA81682E}"/>
-          </ac:cxnSpMkLst>
-        </pc:cxnChg>
-        <pc:cxnChg chg="add mod">
-          <ac:chgData name="Evgenia Andreou" userId="8e89e74f621e7047" providerId="LiveId" clId="{EF53017E-E624-4052-9F70-6403551E244D}" dt="2025-10-27T23:04:21.215" v="30748" actId="692"/>
-          <ac:cxnSpMkLst>
-            <pc:docMk/>
-            <pc:sldMk cId="1363710211" sldId="262"/>
-            <ac:cxnSpMk id="509" creationId="{175509C9-F69A-1947-F16B-D0374B7D2F77}"/>
-          </ac:cxnSpMkLst>
-        </pc:cxnChg>
         <pc:cxnChg chg="add mod">
           <ac:chgData name="Evgenia Andreou" userId="8e89e74f621e7047" providerId="LiveId" clId="{EF53017E-E624-4052-9F70-6403551E244D}" dt="2025-10-28T01:09:49.689" v="33182" actId="14100"/>
           <ac:cxnSpMkLst>
             <pc:docMk/>
             <pc:sldMk cId="1363710211" sldId="262"/>
             <ac:cxnSpMk id="583" creationId="{B799BC5B-8485-A3BC-50A1-D4C731EE3820}"/>
-          </ac:cxnSpMkLst>
-        </pc:cxnChg>
-        <pc:cxnChg chg="add mod">
-          <ac:chgData name="Evgenia Andreou" userId="8e89e74f621e7047" providerId="LiveId" clId="{EF53017E-E624-4052-9F70-6403551E244D}" dt="2025-10-27T23:04:21.215" v="30748" actId="692"/>
-          <ac:cxnSpMkLst>
-            <pc:docMk/>
-            <pc:sldMk cId="1363710211" sldId="262"/>
-            <ac:cxnSpMk id="591" creationId="{D3B9B5F9-8660-70D3-44AA-D8E39564648C}"/>
-          </ac:cxnSpMkLst>
-        </pc:cxnChg>
-        <pc:cxnChg chg="add mod">
-          <ac:chgData name="Evgenia Andreou" userId="8e89e74f621e7047" providerId="LiveId" clId="{EF53017E-E624-4052-9F70-6403551E244D}" dt="2025-10-27T22:05:33.944" v="29153" actId="478"/>
-          <ac:cxnSpMkLst>
-            <pc:docMk/>
-            <pc:sldMk cId="1363710211" sldId="262"/>
-            <ac:cxnSpMk id="624" creationId="{0E2627AA-30FB-8252-5A08-C663C633D9C7}"/>
           </ac:cxnSpMkLst>
         </pc:cxnChg>
       </pc:sldChg>
@@ -648,14 +440,6 @@
           <pc:docMk/>
           <pc:sldMk cId="1969514135" sldId="266"/>
         </pc:sldMkLst>
-        <pc:spChg chg="add mod">
-          <ac:chgData name="Evgenia Andreou" userId="8e89e74f621e7047" providerId="LiveId" clId="{EF53017E-E624-4052-9F70-6403551E244D}" dt="2025-10-27T23:06:59.978" v="30798" actId="692"/>
-          <ac:spMkLst>
-            <pc:docMk/>
-            <pc:sldMk cId="1969514135" sldId="266"/>
-            <ac:spMk id="42" creationId="{2DFEE1D9-3445-82AA-690D-F8B09B9501C3}"/>
-          </ac:spMkLst>
-        </pc:spChg>
         <pc:graphicFrameChg chg="add mod modGraphic">
           <ac:chgData name="Evgenia Andreou" userId="8e89e74f621e7047" providerId="LiveId" clId="{EF53017E-E624-4052-9F70-6403551E244D}" dt="2025-11-26T00:20:18.945" v="39155"/>
           <ac:graphicFrameMkLst>
@@ -718,22 +502,6 @@
             <ac:spMk id="2" creationId="{CD8A3B03-5129-00F7-346A-0DAC09CCDBDF}"/>
           </ac:spMkLst>
         </pc:spChg>
-        <pc:spChg chg="add del">
-          <ac:chgData name="Evgenia Andreou" userId="8e89e74f621e7047" providerId="LiveId" clId="{EF53017E-E624-4052-9F70-6403551E244D}" dt="2025-11-25T00:41:13.573" v="38640" actId="22"/>
-          <ac:spMkLst>
-            <pc:docMk/>
-            <pc:sldMk cId="3208481001" sldId="268"/>
-            <ac:spMk id="8" creationId="{43C82FE0-9EB0-9A0D-5BE3-EB38941D80B9}"/>
-          </ac:spMkLst>
-        </pc:spChg>
-        <pc:spChg chg="add del">
-          <ac:chgData name="Evgenia Andreou" userId="8e89e74f621e7047" providerId="LiveId" clId="{EF53017E-E624-4052-9F70-6403551E244D}" dt="2025-11-25T00:42:10.344" v="38658" actId="22"/>
-          <ac:spMkLst>
-            <pc:docMk/>
-            <pc:sldMk cId="3208481001" sldId="268"/>
-            <ac:spMk id="16" creationId="{B3D00F0C-DEBC-393D-6BA0-6998B9910E0B}"/>
-          </ac:spMkLst>
-        </pc:spChg>
         <pc:grpChg chg="add mod">
           <ac:chgData name="Evgenia Andreou" userId="8e89e74f621e7047" providerId="LiveId" clId="{EF53017E-E624-4052-9F70-6403551E244D}" dt="2025-11-25T00:48:27.761" v="38708" actId="1037"/>
           <ac:grpSpMkLst>
@@ -742,22 +510,6 @@
             <ac:grpSpMk id="24" creationId="{3FB3EC97-CFD4-18C0-5C67-9419FD568CEB}"/>
           </ac:grpSpMkLst>
         </pc:grpChg>
-        <pc:picChg chg="add del mod">
-          <ac:chgData name="Evgenia Andreou" userId="8e89e74f621e7047" providerId="LiveId" clId="{EF53017E-E624-4052-9F70-6403551E244D}" dt="2025-11-25T00:21:24.191" v="38638" actId="478"/>
-          <ac:picMkLst>
-            <pc:docMk/>
-            <pc:sldMk cId="3208481001" sldId="268"/>
-            <ac:picMk id="4" creationId="{E6C5E8A8-F6D9-70D4-ED32-6553BCDC609B}"/>
-          </ac:picMkLst>
-        </pc:picChg>
-        <pc:picChg chg="add del mod">
-          <ac:chgData name="Evgenia Andreou" userId="8e89e74f621e7047" providerId="LiveId" clId="{EF53017E-E624-4052-9F70-6403551E244D}" dt="2025-11-25T00:21:24.191" v="38638" actId="478"/>
-          <ac:picMkLst>
-            <pc:docMk/>
-            <pc:sldMk cId="3208481001" sldId="268"/>
-            <ac:picMk id="7" creationId="{2A8868A5-0916-4A63-A203-3DECEF7DE0FA}"/>
-          </ac:picMkLst>
-        </pc:picChg>
         <pc:picChg chg="add mod">
           <ac:chgData name="Evgenia Andreou" userId="8e89e74f621e7047" providerId="LiveId" clId="{EF53017E-E624-4052-9F70-6403551E244D}" dt="2025-11-25T20:38:10.684" v="38955" actId="1440"/>
           <ac:picMkLst>
@@ -766,28 +518,12 @@
             <ac:picMk id="10" creationId="{7C472132-5D48-1F80-B2C9-8536CD86963F}"/>
           </ac:picMkLst>
         </pc:picChg>
-        <pc:picChg chg="add del mod">
-          <ac:chgData name="Evgenia Andreou" userId="8e89e74f621e7047" providerId="LiveId" clId="{EF53017E-E624-4052-9F70-6403551E244D}" dt="2025-11-25T00:21:24.191" v="38638" actId="478"/>
-          <ac:picMkLst>
-            <pc:docMk/>
-            <pc:sldMk cId="3208481001" sldId="268"/>
-            <ac:picMk id="11" creationId="{9080F7F0-26F7-EE6B-2FBC-3BB474101D5B}"/>
-          </ac:picMkLst>
-        </pc:picChg>
         <pc:picChg chg="add mod">
           <ac:chgData name="Evgenia Andreou" userId="8e89e74f621e7047" providerId="LiveId" clId="{EF53017E-E624-4052-9F70-6403551E244D}" dt="2025-11-25T20:38:10.684" v="38955" actId="1440"/>
           <ac:picMkLst>
             <pc:docMk/>
             <pc:sldMk cId="3208481001" sldId="268"/>
             <ac:picMk id="13" creationId="{0950AC3A-891F-671F-7599-F2B502FB4DB5}"/>
-          </ac:picMkLst>
-        </pc:picChg>
-        <pc:picChg chg="add del mod">
-          <ac:chgData name="Evgenia Andreou" userId="8e89e74f621e7047" providerId="LiveId" clId="{EF53017E-E624-4052-9F70-6403551E244D}" dt="2025-11-25T00:21:24.191" v="38638" actId="478"/>
-          <ac:picMkLst>
-            <pc:docMk/>
-            <pc:sldMk cId="3208481001" sldId="268"/>
-            <ac:picMk id="14" creationId="{CF3E8ADE-C242-32DE-72D8-C2C4D70E0D50}"/>
           </ac:picMkLst>
         </pc:picChg>
         <pc:picChg chg="add mod">
@@ -806,77 +542,6 @@
             <ac:picMk id="20" creationId="{8213FD52-7304-D574-CCCB-2C514C8C0A43}"/>
           </ac:picMkLst>
         </pc:picChg>
-        <pc:picChg chg="add mod">
-          <ac:chgData name="Evgenia Andreou" userId="8e89e74f621e7047" providerId="LiveId" clId="{EF53017E-E624-4052-9F70-6403551E244D}" dt="2025-11-25T00:43:24.843" v="38677" actId="571"/>
-          <ac:picMkLst>
-            <pc:docMk/>
-            <pc:sldMk cId="3208481001" sldId="268"/>
-            <ac:picMk id="21" creationId="{9C84B88A-2447-D63D-E259-6CA92D758650}"/>
-          </ac:picMkLst>
-        </pc:picChg>
-        <pc:picChg chg="add mod">
-          <ac:chgData name="Evgenia Andreou" userId="8e89e74f621e7047" providerId="LiveId" clId="{EF53017E-E624-4052-9F70-6403551E244D}" dt="2025-11-25T00:43:24.843" v="38677" actId="571"/>
-          <ac:picMkLst>
-            <pc:docMk/>
-            <pc:sldMk cId="3208481001" sldId="268"/>
-            <ac:picMk id="22" creationId="{7410C110-4880-805F-5500-FC5149640366}"/>
-          </ac:picMkLst>
-        </pc:picChg>
-        <pc:picChg chg="add mod">
-          <ac:chgData name="Evgenia Andreou" userId="8e89e74f621e7047" providerId="LiveId" clId="{EF53017E-E624-4052-9F70-6403551E244D}" dt="2025-11-25T00:43:24.843" v="38677" actId="571"/>
-          <ac:picMkLst>
-            <pc:docMk/>
-            <pc:sldMk cId="3208481001" sldId="268"/>
-            <ac:picMk id="23" creationId="{F23487C7-03D9-E61C-2160-9A256EA8DD88}"/>
-          </ac:picMkLst>
-        </pc:picChg>
-        <pc:cxnChg chg="add del mod">
-          <ac:chgData name="Evgenia Andreou" userId="8e89e74f621e7047" providerId="LiveId" clId="{EF53017E-E624-4052-9F70-6403551E244D}" dt="2025-11-25T00:41:56.369" v="38654" actId="478"/>
-          <ac:cxnSpMkLst>
-            <pc:docMk/>
-            <pc:sldMk cId="3208481001" sldId="268"/>
-            <ac:cxnSpMk id="3" creationId="{AC797C26-FE68-C2CF-BC27-75C2246DBC0E}"/>
-          </ac:cxnSpMkLst>
-        </pc:cxnChg>
-        <pc:cxnChg chg="add del mod">
-          <ac:chgData name="Evgenia Andreou" userId="8e89e74f621e7047" providerId="LiveId" clId="{EF53017E-E624-4052-9F70-6403551E244D}" dt="2025-11-25T00:41:56.369" v="38654" actId="478"/>
-          <ac:cxnSpMkLst>
-            <pc:docMk/>
-            <pc:sldMk cId="3208481001" sldId="268"/>
-            <ac:cxnSpMk id="5" creationId="{7549D9FE-8EFC-1F6E-CC8F-E019E89A75C2}"/>
-          </ac:cxnSpMkLst>
-        </pc:cxnChg>
-      </pc:sldChg>
-      <pc:sldChg chg="addSp delSp modSp new add del mod setBg modShow">
-        <pc:chgData name="Evgenia Andreou" userId="8e89e74f621e7047" providerId="LiveId" clId="{EF53017E-E624-4052-9F70-6403551E244D}" dt="2025-10-27T23:53:29.449" v="31729" actId="20577"/>
-        <pc:sldMkLst>
-          <pc:docMk/>
-          <pc:sldMk cId="2732646992" sldId="269"/>
-        </pc:sldMkLst>
-        <pc:spChg chg="mod">
-          <ac:chgData name="Evgenia Andreou" userId="8e89e74f621e7047" providerId="LiveId" clId="{EF53017E-E624-4052-9F70-6403551E244D}" dt="2025-10-27T23:53:29.449" v="31729" actId="20577"/>
-          <ac:spMkLst>
-            <pc:docMk/>
-            <pc:sldMk cId="2732646992" sldId="269"/>
-            <ac:spMk id="4" creationId="{AAF344B0-E792-5660-B4CD-3CA83C53A45C}"/>
-          </ac:spMkLst>
-        </pc:spChg>
-        <pc:spChg chg="add mod">
-          <ac:chgData name="Evgenia Andreou" userId="8e89e74f621e7047" providerId="LiveId" clId="{EF53017E-E624-4052-9F70-6403551E244D}" dt="2025-10-27T23:40:36.036" v="31382" actId="1076"/>
-          <ac:spMkLst>
-            <pc:docMk/>
-            <pc:sldMk cId="2732646992" sldId="269"/>
-            <ac:spMk id="6" creationId="{D452C38D-9B6D-A352-EA5B-4C5BF5BB4E9C}"/>
-          </ac:spMkLst>
-        </pc:spChg>
-        <pc:spChg chg="add mod">
-          <ac:chgData name="Evgenia Andreou" userId="8e89e74f621e7047" providerId="LiveId" clId="{EF53017E-E624-4052-9F70-6403551E244D}" dt="2025-10-27T23:40:31.740" v="31381" actId="1076"/>
-          <ac:spMkLst>
-            <pc:docMk/>
-            <pc:sldMk cId="2732646992" sldId="269"/>
-            <ac:spMk id="8" creationId="{18713944-C6CC-5B4C-56CF-DD77419EEBEF}"/>
-          </ac:spMkLst>
-        </pc:spChg>
       </pc:sldChg>
       <pc:sldChg chg="addSp delSp modSp new mod ord setBg">
         <pc:chgData name="Evgenia Andreou" userId="8e89e74f621e7047" providerId="LiveId" clId="{EF53017E-E624-4052-9F70-6403551E244D}" dt="2025-10-31T15:17:18.034" v="34870" actId="1582"/>
@@ -930,14 +595,6 @@
           <pc:sldMk cId="201207592" sldId="274"/>
         </pc:sldMkLst>
         <pc:spChg chg="mod">
-          <ac:chgData name="Evgenia Andreou" userId="8e89e74f621e7047" providerId="LiveId" clId="{EF53017E-E624-4052-9F70-6403551E244D}" dt="2025-10-27T23:48:27.695" v="31570" actId="692"/>
-          <ac:spMkLst>
-            <pc:docMk/>
-            <pc:sldMk cId="201207592" sldId="274"/>
-            <ac:spMk id="2" creationId="{F110A5BB-543A-E6BC-B214-DAC764A85F60}"/>
-          </ac:spMkLst>
-        </pc:spChg>
-        <pc:spChg chg="mod">
           <ac:chgData name="Evgenia Andreou" userId="8e89e74f621e7047" providerId="LiveId" clId="{EF53017E-E624-4052-9F70-6403551E244D}" dt="2025-11-21T01:45:09.648" v="35622" actId="14100"/>
           <ac:spMkLst>
             <pc:docMk/>
@@ -985,27 +642,11 @@
           <pc:sldMk cId="311389722" sldId="275"/>
         </pc:sldMkLst>
         <pc:spChg chg="mod">
-          <ac:chgData name="Evgenia Andreou" userId="8e89e74f621e7047" providerId="LiveId" clId="{EF53017E-E624-4052-9F70-6403551E244D}" dt="2025-10-27T23:48:06.554" v="31559" actId="1076"/>
-          <ac:spMkLst>
-            <pc:docMk/>
-            <pc:sldMk cId="311389722" sldId="275"/>
-            <ac:spMk id="2" creationId="{6E8EBE9B-3914-EB9A-7C62-D2B996F953D9}"/>
-          </ac:spMkLst>
-        </pc:spChg>
-        <pc:spChg chg="mod">
           <ac:chgData name="Evgenia Andreou" userId="8e89e74f621e7047" providerId="LiveId" clId="{EF53017E-E624-4052-9F70-6403551E244D}" dt="2025-10-28T08:01:11.467" v="33717" actId="20577"/>
           <ac:spMkLst>
             <pc:docMk/>
             <pc:sldMk cId="311389722" sldId="275"/>
             <ac:spMk id="3" creationId="{C743E199-295C-C3F2-FEEF-357550E7830B}"/>
-          </ac:spMkLst>
-        </pc:spChg>
-        <pc:spChg chg="add mod">
-          <ac:chgData name="Evgenia Andreou" userId="8e89e74f621e7047" providerId="LiveId" clId="{EF53017E-E624-4052-9F70-6403551E244D}" dt="2025-10-27T23:48:04.351" v="31558" actId="1076"/>
-          <ac:spMkLst>
-            <pc:docMk/>
-            <pc:sldMk cId="311389722" sldId="275"/>
-            <ac:spMk id="32" creationId="{8EB9DB21-5C07-5D50-4678-27F3C1770CEB}"/>
           </ac:spMkLst>
         </pc:spChg>
       </pc:sldChg>
@@ -1023,14 +664,6 @@
             <ac:spMk id="2" creationId="{2266DF65-6188-8376-76BA-FBFCD6D58A83}"/>
           </ac:spMkLst>
         </pc:spChg>
-        <pc:grpChg chg="add del mod">
-          <ac:chgData name="Evgenia Andreou" userId="8e89e74f621e7047" providerId="LiveId" clId="{EF53017E-E624-4052-9F70-6403551E244D}" dt="2025-11-25T20:26:12.755" v="38915" actId="478"/>
-          <ac:grpSpMkLst>
-            <pc:docMk/>
-            <pc:sldMk cId="1839987358" sldId="276"/>
-            <ac:grpSpMk id="27" creationId="{225B5DCB-92BB-129A-2854-9E9C04DA0411}"/>
-          </ac:grpSpMkLst>
-        </pc:grpChg>
         <pc:grpChg chg="add mod">
           <ac:chgData name="Evgenia Andreou" userId="8e89e74f621e7047" providerId="LiveId" clId="{EF53017E-E624-4052-9F70-6403551E244D}" dt="2025-11-25T20:55:08.907" v="38987" actId="1037"/>
           <ac:grpSpMkLst>
@@ -1039,38 +672,6 @@
             <ac:grpSpMk id="36" creationId="{34B46513-4A49-58D4-8935-B7F54A3BEBBB}"/>
           </ac:grpSpMkLst>
         </pc:grpChg>
-        <pc:picChg chg="add del mod">
-          <ac:chgData name="Evgenia Andreou" userId="8e89e74f621e7047" providerId="LiveId" clId="{EF53017E-E624-4052-9F70-6403551E244D}" dt="2025-11-25T20:26:15.538" v="38916" actId="478"/>
-          <ac:picMkLst>
-            <pc:docMk/>
-            <pc:sldMk cId="1839987358" sldId="276"/>
-            <ac:picMk id="7" creationId="{89BA781D-B1BD-D94F-0064-FAD9D76E19B2}"/>
-          </ac:picMkLst>
-        </pc:picChg>
-        <pc:picChg chg="add del mod">
-          <ac:chgData name="Evgenia Andreou" userId="8e89e74f621e7047" providerId="LiveId" clId="{EF53017E-E624-4052-9F70-6403551E244D}" dt="2025-11-25T20:26:15.538" v="38916" actId="478"/>
-          <ac:picMkLst>
-            <pc:docMk/>
-            <pc:sldMk cId="1839987358" sldId="276"/>
-            <ac:picMk id="9" creationId="{7377AA38-690D-07C3-901A-08631F495A59}"/>
-          </ac:picMkLst>
-        </pc:picChg>
-        <pc:picChg chg="add del mod">
-          <ac:chgData name="Evgenia Andreou" userId="8e89e74f621e7047" providerId="LiveId" clId="{EF53017E-E624-4052-9F70-6403551E244D}" dt="2025-11-25T20:26:15.538" v="38916" actId="478"/>
-          <ac:picMkLst>
-            <pc:docMk/>
-            <pc:sldMk cId="1839987358" sldId="276"/>
-            <ac:picMk id="14" creationId="{78ABC814-2320-5E74-BCC9-559C6494E921}"/>
-          </ac:picMkLst>
-        </pc:picChg>
-        <pc:picChg chg="add del mod">
-          <ac:chgData name="Evgenia Andreou" userId="8e89e74f621e7047" providerId="LiveId" clId="{EF53017E-E624-4052-9F70-6403551E244D}" dt="2025-11-25T20:26:15.538" v="38916" actId="478"/>
-          <ac:picMkLst>
-            <pc:docMk/>
-            <pc:sldMk cId="1839987358" sldId="276"/>
-            <ac:picMk id="17" creationId="{B1037D21-F741-44DC-748B-12CE32175C2F}"/>
-          </ac:picMkLst>
-        </pc:picChg>
         <pc:picChg chg="add mod">
           <ac:chgData name="Evgenia Andreou" userId="8e89e74f621e7047" providerId="LiveId" clId="{EF53017E-E624-4052-9F70-6403551E244D}" dt="2025-11-25T20:38:33.354" v="38959" actId="164"/>
           <ac:picMkLst>
@@ -1105,7 +706,7 @@
         </pc:picChg>
       </pc:sldChg>
       <pc:sldChg chg="addSp delSp modSp new mod">
-        <pc:chgData name="Evgenia Andreou" userId="8e89e74f621e7047" providerId="LiveId" clId="{EF53017E-E624-4052-9F70-6403551E244D}" dt="2025-11-23T03:44:58.972" v="38461" actId="20577"/>
+        <pc:chgData name="Evgenia Andreou" userId="8e89e74f621e7047" providerId="LiveId" clId="{EF53017E-E624-4052-9F70-6403551E244D}" dt="2025-11-27T02:01:43.843" v="39328" actId="20577"/>
         <pc:sldMkLst>
           <pc:docMk/>
           <pc:sldMk cId="2946716891" sldId="277"/>
@@ -1119,7 +720,7 @@
           </ac:spMkLst>
         </pc:spChg>
         <pc:spChg chg="mod">
-          <ac:chgData name="Evgenia Andreou" userId="8e89e74f621e7047" providerId="LiveId" clId="{EF53017E-E624-4052-9F70-6403551E244D}" dt="2025-11-23T03:08:15.442" v="38202" actId="14100"/>
+          <ac:chgData name="Evgenia Andreou" userId="8e89e74f621e7047" providerId="LiveId" clId="{EF53017E-E624-4052-9F70-6403551E244D}" dt="2025-11-27T02:01:03.045" v="39320" actId="179"/>
           <ac:spMkLst>
             <pc:docMk/>
             <pc:sldMk cId="2946716891" sldId="277"/>
@@ -1127,7 +728,7 @@
           </ac:spMkLst>
         </pc:spChg>
         <pc:spChg chg="mod">
-          <ac:chgData name="Evgenia Andreou" userId="8e89e74f621e7047" providerId="LiveId" clId="{EF53017E-E624-4052-9F70-6403551E244D}" dt="2025-11-23T03:44:58.972" v="38461" actId="20577"/>
+          <ac:chgData name="Evgenia Andreou" userId="8e89e74f621e7047" providerId="LiveId" clId="{EF53017E-E624-4052-9F70-6403551E244D}" dt="2025-11-27T02:01:43.843" v="39328" actId="20577"/>
           <ac:spMkLst>
             <pc:docMk/>
             <pc:sldMk cId="2946716891" sldId="277"/>
@@ -1196,38 +797,6 @@
             <ac:spMk id="2" creationId="{0C918C95-FA1E-7B34-5FD5-342E1E438703}"/>
           </ac:spMkLst>
         </pc:spChg>
-        <pc:picChg chg="add del mod">
-          <ac:chgData name="Evgenia Andreou" userId="8e89e74f621e7047" providerId="LiveId" clId="{EF53017E-E624-4052-9F70-6403551E244D}" dt="2025-11-25T00:48:38.960" v="38712" actId="478"/>
-          <ac:picMkLst>
-            <pc:docMk/>
-            <pc:sldMk cId="1267936960" sldId="279"/>
-            <ac:picMk id="9" creationId="{39BE2D03-26E2-5F7D-6415-5330E80E5C14}"/>
-          </ac:picMkLst>
-        </pc:picChg>
-        <pc:picChg chg="add del mod">
-          <ac:chgData name="Evgenia Andreou" userId="8e89e74f621e7047" providerId="LiveId" clId="{EF53017E-E624-4052-9F70-6403551E244D}" dt="2025-11-25T00:48:38.960" v="38712" actId="478"/>
-          <ac:picMkLst>
-            <pc:docMk/>
-            <pc:sldMk cId="1267936960" sldId="279"/>
-            <ac:picMk id="10" creationId="{A629A2BA-D47E-6AC7-1951-D651D485C53E}"/>
-          </ac:picMkLst>
-        </pc:picChg>
-        <pc:picChg chg="add del mod">
-          <ac:chgData name="Evgenia Andreou" userId="8e89e74f621e7047" providerId="LiveId" clId="{EF53017E-E624-4052-9F70-6403551E244D}" dt="2025-11-25T00:48:38.960" v="38712" actId="478"/>
-          <ac:picMkLst>
-            <pc:docMk/>
-            <pc:sldMk cId="1267936960" sldId="279"/>
-            <ac:picMk id="11" creationId="{D94F244B-6777-6C31-3469-D600C5D107A0}"/>
-          </ac:picMkLst>
-        </pc:picChg>
-        <pc:picChg chg="add del mod">
-          <ac:chgData name="Evgenia Andreou" userId="8e89e74f621e7047" providerId="LiveId" clId="{EF53017E-E624-4052-9F70-6403551E244D}" dt="2025-11-25T00:48:38.960" v="38712" actId="478"/>
-          <ac:picMkLst>
-            <pc:docMk/>
-            <pc:sldMk cId="1267936960" sldId="279"/>
-            <ac:picMk id="12" creationId="{8AEBC6B9-E7E6-E22F-800F-ED047D3A1F22}"/>
-          </ac:picMkLst>
-        </pc:picChg>
         <pc:picChg chg="add mod">
           <ac:chgData name="Evgenia Andreou" userId="8e89e74f621e7047" providerId="LiveId" clId="{EF53017E-E624-4052-9F70-6403551E244D}" dt="2025-11-25T20:55:16.235" v="38988" actId="1440"/>
           <ac:picMkLst>
@@ -1260,46 +829,6 @@
             <ac:picMk id="20" creationId="{A61F3796-1B61-CFA2-3252-D326B10039BA}"/>
           </ac:picMkLst>
         </pc:picChg>
-        <pc:picChg chg="add del mod">
-          <ac:chgData name="Evgenia Andreou" userId="8e89e74f621e7047" providerId="LiveId" clId="{EF53017E-E624-4052-9F70-6403551E244D}" dt="2025-11-25T00:48:41.894" v="38713" actId="478"/>
-          <ac:picMkLst>
-            <pc:docMk/>
-            <pc:sldMk cId="1267936960" sldId="279"/>
-            <ac:picMk id="24" creationId="{1EB6FB97-1A05-ADE3-7629-94E2CD8AF5FA}"/>
-          </ac:picMkLst>
-        </pc:picChg>
-        <pc:picChg chg="add del mod">
-          <ac:chgData name="Evgenia Andreou" userId="8e89e74f621e7047" providerId="LiveId" clId="{EF53017E-E624-4052-9F70-6403551E244D}" dt="2025-11-25T00:48:41.894" v="38713" actId="478"/>
-          <ac:picMkLst>
-            <pc:docMk/>
-            <pc:sldMk cId="1267936960" sldId="279"/>
-            <ac:picMk id="28" creationId="{7D433E39-79CA-2AB5-F414-865665E808DA}"/>
-          </ac:picMkLst>
-        </pc:picChg>
-        <pc:picChg chg="add del mod">
-          <ac:chgData name="Evgenia Andreou" userId="8e89e74f621e7047" providerId="LiveId" clId="{EF53017E-E624-4052-9F70-6403551E244D}" dt="2025-11-25T00:48:41.894" v="38713" actId="478"/>
-          <ac:picMkLst>
-            <pc:docMk/>
-            <pc:sldMk cId="1267936960" sldId="279"/>
-            <ac:picMk id="30" creationId="{0FBF489A-C02C-F5B0-5371-20DBE52EA5C7}"/>
-          </ac:picMkLst>
-        </pc:picChg>
-        <pc:cxnChg chg="add del mod">
-          <ac:chgData name="Evgenia Andreou" userId="8e89e74f621e7047" providerId="LiveId" clId="{EF53017E-E624-4052-9F70-6403551E244D}" dt="2025-11-25T00:48:36.544" v="38710" actId="478"/>
-          <ac:cxnSpMkLst>
-            <pc:docMk/>
-            <pc:sldMk cId="1267936960" sldId="279"/>
-            <ac:cxnSpMk id="3" creationId="{86D7B6FB-E22B-B5EA-6BDF-15CC3209446C}"/>
-          </ac:cxnSpMkLst>
-        </pc:cxnChg>
-        <pc:cxnChg chg="add del mod">
-          <ac:chgData name="Evgenia Andreou" userId="8e89e74f621e7047" providerId="LiveId" clId="{EF53017E-E624-4052-9F70-6403551E244D}" dt="2025-11-25T00:48:34.993" v="38709" actId="478"/>
-          <ac:cxnSpMkLst>
-            <pc:docMk/>
-            <pc:sldMk cId="1267936960" sldId="279"/>
-            <ac:cxnSpMk id="4" creationId="{D691D456-6BFF-5FE7-F109-0E3102D42EEB}"/>
-          </ac:cxnSpMkLst>
-        </pc:cxnChg>
       </pc:sldChg>
       <pc:sldChg chg="addSp delSp modSp new mod setBg modClrScheme chgLayout">
         <pc:chgData name="Evgenia Andreou" userId="8e89e74f621e7047" providerId="LiveId" clId="{EF53017E-E624-4052-9F70-6403551E244D}" dt="2025-11-23T03:24:30.164" v="38377" actId="20577"/>
@@ -1412,7 +941,7 @@
         </pc:spChg>
       </pc:sldChg>
       <pc:sldChg chg="addSp delSp modSp new mod ord">
-        <pc:chgData name="Evgenia Andreou" userId="8e89e74f621e7047" providerId="LiveId" clId="{EF53017E-E624-4052-9F70-6403551E244D}" dt="2025-11-26T00:24:03.375" v="39215" actId="20577"/>
+        <pc:chgData name="Evgenia Andreou" userId="8e89e74f621e7047" providerId="LiveId" clId="{EF53017E-E624-4052-9F70-6403551E244D}" dt="2025-11-27T00:27:12.173" v="39242" actId="207"/>
         <pc:sldMkLst>
           <pc:docMk/>
           <pc:sldMk cId="1583996442" sldId="284"/>
@@ -1434,7 +963,7 @@
           </ac:spMkLst>
         </pc:spChg>
         <pc:spChg chg="add mod">
-          <ac:chgData name="Evgenia Andreou" userId="8e89e74f621e7047" providerId="LiveId" clId="{EF53017E-E624-4052-9F70-6403551E244D}" dt="2025-11-26T00:24:03.375" v="39215" actId="20577"/>
+          <ac:chgData name="Evgenia Andreou" userId="8e89e74f621e7047" providerId="LiveId" clId="{EF53017E-E624-4052-9F70-6403551E244D}" dt="2025-11-27T00:27:12.173" v="39242" actId="207"/>
           <ac:spMkLst>
             <pc:docMk/>
             <pc:sldMk cId="1583996442" sldId="284"/>
@@ -1528,13 +1057,13 @@
         </pc:picChg>
       </pc:sldChg>
       <pc:sldChg chg="addSp delSp modSp new mod">
-        <pc:chgData name="Evgenia Andreou" userId="8e89e74f621e7047" providerId="LiveId" clId="{EF53017E-E624-4052-9F70-6403551E244D}" dt="2025-11-25T22:55:32.263" v="39077" actId="20577"/>
+        <pc:chgData name="Evgenia Andreou" userId="8e89e74f621e7047" providerId="LiveId" clId="{EF53017E-E624-4052-9F70-6403551E244D}" dt="2025-11-27T02:28:14.701" v="39337" actId="1440"/>
         <pc:sldMkLst>
           <pc:docMk/>
           <pc:sldMk cId="634262476" sldId="292"/>
         </pc:sldMkLst>
         <pc:spChg chg="add mod">
-          <ac:chgData name="Evgenia Andreou" userId="8e89e74f621e7047" providerId="LiveId" clId="{EF53017E-E624-4052-9F70-6403551E244D}" dt="2025-11-25T22:55:32.263" v="39077" actId="20577"/>
+          <ac:chgData name="Evgenia Andreou" userId="8e89e74f621e7047" providerId="LiveId" clId="{EF53017E-E624-4052-9F70-6403551E244D}" dt="2025-11-27T02:13:54.228" v="39333" actId="14100"/>
           <ac:spMkLst>
             <pc:docMk/>
             <pc:sldMk cId="634262476" sldId="292"/>
@@ -1558,39 +1087,23 @@
           </ac:spMkLst>
         </pc:spChg>
         <pc:picChg chg="add mod">
-          <ac:chgData name="Evgenia Andreou" userId="8e89e74f621e7047" providerId="LiveId" clId="{EF53017E-E624-4052-9F70-6403551E244D}" dt="2025-11-25T21:19:02.624" v="39015" actId="14861"/>
+          <ac:chgData name="Evgenia Andreou" userId="8e89e74f621e7047" providerId="LiveId" clId="{EF53017E-E624-4052-9F70-6403551E244D}" dt="2025-11-27T02:28:14.701" v="39337" actId="1440"/>
           <ac:picMkLst>
             <pc:docMk/>
             <pc:sldMk cId="634262476" sldId="292"/>
             <ac:picMk id="6" creationId="{3B1FBFAB-7CB4-71D7-BB90-40702C41FA07}"/>
           </ac:picMkLst>
         </pc:picChg>
-        <pc:picChg chg="add del mod">
-          <ac:chgData name="Evgenia Andreou" userId="8e89e74f621e7047" providerId="LiveId" clId="{EF53017E-E624-4052-9F70-6403551E244D}" dt="2025-11-25T20:50:07.562" v="38970" actId="478"/>
+        <pc:picChg chg="add mod">
+          <ac:chgData name="Evgenia Andreou" userId="8e89e74f621e7047" providerId="LiveId" clId="{EF53017E-E624-4052-9F70-6403551E244D}" dt="2025-11-27T02:28:14.701" v="39337" actId="1440"/>
           <ac:picMkLst>
             <pc:docMk/>
             <pc:sldMk cId="634262476" sldId="292"/>
-            <ac:picMk id="7" creationId="{4B1B9D0C-3FE5-6DB7-4E3C-5FD347A4AE61}"/>
-          </ac:picMkLst>
-        </pc:picChg>
-        <pc:picChg chg="add del mod">
-          <ac:chgData name="Evgenia Andreou" userId="8e89e74f621e7047" providerId="LiveId" clId="{EF53017E-E624-4052-9F70-6403551E244D}" dt="2025-11-25T20:50:07.562" v="38970" actId="478"/>
-          <ac:picMkLst>
-            <pc:docMk/>
-            <pc:sldMk cId="634262476" sldId="292"/>
-            <ac:picMk id="8" creationId="{271579ED-3760-CADF-E08D-8CF0104F0AAF}"/>
-          </ac:picMkLst>
-        </pc:picChg>
-        <pc:picChg chg="add del mod">
-          <ac:chgData name="Evgenia Andreou" userId="8e89e74f621e7047" providerId="LiveId" clId="{EF53017E-E624-4052-9F70-6403551E244D}" dt="2025-11-25T20:50:07.562" v="38970" actId="478"/>
-          <ac:picMkLst>
-            <pc:docMk/>
-            <pc:sldMk cId="634262476" sldId="292"/>
-            <ac:picMk id="9" creationId="{97A63972-2DD3-E5EB-3E75-5EF5DE4C42C5}"/>
+            <ac:picMk id="7" creationId="{B799462F-A4F7-3D43-AE01-D02AF21C2CC4}"/>
           </ac:picMkLst>
         </pc:picChg>
         <pc:picChg chg="add mod">
-          <ac:chgData name="Evgenia Andreou" userId="8e89e74f621e7047" providerId="LiveId" clId="{EF53017E-E624-4052-9F70-6403551E244D}" dt="2025-11-25T21:19:46.325" v="39023" actId="14861"/>
+          <ac:chgData name="Evgenia Andreou" userId="8e89e74f621e7047" providerId="LiveId" clId="{EF53017E-E624-4052-9F70-6403551E244D}" dt="2025-11-27T02:28:14.701" v="39337" actId="1440"/>
           <ac:picMkLst>
             <pc:docMk/>
             <pc:sldMk cId="634262476" sldId="292"/>
@@ -1598,15 +1111,7 @@
           </ac:picMkLst>
         </pc:picChg>
         <pc:picChg chg="add del mod">
-          <ac:chgData name="Evgenia Andreou" userId="8e89e74f621e7047" providerId="LiveId" clId="{EF53017E-E624-4052-9F70-6403551E244D}" dt="2025-11-25T20:50:07.562" v="38970" actId="478"/>
-          <ac:picMkLst>
-            <pc:docMk/>
-            <pc:sldMk cId="634262476" sldId="292"/>
-            <ac:picMk id="13" creationId="{43C2F813-39F5-D32E-0811-8229542E7064}"/>
-          </ac:picMkLst>
-        </pc:picChg>
-        <pc:picChg chg="add mod">
-          <ac:chgData name="Evgenia Andreou" userId="8e89e74f621e7047" providerId="LiveId" clId="{EF53017E-E624-4052-9F70-6403551E244D}" dt="2025-11-25T21:20:00.264" v="39026" actId="14100"/>
+          <ac:chgData name="Evgenia Andreou" userId="8e89e74f621e7047" providerId="LiveId" clId="{EF53017E-E624-4052-9F70-6403551E244D}" dt="2025-11-27T02:13:42.656" v="39329" actId="478"/>
           <ac:picMkLst>
             <pc:docMk/>
             <pc:sldMk cId="634262476" sldId="292"/>
@@ -1614,7 +1119,7 @@
           </ac:picMkLst>
         </pc:picChg>
         <pc:picChg chg="add mod">
-          <ac:chgData name="Evgenia Andreou" userId="8e89e74f621e7047" providerId="LiveId" clId="{EF53017E-E624-4052-9F70-6403551E244D}" dt="2025-11-25T21:19:23.712" v="39019" actId="1076"/>
+          <ac:chgData name="Evgenia Andreou" userId="8e89e74f621e7047" providerId="LiveId" clId="{EF53017E-E624-4052-9F70-6403551E244D}" dt="2025-11-27T02:28:14.701" v="39337" actId="1440"/>
           <ac:picMkLst>
             <pc:docMk/>
             <pc:sldMk cId="634262476" sldId="292"/>
@@ -1636,14 +1141,6 @@
             <ac:spMk id="5" creationId="{0A267CFC-FE1A-6148-04CC-A306D34EA55F}"/>
           </ac:spMkLst>
         </pc:spChg>
-        <pc:spChg chg="add del mod">
-          <ac:chgData name="Evgenia Andreou" userId="8e89e74f621e7047" providerId="LiveId" clId="{EF53017E-E624-4052-9F70-6403551E244D}" dt="2025-11-25T23:38:00.785" v="39078" actId="478"/>
-          <ac:spMkLst>
-            <pc:docMk/>
-            <pc:sldMk cId="3402175388" sldId="293"/>
-            <ac:spMk id="18" creationId="{A4F9189D-7BE9-E4A6-41F6-E2E39ED7BDB1}"/>
-          </ac:spMkLst>
-        </pc:spChg>
         <pc:spChg chg="add mod">
           <ac:chgData name="Evgenia Andreou" userId="8e89e74f621e7047" providerId="LiveId" clId="{EF53017E-E624-4052-9F70-6403551E244D}" dt="2025-11-25T01:21:50.103" v="38878" actId="1076"/>
           <ac:spMkLst>
@@ -1652,158 +1149,6 @@
             <ac:spMk id="28" creationId="{663BBFA7-4629-E836-75B9-68C844D60F68}"/>
           </ac:spMkLst>
         </pc:spChg>
-        <pc:spChg chg="add del mod">
-          <ac:chgData name="Evgenia Andreou" userId="8e89e74f621e7047" providerId="LiveId" clId="{EF53017E-E624-4052-9F70-6403551E244D}" dt="2025-11-25T23:38:00.785" v="39078" actId="478"/>
-          <ac:spMkLst>
-            <pc:docMk/>
-            <pc:sldMk cId="3402175388" sldId="293"/>
-            <ac:spMk id="30" creationId="{45FE2BA6-448C-983C-DEC1-756F2C24A7F2}"/>
-          </ac:spMkLst>
-        </pc:spChg>
-        <pc:spChg chg="add del mod">
-          <ac:chgData name="Evgenia Andreou" userId="8e89e74f621e7047" providerId="LiveId" clId="{EF53017E-E624-4052-9F70-6403551E244D}" dt="2025-11-25T23:38:00.785" v="39078" actId="478"/>
-          <ac:spMkLst>
-            <pc:docMk/>
-            <pc:sldMk cId="3402175388" sldId="293"/>
-            <ac:spMk id="31" creationId="{DFA8CDE6-CD8D-D419-53FA-41BC50FD5363}"/>
-          </ac:spMkLst>
-        </pc:spChg>
-        <pc:spChg chg="add del mod">
-          <ac:chgData name="Evgenia Andreou" userId="8e89e74f621e7047" providerId="LiveId" clId="{EF53017E-E624-4052-9F70-6403551E244D}" dt="2025-11-25T23:38:00.785" v="39078" actId="478"/>
-          <ac:spMkLst>
-            <pc:docMk/>
-            <pc:sldMk cId="3402175388" sldId="293"/>
-            <ac:spMk id="32" creationId="{D2EE91B5-3727-D661-DFB8-87C30B65BF63}"/>
-          </ac:spMkLst>
-        </pc:spChg>
-        <pc:spChg chg="add del mod">
-          <ac:chgData name="Evgenia Andreou" userId="8e89e74f621e7047" providerId="LiveId" clId="{EF53017E-E624-4052-9F70-6403551E244D}" dt="2025-11-25T23:38:00.785" v="39078" actId="478"/>
-          <ac:spMkLst>
-            <pc:docMk/>
-            <pc:sldMk cId="3402175388" sldId="293"/>
-            <ac:spMk id="33" creationId="{33339CEA-3014-AE2A-D722-1003B265BE7D}"/>
-          </ac:spMkLst>
-        </pc:spChg>
-        <pc:spChg chg="add mod">
-          <ac:chgData name="Evgenia Andreou" userId="8e89e74f621e7047" providerId="LiveId" clId="{EF53017E-E624-4052-9F70-6403551E244D}" dt="2025-11-25T01:05:13.477" v="38789" actId="1076"/>
-          <ac:spMkLst>
-            <pc:docMk/>
-            <pc:sldMk cId="3402175388" sldId="293"/>
-            <ac:spMk id="34" creationId="{7F939927-BD2C-B48F-EAD0-A9E409E4B5D6}"/>
-          </ac:spMkLst>
-        </pc:spChg>
-        <pc:spChg chg="add del mod">
-          <ac:chgData name="Evgenia Andreou" userId="8e89e74f621e7047" providerId="LiveId" clId="{EF53017E-E624-4052-9F70-6403551E244D}" dt="2025-11-25T23:38:00.785" v="39078" actId="478"/>
-          <ac:spMkLst>
-            <pc:docMk/>
-            <pc:sldMk cId="3402175388" sldId="293"/>
-            <ac:spMk id="35" creationId="{A677A97B-6979-DBEC-AB97-EA0EE8B2389F}"/>
-          </ac:spMkLst>
-        </pc:spChg>
-        <pc:spChg chg="add del mod">
-          <ac:chgData name="Evgenia Andreou" userId="8e89e74f621e7047" providerId="LiveId" clId="{EF53017E-E624-4052-9F70-6403551E244D}" dt="2025-11-25T23:38:00.785" v="39078" actId="478"/>
-          <ac:spMkLst>
-            <pc:docMk/>
-            <pc:sldMk cId="3402175388" sldId="293"/>
-            <ac:spMk id="36" creationId="{BF69108E-DD10-4D02-EF45-B38F6B35806C}"/>
-          </ac:spMkLst>
-        </pc:spChg>
-        <pc:spChg chg="add del mod">
-          <ac:chgData name="Evgenia Andreou" userId="8e89e74f621e7047" providerId="LiveId" clId="{EF53017E-E624-4052-9F70-6403551E244D}" dt="2025-11-25T23:38:00.785" v="39078" actId="478"/>
-          <ac:spMkLst>
-            <pc:docMk/>
-            <pc:sldMk cId="3402175388" sldId="293"/>
-            <ac:spMk id="37" creationId="{5970D129-FC67-7244-123B-10FB63223BF1}"/>
-          </ac:spMkLst>
-        </pc:spChg>
-        <pc:spChg chg="add mod">
-          <ac:chgData name="Evgenia Andreou" userId="8e89e74f621e7047" providerId="LiveId" clId="{EF53017E-E624-4052-9F70-6403551E244D}" dt="2025-11-25T01:05:34.599" v="38793" actId="1076"/>
-          <ac:spMkLst>
-            <pc:docMk/>
-            <pc:sldMk cId="3402175388" sldId="293"/>
-            <ac:spMk id="38" creationId="{FB4084BE-F011-60EA-282E-43CA2A769800}"/>
-          </ac:spMkLst>
-        </pc:spChg>
-        <pc:spChg chg="add del mod">
-          <ac:chgData name="Evgenia Andreou" userId="8e89e74f621e7047" providerId="LiveId" clId="{EF53017E-E624-4052-9F70-6403551E244D}" dt="2025-11-25T23:38:00.785" v="39078" actId="478"/>
-          <ac:spMkLst>
-            <pc:docMk/>
-            <pc:sldMk cId="3402175388" sldId="293"/>
-            <ac:spMk id="39" creationId="{AE17B21B-90A2-B288-9BAA-1B8C1D015C57}"/>
-          </ac:spMkLst>
-        </pc:spChg>
-        <pc:spChg chg="add del mod">
-          <ac:chgData name="Evgenia Andreou" userId="8e89e74f621e7047" providerId="LiveId" clId="{EF53017E-E624-4052-9F70-6403551E244D}" dt="2025-11-25T23:38:00.785" v="39078" actId="478"/>
-          <ac:spMkLst>
-            <pc:docMk/>
-            <pc:sldMk cId="3402175388" sldId="293"/>
-            <ac:spMk id="40" creationId="{68179078-1878-BD82-4A91-1E500AB17D35}"/>
-          </ac:spMkLst>
-        </pc:spChg>
-        <pc:picChg chg="add del mod ord">
-          <ac:chgData name="Evgenia Andreou" userId="8e89e74f621e7047" providerId="LiveId" clId="{EF53017E-E624-4052-9F70-6403551E244D}" dt="2025-11-25T01:12:31.003" v="38809" actId="478"/>
-          <ac:picMkLst>
-            <pc:docMk/>
-            <pc:sldMk cId="3402175388" sldId="293"/>
-            <ac:picMk id="4" creationId="{44A883A4-4427-8416-6A7C-05E7B91E72C7}"/>
-          </ac:picMkLst>
-        </pc:picChg>
-        <pc:picChg chg="add del mod ord modCrop">
-          <ac:chgData name="Evgenia Andreou" userId="8e89e74f621e7047" providerId="LiveId" clId="{EF53017E-E624-4052-9F70-6403551E244D}" dt="2025-11-25T01:12:31.003" v="38809" actId="478"/>
-          <ac:picMkLst>
-            <pc:docMk/>
-            <pc:sldMk cId="3402175388" sldId="293"/>
-            <ac:picMk id="7" creationId="{BF9EA6D2-D7D6-5F75-37F7-C0C4E2A8D22C}"/>
-          </ac:picMkLst>
-        </pc:picChg>
-        <pc:picChg chg="add del mod">
-          <ac:chgData name="Evgenia Andreou" userId="8e89e74f621e7047" providerId="LiveId" clId="{EF53017E-E624-4052-9F70-6403551E244D}" dt="2025-11-25T00:59:49.643" v="38733" actId="478"/>
-          <ac:picMkLst>
-            <pc:docMk/>
-            <pc:sldMk cId="3402175388" sldId="293"/>
-            <ac:picMk id="9" creationId="{19DF76C3-30F8-6D27-3B8C-45946BBB6958}"/>
-          </ac:picMkLst>
-        </pc:picChg>
-        <pc:picChg chg="add del mod ord">
-          <ac:chgData name="Evgenia Andreou" userId="8e89e74f621e7047" providerId="LiveId" clId="{EF53017E-E624-4052-9F70-6403551E244D}" dt="2025-11-25T01:12:31.003" v="38809" actId="478"/>
-          <ac:picMkLst>
-            <pc:docMk/>
-            <pc:sldMk cId="3402175388" sldId="293"/>
-            <ac:picMk id="10" creationId="{278C55CF-0111-FBDE-3BE4-AC7E68DE2AFB}"/>
-          </ac:picMkLst>
-        </pc:picChg>
-        <pc:picChg chg="add del mod">
-          <ac:chgData name="Evgenia Andreou" userId="8e89e74f621e7047" providerId="LiveId" clId="{EF53017E-E624-4052-9F70-6403551E244D}" dt="2025-11-25T00:59:50.191" v="38734" actId="478"/>
-          <ac:picMkLst>
-            <pc:docMk/>
-            <pc:sldMk cId="3402175388" sldId="293"/>
-            <ac:picMk id="11" creationId="{6C8FEB05-5B46-B9C4-798E-447E25DB7DB0}"/>
-          </ac:picMkLst>
-        </pc:picChg>
-        <pc:picChg chg="add del mod">
-          <ac:chgData name="Evgenia Andreou" userId="8e89e74f621e7047" providerId="LiveId" clId="{EF53017E-E624-4052-9F70-6403551E244D}" dt="2025-11-25T00:59:50.679" v="38735" actId="478"/>
-          <ac:picMkLst>
-            <pc:docMk/>
-            <pc:sldMk cId="3402175388" sldId="293"/>
-            <ac:picMk id="13" creationId="{F856B3B2-3098-4D49-1306-FF0152728133}"/>
-          </ac:picMkLst>
-        </pc:picChg>
-        <pc:picChg chg="add del mod ord modCrop">
-          <ac:chgData name="Evgenia Andreou" userId="8e89e74f621e7047" providerId="LiveId" clId="{EF53017E-E624-4052-9F70-6403551E244D}" dt="2025-11-25T01:12:31.003" v="38809" actId="478"/>
-          <ac:picMkLst>
-            <pc:docMk/>
-            <pc:sldMk cId="3402175388" sldId="293"/>
-            <ac:picMk id="14" creationId="{A0A321BB-7DE2-BC0F-B49B-CB383E88A715}"/>
-          </ac:picMkLst>
-        </pc:picChg>
-        <pc:picChg chg="add del mod modCrop">
-          <ac:chgData name="Evgenia Andreou" userId="8e89e74f621e7047" providerId="LiveId" clId="{EF53017E-E624-4052-9F70-6403551E244D}" dt="2025-11-25T00:59:48.810" v="38732" actId="478"/>
-          <ac:picMkLst>
-            <pc:docMk/>
-            <pc:sldMk cId="3402175388" sldId="293"/>
-            <ac:picMk id="15" creationId="{46DDB662-5070-B7B8-50C9-EFD88B671793}"/>
-          </ac:picMkLst>
-        </pc:picChg>
         <pc:picChg chg="add mod ord modCrop">
           <ac:chgData name="Evgenia Andreou" userId="8e89e74f621e7047" providerId="LiveId" clId="{EF53017E-E624-4052-9F70-6403551E244D}" dt="2025-11-25T20:55:03.969" v="38984" actId="1440"/>
           <ac:picMkLst>
@@ -1826,22 +1171,6 @@
             <pc:docMk/>
             <pc:sldMk cId="3402175388" sldId="293"/>
             <ac:picMk id="22" creationId="{2B4BA61B-C5D9-0ADA-6879-916E8C08C114}"/>
-          </ac:picMkLst>
-        </pc:picChg>
-        <pc:picChg chg="add del mod">
-          <ac:chgData name="Evgenia Andreou" userId="8e89e74f621e7047" providerId="LiveId" clId="{EF53017E-E624-4052-9F70-6403551E244D}" dt="2025-11-25T01:19:03.224" v="38835" actId="478"/>
-          <ac:picMkLst>
-            <pc:docMk/>
-            <pc:sldMk cId="3402175388" sldId="293"/>
-            <ac:picMk id="24" creationId="{F73242E7-B3E2-4C6C-4A4B-23A3B308B098}"/>
-          </ac:picMkLst>
-        </pc:picChg>
-        <pc:picChg chg="add del mod">
-          <ac:chgData name="Evgenia Andreou" userId="8e89e74f621e7047" providerId="LiveId" clId="{EF53017E-E624-4052-9F70-6403551E244D}" dt="2025-11-25T01:19:25.687" v="38840" actId="478"/>
-          <ac:picMkLst>
-            <pc:docMk/>
-            <pc:sldMk cId="3402175388" sldId="293"/>
-            <ac:picMk id="26" creationId="{8759EDFF-9501-00D4-7BD7-1C5A07624603}"/>
           </ac:picMkLst>
         </pc:picChg>
         <pc:picChg chg="add mod ord modCrop">
@@ -1884,101 +1213,6 @@
           </ac:picMkLst>
         </pc:picChg>
       </pc:sldChg>
-      <pc:sldMasterChg chg="setBg modSldLayout">
-        <pc:chgData name="Evgenia Andreou" userId="8e89e74f621e7047" providerId="LiveId" clId="{EF53017E-E624-4052-9F70-6403551E244D}" dt="2025-10-27T22:44:43.599" v="30455"/>
-        <pc:sldMasterMkLst>
-          <pc:docMk/>
-          <pc:sldMasterMk cId="2693072502" sldId="2147483708"/>
-        </pc:sldMasterMkLst>
-        <pc:sldLayoutChg chg="setBg">
-          <pc:chgData name="Evgenia Andreou" userId="8e89e74f621e7047" providerId="LiveId" clId="{EF53017E-E624-4052-9F70-6403551E244D}" dt="2025-10-27T22:44:43.599" v="30455"/>
-          <pc:sldLayoutMkLst>
-            <pc:docMk/>
-            <pc:sldMasterMk cId="2693072502" sldId="2147483708"/>
-            <pc:sldLayoutMk cId="356610871" sldId="2147483709"/>
-          </pc:sldLayoutMkLst>
-        </pc:sldLayoutChg>
-        <pc:sldLayoutChg chg="setBg">
-          <pc:chgData name="Evgenia Andreou" userId="8e89e74f621e7047" providerId="LiveId" clId="{EF53017E-E624-4052-9F70-6403551E244D}" dt="2025-10-27T22:44:43.599" v="30455"/>
-          <pc:sldLayoutMkLst>
-            <pc:docMk/>
-            <pc:sldMasterMk cId="2693072502" sldId="2147483708"/>
-            <pc:sldLayoutMk cId="19292485" sldId="2147483710"/>
-          </pc:sldLayoutMkLst>
-        </pc:sldLayoutChg>
-        <pc:sldLayoutChg chg="setBg">
-          <pc:chgData name="Evgenia Andreou" userId="8e89e74f621e7047" providerId="LiveId" clId="{EF53017E-E624-4052-9F70-6403551E244D}" dt="2025-10-27T22:44:43.599" v="30455"/>
-          <pc:sldLayoutMkLst>
-            <pc:docMk/>
-            <pc:sldMasterMk cId="2693072502" sldId="2147483708"/>
-            <pc:sldLayoutMk cId="2953917294" sldId="2147483711"/>
-          </pc:sldLayoutMkLst>
-        </pc:sldLayoutChg>
-        <pc:sldLayoutChg chg="setBg">
-          <pc:chgData name="Evgenia Andreou" userId="8e89e74f621e7047" providerId="LiveId" clId="{EF53017E-E624-4052-9F70-6403551E244D}" dt="2025-10-27T22:44:43.599" v="30455"/>
-          <pc:sldLayoutMkLst>
-            <pc:docMk/>
-            <pc:sldMasterMk cId="2693072502" sldId="2147483708"/>
-            <pc:sldLayoutMk cId="3680108532" sldId="2147483712"/>
-          </pc:sldLayoutMkLst>
-        </pc:sldLayoutChg>
-        <pc:sldLayoutChg chg="setBg">
-          <pc:chgData name="Evgenia Andreou" userId="8e89e74f621e7047" providerId="LiveId" clId="{EF53017E-E624-4052-9F70-6403551E244D}" dt="2025-10-27T22:44:43.599" v="30455"/>
-          <pc:sldLayoutMkLst>
-            <pc:docMk/>
-            <pc:sldMasterMk cId="2693072502" sldId="2147483708"/>
-            <pc:sldLayoutMk cId="809130830" sldId="2147483713"/>
-          </pc:sldLayoutMkLst>
-        </pc:sldLayoutChg>
-        <pc:sldLayoutChg chg="setBg">
-          <pc:chgData name="Evgenia Andreou" userId="8e89e74f621e7047" providerId="LiveId" clId="{EF53017E-E624-4052-9F70-6403551E244D}" dt="2025-10-27T22:44:43.599" v="30455"/>
-          <pc:sldLayoutMkLst>
-            <pc:docMk/>
-            <pc:sldMasterMk cId="2693072502" sldId="2147483708"/>
-            <pc:sldLayoutMk cId="1586532713" sldId="2147483714"/>
-          </pc:sldLayoutMkLst>
-        </pc:sldLayoutChg>
-        <pc:sldLayoutChg chg="setBg">
-          <pc:chgData name="Evgenia Andreou" userId="8e89e74f621e7047" providerId="LiveId" clId="{EF53017E-E624-4052-9F70-6403551E244D}" dt="2025-10-27T22:44:43.599" v="30455"/>
-          <pc:sldLayoutMkLst>
-            <pc:docMk/>
-            <pc:sldMasterMk cId="2693072502" sldId="2147483708"/>
-            <pc:sldLayoutMk cId="3763728003" sldId="2147483715"/>
-          </pc:sldLayoutMkLst>
-        </pc:sldLayoutChg>
-        <pc:sldLayoutChg chg="setBg">
-          <pc:chgData name="Evgenia Andreou" userId="8e89e74f621e7047" providerId="LiveId" clId="{EF53017E-E624-4052-9F70-6403551E244D}" dt="2025-10-27T22:44:43.599" v="30455"/>
-          <pc:sldLayoutMkLst>
-            <pc:docMk/>
-            <pc:sldMasterMk cId="2693072502" sldId="2147483708"/>
-            <pc:sldLayoutMk cId="1146229378" sldId="2147483716"/>
-          </pc:sldLayoutMkLst>
-        </pc:sldLayoutChg>
-        <pc:sldLayoutChg chg="setBg">
-          <pc:chgData name="Evgenia Andreou" userId="8e89e74f621e7047" providerId="LiveId" clId="{EF53017E-E624-4052-9F70-6403551E244D}" dt="2025-10-27T22:44:43.599" v="30455"/>
-          <pc:sldLayoutMkLst>
-            <pc:docMk/>
-            <pc:sldMasterMk cId="2693072502" sldId="2147483708"/>
-            <pc:sldLayoutMk cId="1592497053" sldId="2147483717"/>
-          </pc:sldLayoutMkLst>
-        </pc:sldLayoutChg>
-        <pc:sldLayoutChg chg="setBg">
-          <pc:chgData name="Evgenia Andreou" userId="8e89e74f621e7047" providerId="LiveId" clId="{EF53017E-E624-4052-9F70-6403551E244D}" dt="2025-10-27T22:44:43.599" v="30455"/>
-          <pc:sldLayoutMkLst>
-            <pc:docMk/>
-            <pc:sldMasterMk cId="2693072502" sldId="2147483708"/>
-            <pc:sldLayoutMk cId="1963752470" sldId="2147483718"/>
-          </pc:sldLayoutMkLst>
-        </pc:sldLayoutChg>
-        <pc:sldLayoutChg chg="setBg">
-          <pc:chgData name="Evgenia Andreou" userId="8e89e74f621e7047" providerId="LiveId" clId="{EF53017E-E624-4052-9F70-6403551E244D}" dt="2025-10-27T22:44:43.599" v="30455"/>
-          <pc:sldLayoutMkLst>
-            <pc:docMk/>
-            <pc:sldMasterMk cId="2693072502" sldId="2147483708"/>
-            <pc:sldLayoutMk cId="2512544203" sldId="2147483719"/>
-          </pc:sldLayoutMkLst>
-        </pc:sldLayoutChg>
-      </pc:sldMasterChg>
     </pc:docChg>
   </pc:docChgLst>
 </pc:chgInfo>
@@ -13267,7 +12501,7 @@
           <a:p>
             <a:fld id="{C1A9776D-B584-4D4B-981C-FA97E36C0636}" type="datetimeFigureOut">
               <a:rPr lang="en-GB" smtClean="0"/>
-              <a:t>23/11/2025</a:t>
+              <a:t>27/11/2025</a:t>
             </a:fld>
             <a:endParaRPr lang="en-GB"/>
           </a:p>
@@ -13467,7 +12701,7 @@
           <a:p>
             <a:fld id="{C1A9776D-B584-4D4B-981C-FA97E36C0636}" type="datetimeFigureOut">
               <a:rPr lang="en-GB" smtClean="0"/>
-              <a:t>23/11/2025</a:t>
+              <a:t>27/11/2025</a:t>
             </a:fld>
             <a:endParaRPr lang="en-GB"/>
           </a:p>
@@ -13677,7 +12911,7 @@
           <a:p>
             <a:fld id="{C1A9776D-B584-4D4B-981C-FA97E36C0636}" type="datetimeFigureOut">
               <a:rPr lang="en-GB" smtClean="0"/>
-              <a:t>23/11/2025</a:t>
+              <a:t>27/11/2025</a:t>
             </a:fld>
             <a:endParaRPr lang="en-GB"/>
           </a:p>
@@ -13877,7 +13111,7 @@
           <a:p>
             <a:fld id="{C1A9776D-B584-4D4B-981C-FA97E36C0636}" type="datetimeFigureOut">
               <a:rPr lang="en-GB" smtClean="0"/>
-              <a:t>23/11/2025</a:t>
+              <a:t>27/11/2025</a:t>
             </a:fld>
             <a:endParaRPr lang="en-GB"/>
           </a:p>
@@ -14153,7 +13387,7 @@
           <a:p>
             <a:fld id="{C1A9776D-B584-4D4B-981C-FA97E36C0636}" type="datetimeFigureOut">
               <a:rPr lang="en-GB" smtClean="0"/>
-              <a:t>23/11/2025</a:t>
+              <a:t>27/11/2025</a:t>
             </a:fld>
             <a:endParaRPr lang="en-GB"/>
           </a:p>
@@ -14421,7 +13655,7 @@
           <a:p>
             <a:fld id="{C1A9776D-B584-4D4B-981C-FA97E36C0636}" type="datetimeFigureOut">
               <a:rPr lang="en-GB" smtClean="0"/>
-              <a:t>23/11/2025</a:t>
+              <a:t>27/11/2025</a:t>
             </a:fld>
             <a:endParaRPr lang="en-GB"/>
           </a:p>
@@ -14836,7 +14070,7 @@
           <a:p>
             <a:fld id="{C1A9776D-B584-4D4B-981C-FA97E36C0636}" type="datetimeFigureOut">
               <a:rPr lang="en-GB" smtClean="0"/>
-              <a:t>23/11/2025</a:t>
+              <a:t>27/11/2025</a:t>
             </a:fld>
             <a:endParaRPr lang="en-GB"/>
           </a:p>
@@ -14978,7 +14212,7 @@
           <a:p>
             <a:fld id="{C1A9776D-B584-4D4B-981C-FA97E36C0636}" type="datetimeFigureOut">
               <a:rPr lang="en-GB" smtClean="0"/>
-              <a:t>23/11/2025</a:t>
+              <a:t>27/11/2025</a:t>
             </a:fld>
             <a:endParaRPr lang="en-GB"/>
           </a:p>
@@ -15091,7 +14325,7 @@
           <a:p>
             <a:fld id="{C1A9776D-B584-4D4B-981C-FA97E36C0636}" type="datetimeFigureOut">
               <a:rPr lang="en-GB" smtClean="0"/>
-              <a:t>23/11/2025</a:t>
+              <a:t>27/11/2025</a:t>
             </a:fld>
             <a:endParaRPr lang="en-GB"/>
           </a:p>
@@ -15404,7 +14638,7 @@
           <a:p>
             <a:fld id="{C1A9776D-B584-4D4B-981C-FA97E36C0636}" type="datetimeFigureOut">
               <a:rPr lang="en-GB" smtClean="0"/>
-              <a:t>23/11/2025</a:t>
+              <a:t>27/11/2025</a:t>
             </a:fld>
             <a:endParaRPr lang="en-GB"/>
           </a:p>
@@ -15693,7 +14927,7 @@
           <a:p>
             <a:fld id="{C1A9776D-B584-4D4B-981C-FA97E36C0636}" type="datetimeFigureOut">
               <a:rPr lang="en-GB" smtClean="0"/>
-              <a:t>23/11/2025</a:t>
+              <a:t>27/11/2025</a:t>
             </a:fld>
             <a:endParaRPr lang="en-GB"/>
           </a:p>
@@ -15949,7 +15183,7 @@
           <a:p>
             <a:fld id="{C1A9776D-B584-4D4B-981C-FA97E36C0636}" type="datetimeFigureOut">
               <a:rPr lang="en-GB" smtClean="0"/>
-              <a:t>23/11/2025</a:t>
+              <a:t>27/11/2025</a:t>
             </a:fld>
             <a:endParaRPr lang="en-GB"/>
           </a:p>
@@ -21165,6 +20399,20 @@
               </a:rPr>
               <a:t> +</a:t>
             </a:r>
+          </a:p>
+          <a:p>
+            <a:r>
+              <a:rPr lang="en-US" sz="2400" dirty="0"/>
+              <a:t>Funder Industry</a:t>
+            </a:r>
+            <a:r>
+              <a:rPr lang="en-US" sz="2400" dirty="0">
+                <a:solidFill>
+                  <a:schemeClr val="accent5"/>
+                </a:solidFill>
+              </a:rPr>
+              <a:t> +</a:t>
+            </a:r>
             <a:endParaRPr lang="en-GB" sz="2400" dirty="0"/>
           </a:p>
         </p:txBody>
@@ -21726,8 +20974,8 @@
         </p:nvSpPr>
         <p:spPr>
           <a:xfrm>
-            <a:off x="8889357" y="3949498"/>
-            <a:ext cx="2693043" cy="2308324"/>
+            <a:off x="9818658" y="3949498"/>
+            <a:ext cx="1763742" cy="2308324"/>
           </a:xfrm>
           <a:prstGeom prst="rect">
             <a:avLst/>
@@ -21958,7 +21206,7 @@
             <a:noFill/>
           </a:ln>
           <a:effectLst>
-            <a:softEdge rad="0"/>
+            <a:softEdge rad="112500"/>
           </a:effectLst>
         </p:spPr>
       </p:pic>
@@ -21984,7 +21232,7 @@
         </p:blipFill>
         <p:spPr>
           <a:xfrm>
-            <a:off x="609600" y="3949499"/>
+            <a:off x="609600" y="4082217"/>
             <a:ext cx="4073544" cy="1945781"/>
           </a:xfrm>
           <a:prstGeom prst="rect">
@@ -21994,38 +21242,8 @@
             <a:noFill/>
           </a:ln>
           <a:effectLst>
-            <a:softEdge rad="0"/>
+            <a:softEdge rad="112500"/>
           </a:effectLst>
-        </p:spPr>
-      </p:pic>
-      <p:pic>
-        <p:nvPicPr>
-          <p:cNvPr id="14" name="Picture 13">
-            <a:extLst>
-              <a:ext uri="{FF2B5EF4-FFF2-40B4-BE49-F238E27FC236}">
-                <a16:creationId xmlns:a16="http://schemas.microsoft.com/office/drawing/2014/main" id="{2B542E36-04D0-C797-9167-A2ED7F41DF32}"/>
-              </a:ext>
-            </a:extLst>
-          </p:cNvPr>
-          <p:cNvPicPr>
-            <a:picLocks noChangeAspect="1"/>
-          </p:cNvPicPr>
-          <p:nvPr/>
-        </p:nvPicPr>
-        <p:blipFill>
-          <a:blip r:embed="rId4"/>
-          <a:stretch>
-            <a:fillRect/>
-          </a:stretch>
-        </p:blipFill>
-        <p:spPr>
-          <a:xfrm>
-            <a:off x="4683144" y="3949498"/>
-            <a:ext cx="4206213" cy="1945781"/>
-          </a:xfrm>
-          <a:prstGeom prst="rect">
-            <a:avLst/>
-          </a:prstGeom>
         </p:spPr>
       </p:pic>
       <p:pic>
@@ -22043,7 +21261,7 @@
           <p:nvPr/>
         </p:nvPicPr>
         <p:blipFill>
-          <a:blip r:embed="rId5"/>
+          <a:blip r:embed="rId4"/>
           <a:stretch>
             <a:fillRect/>
           </a:stretch>
@@ -22056,6 +21274,48 @@
           <a:prstGeom prst="rect">
             <a:avLst/>
           </a:prstGeom>
+          <a:ln>
+            <a:noFill/>
+          </a:ln>
+          <a:effectLst>
+            <a:softEdge rad="112500"/>
+          </a:effectLst>
+        </p:spPr>
+      </p:pic>
+      <p:pic>
+        <p:nvPicPr>
+          <p:cNvPr id="7" name="Picture 6">
+            <a:extLst>
+              <a:ext uri="{FF2B5EF4-FFF2-40B4-BE49-F238E27FC236}">
+                <a16:creationId xmlns:a16="http://schemas.microsoft.com/office/drawing/2014/main" id="{B799462F-A4F7-3D43-AE01-D02AF21C2CC4}"/>
+              </a:ext>
+            </a:extLst>
+          </p:cNvPr>
+          <p:cNvPicPr>
+            <a:picLocks noChangeAspect="1"/>
+          </p:cNvPicPr>
+          <p:nvPr/>
+        </p:nvPicPr>
+        <p:blipFill>
+          <a:blip r:embed="rId5"/>
+          <a:stretch>
+            <a:fillRect/>
+          </a:stretch>
+        </p:blipFill>
+        <p:spPr>
+          <a:xfrm>
+            <a:off x="4837456" y="4082216"/>
+            <a:ext cx="4906910" cy="1617543"/>
+          </a:xfrm>
+          <a:prstGeom prst="rect">
+            <a:avLst/>
+          </a:prstGeom>
+          <a:ln>
+            <a:noFill/>
+          </a:ln>
+          <a:effectLst>
+            <a:softEdge rad="112500"/>
+          </a:effectLst>
         </p:spPr>
       </p:pic>
     </p:spTree>
@@ -22536,10 +21796,16 @@
               </a:rPr>
             </a:br>
             <a:r>
+              <a:rPr lang="en-GB" sz="2000" dirty="0">
+                <a:sym typeface="Wingdings" panose="05000000000000000000" pitchFamily="2" charset="2"/>
+              </a:rPr>
+              <a:t>No</a:t>
+            </a:r>
+            <a:r>
               <a:rPr lang="en-GB" sz="2000" b="1" dirty="0">
                 <a:sym typeface="Wingdings" panose="05000000000000000000" pitchFamily="2" charset="2"/>
               </a:rPr>
-              <a:t>X </a:t>
+              <a:t> </a:t>
             </a:r>
             <a:r>
               <a:rPr lang="en-GB" sz="2000" dirty="0">
@@ -22557,7 +21823,9 @@
             </a:r>
           </a:p>
           <a:p>
-            <a:pPr lvl="1"/>
+            <a:pPr marL="233363" lvl="1" indent="0">
+              <a:buNone/>
+            </a:pPr>
             <a:r>
               <a:rPr lang="en-GB" sz="2000" dirty="0">
                 <a:sym typeface="Wingdings" panose="05000000000000000000" pitchFamily="2" charset="2"/>
@@ -22566,7 +21834,9 @@
             </a:r>
           </a:p>
           <a:p>
-            <a:pPr lvl="1"/>
+            <a:pPr marL="233363" lvl="1" indent="0">
+              <a:buNone/>
+            </a:pPr>
             <a:r>
               <a:rPr lang="en-GB" sz="2000" dirty="0">
                 <a:sym typeface="Wingdings" panose="05000000000000000000" pitchFamily="2" charset="2"/>
@@ -22655,7 +21925,7 @@
               <a:rPr lang="en-US" sz="2000" b="1" dirty="0">
                 <a:sym typeface="Wingdings" panose="05000000000000000000" pitchFamily="2" charset="2"/>
               </a:rPr>
-              <a:t> </a:t>
+              <a:t>: </a:t>
             </a:r>
             <a:r>
               <a:rPr lang="en-US" sz="2000" dirty="0"/>
@@ -22687,7 +21957,7 @@
               <a:rPr lang="en-US" sz="2000" b="1" dirty="0">
                 <a:sym typeface="Wingdings" panose="05000000000000000000" pitchFamily="2" charset="2"/>
               </a:rPr>
-              <a:t> </a:t>
+              <a:t>: </a:t>
             </a:r>
             <a:r>
               <a:rPr lang="en-US" sz="2000" dirty="0"/>
@@ -22703,7 +21973,7 @@
               <a:rPr lang="en-US" sz="2000" b="1" dirty="0">
                 <a:sym typeface="Wingdings" panose="05000000000000000000" pitchFamily="2" charset="2"/>
               </a:rPr>
-              <a:t> </a:t>
+              <a:t>: </a:t>
             </a:r>
             <a:r>
               <a:rPr lang="en-US" sz="2000" dirty="0"/>
@@ -22713,7 +21983,7 @@
           <a:p>
             <a:r>
               <a:rPr lang="en-US" sz="2000" b="1" dirty="0"/>
-              <a:t>Models' outperformance </a:t>
+              <a:t>Models</a:t>
             </a:r>
             <a:br>
               <a:rPr lang="en-US" sz="2000" b="1" dirty="0"/>
@@ -22738,6 +22008,13 @@
               <a:rPr lang="en-US" sz="2000" dirty="0"/>
               <a:t> decimal</a:t>
             </a:r>
+            <a:br>
+              <a:rPr lang="en-US" sz="2000" dirty="0"/>
+            </a:br>
+            <a:r>
+              <a:rPr lang="en-US" sz="2000" dirty="0"/>
+              <a:t>No alternative classic statistics models</a:t>
+            </a:r>
           </a:p>
           <a:p>
             <a:r>
@@ -22748,7 +22025,7 @@
               <a:rPr lang="en-US" sz="2000" b="1" dirty="0">
                 <a:sym typeface="Wingdings" panose="05000000000000000000" pitchFamily="2" charset="2"/>
               </a:rPr>
-              <a:t> </a:t>
+              <a:t>: </a:t>
             </a:r>
             <a:r>
               <a:rPr lang="en-US" sz="2000" dirty="0">

--- a/Thesis_Presentation.pptx
+++ b/Thesis_Presentation.pptx
@@ -22,11 +22,11 @@
     <p:sldId id="268" r:id="rId16"/>
     <p:sldId id="279" r:id="rId17"/>
     <p:sldId id="267" r:id="rId18"/>
-    <p:sldId id="264" r:id="rId19"/>
-    <p:sldId id="291" r:id="rId20"/>
+    <p:sldId id="291" r:id="rId19"/>
+    <p:sldId id="264" r:id="rId20"/>
     <p:sldId id="276" r:id="rId21"/>
-    <p:sldId id="284" r:id="rId22"/>
-    <p:sldId id="293" r:id="rId23"/>
+    <p:sldId id="293" r:id="rId22"/>
+    <p:sldId id="284" r:id="rId23"/>
     <p:sldId id="292" r:id="rId24"/>
     <p:sldId id="263" r:id="rId25"/>
     <p:sldId id="285" r:id="rId26"/>
@@ -153,11 +153,11 @@
             <p14:sldId id="268"/>
             <p14:sldId id="279"/>
             <p14:sldId id="267"/>
+            <p14:sldId id="291"/>
             <p14:sldId id="264"/>
-            <p14:sldId id="291"/>
             <p14:sldId id="276"/>
+            <p14:sldId id="293"/>
             <p14:sldId id="284"/>
-            <p14:sldId id="293"/>
             <p14:sldId id="292"/>
             <p14:sldId id="263"/>
             <p14:sldId id="285"/>
@@ -178,7 +178,7 @@
 <file path=ppt/revisionInfo.xml><?xml version="1.0" encoding="utf-8"?>
 <p1510:revInfo xmlns:a="http://schemas.openxmlformats.org/drawingml/2006/main" xmlns:r="http://schemas.openxmlformats.org/officeDocument/2006/relationships" xmlns:p1510="http://schemas.microsoft.com/office/powerpoint/2015/10/main">
   <p1510:revLst>
-    <p1510:client id="{6F7D2D08-A2CD-4302-88FB-740D1140D192}" v="1691" dt="2025-11-26T00:22:05.878"/>
+    <p1510:client id="{6F7D2D08-A2CD-4302-88FB-740D1140D192}" v="1702" dt="2025-11-28T03:11:25.345"/>
   </p1510:revLst>
 </p1510:revInfo>
 </file>
@@ -188,7 +188,7 @@
   <pc:docChgLst>
     <pc:chgData name="Evgenia Andreou" userId="8e89e74f621e7047" providerId="LiveId" clId="{EF53017E-E624-4052-9F70-6403551E244D}"/>
     <pc:docChg chg="undo redo custSel addSld delSld modSld sldOrd modMainMaster addSection delSection modSection">
-      <pc:chgData name="Evgenia Andreou" userId="8e89e74f621e7047" providerId="LiveId" clId="{EF53017E-E624-4052-9F70-6403551E244D}" dt="2025-11-27T02:28:14.701" v="39337" actId="1440"/>
+      <pc:chgData name="Evgenia Andreou" userId="8e89e74f621e7047" providerId="LiveId" clId="{EF53017E-E624-4052-9F70-6403551E244D}" dt="2025-11-28T04:01:49.488" v="40319" actId="20577"/>
       <pc:docMkLst>
         <pc:docMk/>
       </pc:docMkLst>
@@ -247,7 +247,7 @@
         </pc:spChg>
       </pc:sldChg>
       <pc:sldChg chg="addSp delSp modSp new mod ord setBg modClrScheme chgLayout">
-        <pc:chgData name="Evgenia Andreou" userId="8e89e74f621e7047" providerId="LiveId" clId="{EF53017E-E624-4052-9F70-6403551E244D}" dt="2025-11-23T03:26:22.002" v="38386" actId="20577"/>
+        <pc:chgData name="Evgenia Andreou" userId="8e89e74f621e7047" providerId="LiveId" clId="{EF53017E-E624-4052-9F70-6403551E244D}" dt="2025-11-28T03:49:27.862" v="40297" actId="255"/>
         <pc:sldMkLst>
           <pc:docMk/>
           <pc:sldMk cId="3253723412" sldId="260"/>
@@ -293,7 +293,7 @@
           </ac:spMkLst>
         </pc:spChg>
         <pc:spChg chg="add mod">
-          <ac:chgData name="Evgenia Andreou" userId="8e89e74f621e7047" providerId="LiveId" clId="{EF53017E-E624-4052-9F70-6403551E244D}" dt="2025-11-23T03:26:22.002" v="38386" actId="20577"/>
+          <ac:chgData name="Evgenia Andreou" userId="8e89e74f621e7047" providerId="LiveId" clId="{EF53017E-E624-4052-9F70-6403551E244D}" dt="2025-11-28T03:49:27.862" v="40297" actId="255"/>
           <ac:spMkLst>
             <pc:docMk/>
             <pc:sldMk cId="3253723412" sldId="260"/>
@@ -302,11 +302,27 @@
         </pc:spChg>
       </pc:sldChg>
       <pc:sldChg chg="addSp delSp modSp new mod setBg modClrScheme chgLayout">
-        <pc:chgData name="Evgenia Andreou" userId="8e89e74f621e7047" providerId="LiveId" clId="{EF53017E-E624-4052-9F70-6403551E244D}" dt="2025-11-23T01:18:41.088" v="37571" actId="20577"/>
+        <pc:chgData name="Evgenia Andreou" userId="8e89e74f621e7047" providerId="LiveId" clId="{EF53017E-E624-4052-9F70-6403551E244D}" dt="2025-11-28T03:50:14.574" v="40310" actId="20577"/>
         <pc:sldMkLst>
           <pc:docMk/>
           <pc:sldMk cId="1363710211" sldId="262"/>
         </pc:sldMkLst>
+        <pc:spChg chg="mod">
+          <ac:chgData name="Evgenia Andreou" userId="8e89e74f621e7047" providerId="LiveId" clId="{EF53017E-E624-4052-9F70-6403551E244D}" dt="2025-11-28T03:50:14.574" v="40310" actId="20577"/>
+          <ac:spMkLst>
+            <pc:docMk/>
+            <pc:sldMk cId="1363710211" sldId="262"/>
+            <ac:spMk id="20" creationId="{D3BA573A-42F1-DA45-C0FD-BC1655434B77}"/>
+          </ac:spMkLst>
+        </pc:spChg>
+        <pc:spChg chg="mod">
+          <ac:chgData name="Evgenia Andreou" userId="8e89e74f621e7047" providerId="LiveId" clId="{EF53017E-E624-4052-9F70-6403551E244D}" dt="2025-11-28T02:11:34.509" v="39412" actId="1036"/>
+          <ac:spMkLst>
+            <pc:docMk/>
+            <pc:sldMk cId="1363710211" sldId="262"/>
+            <ac:spMk id="24" creationId="{E1FABA48-E7BA-FC06-2FF3-7550185F508C}"/>
+          </ac:spMkLst>
+        </pc:spChg>
         <pc:spChg chg="add mod">
           <ac:chgData name="Evgenia Andreou" userId="8e89e74f621e7047" providerId="LiveId" clId="{EF53017E-E624-4052-9F70-6403551E244D}" dt="2025-11-23T01:18:41.088" v="37571" actId="20577"/>
           <ac:spMkLst>
@@ -316,35 +332,11 @@
           </ac:spMkLst>
         </pc:spChg>
         <pc:spChg chg="mod">
-          <ac:chgData name="Evgenia Andreou" userId="8e89e74f621e7047" providerId="LiveId" clId="{EF53017E-E624-4052-9F70-6403551E244D}" dt="2025-10-28T01:09:39.576" v="33179" actId="1035"/>
-          <ac:spMkLst>
-            <pc:docMk/>
-            <pc:sldMk cId="1363710211" sldId="262"/>
-            <ac:spMk id="63" creationId="{685977E3-BE66-C325-7617-8006ED1FCC83}"/>
-          </ac:spMkLst>
-        </pc:spChg>
-        <pc:spChg chg="add mod">
-          <ac:chgData name="Evgenia Andreou" userId="8e89e74f621e7047" providerId="LiveId" clId="{EF53017E-E624-4052-9F70-6403551E244D}" dt="2025-10-28T01:09:39.576" v="33179" actId="1035"/>
-          <ac:spMkLst>
-            <pc:docMk/>
-            <pc:sldMk cId="1363710211" sldId="262"/>
-            <ac:spMk id="64" creationId="{96375C8D-75B6-B300-A413-940AA01BDE3E}"/>
-          </ac:spMkLst>
-        </pc:spChg>
-        <pc:spChg chg="mod">
-          <ac:chgData name="Evgenia Andreou" userId="8e89e74f621e7047" providerId="LiveId" clId="{EF53017E-E624-4052-9F70-6403551E244D}" dt="2025-10-28T01:11:50.569" v="33200" actId="1076"/>
+          <ac:chgData name="Evgenia Andreou" userId="8e89e74f621e7047" providerId="LiveId" clId="{EF53017E-E624-4052-9F70-6403551E244D}" dt="2025-11-28T02:11:11.870" v="39408" actId="1076"/>
           <ac:spMkLst>
             <pc:docMk/>
             <pc:sldMk cId="1363710211" sldId="262"/>
             <ac:spMk id="65" creationId="{BC395692-D7A5-4CC4-921A-B43C008650B1}"/>
-          </ac:spMkLst>
-        </pc:spChg>
-        <pc:spChg chg="add mod">
-          <ac:chgData name="Evgenia Andreou" userId="8e89e74f621e7047" providerId="LiveId" clId="{EF53017E-E624-4052-9F70-6403551E244D}" dt="2025-10-28T01:09:39.576" v="33179" actId="1035"/>
-          <ac:spMkLst>
-            <pc:docMk/>
-            <pc:sldMk cId="1363710211" sldId="262"/>
-            <ac:spMk id="582" creationId="{8AD59409-A14C-E64D-73A3-2C4EE7BB5E73}"/>
           </ac:spMkLst>
         </pc:spChg>
         <pc:spChg chg="add mod">
@@ -356,46 +348,38 @@
           </ac:spMkLst>
         </pc:spChg>
         <pc:cxnChg chg="mod">
-          <ac:chgData name="Evgenia Andreou" userId="8e89e74f621e7047" providerId="LiveId" clId="{EF53017E-E624-4052-9F70-6403551E244D}" dt="2025-10-28T01:09:46.992" v="33181" actId="14100"/>
-          <ac:cxnSpMkLst>
-            <pc:docMk/>
-            <pc:sldMk cId="1363710211" sldId="262"/>
-            <ac:cxnSpMk id="81" creationId="{05344E2E-FFEC-B46E-FB1C-FBAC268A6731}"/>
-          </ac:cxnSpMkLst>
-        </pc:cxnChg>
-        <pc:cxnChg chg="mod">
-          <ac:chgData name="Evgenia Andreou" userId="8e89e74f621e7047" providerId="LiveId" clId="{EF53017E-E624-4052-9F70-6403551E244D}" dt="2025-10-28T01:09:55.023" v="33183" actId="14100"/>
-          <ac:cxnSpMkLst>
-            <pc:docMk/>
-            <pc:sldMk cId="1363710211" sldId="262"/>
-            <ac:cxnSpMk id="83" creationId="{5156EED3-9E21-BC6B-951D-F2914FC68A98}"/>
-          </ac:cxnSpMkLst>
-        </pc:cxnChg>
-        <pc:cxnChg chg="mod">
-          <ac:chgData name="Evgenia Andreou" userId="8e89e74f621e7047" providerId="LiveId" clId="{EF53017E-E624-4052-9F70-6403551E244D}" dt="2025-10-28T01:11:50.569" v="33200" actId="1076"/>
+          <ac:chgData name="Evgenia Andreou" userId="8e89e74f621e7047" providerId="LiveId" clId="{EF53017E-E624-4052-9F70-6403551E244D}" dt="2025-11-28T02:11:11.870" v="39408" actId="1076"/>
           <ac:cxnSpMkLst>
             <pc:docMk/>
             <pc:sldMk cId="1363710211" sldId="262"/>
             <ac:cxnSpMk id="85" creationId="{78652D68-0DB3-6990-6918-EE78DE3D987D}"/>
           </ac:cxnSpMkLst>
         </pc:cxnChg>
-        <pc:cxnChg chg="add mod">
-          <ac:chgData name="Evgenia Andreou" userId="8e89e74f621e7047" providerId="LiveId" clId="{EF53017E-E624-4052-9F70-6403551E244D}" dt="2025-10-28T01:09:49.689" v="33182" actId="14100"/>
+        <pc:cxnChg chg="mod">
+          <ac:chgData name="Evgenia Andreou" userId="8e89e74f621e7047" providerId="LiveId" clId="{EF53017E-E624-4052-9F70-6403551E244D}" dt="2025-11-28T02:11:41.641" v="39414" actId="14100"/>
           <ac:cxnSpMkLst>
             <pc:docMk/>
             <pc:sldMk cId="1363710211" sldId="262"/>
-            <ac:cxnSpMk id="583" creationId="{B799BC5B-8485-A3BC-50A1-D4C731EE3820}"/>
+            <ac:cxnSpMk id="87" creationId="{1132FF9E-F1BD-E667-E01F-0E0BEB517FC0}"/>
+          </ac:cxnSpMkLst>
+        </pc:cxnChg>
+        <pc:cxnChg chg="mod">
+          <ac:chgData name="Evgenia Andreou" userId="8e89e74f621e7047" providerId="LiveId" clId="{EF53017E-E624-4052-9F70-6403551E244D}" dt="2025-11-28T02:11:38.005" v="39413" actId="14100"/>
+          <ac:cxnSpMkLst>
+            <pc:docMk/>
+            <pc:sldMk cId="1363710211" sldId="262"/>
+            <ac:cxnSpMk id="624" creationId="{0E2627AA-30FB-8252-5A08-C663C633D9C7}"/>
           </ac:cxnSpMkLst>
         </pc:cxnChg>
       </pc:sldChg>
-      <pc:sldChg chg="addSp modSp add mod ord">
-        <pc:chgData name="Evgenia Andreou" userId="8e89e74f621e7047" providerId="LiveId" clId="{EF53017E-E624-4052-9F70-6403551E244D}" dt="2025-11-23T03:43:57.558" v="38454" actId="1076"/>
+      <pc:sldChg chg="addSp delSp modSp add mod ord">
+        <pc:chgData name="Evgenia Andreou" userId="8e89e74f621e7047" providerId="LiveId" clId="{EF53017E-E624-4052-9F70-6403551E244D}" dt="2025-11-28T03:41:19.733" v="40292" actId="20577"/>
         <pc:sldMkLst>
           <pc:docMk/>
           <pc:sldMk cId="379656155" sldId="263"/>
         </pc:sldMkLst>
         <pc:spChg chg="add mod">
-          <ac:chgData name="Evgenia Andreou" userId="8e89e74f621e7047" providerId="LiveId" clId="{EF53017E-E624-4052-9F70-6403551E244D}" dt="2025-11-23T03:43:51.945" v="38453" actId="1076"/>
+          <ac:chgData name="Evgenia Andreou" userId="8e89e74f621e7047" providerId="LiveId" clId="{EF53017E-E624-4052-9F70-6403551E244D}" dt="2025-11-28T02:32:37.233" v="39511" actId="1035"/>
           <ac:spMkLst>
             <pc:docMk/>
             <pc:sldMk cId="379656155" sldId="263"/>
@@ -403,7 +387,23 @@
           </ac:spMkLst>
         </pc:spChg>
         <pc:spChg chg="mod">
-          <ac:chgData name="Evgenia Andreou" userId="8e89e74f621e7047" providerId="LiveId" clId="{EF53017E-E624-4052-9F70-6403551E244D}" dt="2025-11-23T03:43:47.748" v="38452" actId="1076"/>
+          <ac:chgData name="Evgenia Andreou" userId="8e89e74f621e7047" providerId="LiveId" clId="{EF53017E-E624-4052-9F70-6403551E244D}" dt="2025-11-28T02:34:12.977" v="39560" actId="20577"/>
+          <ac:spMkLst>
+            <pc:docMk/>
+            <pc:sldMk cId="379656155" sldId="263"/>
+            <ac:spMk id="3" creationId="{79AA6C9D-2E20-3FDC-E624-B09367AC8F9F}"/>
+          </ac:spMkLst>
+        </pc:spChg>
+        <pc:spChg chg="add mod">
+          <ac:chgData name="Evgenia Andreou" userId="8e89e74f621e7047" providerId="LiveId" clId="{EF53017E-E624-4052-9F70-6403551E244D}" dt="2025-11-28T03:41:19.733" v="40292" actId="20577"/>
+          <ac:spMkLst>
+            <pc:docMk/>
+            <pc:sldMk cId="379656155" sldId="263"/>
+            <ac:spMk id="4" creationId="{385A9581-03F7-49F9-A93D-E221AD38613E}"/>
+          </ac:spMkLst>
+        </pc:spChg>
+        <pc:spChg chg="mod">
+          <ac:chgData name="Evgenia Andreou" userId="8e89e74f621e7047" providerId="LiveId" clId="{EF53017E-E624-4052-9F70-6403551E244D}" dt="2025-11-28T02:36:23.269" v="39714" actId="14100"/>
           <ac:spMkLst>
             <pc:docMk/>
             <pc:sldMk cId="379656155" sldId="263"/>
@@ -411,7 +411,15 @@
           </ac:spMkLst>
         </pc:spChg>
         <pc:picChg chg="add mod">
-          <ac:chgData name="Evgenia Andreou" userId="8e89e74f621e7047" providerId="LiveId" clId="{EF53017E-E624-4052-9F70-6403551E244D}" dt="2025-11-23T03:43:57.558" v="38454" actId="1076"/>
+          <ac:chgData name="Evgenia Andreou" userId="8e89e74f621e7047" providerId="LiveId" clId="{EF53017E-E624-4052-9F70-6403551E244D}" dt="2025-11-28T03:16:07.223" v="40097" actId="1076"/>
+          <ac:picMkLst>
+            <pc:docMk/>
+            <pc:sldMk cId="379656155" sldId="263"/>
+            <ac:picMk id="6" creationId="{8EC81A22-9F3E-3963-5EB9-300275B01289}"/>
+          </ac:picMkLst>
+        </pc:picChg>
+        <pc:picChg chg="add del mod">
+          <ac:chgData name="Evgenia Andreou" userId="8e89e74f621e7047" providerId="LiveId" clId="{EF53017E-E624-4052-9F70-6403551E244D}" dt="2025-11-28T03:16:00.676" v="40095" actId="478"/>
           <ac:picMkLst>
             <pc:docMk/>
             <pc:sldMk cId="379656155" sldId="263"/>
@@ -435,13 +443,21 @@
         </pc:spChg>
       </pc:sldChg>
       <pc:sldChg chg="addSp delSp modSp new mod setBg modClrScheme chgLayout">
-        <pc:chgData name="Evgenia Andreou" userId="8e89e74f621e7047" providerId="LiveId" clId="{EF53017E-E624-4052-9F70-6403551E244D}" dt="2025-11-26T00:22:05.877" v="39214" actId="5793"/>
+        <pc:chgData name="Evgenia Andreou" userId="8e89e74f621e7047" providerId="LiveId" clId="{EF53017E-E624-4052-9F70-6403551E244D}" dt="2025-11-28T03:52:47.751" v="40311" actId="20577"/>
         <pc:sldMkLst>
           <pc:docMk/>
           <pc:sldMk cId="1969514135" sldId="266"/>
         </pc:sldMkLst>
+        <pc:spChg chg="mod">
+          <ac:chgData name="Evgenia Andreou" userId="8e89e74f621e7047" providerId="LiveId" clId="{EF53017E-E624-4052-9F70-6403551E244D}" dt="2025-11-28T02:51:23.331" v="39869" actId="1076"/>
+          <ac:spMkLst>
+            <pc:docMk/>
+            <pc:sldMk cId="1969514135" sldId="266"/>
+            <ac:spMk id="42" creationId="{2DFEE1D9-3445-82AA-690D-F8B09B9501C3}"/>
+          </ac:spMkLst>
+        </pc:spChg>
         <pc:graphicFrameChg chg="add mod modGraphic">
-          <ac:chgData name="Evgenia Andreou" userId="8e89e74f621e7047" providerId="LiveId" clId="{EF53017E-E624-4052-9F70-6403551E244D}" dt="2025-11-26T00:20:18.945" v="39155"/>
+          <ac:chgData name="Evgenia Andreou" userId="8e89e74f621e7047" providerId="LiveId" clId="{EF53017E-E624-4052-9F70-6403551E244D}" dt="2025-11-28T02:52:24.031" v="39880" actId="20577"/>
           <ac:graphicFrameMkLst>
             <pc:docMk/>
             <pc:sldMk cId="1969514135" sldId="266"/>
@@ -449,7 +465,7 @@
           </ac:graphicFrameMkLst>
         </pc:graphicFrameChg>
         <pc:graphicFrameChg chg="add mod modGraphic">
-          <ac:chgData name="Evgenia Andreou" userId="8e89e74f621e7047" providerId="LiveId" clId="{EF53017E-E624-4052-9F70-6403551E244D}" dt="2025-11-26T00:22:05.877" v="39214" actId="5793"/>
+          <ac:chgData name="Evgenia Andreou" userId="8e89e74f621e7047" providerId="LiveId" clId="{EF53017E-E624-4052-9F70-6403551E244D}" dt="2025-11-28T03:52:47.751" v="40311" actId="20577"/>
           <ac:graphicFrameMkLst>
             <pc:docMk/>
             <pc:sldMk cId="1969514135" sldId="266"/>
@@ -458,7 +474,7 @@
         </pc:graphicFrameChg>
       </pc:sldChg>
       <pc:sldChg chg="addSp delSp modSp new mod ord setBg">
-        <pc:chgData name="Evgenia Andreou" userId="8e89e74f621e7047" providerId="LiveId" clId="{EF53017E-E624-4052-9F70-6403551E244D}" dt="2025-11-23T01:16:50.377" v="37524" actId="1076"/>
+        <pc:chgData name="Evgenia Andreou" userId="8e89e74f621e7047" providerId="LiveId" clId="{EF53017E-E624-4052-9F70-6403551E244D}" dt="2025-11-28T02:19:23.922" v="39467" actId="20577"/>
         <pc:sldMkLst>
           <pc:docMk/>
           <pc:sldMk cId="4231469208" sldId="267"/>
@@ -472,7 +488,7 @@
           </ac:spMkLst>
         </pc:spChg>
         <pc:spChg chg="mod">
-          <ac:chgData name="Evgenia Andreou" userId="8e89e74f621e7047" providerId="LiveId" clId="{EF53017E-E624-4052-9F70-6403551E244D}" dt="2025-11-23T01:16:44.948" v="37523" actId="14100"/>
+          <ac:chgData name="Evgenia Andreou" userId="8e89e74f621e7047" providerId="LiveId" clId="{EF53017E-E624-4052-9F70-6403551E244D}" dt="2025-11-28T02:19:23.922" v="39467" actId="20577"/>
           <ac:spMkLst>
             <pc:docMk/>
             <pc:sldMk cId="4231469208" sldId="267"/>
@@ -635,21 +651,6 @@
           </ac:picMkLst>
         </pc:picChg>
       </pc:sldChg>
-      <pc:sldChg chg="addSp delSp modSp new mod ord modShow">
-        <pc:chgData name="Evgenia Andreou" userId="8e89e74f621e7047" providerId="LiveId" clId="{EF53017E-E624-4052-9F70-6403551E244D}" dt="2025-10-28T08:01:11.467" v="33717" actId="20577"/>
-        <pc:sldMkLst>
-          <pc:docMk/>
-          <pc:sldMk cId="311389722" sldId="275"/>
-        </pc:sldMkLst>
-        <pc:spChg chg="mod">
-          <ac:chgData name="Evgenia Andreou" userId="8e89e74f621e7047" providerId="LiveId" clId="{EF53017E-E624-4052-9F70-6403551E244D}" dt="2025-10-28T08:01:11.467" v="33717" actId="20577"/>
-          <ac:spMkLst>
-            <pc:docMk/>
-            <pc:sldMk cId="311389722" sldId="275"/>
-            <ac:spMk id="3" creationId="{C743E199-295C-C3F2-FEEF-357550E7830B}"/>
-          </ac:spMkLst>
-        </pc:spChg>
-      </pc:sldChg>
       <pc:sldChg chg="addSp delSp modSp new mod setBg">
         <pc:chgData name="Evgenia Andreou" userId="8e89e74f621e7047" providerId="LiveId" clId="{EF53017E-E624-4052-9F70-6403551E244D}" dt="2025-11-25T20:55:08.907" v="38987" actId="1037"/>
         <pc:sldMkLst>
@@ -706,21 +707,13 @@
         </pc:picChg>
       </pc:sldChg>
       <pc:sldChg chg="addSp delSp modSp new mod">
-        <pc:chgData name="Evgenia Andreou" userId="8e89e74f621e7047" providerId="LiveId" clId="{EF53017E-E624-4052-9F70-6403551E244D}" dt="2025-11-27T02:01:43.843" v="39328" actId="20577"/>
+        <pc:chgData name="Evgenia Andreou" userId="8e89e74f621e7047" providerId="LiveId" clId="{EF53017E-E624-4052-9F70-6403551E244D}" dt="2025-11-28T03:42:35.836" v="40296" actId="113"/>
         <pc:sldMkLst>
           <pc:docMk/>
           <pc:sldMk cId="2946716891" sldId="277"/>
         </pc:sldMkLst>
         <pc:spChg chg="mod">
-          <ac:chgData name="Evgenia Andreou" userId="8e89e74f621e7047" providerId="LiveId" clId="{EF53017E-E624-4052-9F70-6403551E244D}" dt="2025-10-28T00:22:20.334" v="32448" actId="692"/>
-          <ac:spMkLst>
-            <pc:docMk/>
-            <pc:sldMk cId="2946716891" sldId="277"/>
-            <ac:spMk id="2" creationId="{FB03F8E8-2E98-47AD-EA90-7034E59DE430}"/>
-          </ac:spMkLst>
-        </pc:spChg>
-        <pc:spChg chg="mod">
-          <ac:chgData name="Evgenia Andreou" userId="8e89e74f621e7047" providerId="LiveId" clId="{EF53017E-E624-4052-9F70-6403551E244D}" dt="2025-11-27T02:01:03.045" v="39320" actId="179"/>
+          <ac:chgData name="Evgenia Andreou" userId="8e89e74f621e7047" providerId="LiveId" clId="{EF53017E-E624-4052-9F70-6403551E244D}" dt="2025-11-28T03:18:51.895" v="40159" actId="20577"/>
           <ac:spMkLst>
             <pc:docMk/>
             <pc:sldMk cId="2946716891" sldId="277"/>
@@ -728,7 +721,7 @@
           </ac:spMkLst>
         </pc:spChg>
         <pc:spChg chg="mod">
-          <ac:chgData name="Evgenia Andreou" userId="8e89e74f621e7047" providerId="LiveId" clId="{EF53017E-E624-4052-9F70-6403551E244D}" dt="2025-11-27T02:01:43.843" v="39328" actId="20577"/>
+          <ac:chgData name="Evgenia Andreou" userId="8e89e74f621e7047" providerId="LiveId" clId="{EF53017E-E624-4052-9F70-6403551E244D}" dt="2025-11-28T03:42:35.836" v="40296" actId="113"/>
           <ac:spMkLst>
             <pc:docMk/>
             <pc:sldMk cId="2946716891" sldId="277"/>
@@ -753,21 +746,13 @@
         </pc:spChg>
       </pc:sldChg>
       <pc:sldChg chg="addSp delSp modSp new mod">
-        <pc:chgData name="Evgenia Andreou" userId="8e89e74f621e7047" providerId="LiveId" clId="{EF53017E-E624-4052-9F70-6403551E244D}" dt="2025-11-23T03:14:03.926" v="38266" actId="255"/>
+        <pc:chgData name="Evgenia Andreou" userId="8e89e74f621e7047" providerId="LiveId" clId="{EF53017E-E624-4052-9F70-6403551E244D}" dt="2025-11-28T02:43:35.062" v="39858" actId="20577"/>
         <pc:sldMkLst>
           <pc:docMk/>
           <pc:sldMk cId="1725771169" sldId="278"/>
         </pc:sldMkLst>
         <pc:spChg chg="mod">
-          <ac:chgData name="Evgenia Andreou" userId="8e89e74f621e7047" providerId="LiveId" clId="{EF53017E-E624-4052-9F70-6403551E244D}" dt="2025-10-28T00:38:05.658" v="32980" actId="1076"/>
-          <ac:spMkLst>
-            <pc:docMk/>
-            <pc:sldMk cId="1725771169" sldId="278"/>
-            <ac:spMk id="2" creationId="{691FB1F2-9B2C-952D-6552-CDCF58BA3473}"/>
-          </ac:spMkLst>
-        </pc:spChg>
-        <pc:spChg chg="mod">
-          <ac:chgData name="Evgenia Andreou" userId="8e89e74f621e7047" providerId="LiveId" clId="{EF53017E-E624-4052-9F70-6403551E244D}" dt="2025-11-23T03:14:03.926" v="38266" actId="255"/>
+          <ac:chgData name="Evgenia Andreou" userId="8e89e74f621e7047" providerId="LiveId" clId="{EF53017E-E624-4052-9F70-6403551E244D}" dt="2025-11-28T02:43:35.062" v="39858" actId="20577"/>
           <ac:spMkLst>
             <pc:docMk/>
             <pc:sldMk cId="1725771169" sldId="278"/>
@@ -789,14 +774,6 @@
           <pc:docMk/>
           <pc:sldMk cId="1267936960" sldId="279"/>
         </pc:sldMkLst>
-        <pc:spChg chg="mod">
-          <ac:chgData name="Evgenia Andreou" userId="8e89e74f621e7047" providerId="LiveId" clId="{EF53017E-E624-4052-9F70-6403551E244D}" dt="2025-10-28T00:08:13.671" v="32241" actId="1076"/>
-          <ac:spMkLst>
-            <pc:docMk/>
-            <pc:sldMk cId="1267936960" sldId="279"/>
-            <ac:spMk id="2" creationId="{0C918C95-FA1E-7B34-5FD5-342E1E438703}"/>
-          </ac:spMkLst>
-        </pc:spChg>
         <pc:picChg chg="add mod">
           <ac:chgData name="Evgenia Andreou" userId="8e89e74f621e7047" providerId="LiveId" clId="{EF53017E-E624-4052-9F70-6403551E244D}" dt="2025-11-25T20:55:16.235" v="38988" actId="1440"/>
           <ac:picMkLst>
@@ -831,7 +808,7 @@
         </pc:picChg>
       </pc:sldChg>
       <pc:sldChg chg="addSp delSp modSp new mod setBg modClrScheme chgLayout">
-        <pc:chgData name="Evgenia Andreou" userId="8e89e74f621e7047" providerId="LiveId" clId="{EF53017E-E624-4052-9F70-6403551E244D}" dt="2025-11-23T03:24:30.164" v="38377" actId="20577"/>
+        <pc:chgData name="Evgenia Andreou" userId="8e89e74f621e7047" providerId="LiveId" clId="{EF53017E-E624-4052-9F70-6403551E244D}" dt="2025-11-28T02:04:59.020" v="39378" actId="1036"/>
         <pc:sldMkLst>
           <pc:docMk/>
           <pc:sldMk cId="2646428108" sldId="280"/>
@@ -877,7 +854,7 @@
           </ac:spMkLst>
         </pc:spChg>
         <pc:graphicFrameChg chg="add mod modGraphic">
-          <ac:chgData name="Evgenia Andreou" userId="8e89e74f621e7047" providerId="LiveId" clId="{EF53017E-E624-4052-9F70-6403551E244D}" dt="2025-11-23T03:24:30.164" v="38377" actId="20577"/>
+          <ac:chgData name="Evgenia Andreou" userId="8e89e74f621e7047" providerId="LiveId" clId="{EF53017E-E624-4052-9F70-6403551E244D}" dt="2025-11-28T02:04:59.020" v="39378" actId="1036"/>
           <ac:graphicFrameMkLst>
             <pc:docMk/>
             <pc:sldMk cId="2646428108" sldId="280"/>
@@ -886,13 +863,13 @@
         </pc:graphicFrameChg>
       </pc:sldChg>
       <pc:sldChg chg="addSp delSp modSp new mod setBg">
-        <pc:chgData name="Evgenia Andreou" userId="8e89e74f621e7047" providerId="LiveId" clId="{EF53017E-E624-4052-9F70-6403551E244D}" dt="2025-11-23T02:46:58.276" v="38071" actId="6549"/>
+        <pc:chgData name="Evgenia Andreou" userId="8e89e74f621e7047" providerId="LiveId" clId="{EF53017E-E624-4052-9F70-6403551E244D}" dt="2025-11-28T03:25:27.697" v="40189" actId="20577"/>
         <pc:sldMkLst>
           <pc:docMk/>
           <pc:sldMk cId="2935283230" sldId="281"/>
         </pc:sldMkLst>
         <pc:spChg chg="mod">
-          <ac:chgData name="Evgenia Andreou" userId="8e89e74f621e7047" providerId="LiveId" clId="{EF53017E-E624-4052-9F70-6403551E244D}" dt="2025-11-21T01:03:26.053" v="35229" actId="1076"/>
+          <ac:chgData name="Evgenia Andreou" userId="8e89e74f621e7047" providerId="LiveId" clId="{EF53017E-E624-4052-9F70-6403551E244D}" dt="2025-11-28T02:09:09.328" v="39382" actId="14100"/>
           <ac:spMkLst>
             <pc:docMk/>
             <pc:sldMk cId="2935283230" sldId="281"/>
@@ -900,7 +877,7 @@
           </ac:spMkLst>
         </pc:spChg>
         <pc:spChg chg="mod">
-          <ac:chgData name="Evgenia Andreou" userId="8e89e74f621e7047" providerId="LiveId" clId="{EF53017E-E624-4052-9F70-6403551E244D}" dt="2025-11-23T02:43:06.040" v="38065" actId="20577"/>
+          <ac:chgData name="Evgenia Andreou" userId="8e89e74f621e7047" providerId="LiveId" clId="{EF53017E-E624-4052-9F70-6403551E244D}" dt="2025-11-28T02:10:00.756" v="39403" actId="1036"/>
           <ac:spMkLst>
             <pc:docMk/>
             <pc:sldMk cId="2935283230" sldId="281"/>
@@ -908,7 +885,7 @@
           </ac:spMkLst>
         </pc:spChg>
         <pc:spChg chg="add mod">
-          <ac:chgData name="Evgenia Andreou" userId="8e89e74f621e7047" providerId="LiveId" clId="{EF53017E-E624-4052-9F70-6403551E244D}" dt="2025-11-23T02:42:57.852" v="38059" actId="21"/>
+          <ac:chgData name="Evgenia Andreou" userId="8e89e74f621e7047" providerId="LiveId" clId="{EF53017E-E624-4052-9F70-6403551E244D}" dt="2025-11-28T02:10:07.001" v="39406" actId="1036"/>
           <ac:spMkLst>
             <pc:docMk/>
             <pc:sldMk cId="2935283230" sldId="281"/>
@@ -916,7 +893,7 @@
           </ac:spMkLst>
         </pc:spChg>
         <pc:spChg chg="add mod">
-          <ac:chgData name="Evgenia Andreou" userId="8e89e74f621e7047" providerId="LiveId" clId="{EF53017E-E624-4052-9F70-6403551E244D}" dt="2025-11-21T01:03:33.092" v="35232" actId="1076"/>
+          <ac:chgData name="Evgenia Andreou" userId="8e89e74f621e7047" providerId="LiveId" clId="{EF53017E-E624-4052-9F70-6403551E244D}" dt="2025-11-28T02:10:00.756" v="39403" actId="1036"/>
           <ac:spMkLst>
             <pc:docMk/>
             <pc:sldMk cId="2935283230" sldId="281"/>
@@ -924,7 +901,7 @@
           </ac:spMkLst>
         </pc:spChg>
         <pc:spChg chg="add mod">
-          <ac:chgData name="Evgenia Andreou" userId="8e89e74f621e7047" providerId="LiveId" clId="{EF53017E-E624-4052-9F70-6403551E244D}" dt="2025-11-21T01:03:49.669" v="35236" actId="1076"/>
+          <ac:chgData name="Evgenia Andreou" userId="8e89e74f621e7047" providerId="LiveId" clId="{EF53017E-E624-4052-9F70-6403551E244D}" dt="2025-11-28T02:10:00.756" v="39403" actId="1036"/>
           <ac:spMkLst>
             <pc:docMk/>
             <pc:sldMk cId="2935283230" sldId="281"/>
@@ -932,7 +909,7 @@
           </ac:spMkLst>
         </pc:spChg>
         <pc:spChg chg="add mod">
-          <ac:chgData name="Evgenia Andreou" userId="8e89e74f621e7047" providerId="LiveId" clId="{EF53017E-E624-4052-9F70-6403551E244D}" dt="2025-11-23T02:46:58.276" v="38071" actId="6549"/>
+          <ac:chgData name="Evgenia Andreou" userId="8e89e74f621e7047" providerId="LiveId" clId="{EF53017E-E624-4052-9F70-6403551E244D}" dt="2025-11-28T03:25:27.697" v="40189" actId="20577"/>
           <ac:spMkLst>
             <pc:docMk/>
             <pc:sldMk cId="2935283230" sldId="281"/>
@@ -941,13 +918,13 @@
         </pc:spChg>
       </pc:sldChg>
       <pc:sldChg chg="addSp delSp modSp new mod ord">
-        <pc:chgData name="Evgenia Andreou" userId="8e89e74f621e7047" providerId="LiveId" clId="{EF53017E-E624-4052-9F70-6403551E244D}" dt="2025-11-27T00:27:12.173" v="39242" actId="207"/>
+        <pc:chgData name="Evgenia Andreou" userId="8e89e74f621e7047" providerId="LiveId" clId="{EF53017E-E624-4052-9F70-6403551E244D}" dt="2025-11-28T04:01:49.488" v="40319" actId="20577"/>
         <pc:sldMkLst>
           <pc:docMk/>
           <pc:sldMk cId="1583996442" sldId="284"/>
         </pc:sldMkLst>
         <pc:spChg chg="mod">
-          <ac:chgData name="Evgenia Andreou" userId="8e89e74f621e7047" providerId="LiveId" clId="{EF53017E-E624-4052-9F70-6403551E244D}" dt="2025-10-28T00:19:04.723" v="32386" actId="1076"/>
+          <ac:chgData name="Evgenia Andreou" userId="8e89e74f621e7047" providerId="LiveId" clId="{EF53017E-E624-4052-9F70-6403551E244D}" dt="2025-11-28T04:01:49.488" v="40319" actId="20577"/>
           <ac:spMkLst>
             <pc:docMk/>
             <pc:sldMk cId="1583996442" sldId="284"/>
@@ -963,7 +940,7 @@
           </ac:spMkLst>
         </pc:spChg>
         <pc:spChg chg="add mod">
-          <ac:chgData name="Evgenia Andreou" userId="8e89e74f621e7047" providerId="LiveId" clId="{EF53017E-E624-4052-9F70-6403551E244D}" dt="2025-11-27T00:27:12.173" v="39242" actId="207"/>
+          <ac:chgData name="Evgenia Andreou" userId="8e89e74f621e7047" providerId="LiveId" clId="{EF53017E-E624-4052-9F70-6403551E244D}" dt="2025-11-28T03:10:27.844" v="39971" actId="27636"/>
           <ac:spMkLst>
             <pc:docMk/>
             <pc:sldMk cId="1583996442" sldId="284"/>
@@ -971,7 +948,7 @@
           </ac:spMkLst>
         </pc:spChg>
         <pc:spChg chg="add mod">
-          <ac:chgData name="Evgenia Andreou" userId="8e89e74f621e7047" providerId="LiveId" clId="{EF53017E-E624-4052-9F70-6403551E244D}" dt="2025-11-23T03:01:53.955" v="38131" actId="20577"/>
+          <ac:chgData name="Evgenia Andreou" userId="8e89e74f621e7047" providerId="LiveId" clId="{EF53017E-E624-4052-9F70-6403551E244D}" dt="2025-11-28T03:38:44.855" v="40234" actId="20577"/>
           <ac:spMkLst>
             <pc:docMk/>
             <pc:sldMk cId="1583996442" sldId="284"/>
@@ -1025,8 +1002,8 @@
           </ac:spMkLst>
         </pc:spChg>
       </pc:sldChg>
-      <pc:sldChg chg="addSp delSp modSp new mod">
-        <pc:chgData name="Evgenia Andreou" userId="8e89e74f621e7047" providerId="LiveId" clId="{EF53017E-E624-4052-9F70-6403551E244D}" dt="2025-11-24T05:10:31.655" v="38581" actId="1076"/>
+      <pc:sldChg chg="addSp delSp modSp new mod ord">
+        <pc:chgData name="Evgenia Andreou" userId="8e89e74f621e7047" providerId="LiveId" clId="{EF53017E-E624-4052-9F70-6403551E244D}" dt="2025-11-28T02:57:43.374" v="39882"/>
         <pc:sldMkLst>
           <pc:docMk/>
           <pc:sldMk cId="3019405516" sldId="291"/>
@@ -1057,13 +1034,13 @@
         </pc:picChg>
       </pc:sldChg>
       <pc:sldChg chg="addSp delSp modSp new mod">
-        <pc:chgData name="Evgenia Andreou" userId="8e89e74f621e7047" providerId="LiveId" clId="{EF53017E-E624-4052-9F70-6403551E244D}" dt="2025-11-27T02:28:14.701" v="39337" actId="1440"/>
+        <pc:chgData name="Evgenia Andreou" userId="8e89e74f621e7047" providerId="LiveId" clId="{EF53017E-E624-4052-9F70-6403551E244D}" dt="2025-11-28T03:12:32.118" v="40093" actId="1035"/>
         <pc:sldMkLst>
           <pc:docMk/>
           <pc:sldMk cId="634262476" sldId="292"/>
         </pc:sldMkLst>
         <pc:spChg chg="add mod">
-          <ac:chgData name="Evgenia Andreou" userId="8e89e74f621e7047" providerId="LiveId" clId="{EF53017E-E624-4052-9F70-6403551E244D}" dt="2025-11-27T02:13:54.228" v="39333" actId="14100"/>
+          <ac:chgData name="Evgenia Andreou" userId="8e89e74f621e7047" providerId="LiveId" clId="{EF53017E-E624-4052-9F70-6403551E244D}" dt="2025-11-28T02:29:26.052" v="39484" actId="1076"/>
           <ac:spMkLst>
             <pc:docMk/>
             <pc:sldMk cId="634262476" sldId="292"/>
@@ -1071,7 +1048,7 @@
           </ac:spMkLst>
         </pc:spChg>
         <pc:spChg chg="add mod">
-          <ac:chgData name="Evgenia Andreou" userId="8e89e74f621e7047" providerId="LiveId" clId="{EF53017E-E624-4052-9F70-6403551E244D}" dt="2025-11-23T03:41:28.490" v="38427" actId="1076"/>
+          <ac:chgData name="Evgenia Andreou" userId="8e89e74f621e7047" providerId="LiveId" clId="{EF53017E-E624-4052-9F70-6403551E244D}" dt="2025-11-28T03:12:32.118" v="40093" actId="1035"/>
           <ac:spMkLst>
             <pc:docMk/>
             <pc:sldMk cId="634262476" sldId="292"/>
@@ -1087,7 +1064,7 @@
           </ac:spMkLst>
         </pc:spChg>
         <pc:picChg chg="add mod">
-          <ac:chgData name="Evgenia Andreou" userId="8e89e74f621e7047" providerId="LiveId" clId="{EF53017E-E624-4052-9F70-6403551E244D}" dt="2025-11-27T02:28:14.701" v="39337" actId="1440"/>
+          <ac:chgData name="Evgenia Andreou" userId="8e89e74f621e7047" providerId="LiveId" clId="{EF53017E-E624-4052-9F70-6403551E244D}" dt="2025-11-28T02:29:53.589" v="39494" actId="14100"/>
           <ac:picMkLst>
             <pc:docMk/>
             <pc:sldMk cId="634262476" sldId="292"/>
@@ -1095,7 +1072,7 @@
           </ac:picMkLst>
         </pc:picChg>
         <pc:picChg chg="add mod">
-          <ac:chgData name="Evgenia Andreou" userId="8e89e74f621e7047" providerId="LiveId" clId="{EF53017E-E624-4052-9F70-6403551E244D}" dt="2025-11-27T02:28:14.701" v="39337" actId="1440"/>
+          <ac:chgData name="Evgenia Andreou" userId="8e89e74f621e7047" providerId="LiveId" clId="{EF53017E-E624-4052-9F70-6403551E244D}" dt="2025-11-28T02:29:35.640" v="39488" actId="1076"/>
           <ac:picMkLst>
             <pc:docMk/>
             <pc:sldMk cId="634262476" sldId="292"/>
@@ -1103,7 +1080,7 @@
           </ac:picMkLst>
         </pc:picChg>
         <pc:picChg chg="add mod">
-          <ac:chgData name="Evgenia Andreou" userId="8e89e74f621e7047" providerId="LiveId" clId="{EF53017E-E624-4052-9F70-6403551E244D}" dt="2025-11-27T02:28:14.701" v="39337" actId="1440"/>
+          <ac:chgData name="Evgenia Andreou" userId="8e89e74f621e7047" providerId="LiveId" clId="{EF53017E-E624-4052-9F70-6403551E244D}" dt="2025-11-28T02:29:34.462" v="39487" actId="1076"/>
           <ac:picMkLst>
             <pc:docMk/>
             <pc:sldMk cId="634262476" sldId="292"/>
@@ -1119,7 +1096,7 @@
           </ac:picMkLst>
         </pc:picChg>
         <pc:picChg chg="add mod">
-          <ac:chgData name="Evgenia Andreou" userId="8e89e74f621e7047" providerId="LiveId" clId="{EF53017E-E624-4052-9F70-6403551E244D}" dt="2025-11-27T02:28:14.701" v="39337" actId="1440"/>
+          <ac:chgData name="Evgenia Andreou" userId="8e89e74f621e7047" providerId="LiveId" clId="{EF53017E-E624-4052-9F70-6403551E244D}" dt="2025-11-28T02:29:47.543" v="39492" actId="14100"/>
           <ac:picMkLst>
             <pc:docMk/>
             <pc:sldMk cId="634262476" sldId="292"/>
@@ -1127,14 +1104,38 @@
           </ac:picMkLst>
         </pc:picChg>
       </pc:sldChg>
-      <pc:sldChg chg="addSp delSp modSp new mod">
-        <pc:chgData name="Evgenia Andreou" userId="8e89e74f621e7047" providerId="LiveId" clId="{EF53017E-E624-4052-9F70-6403551E244D}" dt="2025-11-25T23:57:12.479" v="39080" actId="14100"/>
+      <pc:sldChg chg="addSp delSp modSp new mod ord">
+        <pc:chgData name="Evgenia Andreou" userId="8e89e74f621e7047" providerId="LiveId" clId="{EF53017E-E624-4052-9F70-6403551E244D}" dt="2025-11-28T03:09:52.882" v="39965" actId="20577"/>
         <pc:sldMkLst>
           <pc:docMk/>
           <pc:sldMk cId="3402175388" sldId="293"/>
         </pc:sldMkLst>
+        <pc:spChg chg="add del">
+          <ac:chgData name="Evgenia Andreou" userId="8e89e74f621e7047" providerId="LiveId" clId="{EF53017E-E624-4052-9F70-6403551E244D}" dt="2025-11-28T02:25:43.568" v="39471" actId="11529"/>
+          <ac:spMkLst>
+            <pc:docMk/>
+            <pc:sldMk cId="3402175388" sldId="293"/>
+            <ac:spMk id="2" creationId="{6416E1EA-AB85-3440-CA7E-10D7661F98F6}"/>
+          </ac:spMkLst>
+        </pc:spChg>
         <pc:spChg chg="add mod">
-          <ac:chgData name="Evgenia Andreou" userId="8e89e74f621e7047" providerId="LiveId" clId="{EF53017E-E624-4052-9F70-6403551E244D}" dt="2025-11-23T01:49:31.724" v="37738" actId="27636"/>
+          <ac:chgData name="Evgenia Andreou" userId="8e89e74f621e7047" providerId="LiveId" clId="{EF53017E-E624-4052-9F70-6403551E244D}" dt="2025-11-28T03:06:51.111" v="39960" actId="208"/>
+          <ac:spMkLst>
+            <pc:docMk/>
+            <pc:sldMk cId="3402175388" sldId="293"/>
+            <ac:spMk id="3" creationId="{F10D7D99-F5D5-516F-7D30-BB964DA8BD45}"/>
+          </ac:spMkLst>
+        </pc:spChg>
+        <pc:spChg chg="add mod">
+          <ac:chgData name="Evgenia Andreou" userId="8e89e74f621e7047" providerId="LiveId" clId="{EF53017E-E624-4052-9F70-6403551E244D}" dt="2025-11-28T03:07:02.603" v="39962" actId="1076"/>
+          <ac:spMkLst>
+            <pc:docMk/>
+            <pc:sldMk cId="3402175388" sldId="293"/>
+            <ac:spMk id="4" creationId="{59382B80-BBED-E474-12E9-F26C56CAA46D}"/>
+          </ac:spMkLst>
+        </pc:spChg>
+        <pc:spChg chg="add mod">
+          <ac:chgData name="Evgenia Andreou" userId="8e89e74f621e7047" providerId="LiveId" clId="{EF53017E-E624-4052-9F70-6403551E244D}" dt="2025-11-28T03:07:36.968" v="39963" actId="1076"/>
           <ac:spMkLst>
             <pc:docMk/>
             <pc:sldMk cId="3402175388" sldId="293"/>
@@ -1142,7 +1143,7 @@
           </ac:spMkLst>
         </pc:spChg>
         <pc:spChg chg="add mod">
-          <ac:chgData name="Evgenia Andreou" userId="8e89e74f621e7047" providerId="LiveId" clId="{EF53017E-E624-4052-9F70-6403551E244D}" dt="2025-11-25T01:21:50.103" v="38878" actId="1076"/>
+          <ac:chgData name="Evgenia Andreou" userId="8e89e74f621e7047" providerId="LiveId" clId="{EF53017E-E624-4052-9F70-6403551E244D}" dt="2025-11-28T03:09:52.882" v="39965" actId="20577"/>
           <ac:spMkLst>
             <pc:docMk/>
             <pc:sldMk cId="3402175388" sldId="293"/>
@@ -1150,7 +1151,7 @@
           </ac:spMkLst>
         </pc:spChg>
         <pc:picChg chg="add mod ord modCrop">
-          <ac:chgData name="Evgenia Andreou" userId="8e89e74f621e7047" providerId="LiveId" clId="{EF53017E-E624-4052-9F70-6403551E244D}" dt="2025-11-25T20:55:03.969" v="38984" actId="1440"/>
+          <ac:chgData name="Evgenia Andreou" userId="8e89e74f621e7047" providerId="LiveId" clId="{EF53017E-E624-4052-9F70-6403551E244D}" dt="2025-11-28T03:02:33.537" v="39884" actId="1076"/>
           <ac:picMkLst>
             <pc:docMk/>
             <pc:sldMk cId="3402175388" sldId="293"/>
@@ -1158,7 +1159,7 @@
           </ac:picMkLst>
         </pc:picChg>
         <pc:picChg chg="add mod ord modCrop">
-          <ac:chgData name="Evgenia Andreou" userId="8e89e74f621e7047" providerId="LiveId" clId="{EF53017E-E624-4052-9F70-6403551E244D}" dt="2025-11-25T20:55:03.969" v="38984" actId="1440"/>
+          <ac:chgData name="Evgenia Andreou" userId="8e89e74f621e7047" providerId="LiveId" clId="{EF53017E-E624-4052-9F70-6403551E244D}" dt="2025-11-28T03:02:33.537" v="39884" actId="1076"/>
           <ac:picMkLst>
             <pc:docMk/>
             <pc:sldMk cId="3402175388" sldId="293"/>
@@ -1166,7 +1167,7 @@
           </ac:picMkLst>
         </pc:picChg>
         <pc:picChg chg="add mod ord">
-          <ac:chgData name="Evgenia Andreou" userId="8e89e74f621e7047" providerId="LiveId" clId="{EF53017E-E624-4052-9F70-6403551E244D}" dt="2025-11-25T20:55:03.969" v="38984" actId="1440"/>
+          <ac:chgData name="Evgenia Andreou" userId="8e89e74f621e7047" providerId="LiveId" clId="{EF53017E-E624-4052-9F70-6403551E244D}" dt="2025-11-28T03:02:33.537" v="39884" actId="1076"/>
           <ac:picMkLst>
             <pc:docMk/>
             <pc:sldMk cId="3402175388" sldId="293"/>
@@ -1174,7 +1175,7 @@
           </ac:picMkLst>
         </pc:picChg>
         <pc:picChg chg="add mod ord modCrop">
-          <ac:chgData name="Evgenia Andreou" userId="8e89e74f621e7047" providerId="LiveId" clId="{EF53017E-E624-4052-9F70-6403551E244D}" dt="2025-11-25T23:57:12.479" v="39080" actId="14100"/>
+          <ac:chgData name="Evgenia Andreou" userId="8e89e74f621e7047" providerId="LiveId" clId="{EF53017E-E624-4052-9F70-6403551E244D}" dt="2025-11-28T03:02:33.537" v="39884" actId="1076"/>
           <ac:picMkLst>
             <pc:docMk/>
             <pc:sldMk cId="3402175388" sldId="293"/>
@@ -3583,7 +3584,7 @@
           </a:pPr>
           <a:r>
             <a:rPr lang="en-GB" sz="1500" dirty="0"/>
-            <a:t>Loss of funding :  </a:t>
+            <a:t>Loss of funding.  </a:t>
           </a:r>
           <a:br>
             <a:rPr lang="en-GB" sz="1500" dirty="0"/>
@@ -3642,7 +3643,13 @@
           </a:pPr>
           <a:r>
             <a:rPr lang="en-GB" sz="1500" dirty="0"/>
-            <a:t>Inefficient and slow scientific progress</a:t>
+            <a:t>Inefficient and slow scientific progress </a:t>
+          </a:r>
+          <a:r>
+            <a:rPr lang="en-GB" sz="1500" dirty="0">
+              <a:sym typeface="Wingdings" panose="05000000000000000000" pitchFamily="2" charset="2"/>
+            </a:rPr>
+            <a:t> Clinical practice impact</a:t>
           </a:r>
           <a:endParaRPr lang="en-US" sz="1500" dirty="0"/>
         </a:p>
@@ -4123,7 +4130,7 @@
           </a:pPr>
           <a:r>
             <a:rPr lang="en-GB" sz="1500" dirty="0"/>
-            <a:t>New Features, Formats, Interactions</a:t>
+            <a:t>New Features (e.g., Interactions, Formats)</a:t>
           </a:r>
         </a:p>
       </dgm:t>
@@ -5605,7 +5612,14 @@
         <a:p>
           <a:r>
             <a:rPr lang="en-US" sz="1800" b="0" dirty="0"/>
-            <a:t>Data Preparation</a:t>
+            <a:t>Model </a:t>
+          </a:r>
+          <a:br>
+            <a:rPr lang="en-US" sz="1800" b="0" dirty="0"/>
+          </a:br>
+          <a:r>
+            <a:rPr lang="en-US" sz="1800" b="0" dirty="0"/>
+            <a:t>Pre-Processing</a:t>
           </a:r>
           <a:endParaRPr lang="en-GB" sz="1800" dirty="0"/>
         </a:p>
@@ -6417,7 +6431,7 @@
           </a:pPr>
           <a:r>
             <a:rPr lang="en-GB" sz="1500" kern="1200" dirty="0"/>
-            <a:t>Loss of funding :  </a:t>
+            <a:t>Loss of funding.  </a:t>
           </a:r>
           <a:br>
             <a:rPr lang="en-GB" sz="1500" kern="1200" dirty="0"/>
@@ -6552,7 +6566,13 @@
           </a:pPr>
           <a:r>
             <a:rPr lang="en-GB" sz="1500" kern="1200" dirty="0"/>
-            <a:t>Inefficient and slow scientific progress</a:t>
+            <a:t>Inefficient and slow scientific progress </a:t>
+          </a:r>
+          <a:r>
+            <a:rPr lang="en-GB" sz="1500" kern="1200" dirty="0">
+              <a:sym typeface="Wingdings" panose="05000000000000000000" pitchFamily="2" charset="2"/>
+            </a:rPr>
+            <a:t> Clinical practice impact</a:t>
           </a:r>
           <a:endParaRPr lang="en-US" sz="1500" kern="1200" dirty="0"/>
         </a:p>
@@ -6822,7 +6842,7 @@
           </a:pPr>
           <a:r>
             <a:rPr lang="en-GB" sz="1500" kern="1200" dirty="0"/>
-            <a:t>New Features, Formats, Interactions</a:t>
+            <a:t>New Features (e.g., Interactions, Formats)</a:t>
           </a:r>
         </a:p>
       </dsp:txBody>
@@ -7580,7 +7600,14 @@
           </a:pPr>
           <a:r>
             <a:rPr lang="en-US" sz="1800" b="0" kern="1200" dirty="0"/>
-            <a:t>Data Preparation</a:t>
+            <a:t>Model </a:t>
+          </a:r>
+          <a:br>
+            <a:rPr lang="en-US" sz="1800" b="0" kern="1200" dirty="0"/>
+          </a:br>
+          <a:r>
+            <a:rPr lang="en-US" sz="1800" b="0" kern="1200" dirty="0"/>
+            <a:t>Pre-Processing</a:t>
           </a:r>
           <a:endParaRPr lang="en-GB" sz="1800" kern="1200" dirty="0"/>
         </a:p>
@@ -12501,7 +12528,7 @@
           <a:p>
             <a:fld id="{C1A9776D-B584-4D4B-981C-FA97E36C0636}" type="datetimeFigureOut">
               <a:rPr lang="en-GB" smtClean="0"/>
-              <a:t>27/11/2025</a:t>
+              <a:t>28/11/2025</a:t>
             </a:fld>
             <a:endParaRPr lang="en-GB"/>
           </a:p>
@@ -12701,7 +12728,7 @@
           <a:p>
             <a:fld id="{C1A9776D-B584-4D4B-981C-FA97E36C0636}" type="datetimeFigureOut">
               <a:rPr lang="en-GB" smtClean="0"/>
-              <a:t>27/11/2025</a:t>
+              <a:t>28/11/2025</a:t>
             </a:fld>
             <a:endParaRPr lang="en-GB"/>
           </a:p>
@@ -12911,7 +12938,7 @@
           <a:p>
             <a:fld id="{C1A9776D-B584-4D4B-981C-FA97E36C0636}" type="datetimeFigureOut">
               <a:rPr lang="en-GB" smtClean="0"/>
-              <a:t>27/11/2025</a:t>
+              <a:t>28/11/2025</a:t>
             </a:fld>
             <a:endParaRPr lang="en-GB"/>
           </a:p>
@@ -13111,7 +13138,7 @@
           <a:p>
             <a:fld id="{C1A9776D-B584-4D4B-981C-FA97E36C0636}" type="datetimeFigureOut">
               <a:rPr lang="en-GB" smtClean="0"/>
-              <a:t>27/11/2025</a:t>
+              <a:t>28/11/2025</a:t>
             </a:fld>
             <a:endParaRPr lang="en-GB"/>
           </a:p>
@@ -13387,7 +13414,7 @@
           <a:p>
             <a:fld id="{C1A9776D-B584-4D4B-981C-FA97E36C0636}" type="datetimeFigureOut">
               <a:rPr lang="en-GB" smtClean="0"/>
-              <a:t>27/11/2025</a:t>
+              <a:t>28/11/2025</a:t>
             </a:fld>
             <a:endParaRPr lang="en-GB"/>
           </a:p>
@@ -13655,7 +13682,7 @@
           <a:p>
             <a:fld id="{C1A9776D-B584-4D4B-981C-FA97E36C0636}" type="datetimeFigureOut">
               <a:rPr lang="en-GB" smtClean="0"/>
-              <a:t>27/11/2025</a:t>
+              <a:t>28/11/2025</a:t>
             </a:fld>
             <a:endParaRPr lang="en-GB"/>
           </a:p>
@@ -14070,7 +14097,7 @@
           <a:p>
             <a:fld id="{C1A9776D-B584-4D4B-981C-FA97E36C0636}" type="datetimeFigureOut">
               <a:rPr lang="en-GB" smtClean="0"/>
-              <a:t>27/11/2025</a:t>
+              <a:t>28/11/2025</a:t>
             </a:fld>
             <a:endParaRPr lang="en-GB"/>
           </a:p>
@@ -14212,7 +14239,7 @@
           <a:p>
             <a:fld id="{C1A9776D-B584-4D4B-981C-FA97E36C0636}" type="datetimeFigureOut">
               <a:rPr lang="en-GB" smtClean="0"/>
-              <a:t>27/11/2025</a:t>
+              <a:t>28/11/2025</a:t>
             </a:fld>
             <a:endParaRPr lang="en-GB"/>
           </a:p>
@@ -14325,7 +14352,7 @@
           <a:p>
             <a:fld id="{C1A9776D-B584-4D4B-981C-FA97E36C0636}" type="datetimeFigureOut">
               <a:rPr lang="en-GB" smtClean="0"/>
-              <a:t>27/11/2025</a:t>
+              <a:t>28/11/2025</a:t>
             </a:fld>
             <a:endParaRPr lang="en-GB"/>
           </a:p>
@@ -14638,7 +14665,7 @@
           <a:p>
             <a:fld id="{C1A9776D-B584-4D4B-981C-FA97E36C0636}" type="datetimeFigureOut">
               <a:rPr lang="en-GB" smtClean="0"/>
-              <a:t>27/11/2025</a:t>
+              <a:t>28/11/2025</a:t>
             </a:fld>
             <a:endParaRPr lang="en-GB"/>
           </a:p>
@@ -14927,7 +14954,7 @@
           <a:p>
             <a:fld id="{C1A9776D-B584-4D4B-981C-FA97E36C0636}" type="datetimeFigureOut">
               <a:rPr lang="en-GB" smtClean="0"/>
-              <a:t>27/11/2025</a:t>
+              <a:t>28/11/2025</a:t>
             </a:fld>
             <a:endParaRPr lang="en-GB"/>
           </a:p>
@@ -15183,7 +15210,7 @@
           <a:p>
             <a:fld id="{C1A9776D-B584-4D4B-981C-FA97E36C0636}" type="datetimeFigureOut">
               <a:rPr lang="en-GB" smtClean="0"/>
-              <a:t>27/11/2025</a:t>
+              <a:t>28/11/2025</a:t>
             </a:fld>
             <a:endParaRPr lang="en-GB"/>
           </a:p>
@@ -18136,7 +18163,7 @@
             </a:pPr>
             <a:r>
               <a:rPr lang="en-US" sz="1800" dirty="0"/>
-              <a:t>LightBoost outperformed</a:t>
+              <a:t>XGBoost, LightBoost outperformed</a:t>
             </a:r>
           </a:p>
           <a:p>
@@ -18190,7 +18217,7 @@
             <a:pPr lvl="1"/>
             <a:r>
               <a:rPr lang="en-US" sz="1800" dirty="0"/>
-              <a:t>Real world data (Unscaled, Missing etc.)</a:t>
+              <a:t>Real world data (Unscaled, Skewed, Missing etc.)</a:t>
             </a:r>
           </a:p>
           <a:p>
@@ -18298,949 +18325,6 @@
 </file>
 
 <file path=ppt/slides/slide18.xml><?xml version="1.0" encoding="utf-8"?>
-<p:sld xmlns:a="http://schemas.openxmlformats.org/drawingml/2006/main" xmlns:r="http://schemas.openxmlformats.org/officeDocument/2006/relationships" xmlns:p="http://schemas.openxmlformats.org/presentationml/2006/main">
-  <p:cSld>
-    <p:spTree>
-      <p:nvGrpSpPr>
-        <p:cNvPr id="1" name=""/>
-        <p:cNvGrpSpPr/>
-        <p:nvPr/>
-      </p:nvGrpSpPr>
-      <p:grpSpPr>
-        <a:xfrm>
-          <a:off x="0" y="0"/>
-          <a:ext cx="0" cy="0"/>
-          <a:chOff x="0" y="0"/>
-          <a:chExt cx="0" cy="0"/>
-        </a:xfrm>
-      </p:grpSpPr>
-      <p:sp>
-        <p:nvSpPr>
-          <p:cNvPr id="7" name="Title 6">
-            <a:extLst>
-              <a:ext uri="{FF2B5EF4-FFF2-40B4-BE49-F238E27FC236}">
-                <a16:creationId xmlns:a16="http://schemas.microsoft.com/office/drawing/2014/main" id="{0871E4C9-769D-7B7A-AAF4-AA60C90D5ABE}"/>
-              </a:ext>
-            </a:extLst>
-          </p:cNvPr>
-          <p:cNvSpPr>
-            <a:spLocks noGrp="1"/>
-          </p:cNvSpPr>
-          <p:nvPr>
-            <p:ph type="ctrTitle"/>
-          </p:nvPr>
-        </p:nvSpPr>
-        <p:spPr>
-          <a:xfrm>
-            <a:off x="609600" y="323769"/>
-            <a:ext cx="10972800" cy="457200"/>
-          </a:xfrm>
-          <a:ln>
-            <a:solidFill>
-              <a:schemeClr val="tx1"/>
-            </a:solidFill>
-          </a:ln>
-        </p:spPr>
-        <p:txBody>
-          <a:bodyPr anchor="ctr">
-            <a:noAutofit/>
-          </a:bodyPr>
-          <a:lstStyle/>
-          <a:p>
-            <a:r>
-              <a:rPr lang="en-US" sz="3000" b="1" dirty="0"/>
-              <a:t>Features ~ Phases</a:t>
-            </a:r>
-            <a:endParaRPr lang="en-GB" sz="3000" b="1" dirty="0"/>
-          </a:p>
-        </p:txBody>
-      </p:sp>
-      <p:sp>
-        <p:nvSpPr>
-          <p:cNvPr id="6" name="Text Placeholder 5">
-            <a:extLst>
-              <a:ext uri="{FF2B5EF4-FFF2-40B4-BE49-F238E27FC236}">
-                <a16:creationId xmlns:a16="http://schemas.microsoft.com/office/drawing/2014/main" id="{281D5DE3-2913-0700-B818-661824D303F3}"/>
-              </a:ext>
-            </a:extLst>
-          </p:cNvPr>
-          <p:cNvSpPr>
-            <a:spLocks noGrp="1"/>
-          </p:cNvSpPr>
-          <p:nvPr>
-            <p:ph type="subTitle" idx="1"/>
-          </p:nvPr>
-        </p:nvSpPr>
-        <p:spPr>
-          <a:xfrm>
-            <a:off x="599954" y="1620456"/>
-            <a:ext cx="5372583" cy="4780343"/>
-          </a:xfrm>
-          <a:noFill/>
-          <a:ln>
-            <a:solidFill>
-              <a:schemeClr val="tx1"/>
-            </a:solidFill>
-          </a:ln>
-        </p:spPr>
-        <p:txBody>
-          <a:bodyPr anchor="ctr">
-            <a:noAutofit/>
-          </a:bodyPr>
-          <a:lstStyle/>
-          <a:p>
-            <a:pPr algn="l"/>
-            <a:r>
-              <a:rPr lang="en-US" sz="2000" b="1" dirty="0"/>
-              <a:t>Phase 1:  </a:t>
-            </a:r>
-            <a:br>
-              <a:rPr lang="en-US" sz="2000" b="1" dirty="0"/>
-            </a:br>
-            <a:r>
-              <a:rPr lang="en-GB" sz="2000" b="1" dirty="0"/>
-              <a:t>Dose-Escalation | Human Pharmacology</a:t>
-            </a:r>
-            <a:endParaRPr lang="en-US" sz="2000" b="1" dirty="0"/>
-          </a:p>
-          <a:p>
-            <a:pPr marL="342900" indent="-342900" algn="l">
-              <a:buFont typeface="Arial" panose="020B0604020202020204" pitchFamily="34" charset="0"/>
-              <a:buChar char="•"/>
-            </a:pPr>
-            <a:r>
-              <a:rPr lang="en-US" sz="2000" dirty="0"/>
-              <a:t>Escalating dose ~ Adverse Events (e.g, MTD)</a:t>
-            </a:r>
-          </a:p>
-          <a:p>
-            <a:pPr marL="800100" lvl="1" indent="-342900" algn="l">
-              <a:buFont typeface="Arial" panose="020B0604020202020204" pitchFamily="34" charset="0"/>
-              <a:buChar char="•"/>
-            </a:pPr>
-            <a:endParaRPr lang="en-GB" dirty="0"/>
-          </a:p>
-          <a:p>
-            <a:pPr algn="l"/>
-            <a:r>
-              <a:rPr lang="en-GB" sz="2000" b="1" dirty="0"/>
-              <a:t>Phase 2:  </a:t>
-            </a:r>
-            <a:br>
-              <a:rPr lang="en-GB" sz="2000" b="1" dirty="0"/>
-            </a:br>
-            <a:r>
-              <a:rPr lang="en-GB" sz="2000" b="1" dirty="0"/>
-              <a:t>Therapeutic Exploratory</a:t>
-            </a:r>
-            <a:endParaRPr lang="en-US" sz="2000" b="1" dirty="0"/>
-          </a:p>
-          <a:p>
-            <a:pPr marL="342900" indent="-342900" algn="l">
-              <a:buFont typeface="Arial" panose="020B0604020202020204" pitchFamily="34" charset="0"/>
-              <a:buChar char="•"/>
-            </a:pPr>
-            <a:r>
-              <a:rPr lang="en-US" sz="2000" dirty="0"/>
-              <a:t>Safety, Pharmaco-dynamics-kinetics</a:t>
-            </a:r>
-          </a:p>
-          <a:p>
-            <a:pPr marL="342900" indent="-342900" algn="l">
-              <a:buFont typeface="Arial" panose="020B0604020202020204" pitchFamily="34" charset="0"/>
-              <a:buChar char="•"/>
-            </a:pPr>
-            <a:r>
-              <a:rPr lang="en-US" sz="2000" dirty="0"/>
-              <a:t>Early</a:t>
-            </a:r>
-            <a:r>
-              <a:rPr lang="el-GR" sz="2000" dirty="0"/>
-              <a:t> </a:t>
-            </a:r>
-            <a:r>
-              <a:rPr lang="en-US" sz="2000" dirty="0"/>
-              <a:t>efficacy data</a:t>
-            </a:r>
-            <a:r>
-              <a:rPr lang="el-GR" sz="2000" dirty="0"/>
-              <a:t> </a:t>
-            </a:r>
-            <a:r>
-              <a:rPr lang="en-GB" sz="2000" dirty="0"/>
-              <a:t>(transitional to phase 3)</a:t>
-            </a:r>
-          </a:p>
-        </p:txBody>
-      </p:sp>
-      <p:sp>
-        <p:nvSpPr>
-          <p:cNvPr id="2" name="Text Placeholder 5">
-            <a:extLst>
-              <a:ext uri="{FF2B5EF4-FFF2-40B4-BE49-F238E27FC236}">
-                <a16:creationId xmlns:a16="http://schemas.microsoft.com/office/drawing/2014/main" id="{86DB2BA2-C66A-5EC1-F184-C2C46DC0A30F}"/>
-              </a:ext>
-            </a:extLst>
-          </p:cNvPr>
-          <p:cNvSpPr txBox="1">
-            <a:spLocks/>
-          </p:cNvSpPr>
-          <p:nvPr/>
-        </p:nvSpPr>
-        <p:spPr>
-          <a:xfrm>
-            <a:off x="6219465" y="1620456"/>
-            <a:ext cx="5362935" cy="4780343"/>
-          </a:xfrm>
-          <a:prstGeom prst="rect">
-            <a:avLst/>
-          </a:prstGeom>
-          <a:ln>
-            <a:solidFill>
-              <a:schemeClr val="tx1"/>
-            </a:solidFill>
-          </a:ln>
-        </p:spPr>
-        <p:txBody>
-          <a:bodyPr vert="horz" lIns="91440" tIns="45720" rIns="91440" bIns="45720" rtlCol="0" anchor="ctr">
-            <a:noAutofit/>
-          </a:bodyPr>
-          <a:lstStyle>
-            <a:lvl1pPr marL="0" indent="0" algn="ctr" defTabSz="914400" rtl="0" eaLnBrk="1" latinLnBrk="0" hangingPunct="1">
-              <a:lnSpc>
-                <a:spcPct val="90000"/>
-              </a:lnSpc>
-              <a:spcBef>
-                <a:spcPts val="1000"/>
-              </a:spcBef>
-              <a:buFont typeface="Arial" panose="020B0604020202020204" pitchFamily="34" charset="0"/>
-              <a:buNone/>
-              <a:defRPr sz="2400" kern="1200">
-                <a:solidFill>
-                  <a:schemeClr val="tx1"/>
-                </a:solidFill>
-                <a:latin typeface="+mn-lt"/>
-                <a:ea typeface="+mn-ea"/>
-                <a:cs typeface="+mn-cs"/>
-              </a:defRPr>
-            </a:lvl1pPr>
-            <a:lvl2pPr marL="457200" indent="0" algn="ctr" defTabSz="914400" rtl="0" eaLnBrk="1" latinLnBrk="0" hangingPunct="1">
-              <a:lnSpc>
-                <a:spcPct val="90000"/>
-              </a:lnSpc>
-              <a:spcBef>
-                <a:spcPts val="500"/>
-              </a:spcBef>
-              <a:buFont typeface="Arial" panose="020B0604020202020204" pitchFamily="34" charset="0"/>
-              <a:buNone/>
-              <a:defRPr sz="2000" kern="1200">
-                <a:solidFill>
-                  <a:schemeClr val="tx1"/>
-                </a:solidFill>
-                <a:latin typeface="+mn-lt"/>
-                <a:ea typeface="+mn-ea"/>
-                <a:cs typeface="+mn-cs"/>
-              </a:defRPr>
-            </a:lvl2pPr>
-            <a:lvl3pPr marL="914400" indent="0" algn="ctr" defTabSz="914400" rtl="0" eaLnBrk="1" latinLnBrk="0" hangingPunct="1">
-              <a:lnSpc>
-                <a:spcPct val="90000"/>
-              </a:lnSpc>
-              <a:spcBef>
-                <a:spcPts val="500"/>
-              </a:spcBef>
-              <a:buFont typeface="Arial" panose="020B0604020202020204" pitchFamily="34" charset="0"/>
-              <a:buNone/>
-              <a:defRPr sz="1800" kern="1200">
-                <a:solidFill>
-                  <a:schemeClr val="tx1"/>
-                </a:solidFill>
-                <a:latin typeface="+mn-lt"/>
-                <a:ea typeface="+mn-ea"/>
-                <a:cs typeface="+mn-cs"/>
-              </a:defRPr>
-            </a:lvl3pPr>
-            <a:lvl4pPr marL="1371600" indent="0" algn="ctr" defTabSz="914400" rtl="0" eaLnBrk="1" latinLnBrk="0" hangingPunct="1">
-              <a:lnSpc>
-                <a:spcPct val="90000"/>
-              </a:lnSpc>
-              <a:spcBef>
-                <a:spcPts val="500"/>
-              </a:spcBef>
-              <a:buFont typeface="Arial" panose="020B0604020202020204" pitchFamily="34" charset="0"/>
-              <a:buNone/>
-              <a:defRPr sz="1600" kern="1200">
-                <a:solidFill>
-                  <a:schemeClr val="tx1"/>
-                </a:solidFill>
-                <a:latin typeface="+mn-lt"/>
-                <a:ea typeface="+mn-ea"/>
-                <a:cs typeface="+mn-cs"/>
-              </a:defRPr>
-            </a:lvl4pPr>
-            <a:lvl5pPr marL="1828800" indent="0" algn="ctr" defTabSz="914400" rtl="0" eaLnBrk="1" latinLnBrk="0" hangingPunct="1">
-              <a:lnSpc>
-                <a:spcPct val="90000"/>
-              </a:lnSpc>
-              <a:spcBef>
-                <a:spcPts val="500"/>
-              </a:spcBef>
-              <a:buFont typeface="Arial" panose="020B0604020202020204" pitchFamily="34" charset="0"/>
-              <a:buNone/>
-              <a:defRPr sz="1600" kern="1200">
-                <a:solidFill>
-                  <a:schemeClr val="tx1"/>
-                </a:solidFill>
-                <a:latin typeface="+mn-lt"/>
-                <a:ea typeface="+mn-ea"/>
-                <a:cs typeface="+mn-cs"/>
-              </a:defRPr>
-            </a:lvl5pPr>
-            <a:lvl6pPr marL="2286000" indent="0" algn="ctr" defTabSz="914400" rtl="0" eaLnBrk="1" latinLnBrk="0" hangingPunct="1">
-              <a:lnSpc>
-                <a:spcPct val="90000"/>
-              </a:lnSpc>
-              <a:spcBef>
-                <a:spcPts val="500"/>
-              </a:spcBef>
-              <a:buFont typeface="Arial" panose="020B0604020202020204" pitchFamily="34" charset="0"/>
-              <a:buNone/>
-              <a:defRPr sz="1600" kern="1200">
-                <a:solidFill>
-                  <a:schemeClr val="tx1"/>
-                </a:solidFill>
-                <a:latin typeface="+mn-lt"/>
-                <a:ea typeface="+mn-ea"/>
-                <a:cs typeface="+mn-cs"/>
-              </a:defRPr>
-            </a:lvl6pPr>
-            <a:lvl7pPr marL="2743200" indent="0" algn="ctr" defTabSz="914400" rtl="0" eaLnBrk="1" latinLnBrk="0" hangingPunct="1">
-              <a:lnSpc>
-                <a:spcPct val="90000"/>
-              </a:lnSpc>
-              <a:spcBef>
-                <a:spcPts val="500"/>
-              </a:spcBef>
-              <a:buFont typeface="Arial" panose="020B0604020202020204" pitchFamily="34" charset="0"/>
-              <a:buNone/>
-              <a:defRPr sz="1600" kern="1200">
-                <a:solidFill>
-                  <a:schemeClr val="tx1"/>
-                </a:solidFill>
-                <a:latin typeface="+mn-lt"/>
-                <a:ea typeface="+mn-ea"/>
-                <a:cs typeface="+mn-cs"/>
-              </a:defRPr>
-            </a:lvl7pPr>
-            <a:lvl8pPr marL="3200400" indent="0" algn="ctr" defTabSz="914400" rtl="0" eaLnBrk="1" latinLnBrk="0" hangingPunct="1">
-              <a:lnSpc>
-                <a:spcPct val="90000"/>
-              </a:lnSpc>
-              <a:spcBef>
-                <a:spcPts val="500"/>
-              </a:spcBef>
-              <a:buFont typeface="Arial" panose="020B0604020202020204" pitchFamily="34" charset="0"/>
-              <a:buNone/>
-              <a:defRPr sz="1600" kern="1200">
-                <a:solidFill>
-                  <a:schemeClr val="tx1"/>
-                </a:solidFill>
-                <a:latin typeface="+mn-lt"/>
-                <a:ea typeface="+mn-ea"/>
-                <a:cs typeface="+mn-cs"/>
-              </a:defRPr>
-            </a:lvl8pPr>
-            <a:lvl9pPr marL="3657600" indent="0" algn="ctr" defTabSz="914400" rtl="0" eaLnBrk="1" latinLnBrk="0" hangingPunct="1">
-              <a:lnSpc>
-                <a:spcPct val="90000"/>
-              </a:lnSpc>
-              <a:spcBef>
-                <a:spcPts val="500"/>
-              </a:spcBef>
-              <a:buFont typeface="Arial" panose="020B0604020202020204" pitchFamily="34" charset="0"/>
-              <a:buNone/>
-              <a:defRPr sz="1600" kern="1200">
-                <a:solidFill>
-                  <a:schemeClr val="tx1"/>
-                </a:solidFill>
-                <a:latin typeface="+mn-lt"/>
-                <a:ea typeface="+mn-ea"/>
-                <a:cs typeface="+mn-cs"/>
-              </a:defRPr>
-            </a:lvl9pPr>
-          </a:lstStyle>
-          <a:p>
-            <a:pPr marL="0" marR="0" lvl="0" indent="0" algn="l" defTabSz="914400" rtl="0" eaLnBrk="1" fontAlgn="auto" latinLnBrk="0" hangingPunct="1">
-              <a:lnSpc>
-                <a:spcPct val="90000"/>
-              </a:lnSpc>
-              <a:spcBef>
-                <a:spcPts val="1000"/>
-              </a:spcBef>
-              <a:spcAft>
-                <a:spcPts val="0"/>
-              </a:spcAft>
-              <a:buClrTx/>
-              <a:buSzTx/>
-              <a:buFont typeface="Arial" panose="020B0604020202020204" pitchFamily="34" charset="0"/>
-              <a:buNone/>
-              <a:tabLst/>
-              <a:defRPr/>
-            </a:pPr>
-            <a:r>
-              <a:rPr kumimoji="0" lang="en-GB" sz="2000" b="1" i="0" u="none" strike="noStrike" kern="1200" cap="none" spc="0" normalizeH="0" baseline="0" noProof="0" dirty="0">
-                <a:ln>
-                  <a:noFill/>
-                </a:ln>
-                <a:solidFill>
-                  <a:prstClr val="black"/>
-                </a:solidFill>
-                <a:effectLst/>
-                <a:uLnTx/>
-                <a:uFillTx/>
-                <a:latin typeface="Aptos" panose="02110004020202020204"/>
-                <a:ea typeface="+mn-ea"/>
-                <a:cs typeface="+mn-cs"/>
-              </a:rPr>
-              <a:t>Phase 3:</a:t>
-            </a:r>
-            <a:r>
-              <a:rPr kumimoji="0" lang="el-GR" sz="2000" b="1" i="0" u="none" strike="noStrike" kern="1200" cap="none" spc="0" normalizeH="0" baseline="0" noProof="0" dirty="0">
-                <a:ln>
-                  <a:noFill/>
-                </a:ln>
-                <a:solidFill>
-                  <a:prstClr val="black"/>
-                </a:solidFill>
-                <a:effectLst/>
-                <a:uLnTx/>
-                <a:uFillTx/>
-                <a:latin typeface="Aptos" panose="02110004020202020204"/>
-                <a:ea typeface="+mn-ea"/>
-                <a:cs typeface="+mn-cs"/>
-              </a:rPr>
-              <a:t> </a:t>
-            </a:r>
-            <a:br>
-              <a:rPr kumimoji="0" lang="en-GB" sz="2000" b="1" i="0" u="none" strike="noStrike" kern="1200" cap="none" spc="0" normalizeH="0" baseline="0" noProof="0" dirty="0">
-                <a:ln>
-                  <a:noFill/>
-                </a:ln>
-                <a:solidFill>
-                  <a:prstClr val="black"/>
-                </a:solidFill>
-                <a:effectLst/>
-                <a:uLnTx/>
-                <a:uFillTx/>
-                <a:latin typeface="Aptos" panose="02110004020202020204"/>
-                <a:ea typeface="+mn-ea"/>
-                <a:cs typeface="+mn-cs"/>
-              </a:rPr>
-            </a:br>
-            <a:r>
-              <a:rPr kumimoji="0" lang="en-GB" sz="2000" b="1" i="0" u="none" strike="noStrike" kern="1200" cap="none" spc="0" normalizeH="0" baseline="0" noProof="0" dirty="0">
-                <a:ln>
-                  <a:noFill/>
-                </a:ln>
-                <a:solidFill>
-                  <a:prstClr val="black"/>
-                </a:solidFill>
-                <a:effectLst/>
-                <a:uLnTx/>
-                <a:uFillTx/>
-                <a:latin typeface="Aptos" panose="02110004020202020204"/>
-                <a:ea typeface="+mn-ea"/>
-                <a:cs typeface="+mn-cs"/>
-              </a:rPr>
-              <a:t>Therapeutic Confirmatory | Comparative Efficacy</a:t>
-            </a:r>
-            <a:endParaRPr kumimoji="0" lang="en-US" sz="2000" b="1" i="0" u="none" strike="noStrike" kern="1200" cap="none" spc="0" normalizeH="0" baseline="0" noProof="0" dirty="0">
-              <a:ln>
-                <a:noFill/>
-              </a:ln>
-              <a:solidFill>
-                <a:prstClr val="black"/>
-              </a:solidFill>
-              <a:effectLst/>
-              <a:uLnTx/>
-              <a:uFillTx/>
-              <a:latin typeface="Aptos" panose="02110004020202020204"/>
-              <a:ea typeface="+mn-ea"/>
-              <a:cs typeface="+mn-cs"/>
-            </a:endParaRPr>
-          </a:p>
-          <a:p>
-            <a:pPr marL="342900" marR="0" lvl="0" indent="-342900" algn="l" defTabSz="914400" rtl="0" eaLnBrk="1" fontAlgn="auto" latinLnBrk="0" hangingPunct="1">
-              <a:lnSpc>
-                <a:spcPct val="90000"/>
-              </a:lnSpc>
-              <a:spcBef>
-                <a:spcPts val="1000"/>
-              </a:spcBef>
-              <a:spcAft>
-                <a:spcPts val="0"/>
-              </a:spcAft>
-              <a:buClrTx/>
-              <a:buSzTx/>
-              <a:buFont typeface="Arial" panose="020B0604020202020204" pitchFamily="34" charset="0"/>
-              <a:buChar char="•"/>
-              <a:tabLst/>
-              <a:defRPr/>
-            </a:pPr>
-            <a:r>
-              <a:rPr kumimoji="0" lang="en-US" sz="2000" b="0" i="0" u="none" strike="noStrike" kern="1200" cap="none" spc="0" normalizeH="0" baseline="0" noProof="0" dirty="0">
-                <a:ln>
-                  <a:noFill/>
-                </a:ln>
-                <a:solidFill>
-                  <a:prstClr val="black"/>
-                </a:solidFill>
-                <a:effectLst/>
-                <a:uLnTx/>
-                <a:uFillTx/>
-                <a:latin typeface="Aptos" panose="02110004020202020204"/>
-                <a:ea typeface="+mn-ea"/>
-                <a:cs typeface="+mn-cs"/>
-              </a:rPr>
-              <a:t>Treatments vs placebo/standard/active</a:t>
-            </a:r>
-          </a:p>
-          <a:p>
-            <a:pPr marL="342900" marR="0" lvl="0" indent="-342900" algn="l" defTabSz="914400" rtl="0" eaLnBrk="1" fontAlgn="auto" latinLnBrk="0" hangingPunct="1">
-              <a:lnSpc>
-                <a:spcPct val="90000"/>
-              </a:lnSpc>
-              <a:spcBef>
-                <a:spcPts val="1000"/>
-              </a:spcBef>
-              <a:spcAft>
-                <a:spcPts val="0"/>
-              </a:spcAft>
-              <a:buClrTx/>
-              <a:buSzTx/>
-              <a:buFont typeface="Arial" panose="020B0604020202020204" pitchFamily="34" charset="0"/>
-              <a:buChar char="•"/>
-              <a:tabLst/>
-              <a:defRPr/>
-            </a:pPr>
-            <a:r>
-              <a:rPr kumimoji="0" lang="en-US" sz="2000" b="0" i="0" u="none" strike="noStrike" kern="1200" cap="none" spc="0" normalizeH="0" baseline="0" noProof="0" dirty="0">
-                <a:ln>
-                  <a:noFill/>
-                </a:ln>
-                <a:solidFill>
-                  <a:prstClr val="black"/>
-                </a:solidFill>
-                <a:effectLst/>
-                <a:uLnTx/>
-                <a:uFillTx/>
-                <a:latin typeface="Aptos" panose="02110004020202020204"/>
-                <a:ea typeface="+mn-ea"/>
-                <a:cs typeface="+mn-cs"/>
-              </a:rPr>
-              <a:t>Frequent Adverse Events</a:t>
-            </a:r>
-            <a:endParaRPr kumimoji="0" lang="en-GB" sz="2000" b="0" i="0" u="none" strike="noStrike" kern="1200" cap="none" spc="0" normalizeH="0" baseline="0" noProof="0" dirty="0">
-              <a:ln>
-                <a:noFill/>
-              </a:ln>
-              <a:solidFill>
-                <a:prstClr val="black"/>
-              </a:solidFill>
-              <a:effectLst/>
-              <a:uLnTx/>
-              <a:uFillTx/>
-              <a:latin typeface="Aptos" panose="02110004020202020204"/>
-              <a:ea typeface="+mn-ea"/>
-              <a:cs typeface="+mn-cs"/>
-            </a:endParaRPr>
-          </a:p>
-          <a:p>
-            <a:pPr marL="342900" marR="0" lvl="0" indent="-342900" algn="l" defTabSz="914400" rtl="0" eaLnBrk="1" fontAlgn="auto" latinLnBrk="0" hangingPunct="1">
-              <a:lnSpc>
-                <a:spcPct val="90000"/>
-              </a:lnSpc>
-              <a:spcBef>
-                <a:spcPts val="1000"/>
-              </a:spcBef>
-              <a:spcAft>
-                <a:spcPts val="0"/>
-              </a:spcAft>
-              <a:buClrTx/>
-              <a:buSzTx/>
-              <a:buFont typeface="Arial" panose="020B0604020202020204" pitchFamily="34" charset="0"/>
-              <a:buChar char="•"/>
-              <a:tabLst/>
-              <a:defRPr/>
-            </a:pPr>
-            <a:r>
-              <a:rPr kumimoji="0" lang="en-US" sz="2000" b="0" i="0" u="none" strike="noStrike" kern="1200" cap="none" spc="0" normalizeH="0" baseline="0" noProof="0" dirty="0">
-                <a:ln>
-                  <a:noFill/>
-                </a:ln>
-                <a:solidFill>
-                  <a:prstClr val="black"/>
-                </a:solidFill>
-                <a:effectLst/>
-                <a:uLnTx/>
-                <a:uFillTx/>
-                <a:latin typeface="Aptos" panose="02110004020202020204"/>
-                <a:ea typeface="+mn-ea"/>
-                <a:cs typeface="+mn-cs"/>
-              </a:rPr>
-              <a:t>Scaled - </a:t>
-            </a:r>
-            <a:r>
-              <a:rPr kumimoji="0" lang="en-GB" sz="2000" b="0" i="0" u="none" strike="noStrike" kern="1200" cap="none" spc="0" normalizeH="0" baseline="0" noProof="0" dirty="0">
-                <a:ln>
-                  <a:noFill/>
-                </a:ln>
-                <a:solidFill>
-                  <a:prstClr val="black"/>
-                </a:solidFill>
-                <a:effectLst/>
-                <a:uLnTx/>
-                <a:uFillTx/>
-                <a:latin typeface="Aptos" panose="02110004020202020204"/>
-                <a:ea typeface="+mn-ea"/>
-                <a:cs typeface="+mn-cs"/>
-              </a:rPr>
-              <a:t>Study Design important</a:t>
-            </a:r>
-            <a:endParaRPr kumimoji="0" lang="en-US" sz="2000" b="0" i="0" u="none" strike="noStrike" kern="1200" cap="none" spc="0" normalizeH="0" baseline="0" noProof="0" dirty="0">
-              <a:ln>
-                <a:noFill/>
-              </a:ln>
-              <a:solidFill>
-                <a:prstClr val="black"/>
-              </a:solidFill>
-              <a:effectLst/>
-              <a:uLnTx/>
-              <a:uFillTx/>
-              <a:latin typeface="Aptos" panose="02110004020202020204"/>
-              <a:ea typeface="+mn-ea"/>
-              <a:cs typeface="+mn-cs"/>
-            </a:endParaRPr>
-          </a:p>
-          <a:p>
-            <a:pPr marL="800100" marR="0" lvl="1" indent="-342900" algn="l" defTabSz="914400" rtl="0" eaLnBrk="1" fontAlgn="auto" latinLnBrk="0" hangingPunct="1">
-              <a:lnSpc>
-                <a:spcPct val="90000"/>
-              </a:lnSpc>
-              <a:spcBef>
-                <a:spcPts val="500"/>
-              </a:spcBef>
-              <a:spcAft>
-                <a:spcPts val="0"/>
-              </a:spcAft>
-              <a:buClrTx/>
-              <a:buSzTx/>
-              <a:buFont typeface="Arial" panose="020B0604020202020204" pitchFamily="34" charset="0"/>
-              <a:buChar char="•"/>
-              <a:tabLst/>
-              <a:defRPr/>
-            </a:pPr>
-            <a:endParaRPr kumimoji="0" lang="en-US" sz="2000" b="0" i="0" u="none" strike="noStrike" kern="1200" cap="none" spc="0" normalizeH="0" baseline="0" noProof="0" dirty="0">
-              <a:ln>
-                <a:noFill/>
-              </a:ln>
-              <a:solidFill>
-                <a:prstClr val="black"/>
-              </a:solidFill>
-              <a:effectLst/>
-              <a:uLnTx/>
-              <a:uFillTx/>
-              <a:latin typeface="Aptos" panose="02110004020202020204"/>
-              <a:ea typeface="+mn-ea"/>
-              <a:cs typeface="+mn-cs"/>
-            </a:endParaRPr>
-          </a:p>
-          <a:p>
-            <a:pPr marL="0" marR="0" lvl="0" indent="0" algn="l" defTabSz="914400" rtl="0" eaLnBrk="1" fontAlgn="auto" latinLnBrk="0" hangingPunct="1">
-              <a:lnSpc>
-                <a:spcPct val="90000"/>
-              </a:lnSpc>
-              <a:spcBef>
-                <a:spcPts val="1000"/>
-              </a:spcBef>
-              <a:spcAft>
-                <a:spcPts val="0"/>
-              </a:spcAft>
-              <a:buClrTx/>
-              <a:buSzTx/>
-              <a:buFont typeface="Arial" panose="020B0604020202020204" pitchFamily="34" charset="0"/>
-              <a:buNone/>
-              <a:tabLst/>
-              <a:defRPr/>
-            </a:pPr>
-            <a:r>
-              <a:rPr kumimoji="0" lang="en-US" sz="2000" b="1" i="0" u="none" strike="noStrike" kern="1200" cap="none" spc="0" normalizeH="0" baseline="0" noProof="0" dirty="0">
-                <a:ln>
-                  <a:noFill/>
-                </a:ln>
-                <a:solidFill>
-                  <a:prstClr val="black"/>
-                </a:solidFill>
-                <a:effectLst/>
-                <a:uLnTx/>
-                <a:uFillTx/>
-                <a:latin typeface="Aptos" panose="02110004020202020204"/>
-                <a:ea typeface="+mn-ea"/>
-                <a:cs typeface="+mn-cs"/>
-              </a:rPr>
-              <a:t>Phase 4: </a:t>
-            </a:r>
-            <a:br>
-              <a:rPr kumimoji="0" lang="en-US" sz="2000" b="1" i="0" u="none" strike="noStrike" kern="1200" cap="none" spc="0" normalizeH="0" baseline="0" noProof="0" dirty="0">
-                <a:ln>
-                  <a:noFill/>
-                </a:ln>
-                <a:solidFill>
-                  <a:prstClr val="black"/>
-                </a:solidFill>
-                <a:effectLst/>
-                <a:uLnTx/>
-                <a:uFillTx/>
-                <a:latin typeface="Aptos" panose="02110004020202020204"/>
-                <a:ea typeface="+mn-ea"/>
-                <a:cs typeface="+mn-cs"/>
-              </a:rPr>
-            </a:br>
-            <a:r>
-              <a:rPr kumimoji="0" lang="en-US" sz="2000" b="1" i="0" u="none" strike="noStrike" kern="1200" cap="none" spc="0" normalizeH="0" baseline="0" noProof="0" dirty="0">
-                <a:ln>
-                  <a:noFill/>
-                </a:ln>
-                <a:solidFill>
-                  <a:prstClr val="black"/>
-                </a:solidFill>
-                <a:effectLst/>
-                <a:uLnTx/>
-                <a:uFillTx/>
-                <a:latin typeface="Aptos" panose="02110004020202020204"/>
-                <a:ea typeface="+mn-ea"/>
-                <a:cs typeface="+mn-cs"/>
-              </a:rPr>
-              <a:t>Therapeutic Use | Post-Marketing</a:t>
-            </a:r>
-          </a:p>
-          <a:p>
-            <a:pPr marL="342900" marR="0" lvl="0" indent="-342900" algn="l" defTabSz="914400" rtl="0" eaLnBrk="1" fontAlgn="auto" latinLnBrk="0" hangingPunct="1">
-              <a:lnSpc>
-                <a:spcPct val="90000"/>
-              </a:lnSpc>
-              <a:spcBef>
-                <a:spcPts val="1000"/>
-              </a:spcBef>
-              <a:spcAft>
-                <a:spcPts val="0"/>
-              </a:spcAft>
-              <a:buClrTx/>
-              <a:buSzTx/>
-              <a:buFont typeface="Arial" panose="020B0604020202020204" pitchFamily="34" charset="0"/>
-              <a:buChar char="•"/>
-              <a:tabLst/>
-              <a:defRPr/>
-            </a:pPr>
-            <a:r>
-              <a:rPr kumimoji="0" lang="en-US" sz="2000" b="0" i="0" u="none" strike="noStrike" kern="1200" cap="none" spc="0" normalizeH="0" baseline="0" noProof="0" dirty="0">
-                <a:ln>
-                  <a:noFill/>
-                </a:ln>
-                <a:solidFill>
-                  <a:prstClr val="black"/>
-                </a:solidFill>
-                <a:effectLst/>
-                <a:uLnTx/>
-                <a:uFillTx/>
-                <a:latin typeface="Aptos" panose="02110004020202020204"/>
-                <a:ea typeface="+mn-ea"/>
-                <a:cs typeface="+mn-cs"/>
-              </a:rPr>
-              <a:t>Rare Adverse Events</a:t>
-            </a:r>
-          </a:p>
-          <a:p>
-            <a:pPr marL="342900" marR="0" lvl="0" indent="-342900" algn="l" defTabSz="914400" rtl="0" eaLnBrk="1" fontAlgn="auto" latinLnBrk="0" hangingPunct="1">
-              <a:lnSpc>
-                <a:spcPct val="90000"/>
-              </a:lnSpc>
-              <a:spcBef>
-                <a:spcPts val="1000"/>
-              </a:spcBef>
-              <a:spcAft>
-                <a:spcPts val="0"/>
-              </a:spcAft>
-              <a:buClrTx/>
-              <a:buSzTx/>
-              <a:buFont typeface="Arial" panose="020B0604020202020204" pitchFamily="34" charset="0"/>
-              <a:buChar char="•"/>
-              <a:tabLst/>
-              <a:defRPr/>
-            </a:pPr>
-            <a:r>
-              <a:rPr kumimoji="0" lang="en-US" sz="2000" b="0" i="0" u="none" strike="noStrike" kern="1200" cap="none" spc="0" normalizeH="0" baseline="0" noProof="0" dirty="0">
-                <a:ln>
-                  <a:noFill/>
-                </a:ln>
-                <a:solidFill>
-                  <a:prstClr val="black"/>
-                </a:solidFill>
-                <a:effectLst/>
-                <a:uLnTx/>
-                <a:uFillTx/>
-                <a:latin typeface="Aptos" panose="02110004020202020204"/>
-                <a:ea typeface="+mn-ea"/>
-                <a:cs typeface="+mn-cs"/>
-              </a:rPr>
-              <a:t>Differences in dose-efficiency in population</a:t>
-            </a:r>
-          </a:p>
-          <a:p>
-            <a:pPr marL="342900" marR="0" lvl="0" indent="-342900" algn="l" defTabSz="914400" rtl="0" eaLnBrk="1" fontAlgn="auto" latinLnBrk="0" hangingPunct="1">
-              <a:lnSpc>
-                <a:spcPct val="90000"/>
-              </a:lnSpc>
-              <a:spcBef>
-                <a:spcPts val="1000"/>
-              </a:spcBef>
-              <a:spcAft>
-                <a:spcPts val="0"/>
-              </a:spcAft>
-              <a:buClrTx/>
-              <a:buSzTx/>
-              <a:buFont typeface="Arial" panose="020B0604020202020204" pitchFamily="34" charset="0"/>
-              <a:buChar char="•"/>
-              <a:tabLst/>
-              <a:defRPr/>
-            </a:pPr>
-            <a:r>
-              <a:rPr kumimoji="0" lang="en-US" sz="2000" b="0" i="0" u="none" strike="noStrike" kern="1200" cap="none" spc="0" normalizeH="0" baseline="0" noProof="0" dirty="0">
-                <a:ln>
-                  <a:noFill/>
-                </a:ln>
-                <a:solidFill>
-                  <a:prstClr val="black"/>
-                </a:solidFill>
-                <a:effectLst/>
-                <a:uLnTx/>
-                <a:uFillTx/>
-                <a:latin typeface="Aptos" panose="02110004020202020204"/>
-                <a:ea typeface="+mn-ea"/>
-                <a:cs typeface="+mn-cs"/>
-              </a:rPr>
-              <a:t>After drug approval - Cost Estimation</a:t>
-            </a:r>
-            <a:endParaRPr kumimoji="0" lang="en-GB" sz="2000" b="0" i="0" u="none" strike="noStrike" kern="1200" cap="none" spc="0" normalizeH="0" baseline="0" noProof="0" dirty="0">
-              <a:ln>
-                <a:noFill/>
-              </a:ln>
-              <a:solidFill>
-                <a:prstClr val="black"/>
-              </a:solidFill>
-              <a:effectLst/>
-              <a:uLnTx/>
-              <a:uFillTx/>
-              <a:latin typeface="Aptos" panose="02110004020202020204"/>
-              <a:ea typeface="+mn-ea"/>
-              <a:cs typeface="+mn-cs"/>
-            </a:endParaRPr>
-          </a:p>
-        </p:txBody>
-      </p:sp>
-      <p:sp>
-        <p:nvSpPr>
-          <p:cNvPr id="3" name="TextBox 2">
-            <a:extLst>
-              <a:ext uri="{FF2B5EF4-FFF2-40B4-BE49-F238E27FC236}">
-                <a16:creationId xmlns:a16="http://schemas.microsoft.com/office/drawing/2014/main" id="{754C2201-BFB4-BE44-95E3-C5031C5EFFD6}"/>
-              </a:ext>
-            </a:extLst>
-          </p:cNvPr>
-          <p:cNvSpPr txBox="1"/>
-          <p:nvPr/>
-        </p:nvSpPr>
-        <p:spPr>
-          <a:xfrm>
-            <a:off x="599954" y="937549"/>
-            <a:ext cx="10982446" cy="400110"/>
-          </a:xfrm>
-          <a:prstGeom prst="rect">
-            <a:avLst/>
-          </a:prstGeom>
-          <a:noFill/>
-        </p:spPr>
-        <p:txBody>
-          <a:bodyPr wrap="square" rtlCol="0">
-            <a:spAutoFit/>
-          </a:bodyPr>
-          <a:lstStyle/>
-          <a:p>
-            <a:pPr marL="0" marR="0" lvl="0" indent="0" algn="ctr" defTabSz="914400" rtl="0" eaLnBrk="1" fontAlgn="auto" latinLnBrk="0" hangingPunct="1">
-              <a:lnSpc>
-                <a:spcPct val="100000"/>
-              </a:lnSpc>
-              <a:spcBef>
-                <a:spcPts val="0"/>
-              </a:spcBef>
-              <a:spcAft>
-                <a:spcPts val="0"/>
-              </a:spcAft>
-              <a:buClrTx/>
-              <a:buSzTx/>
-              <a:buFontTx/>
-              <a:buNone/>
-              <a:tabLst/>
-              <a:defRPr/>
-            </a:pPr>
-            <a:r>
-              <a:rPr kumimoji="0" lang="en-US" sz="2000" b="0" i="0" u="none" strike="noStrike" kern="1200" cap="none" spc="0" normalizeH="0" baseline="0" noProof="0" dirty="0">
-                <a:ln>
-                  <a:noFill/>
-                </a:ln>
-                <a:solidFill>
-                  <a:prstClr val="black"/>
-                </a:solidFill>
-                <a:effectLst/>
-                <a:uLnTx/>
-                <a:uFillTx/>
-                <a:latin typeface="Aptos" panose="02110004020202020204"/>
-                <a:ea typeface="+mn-ea"/>
-                <a:cs typeface="+mn-cs"/>
-              </a:rPr>
-              <a:t>Factors ~ Termination ~ Phase</a:t>
-            </a:r>
-            <a:endParaRPr kumimoji="0" lang="en-GB" sz="2000" b="0" i="0" u="none" strike="noStrike" kern="1200" cap="none" spc="0" normalizeH="0" baseline="0" noProof="0" dirty="0">
-              <a:ln>
-                <a:noFill/>
-              </a:ln>
-              <a:solidFill>
-                <a:prstClr val="black"/>
-              </a:solidFill>
-              <a:effectLst/>
-              <a:uLnTx/>
-              <a:uFillTx/>
-              <a:latin typeface="Aptos" panose="02110004020202020204"/>
-              <a:ea typeface="+mn-ea"/>
-              <a:cs typeface="+mn-cs"/>
-            </a:endParaRPr>
-          </a:p>
-        </p:txBody>
-      </p:sp>
-    </p:spTree>
-    <p:extLst>
-      <p:ext uri="{BB962C8B-B14F-4D97-AF65-F5344CB8AC3E}">
-        <p14:creationId xmlns:p14="http://schemas.microsoft.com/office/powerpoint/2010/main" val="493610102"/>
-      </p:ext>
-    </p:extLst>
-  </p:cSld>
-  <p:clrMapOvr>
-    <a:masterClrMapping/>
-  </p:clrMapOvr>
-</p:sld>
-</file>
-
-<file path=ppt/slides/slide19.xml><?xml version="1.0" encoding="utf-8"?>
 <p:sld xmlns:a="http://schemas.openxmlformats.org/drawingml/2006/main" xmlns:r="http://schemas.openxmlformats.org/officeDocument/2006/relationships" xmlns:p="http://schemas.openxmlformats.org/presentationml/2006/main">
   <p:cSld>
     <p:spTree>
@@ -19671,6 +18755,949 @@
 </p:sld>
 </file>
 
+<file path=ppt/slides/slide19.xml><?xml version="1.0" encoding="utf-8"?>
+<p:sld xmlns:a="http://schemas.openxmlformats.org/drawingml/2006/main" xmlns:r="http://schemas.openxmlformats.org/officeDocument/2006/relationships" xmlns:p="http://schemas.openxmlformats.org/presentationml/2006/main">
+  <p:cSld>
+    <p:spTree>
+      <p:nvGrpSpPr>
+        <p:cNvPr id="1" name=""/>
+        <p:cNvGrpSpPr/>
+        <p:nvPr/>
+      </p:nvGrpSpPr>
+      <p:grpSpPr>
+        <a:xfrm>
+          <a:off x="0" y="0"/>
+          <a:ext cx="0" cy="0"/>
+          <a:chOff x="0" y="0"/>
+          <a:chExt cx="0" cy="0"/>
+        </a:xfrm>
+      </p:grpSpPr>
+      <p:sp>
+        <p:nvSpPr>
+          <p:cNvPr id="7" name="Title 6">
+            <a:extLst>
+              <a:ext uri="{FF2B5EF4-FFF2-40B4-BE49-F238E27FC236}">
+                <a16:creationId xmlns:a16="http://schemas.microsoft.com/office/drawing/2014/main" id="{0871E4C9-769D-7B7A-AAF4-AA60C90D5ABE}"/>
+              </a:ext>
+            </a:extLst>
+          </p:cNvPr>
+          <p:cNvSpPr>
+            <a:spLocks noGrp="1"/>
+          </p:cNvSpPr>
+          <p:nvPr>
+            <p:ph type="ctrTitle"/>
+          </p:nvPr>
+        </p:nvSpPr>
+        <p:spPr>
+          <a:xfrm>
+            <a:off x="609600" y="323769"/>
+            <a:ext cx="10972800" cy="457200"/>
+          </a:xfrm>
+          <a:ln>
+            <a:solidFill>
+              <a:schemeClr val="tx1"/>
+            </a:solidFill>
+          </a:ln>
+        </p:spPr>
+        <p:txBody>
+          <a:bodyPr anchor="ctr">
+            <a:noAutofit/>
+          </a:bodyPr>
+          <a:lstStyle/>
+          <a:p>
+            <a:r>
+              <a:rPr lang="en-US" sz="3000" b="1" dirty="0"/>
+              <a:t>Features ~ Phases</a:t>
+            </a:r>
+            <a:endParaRPr lang="en-GB" sz="3000" b="1" dirty="0"/>
+          </a:p>
+        </p:txBody>
+      </p:sp>
+      <p:sp>
+        <p:nvSpPr>
+          <p:cNvPr id="6" name="Text Placeholder 5">
+            <a:extLst>
+              <a:ext uri="{FF2B5EF4-FFF2-40B4-BE49-F238E27FC236}">
+                <a16:creationId xmlns:a16="http://schemas.microsoft.com/office/drawing/2014/main" id="{281D5DE3-2913-0700-B818-661824D303F3}"/>
+              </a:ext>
+            </a:extLst>
+          </p:cNvPr>
+          <p:cNvSpPr>
+            <a:spLocks noGrp="1"/>
+          </p:cNvSpPr>
+          <p:nvPr>
+            <p:ph type="subTitle" idx="1"/>
+          </p:nvPr>
+        </p:nvSpPr>
+        <p:spPr>
+          <a:xfrm>
+            <a:off x="599954" y="1620456"/>
+            <a:ext cx="5372583" cy="4780343"/>
+          </a:xfrm>
+          <a:noFill/>
+          <a:ln>
+            <a:solidFill>
+              <a:schemeClr val="tx1"/>
+            </a:solidFill>
+          </a:ln>
+        </p:spPr>
+        <p:txBody>
+          <a:bodyPr anchor="ctr">
+            <a:noAutofit/>
+          </a:bodyPr>
+          <a:lstStyle/>
+          <a:p>
+            <a:pPr algn="l"/>
+            <a:r>
+              <a:rPr lang="en-US" sz="2000" b="1" dirty="0"/>
+              <a:t>Phase 1:  </a:t>
+            </a:r>
+            <a:br>
+              <a:rPr lang="en-US" sz="2000" b="1" dirty="0"/>
+            </a:br>
+            <a:r>
+              <a:rPr lang="en-GB" sz="2000" b="1" dirty="0"/>
+              <a:t>Dose-Escalation | Human Pharmacology</a:t>
+            </a:r>
+            <a:endParaRPr lang="en-US" sz="2000" b="1" dirty="0"/>
+          </a:p>
+          <a:p>
+            <a:pPr marL="342900" indent="-342900" algn="l">
+              <a:buFont typeface="Arial" panose="020B0604020202020204" pitchFamily="34" charset="0"/>
+              <a:buChar char="•"/>
+            </a:pPr>
+            <a:r>
+              <a:rPr lang="en-US" sz="2000" dirty="0"/>
+              <a:t>Escalating dose ~ Adverse Events (e.g, MTD)</a:t>
+            </a:r>
+          </a:p>
+          <a:p>
+            <a:pPr marL="800100" lvl="1" indent="-342900" algn="l">
+              <a:buFont typeface="Arial" panose="020B0604020202020204" pitchFamily="34" charset="0"/>
+              <a:buChar char="•"/>
+            </a:pPr>
+            <a:endParaRPr lang="en-GB" dirty="0"/>
+          </a:p>
+          <a:p>
+            <a:pPr algn="l"/>
+            <a:r>
+              <a:rPr lang="en-GB" sz="2000" b="1" dirty="0"/>
+              <a:t>Phase 2:  </a:t>
+            </a:r>
+            <a:br>
+              <a:rPr lang="en-GB" sz="2000" b="1" dirty="0"/>
+            </a:br>
+            <a:r>
+              <a:rPr lang="en-GB" sz="2000" b="1" dirty="0"/>
+              <a:t>Therapeutic Exploratory</a:t>
+            </a:r>
+            <a:endParaRPr lang="en-US" sz="2000" b="1" dirty="0"/>
+          </a:p>
+          <a:p>
+            <a:pPr marL="342900" indent="-342900" algn="l">
+              <a:buFont typeface="Arial" panose="020B0604020202020204" pitchFamily="34" charset="0"/>
+              <a:buChar char="•"/>
+            </a:pPr>
+            <a:r>
+              <a:rPr lang="en-US" sz="2000" dirty="0"/>
+              <a:t>Safety, Pharmaco-dynamics-kinetics</a:t>
+            </a:r>
+          </a:p>
+          <a:p>
+            <a:pPr marL="342900" indent="-342900" algn="l">
+              <a:buFont typeface="Arial" panose="020B0604020202020204" pitchFamily="34" charset="0"/>
+              <a:buChar char="•"/>
+            </a:pPr>
+            <a:r>
+              <a:rPr lang="en-US" sz="2000" dirty="0"/>
+              <a:t>Early</a:t>
+            </a:r>
+            <a:r>
+              <a:rPr lang="el-GR" sz="2000" dirty="0"/>
+              <a:t> </a:t>
+            </a:r>
+            <a:r>
+              <a:rPr lang="en-US" sz="2000" dirty="0"/>
+              <a:t>efficacy data</a:t>
+            </a:r>
+            <a:r>
+              <a:rPr lang="el-GR" sz="2000" dirty="0"/>
+              <a:t> </a:t>
+            </a:r>
+            <a:r>
+              <a:rPr lang="en-GB" sz="2000" dirty="0"/>
+              <a:t>(transitional to phase 3)</a:t>
+            </a:r>
+          </a:p>
+        </p:txBody>
+      </p:sp>
+      <p:sp>
+        <p:nvSpPr>
+          <p:cNvPr id="2" name="Text Placeholder 5">
+            <a:extLst>
+              <a:ext uri="{FF2B5EF4-FFF2-40B4-BE49-F238E27FC236}">
+                <a16:creationId xmlns:a16="http://schemas.microsoft.com/office/drawing/2014/main" id="{86DB2BA2-C66A-5EC1-F184-C2C46DC0A30F}"/>
+              </a:ext>
+            </a:extLst>
+          </p:cNvPr>
+          <p:cNvSpPr txBox="1">
+            <a:spLocks/>
+          </p:cNvSpPr>
+          <p:nvPr/>
+        </p:nvSpPr>
+        <p:spPr>
+          <a:xfrm>
+            <a:off x="6219465" y="1620456"/>
+            <a:ext cx="5362935" cy="4780343"/>
+          </a:xfrm>
+          <a:prstGeom prst="rect">
+            <a:avLst/>
+          </a:prstGeom>
+          <a:ln>
+            <a:solidFill>
+              <a:schemeClr val="tx1"/>
+            </a:solidFill>
+          </a:ln>
+        </p:spPr>
+        <p:txBody>
+          <a:bodyPr vert="horz" lIns="91440" tIns="45720" rIns="91440" bIns="45720" rtlCol="0" anchor="ctr">
+            <a:noAutofit/>
+          </a:bodyPr>
+          <a:lstStyle>
+            <a:lvl1pPr marL="0" indent="0" algn="ctr" defTabSz="914400" rtl="0" eaLnBrk="1" latinLnBrk="0" hangingPunct="1">
+              <a:lnSpc>
+                <a:spcPct val="90000"/>
+              </a:lnSpc>
+              <a:spcBef>
+                <a:spcPts val="1000"/>
+              </a:spcBef>
+              <a:buFont typeface="Arial" panose="020B0604020202020204" pitchFamily="34" charset="0"/>
+              <a:buNone/>
+              <a:defRPr sz="2400" kern="1200">
+                <a:solidFill>
+                  <a:schemeClr val="tx1"/>
+                </a:solidFill>
+                <a:latin typeface="+mn-lt"/>
+                <a:ea typeface="+mn-ea"/>
+                <a:cs typeface="+mn-cs"/>
+              </a:defRPr>
+            </a:lvl1pPr>
+            <a:lvl2pPr marL="457200" indent="0" algn="ctr" defTabSz="914400" rtl="0" eaLnBrk="1" latinLnBrk="0" hangingPunct="1">
+              <a:lnSpc>
+                <a:spcPct val="90000"/>
+              </a:lnSpc>
+              <a:spcBef>
+                <a:spcPts val="500"/>
+              </a:spcBef>
+              <a:buFont typeface="Arial" panose="020B0604020202020204" pitchFamily="34" charset="0"/>
+              <a:buNone/>
+              <a:defRPr sz="2000" kern="1200">
+                <a:solidFill>
+                  <a:schemeClr val="tx1"/>
+                </a:solidFill>
+                <a:latin typeface="+mn-lt"/>
+                <a:ea typeface="+mn-ea"/>
+                <a:cs typeface="+mn-cs"/>
+              </a:defRPr>
+            </a:lvl2pPr>
+            <a:lvl3pPr marL="914400" indent="0" algn="ctr" defTabSz="914400" rtl="0" eaLnBrk="1" latinLnBrk="0" hangingPunct="1">
+              <a:lnSpc>
+                <a:spcPct val="90000"/>
+              </a:lnSpc>
+              <a:spcBef>
+                <a:spcPts val="500"/>
+              </a:spcBef>
+              <a:buFont typeface="Arial" panose="020B0604020202020204" pitchFamily="34" charset="0"/>
+              <a:buNone/>
+              <a:defRPr sz="1800" kern="1200">
+                <a:solidFill>
+                  <a:schemeClr val="tx1"/>
+                </a:solidFill>
+                <a:latin typeface="+mn-lt"/>
+                <a:ea typeface="+mn-ea"/>
+                <a:cs typeface="+mn-cs"/>
+              </a:defRPr>
+            </a:lvl3pPr>
+            <a:lvl4pPr marL="1371600" indent="0" algn="ctr" defTabSz="914400" rtl="0" eaLnBrk="1" latinLnBrk="0" hangingPunct="1">
+              <a:lnSpc>
+                <a:spcPct val="90000"/>
+              </a:lnSpc>
+              <a:spcBef>
+                <a:spcPts val="500"/>
+              </a:spcBef>
+              <a:buFont typeface="Arial" panose="020B0604020202020204" pitchFamily="34" charset="0"/>
+              <a:buNone/>
+              <a:defRPr sz="1600" kern="1200">
+                <a:solidFill>
+                  <a:schemeClr val="tx1"/>
+                </a:solidFill>
+                <a:latin typeface="+mn-lt"/>
+                <a:ea typeface="+mn-ea"/>
+                <a:cs typeface="+mn-cs"/>
+              </a:defRPr>
+            </a:lvl4pPr>
+            <a:lvl5pPr marL="1828800" indent="0" algn="ctr" defTabSz="914400" rtl="0" eaLnBrk="1" latinLnBrk="0" hangingPunct="1">
+              <a:lnSpc>
+                <a:spcPct val="90000"/>
+              </a:lnSpc>
+              <a:spcBef>
+                <a:spcPts val="500"/>
+              </a:spcBef>
+              <a:buFont typeface="Arial" panose="020B0604020202020204" pitchFamily="34" charset="0"/>
+              <a:buNone/>
+              <a:defRPr sz="1600" kern="1200">
+                <a:solidFill>
+                  <a:schemeClr val="tx1"/>
+                </a:solidFill>
+                <a:latin typeface="+mn-lt"/>
+                <a:ea typeface="+mn-ea"/>
+                <a:cs typeface="+mn-cs"/>
+              </a:defRPr>
+            </a:lvl5pPr>
+            <a:lvl6pPr marL="2286000" indent="0" algn="ctr" defTabSz="914400" rtl="0" eaLnBrk="1" latinLnBrk="0" hangingPunct="1">
+              <a:lnSpc>
+                <a:spcPct val="90000"/>
+              </a:lnSpc>
+              <a:spcBef>
+                <a:spcPts val="500"/>
+              </a:spcBef>
+              <a:buFont typeface="Arial" panose="020B0604020202020204" pitchFamily="34" charset="0"/>
+              <a:buNone/>
+              <a:defRPr sz="1600" kern="1200">
+                <a:solidFill>
+                  <a:schemeClr val="tx1"/>
+                </a:solidFill>
+                <a:latin typeface="+mn-lt"/>
+                <a:ea typeface="+mn-ea"/>
+                <a:cs typeface="+mn-cs"/>
+              </a:defRPr>
+            </a:lvl6pPr>
+            <a:lvl7pPr marL="2743200" indent="0" algn="ctr" defTabSz="914400" rtl="0" eaLnBrk="1" latinLnBrk="0" hangingPunct="1">
+              <a:lnSpc>
+                <a:spcPct val="90000"/>
+              </a:lnSpc>
+              <a:spcBef>
+                <a:spcPts val="500"/>
+              </a:spcBef>
+              <a:buFont typeface="Arial" panose="020B0604020202020204" pitchFamily="34" charset="0"/>
+              <a:buNone/>
+              <a:defRPr sz="1600" kern="1200">
+                <a:solidFill>
+                  <a:schemeClr val="tx1"/>
+                </a:solidFill>
+                <a:latin typeface="+mn-lt"/>
+                <a:ea typeface="+mn-ea"/>
+                <a:cs typeface="+mn-cs"/>
+              </a:defRPr>
+            </a:lvl7pPr>
+            <a:lvl8pPr marL="3200400" indent="0" algn="ctr" defTabSz="914400" rtl="0" eaLnBrk="1" latinLnBrk="0" hangingPunct="1">
+              <a:lnSpc>
+                <a:spcPct val="90000"/>
+              </a:lnSpc>
+              <a:spcBef>
+                <a:spcPts val="500"/>
+              </a:spcBef>
+              <a:buFont typeface="Arial" panose="020B0604020202020204" pitchFamily="34" charset="0"/>
+              <a:buNone/>
+              <a:defRPr sz="1600" kern="1200">
+                <a:solidFill>
+                  <a:schemeClr val="tx1"/>
+                </a:solidFill>
+                <a:latin typeface="+mn-lt"/>
+                <a:ea typeface="+mn-ea"/>
+                <a:cs typeface="+mn-cs"/>
+              </a:defRPr>
+            </a:lvl8pPr>
+            <a:lvl9pPr marL="3657600" indent="0" algn="ctr" defTabSz="914400" rtl="0" eaLnBrk="1" latinLnBrk="0" hangingPunct="1">
+              <a:lnSpc>
+                <a:spcPct val="90000"/>
+              </a:lnSpc>
+              <a:spcBef>
+                <a:spcPts val="500"/>
+              </a:spcBef>
+              <a:buFont typeface="Arial" panose="020B0604020202020204" pitchFamily="34" charset="0"/>
+              <a:buNone/>
+              <a:defRPr sz="1600" kern="1200">
+                <a:solidFill>
+                  <a:schemeClr val="tx1"/>
+                </a:solidFill>
+                <a:latin typeface="+mn-lt"/>
+                <a:ea typeface="+mn-ea"/>
+                <a:cs typeface="+mn-cs"/>
+              </a:defRPr>
+            </a:lvl9pPr>
+          </a:lstStyle>
+          <a:p>
+            <a:pPr marL="0" marR="0" lvl="0" indent="0" algn="l" defTabSz="914400" rtl="0" eaLnBrk="1" fontAlgn="auto" latinLnBrk="0" hangingPunct="1">
+              <a:lnSpc>
+                <a:spcPct val="90000"/>
+              </a:lnSpc>
+              <a:spcBef>
+                <a:spcPts val="1000"/>
+              </a:spcBef>
+              <a:spcAft>
+                <a:spcPts val="0"/>
+              </a:spcAft>
+              <a:buClrTx/>
+              <a:buSzTx/>
+              <a:buFont typeface="Arial" panose="020B0604020202020204" pitchFamily="34" charset="0"/>
+              <a:buNone/>
+              <a:tabLst/>
+              <a:defRPr/>
+            </a:pPr>
+            <a:r>
+              <a:rPr kumimoji="0" lang="en-GB" sz="2000" b="1" i="0" u="none" strike="noStrike" kern="1200" cap="none" spc="0" normalizeH="0" baseline="0" noProof="0" dirty="0">
+                <a:ln>
+                  <a:noFill/>
+                </a:ln>
+                <a:solidFill>
+                  <a:prstClr val="black"/>
+                </a:solidFill>
+                <a:effectLst/>
+                <a:uLnTx/>
+                <a:uFillTx/>
+                <a:latin typeface="Aptos" panose="02110004020202020204"/>
+                <a:ea typeface="+mn-ea"/>
+                <a:cs typeface="+mn-cs"/>
+              </a:rPr>
+              <a:t>Phase 3:</a:t>
+            </a:r>
+            <a:r>
+              <a:rPr kumimoji="0" lang="el-GR" sz="2000" b="1" i="0" u="none" strike="noStrike" kern="1200" cap="none" spc="0" normalizeH="0" baseline="0" noProof="0" dirty="0">
+                <a:ln>
+                  <a:noFill/>
+                </a:ln>
+                <a:solidFill>
+                  <a:prstClr val="black"/>
+                </a:solidFill>
+                <a:effectLst/>
+                <a:uLnTx/>
+                <a:uFillTx/>
+                <a:latin typeface="Aptos" panose="02110004020202020204"/>
+                <a:ea typeface="+mn-ea"/>
+                <a:cs typeface="+mn-cs"/>
+              </a:rPr>
+              <a:t> </a:t>
+            </a:r>
+            <a:br>
+              <a:rPr kumimoji="0" lang="en-GB" sz="2000" b="1" i="0" u="none" strike="noStrike" kern="1200" cap="none" spc="0" normalizeH="0" baseline="0" noProof="0" dirty="0">
+                <a:ln>
+                  <a:noFill/>
+                </a:ln>
+                <a:solidFill>
+                  <a:prstClr val="black"/>
+                </a:solidFill>
+                <a:effectLst/>
+                <a:uLnTx/>
+                <a:uFillTx/>
+                <a:latin typeface="Aptos" panose="02110004020202020204"/>
+                <a:ea typeface="+mn-ea"/>
+                <a:cs typeface="+mn-cs"/>
+              </a:rPr>
+            </a:br>
+            <a:r>
+              <a:rPr kumimoji="0" lang="en-GB" sz="2000" b="1" i="0" u="none" strike="noStrike" kern="1200" cap="none" spc="0" normalizeH="0" baseline="0" noProof="0" dirty="0">
+                <a:ln>
+                  <a:noFill/>
+                </a:ln>
+                <a:solidFill>
+                  <a:prstClr val="black"/>
+                </a:solidFill>
+                <a:effectLst/>
+                <a:uLnTx/>
+                <a:uFillTx/>
+                <a:latin typeface="Aptos" panose="02110004020202020204"/>
+                <a:ea typeface="+mn-ea"/>
+                <a:cs typeface="+mn-cs"/>
+              </a:rPr>
+              <a:t>Therapeutic Confirmatory | Comparative Efficacy</a:t>
+            </a:r>
+            <a:endParaRPr kumimoji="0" lang="en-US" sz="2000" b="1" i="0" u="none" strike="noStrike" kern="1200" cap="none" spc="0" normalizeH="0" baseline="0" noProof="0" dirty="0">
+              <a:ln>
+                <a:noFill/>
+              </a:ln>
+              <a:solidFill>
+                <a:prstClr val="black"/>
+              </a:solidFill>
+              <a:effectLst/>
+              <a:uLnTx/>
+              <a:uFillTx/>
+              <a:latin typeface="Aptos" panose="02110004020202020204"/>
+              <a:ea typeface="+mn-ea"/>
+              <a:cs typeface="+mn-cs"/>
+            </a:endParaRPr>
+          </a:p>
+          <a:p>
+            <a:pPr marL="342900" marR="0" lvl="0" indent="-342900" algn="l" defTabSz="914400" rtl="0" eaLnBrk="1" fontAlgn="auto" latinLnBrk="0" hangingPunct="1">
+              <a:lnSpc>
+                <a:spcPct val="90000"/>
+              </a:lnSpc>
+              <a:spcBef>
+                <a:spcPts val="1000"/>
+              </a:spcBef>
+              <a:spcAft>
+                <a:spcPts val="0"/>
+              </a:spcAft>
+              <a:buClrTx/>
+              <a:buSzTx/>
+              <a:buFont typeface="Arial" panose="020B0604020202020204" pitchFamily="34" charset="0"/>
+              <a:buChar char="•"/>
+              <a:tabLst/>
+              <a:defRPr/>
+            </a:pPr>
+            <a:r>
+              <a:rPr kumimoji="0" lang="en-US" sz="2000" b="0" i="0" u="none" strike="noStrike" kern="1200" cap="none" spc="0" normalizeH="0" baseline="0" noProof="0" dirty="0">
+                <a:ln>
+                  <a:noFill/>
+                </a:ln>
+                <a:solidFill>
+                  <a:prstClr val="black"/>
+                </a:solidFill>
+                <a:effectLst/>
+                <a:uLnTx/>
+                <a:uFillTx/>
+                <a:latin typeface="Aptos" panose="02110004020202020204"/>
+                <a:ea typeface="+mn-ea"/>
+                <a:cs typeface="+mn-cs"/>
+              </a:rPr>
+              <a:t>Treatments vs placebo/standard/active</a:t>
+            </a:r>
+          </a:p>
+          <a:p>
+            <a:pPr marL="342900" marR="0" lvl="0" indent="-342900" algn="l" defTabSz="914400" rtl="0" eaLnBrk="1" fontAlgn="auto" latinLnBrk="0" hangingPunct="1">
+              <a:lnSpc>
+                <a:spcPct val="90000"/>
+              </a:lnSpc>
+              <a:spcBef>
+                <a:spcPts val="1000"/>
+              </a:spcBef>
+              <a:spcAft>
+                <a:spcPts val="0"/>
+              </a:spcAft>
+              <a:buClrTx/>
+              <a:buSzTx/>
+              <a:buFont typeface="Arial" panose="020B0604020202020204" pitchFamily="34" charset="0"/>
+              <a:buChar char="•"/>
+              <a:tabLst/>
+              <a:defRPr/>
+            </a:pPr>
+            <a:r>
+              <a:rPr kumimoji="0" lang="en-US" sz="2000" b="0" i="0" u="none" strike="noStrike" kern="1200" cap="none" spc="0" normalizeH="0" baseline="0" noProof="0" dirty="0">
+                <a:ln>
+                  <a:noFill/>
+                </a:ln>
+                <a:solidFill>
+                  <a:prstClr val="black"/>
+                </a:solidFill>
+                <a:effectLst/>
+                <a:uLnTx/>
+                <a:uFillTx/>
+                <a:latin typeface="Aptos" panose="02110004020202020204"/>
+                <a:ea typeface="+mn-ea"/>
+                <a:cs typeface="+mn-cs"/>
+              </a:rPr>
+              <a:t>Frequent Adverse Events</a:t>
+            </a:r>
+            <a:endParaRPr kumimoji="0" lang="en-GB" sz="2000" b="0" i="0" u="none" strike="noStrike" kern="1200" cap="none" spc="0" normalizeH="0" baseline="0" noProof="0" dirty="0">
+              <a:ln>
+                <a:noFill/>
+              </a:ln>
+              <a:solidFill>
+                <a:prstClr val="black"/>
+              </a:solidFill>
+              <a:effectLst/>
+              <a:uLnTx/>
+              <a:uFillTx/>
+              <a:latin typeface="Aptos" panose="02110004020202020204"/>
+              <a:ea typeface="+mn-ea"/>
+              <a:cs typeface="+mn-cs"/>
+            </a:endParaRPr>
+          </a:p>
+          <a:p>
+            <a:pPr marL="342900" marR="0" lvl="0" indent="-342900" algn="l" defTabSz="914400" rtl="0" eaLnBrk="1" fontAlgn="auto" latinLnBrk="0" hangingPunct="1">
+              <a:lnSpc>
+                <a:spcPct val="90000"/>
+              </a:lnSpc>
+              <a:spcBef>
+                <a:spcPts val="1000"/>
+              </a:spcBef>
+              <a:spcAft>
+                <a:spcPts val="0"/>
+              </a:spcAft>
+              <a:buClrTx/>
+              <a:buSzTx/>
+              <a:buFont typeface="Arial" panose="020B0604020202020204" pitchFamily="34" charset="0"/>
+              <a:buChar char="•"/>
+              <a:tabLst/>
+              <a:defRPr/>
+            </a:pPr>
+            <a:r>
+              <a:rPr kumimoji="0" lang="en-US" sz="2000" b="0" i="0" u="none" strike="noStrike" kern="1200" cap="none" spc="0" normalizeH="0" baseline="0" noProof="0" dirty="0">
+                <a:ln>
+                  <a:noFill/>
+                </a:ln>
+                <a:solidFill>
+                  <a:prstClr val="black"/>
+                </a:solidFill>
+                <a:effectLst/>
+                <a:uLnTx/>
+                <a:uFillTx/>
+                <a:latin typeface="Aptos" panose="02110004020202020204"/>
+                <a:ea typeface="+mn-ea"/>
+                <a:cs typeface="+mn-cs"/>
+              </a:rPr>
+              <a:t>Scaled - </a:t>
+            </a:r>
+            <a:r>
+              <a:rPr kumimoji="0" lang="en-GB" sz="2000" b="0" i="0" u="none" strike="noStrike" kern="1200" cap="none" spc="0" normalizeH="0" baseline="0" noProof="0" dirty="0">
+                <a:ln>
+                  <a:noFill/>
+                </a:ln>
+                <a:solidFill>
+                  <a:prstClr val="black"/>
+                </a:solidFill>
+                <a:effectLst/>
+                <a:uLnTx/>
+                <a:uFillTx/>
+                <a:latin typeface="Aptos" panose="02110004020202020204"/>
+                <a:ea typeface="+mn-ea"/>
+                <a:cs typeface="+mn-cs"/>
+              </a:rPr>
+              <a:t>Study Design important</a:t>
+            </a:r>
+            <a:endParaRPr kumimoji="0" lang="en-US" sz="2000" b="0" i="0" u="none" strike="noStrike" kern="1200" cap="none" spc="0" normalizeH="0" baseline="0" noProof="0" dirty="0">
+              <a:ln>
+                <a:noFill/>
+              </a:ln>
+              <a:solidFill>
+                <a:prstClr val="black"/>
+              </a:solidFill>
+              <a:effectLst/>
+              <a:uLnTx/>
+              <a:uFillTx/>
+              <a:latin typeface="Aptos" panose="02110004020202020204"/>
+              <a:ea typeface="+mn-ea"/>
+              <a:cs typeface="+mn-cs"/>
+            </a:endParaRPr>
+          </a:p>
+          <a:p>
+            <a:pPr marL="800100" marR="0" lvl="1" indent="-342900" algn="l" defTabSz="914400" rtl="0" eaLnBrk="1" fontAlgn="auto" latinLnBrk="0" hangingPunct="1">
+              <a:lnSpc>
+                <a:spcPct val="90000"/>
+              </a:lnSpc>
+              <a:spcBef>
+                <a:spcPts val="500"/>
+              </a:spcBef>
+              <a:spcAft>
+                <a:spcPts val="0"/>
+              </a:spcAft>
+              <a:buClrTx/>
+              <a:buSzTx/>
+              <a:buFont typeface="Arial" panose="020B0604020202020204" pitchFamily="34" charset="0"/>
+              <a:buChar char="•"/>
+              <a:tabLst/>
+              <a:defRPr/>
+            </a:pPr>
+            <a:endParaRPr kumimoji="0" lang="en-US" sz="2000" b="0" i="0" u="none" strike="noStrike" kern="1200" cap="none" spc="0" normalizeH="0" baseline="0" noProof="0" dirty="0">
+              <a:ln>
+                <a:noFill/>
+              </a:ln>
+              <a:solidFill>
+                <a:prstClr val="black"/>
+              </a:solidFill>
+              <a:effectLst/>
+              <a:uLnTx/>
+              <a:uFillTx/>
+              <a:latin typeface="Aptos" panose="02110004020202020204"/>
+              <a:ea typeface="+mn-ea"/>
+              <a:cs typeface="+mn-cs"/>
+            </a:endParaRPr>
+          </a:p>
+          <a:p>
+            <a:pPr marL="0" marR="0" lvl="0" indent="0" algn="l" defTabSz="914400" rtl="0" eaLnBrk="1" fontAlgn="auto" latinLnBrk="0" hangingPunct="1">
+              <a:lnSpc>
+                <a:spcPct val="90000"/>
+              </a:lnSpc>
+              <a:spcBef>
+                <a:spcPts val="1000"/>
+              </a:spcBef>
+              <a:spcAft>
+                <a:spcPts val="0"/>
+              </a:spcAft>
+              <a:buClrTx/>
+              <a:buSzTx/>
+              <a:buFont typeface="Arial" panose="020B0604020202020204" pitchFamily="34" charset="0"/>
+              <a:buNone/>
+              <a:tabLst/>
+              <a:defRPr/>
+            </a:pPr>
+            <a:r>
+              <a:rPr kumimoji="0" lang="en-US" sz="2000" b="1" i="0" u="none" strike="noStrike" kern="1200" cap="none" spc="0" normalizeH="0" baseline="0" noProof="0" dirty="0">
+                <a:ln>
+                  <a:noFill/>
+                </a:ln>
+                <a:solidFill>
+                  <a:prstClr val="black"/>
+                </a:solidFill>
+                <a:effectLst/>
+                <a:uLnTx/>
+                <a:uFillTx/>
+                <a:latin typeface="Aptos" panose="02110004020202020204"/>
+                <a:ea typeface="+mn-ea"/>
+                <a:cs typeface="+mn-cs"/>
+              </a:rPr>
+              <a:t>Phase 4: </a:t>
+            </a:r>
+            <a:br>
+              <a:rPr kumimoji="0" lang="en-US" sz="2000" b="1" i="0" u="none" strike="noStrike" kern="1200" cap="none" spc="0" normalizeH="0" baseline="0" noProof="0" dirty="0">
+                <a:ln>
+                  <a:noFill/>
+                </a:ln>
+                <a:solidFill>
+                  <a:prstClr val="black"/>
+                </a:solidFill>
+                <a:effectLst/>
+                <a:uLnTx/>
+                <a:uFillTx/>
+                <a:latin typeface="Aptos" panose="02110004020202020204"/>
+                <a:ea typeface="+mn-ea"/>
+                <a:cs typeface="+mn-cs"/>
+              </a:rPr>
+            </a:br>
+            <a:r>
+              <a:rPr kumimoji="0" lang="en-US" sz="2000" b="1" i="0" u="none" strike="noStrike" kern="1200" cap="none" spc="0" normalizeH="0" baseline="0" noProof="0" dirty="0">
+                <a:ln>
+                  <a:noFill/>
+                </a:ln>
+                <a:solidFill>
+                  <a:prstClr val="black"/>
+                </a:solidFill>
+                <a:effectLst/>
+                <a:uLnTx/>
+                <a:uFillTx/>
+                <a:latin typeface="Aptos" panose="02110004020202020204"/>
+                <a:ea typeface="+mn-ea"/>
+                <a:cs typeface="+mn-cs"/>
+              </a:rPr>
+              <a:t>Therapeutic Use | Post-Marketing</a:t>
+            </a:r>
+          </a:p>
+          <a:p>
+            <a:pPr marL="342900" marR="0" lvl="0" indent="-342900" algn="l" defTabSz="914400" rtl="0" eaLnBrk="1" fontAlgn="auto" latinLnBrk="0" hangingPunct="1">
+              <a:lnSpc>
+                <a:spcPct val="90000"/>
+              </a:lnSpc>
+              <a:spcBef>
+                <a:spcPts val="1000"/>
+              </a:spcBef>
+              <a:spcAft>
+                <a:spcPts val="0"/>
+              </a:spcAft>
+              <a:buClrTx/>
+              <a:buSzTx/>
+              <a:buFont typeface="Arial" panose="020B0604020202020204" pitchFamily="34" charset="0"/>
+              <a:buChar char="•"/>
+              <a:tabLst/>
+              <a:defRPr/>
+            </a:pPr>
+            <a:r>
+              <a:rPr kumimoji="0" lang="en-US" sz="2000" b="0" i="0" u="none" strike="noStrike" kern="1200" cap="none" spc="0" normalizeH="0" baseline="0" noProof="0" dirty="0">
+                <a:ln>
+                  <a:noFill/>
+                </a:ln>
+                <a:solidFill>
+                  <a:prstClr val="black"/>
+                </a:solidFill>
+                <a:effectLst/>
+                <a:uLnTx/>
+                <a:uFillTx/>
+                <a:latin typeface="Aptos" panose="02110004020202020204"/>
+                <a:ea typeface="+mn-ea"/>
+                <a:cs typeface="+mn-cs"/>
+              </a:rPr>
+              <a:t>Rare Adverse Events</a:t>
+            </a:r>
+          </a:p>
+          <a:p>
+            <a:pPr marL="342900" marR="0" lvl="0" indent="-342900" algn="l" defTabSz="914400" rtl="0" eaLnBrk="1" fontAlgn="auto" latinLnBrk="0" hangingPunct="1">
+              <a:lnSpc>
+                <a:spcPct val="90000"/>
+              </a:lnSpc>
+              <a:spcBef>
+                <a:spcPts val="1000"/>
+              </a:spcBef>
+              <a:spcAft>
+                <a:spcPts val="0"/>
+              </a:spcAft>
+              <a:buClrTx/>
+              <a:buSzTx/>
+              <a:buFont typeface="Arial" panose="020B0604020202020204" pitchFamily="34" charset="0"/>
+              <a:buChar char="•"/>
+              <a:tabLst/>
+              <a:defRPr/>
+            </a:pPr>
+            <a:r>
+              <a:rPr kumimoji="0" lang="en-US" sz="2000" b="0" i="0" u="none" strike="noStrike" kern="1200" cap="none" spc="0" normalizeH="0" baseline="0" noProof="0" dirty="0">
+                <a:ln>
+                  <a:noFill/>
+                </a:ln>
+                <a:solidFill>
+                  <a:prstClr val="black"/>
+                </a:solidFill>
+                <a:effectLst/>
+                <a:uLnTx/>
+                <a:uFillTx/>
+                <a:latin typeface="Aptos" panose="02110004020202020204"/>
+                <a:ea typeface="+mn-ea"/>
+                <a:cs typeface="+mn-cs"/>
+              </a:rPr>
+              <a:t>Differences in dose-efficiency in population</a:t>
+            </a:r>
+          </a:p>
+          <a:p>
+            <a:pPr marL="342900" marR="0" lvl="0" indent="-342900" algn="l" defTabSz="914400" rtl="0" eaLnBrk="1" fontAlgn="auto" latinLnBrk="0" hangingPunct="1">
+              <a:lnSpc>
+                <a:spcPct val="90000"/>
+              </a:lnSpc>
+              <a:spcBef>
+                <a:spcPts val="1000"/>
+              </a:spcBef>
+              <a:spcAft>
+                <a:spcPts val="0"/>
+              </a:spcAft>
+              <a:buClrTx/>
+              <a:buSzTx/>
+              <a:buFont typeface="Arial" panose="020B0604020202020204" pitchFamily="34" charset="0"/>
+              <a:buChar char="•"/>
+              <a:tabLst/>
+              <a:defRPr/>
+            </a:pPr>
+            <a:r>
+              <a:rPr kumimoji="0" lang="en-US" sz="2000" b="0" i="0" u="none" strike="noStrike" kern="1200" cap="none" spc="0" normalizeH="0" baseline="0" noProof="0" dirty="0">
+                <a:ln>
+                  <a:noFill/>
+                </a:ln>
+                <a:solidFill>
+                  <a:prstClr val="black"/>
+                </a:solidFill>
+                <a:effectLst/>
+                <a:uLnTx/>
+                <a:uFillTx/>
+                <a:latin typeface="Aptos" panose="02110004020202020204"/>
+                <a:ea typeface="+mn-ea"/>
+                <a:cs typeface="+mn-cs"/>
+              </a:rPr>
+              <a:t>After drug approval - Cost Estimation</a:t>
+            </a:r>
+            <a:endParaRPr kumimoji="0" lang="en-GB" sz="2000" b="0" i="0" u="none" strike="noStrike" kern="1200" cap="none" spc="0" normalizeH="0" baseline="0" noProof="0" dirty="0">
+              <a:ln>
+                <a:noFill/>
+              </a:ln>
+              <a:solidFill>
+                <a:prstClr val="black"/>
+              </a:solidFill>
+              <a:effectLst/>
+              <a:uLnTx/>
+              <a:uFillTx/>
+              <a:latin typeface="Aptos" panose="02110004020202020204"/>
+              <a:ea typeface="+mn-ea"/>
+              <a:cs typeface="+mn-cs"/>
+            </a:endParaRPr>
+          </a:p>
+        </p:txBody>
+      </p:sp>
+      <p:sp>
+        <p:nvSpPr>
+          <p:cNvPr id="3" name="TextBox 2">
+            <a:extLst>
+              <a:ext uri="{FF2B5EF4-FFF2-40B4-BE49-F238E27FC236}">
+                <a16:creationId xmlns:a16="http://schemas.microsoft.com/office/drawing/2014/main" id="{754C2201-BFB4-BE44-95E3-C5031C5EFFD6}"/>
+              </a:ext>
+            </a:extLst>
+          </p:cNvPr>
+          <p:cNvSpPr txBox="1"/>
+          <p:nvPr/>
+        </p:nvSpPr>
+        <p:spPr>
+          <a:xfrm>
+            <a:off x="599954" y="937549"/>
+            <a:ext cx="10982446" cy="400110"/>
+          </a:xfrm>
+          <a:prstGeom prst="rect">
+            <a:avLst/>
+          </a:prstGeom>
+          <a:noFill/>
+        </p:spPr>
+        <p:txBody>
+          <a:bodyPr wrap="square" rtlCol="0">
+            <a:spAutoFit/>
+          </a:bodyPr>
+          <a:lstStyle/>
+          <a:p>
+            <a:pPr marL="0" marR="0" lvl="0" indent="0" algn="ctr" defTabSz="914400" rtl="0" eaLnBrk="1" fontAlgn="auto" latinLnBrk="0" hangingPunct="1">
+              <a:lnSpc>
+                <a:spcPct val="100000"/>
+              </a:lnSpc>
+              <a:spcBef>
+                <a:spcPts val="0"/>
+              </a:spcBef>
+              <a:spcAft>
+                <a:spcPts val="0"/>
+              </a:spcAft>
+              <a:buClrTx/>
+              <a:buSzTx/>
+              <a:buFontTx/>
+              <a:buNone/>
+              <a:tabLst/>
+              <a:defRPr/>
+            </a:pPr>
+            <a:r>
+              <a:rPr kumimoji="0" lang="en-US" sz="2000" b="0" i="0" u="none" strike="noStrike" kern="1200" cap="none" spc="0" normalizeH="0" baseline="0" noProof="0" dirty="0">
+                <a:ln>
+                  <a:noFill/>
+                </a:ln>
+                <a:solidFill>
+                  <a:prstClr val="black"/>
+                </a:solidFill>
+                <a:effectLst/>
+                <a:uLnTx/>
+                <a:uFillTx/>
+                <a:latin typeface="Aptos" panose="02110004020202020204"/>
+                <a:ea typeface="+mn-ea"/>
+                <a:cs typeface="+mn-cs"/>
+              </a:rPr>
+              <a:t>Factors ~ Termination ~ Phase</a:t>
+            </a:r>
+            <a:endParaRPr kumimoji="0" lang="en-GB" sz="2000" b="0" i="0" u="none" strike="noStrike" kern="1200" cap="none" spc="0" normalizeH="0" baseline="0" noProof="0" dirty="0">
+              <a:ln>
+                <a:noFill/>
+              </a:ln>
+              <a:solidFill>
+                <a:prstClr val="black"/>
+              </a:solidFill>
+              <a:effectLst/>
+              <a:uLnTx/>
+              <a:uFillTx/>
+              <a:latin typeface="Aptos" panose="02110004020202020204"/>
+              <a:ea typeface="+mn-ea"/>
+              <a:cs typeface="+mn-cs"/>
+            </a:endParaRPr>
+          </a:p>
+        </p:txBody>
+      </p:sp>
+    </p:spTree>
+    <p:extLst>
+      <p:ext uri="{BB962C8B-B14F-4D97-AF65-F5344CB8AC3E}">
+        <p14:creationId xmlns:p14="http://schemas.microsoft.com/office/powerpoint/2010/main" val="493610102"/>
+      </p:ext>
+    </p:extLst>
+  </p:cSld>
+  <p:clrMapOvr>
+    <a:masterClrMapping/>
+  </p:clrMapOvr>
+</p:sld>
+</file>
+
 <file path=ppt/slides/slide2.xml><?xml version="1.0" encoding="utf-8"?>
 <p:sld xmlns:a="http://schemas.openxmlformats.org/drawingml/2006/main" xmlns:r="http://schemas.openxmlformats.org/officeDocument/2006/relationships" xmlns:p="http://schemas.openxmlformats.org/presentationml/2006/main">
   <p:cSld>
@@ -20160,474 +20187,6 @@
           <a:chExt cx="0" cy="0"/>
         </a:xfrm>
       </p:grpSpPr>
-      <p:sp>
-        <p:nvSpPr>
-          <p:cNvPr id="2" name="Title 1">
-            <a:extLst>
-              <a:ext uri="{FF2B5EF4-FFF2-40B4-BE49-F238E27FC236}">
-                <a16:creationId xmlns:a16="http://schemas.microsoft.com/office/drawing/2014/main" id="{D78BB8F6-86CD-F67C-A5AC-A96346005AB1}"/>
-              </a:ext>
-            </a:extLst>
-          </p:cNvPr>
-          <p:cNvSpPr>
-            <a:spLocks noGrp="1"/>
-          </p:cNvSpPr>
-          <p:nvPr>
-            <p:ph type="title"/>
-          </p:nvPr>
-        </p:nvSpPr>
-        <p:spPr>
-          <a:xfrm>
-            <a:off x="609600" y="341977"/>
-            <a:ext cx="10972800" cy="457200"/>
-          </a:xfrm>
-          <a:ln>
-            <a:solidFill>
-              <a:schemeClr val="tx1"/>
-            </a:solidFill>
-          </a:ln>
-        </p:spPr>
-        <p:txBody>
-          <a:bodyPr>
-            <a:normAutofit fontScale="90000"/>
-          </a:bodyPr>
-          <a:lstStyle/>
-          <a:p>
-            <a:pPr algn="ctr"/>
-            <a:r>
-              <a:rPr lang="en-US" sz="3000" b="1" dirty="0"/>
-              <a:t>Features Evaluation</a:t>
-            </a:r>
-            <a:endParaRPr lang="en-GB" sz="3000" b="1" dirty="0"/>
-          </a:p>
-        </p:txBody>
-      </p:sp>
-      <p:sp>
-        <p:nvSpPr>
-          <p:cNvPr id="5" name="Content Placeholder 3">
-            <a:extLst>
-              <a:ext uri="{FF2B5EF4-FFF2-40B4-BE49-F238E27FC236}">
-                <a16:creationId xmlns:a16="http://schemas.microsoft.com/office/drawing/2014/main" id="{997345AD-832D-F3D6-8EAB-FB12F55F6DFF}"/>
-              </a:ext>
-            </a:extLst>
-          </p:cNvPr>
-          <p:cNvSpPr>
-            <a:spLocks noGrp="1"/>
-          </p:cNvSpPr>
-          <p:nvPr>
-            <p:ph sz="half" idx="1"/>
-          </p:nvPr>
-        </p:nvSpPr>
-        <p:spPr>
-          <a:xfrm>
-            <a:off x="609600" y="1723856"/>
-            <a:ext cx="5364480" cy="4903748"/>
-          </a:xfrm>
-          <a:ln>
-            <a:solidFill>
-              <a:schemeClr val="tx1"/>
-            </a:solidFill>
-          </a:ln>
-        </p:spPr>
-        <p:txBody>
-          <a:bodyPr anchor="ctr">
-            <a:normAutofit fontScale="92500" lnSpcReduction="10000"/>
-          </a:bodyPr>
-          <a:lstStyle/>
-          <a:p>
-            <a:pPr marL="0" indent="0" algn="ctr">
-              <a:buNone/>
-            </a:pPr>
-            <a:r>
-              <a:rPr lang="en-US" b="1" u="sng" dirty="0"/>
-              <a:t>Best Predictors</a:t>
-            </a:r>
-            <a:endParaRPr lang="en-US" b="1" dirty="0"/>
-          </a:p>
-          <a:p>
-            <a:r>
-              <a:rPr lang="en-US" sz="2400" dirty="0"/>
-              <a:t>Enrollment </a:t>
-            </a:r>
-            <a:r>
-              <a:rPr lang="en-US" sz="2400" dirty="0">
-                <a:solidFill>
-                  <a:schemeClr val="accent5"/>
-                </a:solidFill>
-              </a:rPr>
-              <a:t>-</a:t>
-            </a:r>
-          </a:p>
-          <a:p>
-            <a:r>
-              <a:rPr lang="en-US" sz="2400" dirty="0"/>
-              <a:t># Facilities</a:t>
-            </a:r>
-            <a:r>
-              <a:rPr lang="en-US" sz="2400" dirty="0">
-                <a:solidFill>
-                  <a:schemeClr val="accent5"/>
-                </a:solidFill>
-              </a:rPr>
-              <a:t> +</a:t>
-            </a:r>
-            <a:endParaRPr lang="en-US" sz="2400" dirty="0"/>
-          </a:p>
-          <a:p>
-            <a:r>
-              <a:rPr lang="en-US" sz="2400" dirty="0"/>
-              <a:t>Conditions </a:t>
-            </a:r>
-            <a:r>
-              <a:rPr lang="en-US" sz="2400" dirty="0">
-                <a:solidFill>
-                  <a:schemeClr val="accent5"/>
-                </a:solidFill>
-              </a:rPr>
-              <a:t>+</a:t>
-            </a:r>
-          </a:p>
-          <a:p>
-            <a:r>
-              <a:rPr lang="en-US" sz="2400" dirty="0"/>
-              <a:t>Healthy Volunteers</a:t>
-            </a:r>
-            <a:r>
-              <a:rPr lang="en-US" sz="2400" dirty="0">
-                <a:solidFill>
-                  <a:schemeClr val="accent5"/>
-                </a:solidFill>
-              </a:rPr>
-              <a:t> –</a:t>
-            </a:r>
-          </a:p>
-          <a:p>
-            <a:r>
-              <a:rPr lang="en-US" sz="2400" dirty="0"/>
-              <a:t># Arms </a:t>
-            </a:r>
-            <a:r>
-              <a:rPr lang="en-US" sz="2400" dirty="0">
-                <a:solidFill>
-                  <a:schemeClr val="accent5"/>
-                </a:solidFill>
-              </a:rPr>
-              <a:t>+</a:t>
-            </a:r>
-            <a:endParaRPr lang="en-US" sz="2400" dirty="0"/>
-          </a:p>
-          <a:p>
-            <a:r>
-              <a:rPr lang="en-GB" sz="2400" dirty="0"/>
-              <a:t>Older age </a:t>
-            </a:r>
-            <a:r>
-              <a:rPr lang="en-US" sz="2400" dirty="0">
-                <a:solidFill>
-                  <a:schemeClr val="accent5"/>
-                </a:solidFill>
-              </a:rPr>
-              <a:t>+</a:t>
-            </a:r>
-          </a:p>
-          <a:p>
-            <a:r>
-              <a:rPr lang="en-US" sz="2400" dirty="0"/>
-              <a:t># Adverse</a:t>
-            </a:r>
-            <a:r>
-              <a:rPr lang="en-US" sz="2400" dirty="0">
-                <a:solidFill>
-                  <a:schemeClr val="accent5"/>
-                </a:solidFill>
-              </a:rPr>
-              <a:t> –</a:t>
-            </a:r>
-            <a:endParaRPr lang="en-GB" sz="2400" dirty="0"/>
-          </a:p>
-          <a:p>
-            <a:r>
-              <a:rPr lang="en-US" sz="2400" dirty="0"/>
-              <a:t>Interv. Model: Parallel </a:t>
-            </a:r>
-            <a:r>
-              <a:rPr lang="en-US" sz="2400" dirty="0">
-                <a:solidFill>
-                  <a:schemeClr val="accent5"/>
-                </a:solidFill>
-              </a:rPr>
-              <a:t>+ </a:t>
-            </a:r>
-            <a:r>
-              <a:rPr lang="en-US" sz="2400" dirty="0"/>
-              <a:t>,  Crossover </a:t>
-            </a:r>
-            <a:r>
-              <a:rPr lang="en-US" sz="2400" dirty="0">
-                <a:solidFill>
-                  <a:schemeClr val="accent5"/>
-                </a:solidFill>
-              </a:rPr>
-              <a:t>-</a:t>
-            </a:r>
-            <a:endParaRPr lang="en-US" sz="2400" dirty="0"/>
-          </a:p>
-          <a:p>
-            <a:r>
-              <a:rPr lang="en-GB" sz="2400" dirty="0"/>
-              <a:t>Allocation</a:t>
-            </a:r>
-            <a:r>
-              <a:rPr lang="en-US" sz="2400" dirty="0">
-                <a:solidFill>
-                  <a:schemeClr val="accent5"/>
-                </a:solidFill>
-              </a:rPr>
-              <a:t> +</a:t>
-            </a:r>
-          </a:p>
-          <a:p>
-            <a:r>
-              <a:rPr lang="en-US" sz="2400" dirty="0"/>
-              <a:t>Placebo</a:t>
-            </a:r>
-            <a:r>
-              <a:rPr lang="en-US" sz="2400" dirty="0">
-                <a:solidFill>
-                  <a:schemeClr val="accent5"/>
-                </a:solidFill>
-              </a:rPr>
-              <a:t> +</a:t>
-            </a:r>
-          </a:p>
-          <a:p>
-            <a:r>
-              <a:rPr lang="en-US" sz="2400" dirty="0"/>
-              <a:t>Funder Industry</a:t>
-            </a:r>
-            <a:r>
-              <a:rPr lang="en-US" sz="2400" dirty="0">
-                <a:solidFill>
-                  <a:schemeClr val="accent5"/>
-                </a:solidFill>
-              </a:rPr>
-              <a:t> +</a:t>
-            </a:r>
-            <a:endParaRPr lang="en-GB" sz="2400" dirty="0"/>
-          </a:p>
-        </p:txBody>
-      </p:sp>
-      <p:sp>
-        <p:nvSpPr>
-          <p:cNvPr id="8" name="Content Placeholder 7">
-            <a:extLst>
-              <a:ext uri="{FF2B5EF4-FFF2-40B4-BE49-F238E27FC236}">
-                <a16:creationId xmlns:a16="http://schemas.microsoft.com/office/drawing/2014/main" id="{AAFD135F-78E3-632E-FA22-F645956311C7}"/>
-              </a:ext>
-            </a:extLst>
-          </p:cNvPr>
-          <p:cNvSpPr>
-            <a:spLocks noGrp="1"/>
-          </p:cNvSpPr>
-          <p:nvPr>
-            <p:ph sz="half" idx="2"/>
-          </p:nvPr>
-        </p:nvSpPr>
-        <p:spPr>
-          <a:xfrm>
-            <a:off x="6217920" y="1720641"/>
-            <a:ext cx="5364480" cy="4903748"/>
-          </a:xfrm>
-          <a:ln>
-            <a:solidFill>
-              <a:schemeClr val="tx1"/>
-            </a:solidFill>
-          </a:ln>
-        </p:spPr>
-        <p:txBody>
-          <a:bodyPr>
-            <a:normAutofit fontScale="92500" lnSpcReduction="10000"/>
-          </a:bodyPr>
-          <a:lstStyle/>
-          <a:p>
-            <a:pPr marL="0" indent="0" algn="ctr">
-              <a:buNone/>
-            </a:pPr>
-            <a:endParaRPr lang="en-US" dirty="0"/>
-          </a:p>
-          <a:p>
-            <a:pPr marL="0" indent="0" algn="ctr">
-              <a:buNone/>
-            </a:pPr>
-            <a:r>
-              <a:rPr lang="en-US" b="1" u="sng" dirty="0"/>
-              <a:t>Predictors vs Phases</a:t>
-            </a:r>
-          </a:p>
-          <a:p>
-            <a:pPr marL="0" indent="0" algn="ctr">
-              <a:buNone/>
-            </a:pPr>
-            <a:endParaRPr lang="en-US" sz="2600" b="1" u="sng" dirty="0"/>
-          </a:p>
-          <a:p>
-            <a:r>
-              <a:rPr lang="en-US" sz="2400" dirty="0"/>
-              <a:t>Top Predictors ~ Phases : </a:t>
-            </a:r>
-          </a:p>
-          <a:p>
-            <a:pPr lvl="1"/>
-            <a:r>
-              <a:rPr lang="en-US" dirty="0">
-                <a:sym typeface="Wingdings" panose="05000000000000000000" pitchFamily="2" charset="2"/>
-              </a:rPr>
-              <a:t>Older / Healthy  Phase  1 - New intervention</a:t>
-            </a:r>
-            <a:endParaRPr lang="en-US" dirty="0"/>
-          </a:p>
-          <a:p>
-            <a:pPr lvl="1"/>
-            <a:r>
-              <a:rPr lang="en-US" dirty="0">
-                <a:sym typeface="Wingdings" panose="05000000000000000000" pitchFamily="2" charset="2"/>
-              </a:rPr>
-              <a:t># Adverse  ≥ Phase 2</a:t>
-            </a:r>
-          </a:p>
-          <a:p>
-            <a:pPr lvl="1"/>
-            <a:r>
-              <a:rPr lang="en-US" dirty="0">
-                <a:sym typeface="Wingdings" panose="05000000000000000000" pitchFamily="2" charset="2"/>
-              </a:rPr>
-              <a:t>Study design  Phases 2-3 (Scaled)</a:t>
-            </a:r>
-          </a:p>
-          <a:p>
-            <a:pPr lvl="1"/>
-            <a:r>
-              <a:rPr lang="en-US" dirty="0">
-                <a:sym typeface="Wingdings" panose="05000000000000000000" pitchFamily="2" charset="2"/>
-              </a:rPr>
-              <a:t>Placebo/ Stand.  Phase 3 (Interv. Comparison)</a:t>
-            </a:r>
-          </a:p>
-          <a:p>
-            <a:pPr lvl="1"/>
-            <a:endParaRPr lang="en-US" dirty="0">
-              <a:sym typeface="Wingdings" panose="05000000000000000000" pitchFamily="2" charset="2"/>
-            </a:endParaRPr>
-          </a:p>
-          <a:p>
-            <a:r>
-              <a:rPr lang="en-US" sz="2400" dirty="0">
-                <a:sym typeface="Wingdings" panose="05000000000000000000" pitchFamily="2" charset="2"/>
-              </a:rPr>
-              <a:t>Enrollment &amp; City Counts  Strongest predictors</a:t>
-            </a:r>
-          </a:p>
-        </p:txBody>
-      </p:sp>
-      <p:sp>
-        <p:nvSpPr>
-          <p:cNvPr id="3" name="TextBox 2">
-            <a:extLst>
-              <a:ext uri="{FF2B5EF4-FFF2-40B4-BE49-F238E27FC236}">
-                <a16:creationId xmlns:a16="http://schemas.microsoft.com/office/drawing/2014/main" id="{8A52800C-A200-F692-1890-42672D83430D}"/>
-              </a:ext>
-            </a:extLst>
-          </p:cNvPr>
-          <p:cNvSpPr txBox="1"/>
-          <p:nvPr/>
-        </p:nvSpPr>
-        <p:spPr>
-          <a:xfrm>
-            <a:off x="609600" y="924560"/>
-            <a:ext cx="10972800" cy="646331"/>
-          </a:xfrm>
-          <a:prstGeom prst="rect">
-            <a:avLst/>
-          </a:prstGeom>
-          <a:noFill/>
-        </p:spPr>
-        <p:txBody>
-          <a:bodyPr wrap="square" rtlCol="0">
-            <a:spAutoFit/>
-          </a:bodyPr>
-          <a:lstStyle/>
-          <a:p>
-            <a:pPr algn="ctr"/>
-            <a:r>
-              <a:rPr lang="en-US" b="1" dirty="0">
-                <a:solidFill>
-                  <a:schemeClr val="accent5"/>
-                </a:solidFill>
-              </a:rPr>
-              <a:t>+ :  High feature’s values </a:t>
-            </a:r>
-            <a:r>
-              <a:rPr lang="en-US" b="1" dirty="0">
-                <a:solidFill>
-                  <a:schemeClr val="accent5"/>
-                </a:solidFill>
-                <a:sym typeface="Wingdings" panose="05000000000000000000" pitchFamily="2" charset="2"/>
-              </a:rPr>
-              <a:t> Terminated</a:t>
-            </a:r>
-          </a:p>
-          <a:p>
-            <a:pPr algn="ctr"/>
-            <a:r>
-              <a:rPr lang="en-US" b="1" dirty="0">
-                <a:solidFill>
-                  <a:schemeClr val="accent5"/>
-                </a:solidFill>
-              </a:rPr>
-              <a:t>-  : High feature’s values </a:t>
-            </a:r>
-            <a:r>
-              <a:rPr lang="en-US" b="1" dirty="0">
-                <a:solidFill>
-                  <a:schemeClr val="accent5"/>
-                </a:solidFill>
-                <a:sym typeface="Wingdings" panose="05000000000000000000" pitchFamily="2" charset="2"/>
-              </a:rPr>
-              <a:t> Completed</a:t>
-            </a:r>
-          </a:p>
-        </p:txBody>
-      </p:sp>
-    </p:spTree>
-    <p:extLst>
-      <p:ext uri="{BB962C8B-B14F-4D97-AF65-F5344CB8AC3E}">
-        <p14:creationId xmlns:p14="http://schemas.microsoft.com/office/powerpoint/2010/main" val="1583996442"/>
-      </p:ext>
-    </p:extLst>
-  </p:cSld>
-  <p:clrMapOvr>
-    <a:masterClrMapping/>
-  </p:clrMapOvr>
-</p:sld>
-</file>
-
-<file path=ppt/slides/slide22.xml><?xml version="1.0" encoding="utf-8"?>
-<p:sld xmlns:a="http://schemas.openxmlformats.org/drawingml/2006/main" xmlns:r="http://schemas.openxmlformats.org/officeDocument/2006/relationships" xmlns:p="http://schemas.openxmlformats.org/presentationml/2006/main">
-  <p:cSld>
-    <p:spTree>
-      <p:nvGrpSpPr>
-        <p:cNvPr id="1" name=""/>
-        <p:cNvGrpSpPr/>
-        <p:nvPr/>
-      </p:nvGrpSpPr>
-      <p:grpSpPr>
-        <a:xfrm>
-          <a:off x="0" y="0"/>
-          <a:ext cx="0" cy="0"/>
-          <a:chOff x="0" y="0"/>
-          <a:chExt cx="0" cy="0"/>
-        </a:xfrm>
-      </p:grpSpPr>
       <p:pic>
         <p:nvPicPr>
           <p:cNvPr id="29" name="Picture 28">
@@ -20651,8 +20210,8 @@
         </p:blipFill>
         <p:spPr>
           <a:xfrm>
-            <a:off x="6126482" y="3579194"/>
-            <a:ext cx="5557516" cy="1832496"/>
+            <a:off x="6005802" y="4403216"/>
+            <a:ext cx="5804384" cy="2109293"/>
           </a:xfrm>
           <a:prstGeom prst="rect">
             <a:avLst/>
@@ -20688,8 +20247,8 @@
         </p:blipFill>
         <p:spPr>
           <a:xfrm>
-            <a:off x="6126482" y="1519274"/>
-            <a:ext cx="5486400" cy="1863290"/>
+            <a:off x="6008213" y="2338084"/>
+            <a:ext cx="5730106" cy="2144737"/>
           </a:xfrm>
           <a:prstGeom prst="rect">
             <a:avLst/>
@@ -20724,8 +20283,8 @@
         </p:blipFill>
         <p:spPr>
           <a:xfrm>
-            <a:off x="508002" y="3583228"/>
-            <a:ext cx="5486401" cy="1838622"/>
+            <a:off x="389732" y="4406213"/>
+            <a:ext cx="5730110" cy="2116344"/>
           </a:xfrm>
           <a:prstGeom prst="rect">
             <a:avLst/>
@@ -20761,8 +20320,8 @@
         </p:blipFill>
         <p:spPr>
           <a:xfrm>
-            <a:off x="508004" y="1519275"/>
-            <a:ext cx="5486400" cy="1863290"/>
+            <a:off x="389735" y="2338085"/>
+            <a:ext cx="5730106" cy="2144737"/>
           </a:xfrm>
           <a:prstGeom prst="rect">
             <a:avLst/>
@@ -20791,7 +20350,7 @@
         </p:nvSpPr>
         <p:spPr>
           <a:xfrm>
-            <a:off x="609600" y="550318"/>
+            <a:off x="609600" y="415045"/>
             <a:ext cx="10972800" cy="457200"/>
           </a:xfrm>
           <a:prstGeom prst="rect">
@@ -20850,7 +20409,581 @@
         </p:nvSpPr>
         <p:spPr>
           <a:xfrm>
-            <a:off x="609600" y="5882640"/>
+            <a:off x="609600" y="1100437"/>
+            <a:ext cx="10972800" cy="923330"/>
+          </a:xfrm>
+          <a:prstGeom prst="rect">
+            <a:avLst/>
+          </a:prstGeom>
+          <a:noFill/>
+        </p:spPr>
+        <p:txBody>
+          <a:bodyPr wrap="square" rtlCol="0">
+            <a:spAutoFit/>
+          </a:bodyPr>
+          <a:lstStyle/>
+          <a:p>
+            <a:pPr algn="ctr"/>
+            <a:r>
+              <a:rPr lang="en-US" dirty="0"/>
+              <a:t>Top model </a:t>
+            </a:r>
+            <a:r>
+              <a:rPr lang="en-US" dirty="0">
+                <a:sym typeface="Wingdings" panose="05000000000000000000" pitchFamily="2" charset="2"/>
+              </a:rPr>
+              <a:t> </a:t>
+            </a:r>
+            <a:r>
+              <a:rPr lang="en-US" dirty="0"/>
+              <a:t>SHAP </a:t>
+            </a:r>
+            <a:r>
+              <a:rPr lang="en-US" dirty="0">
+                <a:sym typeface="Wingdings" panose="05000000000000000000" pitchFamily="2" charset="2"/>
+              </a:rPr>
+              <a:t> 8 top features</a:t>
+            </a:r>
+            <a:endParaRPr lang="en-US" dirty="0"/>
+          </a:p>
+          <a:p>
+            <a:pPr algn="ctr"/>
+            <a:r>
+              <a:rPr lang="en-US" dirty="0"/>
+              <a:t>Enrollment </a:t>
+            </a:r>
+            <a:r>
+              <a:rPr lang="en-US" dirty="0">
+                <a:sym typeface="Wingdings" panose="05000000000000000000" pitchFamily="2" charset="2"/>
+              </a:rPr>
+              <a:t> Sparse effect  coeff towards inf</a:t>
+            </a:r>
+          </a:p>
+          <a:p>
+            <a:pPr algn="ctr"/>
+            <a:r>
+              <a:rPr lang="en-US" dirty="0">
+                <a:sym typeface="Wingdings" panose="05000000000000000000" pitchFamily="2" charset="2"/>
+              </a:rPr>
+              <a:t>SHAP ≠ Logistic Interpretation  Significance</a:t>
+            </a:r>
+            <a:endParaRPr lang="en-GB" dirty="0"/>
+          </a:p>
+        </p:txBody>
+      </p:sp>
+      <p:sp>
+        <p:nvSpPr>
+          <p:cNvPr id="3" name="Rectangle 2">
+            <a:extLst>
+              <a:ext uri="{FF2B5EF4-FFF2-40B4-BE49-F238E27FC236}">
+                <a16:creationId xmlns:a16="http://schemas.microsoft.com/office/drawing/2014/main" id="{F10D7D99-F5D5-516F-7D30-BB964DA8BD45}"/>
+              </a:ext>
+            </a:extLst>
+          </p:cNvPr>
+          <p:cNvSpPr/>
+          <p:nvPr/>
+        </p:nvSpPr>
+        <p:spPr>
+          <a:xfrm>
+            <a:off x="1991360" y="2966720"/>
+            <a:ext cx="538480" cy="203200"/>
+          </a:xfrm>
+          <a:prstGeom prst="rect">
+            <a:avLst/>
+          </a:prstGeom>
+          <a:noFill/>
+          <a:ln>
+            <a:solidFill>
+              <a:schemeClr val="accent5"/>
+            </a:solidFill>
+          </a:ln>
+        </p:spPr>
+        <p:style>
+          <a:lnRef idx="2">
+            <a:schemeClr val="accent1">
+              <a:shade val="15000"/>
+            </a:schemeClr>
+          </a:lnRef>
+          <a:fillRef idx="1">
+            <a:schemeClr val="accent1"/>
+          </a:fillRef>
+          <a:effectRef idx="0">
+            <a:schemeClr val="accent1"/>
+          </a:effectRef>
+          <a:fontRef idx="minor">
+            <a:schemeClr val="lt1"/>
+          </a:fontRef>
+        </p:style>
+        <p:txBody>
+          <a:bodyPr rtlCol="0" anchor="ctr"/>
+          <a:lstStyle/>
+          <a:p>
+            <a:pPr algn="ctr"/>
+            <a:endParaRPr lang="en-GB"/>
+          </a:p>
+        </p:txBody>
+      </p:sp>
+      <p:sp>
+        <p:nvSpPr>
+          <p:cNvPr id="4" name="Rectangle 3">
+            <a:extLst>
+              <a:ext uri="{FF2B5EF4-FFF2-40B4-BE49-F238E27FC236}">
+                <a16:creationId xmlns:a16="http://schemas.microsoft.com/office/drawing/2014/main" id="{59382B80-BBED-E474-12E9-F26C56CAA46D}"/>
+              </a:ext>
+            </a:extLst>
+          </p:cNvPr>
+          <p:cNvSpPr/>
+          <p:nvPr/>
+        </p:nvSpPr>
+        <p:spPr>
+          <a:xfrm>
+            <a:off x="9794240" y="3636333"/>
+            <a:ext cx="538480" cy="203200"/>
+          </a:xfrm>
+          <a:prstGeom prst="rect">
+            <a:avLst/>
+          </a:prstGeom>
+          <a:noFill/>
+          <a:ln>
+            <a:solidFill>
+              <a:schemeClr val="accent5"/>
+            </a:solidFill>
+          </a:ln>
+        </p:spPr>
+        <p:style>
+          <a:lnRef idx="2">
+            <a:schemeClr val="accent1">
+              <a:shade val="15000"/>
+            </a:schemeClr>
+          </a:lnRef>
+          <a:fillRef idx="1">
+            <a:schemeClr val="accent1"/>
+          </a:fillRef>
+          <a:effectRef idx="0">
+            <a:schemeClr val="accent1"/>
+          </a:effectRef>
+          <a:fontRef idx="minor">
+            <a:schemeClr val="lt1"/>
+          </a:fontRef>
+        </p:style>
+        <p:txBody>
+          <a:bodyPr rtlCol="0" anchor="ctr"/>
+          <a:lstStyle/>
+          <a:p>
+            <a:pPr algn="ctr"/>
+            <a:endParaRPr lang="en-GB"/>
+          </a:p>
+        </p:txBody>
+      </p:sp>
+    </p:spTree>
+    <p:extLst>
+      <p:ext uri="{BB962C8B-B14F-4D97-AF65-F5344CB8AC3E}">
+        <p14:creationId xmlns:p14="http://schemas.microsoft.com/office/powerpoint/2010/main" val="3402175388"/>
+      </p:ext>
+    </p:extLst>
+  </p:cSld>
+  <p:clrMapOvr>
+    <a:masterClrMapping/>
+  </p:clrMapOvr>
+</p:sld>
+</file>
+
+<file path=ppt/slides/slide22.xml><?xml version="1.0" encoding="utf-8"?>
+<p:sld xmlns:a="http://schemas.openxmlformats.org/drawingml/2006/main" xmlns:r="http://schemas.openxmlformats.org/officeDocument/2006/relationships" xmlns:p="http://schemas.openxmlformats.org/presentationml/2006/main">
+  <p:cSld>
+    <p:spTree>
+      <p:nvGrpSpPr>
+        <p:cNvPr id="1" name=""/>
+        <p:cNvGrpSpPr/>
+        <p:nvPr/>
+      </p:nvGrpSpPr>
+      <p:grpSpPr>
+        <a:xfrm>
+          <a:off x="0" y="0"/>
+          <a:ext cx="0" cy="0"/>
+          <a:chOff x="0" y="0"/>
+          <a:chExt cx="0" cy="0"/>
+        </a:xfrm>
+      </p:grpSpPr>
+      <p:sp>
+        <p:nvSpPr>
+          <p:cNvPr id="2" name="Title 1">
+            <a:extLst>
+              <a:ext uri="{FF2B5EF4-FFF2-40B4-BE49-F238E27FC236}">
+                <a16:creationId xmlns:a16="http://schemas.microsoft.com/office/drawing/2014/main" id="{D78BB8F6-86CD-F67C-A5AC-A96346005AB1}"/>
+              </a:ext>
+            </a:extLst>
+          </p:cNvPr>
+          <p:cNvSpPr>
+            <a:spLocks noGrp="1"/>
+          </p:cNvSpPr>
+          <p:nvPr>
+            <p:ph type="title"/>
+          </p:nvPr>
+        </p:nvSpPr>
+        <p:spPr>
+          <a:xfrm>
+            <a:off x="609600" y="341977"/>
+            <a:ext cx="10972800" cy="457200"/>
+          </a:xfrm>
+          <a:ln>
+            <a:solidFill>
+              <a:schemeClr val="tx1"/>
+            </a:solidFill>
+          </a:ln>
+        </p:spPr>
+        <p:txBody>
+          <a:bodyPr>
+            <a:normAutofit fontScale="90000"/>
+          </a:bodyPr>
+          <a:lstStyle/>
+          <a:p>
+            <a:pPr algn="ctr"/>
+            <a:r>
+              <a:rPr lang="en-US" sz="3000" b="1" dirty="0"/>
+              <a:t>Features </a:t>
+            </a:r>
+            <a:r>
+              <a:rPr lang="en-US" sz="3000" b="1"/>
+              <a:t>Evaluation Summary</a:t>
+            </a:r>
+            <a:endParaRPr lang="en-GB" sz="3000" b="1" dirty="0"/>
+          </a:p>
+        </p:txBody>
+      </p:sp>
+      <p:sp>
+        <p:nvSpPr>
+          <p:cNvPr id="5" name="Content Placeholder 3">
+            <a:extLst>
+              <a:ext uri="{FF2B5EF4-FFF2-40B4-BE49-F238E27FC236}">
+                <a16:creationId xmlns:a16="http://schemas.microsoft.com/office/drawing/2014/main" id="{997345AD-832D-F3D6-8EAB-FB12F55F6DFF}"/>
+              </a:ext>
+            </a:extLst>
+          </p:cNvPr>
+          <p:cNvSpPr>
+            <a:spLocks noGrp="1"/>
+          </p:cNvSpPr>
+          <p:nvPr>
+            <p:ph sz="half" idx="1"/>
+          </p:nvPr>
+        </p:nvSpPr>
+        <p:spPr>
+          <a:xfrm>
+            <a:off x="609600" y="1723856"/>
+            <a:ext cx="5364480" cy="4903748"/>
+          </a:xfrm>
+          <a:ln>
+            <a:solidFill>
+              <a:schemeClr val="tx1"/>
+            </a:solidFill>
+          </a:ln>
+        </p:spPr>
+        <p:txBody>
+          <a:bodyPr anchor="ctr">
+            <a:normAutofit fontScale="92500" lnSpcReduction="10000"/>
+          </a:bodyPr>
+          <a:lstStyle/>
+          <a:p>
+            <a:pPr marL="0" indent="0" algn="ctr">
+              <a:buNone/>
+            </a:pPr>
+            <a:r>
+              <a:rPr lang="en-US" b="1" u="sng" dirty="0"/>
+              <a:t>Best Predictors</a:t>
+            </a:r>
+            <a:endParaRPr lang="en-US" b="1" dirty="0"/>
+          </a:p>
+          <a:p>
+            <a:r>
+              <a:rPr lang="en-US" sz="2400" dirty="0"/>
+              <a:t>Enrollment </a:t>
+            </a:r>
+            <a:r>
+              <a:rPr lang="en-US" sz="2400" dirty="0">
+                <a:solidFill>
+                  <a:schemeClr val="accent5"/>
+                </a:solidFill>
+              </a:rPr>
+              <a:t>-</a:t>
+            </a:r>
+          </a:p>
+          <a:p>
+            <a:r>
+              <a:rPr lang="en-US" sz="2400" dirty="0"/>
+              <a:t># Facilities</a:t>
+            </a:r>
+            <a:r>
+              <a:rPr lang="en-US" sz="2400" dirty="0">
+                <a:solidFill>
+                  <a:schemeClr val="accent5"/>
+                </a:solidFill>
+              </a:rPr>
+              <a:t> +</a:t>
+            </a:r>
+            <a:endParaRPr lang="en-US" sz="2400" dirty="0"/>
+          </a:p>
+          <a:p>
+            <a:r>
+              <a:rPr lang="en-US" sz="2400" dirty="0"/>
+              <a:t>Conditions </a:t>
+            </a:r>
+            <a:r>
+              <a:rPr lang="en-US" sz="2400" dirty="0">
+                <a:solidFill>
+                  <a:schemeClr val="accent5"/>
+                </a:solidFill>
+              </a:rPr>
+              <a:t>+</a:t>
+            </a:r>
+          </a:p>
+          <a:p>
+            <a:r>
+              <a:rPr lang="en-US" sz="2400" dirty="0"/>
+              <a:t>Healthy Volunteers</a:t>
+            </a:r>
+            <a:r>
+              <a:rPr lang="en-US" sz="2400" dirty="0">
+                <a:solidFill>
+                  <a:schemeClr val="accent5"/>
+                </a:solidFill>
+              </a:rPr>
+              <a:t> –</a:t>
+            </a:r>
+          </a:p>
+          <a:p>
+            <a:r>
+              <a:rPr lang="en-US" sz="2400" dirty="0"/>
+              <a:t># Arms </a:t>
+            </a:r>
+            <a:r>
+              <a:rPr lang="en-US" sz="2400" dirty="0">
+                <a:solidFill>
+                  <a:schemeClr val="accent5"/>
+                </a:solidFill>
+              </a:rPr>
+              <a:t>+</a:t>
+            </a:r>
+            <a:endParaRPr lang="en-US" sz="2400" dirty="0"/>
+          </a:p>
+          <a:p>
+            <a:r>
+              <a:rPr lang="en-GB" sz="2400" dirty="0"/>
+              <a:t>Older age </a:t>
+            </a:r>
+            <a:r>
+              <a:rPr lang="en-US" sz="2400" dirty="0">
+                <a:solidFill>
+                  <a:schemeClr val="accent5"/>
+                </a:solidFill>
+              </a:rPr>
+              <a:t>+</a:t>
+            </a:r>
+          </a:p>
+          <a:p>
+            <a:r>
+              <a:rPr lang="en-US" sz="2400" dirty="0"/>
+              <a:t># Adverse</a:t>
+            </a:r>
+            <a:r>
+              <a:rPr lang="en-US" sz="2400" dirty="0">
+                <a:solidFill>
+                  <a:schemeClr val="accent5"/>
+                </a:solidFill>
+              </a:rPr>
+              <a:t> –</a:t>
+            </a:r>
+            <a:endParaRPr lang="en-GB" sz="2400" dirty="0"/>
+          </a:p>
+          <a:p>
+            <a:r>
+              <a:rPr lang="en-US" sz="2400" dirty="0"/>
+              <a:t>Interv. Model: Parallel </a:t>
+            </a:r>
+            <a:r>
+              <a:rPr lang="en-US" sz="2400" dirty="0">
+                <a:solidFill>
+                  <a:schemeClr val="accent5"/>
+                </a:solidFill>
+              </a:rPr>
+              <a:t>+ </a:t>
+            </a:r>
+            <a:r>
+              <a:rPr lang="en-US" sz="2400" dirty="0"/>
+              <a:t>,  Crossover </a:t>
+            </a:r>
+            <a:r>
+              <a:rPr lang="en-US" sz="2400" dirty="0">
+                <a:solidFill>
+                  <a:schemeClr val="accent5"/>
+                </a:solidFill>
+              </a:rPr>
+              <a:t>-</a:t>
+            </a:r>
+            <a:endParaRPr lang="en-US" sz="2400" dirty="0"/>
+          </a:p>
+          <a:p>
+            <a:r>
+              <a:rPr lang="en-GB" sz="2400" dirty="0"/>
+              <a:t>Allocation</a:t>
+            </a:r>
+            <a:r>
+              <a:rPr lang="en-US" sz="2400" dirty="0">
+                <a:solidFill>
+                  <a:schemeClr val="accent5"/>
+                </a:solidFill>
+              </a:rPr>
+              <a:t> +</a:t>
+            </a:r>
+          </a:p>
+          <a:p>
+            <a:r>
+              <a:rPr lang="en-US" sz="2400" dirty="0"/>
+              <a:t>Placebo</a:t>
+            </a:r>
+            <a:r>
+              <a:rPr lang="en-US" sz="2400" dirty="0">
+                <a:solidFill>
+                  <a:schemeClr val="accent5"/>
+                </a:solidFill>
+              </a:rPr>
+              <a:t> +</a:t>
+            </a:r>
+          </a:p>
+          <a:p>
+            <a:r>
+              <a:rPr lang="en-US" sz="2400" dirty="0"/>
+              <a:t>Funder Industry</a:t>
+            </a:r>
+            <a:r>
+              <a:rPr lang="en-US" sz="2400" dirty="0">
+                <a:solidFill>
+                  <a:schemeClr val="accent5"/>
+                </a:solidFill>
+              </a:rPr>
+              <a:t> +</a:t>
+            </a:r>
+            <a:endParaRPr lang="en-GB" sz="2400" dirty="0"/>
+          </a:p>
+        </p:txBody>
+      </p:sp>
+      <p:sp>
+        <p:nvSpPr>
+          <p:cNvPr id="8" name="Content Placeholder 7">
+            <a:extLst>
+              <a:ext uri="{FF2B5EF4-FFF2-40B4-BE49-F238E27FC236}">
+                <a16:creationId xmlns:a16="http://schemas.microsoft.com/office/drawing/2014/main" id="{AAFD135F-78E3-632E-FA22-F645956311C7}"/>
+              </a:ext>
+            </a:extLst>
+          </p:cNvPr>
+          <p:cNvSpPr>
+            <a:spLocks noGrp="1"/>
+          </p:cNvSpPr>
+          <p:nvPr>
+            <p:ph sz="half" idx="2"/>
+          </p:nvPr>
+        </p:nvSpPr>
+        <p:spPr>
+          <a:xfrm>
+            <a:off x="6217920" y="1720641"/>
+            <a:ext cx="5364480" cy="4903748"/>
+          </a:xfrm>
+          <a:ln>
+            <a:solidFill>
+              <a:schemeClr val="tx1"/>
+            </a:solidFill>
+          </a:ln>
+        </p:spPr>
+        <p:txBody>
+          <a:bodyPr>
+            <a:normAutofit fontScale="92500" lnSpcReduction="10000"/>
+          </a:bodyPr>
+          <a:lstStyle/>
+          <a:p>
+            <a:pPr marL="0" indent="0" algn="ctr">
+              <a:buNone/>
+            </a:pPr>
+            <a:endParaRPr lang="en-US" dirty="0"/>
+          </a:p>
+          <a:p>
+            <a:pPr marL="0" indent="0" algn="ctr">
+              <a:buNone/>
+            </a:pPr>
+            <a:r>
+              <a:rPr lang="en-US" b="1" u="sng" dirty="0"/>
+              <a:t>Predictors vs Phases</a:t>
+            </a:r>
+          </a:p>
+          <a:p>
+            <a:pPr marL="0" indent="0" algn="ctr">
+              <a:buNone/>
+            </a:pPr>
+            <a:endParaRPr lang="en-US" sz="2600" b="1" u="sng" dirty="0"/>
+          </a:p>
+          <a:p>
+            <a:r>
+              <a:rPr lang="en-US" sz="2400" dirty="0"/>
+              <a:t>Top Predictors ~ Phases : </a:t>
+            </a:r>
+          </a:p>
+          <a:p>
+            <a:pPr lvl="1"/>
+            <a:r>
+              <a:rPr lang="en-US" dirty="0">
+                <a:sym typeface="Wingdings" panose="05000000000000000000" pitchFamily="2" charset="2"/>
+              </a:rPr>
+              <a:t>Phase  1 - New intervention  Participants’ Health status </a:t>
+            </a:r>
+            <a:endParaRPr lang="en-US" dirty="0"/>
+          </a:p>
+          <a:p>
+            <a:pPr lvl="1"/>
+            <a:r>
+              <a:rPr lang="en-US" dirty="0">
+                <a:sym typeface="Wingdings" panose="05000000000000000000" pitchFamily="2" charset="2"/>
+              </a:rPr>
+              <a:t>Phase 2-4  # Adverse, Design </a:t>
+            </a:r>
+          </a:p>
+          <a:p>
+            <a:pPr lvl="1"/>
+            <a:r>
+              <a:rPr lang="en-US" dirty="0">
+                <a:sym typeface="Wingdings" panose="05000000000000000000" pitchFamily="2" charset="2"/>
+              </a:rPr>
+              <a:t>Phases 3  Study design, Treatment</a:t>
+            </a:r>
+          </a:p>
+          <a:p>
+            <a:pPr lvl="1"/>
+            <a:endParaRPr lang="en-US" dirty="0">
+              <a:sym typeface="Wingdings" panose="05000000000000000000" pitchFamily="2" charset="2"/>
+            </a:endParaRPr>
+          </a:p>
+          <a:p>
+            <a:r>
+              <a:rPr lang="en-US" sz="2400" dirty="0">
+                <a:sym typeface="Wingdings" panose="05000000000000000000" pitchFamily="2" charset="2"/>
+              </a:rPr>
+              <a:t>Enrollment &amp; City Counts  Strongest predictors</a:t>
+            </a:r>
+          </a:p>
+        </p:txBody>
+      </p:sp>
+      <p:sp>
+        <p:nvSpPr>
+          <p:cNvPr id="3" name="TextBox 2">
+            <a:extLst>
+              <a:ext uri="{FF2B5EF4-FFF2-40B4-BE49-F238E27FC236}">
+                <a16:creationId xmlns:a16="http://schemas.microsoft.com/office/drawing/2014/main" id="{8A52800C-A200-F692-1890-42672D83430D}"/>
+              </a:ext>
+            </a:extLst>
+          </p:cNvPr>
+          <p:cNvSpPr txBox="1"/>
+          <p:nvPr/>
+        </p:nvSpPr>
+        <p:spPr>
+          <a:xfrm>
+            <a:off x="609600" y="924560"/>
             <a:ext cx="10972800" cy="646331"/>
           </a:xfrm>
           <a:prstGeom prst="rect">
@@ -20866,32 +20999,49 @@
           <a:p>
             <a:pPr algn="ctr"/>
             <a:r>
-              <a:rPr lang="en-US" dirty="0"/>
-              <a:t>Enrollment </a:t>
-            </a:r>
-            <a:r>
-              <a:rPr lang="en-US" dirty="0">
+              <a:rPr lang="en-US" b="1" dirty="0">
+                <a:solidFill>
+                  <a:schemeClr val="accent5"/>
+                </a:solidFill>
+              </a:rPr>
+              <a:t>+ :  High feature’s values </a:t>
+            </a:r>
+            <a:r>
+              <a:rPr lang="en-US" b="1" dirty="0">
+                <a:solidFill>
+                  <a:schemeClr val="accent5"/>
+                </a:solidFill>
                 <a:sym typeface="Wingdings" panose="05000000000000000000" pitchFamily="2" charset="2"/>
               </a:rPr>
-              <a:t> Sparse effect  coeff towards inf</a:t>
+              <a:t> Terminated</a:t>
             </a:r>
           </a:p>
           <a:p>
             <a:pPr algn="ctr"/>
             <a:r>
-              <a:rPr lang="en-US" dirty="0">
+              <a:rPr lang="en-US" b="1" dirty="0">
+                <a:solidFill>
+                  <a:schemeClr val="accent5"/>
+                </a:solidFill>
+              </a:rPr>
+              <a:t>-  : High feature’s values </a:t>
+            </a:r>
+            <a:r>
+              <a:rPr lang="en-US" b="1" dirty="0">
+                <a:solidFill>
+                  <a:schemeClr val="accent5"/>
+                </a:solidFill>
                 <a:sym typeface="Wingdings" panose="05000000000000000000" pitchFamily="2" charset="2"/>
               </a:rPr>
-              <a:t>SHAP ≠ Logistic Interpretation</a:t>
-            </a:r>
-            <a:endParaRPr lang="en-GB" dirty="0"/>
+              <a:t> Completed</a:t>
+            </a:r>
           </a:p>
         </p:txBody>
       </p:sp>
     </p:spTree>
     <p:extLst>
       <p:ext uri="{BB962C8B-B14F-4D97-AF65-F5344CB8AC3E}">
-        <p14:creationId xmlns:p14="http://schemas.microsoft.com/office/powerpoint/2010/main" val="3402175388"/>
+        <p14:creationId xmlns:p14="http://schemas.microsoft.com/office/powerpoint/2010/main" val="1583996442"/>
       </p:ext>
     </p:extLst>
   </p:cSld>
@@ -20974,8 +21124,8 @@
         </p:nvSpPr>
         <p:spPr>
           <a:xfrm>
-            <a:off x="9818658" y="3949498"/>
-            <a:ext cx="1763742" cy="2308324"/>
+            <a:off x="9818658" y="4483942"/>
+            <a:ext cx="1763742" cy="2031325"/>
           </a:xfrm>
           <a:prstGeom prst="rect">
             <a:avLst/>
@@ -20988,7 +21138,7 @@
           </a:ln>
         </p:spPr>
         <p:txBody>
-          <a:bodyPr wrap="square" rtlCol="0">
+          <a:bodyPr wrap="square" rtlCol="0" anchor="ctr">
             <a:spAutoFit/>
           </a:bodyPr>
           <a:lstStyle/>
@@ -21117,17 +21267,6 @@
               </a:rPr>
               <a:t> +</a:t>
             </a:r>
-          </a:p>
-          <a:p>
-            <a:pPr marL="285750" indent="-285750">
-              <a:buFont typeface="Arial" panose="020B0604020202020204" pitchFamily="34" charset="0"/>
-              <a:buChar char="•"/>
-            </a:pPr>
-            <a:endParaRPr lang="en-US" dirty="0">
-              <a:solidFill>
-                <a:schemeClr val="accent5"/>
-              </a:solidFill>
-            </a:endParaRPr>
           </a:p>
         </p:txBody>
       </p:sp>
@@ -21145,8 +21284,8 @@
         </p:nvSpPr>
         <p:spPr>
           <a:xfrm>
-            <a:off x="609600" y="941232"/>
-            <a:ext cx="10972800" cy="369332"/>
+            <a:off x="609600" y="906508"/>
+            <a:ext cx="10972800" cy="646331"/>
           </a:xfrm>
           <a:prstGeom prst="rect">
             <a:avLst/>
@@ -21169,6 +21308,15 @@
                 <a:sym typeface="Wingdings" panose="05000000000000000000" pitchFamily="2" charset="2"/>
               </a:rPr>
               <a:t> Removed</a:t>
+            </a:r>
+          </a:p>
+          <a:p>
+            <a:pPr algn="ctr"/>
+            <a:r>
+              <a:rPr lang="en-US" dirty="0">
+                <a:sym typeface="Wingdings" panose="05000000000000000000" pitchFamily="2" charset="2"/>
+              </a:rPr>
+              <a:t>Withdrawn vs Terminated  Direction</a:t>
             </a:r>
             <a:endParaRPr lang="en-GB" dirty="0"/>
           </a:p>
@@ -21196,8 +21344,8 @@
         </p:blipFill>
         <p:spPr>
           <a:xfrm>
-            <a:off x="609600" y="1310564"/>
-            <a:ext cx="5143762" cy="2638936"/>
+            <a:off x="609599" y="1577785"/>
+            <a:ext cx="5307860" cy="2723124"/>
           </a:xfrm>
           <a:prstGeom prst="rect">
             <a:avLst/>
@@ -21232,7 +21380,7 @@
         </p:blipFill>
         <p:spPr>
           <a:xfrm>
-            <a:off x="609600" y="4082217"/>
+            <a:off x="609600" y="4652318"/>
             <a:ext cx="4073544" cy="1945781"/>
           </a:xfrm>
           <a:prstGeom prst="rect">
@@ -21268,8 +21416,8 @@
         </p:blipFill>
         <p:spPr>
           <a:xfrm>
-            <a:off x="6261967" y="1310564"/>
-            <a:ext cx="5320433" cy="2638935"/>
+            <a:off x="5992591" y="1577785"/>
+            <a:ext cx="5589810" cy="2772546"/>
           </a:xfrm>
           <a:prstGeom prst="rect">
             <a:avLst/>
@@ -21304,8 +21452,8 @@
         </p:blipFill>
         <p:spPr>
           <a:xfrm>
-            <a:off x="4837456" y="4082216"/>
-            <a:ext cx="4906910" cy="1617543"/>
+            <a:off x="4683144" y="4483943"/>
+            <a:ext cx="4906910" cy="2114156"/>
           </a:xfrm>
           <a:prstGeom prst="rect">
             <a:avLst/>
@@ -21366,8 +21514,8 @@
         </p:nvSpPr>
         <p:spPr>
           <a:xfrm>
-            <a:off x="609600" y="1750291"/>
-            <a:ext cx="10972800" cy="3357418"/>
+            <a:off x="609600" y="2909421"/>
+            <a:ext cx="5235615" cy="3647638"/>
           </a:xfrm>
           <a:ln>
             <a:solidFill>
@@ -21381,58 +21529,67 @@
           </a:bodyPr>
           <a:lstStyle/>
           <a:p>
-            <a:r>
-              <a:rPr lang="en-GB" sz="2500" dirty="0"/>
+            <a:pPr marL="0" indent="0" algn="ctr">
+              <a:buNone/>
+            </a:pPr>
+            <a:r>
+              <a:rPr lang="en-GB" sz="1800" b="1" dirty="0"/>
+              <a:t>Background</a:t>
+            </a:r>
+          </a:p>
+          <a:p>
+            <a:r>
+              <a:rPr lang="en-GB" sz="1800" dirty="0"/>
               <a:t>Enrollment</a:t>
             </a:r>
           </a:p>
           <a:p>
             <a:r>
-              <a:rPr lang="en-GB" sz="2500" dirty="0"/>
+              <a:rPr lang="en-GB" sz="1800" dirty="0"/>
               <a:t>Disease category (e.g., neoplasms) </a:t>
             </a:r>
             <a:r>
-              <a:rPr lang="en-GB" sz="2500" dirty="0">
+              <a:rPr lang="en-GB" sz="1800" dirty="0">
+                <a:sym typeface="Wingdings" panose="05000000000000000000" pitchFamily="2" charset="2"/>
+              </a:rPr>
+              <a:t> Affects enrollment</a:t>
+            </a:r>
+            <a:endParaRPr lang="en-GB" sz="1800" dirty="0"/>
+          </a:p>
+          <a:p>
+            <a:r>
+              <a:rPr lang="en-GB" sz="1800" dirty="0"/>
+              <a:t>Number of facilities </a:t>
+            </a:r>
+            <a:r>
+              <a:rPr lang="en-GB" sz="1800" dirty="0">
                 <a:sym typeface="Wingdings" panose="05000000000000000000" pitchFamily="2" charset="2"/>
               </a:rPr>
               <a:t> Also, affects enrollment</a:t>
             </a:r>
-            <a:endParaRPr lang="en-GB" sz="2500" dirty="0"/>
-          </a:p>
-          <a:p>
-            <a:r>
-              <a:rPr lang="en-GB" sz="2500" dirty="0"/>
-              <a:t>Number of facilities </a:t>
-            </a:r>
-            <a:r>
-              <a:rPr lang="en-GB" sz="2500" dirty="0">
-                <a:sym typeface="Wingdings" panose="05000000000000000000" pitchFamily="2" charset="2"/>
-              </a:rPr>
-              <a:t> Also, affects enrollment</a:t>
-            </a:r>
-            <a:endParaRPr lang="en-GB" sz="2500" dirty="0"/>
-          </a:p>
-          <a:p>
-            <a:r>
-              <a:rPr lang="en-GB" sz="2500" dirty="0"/>
+            <a:endParaRPr lang="en-GB" sz="1800" dirty="0"/>
+          </a:p>
+          <a:p>
+            <a:r>
+              <a:rPr lang="en-GB" sz="1800" dirty="0"/>
               <a:t>Healthy Volunteers</a:t>
             </a:r>
           </a:p>
           <a:p>
             <a:r>
-              <a:rPr lang="en-GB" sz="2500" dirty="0"/>
+              <a:rPr lang="en-GB" sz="1800" dirty="0"/>
               <a:t>Number of Adverse Events</a:t>
             </a:r>
           </a:p>
           <a:p>
             <a:r>
-              <a:rPr lang="en-GB" sz="2500" dirty="0"/>
-              <a:t>Funder type (e.g., Industry)</a:t>
-            </a:r>
-          </a:p>
-          <a:p>
-            <a:r>
-              <a:rPr lang="en-GB" sz="2500" dirty="0"/>
+              <a:rPr lang="en-GB" sz="1800" dirty="0"/>
+              <a:t>Funder type (e.g., non-Industry)</a:t>
+            </a:r>
+          </a:p>
+          <a:p>
+            <a:r>
+              <a:rPr lang="en-GB" sz="1800" dirty="0"/>
               <a:t>Other (e., Administrative, supplies etc.)</a:t>
             </a:r>
           </a:p>
@@ -21456,7 +21613,7 @@
         </p:nvSpPr>
         <p:spPr>
           <a:xfrm>
-            <a:off x="609600" y="474562"/>
+            <a:off x="609600" y="439837"/>
             <a:ext cx="10972800" cy="457200"/>
           </a:xfrm>
           <a:ln>
@@ -21474,17 +21631,290 @@
             <a:pPr algn="ctr"/>
             <a:r>
               <a:rPr lang="en-GB" sz="3200" b="1" dirty="0"/>
-              <a:t>Early Termination (Background Research)</a:t>
+              <a:t>Background Research &amp; Summary</a:t>
+            </a:r>
+          </a:p>
+        </p:txBody>
+      </p:sp>
+      <p:sp>
+        <p:nvSpPr>
+          <p:cNvPr id="2" name="TextBox 1">
+            <a:extLst>
+              <a:ext uri="{FF2B5EF4-FFF2-40B4-BE49-F238E27FC236}">
+                <a16:creationId xmlns:a16="http://schemas.microsoft.com/office/drawing/2014/main" id="{608B01A7-91F3-6875-4CD6-3BD2CA6131EB}"/>
+              </a:ext>
+            </a:extLst>
+          </p:cNvPr>
+          <p:cNvSpPr txBox="1"/>
+          <p:nvPr/>
+        </p:nvSpPr>
+        <p:spPr>
+          <a:xfrm>
+            <a:off x="609600" y="1070753"/>
+            <a:ext cx="10972800" cy="400110"/>
+          </a:xfrm>
+          <a:prstGeom prst="rect">
+            <a:avLst/>
+          </a:prstGeom>
+          <a:noFill/>
+        </p:spPr>
+        <p:txBody>
+          <a:bodyPr wrap="square" rtlCol="0" anchor="ctr">
+            <a:spAutoFit/>
+          </a:bodyPr>
+          <a:lstStyle/>
+          <a:p>
+            <a:pPr algn="ctr"/>
+            <a:r>
+              <a:rPr lang="en-US" sz="2000" dirty="0"/>
+              <a:t>Literature Alignment</a:t>
+            </a:r>
+          </a:p>
+        </p:txBody>
+      </p:sp>
+      <p:sp>
+        <p:nvSpPr>
+          <p:cNvPr id="4" name="Content Placeholder 6">
+            <a:extLst>
+              <a:ext uri="{FF2B5EF4-FFF2-40B4-BE49-F238E27FC236}">
+                <a16:creationId xmlns:a16="http://schemas.microsoft.com/office/drawing/2014/main" id="{385A9581-03F7-49F9-A93D-E221AD38613E}"/>
+              </a:ext>
+            </a:extLst>
+          </p:cNvPr>
+          <p:cNvSpPr txBox="1">
+            <a:spLocks/>
+          </p:cNvSpPr>
+          <p:nvPr/>
+        </p:nvSpPr>
+        <p:spPr>
+          <a:xfrm>
+            <a:off x="6346787" y="2909421"/>
+            <a:ext cx="5235615" cy="3647638"/>
+          </a:xfrm>
+          <a:prstGeom prst="rect">
+            <a:avLst/>
+          </a:prstGeom>
+          <a:ln>
+            <a:solidFill>
+              <a:schemeClr val="tx1"/>
+            </a:solidFill>
+          </a:ln>
+        </p:spPr>
+        <p:txBody>
+          <a:bodyPr vert="horz" lIns="91440" tIns="45720" rIns="91440" bIns="45720" rtlCol="0" anchor="t">
+            <a:noAutofit/>
+          </a:bodyPr>
+          <a:lstStyle>
+            <a:lvl1pPr marL="228600" indent="-228600" algn="l" defTabSz="914400" rtl="0" eaLnBrk="1" latinLnBrk="0" hangingPunct="1">
+              <a:lnSpc>
+                <a:spcPct val="90000"/>
+              </a:lnSpc>
+              <a:spcBef>
+                <a:spcPts val="1000"/>
+              </a:spcBef>
+              <a:buFont typeface="Arial" panose="020B0604020202020204" pitchFamily="34" charset="0"/>
+              <a:buChar char="•"/>
+              <a:defRPr sz="2800" kern="1200">
+                <a:solidFill>
+                  <a:schemeClr val="tx1"/>
+                </a:solidFill>
+                <a:latin typeface="+mn-lt"/>
+                <a:ea typeface="+mn-ea"/>
+                <a:cs typeface="+mn-cs"/>
+              </a:defRPr>
+            </a:lvl1pPr>
+            <a:lvl2pPr marL="685800" indent="-228600" algn="l" defTabSz="914400" rtl="0" eaLnBrk="1" latinLnBrk="0" hangingPunct="1">
+              <a:lnSpc>
+                <a:spcPct val="90000"/>
+              </a:lnSpc>
+              <a:spcBef>
+                <a:spcPts val="500"/>
+              </a:spcBef>
+              <a:buFont typeface="Arial" panose="020B0604020202020204" pitchFamily="34" charset="0"/>
+              <a:buChar char="•"/>
+              <a:defRPr sz="2400" kern="1200">
+                <a:solidFill>
+                  <a:schemeClr val="tx1"/>
+                </a:solidFill>
+                <a:latin typeface="+mn-lt"/>
+                <a:ea typeface="+mn-ea"/>
+                <a:cs typeface="+mn-cs"/>
+              </a:defRPr>
+            </a:lvl2pPr>
+            <a:lvl3pPr marL="1143000" indent="-228600" algn="l" defTabSz="914400" rtl="0" eaLnBrk="1" latinLnBrk="0" hangingPunct="1">
+              <a:lnSpc>
+                <a:spcPct val="90000"/>
+              </a:lnSpc>
+              <a:spcBef>
+                <a:spcPts val="500"/>
+              </a:spcBef>
+              <a:buFont typeface="Arial" panose="020B0604020202020204" pitchFamily="34" charset="0"/>
+              <a:buChar char="•"/>
+              <a:defRPr sz="2000" kern="1200">
+                <a:solidFill>
+                  <a:schemeClr val="tx1"/>
+                </a:solidFill>
+                <a:latin typeface="+mn-lt"/>
+                <a:ea typeface="+mn-ea"/>
+                <a:cs typeface="+mn-cs"/>
+              </a:defRPr>
+            </a:lvl3pPr>
+            <a:lvl4pPr marL="1600200" indent="-228600" algn="l" defTabSz="914400" rtl="0" eaLnBrk="1" latinLnBrk="0" hangingPunct="1">
+              <a:lnSpc>
+                <a:spcPct val="90000"/>
+              </a:lnSpc>
+              <a:spcBef>
+                <a:spcPts val="500"/>
+              </a:spcBef>
+              <a:buFont typeface="Arial" panose="020B0604020202020204" pitchFamily="34" charset="0"/>
+              <a:buChar char="•"/>
+              <a:defRPr sz="1800" kern="1200">
+                <a:solidFill>
+                  <a:schemeClr val="tx1"/>
+                </a:solidFill>
+                <a:latin typeface="+mn-lt"/>
+                <a:ea typeface="+mn-ea"/>
+                <a:cs typeface="+mn-cs"/>
+              </a:defRPr>
+            </a:lvl4pPr>
+            <a:lvl5pPr marL="2057400" indent="-228600" algn="l" defTabSz="914400" rtl="0" eaLnBrk="1" latinLnBrk="0" hangingPunct="1">
+              <a:lnSpc>
+                <a:spcPct val="90000"/>
+              </a:lnSpc>
+              <a:spcBef>
+                <a:spcPts val="500"/>
+              </a:spcBef>
+              <a:buFont typeface="Arial" panose="020B0604020202020204" pitchFamily="34" charset="0"/>
+              <a:buChar char="•"/>
+              <a:defRPr sz="1800" kern="1200">
+                <a:solidFill>
+                  <a:schemeClr val="tx1"/>
+                </a:solidFill>
+                <a:latin typeface="+mn-lt"/>
+                <a:ea typeface="+mn-ea"/>
+                <a:cs typeface="+mn-cs"/>
+              </a:defRPr>
+            </a:lvl5pPr>
+            <a:lvl6pPr marL="2514600" indent="-228600" algn="l" defTabSz="914400" rtl="0" eaLnBrk="1" latinLnBrk="0" hangingPunct="1">
+              <a:lnSpc>
+                <a:spcPct val="90000"/>
+              </a:lnSpc>
+              <a:spcBef>
+                <a:spcPts val="500"/>
+              </a:spcBef>
+              <a:buFont typeface="Arial" panose="020B0604020202020204" pitchFamily="34" charset="0"/>
+              <a:buChar char="•"/>
+              <a:defRPr sz="1800" kern="1200">
+                <a:solidFill>
+                  <a:schemeClr val="tx1"/>
+                </a:solidFill>
+                <a:latin typeface="+mn-lt"/>
+                <a:ea typeface="+mn-ea"/>
+                <a:cs typeface="+mn-cs"/>
+              </a:defRPr>
+            </a:lvl6pPr>
+            <a:lvl7pPr marL="2971800" indent="-228600" algn="l" defTabSz="914400" rtl="0" eaLnBrk="1" latinLnBrk="0" hangingPunct="1">
+              <a:lnSpc>
+                <a:spcPct val="90000"/>
+              </a:lnSpc>
+              <a:spcBef>
+                <a:spcPts val="500"/>
+              </a:spcBef>
+              <a:buFont typeface="Arial" panose="020B0604020202020204" pitchFamily="34" charset="0"/>
+              <a:buChar char="•"/>
+              <a:defRPr sz="1800" kern="1200">
+                <a:solidFill>
+                  <a:schemeClr val="tx1"/>
+                </a:solidFill>
+                <a:latin typeface="+mn-lt"/>
+                <a:ea typeface="+mn-ea"/>
+                <a:cs typeface="+mn-cs"/>
+              </a:defRPr>
+            </a:lvl7pPr>
+            <a:lvl8pPr marL="3429000" indent="-228600" algn="l" defTabSz="914400" rtl="0" eaLnBrk="1" latinLnBrk="0" hangingPunct="1">
+              <a:lnSpc>
+                <a:spcPct val="90000"/>
+              </a:lnSpc>
+              <a:spcBef>
+                <a:spcPts val="500"/>
+              </a:spcBef>
+              <a:buFont typeface="Arial" panose="020B0604020202020204" pitchFamily="34" charset="0"/>
+              <a:buChar char="•"/>
+              <a:defRPr sz="1800" kern="1200">
+                <a:solidFill>
+                  <a:schemeClr val="tx1"/>
+                </a:solidFill>
+                <a:latin typeface="+mn-lt"/>
+                <a:ea typeface="+mn-ea"/>
+                <a:cs typeface="+mn-cs"/>
+              </a:defRPr>
+            </a:lvl8pPr>
+            <a:lvl9pPr marL="3886200" indent="-228600" algn="l" defTabSz="914400" rtl="0" eaLnBrk="1" latinLnBrk="0" hangingPunct="1">
+              <a:lnSpc>
+                <a:spcPct val="90000"/>
+              </a:lnSpc>
+              <a:spcBef>
+                <a:spcPts val="500"/>
+              </a:spcBef>
+              <a:buFont typeface="Arial" panose="020B0604020202020204" pitchFamily="34" charset="0"/>
+              <a:buChar char="•"/>
+              <a:defRPr sz="1800" kern="1200">
+                <a:solidFill>
+                  <a:schemeClr val="tx1"/>
+                </a:solidFill>
+                <a:latin typeface="+mn-lt"/>
+                <a:ea typeface="+mn-ea"/>
+                <a:cs typeface="+mn-cs"/>
+              </a:defRPr>
+            </a:lvl9pPr>
+          </a:lstStyle>
+          <a:p>
+            <a:pPr marL="0" indent="0" algn="ctr">
+              <a:buNone/>
+            </a:pPr>
+            <a:endParaRPr lang="en-GB" sz="2000" b="1" dirty="0"/>
+          </a:p>
+          <a:p>
+            <a:pPr marL="0" indent="0" algn="ctr">
+              <a:buNone/>
+            </a:pPr>
+            <a:r>
+              <a:rPr lang="en-GB" sz="2000" b="1" dirty="0"/>
+              <a:t>Features ~ Phase</a:t>
+            </a:r>
+          </a:p>
+          <a:p>
+            <a:r>
+              <a:rPr lang="en-GB" sz="2000" dirty="0"/>
+              <a:t>Phase 1: New treatment ~ Health status </a:t>
+            </a:r>
+          </a:p>
+          <a:p>
+            <a:r>
+              <a:rPr lang="en-GB" sz="2000" dirty="0"/>
+              <a:t>Phase 2: Adverse, Therapeutic</a:t>
+            </a:r>
+          </a:p>
+          <a:p>
+            <a:r>
+              <a:rPr lang="en-GB" sz="2000" dirty="0"/>
+              <a:t>Phase 3: Design, Treatment comparison</a:t>
+            </a:r>
+          </a:p>
+          <a:p>
+            <a:r>
+              <a:rPr lang="en-GB" sz="2000" dirty="0"/>
+              <a:t>Phase 4: Approved Treatment~ Interv. Model</a:t>
             </a:r>
           </a:p>
         </p:txBody>
       </p:sp>
       <p:pic>
         <p:nvPicPr>
-          <p:cNvPr id="14" name="Picture 13">
+          <p:cNvPr id="6" name="Picture 5">
             <a:extLst>
               <a:ext uri="{FF2B5EF4-FFF2-40B4-BE49-F238E27FC236}">
-                <a16:creationId xmlns:a16="http://schemas.microsoft.com/office/drawing/2014/main" id="{02054822-7CFA-3734-870F-31D73313B46C}"/>
+                <a16:creationId xmlns:a16="http://schemas.microsoft.com/office/drawing/2014/main" id="{8EC81A22-9F3E-3963-5EB9-300275B01289}"/>
               </a:ext>
             </a:extLst>
           </p:cNvPr>
@@ -21501,50 +21931,14 @@
         </p:blipFill>
         <p:spPr>
           <a:xfrm>
-            <a:off x="2202247" y="5400348"/>
-            <a:ext cx="7787506" cy="1284030"/>
+            <a:off x="2468577" y="1695887"/>
+            <a:ext cx="7254845" cy="988509"/>
           </a:xfrm>
           <a:prstGeom prst="rect">
             <a:avLst/>
           </a:prstGeom>
         </p:spPr>
       </p:pic>
-      <p:sp>
-        <p:nvSpPr>
-          <p:cNvPr id="2" name="TextBox 1">
-            <a:extLst>
-              <a:ext uri="{FF2B5EF4-FFF2-40B4-BE49-F238E27FC236}">
-                <a16:creationId xmlns:a16="http://schemas.microsoft.com/office/drawing/2014/main" id="{608B01A7-91F3-6875-4CD6-3BD2CA6131EB}"/>
-              </a:ext>
-            </a:extLst>
-          </p:cNvPr>
-          <p:cNvSpPr txBox="1"/>
-          <p:nvPr/>
-        </p:nvSpPr>
-        <p:spPr>
-          <a:xfrm>
-            <a:off x="609600" y="1163351"/>
-            <a:ext cx="10972800" cy="400110"/>
-          </a:xfrm>
-          <a:prstGeom prst="rect">
-            <a:avLst/>
-          </a:prstGeom>
-          <a:noFill/>
-        </p:spPr>
-        <p:txBody>
-          <a:bodyPr wrap="square" rtlCol="0" anchor="ctr">
-            <a:spAutoFit/>
-          </a:bodyPr>
-          <a:lstStyle/>
-          <a:p>
-            <a:pPr algn="ctr"/>
-            <a:r>
-              <a:rPr lang="en-US" sz="2000" dirty="0"/>
-              <a:t>Literature Alignment</a:t>
-            </a:r>
-          </a:p>
-        </p:txBody>
-      </p:sp>
     </p:spTree>
     <p:extLst>
       <p:ext uri="{BB962C8B-B14F-4D97-AF65-F5344CB8AC3E}">
@@ -21740,7 +22134,7 @@
           <a:p>
             <a:r>
               <a:rPr lang="en-GB" sz="2000" b="1" dirty="0"/>
-              <a:t>More features checked </a:t>
+              <a:t>More features</a:t>
             </a:r>
             <a:br>
               <a:rPr lang="en-GB" sz="2000" b="1" dirty="0"/>
@@ -21755,15 +22149,14 @@
               <a:rPr lang="en-GB" sz="2000" b="1" dirty="0"/>
               <a:t>More models </a:t>
             </a:r>
-            <a:r>
-              <a:rPr lang="en-GB" sz="2000" dirty="0"/>
-              <a:t>(e.g, </a:t>
-            </a:r>
+            <a:br>
+              <a:rPr lang="en-GB" sz="2000" b="1" dirty="0"/>
+            </a:br>
             <a:r>
               <a:rPr lang="en-GB" sz="2000" dirty="0">
                 <a:sym typeface="Wingdings" panose="05000000000000000000" pitchFamily="2" charset="2"/>
               </a:rPr>
-              <a:t>LightBoost)</a:t>
+              <a:t>LightBoost</a:t>
             </a:r>
             <a:br>
               <a:rPr lang="en-GB" sz="2000" b="1" dirty="0">
@@ -21774,8 +22167,68 @@
               <a:rPr lang="en-GB" sz="2000" dirty="0">
                 <a:sym typeface="Wingdings" panose="05000000000000000000" pitchFamily="2" charset="2"/>
               </a:rPr>
-              <a:t>Clinical practice impact</a:t>
-            </a:r>
+              <a:t>Clinical practice impact </a:t>
+            </a:r>
+          </a:p>
+          <a:p>
+            <a:r>
+              <a:rPr lang="en-GB" sz="2000" b="1" dirty="0">
+                <a:sym typeface="Wingdings" panose="05000000000000000000" pitchFamily="2" charset="2"/>
+              </a:rPr>
+              <a:t>Imbalance sensitive metrics</a:t>
+            </a:r>
+            <a:br>
+              <a:rPr lang="en-GB" sz="2000" b="1" dirty="0">
+                <a:sym typeface="Wingdings" panose="05000000000000000000" pitchFamily="2" charset="2"/>
+              </a:rPr>
+            </a:br>
+            <a:r>
+              <a:rPr lang="en-GB" sz="2000" dirty="0">
+                <a:sym typeface="Wingdings" panose="05000000000000000000" pitchFamily="2" charset="2"/>
+              </a:rPr>
+              <a:t>MCC, BA, F1, PR Curves</a:t>
+            </a:r>
+          </a:p>
+          <a:p>
+            <a:r>
+              <a:rPr lang="en-GB" sz="2000" b="1" dirty="0">
+                <a:sym typeface="Wingdings" panose="05000000000000000000" pitchFamily="2" charset="2"/>
+              </a:rPr>
+              <a:t>Interpretability of ML </a:t>
+            </a:r>
+            <a:br>
+              <a:rPr lang="en-GB" sz="2000" b="1" dirty="0">
+                <a:sym typeface="Wingdings" panose="05000000000000000000" pitchFamily="2" charset="2"/>
+              </a:rPr>
+            </a:br>
+            <a:r>
+              <a:rPr lang="en-GB" sz="2000" dirty="0">
+                <a:sym typeface="Wingdings" panose="05000000000000000000" pitchFamily="2" charset="2"/>
+              </a:rPr>
+              <a:t>SHAP plots, Logistic</a:t>
+            </a:r>
+          </a:p>
+          <a:p>
+            <a:r>
+              <a:rPr lang="en-GB" sz="2000" b="1" dirty="0">
+                <a:sym typeface="Wingdings" panose="05000000000000000000" pitchFamily="2" charset="2"/>
+              </a:rPr>
+              <a:t>Sample Size</a:t>
+            </a:r>
+          </a:p>
+          <a:p>
+            <a:pPr marL="233363" lvl="1" indent="0">
+              <a:buNone/>
+            </a:pPr>
+            <a:r>
+              <a:rPr lang="en-GB" sz="2000" dirty="0">
+                <a:sym typeface="Wingdings" panose="05000000000000000000" pitchFamily="2" charset="2"/>
+              </a:rPr>
+              <a:t>Efficiently large: 2011-2024 , EPV</a:t>
+            </a:r>
+            <a:endParaRPr lang="en-GB" sz="2000" b="1" dirty="0">
+              <a:sym typeface="Wingdings" panose="05000000000000000000" pitchFamily="2" charset="2"/>
+            </a:endParaRPr>
           </a:p>
           <a:p>
             <a:r>
@@ -21811,75 +22264,7 @@
               <a:rPr lang="en-GB" sz="2000" dirty="0">
                 <a:sym typeface="Wingdings" panose="05000000000000000000" pitchFamily="2" charset="2"/>
               </a:rPr>
-              <a:t>Information lost</a:t>
-            </a:r>
-          </a:p>
-          <a:p>
-            <a:r>
-              <a:rPr lang="en-GB" sz="2000" b="1" dirty="0">
-                <a:sym typeface="Wingdings" panose="05000000000000000000" pitchFamily="2" charset="2"/>
-              </a:rPr>
-              <a:t>Sample Size</a:t>
-            </a:r>
-          </a:p>
-          <a:p>
-            <a:pPr marL="233363" lvl="1" indent="0">
-              <a:buNone/>
-            </a:pPr>
-            <a:r>
-              <a:rPr lang="en-GB" sz="2000" dirty="0">
-                <a:sym typeface="Wingdings" panose="05000000000000000000" pitchFamily="2" charset="2"/>
-              </a:rPr>
-              <a:t>Efficiently large: 2011-2024</a:t>
-            </a:r>
-          </a:p>
-          <a:p>
-            <a:pPr marL="233363" lvl="1" indent="0">
-              <a:buNone/>
-            </a:pPr>
-            <a:r>
-              <a:rPr lang="en-GB" sz="2000" dirty="0">
-                <a:sym typeface="Wingdings" panose="05000000000000000000" pitchFamily="2" charset="2"/>
-              </a:rPr>
-              <a:t>EPV </a:t>
-            </a:r>
-          </a:p>
-          <a:p>
-            <a:r>
-              <a:rPr lang="en-GB" sz="2000" b="1" dirty="0">
-                <a:sym typeface="Wingdings" panose="05000000000000000000" pitchFamily="2" charset="2"/>
-              </a:rPr>
-              <a:t>Imbalance sensitive metrics</a:t>
-            </a:r>
-            <a:br>
-              <a:rPr lang="en-GB" sz="2000" b="1" dirty="0">
-                <a:sym typeface="Wingdings" panose="05000000000000000000" pitchFamily="2" charset="2"/>
-              </a:rPr>
-            </a:br>
-            <a:r>
-              <a:rPr lang="en-GB" sz="2000" dirty="0">
-                <a:sym typeface="Wingdings" panose="05000000000000000000" pitchFamily="2" charset="2"/>
-              </a:rPr>
-              <a:t>MCC, BA, F1, PR Curves</a:t>
-            </a:r>
-          </a:p>
-          <a:p>
-            <a:r>
-              <a:rPr lang="en-GB" sz="2000" b="1" dirty="0">
-                <a:sym typeface="Wingdings" panose="05000000000000000000" pitchFamily="2" charset="2"/>
-              </a:rPr>
-              <a:t>Interpretability of ML </a:t>
-            </a:r>
-            <a:br>
-              <a:rPr lang="en-GB" sz="2000" b="1" dirty="0">
-                <a:sym typeface="Wingdings" panose="05000000000000000000" pitchFamily="2" charset="2"/>
-              </a:rPr>
-            </a:br>
-            <a:r>
-              <a:rPr lang="en-GB" sz="2000" dirty="0">
-                <a:sym typeface="Wingdings" panose="05000000000000000000" pitchFamily="2" charset="2"/>
-              </a:rPr>
-              <a:t>SHAP plots</a:t>
+              <a:t>Information loss</a:t>
             </a:r>
           </a:p>
         </p:txBody>
@@ -21929,20 +22314,7 @@
             </a:r>
             <a:r>
               <a:rPr lang="en-US" sz="2000" dirty="0"/>
-              <a:t>RegEx </a:t>
-            </a:r>
-          </a:p>
-          <a:p>
-            <a:r>
-              <a:rPr lang="en-US" sz="2000" b="1" dirty="0"/>
-              <a:t>Inaccurate dataset registries  </a:t>
-            </a:r>
-            <a:br>
-              <a:rPr lang="en-US" sz="2000" b="1" dirty="0"/>
-            </a:br>
-            <a:r>
-              <a:rPr lang="en-US" sz="2000" dirty="0"/>
-              <a:t>Wrongly, optimally registered fields, null etc. </a:t>
+              <a:t>RegEx  </a:t>
             </a:r>
             <a:endParaRPr lang="en-US" sz="2000" dirty="0">
               <a:sym typeface="Wingdings" panose="05000000000000000000" pitchFamily="2" charset="2"/>
@@ -21951,7 +22323,7 @@
           <a:p>
             <a:r>
               <a:rPr lang="en-US" sz="2000" b="1" dirty="0"/>
-              <a:t>Random Under Sample  </a:t>
+              <a:t>Random Under Sample </a:t>
             </a:r>
             <a:r>
               <a:rPr lang="en-US" sz="2000" b="1" dirty="0">
@@ -21983,43 +22355,13 @@
           <a:p>
             <a:r>
               <a:rPr lang="en-US" sz="2000" b="1" dirty="0"/>
-              <a:t>Models</a:t>
-            </a:r>
-            <a:br>
+              <a:t>No alternative classic statistics models</a:t>
+            </a:r>
+          </a:p>
+          <a:p>
+            <a:r>
               <a:rPr lang="en-US" sz="2000" b="1" dirty="0"/>
-            </a:br>
-            <a:r>
-              <a:rPr lang="en-US" sz="2000" dirty="0"/>
-              <a:t>Difference only in 2</a:t>
-            </a:r>
-            <a:r>
-              <a:rPr lang="en-US" sz="2000" baseline="30000" dirty="0"/>
-              <a:t>nd</a:t>
-            </a:r>
-            <a:r>
-              <a:rPr lang="en-US" sz="2000" dirty="0"/>
-              <a:t>-3</a:t>
-            </a:r>
-            <a:r>
-              <a:rPr lang="en-US" sz="2000" baseline="30000" dirty="0"/>
-              <a:t>rd</a:t>
-            </a:r>
-            <a:r>
-              <a:rPr lang="en-US" sz="2000" dirty="0"/>
-              <a:t> decimal</a:t>
-            </a:r>
-            <a:br>
-              <a:rPr lang="en-US" sz="2000" dirty="0"/>
-            </a:br>
-            <a:r>
-              <a:rPr lang="en-US" sz="2000" dirty="0"/>
-              <a:t>No alternative classic statistics models</a:t>
-            </a:r>
-          </a:p>
-          <a:p>
-            <a:r>
-              <a:rPr lang="en-US" sz="2000" b="1" dirty="0"/>
-              <a:t>No field specific analysis </a:t>
+              <a:t>No field specific </a:t>
             </a:r>
             <a:r>
               <a:rPr lang="en-US" sz="2000" b="1" dirty="0">
@@ -22053,6 +22395,19 @@
             <a:r>
               <a:rPr lang="en-US" sz="2000" dirty="0"/>
               <a:t>Suspended etc.</a:t>
+            </a:r>
+          </a:p>
+          <a:p>
+            <a:r>
+              <a:rPr lang="en-US" sz="2000" b="1" dirty="0"/>
+              <a:t>Inaccurate dataset registries  </a:t>
+            </a:r>
+            <a:br>
+              <a:rPr lang="en-US" sz="2000" b="1" dirty="0"/>
+            </a:br>
+            <a:r>
+              <a:rPr lang="en-US" sz="2000" dirty="0"/>
+              <a:t>Wrongly, optimal, Null, Sparse etc.</a:t>
             </a:r>
           </a:p>
         </p:txBody>
@@ -22261,14 +22616,14 @@
             <a:pPr lvl="1"/>
             <a:r>
               <a:rPr lang="en-US" sz="2000" dirty="0"/>
-              <a:t>Low Enrollment analysis</a:t>
+              <a:t>Enrollment </a:t>
             </a:r>
           </a:p>
           <a:p>
             <a:pPr lvl="1"/>
             <a:r>
               <a:rPr lang="en-US" sz="2000" dirty="0"/>
-              <a:t>Condition fields </a:t>
+              <a:t>Conditions</a:t>
             </a:r>
           </a:p>
           <a:p>
@@ -22721,7 +23076,7 @@
             <p:ph idx="1"/>
             <p:extLst>
               <p:ext uri="{D42A27DB-BD31-4B8C-83A1-F6EECF244321}">
-                <p14:modId xmlns:p14="http://schemas.microsoft.com/office/powerpoint/2010/main" val="2374137308"/>
+                <p14:modId xmlns:p14="http://schemas.microsoft.com/office/powerpoint/2010/main" val="2370722021"/>
               </p:ext>
             </p:extLst>
           </p:nvPr>
@@ -23807,47 +24162,47 @@
           </a:lstStyle>
           <a:p>
             <a:r>
-              <a:rPr lang="en-GB" sz="2000" dirty="0"/>
+              <a:rPr lang="en-GB" sz="1800" dirty="0"/>
               <a:t>CTs’ characteristics  </a:t>
             </a:r>
             <a:r>
-              <a:rPr lang="en-GB" sz="2000" dirty="0">
+              <a:rPr lang="en-GB" sz="1800" dirty="0">
                 <a:sym typeface="Wingdings" panose="05000000000000000000" pitchFamily="2" charset="2"/>
               </a:rPr>
               <a:t> </a:t>
             </a:r>
             <a:r>
-              <a:rPr lang="en-GB" sz="2000" dirty="0"/>
+              <a:rPr lang="en-GB" sz="1800" dirty="0"/>
               <a:t>Registries’</a:t>
             </a:r>
             <a:r>
-              <a:rPr lang="en-GB" sz="2000" dirty="0">
+              <a:rPr lang="en-GB" sz="1800" dirty="0">
                 <a:sym typeface="Wingdings" panose="05000000000000000000" pitchFamily="2" charset="2"/>
               </a:rPr>
               <a:t> </a:t>
             </a:r>
             <a:r>
-              <a:rPr lang="en-GB" sz="2000" dirty="0"/>
+              <a:rPr lang="en-GB" sz="1800" dirty="0"/>
               <a:t>Analysis </a:t>
             </a:r>
             <a:r>
-              <a:rPr lang="en-GB" sz="2000" dirty="0">
+              <a:rPr lang="en-GB" sz="1800" dirty="0">
                 <a:sym typeface="Wingdings" panose="05000000000000000000" pitchFamily="2" charset="2"/>
               </a:rPr>
               <a:t></a:t>
             </a:r>
             <a:r>
-              <a:rPr lang="en-GB" sz="2000" dirty="0"/>
+              <a:rPr lang="en-GB" sz="1800" dirty="0"/>
               <a:t> Early termination relations </a:t>
             </a:r>
           </a:p>
           <a:p>
             <a:r>
-              <a:rPr lang="en-GB" sz="2000" dirty="0"/>
+              <a:rPr lang="en-GB" sz="1800" dirty="0"/>
               <a:t>Non-transparent registry </a:t>
             </a:r>
             <a:r>
-              <a:rPr lang="en-GB" sz="2000" dirty="0">
+              <a:rPr lang="en-GB" sz="1800" dirty="0">
                 <a:sym typeface="Wingdings" panose="05000000000000000000" pitchFamily="2" charset="2"/>
               </a:rPr>
               <a:t> Unethical </a:t>
@@ -23855,7 +24210,7 @@
           </a:p>
           <a:p>
             <a:r>
-              <a:rPr lang="en-GB" sz="2000" dirty="0">
+              <a:rPr lang="en-GB" sz="1800" dirty="0">
                 <a:sym typeface="Wingdings" panose="05000000000000000000" pitchFamily="2" charset="2"/>
               </a:rPr>
               <a:t>Missing, Optional, False inputs</a:t>
@@ -24052,7 +24407,7 @@
         </p:nvSpPr>
         <p:spPr>
           <a:xfrm>
-            <a:off x="609600" y="2573955"/>
+            <a:off x="609600" y="2701280"/>
             <a:ext cx="10972800" cy="2125367"/>
           </a:xfrm>
           <a:ln>
@@ -24122,8 +24477,8 @@
         </p:nvSpPr>
         <p:spPr>
           <a:xfrm>
-            <a:off x="609600" y="1071583"/>
-            <a:ext cx="10972800" cy="897603"/>
+            <a:off x="609600" y="953901"/>
+            <a:ext cx="10972800" cy="1107886"/>
           </a:xfrm>
           <a:prstGeom prst="rect">
             <a:avLst/>
@@ -24134,7 +24489,7 @@
         </p:spPr>
         <p:txBody>
           <a:bodyPr vert="horz" lIns="91440" tIns="45720" rIns="91440" bIns="45720" rtlCol="0" anchor="ctr">
-            <a:normAutofit fontScale="77500" lnSpcReduction="20000"/>
+            <a:noAutofit/>
           </a:bodyPr>
           <a:lstStyle>
             <a:lvl1pPr marL="228600" indent="-228600" algn="l" defTabSz="914400" rtl="0" eaLnBrk="1" latinLnBrk="0" hangingPunct="1">
@@ -24351,7 +24706,7 @@
         </p:nvSpPr>
         <p:spPr>
           <a:xfrm>
-            <a:off x="609600" y="2076517"/>
+            <a:off x="609600" y="2203842"/>
             <a:ext cx="10972800" cy="457200"/>
           </a:xfrm>
           <a:prstGeom prst="rect">
@@ -24561,7 +24916,7 @@
         </p:nvSpPr>
         <p:spPr>
           <a:xfrm>
-            <a:off x="609600" y="4805932"/>
+            <a:off x="609600" y="4911964"/>
             <a:ext cx="10972800" cy="457200"/>
           </a:xfrm>
           <a:prstGeom prst="rect">
@@ -24771,7 +25126,7 @@
         </p:nvSpPr>
         <p:spPr>
           <a:xfrm>
-            <a:off x="609600" y="5393438"/>
+            <a:off x="609600" y="5418445"/>
             <a:ext cx="10972800" cy="1192557"/>
           </a:xfrm>
           <a:prstGeom prst="rect">
@@ -24957,8 +25312,14 @@
           </a:p>
           <a:p>
             <a:r>
+              <a:rPr lang="en-US" sz="2000" dirty="0"/>
+              <a:t>Skew data</a:t>
+            </a:r>
+          </a:p>
+          <a:p>
+            <a:r>
               <a:rPr lang="en-GB" sz="2000" dirty="0"/>
-              <a:t>Many missing, inaccurate registries</a:t>
+              <a:t>Missing, Optional, Wrong, Inaccurate registries, </a:t>
             </a:r>
           </a:p>
         </p:txBody>
@@ -25804,13 +26165,14 @@
           </p:cNvPr>
           <p:cNvCxnSpPr>
             <a:cxnSpLocks/>
+            <a:endCxn id="24" idx="0"/>
           </p:cNvCxnSpPr>
           <p:nvPr/>
         </p:nvCxnSpPr>
         <p:spPr>
-          <a:xfrm>
-            <a:off x="4307523" y="3798959"/>
-            <a:ext cx="0" cy="501162"/>
+          <a:xfrm flipH="1">
+            <a:off x="4302392" y="3798959"/>
+            <a:ext cx="5131" cy="544649"/>
           </a:xfrm>
           <a:prstGeom prst="straightConnector1">
             <a:avLst/>
@@ -26251,14 +26613,15 @@
           </p:cNvPr>
           <p:cNvCxnSpPr>
             <a:cxnSpLocks/>
+            <a:stCxn id="24" idx="2"/>
             <a:endCxn id="94" idx="0"/>
           </p:cNvCxnSpPr>
           <p:nvPr/>
         </p:nvCxnSpPr>
         <p:spPr>
           <a:xfrm>
-            <a:off x="4307523" y="5214521"/>
-            <a:ext cx="0" cy="586553"/>
+            <a:off x="4302392" y="5258008"/>
+            <a:ext cx="5131" cy="543066"/>
           </a:xfrm>
           <a:prstGeom prst="straightConnector1">
             <a:avLst/>
@@ -26566,7 +26929,7 @@
                   <a:schemeClr val="bg1"/>
                 </a:solidFill>
               </a:rPr>
-              <a:t>Structured Data</a:t>
+              <a:t>Structured Data (Phases 1-4)</a:t>
             </a:r>
             <a:endParaRPr lang="en-GB" dirty="0">
               <a:solidFill>
@@ -26836,7 +27199,7 @@
         </p:nvSpPr>
         <p:spPr>
           <a:xfrm>
-            <a:off x="3525152" y="4308883"/>
+            <a:off x="3525152" y="4343608"/>
             <a:ext cx="1554480" cy="914400"/>
           </a:xfrm>
           <a:prstGeom prst="roundRect">
@@ -27295,7 +27658,7 @@
             <p:ph sz="half" idx="1"/>
             <p:extLst>
               <p:ext uri="{D42A27DB-BD31-4B8C-83A1-F6EECF244321}">
-                <p14:modId xmlns:p14="http://schemas.microsoft.com/office/powerpoint/2010/main" val="1553636723"/>
+                <p14:modId xmlns:p14="http://schemas.microsoft.com/office/powerpoint/2010/main" val="1990017838"/>
               </p:ext>
             </p:extLst>
           </p:nvPr>
@@ -27326,7 +27689,7 @@
             <p:ph sz="half" idx="2"/>
             <p:extLst>
               <p:ext uri="{D42A27DB-BD31-4B8C-83A1-F6EECF244321}">
-                <p14:modId xmlns:p14="http://schemas.microsoft.com/office/powerpoint/2010/main" val="4002414733"/>
+                <p14:modId xmlns:p14="http://schemas.microsoft.com/office/powerpoint/2010/main" val="976065068"/>
               </p:ext>
             </p:extLst>
           </p:nvPr>
@@ -27355,7 +27718,7 @@
         </p:nvSpPr>
         <p:spPr>
           <a:xfrm>
-            <a:off x="531470" y="228599"/>
+            <a:off x="609600" y="217024"/>
             <a:ext cx="10972800" cy="457200"/>
           </a:xfrm>
           <a:prstGeom prst="rect">

--- a/Thesis_Presentation.pptx
+++ b/Thesis_Presentation.pptx
@@ -22,16 +22,16 @@
     <p:sldId id="268" r:id="rId16"/>
     <p:sldId id="279" r:id="rId17"/>
     <p:sldId id="267" r:id="rId18"/>
-    <p:sldId id="291" r:id="rId19"/>
-    <p:sldId id="264" r:id="rId20"/>
-    <p:sldId id="276" r:id="rId21"/>
-    <p:sldId id="293" r:id="rId22"/>
-    <p:sldId id="284" r:id="rId23"/>
-    <p:sldId id="292" r:id="rId24"/>
-    <p:sldId id="263" r:id="rId25"/>
+    <p:sldId id="264" r:id="rId19"/>
+    <p:sldId id="291" r:id="rId20"/>
+    <p:sldId id="263" r:id="rId21"/>
+    <p:sldId id="276" r:id="rId22"/>
+    <p:sldId id="293" r:id="rId23"/>
+    <p:sldId id="284" r:id="rId24"/>
+    <p:sldId id="292" r:id="rId25"/>
     <p:sldId id="285" r:id="rId26"/>
-    <p:sldId id="277" r:id="rId27"/>
-    <p:sldId id="278" r:id="rId28"/>
+    <p:sldId id="278" r:id="rId27"/>
+    <p:sldId id="277" r:id="rId28"/>
     <p:sldId id="294" r:id="rId29"/>
   </p:sldIdLst>
   <p:sldSz cx="12192000" cy="6858000"/>
@@ -153,16 +153,16 @@
             <p14:sldId id="268"/>
             <p14:sldId id="279"/>
             <p14:sldId id="267"/>
+            <p14:sldId id="264"/>
             <p14:sldId id="291"/>
-            <p14:sldId id="264"/>
+            <p14:sldId id="263"/>
             <p14:sldId id="276"/>
             <p14:sldId id="293"/>
             <p14:sldId id="284"/>
             <p14:sldId id="292"/>
-            <p14:sldId id="263"/>
             <p14:sldId id="285"/>
+            <p14:sldId id="278"/>
             <p14:sldId id="277"/>
-            <p14:sldId id="278"/>
             <p14:sldId id="294"/>
           </p14:sldIdLst>
         </p14:section>
@@ -178,7 +178,7 @@
 <file path=ppt/revisionInfo.xml><?xml version="1.0" encoding="utf-8"?>
 <p1510:revInfo xmlns:a="http://schemas.openxmlformats.org/drawingml/2006/main" xmlns:r="http://schemas.openxmlformats.org/officeDocument/2006/relationships" xmlns:p1510="http://schemas.microsoft.com/office/powerpoint/2015/10/main">
   <p1510:revLst>
-    <p1510:client id="{6F7D2D08-A2CD-4302-88FB-740D1140D192}" v="1702" dt="2025-11-28T03:11:25.345"/>
+    <p1510:client id="{6F7D2D08-A2CD-4302-88FB-740D1140D192}" v="1728" dt="2025-12-01T18:07:37.252"/>
   </p1510:revLst>
 </p1510:revInfo>
 </file>
@@ -188,7 +188,7 @@
   <pc:docChgLst>
     <pc:chgData name="Evgenia Andreou" userId="8e89e74f621e7047" providerId="LiveId" clId="{EF53017E-E624-4052-9F70-6403551E244D}"/>
     <pc:docChg chg="undo redo custSel addSld delSld modSld sldOrd modMainMaster addSection delSection modSection">
-      <pc:chgData name="Evgenia Andreou" userId="8e89e74f621e7047" providerId="LiveId" clId="{EF53017E-E624-4052-9F70-6403551E244D}" dt="2025-11-28T04:01:49.488" v="40319" actId="20577"/>
+      <pc:chgData name="Evgenia Andreou" userId="8e89e74f621e7047" providerId="LiveId" clId="{EF53017E-E624-4052-9F70-6403551E244D}" dt="2025-12-01T18:55:26.044" v="41021" actId="255"/>
       <pc:docMkLst>
         <pc:docMk/>
       </pc:docMkLst>
@@ -198,14 +198,6 @@
           <pc:docMk/>
           <pc:sldMk cId="568867521" sldId="257"/>
         </pc:sldMkLst>
-        <pc:spChg chg="add del mod">
-          <ac:chgData name="Evgenia Andreou" userId="8e89e74f621e7047" providerId="LiveId" clId="{EF53017E-E624-4052-9F70-6403551E244D}" dt="2025-10-31T15:18:02.298" v="34874" actId="113"/>
-          <ac:spMkLst>
-            <pc:docMk/>
-            <pc:sldMk cId="568867521" sldId="257"/>
-            <ac:spMk id="3" creationId="{09FB8F2E-C1EA-0356-22BA-7189EA91775F}"/>
-          </ac:spMkLst>
-        </pc:spChg>
         <pc:spChg chg="add mod">
           <ac:chgData name="Evgenia Andreou" userId="8e89e74f621e7047" providerId="LiveId" clId="{EF53017E-E624-4052-9F70-6403551E244D}" dt="2025-11-21T00:49:58.598" v="34954" actId="20577"/>
           <ac:spMkLst>
@@ -214,68 +206,13 @@
             <ac:spMk id="4" creationId="{DA253F5B-969C-ED7C-E6DD-0409268E6EFB}"/>
           </ac:spMkLst>
         </pc:spChg>
-        <pc:spChg chg="add mod">
-          <ac:chgData name="Evgenia Andreou" userId="8e89e74f621e7047" providerId="LiveId" clId="{EF53017E-E624-4052-9F70-6403551E244D}" dt="2025-10-31T15:19:05.841" v="34919" actId="1076"/>
-          <ac:spMkLst>
-            <pc:docMk/>
-            <pc:sldMk cId="568867521" sldId="257"/>
-            <ac:spMk id="5" creationId="{7F59F5FB-A94B-31DE-2AAA-445E59F01FC2}"/>
-          </ac:spMkLst>
-        </pc:spChg>
-        <pc:picChg chg="add mod">
-          <ac:chgData name="Evgenia Andreou" userId="8e89e74f621e7047" providerId="LiveId" clId="{EF53017E-E624-4052-9F70-6403551E244D}" dt="2025-10-31T15:19:06.238" v="34920" actId="1076"/>
-          <ac:picMkLst>
-            <pc:docMk/>
-            <pc:sldMk cId="568867521" sldId="257"/>
-            <ac:picMk id="2" creationId="{5D46DE69-A32F-DC72-8928-3B97AD27BEA8}"/>
-          </ac:picMkLst>
-        </pc:picChg>
-      </pc:sldChg>
-      <pc:sldChg chg="addSp delSp modSp new mod ord setBg">
-        <pc:chgData name="Evgenia Andreou" userId="8e89e74f621e7047" providerId="LiveId" clId="{EF53017E-E624-4052-9F70-6403551E244D}" dt="2025-10-31T15:17:52.574" v="34873" actId="692"/>
-        <pc:sldMkLst>
-          <pc:docMk/>
-          <pc:sldMk cId="1223022622" sldId="258"/>
-        </pc:sldMkLst>
-        <pc:spChg chg="mod">
-          <ac:chgData name="Evgenia Andreou" userId="8e89e74f621e7047" providerId="LiveId" clId="{EF53017E-E624-4052-9F70-6403551E244D}" dt="2025-10-31T15:17:52.574" v="34873" actId="692"/>
-          <ac:spMkLst>
-            <pc:docMk/>
-            <pc:sldMk cId="1223022622" sldId="258"/>
-            <ac:spMk id="2" creationId="{68F7CEDF-EFB3-C401-7155-FB36C7BDA927}"/>
-          </ac:spMkLst>
-        </pc:spChg>
       </pc:sldChg>
       <pc:sldChg chg="addSp delSp modSp new mod ord setBg modClrScheme chgLayout">
-        <pc:chgData name="Evgenia Andreou" userId="8e89e74f621e7047" providerId="LiveId" clId="{EF53017E-E624-4052-9F70-6403551E244D}" dt="2025-11-28T03:49:27.862" v="40297" actId="255"/>
+        <pc:chgData name="Evgenia Andreou" userId="8e89e74f621e7047" providerId="LiveId" clId="{EF53017E-E624-4052-9F70-6403551E244D}" dt="2025-12-01T18:55:26.044" v="41021" actId="255"/>
         <pc:sldMkLst>
           <pc:docMk/>
           <pc:sldMk cId="3253723412" sldId="260"/>
         </pc:sldMkLst>
-        <pc:spChg chg="add mod">
-          <ac:chgData name="Evgenia Andreou" userId="8e89e74f621e7047" providerId="LiveId" clId="{EF53017E-E624-4052-9F70-6403551E244D}" dt="2025-10-29T16:03:40.991" v="34565" actId="255"/>
-          <ac:spMkLst>
-            <pc:docMk/>
-            <pc:sldMk cId="3253723412" sldId="260"/>
-            <ac:spMk id="2" creationId="{8ED081B3-55DA-8B56-A28C-A5E0E86DDBDA}"/>
-          </ac:spMkLst>
-        </pc:spChg>
-        <pc:spChg chg="add mod">
-          <ac:chgData name="Evgenia Andreou" userId="8e89e74f621e7047" providerId="LiveId" clId="{EF53017E-E624-4052-9F70-6403551E244D}" dt="2025-10-29T16:02:39.018" v="34557" actId="255"/>
-          <ac:spMkLst>
-            <pc:docMk/>
-            <pc:sldMk cId="3253723412" sldId="260"/>
-            <ac:spMk id="3" creationId="{364C2508-D28E-6C2B-E788-4415DE3EF595}"/>
-          </ac:spMkLst>
-        </pc:spChg>
-        <pc:spChg chg="add mod">
-          <ac:chgData name="Evgenia Andreou" userId="8e89e74f621e7047" providerId="LiveId" clId="{EF53017E-E624-4052-9F70-6403551E244D}" dt="2025-10-29T16:07:12.248" v="34666" actId="20577"/>
-          <ac:spMkLst>
-            <pc:docMk/>
-            <pc:sldMk cId="3253723412" sldId="260"/>
-            <ac:spMk id="4" creationId="{8E7D1FB3-01A9-C464-C45A-EB8E9A04BC4D}"/>
-          </ac:spMkLst>
-        </pc:spChg>
         <pc:spChg chg="add mod">
           <ac:chgData name="Evgenia Andreou" userId="8e89e74f621e7047" providerId="LiveId" clId="{EF53017E-E624-4052-9F70-6403551E244D}" dt="2025-11-21T01:02:19.481" v="35228" actId="1076"/>
           <ac:spMkLst>
@@ -293,7 +230,7 @@
           </ac:spMkLst>
         </pc:spChg>
         <pc:spChg chg="add mod">
-          <ac:chgData name="Evgenia Andreou" userId="8e89e74f621e7047" providerId="LiveId" clId="{EF53017E-E624-4052-9F70-6403551E244D}" dt="2025-11-28T03:49:27.862" v="40297" actId="255"/>
+          <ac:chgData name="Evgenia Andreou" userId="8e89e74f621e7047" providerId="LiveId" clId="{EF53017E-E624-4052-9F70-6403551E244D}" dt="2025-12-01T18:55:26.044" v="41021" actId="255"/>
           <ac:spMkLst>
             <pc:docMk/>
             <pc:sldMk cId="3253723412" sldId="260"/>
@@ -302,11 +239,19 @@
         </pc:spChg>
       </pc:sldChg>
       <pc:sldChg chg="addSp delSp modSp new mod setBg modClrScheme chgLayout">
-        <pc:chgData name="Evgenia Andreou" userId="8e89e74f621e7047" providerId="LiveId" clId="{EF53017E-E624-4052-9F70-6403551E244D}" dt="2025-11-28T03:50:14.574" v="40310" actId="20577"/>
+        <pc:chgData name="Evgenia Andreou" userId="8e89e74f621e7047" providerId="LiveId" clId="{EF53017E-E624-4052-9F70-6403551E244D}" dt="2025-12-01T18:03:14.550" v="40908" actId="20577"/>
         <pc:sldMkLst>
           <pc:docMk/>
           <pc:sldMk cId="1363710211" sldId="262"/>
         </pc:sldMkLst>
+        <pc:spChg chg="add mod">
+          <ac:chgData name="Evgenia Andreou" userId="8e89e74f621e7047" providerId="LiveId" clId="{EF53017E-E624-4052-9F70-6403551E244D}" dt="2025-12-01T17:41:56.571" v="40765" actId="1036"/>
+          <ac:spMkLst>
+            <pc:docMk/>
+            <pc:sldMk cId="1363710211" sldId="262"/>
+            <ac:spMk id="4" creationId="{6AFCAC43-C708-DC96-979E-E018B10CB4C5}"/>
+          </ac:spMkLst>
+        </pc:spChg>
         <pc:spChg chg="mod">
           <ac:chgData name="Evgenia Andreou" userId="8e89e74f621e7047" providerId="LiveId" clId="{EF53017E-E624-4052-9F70-6403551E244D}" dt="2025-11-28T03:50:14.574" v="40310" actId="20577"/>
           <ac:spMkLst>
@@ -323,8 +268,16 @@
             <ac:spMk id="24" creationId="{E1FABA48-E7BA-FC06-2FF3-7550185F508C}"/>
           </ac:spMkLst>
         </pc:spChg>
+        <pc:spChg chg="mod">
+          <ac:chgData name="Evgenia Andreou" userId="8e89e74f621e7047" providerId="LiveId" clId="{EF53017E-E624-4052-9F70-6403551E244D}" dt="2025-12-01T18:03:14.550" v="40908" actId="20577"/>
+          <ac:spMkLst>
+            <pc:docMk/>
+            <pc:sldMk cId="1363710211" sldId="262"/>
+            <ac:spMk id="29" creationId="{23EC8373-4835-1D54-AC63-3CAC68B40C09}"/>
+          </ac:spMkLst>
+        </pc:spChg>
         <pc:spChg chg="add mod">
-          <ac:chgData name="Evgenia Andreou" userId="8e89e74f621e7047" providerId="LiveId" clId="{EF53017E-E624-4052-9F70-6403551E244D}" dt="2025-11-23T01:18:41.088" v="37571" actId="20577"/>
+          <ac:chgData name="Evgenia Andreou" userId="8e89e74f621e7047" providerId="LiveId" clId="{EF53017E-E624-4052-9F70-6403551E244D}" dt="2025-12-01T17:41:51.763" v="40763" actId="1076"/>
           <ac:spMkLst>
             <pc:docMk/>
             <pc:sldMk cId="1363710211" sldId="262"/>
@@ -347,6 +300,22 @@
             <ac:spMk id="677" creationId="{1263351C-9AB9-9F3E-1A06-CBF996165FBC}"/>
           </ac:spMkLst>
         </pc:spChg>
+        <pc:cxnChg chg="add mod">
+          <ac:chgData name="Evgenia Andreou" userId="8e89e74f621e7047" providerId="LiveId" clId="{EF53017E-E624-4052-9F70-6403551E244D}" dt="2025-12-01T17:41:56.571" v="40765" actId="1036"/>
+          <ac:cxnSpMkLst>
+            <pc:docMk/>
+            <pc:sldMk cId="1363710211" sldId="262"/>
+            <ac:cxnSpMk id="5" creationId="{490C4B18-1583-B250-C3AE-EE36D3B5F407}"/>
+          </ac:cxnSpMkLst>
+        </pc:cxnChg>
+        <pc:cxnChg chg="mod">
+          <ac:chgData name="Evgenia Andreou" userId="8e89e74f621e7047" providerId="LiveId" clId="{EF53017E-E624-4052-9F70-6403551E244D}" dt="2025-12-01T17:41:56.571" v="40765" actId="1036"/>
+          <ac:cxnSpMkLst>
+            <pc:docMk/>
+            <pc:sldMk cId="1363710211" sldId="262"/>
+            <ac:cxnSpMk id="75" creationId="{4CC1E783-18E4-8F6D-ECF6-34DDBB6B81E0}"/>
+          </ac:cxnSpMkLst>
+        </pc:cxnChg>
         <pc:cxnChg chg="mod">
           <ac:chgData name="Evgenia Andreou" userId="8e89e74f621e7047" providerId="LiveId" clId="{EF53017E-E624-4052-9F70-6403551E244D}" dt="2025-11-28T02:11:11.870" v="39408" actId="1076"/>
           <ac:cxnSpMkLst>
@@ -373,13 +342,13 @@
         </pc:cxnChg>
       </pc:sldChg>
       <pc:sldChg chg="addSp delSp modSp add mod ord">
-        <pc:chgData name="Evgenia Andreou" userId="8e89e74f621e7047" providerId="LiveId" clId="{EF53017E-E624-4052-9F70-6403551E244D}" dt="2025-11-28T03:41:19.733" v="40292" actId="20577"/>
+        <pc:chgData name="Evgenia Andreou" userId="8e89e74f621e7047" providerId="LiveId" clId="{EF53017E-E624-4052-9F70-6403551E244D}" dt="2025-12-01T18:08:45.397" v="40972" actId="1035"/>
         <pc:sldMkLst>
           <pc:docMk/>
           <pc:sldMk cId="379656155" sldId="263"/>
         </pc:sldMkLst>
         <pc:spChg chg="add mod">
-          <ac:chgData name="Evgenia Andreou" userId="8e89e74f621e7047" providerId="LiveId" clId="{EF53017E-E624-4052-9F70-6403551E244D}" dt="2025-11-28T02:32:37.233" v="39511" actId="1035"/>
+          <ac:chgData name="Evgenia Andreou" userId="8e89e74f621e7047" providerId="LiveId" clId="{EF53017E-E624-4052-9F70-6403551E244D}" dt="2025-12-01T18:08:36.650" v="40964" actId="1076"/>
           <ac:spMkLst>
             <pc:docMk/>
             <pc:sldMk cId="379656155" sldId="263"/>
@@ -387,23 +356,15 @@
           </ac:spMkLst>
         </pc:spChg>
         <pc:spChg chg="mod">
-          <ac:chgData name="Evgenia Andreou" userId="8e89e74f621e7047" providerId="LiveId" clId="{EF53017E-E624-4052-9F70-6403551E244D}" dt="2025-11-28T02:34:12.977" v="39560" actId="20577"/>
+          <ac:chgData name="Evgenia Andreou" userId="8e89e74f621e7047" providerId="LiveId" clId="{EF53017E-E624-4052-9F70-6403551E244D}" dt="2025-12-01T18:07:38.341" v="40960" actId="20577"/>
           <ac:spMkLst>
             <pc:docMk/>
             <pc:sldMk cId="379656155" sldId="263"/>
             <ac:spMk id="3" creationId="{79AA6C9D-2E20-3FDC-E624-B09367AC8F9F}"/>
           </ac:spMkLst>
         </pc:spChg>
-        <pc:spChg chg="add mod">
-          <ac:chgData name="Evgenia Andreou" userId="8e89e74f621e7047" providerId="LiveId" clId="{EF53017E-E624-4052-9F70-6403551E244D}" dt="2025-11-28T03:41:19.733" v="40292" actId="20577"/>
-          <ac:spMkLst>
-            <pc:docMk/>
-            <pc:sldMk cId="379656155" sldId="263"/>
-            <ac:spMk id="4" creationId="{385A9581-03F7-49F9-A93D-E221AD38613E}"/>
-          </ac:spMkLst>
-        </pc:spChg>
         <pc:spChg chg="mod">
-          <ac:chgData name="Evgenia Andreou" userId="8e89e74f621e7047" providerId="LiveId" clId="{EF53017E-E624-4052-9F70-6403551E244D}" dt="2025-11-28T02:36:23.269" v="39714" actId="14100"/>
+          <ac:chgData name="Evgenia Andreou" userId="8e89e74f621e7047" providerId="LiveId" clId="{EF53017E-E624-4052-9F70-6403551E244D}" dt="2025-12-01T18:08:45.397" v="40972" actId="1035"/>
           <ac:spMkLst>
             <pc:docMk/>
             <pc:sldMk cId="379656155" sldId="263"/>
@@ -411,28 +372,28 @@
           </ac:spMkLst>
         </pc:spChg>
         <pc:picChg chg="add mod">
-          <ac:chgData name="Evgenia Andreou" userId="8e89e74f621e7047" providerId="LiveId" clId="{EF53017E-E624-4052-9F70-6403551E244D}" dt="2025-11-28T03:16:07.223" v="40097" actId="1076"/>
+          <ac:chgData name="Evgenia Andreou" userId="8e89e74f621e7047" providerId="LiveId" clId="{EF53017E-E624-4052-9F70-6403551E244D}" dt="2025-12-01T18:08:39.600" v="40970" actId="1036"/>
           <ac:picMkLst>
             <pc:docMk/>
             <pc:sldMk cId="379656155" sldId="263"/>
             <ac:picMk id="6" creationId="{8EC81A22-9F3E-3963-5EB9-300275B01289}"/>
           </ac:picMkLst>
         </pc:picChg>
-        <pc:picChg chg="add del mod">
-          <ac:chgData name="Evgenia Andreou" userId="8e89e74f621e7047" providerId="LiveId" clId="{EF53017E-E624-4052-9F70-6403551E244D}" dt="2025-11-28T03:16:00.676" v="40095" actId="478"/>
-          <ac:picMkLst>
-            <pc:docMk/>
-            <pc:sldMk cId="379656155" sldId="263"/>
-            <ac:picMk id="14" creationId="{02054822-7CFA-3734-870F-31D73313B46C}"/>
-          </ac:picMkLst>
-        </pc:picChg>
       </pc:sldChg>
       <pc:sldChg chg="modSp add mod ord">
-        <pc:chgData name="Evgenia Andreou" userId="8e89e74f621e7047" providerId="LiveId" clId="{EF53017E-E624-4052-9F70-6403551E244D}" dt="2025-11-25T20:26:05.952" v="38914" actId="20577"/>
+        <pc:chgData name="Evgenia Andreou" userId="8e89e74f621e7047" providerId="LiveId" clId="{EF53017E-E624-4052-9F70-6403551E244D}" dt="2025-12-01T18:06:49.114" v="40919"/>
         <pc:sldMkLst>
           <pc:docMk/>
           <pc:sldMk cId="493610102" sldId="264"/>
         </pc:sldMkLst>
+        <pc:spChg chg="mod">
+          <ac:chgData name="Evgenia Andreou" userId="8e89e74f621e7047" providerId="LiveId" clId="{EF53017E-E624-4052-9F70-6403551E244D}" dt="2025-12-01T17:20:02.156" v="40690" actId="20577"/>
+          <ac:spMkLst>
+            <pc:docMk/>
+            <pc:sldMk cId="493610102" sldId="264"/>
+            <ac:spMk id="6" creationId="{281D5DE3-2913-0700-B818-661824D303F3}"/>
+          </ac:spMkLst>
+        </pc:spChg>
         <pc:spChg chg="mod">
           <ac:chgData name="Evgenia Andreou" userId="8e89e74f621e7047" providerId="LiveId" clId="{EF53017E-E624-4052-9F70-6403551E244D}" dt="2025-11-25T20:26:05.952" v="38914" actId="20577"/>
           <ac:spMkLst>
@@ -443,7 +404,7 @@
         </pc:spChg>
       </pc:sldChg>
       <pc:sldChg chg="addSp delSp modSp new mod setBg modClrScheme chgLayout">
-        <pc:chgData name="Evgenia Andreou" userId="8e89e74f621e7047" providerId="LiveId" clId="{EF53017E-E624-4052-9F70-6403551E244D}" dt="2025-11-28T03:52:47.751" v="40311" actId="20577"/>
+        <pc:chgData name="Evgenia Andreou" userId="8e89e74f621e7047" providerId="LiveId" clId="{EF53017E-E624-4052-9F70-6403551E244D}" dt="2025-12-01T18:03:06.748" v="40905" actId="20577"/>
         <pc:sldMkLst>
           <pc:docMk/>
           <pc:sldMk cId="1969514135" sldId="266"/>
@@ -457,7 +418,7 @@
           </ac:spMkLst>
         </pc:spChg>
         <pc:graphicFrameChg chg="add mod modGraphic">
-          <ac:chgData name="Evgenia Andreou" userId="8e89e74f621e7047" providerId="LiveId" clId="{EF53017E-E624-4052-9F70-6403551E244D}" dt="2025-11-28T02:52:24.031" v="39880" actId="20577"/>
+          <ac:chgData name="Evgenia Andreou" userId="8e89e74f621e7047" providerId="LiveId" clId="{EF53017E-E624-4052-9F70-6403551E244D}" dt="2025-12-01T18:00:34.935" v="40846" actId="20577"/>
           <ac:graphicFrameMkLst>
             <pc:docMk/>
             <pc:sldMk cId="1969514135" sldId="266"/>
@@ -465,7 +426,7 @@
           </ac:graphicFrameMkLst>
         </pc:graphicFrameChg>
         <pc:graphicFrameChg chg="add mod modGraphic">
-          <ac:chgData name="Evgenia Andreou" userId="8e89e74f621e7047" providerId="LiveId" clId="{EF53017E-E624-4052-9F70-6403551E244D}" dt="2025-11-28T03:52:47.751" v="40311" actId="20577"/>
+          <ac:chgData name="Evgenia Andreou" userId="8e89e74f621e7047" providerId="LiveId" clId="{EF53017E-E624-4052-9F70-6403551E244D}" dt="2025-12-01T18:03:06.748" v="40905" actId="20577"/>
           <ac:graphicFrameMkLst>
             <pc:docMk/>
             <pc:sldMk cId="1969514135" sldId="266"/>
@@ -474,7 +435,7 @@
         </pc:graphicFrameChg>
       </pc:sldChg>
       <pc:sldChg chg="addSp delSp modSp new mod ord setBg">
-        <pc:chgData name="Evgenia Andreou" userId="8e89e74f621e7047" providerId="LiveId" clId="{EF53017E-E624-4052-9F70-6403551E244D}" dt="2025-11-28T02:19:23.922" v="39467" actId="20577"/>
+        <pc:chgData name="Evgenia Andreou" userId="8e89e74f621e7047" providerId="LiveId" clId="{EF53017E-E624-4052-9F70-6403551E244D}" dt="2025-12-01T18:06:36.999" v="40917" actId="1076"/>
         <pc:sldMkLst>
           <pc:docMk/>
           <pc:sldMk cId="4231469208" sldId="267"/>
@@ -488,7 +449,7 @@
           </ac:spMkLst>
         </pc:spChg>
         <pc:spChg chg="mod">
-          <ac:chgData name="Evgenia Andreou" userId="8e89e74f621e7047" providerId="LiveId" clId="{EF53017E-E624-4052-9F70-6403551E244D}" dt="2025-11-28T02:19:23.922" v="39467" actId="20577"/>
+          <ac:chgData name="Evgenia Andreou" userId="8e89e74f621e7047" providerId="LiveId" clId="{EF53017E-E624-4052-9F70-6403551E244D}" dt="2025-12-01T18:06:36.641" v="40916" actId="20577"/>
           <ac:spMkLst>
             <pc:docMk/>
             <pc:sldMk cId="4231469208" sldId="267"/>
@@ -496,7 +457,7 @@
           </ac:spMkLst>
         </pc:spChg>
         <pc:spChg chg="add mod">
-          <ac:chgData name="Evgenia Andreou" userId="8e89e74f621e7047" providerId="LiveId" clId="{EF53017E-E624-4052-9F70-6403551E244D}" dt="2025-11-23T01:16:50.377" v="37524" actId="1076"/>
+          <ac:chgData name="Evgenia Andreou" userId="8e89e74f621e7047" providerId="LiveId" clId="{EF53017E-E624-4052-9F70-6403551E244D}" dt="2025-12-01T18:06:36.999" v="40917" actId="1076"/>
           <ac:spMkLst>
             <pc:docMk/>
             <pc:sldMk cId="4231469208" sldId="267"/>
@@ -505,7 +466,7 @@
         </pc:spChg>
       </pc:sldChg>
       <pc:sldChg chg="addSp delSp modSp new mod">
-        <pc:chgData name="Evgenia Andreou" userId="8e89e74f621e7047" providerId="LiveId" clId="{EF53017E-E624-4052-9F70-6403551E244D}" dt="2025-11-25T20:38:10.684" v="38955" actId="1440"/>
+        <pc:chgData name="Evgenia Andreou" userId="8e89e74f621e7047" providerId="LiveId" clId="{EF53017E-E624-4052-9F70-6403551E244D}" dt="2025-11-28T22:12:19.061" v="40352" actId="1036"/>
         <pc:sldMkLst>
           <pc:docMk/>
           <pc:sldMk cId="3208481001" sldId="268"/>
@@ -519,90 +480,45 @@
           </ac:spMkLst>
         </pc:spChg>
         <pc:grpChg chg="add mod">
-          <ac:chgData name="Evgenia Andreou" userId="8e89e74f621e7047" providerId="LiveId" clId="{EF53017E-E624-4052-9F70-6403551E244D}" dt="2025-11-25T00:48:27.761" v="38708" actId="1037"/>
+          <ac:chgData name="Evgenia Andreou" userId="8e89e74f621e7047" providerId="LiveId" clId="{EF53017E-E624-4052-9F70-6403551E244D}" dt="2025-11-28T22:12:19.061" v="40352" actId="1036"/>
           <ac:grpSpMkLst>
             <pc:docMk/>
             <pc:sldMk cId="3208481001" sldId="268"/>
-            <ac:grpSpMk id="24" creationId="{3FB3EC97-CFD4-18C0-5C67-9419FD568CEB}"/>
+            <ac:grpSpMk id="12" creationId="{01DA6A5A-7725-B1F0-134E-0173B6564A6F}"/>
           </ac:grpSpMkLst>
         </pc:grpChg>
         <pc:picChg chg="add mod">
-          <ac:chgData name="Evgenia Andreou" userId="8e89e74f621e7047" providerId="LiveId" clId="{EF53017E-E624-4052-9F70-6403551E244D}" dt="2025-11-25T20:38:10.684" v="38955" actId="1440"/>
+          <ac:chgData name="Evgenia Andreou" userId="8e89e74f621e7047" providerId="LiveId" clId="{EF53017E-E624-4052-9F70-6403551E244D}" dt="2025-11-28T22:12:06.618" v="40345" actId="1076"/>
           <ac:picMkLst>
             <pc:docMk/>
             <pc:sldMk cId="3208481001" sldId="268"/>
-            <ac:picMk id="10" creationId="{7C472132-5D48-1F80-B2C9-8536CD86963F}"/>
+            <ac:picMk id="4" creationId="{66A154A8-F09D-B696-5854-6A2A6B3F738B}"/>
           </ac:picMkLst>
         </pc:picChg>
         <pc:picChg chg="add mod">
-          <ac:chgData name="Evgenia Andreou" userId="8e89e74f621e7047" providerId="LiveId" clId="{EF53017E-E624-4052-9F70-6403551E244D}" dt="2025-11-25T20:38:10.684" v="38955" actId="1440"/>
+          <ac:chgData name="Evgenia Andreou" userId="8e89e74f621e7047" providerId="LiveId" clId="{EF53017E-E624-4052-9F70-6403551E244D}" dt="2025-11-28T22:12:04.399" v="40344" actId="1076"/>
           <ac:picMkLst>
             <pc:docMk/>
             <pc:sldMk cId="3208481001" sldId="268"/>
-            <ac:picMk id="13" creationId="{0950AC3A-891F-671F-7599-F2B502FB4DB5}"/>
+            <ac:picMk id="6" creationId="{FC6DEAD2-832A-A984-36BA-12DB48E818B9}"/>
           </ac:picMkLst>
         </pc:picChg>
         <pc:picChg chg="add mod">
-          <ac:chgData name="Evgenia Andreou" userId="8e89e74f621e7047" providerId="LiveId" clId="{EF53017E-E624-4052-9F70-6403551E244D}" dt="2025-11-25T20:38:10.684" v="38955" actId="1440"/>
+          <ac:chgData name="Evgenia Andreou" userId="8e89e74f621e7047" providerId="LiveId" clId="{EF53017E-E624-4052-9F70-6403551E244D}" dt="2025-11-28T22:12:06.618" v="40345" actId="1076"/>
           <ac:picMkLst>
             <pc:docMk/>
             <pc:sldMk cId="3208481001" sldId="268"/>
-            <ac:picMk id="18" creationId="{0D213D03-A565-B363-6B02-CE7249196914}"/>
+            <ac:picMk id="8" creationId="{DD8F1152-8CB3-CBE7-36DA-47565F00501D}"/>
           </ac:picMkLst>
         </pc:picChg>
         <pc:picChg chg="add mod">
-          <ac:chgData name="Evgenia Andreou" userId="8e89e74f621e7047" providerId="LiveId" clId="{EF53017E-E624-4052-9F70-6403551E244D}" dt="2025-11-25T20:38:10.684" v="38955" actId="1440"/>
+          <ac:chgData name="Evgenia Andreou" userId="8e89e74f621e7047" providerId="LiveId" clId="{EF53017E-E624-4052-9F70-6403551E244D}" dt="2025-11-28T22:12:04.399" v="40344" actId="1076"/>
           <ac:picMkLst>
             <pc:docMk/>
             <pc:sldMk cId="3208481001" sldId="268"/>
-            <ac:picMk id="20" creationId="{8213FD52-7304-D574-CCCB-2C514C8C0A43}"/>
+            <ac:picMk id="11" creationId="{8088072D-F3D7-458A-C1F7-966B504994F2}"/>
           </ac:picMkLst>
         </pc:picChg>
-      </pc:sldChg>
-      <pc:sldChg chg="addSp delSp modSp new mod ord setBg">
-        <pc:chgData name="Evgenia Andreou" userId="8e89e74f621e7047" providerId="LiveId" clId="{EF53017E-E624-4052-9F70-6403551E244D}" dt="2025-10-31T15:17:18.034" v="34870" actId="1582"/>
-        <pc:sldMkLst>
-          <pc:docMk/>
-          <pc:sldMk cId="2295317214" sldId="270"/>
-        </pc:sldMkLst>
-        <pc:spChg chg="add mod">
-          <ac:chgData name="Evgenia Andreou" userId="8e89e74f621e7047" providerId="LiveId" clId="{EF53017E-E624-4052-9F70-6403551E244D}" dt="2025-10-31T15:17:18.034" v="34870" actId="1582"/>
-          <ac:spMkLst>
-            <pc:docMk/>
-            <pc:sldMk cId="2295317214" sldId="270"/>
-            <ac:spMk id="3" creationId="{E1977896-C24B-9F1A-D777-D502E6AF5937}"/>
-          </ac:spMkLst>
-        </pc:spChg>
-      </pc:sldChg>
-      <pc:sldChg chg="modSp new mod setBg">
-        <pc:chgData name="Evgenia Andreou" userId="8e89e74f621e7047" providerId="LiveId" clId="{EF53017E-E624-4052-9F70-6403551E244D}" dt="2025-10-31T15:17:28.839" v="34871" actId="1582"/>
-        <pc:sldMkLst>
-          <pc:docMk/>
-          <pc:sldMk cId="2301623070" sldId="271"/>
-        </pc:sldMkLst>
-        <pc:spChg chg="mod">
-          <ac:chgData name="Evgenia Andreou" userId="8e89e74f621e7047" providerId="LiveId" clId="{EF53017E-E624-4052-9F70-6403551E244D}" dt="2025-10-31T15:17:28.839" v="34871" actId="1582"/>
-          <ac:spMkLst>
-            <pc:docMk/>
-            <pc:sldMk cId="2301623070" sldId="271"/>
-            <ac:spMk id="2" creationId="{CDD171AF-4846-67D2-CC20-E35F25A49F78}"/>
-          </ac:spMkLst>
-        </pc:spChg>
-      </pc:sldChg>
-      <pc:sldChg chg="delSp modSp new mod">
-        <pc:chgData name="Evgenia Andreou" userId="8e89e74f621e7047" providerId="LiveId" clId="{EF53017E-E624-4052-9F70-6403551E244D}" dt="2025-10-31T15:17:07.410" v="34869" actId="1582"/>
-        <pc:sldMkLst>
-          <pc:docMk/>
-          <pc:sldMk cId="322220874" sldId="273"/>
-        </pc:sldMkLst>
-        <pc:spChg chg="mod">
-          <ac:chgData name="Evgenia Andreou" userId="8e89e74f621e7047" providerId="LiveId" clId="{EF53017E-E624-4052-9F70-6403551E244D}" dt="2025-10-31T15:17:07.410" v="34869" actId="1582"/>
-          <ac:spMkLst>
-            <pc:docMk/>
-            <pc:sldMk cId="322220874" sldId="273"/>
-            <ac:spMk id="2" creationId="{C1372E30-38DD-5181-224E-44A7786493A0}"/>
-          </ac:spMkLst>
-        </pc:spChg>
       </pc:sldChg>
       <pc:sldChg chg="addSp delSp modSp new mod modShow">
         <pc:chgData name="Evgenia Andreou" userId="8e89e74f621e7047" providerId="LiveId" clId="{EF53017E-E624-4052-9F70-6403551E244D}" dt="2025-11-21T01:45:17.071" v="35623" actId="1076"/>
@@ -652,7 +568,7 @@
         </pc:picChg>
       </pc:sldChg>
       <pc:sldChg chg="addSp delSp modSp new mod setBg">
-        <pc:chgData name="Evgenia Andreou" userId="8e89e74f621e7047" providerId="LiveId" clId="{EF53017E-E624-4052-9F70-6403551E244D}" dt="2025-11-25T20:55:08.907" v="38987" actId="1037"/>
+        <pc:chgData name="Evgenia Andreou" userId="8e89e74f621e7047" providerId="LiveId" clId="{EF53017E-E624-4052-9F70-6403551E244D}" dt="2025-11-29T01:23:58.529" v="40596" actId="1038"/>
         <pc:sldMkLst>
           <pc:docMk/>
           <pc:sldMk cId="1839987358" sldId="276"/>
@@ -666,48 +582,48 @@
           </ac:spMkLst>
         </pc:spChg>
         <pc:grpChg chg="add mod">
-          <ac:chgData name="Evgenia Andreou" userId="8e89e74f621e7047" providerId="LiveId" clId="{EF53017E-E624-4052-9F70-6403551E244D}" dt="2025-11-25T20:55:08.907" v="38987" actId="1037"/>
+          <ac:chgData name="Evgenia Andreou" userId="8e89e74f621e7047" providerId="LiveId" clId="{EF53017E-E624-4052-9F70-6403551E244D}" dt="2025-11-29T01:20:57.755" v="40570" actId="164"/>
           <ac:grpSpMkLst>
             <pc:docMk/>
             <pc:sldMk cId="1839987358" sldId="276"/>
-            <ac:grpSpMk id="36" creationId="{34B46513-4A49-58D4-8935-B7F54A3BEBBB}"/>
+            <ac:grpSpMk id="26" creationId="{1C5C83E6-6CA1-EDD4-B08C-006113AE0A92}"/>
           </ac:grpSpMkLst>
         </pc:grpChg>
         <pc:picChg chg="add mod">
-          <ac:chgData name="Evgenia Andreou" userId="8e89e74f621e7047" providerId="LiveId" clId="{EF53017E-E624-4052-9F70-6403551E244D}" dt="2025-11-25T20:38:33.354" v="38959" actId="164"/>
+          <ac:chgData name="Evgenia Andreou" userId="8e89e74f621e7047" providerId="LiveId" clId="{EF53017E-E624-4052-9F70-6403551E244D}" dt="2025-11-29T01:23:58.529" v="40596" actId="1038"/>
           <ac:picMkLst>
             <pc:docMk/>
             <pc:sldMk cId="1839987358" sldId="276"/>
-            <ac:picMk id="29" creationId="{0D4ADD35-D2D4-DA05-5903-913AACBA24DD}"/>
+            <ac:picMk id="17" creationId="{D5ECBC4A-2B11-4B08-C8A3-6AFC40E86D04}"/>
           </ac:picMkLst>
         </pc:picChg>
         <pc:picChg chg="add mod">
-          <ac:chgData name="Evgenia Andreou" userId="8e89e74f621e7047" providerId="LiveId" clId="{EF53017E-E624-4052-9F70-6403551E244D}" dt="2025-11-25T20:38:33.354" v="38959" actId="164"/>
+          <ac:chgData name="Evgenia Andreou" userId="8e89e74f621e7047" providerId="LiveId" clId="{EF53017E-E624-4052-9F70-6403551E244D}" dt="2025-11-29T01:23:39.757" v="40571" actId="1440"/>
           <ac:picMkLst>
             <pc:docMk/>
             <pc:sldMk cId="1839987358" sldId="276"/>
-            <ac:picMk id="31" creationId="{FFBEBC9B-A546-B8B1-FD16-74D1E79ADF4C}"/>
+            <ac:picMk id="21" creationId="{6940838F-7595-383B-355B-AEE11B633346}"/>
           </ac:picMkLst>
         </pc:picChg>
         <pc:picChg chg="add mod">
-          <ac:chgData name="Evgenia Andreou" userId="8e89e74f621e7047" providerId="LiveId" clId="{EF53017E-E624-4052-9F70-6403551E244D}" dt="2025-11-25T20:38:33.354" v="38959" actId="164"/>
+          <ac:chgData name="Evgenia Andreou" userId="8e89e74f621e7047" providerId="LiveId" clId="{EF53017E-E624-4052-9F70-6403551E244D}" dt="2025-11-29T01:23:58.529" v="40596" actId="1038"/>
           <ac:picMkLst>
             <pc:docMk/>
             <pc:sldMk cId="1839987358" sldId="276"/>
-            <ac:picMk id="33" creationId="{5DDB2D2A-0022-B9CE-0C3A-8A8B40881F2D}"/>
+            <ac:picMk id="23" creationId="{7D899AEF-0831-6AD2-3F78-AF8C38DCF00E}"/>
           </ac:picMkLst>
         </pc:picChg>
         <pc:picChg chg="add mod">
-          <ac:chgData name="Evgenia Andreou" userId="8e89e74f621e7047" providerId="LiveId" clId="{EF53017E-E624-4052-9F70-6403551E244D}" dt="2025-11-25T20:38:33.354" v="38959" actId="164"/>
+          <ac:chgData name="Evgenia Andreou" userId="8e89e74f621e7047" providerId="LiveId" clId="{EF53017E-E624-4052-9F70-6403551E244D}" dt="2025-11-29T01:23:46.523" v="40585" actId="1036"/>
           <ac:picMkLst>
             <pc:docMk/>
             <pc:sldMk cId="1839987358" sldId="276"/>
-            <ac:picMk id="35" creationId="{0A91FFED-CDFA-FBE7-D2E8-B94068B2AE35}"/>
+            <ac:picMk id="25" creationId="{42F43B33-35A2-AA1D-7450-44DF1C046865}"/>
           </ac:picMkLst>
         </pc:picChg>
       </pc:sldChg>
-      <pc:sldChg chg="addSp delSp modSp new mod">
-        <pc:chgData name="Evgenia Andreou" userId="8e89e74f621e7047" providerId="LiveId" clId="{EF53017E-E624-4052-9F70-6403551E244D}" dt="2025-11-28T03:42:35.836" v="40296" actId="113"/>
+      <pc:sldChg chg="addSp delSp modSp new mod ord">
+        <pc:chgData name="Evgenia Andreou" userId="8e89e74f621e7047" providerId="LiveId" clId="{EF53017E-E624-4052-9F70-6403551E244D}" dt="2025-12-01T17:32:17.658" v="40732" actId="20577"/>
         <pc:sldMkLst>
           <pc:docMk/>
           <pc:sldMk cId="2946716891" sldId="277"/>
@@ -721,7 +637,7 @@
           </ac:spMkLst>
         </pc:spChg>
         <pc:spChg chg="mod">
-          <ac:chgData name="Evgenia Andreou" userId="8e89e74f621e7047" providerId="LiveId" clId="{EF53017E-E624-4052-9F70-6403551E244D}" dt="2025-11-28T03:42:35.836" v="40296" actId="113"/>
+          <ac:chgData name="Evgenia Andreou" userId="8e89e74f621e7047" providerId="LiveId" clId="{EF53017E-E624-4052-9F70-6403551E244D}" dt="2025-12-01T17:32:17.658" v="40732" actId="20577"/>
           <ac:spMkLst>
             <pc:docMk/>
             <pc:sldMk cId="2946716891" sldId="277"/>
@@ -769,41 +685,49 @@
         </pc:spChg>
       </pc:sldChg>
       <pc:sldChg chg="addSp delSp modSp new mod setBg">
-        <pc:chgData name="Evgenia Andreou" userId="8e89e74f621e7047" providerId="LiveId" clId="{EF53017E-E624-4052-9F70-6403551E244D}" dt="2025-11-25T20:55:16.235" v="38988" actId="1440"/>
+        <pc:chgData name="Evgenia Andreou" userId="8e89e74f621e7047" providerId="LiveId" clId="{EF53017E-E624-4052-9F70-6403551E244D}" dt="2025-11-28T22:14:44.982" v="40364" actId="164"/>
         <pc:sldMkLst>
           <pc:docMk/>
           <pc:sldMk cId="1267936960" sldId="279"/>
         </pc:sldMkLst>
+        <pc:grpChg chg="add mod">
+          <ac:chgData name="Evgenia Andreou" userId="8e89e74f621e7047" providerId="LiveId" clId="{EF53017E-E624-4052-9F70-6403551E244D}" dt="2025-11-28T22:14:44.982" v="40364" actId="164"/>
+          <ac:grpSpMkLst>
+            <pc:docMk/>
+            <pc:sldMk cId="1267936960" sldId="279"/>
+            <ac:grpSpMk id="11" creationId="{5946AAF6-E98E-7729-EA74-A8B8F228C3C6}"/>
+          </ac:grpSpMkLst>
+        </pc:grpChg>
         <pc:picChg chg="add mod">
-          <ac:chgData name="Evgenia Andreou" userId="8e89e74f621e7047" providerId="LiveId" clId="{EF53017E-E624-4052-9F70-6403551E244D}" dt="2025-11-25T20:55:16.235" v="38988" actId="1440"/>
+          <ac:chgData name="Evgenia Andreou" userId="8e89e74f621e7047" providerId="LiveId" clId="{EF53017E-E624-4052-9F70-6403551E244D}" dt="2025-11-28T22:14:44.982" v="40364" actId="164"/>
           <ac:picMkLst>
             <pc:docMk/>
             <pc:sldMk cId="1267936960" sldId="279"/>
-            <ac:picMk id="14" creationId="{34D8EBA6-F13B-9891-83BA-FB348C7CEE7D}"/>
+            <ac:picMk id="4" creationId="{7F0AC793-C44A-7E13-0626-EC68CE352B83}"/>
           </ac:picMkLst>
         </pc:picChg>
         <pc:picChg chg="add mod">
-          <ac:chgData name="Evgenia Andreou" userId="8e89e74f621e7047" providerId="LiveId" clId="{EF53017E-E624-4052-9F70-6403551E244D}" dt="2025-11-25T20:55:16.235" v="38988" actId="1440"/>
+          <ac:chgData name="Evgenia Andreou" userId="8e89e74f621e7047" providerId="LiveId" clId="{EF53017E-E624-4052-9F70-6403551E244D}" dt="2025-11-28T22:14:44.982" v="40364" actId="164"/>
           <ac:picMkLst>
             <pc:docMk/>
             <pc:sldMk cId="1267936960" sldId="279"/>
-            <ac:picMk id="16" creationId="{A8B5C16B-5A07-0192-C73D-1F03ADF5804E}"/>
+            <ac:picMk id="6" creationId="{0F0D2BD4-36D9-2A89-A21F-CE9F7C8DAB1B}"/>
           </ac:picMkLst>
         </pc:picChg>
         <pc:picChg chg="add mod">
-          <ac:chgData name="Evgenia Andreou" userId="8e89e74f621e7047" providerId="LiveId" clId="{EF53017E-E624-4052-9F70-6403551E244D}" dt="2025-11-25T20:55:16.235" v="38988" actId="1440"/>
+          <ac:chgData name="Evgenia Andreou" userId="8e89e74f621e7047" providerId="LiveId" clId="{EF53017E-E624-4052-9F70-6403551E244D}" dt="2025-11-28T22:14:44.982" v="40364" actId="164"/>
           <ac:picMkLst>
             <pc:docMk/>
             <pc:sldMk cId="1267936960" sldId="279"/>
-            <ac:picMk id="18" creationId="{F35FB39E-3272-D92C-9125-F3C06DBF38D3}"/>
+            <ac:picMk id="8" creationId="{05A8B557-4FC9-1FDB-8CD5-080B95C8D03E}"/>
           </ac:picMkLst>
         </pc:picChg>
         <pc:picChg chg="add mod">
-          <ac:chgData name="Evgenia Andreou" userId="8e89e74f621e7047" providerId="LiveId" clId="{EF53017E-E624-4052-9F70-6403551E244D}" dt="2025-11-25T20:55:16.235" v="38988" actId="1440"/>
+          <ac:chgData name="Evgenia Andreou" userId="8e89e74f621e7047" providerId="LiveId" clId="{EF53017E-E624-4052-9F70-6403551E244D}" dt="2025-11-28T22:14:44.982" v="40364" actId="164"/>
           <ac:picMkLst>
             <pc:docMk/>
             <pc:sldMk cId="1267936960" sldId="279"/>
-            <ac:picMk id="20" creationId="{A61F3796-1B61-CFA2-3252-D326B10039BA}"/>
+            <ac:picMk id="10" creationId="{135DCF66-D4C2-8A23-E855-7C5B6D1C9A00}"/>
           </ac:picMkLst>
         </pc:picChg>
       </pc:sldChg>
@@ -863,7 +787,7 @@
         </pc:graphicFrameChg>
       </pc:sldChg>
       <pc:sldChg chg="addSp delSp modSp new mod setBg">
-        <pc:chgData name="Evgenia Andreou" userId="8e89e74f621e7047" providerId="LiveId" clId="{EF53017E-E624-4052-9F70-6403551E244D}" dt="2025-11-28T03:25:27.697" v="40189" actId="20577"/>
+        <pc:chgData name="Evgenia Andreou" userId="8e89e74f621e7047" providerId="LiveId" clId="{EF53017E-E624-4052-9F70-6403551E244D}" dt="2025-12-01T17:36:08.887" v="40740"/>
         <pc:sldMkLst>
           <pc:docMk/>
           <pc:sldMk cId="2935283230" sldId="281"/>
@@ -877,7 +801,7 @@
           </ac:spMkLst>
         </pc:spChg>
         <pc:spChg chg="mod">
-          <ac:chgData name="Evgenia Andreou" userId="8e89e74f621e7047" providerId="LiveId" clId="{EF53017E-E624-4052-9F70-6403551E244D}" dt="2025-11-28T02:10:00.756" v="39403" actId="1036"/>
+          <ac:chgData name="Evgenia Andreou" userId="8e89e74f621e7047" providerId="LiveId" clId="{EF53017E-E624-4052-9F70-6403551E244D}" dt="2025-12-01T17:36:08.887" v="40740"/>
           <ac:spMkLst>
             <pc:docMk/>
             <pc:sldMk cId="2935283230" sldId="281"/>
@@ -909,7 +833,7 @@
           </ac:spMkLst>
         </pc:spChg>
         <pc:spChg chg="add mod">
-          <ac:chgData name="Evgenia Andreou" userId="8e89e74f621e7047" providerId="LiveId" clId="{EF53017E-E624-4052-9F70-6403551E244D}" dt="2025-11-28T03:25:27.697" v="40189" actId="20577"/>
+          <ac:chgData name="Evgenia Andreou" userId="8e89e74f621e7047" providerId="LiveId" clId="{EF53017E-E624-4052-9F70-6403551E244D}" dt="2025-12-01T17:11:03.716" v="40664" actId="20577"/>
           <ac:spMkLst>
             <pc:docMk/>
             <pc:sldMk cId="2935283230" sldId="281"/>
@@ -918,7 +842,7 @@
         </pc:spChg>
       </pc:sldChg>
       <pc:sldChg chg="addSp delSp modSp new mod ord">
-        <pc:chgData name="Evgenia Andreou" userId="8e89e74f621e7047" providerId="LiveId" clId="{EF53017E-E624-4052-9F70-6403551E244D}" dt="2025-11-28T04:01:49.488" v="40319" actId="20577"/>
+        <pc:chgData name="Evgenia Andreou" userId="8e89e74f621e7047" providerId="LiveId" clId="{EF53017E-E624-4052-9F70-6403551E244D}" dt="2025-11-29T02:48:48.394" v="40643" actId="20577"/>
         <pc:sldMkLst>
           <pc:docMk/>
           <pc:sldMk cId="1583996442" sldId="284"/>
@@ -940,7 +864,7 @@
           </ac:spMkLst>
         </pc:spChg>
         <pc:spChg chg="add mod">
-          <ac:chgData name="Evgenia Andreou" userId="8e89e74f621e7047" providerId="LiveId" clId="{EF53017E-E624-4052-9F70-6403551E244D}" dt="2025-11-28T03:10:27.844" v="39971" actId="27636"/>
+          <ac:chgData name="Evgenia Andreou" userId="8e89e74f621e7047" providerId="LiveId" clId="{EF53017E-E624-4052-9F70-6403551E244D}" dt="2025-11-29T02:48:39.623" v="40641" actId="27636"/>
           <ac:spMkLst>
             <pc:docMk/>
             <pc:sldMk cId="1583996442" sldId="284"/>
@@ -948,26 +872,11 @@
           </ac:spMkLst>
         </pc:spChg>
         <pc:spChg chg="add mod">
-          <ac:chgData name="Evgenia Andreou" userId="8e89e74f621e7047" providerId="LiveId" clId="{EF53017E-E624-4052-9F70-6403551E244D}" dt="2025-11-28T03:38:44.855" v="40234" actId="20577"/>
+          <ac:chgData name="Evgenia Andreou" userId="8e89e74f621e7047" providerId="LiveId" clId="{EF53017E-E624-4052-9F70-6403551E244D}" dt="2025-11-29T02:48:48.394" v="40643" actId="20577"/>
           <ac:spMkLst>
             <pc:docMk/>
             <pc:sldMk cId="1583996442" sldId="284"/>
             <ac:spMk id="8" creationId="{AAFD135F-78E3-632E-FA22-F645956311C7}"/>
-          </ac:spMkLst>
-        </pc:spChg>
-      </pc:sldChg>
-      <pc:sldChg chg="delSp modSp new mod">
-        <pc:chgData name="Evgenia Andreou" userId="8e89e74f621e7047" providerId="LiveId" clId="{EF53017E-E624-4052-9F70-6403551E244D}" dt="2025-10-31T15:16:52.617" v="34868" actId="1582"/>
-        <pc:sldMkLst>
-          <pc:docMk/>
-          <pc:sldMk cId="1947621257" sldId="285"/>
-        </pc:sldMkLst>
-        <pc:spChg chg="mod">
-          <ac:chgData name="Evgenia Andreou" userId="8e89e74f621e7047" providerId="LiveId" clId="{EF53017E-E624-4052-9F70-6403551E244D}" dt="2025-10-31T15:16:52.617" v="34868" actId="1582"/>
-          <ac:spMkLst>
-            <pc:docMk/>
-            <pc:sldMk cId="1947621257" sldId="285"/>
-            <ac:spMk id="2" creationId="{24E1F17E-F8F5-06F4-FC0D-300EA7F02B3E}"/>
           </ac:spMkLst>
         </pc:spChg>
       </pc:sldChg>
@@ -977,14 +886,6 @@
           <pc:docMk/>
           <pc:sldMk cId="1568349809" sldId="290"/>
         </pc:sldMkLst>
-        <pc:spChg chg="mod">
-          <ac:chgData name="Evgenia Andreou" userId="8e89e74f621e7047" providerId="LiveId" clId="{EF53017E-E624-4052-9F70-6403551E244D}" dt="2025-10-31T15:05:37.674" v="34793" actId="1076"/>
-          <ac:spMkLst>
-            <pc:docMk/>
-            <pc:sldMk cId="1568349809" sldId="290"/>
-            <ac:spMk id="2" creationId="{D6E992A4-3342-4D17-D7D8-CB45D8A172FC}"/>
-          </ac:spMkLst>
-        </pc:spChg>
         <pc:spChg chg="mod">
           <ac:chgData name="Evgenia Andreou" userId="8e89e74f621e7047" providerId="LiveId" clId="{EF53017E-E624-4052-9F70-6403551E244D}" dt="2025-11-23T03:31:42.512" v="38405" actId="20577"/>
           <ac:spMkLst>
@@ -1002,8 +903,8 @@
           </ac:spMkLst>
         </pc:spChg>
       </pc:sldChg>
-      <pc:sldChg chg="addSp delSp modSp new mod ord">
-        <pc:chgData name="Evgenia Andreou" userId="8e89e74f621e7047" providerId="LiveId" clId="{EF53017E-E624-4052-9F70-6403551E244D}" dt="2025-11-28T02:57:43.374" v="39882"/>
+      <pc:sldChg chg="addSp delSp modSp new mod ord modShow">
+        <pc:chgData name="Evgenia Andreou" userId="8e89e74f621e7047" providerId="LiveId" clId="{EF53017E-E624-4052-9F70-6403551E244D}" dt="2025-11-29T01:56:52.169" v="40622" actId="729"/>
         <pc:sldMkLst>
           <pc:docMk/>
           <pc:sldMk cId="3019405516" sldId="291"/>
@@ -1016,14 +917,6 @@
             <ac:spMk id="5" creationId="{C718A182-FD34-0FCF-F841-2D21F0DFE300}"/>
           </ac:spMkLst>
         </pc:spChg>
-        <pc:spChg chg="add mod">
-          <ac:chgData name="Evgenia Andreou" userId="8e89e74f621e7047" providerId="LiveId" clId="{EF53017E-E624-4052-9F70-6403551E244D}" dt="2025-10-31T15:05:27.440" v="34792" actId="1076"/>
-          <ac:spMkLst>
-            <pc:docMk/>
-            <pc:sldMk cId="3019405516" sldId="291"/>
-            <ac:spMk id="7" creationId="{259B178F-70A2-E2FE-5F28-1D58CF945F1E}"/>
-          </ac:spMkLst>
-        </pc:spChg>
         <pc:picChg chg="add mod">
           <ac:chgData name="Evgenia Andreou" userId="8e89e74f621e7047" providerId="LiveId" clId="{EF53017E-E624-4052-9F70-6403551E244D}" dt="2025-11-24T05:10:31.655" v="38581" actId="1076"/>
           <ac:picMkLst>
@@ -1034,13 +927,13 @@
         </pc:picChg>
       </pc:sldChg>
       <pc:sldChg chg="addSp delSp modSp new mod">
-        <pc:chgData name="Evgenia Andreou" userId="8e89e74f621e7047" providerId="LiveId" clId="{EF53017E-E624-4052-9F70-6403551E244D}" dt="2025-11-28T03:12:32.118" v="40093" actId="1035"/>
+        <pc:chgData name="Evgenia Andreou" userId="8e89e74f621e7047" providerId="LiveId" clId="{EF53017E-E624-4052-9F70-6403551E244D}" dt="2025-11-29T01:53:18.322" v="40612" actId="1440"/>
         <pc:sldMkLst>
           <pc:docMk/>
           <pc:sldMk cId="634262476" sldId="292"/>
         </pc:sldMkLst>
         <pc:spChg chg="add mod">
-          <ac:chgData name="Evgenia Andreou" userId="8e89e74f621e7047" providerId="LiveId" clId="{EF53017E-E624-4052-9F70-6403551E244D}" dt="2025-11-28T02:29:26.052" v="39484" actId="1076"/>
+          <ac:chgData name="Evgenia Andreou" userId="8e89e74f621e7047" providerId="LiveId" clId="{EF53017E-E624-4052-9F70-6403551E244D}" dt="2025-11-28T22:51:36.797" v="40520" actId="14100"/>
           <ac:spMkLst>
             <pc:docMk/>
             <pc:sldMk cId="634262476" sldId="292"/>
@@ -1064,70 +957,46 @@
           </ac:spMkLst>
         </pc:spChg>
         <pc:picChg chg="add mod">
-          <ac:chgData name="Evgenia Andreou" userId="8e89e74f621e7047" providerId="LiveId" clId="{EF53017E-E624-4052-9F70-6403551E244D}" dt="2025-11-28T02:29:53.589" v="39494" actId="14100"/>
+          <ac:chgData name="Evgenia Andreou" userId="8e89e74f621e7047" providerId="LiveId" clId="{EF53017E-E624-4052-9F70-6403551E244D}" dt="2025-11-28T22:51:44.304" v="40521" actId="1440"/>
           <ac:picMkLst>
             <pc:docMk/>
             <pc:sldMk cId="634262476" sldId="292"/>
-            <ac:picMk id="6" creationId="{3B1FBFAB-7CB4-71D7-BB90-40702C41FA07}"/>
+            <ac:picMk id="10" creationId="{A6401FBF-FCA8-A5E3-357F-3BAF58495F00}"/>
           </ac:picMkLst>
         </pc:picChg>
         <pc:picChg chg="add mod">
-          <ac:chgData name="Evgenia Andreou" userId="8e89e74f621e7047" providerId="LiveId" clId="{EF53017E-E624-4052-9F70-6403551E244D}" dt="2025-11-28T02:29:35.640" v="39488" actId="1076"/>
+          <ac:chgData name="Evgenia Andreou" userId="8e89e74f621e7047" providerId="LiveId" clId="{EF53017E-E624-4052-9F70-6403551E244D}" dt="2025-11-28T23:03:07.835" v="40523" actId="1076"/>
           <ac:picMkLst>
             <pc:docMk/>
             <pc:sldMk cId="634262476" sldId="292"/>
-            <ac:picMk id="7" creationId="{B799462F-A4F7-3D43-AE01-D02AF21C2CC4}"/>
+            <ac:picMk id="13" creationId="{909FF48F-CED8-DBEB-9B3C-AE89FB7B2295}"/>
           </ac:picMkLst>
         </pc:picChg>
         <pc:picChg chg="add mod">
-          <ac:chgData name="Evgenia Andreou" userId="8e89e74f621e7047" providerId="LiveId" clId="{EF53017E-E624-4052-9F70-6403551E244D}" dt="2025-11-28T02:29:34.462" v="39487" actId="1076"/>
+          <ac:chgData name="Evgenia Andreou" userId="8e89e74f621e7047" providerId="LiveId" clId="{EF53017E-E624-4052-9F70-6403551E244D}" dt="2025-11-29T01:53:18.322" v="40612" actId="1440"/>
           <ac:picMkLst>
             <pc:docMk/>
             <pc:sldMk cId="634262476" sldId="292"/>
-            <ac:picMk id="11" creationId="{C1B0C6D8-89CB-A205-CDFC-9B7AA4058CD0}"/>
-          </ac:picMkLst>
-        </pc:picChg>
-        <pc:picChg chg="add del mod">
-          <ac:chgData name="Evgenia Andreou" userId="8e89e74f621e7047" providerId="LiveId" clId="{EF53017E-E624-4052-9F70-6403551E244D}" dt="2025-11-27T02:13:42.656" v="39329" actId="478"/>
-          <ac:picMkLst>
-            <pc:docMk/>
-            <pc:sldMk cId="634262476" sldId="292"/>
-            <ac:picMk id="14" creationId="{2B542E36-04D0-C797-9167-A2ED7F41DF32}"/>
-          </ac:picMkLst>
-        </pc:picChg>
-        <pc:picChg chg="add mod">
-          <ac:chgData name="Evgenia Andreou" userId="8e89e74f621e7047" providerId="LiveId" clId="{EF53017E-E624-4052-9F70-6403551E244D}" dt="2025-11-28T02:29:47.543" v="39492" actId="14100"/>
-          <ac:picMkLst>
-            <pc:docMk/>
-            <pc:sldMk cId="634262476" sldId="292"/>
-            <ac:picMk id="16" creationId="{B7667F01-A309-14B3-6009-732618CFAEB1}"/>
+            <ac:picMk id="24" creationId="{FF6916B7-18EC-378D-B63E-A62C2B29BD56}"/>
           </ac:picMkLst>
         </pc:picChg>
       </pc:sldChg>
       <pc:sldChg chg="addSp delSp modSp new mod ord">
-        <pc:chgData name="Evgenia Andreou" userId="8e89e74f621e7047" providerId="LiveId" clId="{EF53017E-E624-4052-9F70-6403551E244D}" dt="2025-11-28T03:09:52.882" v="39965" actId="20577"/>
+        <pc:chgData name="Evgenia Andreou" userId="8e89e74f621e7047" providerId="LiveId" clId="{EF53017E-E624-4052-9F70-6403551E244D}" dt="2025-12-01T18:25:07.302" v="40974" actId="1036"/>
         <pc:sldMkLst>
           <pc:docMk/>
           <pc:sldMk cId="3402175388" sldId="293"/>
         </pc:sldMkLst>
-        <pc:spChg chg="add del">
-          <ac:chgData name="Evgenia Andreou" userId="8e89e74f621e7047" providerId="LiveId" clId="{EF53017E-E624-4052-9F70-6403551E244D}" dt="2025-11-28T02:25:43.568" v="39471" actId="11529"/>
-          <ac:spMkLst>
-            <pc:docMk/>
-            <pc:sldMk cId="3402175388" sldId="293"/>
-            <ac:spMk id="2" creationId="{6416E1EA-AB85-3440-CA7E-10D7661F98F6}"/>
-          </ac:spMkLst>
-        </pc:spChg>
-        <pc:spChg chg="add mod">
-          <ac:chgData name="Evgenia Andreou" userId="8e89e74f621e7047" providerId="LiveId" clId="{EF53017E-E624-4052-9F70-6403551E244D}" dt="2025-11-28T03:06:51.111" v="39960" actId="208"/>
+        <pc:spChg chg="add del mod">
+          <ac:chgData name="Evgenia Andreou" userId="8e89e74f621e7047" providerId="LiveId" clId="{EF53017E-E624-4052-9F70-6403551E244D}" dt="2025-12-01T17:25:36.041" v="40691" actId="478"/>
           <ac:spMkLst>
             <pc:docMk/>
             <pc:sldMk cId="3402175388" sldId="293"/>
             <ac:spMk id="3" creationId="{F10D7D99-F5D5-516F-7D30-BB964DA8BD45}"/>
           </ac:spMkLst>
         </pc:spChg>
-        <pc:spChg chg="add mod">
-          <ac:chgData name="Evgenia Andreou" userId="8e89e74f621e7047" providerId="LiveId" clId="{EF53017E-E624-4052-9F70-6403551E244D}" dt="2025-11-28T03:07:02.603" v="39962" actId="1076"/>
+        <pc:spChg chg="add del mod">
+          <ac:chgData name="Evgenia Andreou" userId="8e89e74f621e7047" providerId="LiveId" clId="{EF53017E-E624-4052-9F70-6403551E244D}" dt="2025-12-01T17:25:46.068" v="40695" actId="478"/>
           <ac:spMkLst>
             <pc:docMk/>
             <pc:sldMk cId="3402175388" sldId="293"/>
@@ -1142,46 +1011,94 @@
             <ac:spMk id="5" creationId="{0A267CFC-FE1A-6148-04CC-A306D34EA55F}"/>
           </ac:spMkLst>
         </pc:spChg>
+        <pc:spChg chg="add del mod">
+          <ac:chgData name="Evgenia Andreou" userId="8e89e74f621e7047" providerId="LiveId" clId="{EF53017E-E624-4052-9F70-6403551E244D}" dt="2025-12-01T17:25:43.431" v="40694" actId="478"/>
+          <ac:spMkLst>
+            <pc:docMk/>
+            <pc:sldMk cId="3402175388" sldId="293"/>
+            <ac:spMk id="21" creationId="{3B968F3D-A51A-0ACD-D6AF-8F117FC71011}"/>
+          </ac:spMkLst>
+        </pc:spChg>
         <pc:spChg chg="add mod">
-          <ac:chgData name="Evgenia Andreou" userId="8e89e74f621e7047" providerId="LiveId" clId="{EF53017E-E624-4052-9F70-6403551E244D}" dt="2025-11-28T03:09:52.882" v="39965" actId="20577"/>
+          <ac:chgData name="Evgenia Andreou" userId="8e89e74f621e7047" providerId="LiveId" clId="{EF53017E-E624-4052-9F70-6403551E244D}" dt="2025-12-01T18:25:07.302" v="40974" actId="1036"/>
           <ac:spMkLst>
             <pc:docMk/>
             <pc:sldMk cId="3402175388" sldId="293"/>
             <ac:spMk id="28" creationId="{663BBFA7-4629-E836-75B9-68C844D60F68}"/>
           </ac:spMkLst>
         </pc:spChg>
-        <pc:picChg chg="add mod ord modCrop">
-          <ac:chgData name="Evgenia Andreou" userId="8e89e74f621e7047" providerId="LiveId" clId="{EF53017E-E624-4052-9F70-6403551E244D}" dt="2025-11-28T03:02:33.537" v="39884" actId="1076"/>
+        <pc:grpChg chg="add mod ord">
+          <ac:chgData name="Evgenia Andreou" userId="8e89e74f621e7047" providerId="LiveId" clId="{EF53017E-E624-4052-9F70-6403551E244D}" dt="2025-11-28T22:33:09.974" v="40471" actId="164"/>
+          <ac:grpSpMkLst>
+            <pc:docMk/>
+            <pc:sldMk cId="3402175388" sldId="293"/>
+            <ac:grpSpMk id="13" creationId="{1A46AA44-BBA8-2CE7-94B5-D18DA91BEFE0}"/>
+          </ac:grpSpMkLst>
+        </pc:grpChg>
+        <pc:grpChg chg="add del mod">
+          <ac:chgData name="Evgenia Andreou" userId="8e89e74f621e7047" providerId="LiveId" clId="{EF53017E-E624-4052-9F70-6403551E244D}" dt="2025-12-01T17:25:40.399" v="40693" actId="478"/>
+          <ac:grpSpMkLst>
+            <pc:docMk/>
+            <pc:sldMk cId="3402175388" sldId="293"/>
+            <ac:grpSpMk id="19" creationId="{0E7AD118-D083-DDEE-7178-E43F222AB673}"/>
+          </ac:grpSpMkLst>
+        </pc:grpChg>
+        <pc:picChg chg="add mod ord">
+          <ac:chgData name="Evgenia Andreou" userId="8e89e74f621e7047" providerId="LiveId" clId="{EF53017E-E624-4052-9F70-6403551E244D}" dt="2025-11-28T22:33:12.892" v="40472" actId="1440"/>
           <ac:picMkLst>
             <pc:docMk/>
             <pc:sldMk cId="3402175388" sldId="293"/>
-            <ac:picMk id="17" creationId="{486FD39C-0F72-3001-9114-22AD0303F41C}"/>
+            <ac:picMk id="6" creationId="{9EDA3562-9FB6-36FB-68CB-62B11B520B6B}"/>
           </ac:picMkLst>
         </pc:picChg>
-        <pc:picChg chg="add mod ord modCrop">
-          <ac:chgData name="Evgenia Andreou" userId="8e89e74f621e7047" providerId="LiveId" clId="{EF53017E-E624-4052-9F70-6403551E244D}" dt="2025-11-28T03:02:33.537" v="39884" actId="1076"/>
+        <pc:picChg chg="add mod">
+          <ac:chgData name="Evgenia Andreou" userId="8e89e74f621e7047" providerId="LiveId" clId="{EF53017E-E624-4052-9F70-6403551E244D}" dt="2025-11-28T22:33:12.892" v="40472" actId="1440"/>
           <ac:picMkLst>
             <pc:docMk/>
             <pc:sldMk cId="3402175388" sldId="293"/>
-            <ac:picMk id="20" creationId="{485A75C3-71D6-FE46-0600-AD372C10CF3B}"/>
+            <ac:picMk id="10" creationId="{79234098-89AC-01BC-B93C-378EFF65637E}"/>
+          </ac:picMkLst>
+        </pc:picChg>
+        <pc:picChg chg="add mod">
+          <ac:chgData name="Evgenia Andreou" userId="8e89e74f621e7047" providerId="LiveId" clId="{EF53017E-E624-4052-9F70-6403551E244D}" dt="2025-11-28T22:33:12.892" v="40472" actId="1440"/>
+          <ac:picMkLst>
+            <pc:docMk/>
+            <pc:sldMk cId="3402175388" sldId="293"/>
+            <ac:picMk id="12" creationId="{0ED05DC4-10F4-02E4-D5C3-814C3B09C2D2}"/>
           </ac:picMkLst>
         </pc:picChg>
         <pc:picChg chg="add mod ord">
-          <ac:chgData name="Evgenia Andreou" userId="8e89e74f621e7047" providerId="LiveId" clId="{EF53017E-E624-4052-9F70-6403551E244D}" dt="2025-11-28T03:02:33.537" v="39884" actId="1076"/>
+          <ac:chgData name="Evgenia Andreou" userId="8e89e74f621e7047" providerId="LiveId" clId="{EF53017E-E624-4052-9F70-6403551E244D}" dt="2025-11-28T22:33:34.369" v="40478" actId="14100"/>
           <ac:picMkLst>
             <pc:docMk/>
             <pc:sldMk cId="3402175388" sldId="293"/>
-            <ac:picMk id="22" creationId="{2B4BA61B-C5D9-0ADA-6879-916E8C08C114}"/>
+            <ac:picMk id="18" creationId="{3ABFA820-5483-9521-8C6E-915EE34A5D3A}"/>
           </ac:picMkLst>
         </pc:picChg>
-        <pc:picChg chg="add mod ord modCrop">
-          <ac:chgData name="Evgenia Andreou" userId="8e89e74f621e7047" providerId="LiveId" clId="{EF53017E-E624-4052-9F70-6403551E244D}" dt="2025-11-28T03:02:33.537" v="39884" actId="1076"/>
-          <ac:picMkLst>
+        <pc:cxnChg chg="add mod">
+          <ac:chgData name="Evgenia Andreou" userId="8e89e74f621e7047" providerId="LiveId" clId="{EF53017E-E624-4052-9F70-6403551E244D}" dt="2025-12-01T17:26:00.704" v="40699" actId="1038"/>
+          <ac:cxnSpMkLst>
             <pc:docMk/>
             <pc:sldMk cId="3402175388" sldId="293"/>
-            <ac:picMk id="29" creationId="{3EBE4DE9-C03D-9837-2223-72ED773D3107}"/>
-          </ac:picMkLst>
-        </pc:picChg>
+            <ac:cxnSpMk id="24" creationId="{47354A09-3670-2A84-AE1A-8F1DBAA5939A}"/>
+          </ac:cxnSpMkLst>
+        </pc:cxnChg>
+        <pc:cxnChg chg="add mod">
+          <ac:chgData name="Evgenia Andreou" userId="8e89e74f621e7047" providerId="LiveId" clId="{EF53017E-E624-4052-9F70-6403551E244D}" dt="2025-12-01T17:26:08.618" v="40701" actId="1076"/>
+          <ac:cxnSpMkLst>
+            <pc:docMk/>
+            <pc:sldMk cId="3402175388" sldId="293"/>
+            <ac:cxnSpMk id="25" creationId="{ED3CAE37-E11C-EC06-E5DD-09A661000FF9}"/>
+          </ac:cxnSpMkLst>
+        </pc:cxnChg>
+        <pc:cxnChg chg="add mod">
+          <ac:chgData name="Evgenia Andreou" userId="8e89e74f621e7047" providerId="LiveId" clId="{EF53017E-E624-4052-9F70-6403551E244D}" dt="2025-12-01T17:26:15.830" v="40703" actId="1076"/>
+          <ac:cxnSpMkLst>
+            <pc:docMk/>
+            <pc:sldMk cId="3402175388" sldId="293"/>
+            <ac:cxnSpMk id="26" creationId="{4C1DC3F0-9B34-D374-BE71-99BCAC8E9ADA}"/>
+          </ac:cxnSpMkLst>
+        </pc:cxnChg>
       </pc:sldChg>
       <pc:sldChg chg="addSp delSp modSp new mod">
         <pc:chgData name="Evgenia Andreou" userId="8e89e74f621e7047" providerId="LiveId" clId="{EF53017E-E624-4052-9F70-6403551E244D}" dt="2025-11-23T03:49:48.286" v="38477" actId="1076"/>
@@ -4215,7 +4132,7 @@
           </a:pPr>
           <a:r>
             <a:rPr lang="en-US" sz="1500" dirty="0"/>
-            <a:t>Feature Selection Exploratory Analysis </a:t>
+            <a:t>Exploratory Analysis </a:t>
           </a:r>
           <a:r>
             <a:rPr lang="en-US" sz="1500" dirty="0">
@@ -4241,6 +4158,9 @@
             <a:rPr lang="en-US" sz="1500" dirty="0"/>
             <a:t> information leakage</a:t>
           </a:r>
+          <a:br>
+            <a:rPr lang="en-US" sz="1500" dirty="0"/>
+          </a:br>
           <a:endParaRPr lang="en-GB" sz="1500" dirty="0"/>
         </a:p>
       </dgm:t>
@@ -4435,53 +4355,6 @@
         </a:p>
       </dgm:t>
     </dgm:pt>
-    <dgm:pt modelId="{F6495C03-6AD7-4361-A689-0928FC2AEC71}">
-      <dgm:prSet custT="1"/>
-      <dgm:spPr>
-        <a:ln>
-          <a:noFill/>
-        </a:ln>
-      </dgm:spPr>
-      <dgm:t>
-        <a:bodyPr/>
-        <a:lstStyle/>
-        <a:p>
-          <a:pPr algn="l">
-            <a:buFont typeface="Wingdings" panose="05000000000000000000" pitchFamily="2" charset="2"/>
-            <a:buChar char="Ø"/>
-          </a:pPr>
-          <a:r>
-            <a:rPr lang="en-US" sz="1500" dirty="0">
-              <a:sym typeface="Wingdings" panose="05000000000000000000" pitchFamily="2" charset="2"/>
-            </a:rPr>
-            <a:t>Real world skewed data  Log scale</a:t>
-          </a:r>
-          <a:endParaRPr lang="en-GB" sz="1500" dirty="0"/>
-        </a:p>
-      </dgm:t>
-    </dgm:pt>
-    <dgm:pt modelId="{D191F338-3668-4712-8214-6BE1418556B2}" type="parTrans" cxnId="{757F0432-51CC-4821-BD0B-74C4AA6C00FF}">
-      <dgm:prSet/>
-      <dgm:spPr/>
-      <dgm:t>
-        <a:bodyPr/>
-        <a:lstStyle/>
-        <a:p>
-          <a:endParaRPr lang="en-GB"/>
-        </a:p>
-      </dgm:t>
-    </dgm:pt>
-    <dgm:pt modelId="{AA018E8A-AF1C-47A2-A9C4-2B498C2408A7}" type="sibTrans" cxnId="{757F0432-51CC-4821-BD0B-74C4AA6C00FF}">
-      <dgm:prSet/>
-      <dgm:spPr/>
-      <dgm:t>
-        <a:bodyPr/>
-        <a:lstStyle/>
-        <a:p>
-          <a:endParaRPr lang="en-GB"/>
-        </a:p>
-      </dgm:t>
-    </dgm:pt>
     <dgm:pt modelId="{A721B64A-F78D-438C-BD03-ED79A0A4204A}">
       <dgm:prSet custT="1"/>
       <dgm:spPr>
@@ -4516,91 +4389,6 @@
       </dgm:t>
     </dgm:pt>
     <dgm:pt modelId="{94D94A6E-FBF5-4F36-B66B-5C7A69F3C861}" type="sibTrans" cxnId="{1F480846-2667-4241-9F3B-7AF9FCFFF1F3}">
-      <dgm:prSet/>
-      <dgm:spPr/>
-      <dgm:t>
-        <a:bodyPr/>
-        <a:lstStyle/>
-        <a:p>
-          <a:endParaRPr lang="en-GB"/>
-        </a:p>
-      </dgm:t>
-    </dgm:pt>
-    <dgm:pt modelId="{9859F3EE-39FB-4155-A17B-10BBAC08A1CE}">
-      <dgm:prSet custT="1"/>
-      <dgm:spPr>
-        <a:ln>
-          <a:noFill/>
-        </a:ln>
-      </dgm:spPr>
-      <dgm:t>
-        <a:bodyPr/>
-        <a:lstStyle/>
-        <a:p>
-          <a:pPr algn="l">
-            <a:buFont typeface="Wingdings" panose="05000000000000000000" pitchFamily="2" charset="2"/>
-            <a:buChar char="Ø"/>
-          </a:pPr>
-          <a:r>
-            <a:rPr lang="en-US" sz="1500" dirty="0">
-              <a:sym typeface="Wingdings" panose="05000000000000000000" pitchFamily="2" charset="2"/>
-            </a:rPr>
-            <a:t>Merge levels </a:t>
-          </a:r>
-          <a:endParaRPr lang="en-GB" sz="1500" dirty="0"/>
-        </a:p>
-      </dgm:t>
-    </dgm:pt>
-    <dgm:pt modelId="{3B4190E0-AADF-475E-B5CB-549B6724E78A}" type="parTrans" cxnId="{75AB083C-1B8F-4842-9590-26B60EB3663F}">
-      <dgm:prSet/>
-      <dgm:spPr/>
-      <dgm:t>
-        <a:bodyPr/>
-        <a:lstStyle/>
-        <a:p>
-          <a:endParaRPr lang="en-GB"/>
-        </a:p>
-      </dgm:t>
-    </dgm:pt>
-    <dgm:pt modelId="{81A30B17-09B7-4B5D-8B46-82B8627B3E24}" type="sibTrans" cxnId="{75AB083C-1B8F-4842-9590-26B60EB3663F}">
-      <dgm:prSet/>
-      <dgm:spPr/>
-      <dgm:t>
-        <a:bodyPr/>
-        <a:lstStyle/>
-        <a:p>
-          <a:endParaRPr lang="en-GB"/>
-        </a:p>
-      </dgm:t>
-    </dgm:pt>
-    <dgm:pt modelId="{548D4458-7DA4-42BF-86CB-3786593BAF27}">
-      <dgm:prSet custT="1"/>
-      <dgm:spPr>
-        <a:ln>
-          <a:noFill/>
-        </a:ln>
-      </dgm:spPr>
-      <dgm:t>
-        <a:bodyPr/>
-        <a:lstStyle/>
-        <a:p>
-          <a:pPr algn="l"/>
-          <a:endParaRPr lang="en-GB" sz="1500" dirty="0"/>
-        </a:p>
-      </dgm:t>
-    </dgm:pt>
-    <dgm:pt modelId="{2D013C74-74E5-4DFB-B92E-91C1BB182B2C}" type="parTrans" cxnId="{B542F609-81FD-46D5-89CF-E3A1534847AC}">
-      <dgm:prSet/>
-      <dgm:spPr/>
-      <dgm:t>
-        <a:bodyPr/>
-        <a:lstStyle/>
-        <a:p>
-          <a:endParaRPr lang="en-GB"/>
-        </a:p>
-      </dgm:t>
-    </dgm:pt>
-    <dgm:pt modelId="{102EBBBE-72A9-474B-A5F6-DBC6ED957DEC}" type="sibTrans" cxnId="{B542F609-81FD-46D5-89CF-E3A1534847AC}">
       <dgm:prSet/>
       <dgm:spPr/>
       <dgm:t>
@@ -4829,13 +4617,9 @@
         </a:p>
       </dgm:t>
     </dgm:pt>
-    <dgm:pt modelId="{E640057B-05B6-461C-B076-68A24E210C2C}">
+    <dgm:pt modelId="{14D5ABE9-6FAF-4920-B3C3-45FCB82139B0}">
       <dgm:prSet custT="1"/>
-      <dgm:spPr>
-        <a:ln>
-          <a:noFill/>
-        </a:ln>
-      </dgm:spPr>
+      <dgm:spPr/>
       <dgm:t>
         <a:bodyPr/>
         <a:lstStyle/>
@@ -4845,16 +4629,13 @@
             <a:buChar char="Ø"/>
           </a:pPr>
           <a:r>
-            <a:rPr lang="en-US" sz="1500" dirty="0">
-              <a:sym typeface="Wingdings" panose="05000000000000000000" pitchFamily="2" charset="2"/>
-            </a:rPr>
-            <a:t>Feature Selection</a:t>
+            <a:rPr lang="en-GB" sz="1500" dirty="0"/>
+            <a:t>Merge levels </a:t>
           </a:r>
-          <a:endParaRPr lang="en-GB" sz="1500" dirty="0"/>
         </a:p>
       </dgm:t>
     </dgm:pt>
-    <dgm:pt modelId="{14AC4F06-3897-4397-B96B-9F54402D1E39}" type="parTrans" cxnId="{45B06F84-EBC4-4C22-8CFE-80DFF7DB6242}">
+    <dgm:pt modelId="{1EDB6088-5BA5-4363-80B9-D4137011A457}" type="parTrans" cxnId="{C8935F94-3ECD-4E3A-B712-C961CF94FFDF}">
       <dgm:prSet/>
       <dgm:spPr/>
       <dgm:t>
@@ -4865,7 +4646,87 @@
         </a:p>
       </dgm:t>
     </dgm:pt>
-    <dgm:pt modelId="{75718E64-7588-4473-AB93-62CB5D75795A}" type="sibTrans" cxnId="{45B06F84-EBC4-4C22-8CFE-80DFF7DB6242}">
+    <dgm:pt modelId="{6397023F-B25B-4A36-A5D2-30D87AB487CC}" type="sibTrans" cxnId="{C8935F94-3ECD-4E3A-B712-C961CF94FFDF}">
+      <dgm:prSet/>
+      <dgm:spPr/>
+      <dgm:t>
+        <a:bodyPr/>
+        <a:lstStyle/>
+        <a:p>
+          <a:endParaRPr lang="en-GB"/>
+        </a:p>
+      </dgm:t>
+    </dgm:pt>
+    <dgm:pt modelId="{2F634E6B-0C04-4EB9-91C3-E1E013618DDA}">
+      <dgm:prSet custT="1"/>
+      <dgm:spPr/>
+      <dgm:t>
+        <a:bodyPr/>
+        <a:lstStyle/>
+        <a:p>
+          <a:pPr algn="l">
+            <a:buFont typeface="Wingdings" panose="05000000000000000000" pitchFamily="2" charset="2"/>
+            <a:buChar char="Ø"/>
+          </a:pPr>
+          <a:r>
+            <a:rPr lang="en-GB" sz="1500" dirty="0"/>
+            <a:t>Feature Selection</a:t>
+          </a:r>
+        </a:p>
+      </dgm:t>
+    </dgm:pt>
+    <dgm:pt modelId="{02AE7C93-89C4-484F-AFCE-7A88F797CBE6}" type="parTrans" cxnId="{B9ED93C6-2815-4A9B-914A-5AE99F5774C6}">
+      <dgm:prSet/>
+      <dgm:spPr/>
+      <dgm:t>
+        <a:bodyPr/>
+        <a:lstStyle/>
+        <a:p>
+          <a:endParaRPr lang="en-GB"/>
+        </a:p>
+      </dgm:t>
+    </dgm:pt>
+    <dgm:pt modelId="{4341451F-B376-44F3-B0C6-380A9D93638D}" type="sibTrans" cxnId="{B9ED93C6-2815-4A9B-914A-5AE99F5774C6}">
+      <dgm:prSet/>
+      <dgm:spPr/>
+      <dgm:t>
+        <a:bodyPr/>
+        <a:lstStyle/>
+        <a:p>
+          <a:endParaRPr lang="en-GB"/>
+        </a:p>
+      </dgm:t>
+    </dgm:pt>
+    <dgm:pt modelId="{B8855DDA-D3EB-4654-BB8A-E8E526B34804}">
+      <dgm:prSet custT="1"/>
+      <dgm:spPr/>
+      <dgm:t>
+        <a:bodyPr/>
+        <a:lstStyle/>
+        <a:p>
+          <a:pPr algn="l">
+            <a:buFont typeface="Wingdings" panose="05000000000000000000" pitchFamily="2" charset="2"/>
+            <a:buChar char="Ø"/>
+          </a:pPr>
+          <a:r>
+            <a:rPr lang="en-GB" sz="1500" dirty="0"/>
+            <a:t>Real world skewed data  Log scale</a:t>
+          </a:r>
+        </a:p>
+      </dgm:t>
+    </dgm:pt>
+    <dgm:pt modelId="{FA3888AD-4681-47CF-9F1E-E3B7BED2734B}" type="parTrans" cxnId="{0865BB91-6514-4383-B5F5-AF387B8A5E3B}">
+      <dgm:prSet/>
+      <dgm:spPr/>
+      <dgm:t>
+        <a:bodyPr/>
+        <a:lstStyle/>
+        <a:p>
+          <a:endParaRPr lang="en-GB"/>
+        </a:p>
+      </dgm:t>
+    </dgm:pt>
+    <dgm:pt modelId="{60C22610-58A9-42A3-89D0-1EA544F9247D}" type="sibTrans" cxnId="{0865BB91-6514-4383-B5F5-AF387B8A5E3B}">
       <dgm:prSet/>
       <dgm:spPr/>
       <dgm:t>
@@ -4936,18 +4797,15 @@
   <dgm:cxnLst>
     <dgm:cxn modelId="{14E21D00-452E-4C18-9C41-7960E487344B}" type="presOf" srcId="{F0F13D87-64B0-41AD-8624-57471FE85796}" destId="{8C50726C-E90C-4FFA-B6A0-2ED37CF63F64}" srcOrd="0" destOrd="0" presId="urn:microsoft.com/office/officeart/2005/8/layout/vList5"/>
     <dgm:cxn modelId="{12FE6C09-00C6-4A02-B542-575FE8B0B255}" srcId="{F0F13D87-64B0-41AD-8624-57471FE85796}" destId="{2F2A67E8-ACD9-4C73-881C-0F727D32AE95}" srcOrd="0" destOrd="0" parTransId="{A275FB55-100D-41BA-A526-40603876FD22}" sibTransId="{7C0B296B-2A0D-4999-A0C4-2B03AA5E5374}"/>
-    <dgm:cxn modelId="{B542F609-81FD-46D5-89CF-E3A1534847AC}" srcId="{8B6C3B02-9B97-4461-849D-8C27B7EC535B}" destId="{548D4458-7DA4-42BF-86CB-3786593BAF27}" srcOrd="9" destOrd="0" parTransId="{2D013C74-74E5-4DFB-B92E-91C1BB182B2C}" sibTransId="{102EBBBE-72A9-474B-A5F6-DBC6ED957DEC}"/>
-    <dgm:cxn modelId="{6DBB2C0B-C395-4DAB-BC58-BA79D8D92C23}" type="presOf" srcId="{E640057B-05B6-461C-B076-68A24E210C2C}" destId="{4E062ED7-C8B7-4731-A7F1-BE128EC98711}" srcOrd="0" destOrd="11" presId="urn:microsoft.com/office/officeart/2005/8/layout/vList5"/>
-    <dgm:cxn modelId="{C00F8421-F747-485C-B1B5-20EB97E9EFA4}" srcId="{8B6C3B02-9B97-4461-849D-8C27B7EC535B}" destId="{2F7A7128-86C4-4AA6-BDD2-C0F06335F019}" srcOrd="8" destOrd="0" parTransId="{D99736A6-12EE-4BAE-87C7-CBC8D7CA2323}" sibTransId="{80D44254-ED36-4ABC-9111-50A9B5934201}"/>
-    <dgm:cxn modelId="{EE732523-ACD9-4AD5-A411-721BE0F6D66C}" type="presOf" srcId="{A721B64A-F78D-438C-BD03-ED79A0A4204A}" destId="{4E062ED7-C8B7-4731-A7F1-BE128EC98711}" srcOrd="0" destOrd="6" presId="urn:microsoft.com/office/officeart/2005/8/layout/vList5"/>
-    <dgm:cxn modelId="{0DE1DA2C-C4D8-42B2-82CF-2F0B80D321AC}" type="presOf" srcId="{9859F3EE-39FB-4155-A17B-10BBAC08A1CE}" destId="{4E062ED7-C8B7-4731-A7F1-BE128EC98711}" srcOrd="0" destOrd="10" presId="urn:microsoft.com/office/officeart/2005/8/layout/vList5"/>
-    <dgm:cxn modelId="{757F0432-51CC-4821-BD0B-74C4AA6C00FF}" srcId="{8B6C3B02-9B97-4461-849D-8C27B7EC535B}" destId="{F6495C03-6AD7-4361-A689-0928FC2AEC71}" srcOrd="12" destOrd="0" parTransId="{D191F338-3668-4712-8214-6BE1418556B2}" sibTransId="{AA018E8A-AF1C-47A2-A9C4-2B498C2408A7}"/>
-    <dgm:cxn modelId="{BF915D32-B530-4188-ADE0-8CBDF58E1C29}" srcId="{8B6C3B02-9B97-4461-849D-8C27B7EC535B}" destId="{59FC4D82-540C-47F6-A92D-064DDDE4834B}" srcOrd="1" destOrd="0" parTransId="{A97469FD-60FE-4D9E-8FA7-8C84F2E8EE4C}" sibTransId="{420482DB-355C-431E-9A72-720643C34E9A}"/>
-    <dgm:cxn modelId="{75AB083C-1B8F-4842-9590-26B60EB3663F}" srcId="{8B6C3B02-9B97-4461-849D-8C27B7EC535B}" destId="{9859F3EE-39FB-4155-A17B-10BBAC08A1CE}" srcOrd="10" destOrd="0" parTransId="{3B4190E0-AADF-475E-B5CB-549B6724E78A}" sibTransId="{81A30B17-09B7-4B5D-8B46-82B8627B3E24}"/>
+    <dgm:cxn modelId="{C00F8421-F747-485C-B1B5-20EB97E9EFA4}" srcId="{8B6C3B02-9B97-4461-849D-8C27B7EC535B}" destId="{2F7A7128-86C4-4AA6-BDD2-C0F06335F019}" srcOrd="11" destOrd="0" parTransId="{D99736A6-12EE-4BAE-87C7-CBC8D7CA2323}" sibTransId="{80D44254-ED36-4ABC-9111-50A9B5934201}"/>
+    <dgm:cxn modelId="{69274B22-2FBE-4573-85C9-5F4B548A9279}" type="presOf" srcId="{2F634E6B-0C04-4EB9-91C3-E1E013618DDA}" destId="{4E062ED7-C8B7-4731-A7F1-BE128EC98711}" srcOrd="0" destOrd="2" presId="urn:microsoft.com/office/officeart/2005/8/layout/vList5"/>
+    <dgm:cxn modelId="{EE732523-ACD9-4AD5-A411-721BE0F6D66C}" type="presOf" srcId="{A721B64A-F78D-438C-BD03-ED79A0A4204A}" destId="{4E062ED7-C8B7-4731-A7F1-BE128EC98711}" srcOrd="0" destOrd="9" presId="urn:microsoft.com/office/officeart/2005/8/layout/vList5"/>
+    <dgm:cxn modelId="{F8915129-CB9E-421E-9400-1C4805D1680C}" type="presOf" srcId="{14D5ABE9-6FAF-4920-B3C3-45FCB82139B0}" destId="{4E062ED7-C8B7-4731-A7F1-BE128EC98711}" srcOrd="0" destOrd="1" presId="urn:microsoft.com/office/officeart/2005/8/layout/vList5"/>
+    <dgm:cxn modelId="{BF915D32-B530-4188-ADE0-8CBDF58E1C29}" srcId="{8B6C3B02-9B97-4461-849D-8C27B7EC535B}" destId="{59FC4D82-540C-47F6-A92D-064DDDE4834B}" srcOrd="4" destOrd="0" parTransId="{A97469FD-60FE-4D9E-8FA7-8C84F2E8EE4C}" sibTransId="{420482DB-355C-431E-9A72-720643C34E9A}"/>
     <dgm:cxn modelId="{02B59940-76D4-44CD-B093-5E255D8B8128}" srcId="{F0F13D87-64B0-41AD-8624-57471FE85796}" destId="{8B6C3B02-9B97-4461-849D-8C27B7EC535B}" srcOrd="1" destOrd="0" parTransId="{50481D48-BE32-402B-B97D-BE0B16A178F3}" sibTransId="{0362A28F-AA87-4D8E-9250-A7830272AD07}"/>
     <dgm:cxn modelId="{2115EB43-AED9-4C7C-93CF-B85E01E16247}" srcId="{2F2A67E8-ACD9-4C73-881C-0F727D32AE95}" destId="{6685804A-377E-4143-859E-8D132C381ECF}" srcOrd="2" destOrd="0" parTransId="{F5C6F6E8-45D3-4854-8B35-3294023BC47D}" sibTransId="{BF8EC071-F2DF-44DA-A21B-1A8CE3A4C61B}"/>
-    <dgm:cxn modelId="{83BAAA44-D43F-4D35-8D28-FD85187C07BC}" type="presOf" srcId="{F6495C03-6AD7-4361-A689-0928FC2AEC71}" destId="{4E062ED7-C8B7-4731-A7F1-BE128EC98711}" srcOrd="0" destOrd="12" presId="urn:microsoft.com/office/officeart/2005/8/layout/vList5"/>
-    <dgm:cxn modelId="{1F480846-2667-4241-9F3B-7AF9FCFFF1F3}" srcId="{8B6C3B02-9B97-4461-849D-8C27B7EC535B}" destId="{A721B64A-F78D-438C-BD03-ED79A0A4204A}" srcOrd="6" destOrd="0" parTransId="{78C91161-6F7F-4398-B89C-D80D89BC273D}" sibTransId="{94D94A6E-FBF5-4F36-B66B-5C7A69F3C861}"/>
+    <dgm:cxn modelId="{1F480846-2667-4241-9F3B-7AF9FCFFF1F3}" srcId="{8B6C3B02-9B97-4461-849D-8C27B7EC535B}" destId="{A721B64A-F78D-438C-BD03-ED79A0A4204A}" srcOrd="9" destOrd="0" parTransId="{78C91161-6F7F-4398-B89C-D80D89BC273D}" sibTransId="{94D94A6E-FBF5-4F36-B66B-5C7A69F3C861}"/>
+    <dgm:cxn modelId="{1CF58766-E6CB-4E53-AF1C-9604F4485D46}" type="presOf" srcId="{B8855DDA-D3EB-4654-BB8A-E8E526B34804}" destId="{4E062ED7-C8B7-4731-A7F1-BE128EC98711}" srcOrd="0" destOrd="3" presId="urn:microsoft.com/office/officeart/2005/8/layout/vList5"/>
     <dgm:cxn modelId="{E6674B4B-0059-4698-B67E-3BDCC9F72950}" srcId="{2F2A67E8-ACD9-4C73-881C-0F727D32AE95}" destId="{3CF2DE67-AA0D-447F-AC31-130CB5E04C56}" srcOrd="1" destOrd="0" parTransId="{E794BAA1-87A0-45CC-803A-CA4285B90844}" sibTransId="{9668A633-4F83-4818-8D18-AB26C3CDBAFA}"/>
     <dgm:cxn modelId="{608C324E-7E80-4BF4-8A54-C2C2D7187346}" type="presOf" srcId="{6685804A-377E-4143-859E-8D132C381ECF}" destId="{EFC1B403-9E6E-4411-9B69-79A1584C7937}" srcOrd="0" destOrd="2" presId="urn:microsoft.com/office/officeart/2005/8/layout/vList5"/>
     <dgm:cxn modelId="{454DAC6E-6DA6-4456-AAAB-C6BF68406A55}" type="presOf" srcId="{35BB0A4F-EA77-413C-9E84-DEBFB93A1E88}" destId="{EFC1B403-9E6E-4411-9B69-79A1584C7937}" srcOrd="0" destOrd="0" presId="urn:microsoft.com/office/officeart/2005/8/layout/vList5"/>
@@ -4955,22 +4813,23 @@
     <dgm:cxn modelId="{E8435856-52A4-4837-AFEB-C91AB4BC5B44}" type="presOf" srcId="{8B6C3B02-9B97-4461-849D-8C27B7EC535B}" destId="{9E95D006-3A52-4C9F-915C-CE452CD5CD7D}" srcOrd="0" destOrd="0" presId="urn:microsoft.com/office/officeart/2005/8/layout/vList5"/>
     <dgm:cxn modelId="{D4512F7A-70D2-4B0C-9F02-428A14F88DAB}" type="presOf" srcId="{3CF2DE67-AA0D-447F-AC31-130CB5E04C56}" destId="{EFC1B403-9E6E-4411-9B69-79A1584C7937}" srcOrd="0" destOrd="1" presId="urn:microsoft.com/office/officeart/2005/8/layout/vList5"/>
     <dgm:cxn modelId="{E2A17C7E-3D95-41AA-9F9F-74B88C49C7E8}" srcId="{8B6C3B02-9B97-4461-849D-8C27B7EC535B}" destId="{C80325A7-6A8F-44B1-B610-6BEE0FD37FF7}" srcOrd="0" destOrd="0" parTransId="{08452F9F-4BD9-4B0C-B864-3DD8DC2A2AEE}" sibTransId="{336CBB3D-D79F-42E7-9597-B23C06F58606}"/>
-    <dgm:cxn modelId="{E93DC782-50DD-4B43-A967-4FD2741569FB}" srcId="{8B6C3B02-9B97-4461-849D-8C27B7EC535B}" destId="{798C2C10-662F-4E75-A5B5-D79146484269}" srcOrd="3" destOrd="0" parTransId="{763728CA-2134-4677-A743-846554DEF5FC}" sibTransId="{062818EF-31D5-4693-AAFD-92006D82850B}"/>
-    <dgm:cxn modelId="{45B06F84-EBC4-4C22-8CFE-80DFF7DB6242}" srcId="{8B6C3B02-9B97-4461-849D-8C27B7EC535B}" destId="{E640057B-05B6-461C-B076-68A24E210C2C}" srcOrd="11" destOrd="0" parTransId="{14AC4F06-3897-4397-B96B-9F54402D1E39}" sibTransId="{75718E64-7588-4473-AB93-62CB5D75795A}"/>
-    <dgm:cxn modelId="{86D14886-618B-4044-BE02-A6F2AEF53961}" type="presOf" srcId="{59FC4D82-540C-47F6-A92D-064DDDE4834B}" destId="{4E062ED7-C8B7-4731-A7F1-BE128EC98711}" srcOrd="0" destOrd="1" presId="urn:microsoft.com/office/officeart/2005/8/layout/vList5"/>
-    <dgm:cxn modelId="{6C6FC389-867B-4E86-A3B1-05298DAC166B}" type="presOf" srcId="{798C2C10-662F-4E75-A5B5-D79146484269}" destId="{4E062ED7-C8B7-4731-A7F1-BE128EC98711}" srcOrd="0" destOrd="3" presId="urn:microsoft.com/office/officeart/2005/8/layout/vList5"/>
-    <dgm:cxn modelId="{48306590-A74B-4794-B526-E913004DC442}" type="presOf" srcId="{548D4458-7DA4-42BF-86CB-3786593BAF27}" destId="{4E062ED7-C8B7-4731-A7F1-BE128EC98711}" srcOrd="0" destOrd="9" presId="urn:microsoft.com/office/officeart/2005/8/layout/vList5"/>
-    <dgm:cxn modelId="{BFB34CAA-4FCC-4519-A43A-F733455A217C}" srcId="{8B6C3B02-9B97-4461-849D-8C27B7EC535B}" destId="{B89C6407-2BE2-4480-B463-96750AC78FFE}" srcOrd="2" destOrd="0" parTransId="{67F4B6E3-C4CE-4236-BD5B-9D5CFC58F985}" sibTransId="{25E06677-B8A3-440C-80A8-254EF34CE9DE}"/>
-    <dgm:cxn modelId="{81F09BB9-F0A8-4D26-9C8C-78D3DDFF58E4}" srcId="{8B6C3B02-9B97-4461-849D-8C27B7EC535B}" destId="{4A8BA3F3-42C0-41EA-917D-9DDF709CADEA}" srcOrd="7" destOrd="0" parTransId="{1E327B02-6FCB-40C3-BF05-CDA992C2D02D}" sibTransId="{E09862E0-6EE9-45CD-BBC4-0365F337E1F9}"/>
-    <dgm:cxn modelId="{483BF8C4-DBC4-4E2A-B0F4-02F0FF1B5C8E}" type="presOf" srcId="{4A8BA3F3-42C0-41EA-917D-9DDF709CADEA}" destId="{4E062ED7-C8B7-4731-A7F1-BE128EC98711}" srcOrd="0" destOrd="7" presId="urn:microsoft.com/office/officeart/2005/8/layout/vList5"/>
-    <dgm:cxn modelId="{420B62D3-FE4F-40A0-B131-C8DF3D0C141F}" srcId="{8B6C3B02-9B97-4461-849D-8C27B7EC535B}" destId="{12639EF0-BB1A-4373-80A6-973906E4B20F}" srcOrd="4" destOrd="0" parTransId="{34C1F691-A67B-43DA-AE71-CA2D5125F70E}" sibTransId="{39822BD4-F533-401C-B29B-EA82A20EF2F0}"/>
-    <dgm:cxn modelId="{961737D5-6121-4BE4-BB5F-0CD5CF455CFF}" type="presOf" srcId="{7276CFAD-4AB0-4615-B7B2-34C290675CFD}" destId="{4E062ED7-C8B7-4731-A7F1-BE128EC98711}" srcOrd="0" destOrd="5" presId="urn:microsoft.com/office/officeart/2005/8/layout/vList5"/>
-    <dgm:cxn modelId="{F99DEAD6-D354-4C2E-A912-E72BD9E0D9A7}" srcId="{8B6C3B02-9B97-4461-849D-8C27B7EC535B}" destId="{7276CFAD-4AB0-4615-B7B2-34C290675CFD}" srcOrd="5" destOrd="0" parTransId="{0D8CAB63-48AE-4EBF-A04A-A0513444996E}" sibTransId="{2F1A55C3-8659-48CC-8E22-711018F2B25A}"/>
+    <dgm:cxn modelId="{E93DC782-50DD-4B43-A967-4FD2741569FB}" srcId="{8B6C3B02-9B97-4461-849D-8C27B7EC535B}" destId="{798C2C10-662F-4E75-A5B5-D79146484269}" srcOrd="6" destOrd="0" parTransId="{763728CA-2134-4677-A743-846554DEF5FC}" sibTransId="{062818EF-31D5-4693-AAFD-92006D82850B}"/>
+    <dgm:cxn modelId="{86D14886-618B-4044-BE02-A6F2AEF53961}" type="presOf" srcId="{59FC4D82-540C-47F6-A92D-064DDDE4834B}" destId="{4E062ED7-C8B7-4731-A7F1-BE128EC98711}" srcOrd="0" destOrd="4" presId="urn:microsoft.com/office/officeart/2005/8/layout/vList5"/>
+    <dgm:cxn modelId="{6C6FC389-867B-4E86-A3B1-05298DAC166B}" type="presOf" srcId="{798C2C10-662F-4E75-A5B5-D79146484269}" destId="{4E062ED7-C8B7-4731-A7F1-BE128EC98711}" srcOrd="0" destOrd="6" presId="urn:microsoft.com/office/officeart/2005/8/layout/vList5"/>
+    <dgm:cxn modelId="{0865BB91-6514-4383-B5F5-AF387B8A5E3B}" srcId="{8B6C3B02-9B97-4461-849D-8C27B7EC535B}" destId="{B8855DDA-D3EB-4654-BB8A-E8E526B34804}" srcOrd="3" destOrd="0" parTransId="{FA3888AD-4681-47CF-9F1E-E3B7BED2734B}" sibTransId="{60C22610-58A9-42A3-89D0-1EA544F9247D}"/>
+    <dgm:cxn modelId="{C8935F94-3ECD-4E3A-B712-C961CF94FFDF}" srcId="{8B6C3B02-9B97-4461-849D-8C27B7EC535B}" destId="{14D5ABE9-6FAF-4920-B3C3-45FCB82139B0}" srcOrd="1" destOrd="0" parTransId="{1EDB6088-5BA5-4363-80B9-D4137011A457}" sibTransId="{6397023F-B25B-4A36-A5D2-30D87AB487CC}"/>
+    <dgm:cxn modelId="{BFB34CAA-4FCC-4519-A43A-F733455A217C}" srcId="{8B6C3B02-9B97-4461-849D-8C27B7EC535B}" destId="{B89C6407-2BE2-4480-B463-96750AC78FFE}" srcOrd="5" destOrd="0" parTransId="{67F4B6E3-C4CE-4236-BD5B-9D5CFC58F985}" sibTransId="{25E06677-B8A3-440C-80A8-254EF34CE9DE}"/>
+    <dgm:cxn modelId="{81F09BB9-F0A8-4D26-9C8C-78D3DDFF58E4}" srcId="{8B6C3B02-9B97-4461-849D-8C27B7EC535B}" destId="{4A8BA3F3-42C0-41EA-917D-9DDF709CADEA}" srcOrd="10" destOrd="0" parTransId="{1E327B02-6FCB-40C3-BF05-CDA992C2D02D}" sibTransId="{E09862E0-6EE9-45CD-BBC4-0365F337E1F9}"/>
+    <dgm:cxn modelId="{483BF8C4-DBC4-4E2A-B0F4-02F0FF1B5C8E}" type="presOf" srcId="{4A8BA3F3-42C0-41EA-917D-9DDF709CADEA}" destId="{4E062ED7-C8B7-4731-A7F1-BE128EC98711}" srcOrd="0" destOrd="10" presId="urn:microsoft.com/office/officeart/2005/8/layout/vList5"/>
+    <dgm:cxn modelId="{B9ED93C6-2815-4A9B-914A-5AE99F5774C6}" srcId="{8B6C3B02-9B97-4461-849D-8C27B7EC535B}" destId="{2F634E6B-0C04-4EB9-91C3-E1E013618DDA}" srcOrd="2" destOrd="0" parTransId="{02AE7C93-89C4-484F-AFCE-7A88F797CBE6}" sibTransId="{4341451F-B376-44F3-B0C6-380A9D93638D}"/>
+    <dgm:cxn modelId="{420B62D3-FE4F-40A0-B131-C8DF3D0C141F}" srcId="{8B6C3B02-9B97-4461-849D-8C27B7EC535B}" destId="{12639EF0-BB1A-4373-80A6-973906E4B20F}" srcOrd="7" destOrd="0" parTransId="{34C1F691-A67B-43DA-AE71-CA2D5125F70E}" sibTransId="{39822BD4-F533-401C-B29B-EA82A20EF2F0}"/>
+    <dgm:cxn modelId="{961737D5-6121-4BE4-BB5F-0CD5CF455CFF}" type="presOf" srcId="{7276CFAD-4AB0-4615-B7B2-34C290675CFD}" destId="{4E062ED7-C8B7-4731-A7F1-BE128EC98711}" srcOrd="0" destOrd="8" presId="urn:microsoft.com/office/officeart/2005/8/layout/vList5"/>
+    <dgm:cxn modelId="{F99DEAD6-D354-4C2E-A912-E72BD9E0D9A7}" srcId="{8B6C3B02-9B97-4461-849D-8C27B7EC535B}" destId="{7276CFAD-4AB0-4615-B7B2-34C290675CFD}" srcOrd="8" destOrd="0" parTransId="{0D8CAB63-48AE-4EBF-A04A-A0513444996E}" sibTransId="{2F1A55C3-8659-48CC-8E22-711018F2B25A}"/>
     <dgm:cxn modelId="{FE6114DA-E6B4-465B-967B-43E233EA321A}" srcId="{2F2A67E8-ACD9-4C73-881C-0F727D32AE95}" destId="{35BB0A4F-EA77-413C-9E84-DEBFB93A1E88}" srcOrd="0" destOrd="0" parTransId="{D5ED6B98-9411-4F4F-8541-4763B0D1ABCB}" sibTransId="{68D557F7-03D8-49BF-88C8-BA7F7C13F7C3}"/>
-    <dgm:cxn modelId="{9DDA48DA-3C17-4B15-861D-9FB9429F1310}" type="presOf" srcId="{12639EF0-BB1A-4373-80A6-973906E4B20F}" destId="{4E062ED7-C8B7-4731-A7F1-BE128EC98711}" srcOrd="0" destOrd="4" presId="urn:microsoft.com/office/officeart/2005/8/layout/vList5"/>
-    <dgm:cxn modelId="{3CD1C0E7-01F4-4BE9-9ACB-DCCC1007E3E5}" type="presOf" srcId="{B89C6407-2BE2-4480-B463-96750AC78FFE}" destId="{4E062ED7-C8B7-4731-A7F1-BE128EC98711}" srcOrd="0" destOrd="2" presId="urn:microsoft.com/office/officeart/2005/8/layout/vList5"/>
+    <dgm:cxn modelId="{9DDA48DA-3C17-4B15-861D-9FB9429F1310}" type="presOf" srcId="{12639EF0-BB1A-4373-80A6-973906E4B20F}" destId="{4E062ED7-C8B7-4731-A7F1-BE128EC98711}" srcOrd="0" destOrd="7" presId="urn:microsoft.com/office/officeart/2005/8/layout/vList5"/>
+    <dgm:cxn modelId="{3CD1C0E7-01F4-4BE9-9ACB-DCCC1007E3E5}" type="presOf" srcId="{B89C6407-2BE2-4480-B463-96750AC78FFE}" destId="{4E062ED7-C8B7-4731-A7F1-BE128EC98711}" srcOrd="0" destOrd="5" presId="urn:microsoft.com/office/officeart/2005/8/layout/vList5"/>
     <dgm:cxn modelId="{E1987AED-FAC2-4A88-8949-016BDBE1E577}" type="presOf" srcId="{2F2A67E8-ACD9-4C73-881C-0F727D32AE95}" destId="{20EFAA17-3592-4F78-AEAE-2CD118F957A5}" srcOrd="0" destOrd="0" presId="urn:microsoft.com/office/officeart/2005/8/layout/vList5"/>
-    <dgm:cxn modelId="{CB4329F8-377A-4878-B985-8CD9D1BDC248}" type="presOf" srcId="{2F7A7128-86C4-4AA6-BDD2-C0F06335F019}" destId="{4E062ED7-C8B7-4731-A7F1-BE128EC98711}" srcOrd="0" destOrd="8" presId="urn:microsoft.com/office/officeart/2005/8/layout/vList5"/>
+    <dgm:cxn modelId="{CB4329F8-377A-4878-B985-8CD9D1BDC248}" type="presOf" srcId="{2F7A7128-86C4-4AA6-BDD2-C0F06335F019}" destId="{4E062ED7-C8B7-4731-A7F1-BE128EC98711}" srcOrd="0" destOrd="11" presId="urn:microsoft.com/office/officeart/2005/8/layout/vList5"/>
     <dgm:cxn modelId="{0898E643-84BC-4444-98F5-10F22C018DA9}" type="presParOf" srcId="{8C50726C-E90C-4FFA-B6A0-2ED37CF63F64}" destId="{796ABD26-0390-4B39-A62D-E35ED7901557}" srcOrd="0" destOrd="0" presId="urn:microsoft.com/office/officeart/2005/8/layout/vList5"/>
     <dgm:cxn modelId="{A671792A-35BA-44B2-8D4C-47463C93833A}" type="presParOf" srcId="{796ABD26-0390-4B39-A62D-E35ED7901557}" destId="{20EFAA17-3592-4F78-AEAE-2CD118F957A5}" srcOrd="0" destOrd="0" presId="urn:microsoft.com/office/officeart/2005/8/layout/vList5"/>
     <dgm:cxn modelId="{A8B88065-7789-42A7-A8DD-C9A8EEC873E4}" type="presParOf" srcId="{796ABD26-0390-4B39-A62D-E35ED7901557}" destId="{EFC1B403-9E6E-4411-9B69-79A1584C7937}" srcOrd="1" destOrd="0" presId="urn:microsoft.com/office/officeart/2005/8/layout/vList5"/>
@@ -5159,7 +5018,7 @@
           </a:pPr>
           <a:r>
             <a:rPr lang="en-US" sz="1500" b="1" dirty="0"/>
-            <a:t>Classic Models</a:t>
+            <a:t>Classic Statistic Models</a:t>
           </a:r>
           <a:endParaRPr lang="en-GB" sz="1500" dirty="0"/>
         </a:p>
@@ -5299,7 +5158,7 @@
           </a:pPr>
           <a:r>
             <a:rPr lang="en-US" sz="1500" dirty="0"/>
-            <a:t>Confusion Matrix </a:t>
+            <a:t>Imbalance Sensitive metrics (MCC)</a:t>
           </a:r>
           <a:endParaRPr lang="en-GB" sz="1500" dirty="0"/>
         </a:p>
@@ -5647,51 +5506,6 @@
         </a:p>
       </dgm:t>
     </dgm:pt>
-    <dgm:pt modelId="{304A9991-7FB4-48A4-BB91-2DABD1469E68}">
-      <dgm:prSet custT="1"/>
-      <dgm:spPr>
-        <a:ln>
-          <a:noFill/>
-        </a:ln>
-      </dgm:spPr>
-      <dgm:t>
-        <a:bodyPr/>
-        <a:lstStyle/>
-        <a:p>
-          <a:pPr>
-            <a:buFont typeface="Arial" panose="020B0604020202020204" pitchFamily="34" charset="0"/>
-            <a:buChar char="•"/>
-          </a:pPr>
-          <a:r>
-            <a:rPr lang="en-US" sz="1500" dirty="0"/>
-            <a:t>Accuracy Report (MCC, BA)</a:t>
-          </a:r>
-          <a:endParaRPr lang="en-GB" sz="1500" dirty="0"/>
-        </a:p>
-      </dgm:t>
-    </dgm:pt>
-    <dgm:pt modelId="{F6889F92-41C4-4015-A0A2-747B53826000}" type="parTrans" cxnId="{0C460555-F151-46B2-BF2B-C166C8A02639}">
-      <dgm:prSet/>
-      <dgm:spPr/>
-      <dgm:t>
-        <a:bodyPr/>
-        <a:lstStyle/>
-        <a:p>
-          <a:endParaRPr lang="en-GB"/>
-        </a:p>
-      </dgm:t>
-    </dgm:pt>
-    <dgm:pt modelId="{C4D119A4-A99D-4323-8621-917B74BD0C9A}" type="sibTrans" cxnId="{0C460555-F151-46B2-BF2B-C166C8A02639}">
-      <dgm:prSet/>
-      <dgm:spPr/>
-      <dgm:t>
-        <a:bodyPr/>
-        <a:lstStyle/>
-        <a:p>
-          <a:endParaRPr lang="en-GB"/>
-        </a:p>
-      </dgm:t>
-    </dgm:pt>
     <dgm:pt modelId="{BB81C3B5-2314-4785-9328-D1AE6AE2D613}">
       <dgm:prSet custT="1"/>
       <dgm:spPr>
@@ -6004,23 +5818,22 @@
     <dgm:cxn modelId="{E4630504-116B-4E77-933F-9C986CDE35BC}" type="presOf" srcId="{BB81C3B5-2314-4785-9328-D1AE6AE2D613}" destId="{45F4CA9F-B6AE-440A-846E-C46613653CA3}" srcOrd="0" destOrd="3" presId="urn:microsoft.com/office/officeart/2005/8/layout/vList5"/>
     <dgm:cxn modelId="{5143750A-2EC9-4478-96E0-656A958AD2FF}" type="presOf" srcId="{1BBAD82F-E545-4BE6-95C6-F132FDABEB24}" destId="{528CCE5E-2722-4EFC-B855-9221185C70A7}" srcOrd="0" destOrd="6" presId="urn:microsoft.com/office/officeart/2005/8/layout/vList5"/>
     <dgm:cxn modelId="{1236DE18-15B4-46B9-9503-1C82E8F35665}" type="presOf" srcId="{9B2B852C-EAA3-47DA-A8FA-B03219776D86}" destId="{931D566F-3CC3-4DF1-B1AF-B7DE9820E2D9}" srcOrd="0" destOrd="0" presId="urn:microsoft.com/office/officeart/2005/8/layout/vList5"/>
-    <dgm:cxn modelId="{7E97E324-EC2D-43FD-A738-CBFB8E3DADE6}" srcId="{9B2B852C-EAA3-47DA-A8FA-B03219776D86}" destId="{503EAE3D-96D0-4506-927D-E29AFB79DDB1}" srcOrd="3" destOrd="0" parTransId="{75349F84-9403-4094-9747-DEE4BDD05D01}" sibTransId="{36B9A918-6F76-4E21-9920-310D0C04E18D}"/>
+    <dgm:cxn modelId="{7E97E324-EC2D-43FD-A738-CBFB8E3DADE6}" srcId="{9B2B852C-EAA3-47DA-A8FA-B03219776D86}" destId="{503EAE3D-96D0-4506-927D-E29AFB79DDB1}" srcOrd="2" destOrd="0" parTransId="{75349F84-9403-4094-9747-DEE4BDD05D01}" sibTransId="{36B9A918-6F76-4E21-9920-310D0C04E18D}"/>
     <dgm:cxn modelId="{438A942B-7775-4C79-B49B-CBD8EA39E6E4}" type="presOf" srcId="{B0600B66-B46F-40B6-8B17-B8524682865A}" destId="{528CCE5E-2722-4EFC-B855-9221185C70A7}" srcOrd="0" destOrd="1" presId="urn:microsoft.com/office/officeart/2005/8/layout/vList5"/>
     <dgm:cxn modelId="{26170C30-A4F0-4603-BB93-72F0639012D3}" srcId="{775A0E56-45E5-4F2F-8BB2-03888CBCA43E}" destId="{6E3DD2CD-012E-43D2-8ACA-3379650B21B2}" srcOrd="2" destOrd="0" parTransId="{E7111990-F433-40A4-9B1C-C207BA8CED28}" sibTransId="{186CD722-9684-40C9-A08C-883561BE0B7B}"/>
     <dgm:cxn modelId="{20960E31-80E4-434C-9833-A98D016620C0}" type="presOf" srcId="{8FEAD5E4-97D6-4CFC-86B6-A26A7F729487}" destId="{7FCCB0FB-B29E-4A63-AD5D-91FA8360F37E}" srcOrd="0" destOrd="0" presId="urn:microsoft.com/office/officeart/2005/8/layout/vList5"/>
-    <dgm:cxn modelId="{F99B3135-FACA-4043-872E-5CB3507795FF}" type="presOf" srcId="{503EAE3D-96D0-4506-927D-E29AFB79DDB1}" destId="{7FCCB0FB-B29E-4A63-AD5D-91FA8360F37E}" srcOrd="0" destOrd="3" presId="urn:microsoft.com/office/officeart/2005/8/layout/vList5"/>
-    <dgm:cxn modelId="{7788635E-6D07-433D-963A-EB3919C119B1}" srcId="{9B2B852C-EAA3-47DA-A8FA-B03219776D86}" destId="{7A0E02F4-3F9C-4069-925A-EB6E3A3FA1FE}" srcOrd="2" destOrd="0" parTransId="{16581E5A-6559-4A62-ADB0-3D7817190D88}" sibTransId="{67C68DA8-3D32-4CC9-BF17-1F95B3AFB9A4}"/>
+    <dgm:cxn modelId="{F99B3135-FACA-4043-872E-5CB3507795FF}" type="presOf" srcId="{503EAE3D-96D0-4506-927D-E29AFB79DDB1}" destId="{7FCCB0FB-B29E-4A63-AD5D-91FA8360F37E}" srcOrd="0" destOrd="2" presId="urn:microsoft.com/office/officeart/2005/8/layout/vList5"/>
+    <dgm:cxn modelId="{7788635E-6D07-433D-963A-EB3919C119B1}" srcId="{9B2B852C-EAA3-47DA-A8FA-B03219776D86}" destId="{7A0E02F4-3F9C-4069-925A-EB6E3A3FA1FE}" srcOrd="1" destOrd="0" parTransId="{16581E5A-6559-4A62-ADB0-3D7817190D88}" sibTransId="{67C68DA8-3D32-4CC9-BF17-1F95B3AFB9A4}"/>
     <dgm:cxn modelId="{02E2B05E-C6B0-45E8-B85D-A5DAFC8E4B8C}" srcId="{ECAB65BA-2CCB-47FA-90F0-12502F7CD667}" destId="{C32467F7-3CE0-41DE-9C17-257A098FFAFC}" srcOrd="4" destOrd="0" parTransId="{11AF158F-FB67-423E-9A07-D8CCB8504FDD}" sibTransId="{2DA9250D-3D9F-4B39-B0F5-74DCDAED2A8B}"/>
     <dgm:cxn modelId="{29DB4060-509E-4160-8C51-6A07475B6A14}" srcId="{ECAB65BA-2CCB-47FA-90F0-12502F7CD667}" destId="{E255CFCF-58F1-4D1D-9D3C-4D9466A42ED1}" srcOrd="0" destOrd="0" parTransId="{D4567D44-B2D2-4B04-A7A1-6AF865C73C4A}" sibTransId="{A2D4B6A7-7220-4275-865D-CA29B37B1897}"/>
     <dgm:cxn modelId="{B9244A46-996A-45F8-82BA-8959F7D107E1}" type="presOf" srcId="{6E3DD2CD-012E-43D2-8ACA-3379650B21B2}" destId="{45F4CA9F-B6AE-440A-846E-C46613653CA3}" srcOrd="0" destOrd="2" presId="urn:microsoft.com/office/officeart/2005/8/layout/vList5"/>
     <dgm:cxn modelId="{1BBC066B-342E-44D4-ACFA-263F081B632B}" srcId="{ECAB65BA-2CCB-47FA-90F0-12502F7CD667}" destId="{1BBAD82F-E545-4BE6-95C6-F132FDABEB24}" srcOrd="6" destOrd="0" parTransId="{EFD4F4E6-D13D-43BA-AF12-259D5632F0D4}" sibTransId="{D21A4C4E-BAB2-4FBD-80FC-73B9D7B0F150}"/>
     <dgm:cxn modelId="{466F436D-A639-4506-BE51-411E477419B4}" type="presOf" srcId="{ECAB65BA-2CCB-47FA-90F0-12502F7CD667}" destId="{347B65B5-D951-4BD4-80BE-FAE3D7D0B395}" srcOrd="0" destOrd="0" presId="urn:microsoft.com/office/officeart/2005/8/layout/vList5"/>
-    <dgm:cxn modelId="{0C460555-F151-46B2-BF2B-C166C8A02639}" srcId="{9B2B852C-EAA3-47DA-A8FA-B03219776D86}" destId="{304A9991-7FB4-48A4-BB91-2DABD1469E68}" srcOrd="1" destOrd="0" parTransId="{F6889F92-41C4-4015-A0A2-747B53826000}" sibTransId="{C4D119A4-A99D-4323-8621-917B74BD0C9A}"/>
     <dgm:cxn modelId="{3333F455-B39D-4AED-821C-4E64F5435C82}" srcId="{775A0E56-45E5-4F2F-8BB2-03888CBCA43E}" destId="{704B54DE-7AF4-4CB4-B608-23986912A49B}" srcOrd="0" destOrd="0" parTransId="{86898E17-3847-4306-AC7A-3CF060EF52D8}" sibTransId="{BB5425DB-06CD-4901-904A-F707F9EF7403}"/>
-    <dgm:cxn modelId="{DE59FB78-434B-4C40-AF14-B9A6DE4A9035}" type="presOf" srcId="{6EA1BCF4-61C4-4E72-A896-B51A3D88562E}" destId="{7FCCB0FB-B29E-4A63-AD5D-91FA8360F37E}" srcOrd="0" destOrd="4" presId="urn:microsoft.com/office/officeart/2005/8/layout/vList5"/>
+    <dgm:cxn modelId="{DE59FB78-434B-4C40-AF14-B9A6DE4A9035}" type="presOf" srcId="{6EA1BCF4-61C4-4E72-A896-B51A3D88562E}" destId="{7FCCB0FB-B29E-4A63-AD5D-91FA8360F37E}" srcOrd="0" destOrd="3" presId="urn:microsoft.com/office/officeart/2005/8/layout/vList5"/>
     <dgm:cxn modelId="{CBEB297C-89C9-42B3-981E-CABC46858287}" srcId="{ECAB65BA-2CCB-47FA-90F0-12502F7CD667}" destId="{B0600B66-B46F-40B6-8B17-B8524682865A}" srcOrd="1" destOrd="0" parTransId="{22ADC9B3-F73C-4C97-B245-1C25F345F061}" sibTransId="{DFFAB384-9D2D-4C6F-8231-975AEACB606A}"/>
-    <dgm:cxn modelId="{F1C4A781-A7DF-4BE7-A119-8E56610EC14D}" srcId="{9B2B852C-EAA3-47DA-A8FA-B03219776D86}" destId="{6EA1BCF4-61C4-4E72-A896-B51A3D88562E}" srcOrd="4" destOrd="0" parTransId="{C075C8BC-49D3-4E0F-BCE0-E27B09F4D2DD}" sibTransId="{B709DBDA-4E1E-4B64-9A50-299B1832A414}"/>
-    <dgm:cxn modelId="{3D820182-4244-41CC-8FEC-209ADEAF685E}" type="presOf" srcId="{7A0E02F4-3F9C-4069-925A-EB6E3A3FA1FE}" destId="{7FCCB0FB-B29E-4A63-AD5D-91FA8360F37E}" srcOrd="0" destOrd="2" presId="urn:microsoft.com/office/officeart/2005/8/layout/vList5"/>
+    <dgm:cxn modelId="{F1C4A781-A7DF-4BE7-A119-8E56610EC14D}" srcId="{9B2B852C-EAA3-47DA-A8FA-B03219776D86}" destId="{6EA1BCF4-61C4-4E72-A896-B51A3D88562E}" srcOrd="3" destOrd="0" parTransId="{C075C8BC-49D3-4E0F-BCE0-E27B09F4D2DD}" sibTransId="{B709DBDA-4E1E-4B64-9A50-299B1832A414}"/>
+    <dgm:cxn modelId="{3D820182-4244-41CC-8FEC-209ADEAF685E}" type="presOf" srcId="{7A0E02F4-3F9C-4069-925A-EB6E3A3FA1FE}" destId="{7FCCB0FB-B29E-4A63-AD5D-91FA8360F37E}" srcOrd="0" destOrd="1" presId="urn:microsoft.com/office/officeart/2005/8/layout/vList5"/>
     <dgm:cxn modelId="{07916F84-1F32-401B-9642-EAEB93C77EE7}" type="presOf" srcId="{4988BFC7-4B2E-48E4-8725-87E9F1E8960B}" destId="{528CCE5E-2722-4EFC-B855-9221185C70A7}" srcOrd="0" destOrd="7" presId="urn:microsoft.com/office/officeart/2005/8/layout/vList5"/>
     <dgm:cxn modelId="{D1968A85-9847-47EC-AB41-2BD8CA92798B}" srcId="{775A0E56-45E5-4F2F-8BB2-03888CBCA43E}" destId="{BB81C3B5-2314-4785-9328-D1AE6AE2D613}" srcOrd="3" destOrd="0" parTransId="{A050DE7A-6549-4CAE-857C-D90ADECF5A68}" sibTransId="{87F311EB-1BD1-485C-8B14-143C4767ABB4}"/>
     <dgm:cxn modelId="{23A5AC89-0E3B-4165-8F88-068FF0ED9DFA}" type="presOf" srcId="{C17AEEAA-6BF3-4E08-B01D-1AF2529D908A}" destId="{528CCE5E-2722-4EFC-B855-9221185C70A7}" srcOrd="0" destOrd="5" presId="urn:microsoft.com/office/officeart/2005/8/layout/vList5"/>
@@ -6037,7 +5850,6 @@
     <dgm:cxn modelId="{0E762CC9-9155-4F9C-AA67-0ACBD93362FE}" srcId="{ECAB65BA-2CCB-47FA-90F0-12502F7CD667}" destId="{7EC0B3D7-4F99-4B43-900F-0EE1BB80704F}" srcOrd="3" destOrd="0" parTransId="{2ECE73DB-4FB7-45D3-ACF3-6AEC7D12A1DC}" sibTransId="{519BF972-AFD4-4E7B-9058-BB2DC2DFB29E}"/>
     <dgm:cxn modelId="{F80719DF-DE1A-4357-9081-18F73750E092}" type="presOf" srcId="{E255CFCF-58F1-4D1D-9D3C-4D9466A42ED1}" destId="{528CCE5E-2722-4EFC-B855-9221185C70A7}" srcOrd="0" destOrd="0" presId="urn:microsoft.com/office/officeart/2005/8/layout/vList5"/>
     <dgm:cxn modelId="{7E557EE5-11AD-4DAB-B47D-1CAED87697B7}" srcId="{ECAB65BA-2CCB-47FA-90F0-12502F7CD667}" destId="{E391617A-E7DD-4FDF-991D-6D6E54481043}" srcOrd="2" destOrd="0" parTransId="{811190BA-A7C5-40B1-8A62-0B54277ED2D9}" sibTransId="{EE31202E-F616-42EE-8D41-21C266B68DBD}"/>
-    <dgm:cxn modelId="{1AC41DE7-F09A-4DB8-BF87-23467879726A}" type="presOf" srcId="{304A9991-7FB4-48A4-BB91-2DABD1469E68}" destId="{7FCCB0FB-B29E-4A63-AD5D-91FA8360F37E}" srcOrd="0" destOrd="1" presId="urn:microsoft.com/office/officeart/2005/8/layout/vList5"/>
     <dgm:cxn modelId="{BCAA90E8-50AA-49FE-9370-4CFFF57C7BCC}" srcId="{ECAB65BA-2CCB-47FA-90F0-12502F7CD667}" destId="{4988BFC7-4B2E-48E4-8725-87E9F1E8960B}" srcOrd="7" destOrd="0" parTransId="{1FB050C1-0886-4EAE-8B11-1E72A225309D}" sibTransId="{1B985C43-8D5A-4F70-BF24-3EDC8D50BA96}"/>
     <dgm:cxn modelId="{C172C7F5-BA9C-4BB9-8259-F4B1498BFE88}" srcId="{7622099B-C41C-408D-A09C-4C036F524DB3}" destId="{ECAB65BA-2CCB-47FA-90F0-12502F7CD667}" srcOrd="1" destOrd="0" parTransId="{2912F7AE-6121-4AE1-8137-BCE86CA0E436}" sibTransId="{913F1ADE-97C3-454B-ACCF-AFAA92708741}"/>
     <dgm:cxn modelId="{D889CFFE-E244-4072-8DFF-DCA9015F0EF8}" type="presOf" srcId="{9A89735C-25C3-4963-9F5D-49EA4C388E80}" destId="{45F4CA9F-B6AE-440A-846E-C46613653CA3}" srcOrd="0" destOrd="1" presId="urn:microsoft.com/office/officeart/2005/8/layout/vList5"/>
@@ -7001,7 +6813,7 @@
           </a:pPr>
           <a:r>
             <a:rPr lang="en-US" sz="1500" kern="1200" dirty="0"/>
-            <a:t>Feature Selection Exploratory Analysis </a:t>
+            <a:t>Exploratory Analysis </a:t>
           </a:r>
           <a:r>
             <a:rPr lang="en-US" sz="1500" kern="1200" dirty="0">
@@ -7027,7 +6839,67 @@
             <a:rPr lang="en-US" sz="1500" kern="1200" dirty="0"/>
             <a:t> information leakage</a:t>
           </a:r>
+          <a:br>
+            <a:rPr lang="en-US" sz="1500" kern="1200" dirty="0"/>
+          </a:br>
           <a:endParaRPr lang="en-GB" sz="1500" kern="1200" dirty="0"/>
+        </a:p>
+        <a:p>
+          <a:pPr marL="114300" lvl="1" indent="-114300" algn="l" defTabSz="666750">
+            <a:lnSpc>
+              <a:spcPct val="90000"/>
+            </a:lnSpc>
+            <a:spcBef>
+              <a:spcPct val="0"/>
+            </a:spcBef>
+            <a:spcAft>
+              <a:spcPct val="15000"/>
+            </a:spcAft>
+            <a:buFont typeface="Wingdings" panose="05000000000000000000" pitchFamily="2" charset="2"/>
+            <a:buChar char="Ø"/>
+          </a:pPr>
+          <a:r>
+            <a:rPr lang="en-GB" sz="1500" kern="1200" dirty="0"/>
+            <a:t>Merge levels </a:t>
+          </a:r>
+        </a:p>
+        <a:p>
+          <a:pPr marL="114300" lvl="1" indent="-114300" algn="l" defTabSz="666750">
+            <a:lnSpc>
+              <a:spcPct val="90000"/>
+            </a:lnSpc>
+            <a:spcBef>
+              <a:spcPct val="0"/>
+            </a:spcBef>
+            <a:spcAft>
+              <a:spcPct val="15000"/>
+            </a:spcAft>
+            <a:buFont typeface="Wingdings" panose="05000000000000000000" pitchFamily="2" charset="2"/>
+            <a:buChar char="Ø"/>
+          </a:pPr>
+          <a:r>
+            <a:rPr lang="en-GB" sz="1500" kern="1200" dirty="0"/>
+            <a:t>Feature Selection</a:t>
+          </a:r>
+        </a:p>
+        <a:p>
+          <a:pPr marL="114300" lvl="1" indent="-114300" algn="l" defTabSz="666750">
+            <a:lnSpc>
+              <a:spcPct val="90000"/>
+            </a:lnSpc>
+            <a:spcBef>
+              <a:spcPct val="0"/>
+            </a:spcBef>
+            <a:spcAft>
+              <a:spcPct val="15000"/>
+            </a:spcAft>
+            <a:buFont typeface="Wingdings" panose="05000000000000000000" pitchFamily="2" charset="2"/>
+            <a:buChar char="Ø"/>
+          </a:pPr>
+          <a:r>
+            <a:rPr lang="en-GB" sz="1500" kern="1200" dirty="0"/>
+            <a:t>Real world skewed data  Log scale</a:t>
+          </a:r>
         </a:p>
         <a:p>
           <a:pPr marL="114300" lvl="1" indent="-114300" algn="l" defTabSz="666750">
@@ -7213,87 +7085,6 @@
             <a:rPr lang="en-GB" sz="1500" kern="1200" dirty="0"/>
             <a:t>Outliers</a:t>
           </a:r>
-        </a:p>
-        <a:p>
-          <a:pPr marL="114300" lvl="1" indent="-114300" algn="l" defTabSz="666750">
-            <a:lnSpc>
-              <a:spcPct val="90000"/>
-            </a:lnSpc>
-            <a:spcBef>
-              <a:spcPct val="0"/>
-            </a:spcBef>
-            <a:spcAft>
-              <a:spcPct val="15000"/>
-            </a:spcAft>
-            <a:buChar char="•"/>
-          </a:pPr>
-          <a:endParaRPr lang="en-GB" sz="1500" kern="1200" dirty="0"/>
-        </a:p>
-        <a:p>
-          <a:pPr marL="114300" lvl="1" indent="-114300" algn="l" defTabSz="666750">
-            <a:lnSpc>
-              <a:spcPct val="90000"/>
-            </a:lnSpc>
-            <a:spcBef>
-              <a:spcPct val="0"/>
-            </a:spcBef>
-            <a:spcAft>
-              <a:spcPct val="15000"/>
-            </a:spcAft>
-            <a:buFont typeface="Wingdings" panose="05000000000000000000" pitchFamily="2" charset="2"/>
-            <a:buChar char="Ø"/>
-          </a:pPr>
-          <a:r>
-            <a:rPr lang="en-US" sz="1500" kern="1200" dirty="0">
-              <a:sym typeface="Wingdings" panose="05000000000000000000" pitchFamily="2" charset="2"/>
-            </a:rPr>
-            <a:t>Merge levels </a:t>
-          </a:r>
-          <a:endParaRPr lang="en-GB" sz="1500" kern="1200" dirty="0"/>
-        </a:p>
-        <a:p>
-          <a:pPr marL="114300" lvl="1" indent="-114300" algn="l" defTabSz="666750">
-            <a:lnSpc>
-              <a:spcPct val="90000"/>
-            </a:lnSpc>
-            <a:spcBef>
-              <a:spcPct val="0"/>
-            </a:spcBef>
-            <a:spcAft>
-              <a:spcPct val="15000"/>
-            </a:spcAft>
-            <a:buFont typeface="Wingdings" panose="05000000000000000000" pitchFamily="2" charset="2"/>
-            <a:buChar char="Ø"/>
-          </a:pPr>
-          <a:r>
-            <a:rPr lang="en-US" sz="1500" kern="1200" dirty="0">
-              <a:sym typeface="Wingdings" panose="05000000000000000000" pitchFamily="2" charset="2"/>
-            </a:rPr>
-            <a:t>Feature Selection</a:t>
-          </a:r>
-          <a:endParaRPr lang="en-GB" sz="1500" kern="1200" dirty="0"/>
-        </a:p>
-        <a:p>
-          <a:pPr marL="114300" lvl="1" indent="-114300" algn="l" defTabSz="666750">
-            <a:lnSpc>
-              <a:spcPct val="90000"/>
-            </a:lnSpc>
-            <a:spcBef>
-              <a:spcPct val="0"/>
-            </a:spcBef>
-            <a:spcAft>
-              <a:spcPct val="15000"/>
-            </a:spcAft>
-            <a:buFont typeface="Wingdings" panose="05000000000000000000" pitchFamily="2" charset="2"/>
-            <a:buChar char="Ø"/>
-          </a:pPr>
-          <a:r>
-            <a:rPr lang="en-US" sz="1500" kern="1200" dirty="0">
-              <a:sym typeface="Wingdings" panose="05000000000000000000" pitchFamily="2" charset="2"/>
-            </a:rPr>
-            <a:t>Real world skewed data  Log scale</a:t>
-          </a:r>
-          <a:endParaRPr lang="en-GB" sz="1500" kern="1200" dirty="0"/>
         </a:p>
       </dsp:txBody>
       <dsp:txXfrm rot="-5400000">
@@ -7692,7 +7483,7 @@
           </a:pPr>
           <a:r>
             <a:rPr lang="en-US" sz="1500" b="1" kern="1200" dirty="0"/>
-            <a:t>Classic Models</a:t>
+            <a:t>Classic Statistic Models</a:t>
           </a:r>
           <a:endParaRPr lang="en-GB" sz="1500" kern="1200" dirty="0"/>
         </a:p>
@@ -7991,27 +7782,7 @@
           </a:pPr>
           <a:r>
             <a:rPr lang="en-US" sz="1500" kern="1200" dirty="0"/>
-            <a:t>Confusion Matrix </a:t>
-          </a:r>
-          <a:endParaRPr lang="en-GB" sz="1500" kern="1200" dirty="0"/>
-        </a:p>
-        <a:p>
-          <a:pPr marL="114300" lvl="1" indent="-114300" algn="l" defTabSz="666750">
-            <a:lnSpc>
-              <a:spcPct val="90000"/>
-            </a:lnSpc>
-            <a:spcBef>
-              <a:spcPct val="0"/>
-            </a:spcBef>
-            <a:spcAft>
-              <a:spcPct val="15000"/>
-            </a:spcAft>
-            <a:buFont typeface="Arial" panose="020B0604020202020204" pitchFamily="34" charset="0"/>
-            <a:buChar char="•"/>
-          </a:pPr>
-          <a:r>
-            <a:rPr lang="en-US" sz="1500" kern="1200" dirty="0"/>
-            <a:t>Accuracy Report (MCC, BA)</a:t>
+            <a:t>Imbalance Sensitive metrics (MCC)</a:t>
           </a:r>
           <a:endParaRPr lang="en-GB" sz="1500" kern="1200" dirty="0"/>
         </a:p>
@@ -12528,7 +12299,7 @@
           <a:p>
             <a:fld id="{C1A9776D-B584-4D4B-981C-FA97E36C0636}" type="datetimeFigureOut">
               <a:rPr lang="en-GB" smtClean="0"/>
-              <a:t>28/11/2025</a:t>
+              <a:t>29/11/2025</a:t>
             </a:fld>
             <a:endParaRPr lang="en-GB"/>
           </a:p>
@@ -12728,7 +12499,7 @@
           <a:p>
             <a:fld id="{C1A9776D-B584-4D4B-981C-FA97E36C0636}" type="datetimeFigureOut">
               <a:rPr lang="en-GB" smtClean="0"/>
-              <a:t>28/11/2025</a:t>
+              <a:t>29/11/2025</a:t>
             </a:fld>
             <a:endParaRPr lang="en-GB"/>
           </a:p>
@@ -12938,7 +12709,7 @@
           <a:p>
             <a:fld id="{C1A9776D-B584-4D4B-981C-FA97E36C0636}" type="datetimeFigureOut">
               <a:rPr lang="en-GB" smtClean="0"/>
-              <a:t>28/11/2025</a:t>
+              <a:t>29/11/2025</a:t>
             </a:fld>
             <a:endParaRPr lang="en-GB"/>
           </a:p>
@@ -13138,7 +12909,7 @@
           <a:p>
             <a:fld id="{C1A9776D-B584-4D4B-981C-FA97E36C0636}" type="datetimeFigureOut">
               <a:rPr lang="en-GB" smtClean="0"/>
-              <a:t>28/11/2025</a:t>
+              <a:t>29/11/2025</a:t>
             </a:fld>
             <a:endParaRPr lang="en-GB"/>
           </a:p>
@@ -13414,7 +13185,7 @@
           <a:p>
             <a:fld id="{C1A9776D-B584-4D4B-981C-FA97E36C0636}" type="datetimeFigureOut">
               <a:rPr lang="en-GB" smtClean="0"/>
-              <a:t>28/11/2025</a:t>
+              <a:t>29/11/2025</a:t>
             </a:fld>
             <a:endParaRPr lang="en-GB"/>
           </a:p>
@@ -13682,7 +13453,7 @@
           <a:p>
             <a:fld id="{C1A9776D-B584-4D4B-981C-FA97E36C0636}" type="datetimeFigureOut">
               <a:rPr lang="en-GB" smtClean="0"/>
-              <a:t>28/11/2025</a:t>
+              <a:t>29/11/2025</a:t>
             </a:fld>
             <a:endParaRPr lang="en-GB"/>
           </a:p>
@@ -14097,7 +13868,7 @@
           <a:p>
             <a:fld id="{C1A9776D-B584-4D4B-981C-FA97E36C0636}" type="datetimeFigureOut">
               <a:rPr lang="en-GB" smtClean="0"/>
-              <a:t>28/11/2025</a:t>
+              <a:t>29/11/2025</a:t>
             </a:fld>
             <a:endParaRPr lang="en-GB"/>
           </a:p>
@@ -14239,7 +14010,7 @@
           <a:p>
             <a:fld id="{C1A9776D-B584-4D4B-981C-FA97E36C0636}" type="datetimeFigureOut">
               <a:rPr lang="en-GB" smtClean="0"/>
-              <a:t>28/11/2025</a:t>
+              <a:t>29/11/2025</a:t>
             </a:fld>
             <a:endParaRPr lang="en-GB"/>
           </a:p>
@@ -14352,7 +14123,7 @@
           <a:p>
             <a:fld id="{C1A9776D-B584-4D4B-981C-FA97E36C0636}" type="datetimeFigureOut">
               <a:rPr lang="en-GB" smtClean="0"/>
-              <a:t>28/11/2025</a:t>
+              <a:t>29/11/2025</a:t>
             </a:fld>
             <a:endParaRPr lang="en-GB"/>
           </a:p>
@@ -14665,7 +14436,7 @@
           <a:p>
             <a:fld id="{C1A9776D-B584-4D4B-981C-FA97E36C0636}" type="datetimeFigureOut">
               <a:rPr lang="en-GB" smtClean="0"/>
-              <a:t>28/11/2025</a:t>
+              <a:t>29/11/2025</a:t>
             </a:fld>
             <a:endParaRPr lang="en-GB"/>
           </a:p>
@@ -14954,7 +14725,7 @@
           <a:p>
             <a:fld id="{C1A9776D-B584-4D4B-981C-FA97E36C0636}" type="datetimeFigureOut">
               <a:rPr lang="en-GB" smtClean="0"/>
-              <a:t>28/11/2025</a:t>
+              <a:t>29/11/2025</a:t>
             </a:fld>
             <a:endParaRPr lang="en-GB"/>
           </a:p>
@@ -15210,7 +14981,7 @@
           <a:p>
             <a:fld id="{C1A9776D-B584-4D4B-981C-FA97E36C0636}" type="datetimeFigureOut">
               <a:rPr lang="en-GB" smtClean="0"/>
-              <a:t>28/11/2025</a:t>
+              <a:t>29/11/2025</a:t>
             </a:fld>
             <a:endParaRPr lang="en-GB"/>
           </a:p>
@@ -17667,10 +17438,10 @@
       </p:sp>
       <p:grpSp>
         <p:nvGrpSpPr>
-          <p:cNvPr id="24" name="Group 23">
+          <p:cNvPr id="12" name="Group 11">
             <a:extLst>
               <a:ext uri="{FF2B5EF4-FFF2-40B4-BE49-F238E27FC236}">
-                <a16:creationId xmlns:a16="http://schemas.microsoft.com/office/drawing/2014/main" id="{3FB3EC97-CFD4-18C0-5C67-9419FD568CEB}"/>
+                <a16:creationId xmlns:a16="http://schemas.microsoft.com/office/drawing/2014/main" id="{01DA6A5A-7725-B1F0-134E-0173B6564A6F}"/>
               </a:ext>
             </a:extLst>
           </p:cNvPr>
@@ -17679,18 +17450,18 @@
         </p:nvGrpSpPr>
         <p:grpSpPr>
           <a:xfrm>
-            <a:off x="574875" y="909248"/>
-            <a:ext cx="10984377" cy="5754469"/>
-            <a:chOff x="586450" y="909248"/>
-            <a:chExt cx="10984377" cy="5754469"/>
+            <a:off x="609600" y="891252"/>
+            <a:ext cx="10972799" cy="5749315"/>
+            <a:chOff x="903141" y="1034408"/>
+            <a:chExt cx="10385717" cy="5550998"/>
           </a:xfrm>
         </p:grpSpPr>
         <p:pic>
           <p:nvPicPr>
-            <p:cNvPr id="10" name="Picture 9">
+            <p:cNvPr id="4" name="Picture 3">
               <a:extLst>
                 <a:ext uri="{FF2B5EF4-FFF2-40B4-BE49-F238E27FC236}">
-                  <a16:creationId xmlns:a16="http://schemas.microsoft.com/office/drawing/2014/main" id="{7C472132-5D48-1F80-B2C9-8536CD86963F}"/>
+                  <a16:creationId xmlns:a16="http://schemas.microsoft.com/office/drawing/2014/main" id="{66A154A8-F09D-B696-5854-6A2A6B3F738B}"/>
                 </a:ext>
               </a:extLst>
             </p:cNvPr>
@@ -17707,8 +17478,8 @@
           </p:blipFill>
           <p:spPr>
             <a:xfrm>
-              <a:off x="6084428" y="3791564"/>
-              <a:ext cx="5486399" cy="2872153"/>
+              <a:off x="903142" y="1034408"/>
+              <a:ext cx="5192858" cy="2718483"/>
             </a:xfrm>
             <a:prstGeom prst="rect">
               <a:avLst/>
@@ -17723,10 +17494,10 @@
         </p:pic>
         <p:pic>
           <p:nvPicPr>
-            <p:cNvPr id="13" name="Picture 12">
+            <p:cNvPr id="6" name="Picture 5">
               <a:extLst>
                 <a:ext uri="{FF2B5EF4-FFF2-40B4-BE49-F238E27FC236}">
-                  <a16:creationId xmlns:a16="http://schemas.microsoft.com/office/drawing/2014/main" id="{0950AC3A-891F-671F-7599-F2B502FB4DB5}"/>
+                  <a16:creationId xmlns:a16="http://schemas.microsoft.com/office/drawing/2014/main" id="{FC6DEAD2-832A-A984-36BA-12DB48E818B9}"/>
                 </a:ext>
               </a:extLst>
             </p:cNvPr>
@@ -17743,8 +17514,8 @@
           </p:blipFill>
           <p:spPr>
             <a:xfrm>
-              <a:off x="586450" y="3791564"/>
-              <a:ext cx="5486398" cy="2872153"/>
+              <a:off x="6096001" y="1034408"/>
+              <a:ext cx="5192857" cy="2718483"/>
             </a:xfrm>
             <a:prstGeom prst="rect">
               <a:avLst/>
@@ -17759,10 +17530,10 @@
         </p:pic>
         <p:pic>
           <p:nvPicPr>
-            <p:cNvPr id="18" name="Picture 17">
+            <p:cNvPr id="8" name="Picture 7">
               <a:extLst>
                 <a:ext uri="{FF2B5EF4-FFF2-40B4-BE49-F238E27FC236}">
-                  <a16:creationId xmlns:a16="http://schemas.microsoft.com/office/drawing/2014/main" id="{0D213D03-A565-B363-6B02-CE7249196914}"/>
+                  <a16:creationId xmlns:a16="http://schemas.microsoft.com/office/drawing/2014/main" id="{DD8F1152-8CB3-CBE7-36DA-47565F00501D}"/>
                 </a:ext>
               </a:extLst>
             </p:cNvPr>
@@ -17779,8 +17550,8 @@
           </p:blipFill>
           <p:spPr>
             <a:xfrm>
-              <a:off x="6084426" y="909248"/>
-              <a:ext cx="5486400" cy="2872153"/>
+              <a:off x="903141" y="3864209"/>
+              <a:ext cx="5192857" cy="2718483"/>
             </a:xfrm>
             <a:prstGeom prst="rect">
               <a:avLst/>
@@ -17795,10 +17566,10 @@
         </p:pic>
         <p:pic>
           <p:nvPicPr>
-            <p:cNvPr id="20" name="Picture 19">
+            <p:cNvPr id="11" name="Picture 10">
               <a:extLst>
                 <a:ext uri="{FF2B5EF4-FFF2-40B4-BE49-F238E27FC236}">
-                  <a16:creationId xmlns:a16="http://schemas.microsoft.com/office/drawing/2014/main" id="{8213FD52-7304-D574-CCCB-2C514C8C0A43}"/>
+                  <a16:creationId xmlns:a16="http://schemas.microsoft.com/office/drawing/2014/main" id="{8088072D-F3D7-458A-C1F7-966B504994F2}"/>
                 </a:ext>
               </a:extLst>
             </p:cNvPr>
@@ -17815,8 +17586,8 @@
           </p:blipFill>
           <p:spPr>
             <a:xfrm>
-              <a:off x="586450" y="909248"/>
-              <a:ext cx="5486398" cy="2872153"/>
+              <a:off x="6096000" y="3866923"/>
+              <a:ext cx="5192857" cy="2718483"/>
             </a:xfrm>
             <a:prstGeom prst="rect">
               <a:avLst/>
@@ -17902,150 +17673,147 @@
           </a:p>
         </p:txBody>
       </p:sp>
-      <p:pic>
-        <p:nvPicPr>
-          <p:cNvPr id="14" name="Picture 13">
+      <p:grpSp>
+        <p:nvGrpSpPr>
+          <p:cNvPr id="11" name="Group 10">
             <a:extLst>
               <a:ext uri="{FF2B5EF4-FFF2-40B4-BE49-F238E27FC236}">
-                <a16:creationId xmlns:a16="http://schemas.microsoft.com/office/drawing/2014/main" id="{34D8EBA6-F13B-9891-83BA-FB348C7CEE7D}"/>
+                <a16:creationId xmlns:a16="http://schemas.microsoft.com/office/drawing/2014/main" id="{5946AAF6-E98E-7729-EA74-A8B8F228C3C6}"/>
               </a:ext>
             </a:extLst>
           </p:cNvPr>
-          <p:cNvPicPr>
-            <a:picLocks noChangeAspect="1"/>
-          </p:cNvPicPr>
+          <p:cNvGrpSpPr/>
           <p:nvPr/>
-        </p:nvPicPr>
-        <p:blipFill>
-          <a:blip r:embed="rId2"/>
-          <a:stretch>
-            <a:fillRect/>
-          </a:stretch>
-        </p:blipFill>
-        <p:spPr>
+        </p:nvGrpSpPr>
+        <p:grpSpPr>
           <a:xfrm>
-            <a:off x="808887" y="1225164"/>
-            <a:ext cx="5287113" cy="2648320"/>
+            <a:off x="609600" y="1234690"/>
+            <a:ext cx="10972800" cy="5456205"/>
+            <a:chOff x="609600" y="1234690"/>
+            <a:chExt cx="10972800" cy="5456205"/>
           </a:xfrm>
-          <a:prstGeom prst="rect">
-            <a:avLst/>
-          </a:prstGeom>
-          <a:ln>
-            <a:noFill/>
-          </a:ln>
-          <a:effectLst>
-            <a:softEdge rad="112500"/>
-          </a:effectLst>
-        </p:spPr>
-      </p:pic>
-      <p:pic>
-        <p:nvPicPr>
-          <p:cNvPr id="16" name="Picture 15">
-            <a:extLst>
-              <a:ext uri="{FF2B5EF4-FFF2-40B4-BE49-F238E27FC236}">
-                <a16:creationId xmlns:a16="http://schemas.microsoft.com/office/drawing/2014/main" id="{A8B5C16B-5A07-0192-C73D-1F03ADF5804E}"/>
-              </a:ext>
-            </a:extLst>
-          </p:cNvPr>
-          <p:cNvPicPr>
-            <a:picLocks noChangeAspect="1"/>
-          </p:cNvPicPr>
-          <p:nvPr/>
-        </p:nvPicPr>
-        <p:blipFill>
-          <a:blip r:embed="rId3"/>
-          <a:stretch>
-            <a:fillRect/>
-          </a:stretch>
-        </p:blipFill>
-        <p:spPr>
-          <a:xfrm>
-            <a:off x="6096000" y="1225164"/>
-            <a:ext cx="5372850" cy="2648320"/>
-          </a:xfrm>
-          <a:prstGeom prst="rect">
-            <a:avLst/>
-          </a:prstGeom>
-          <a:ln>
-            <a:noFill/>
-          </a:ln>
-          <a:effectLst>
-            <a:softEdge rad="112500"/>
-          </a:effectLst>
-        </p:spPr>
-      </p:pic>
-      <p:pic>
-        <p:nvPicPr>
-          <p:cNvPr id="18" name="Picture 17">
-            <a:extLst>
-              <a:ext uri="{FF2B5EF4-FFF2-40B4-BE49-F238E27FC236}">
-                <a16:creationId xmlns:a16="http://schemas.microsoft.com/office/drawing/2014/main" id="{F35FB39E-3272-D92C-9125-F3C06DBF38D3}"/>
-              </a:ext>
-            </a:extLst>
-          </p:cNvPr>
-          <p:cNvPicPr>
-            <a:picLocks noChangeAspect="1"/>
-          </p:cNvPicPr>
-          <p:nvPr/>
-        </p:nvPicPr>
-        <p:blipFill>
-          <a:blip r:embed="rId4"/>
-          <a:stretch>
-            <a:fillRect/>
-          </a:stretch>
-        </p:blipFill>
-        <p:spPr>
-          <a:xfrm>
-            <a:off x="808887" y="3873484"/>
-            <a:ext cx="5287113" cy="2667372"/>
-          </a:xfrm>
-          <a:prstGeom prst="rect">
-            <a:avLst/>
-          </a:prstGeom>
-          <a:ln>
-            <a:noFill/>
-          </a:ln>
-          <a:effectLst>
-            <a:softEdge rad="112500"/>
-          </a:effectLst>
-        </p:spPr>
-      </p:pic>
-      <p:pic>
-        <p:nvPicPr>
-          <p:cNvPr id="20" name="Picture 19">
-            <a:extLst>
-              <a:ext uri="{FF2B5EF4-FFF2-40B4-BE49-F238E27FC236}">
-                <a16:creationId xmlns:a16="http://schemas.microsoft.com/office/drawing/2014/main" id="{A61F3796-1B61-CFA2-3252-D326B10039BA}"/>
-              </a:ext>
-            </a:extLst>
-          </p:cNvPr>
-          <p:cNvPicPr>
-            <a:picLocks noChangeAspect="1"/>
-          </p:cNvPicPr>
-          <p:nvPr/>
-        </p:nvPicPr>
-        <p:blipFill>
-          <a:blip r:embed="rId5"/>
-          <a:stretch>
-            <a:fillRect/>
-          </a:stretch>
-        </p:blipFill>
-        <p:spPr>
-          <a:xfrm>
-            <a:off x="6096000" y="3864803"/>
-            <a:ext cx="5372850" cy="2667372"/>
-          </a:xfrm>
-          <a:prstGeom prst="rect">
-            <a:avLst/>
-          </a:prstGeom>
-          <a:ln>
-            <a:noFill/>
-          </a:ln>
-          <a:effectLst>
-            <a:softEdge rad="112500"/>
-          </a:effectLst>
-        </p:spPr>
-      </p:pic>
+        </p:grpSpPr>
+        <p:pic>
+          <p:nvPicPr>
+            <p:cNvPr id="4" name="Picture 3">
+              <a:extLst>
+                <a:ext uri="{FF2B5EF4-FFF2-40B4-BE49-F238E27FC236}">
+                  <a16:creationId xmlns:a16="http://schemas.microsoft.com/office/drawing/2014/main" id="{7F0AC793-C44A-7E13-0626-EC68CE352B83}"/>
+                </a:ext>
+              </a:extLst>
+            </p:cNvPr>
+            <p:cNvPicPr>
+              <a:picLocks noChangeAspect="1"/>
+            </p:cNvPicPr>
+            <p:nvPr/>
+          </p:nvPicPr>
+          <p:blipFill>
+            <a:blip r:embed="rId2"/>
+            <a:stretch>
+              <a:fillRect/>
+            </a:stretch>
+          </p:blipFill>
+          <p:spPr>
+            <a:xfrm>
+              <a:off x="609600" y="1234690"/>
+              <a:ext cx="5277587" cy="2629267"/>
+            </a:xfrm>
+            <a:prstGeom prst="rect">
+              <a:avLst/>
+            </a:prstGeom>
+          </p:spPr>
+        </p:pic>
+        <p:pic>
+          <p:nvPicPr>
+            <p:cNvPr id="6" name="Picture 5">
+              <a:extLst>
+                <a:ext uri="{FF2B5EF4-FFF2-40B4-BE49-F238E27FC236}">
+                  <a16:creationId xmlns:a16="http://schemas.microsoft.com/office/drawing/2014/main" id="{0F0D2BD4-36D9-2A89-A21F-CE9F7C8DAB1B}"/>
+                </a:ext>
+              </a:extLst>
+            </p:cNvPr>
+            <p:cNvPicPr>
+              <a:picLocks noChangeAspect="1"/>
+            </p:cNvPicPr>
+            <p:nvPr/>
+          </p:nvPicPr>
+          <p:blipFill>
+            <a:blip r:embed="rId3"/>
+            <a:stretch>
+              <a:fillRect/>
+            </a:stretch>
+          </p:blipFill>
+          <p:spPr>
+            <a:xfrm>
+              <a:off x="6238129" y="1234690"/>
+              <a:ext cx="5344271" cy="2648320"/>
+            </a:xfrm>
+            <a:prstGeom prst="rect">
+              <a:avLst/>
+            </a:prstGeom>
+          </p:spPr>
+        </p:pic>
+        <p:pic>
+          <p:nvPicPr>
+            <p:cNvPr id="8" name="Picture 7">
+              <a:extLst>
+                <a:ext uri="{FF2B5EF4-FFF2-40B4-BE49-F238E27FC236}">
+                  <a16:creationId xmlns:a16="http://schemas.microsoft.com/office/drawing/2014/main" id="{05A8B557-4FC9-1FDB-8CD5-080B95C8D03E}"/>
+                </a:ext>
+              </a:extLst>
+            </p:cNvPr>
+            <p:cNvPicPr>
+              <a:picLocks noChangeAspect="1"/>
+            </p:cNvPicPr>
+            <p:nvPr/>
+          </p:nvPicPr>
+          <p:blipFill>
+            <a:blip r:embed="rId4"/>
+            <a:stretch>
+              <a:fillRect/>
+            </a:stretch>
+          </p:blipFill>
+          <p:spPr>
+            <a:xfrm>
+              <a:off x="609600" y="4033049"/>
+              <a:ext cx="5277587" cy="2657846"/>
+            </a:xfrm>
+            <a:prstGeom prst="rect">
+              <a:avLst/>
+            </a:prstGeom>
+          </p:spPr>
+        </p:pic>
+        <p:pic>
+          <p:nvPicPr>
+            <p:cNvPr id="10" name="Picture 9">
+              <a:extLst>
+                <a:ext uri="{FF2B5EF4-FFF2-40B4-BE49-F238E27FC236}">
+                  <a16:creationId xmlns:a16="http://schemas.microsoft.com/office/drawing/2014/main" id="{135DCF66-D4C2-8A23-E855-7C5B6D1C9A00}"/>
+                </a:ext>
+              </a:extLst>
+            </p:cNvPr>
+            <p:cNvPicPr>
+              <a:picLocks noChangeAspect="1"/>
+            </p:cNvPicPr>
+            <p:nvPr/>
+          </p:nvPicPr>
+          <p:blipFill>
+            <a:blip r:embed="rId5"/>
+            <a:stretch>
+              <a:fillRect/>
+            </a:stretch>
+          </p:blipFill>
+          <p:spPr>
+            <a:xfrm>
+              <a:off x="6238129" y="4033049"/>
+              <a:ext cx="5344271" cy="2648320"/>
+            </a:xfrm>
+            <a:prstGeom prst="rect">
+              <a:avLst/>
+            </a:prstGeom>
+          </p:spPr>
+        </p:pic>
+      </p:grpSp>
     </p:spTree>
     <p:extLst>
       <p:ext uri="{BB962C8B-B14F-4D97-AF65-F5344CB8AC3E}">
@@ -18326,6 +18094,967 @@
 
 <file path=ppt/slides/slide18.xml><?xml version="1.0" encoding="utf-8"?>
 <p:sld xmlns:a="http://schemas.openxmlformats.org/drawingml/2006/main" xmlns:r="http://schemas.openxmlformats.org/officeDocument/2006/relationships" xmlns:p="http://schemas.openxmlformats.org/presentationml/2006/main">
+  <p:cSld>
+    <p:spTree>
+      <p:nvGrpSpPr>
+        <p:cNvPr id="1" name=""/>
+        <p:cNvGrpSpPr/>
+        <p:nvPr/>
+      </p:nvGrpSpPr>
+      <p:grpSpPr>
+        <a:xfrm>
+          <a:off x="0" y="0"/>
+          <a:ext cx="0" cy="0"/>
+          <a:chOff x="0" y="0"/>
+          <a:chExt cx="0" cy="0"/>
+        </a:xfrm>
+      </p:grpSpPr>
+      <p:sp>
+        <p:nvSpPr>
+          <p:cNvPr id="7" name="Title 6">
+            <a:extLst>
+              <a:ext uri="{FF2B5EF4-FFF2-40B4-BE49-F238E27FC236}">
+                <a16:creationId xmlns:a16="http://schemas.microsoft.com/office/drawing/2014/main" id="{0871E4C9-769D-7B7A-AAF4-AA60C90D5ABE}"/>
+              </a:ext>
+            </a:extLst>
+          </p:cNvPr>
+          <p:cNvSpPr>
+            <a:spLocks noGrp="1"/>
+          </p:cNvSpPr>
+          <p:nvPr>
+            <p:ph type="ctrTitle"/>
+          </p:nvPr>
+        </p:nvSpPr>
+        <p:spPr>
+          <a:xfrm>
+            <a:off x="609600" y="323769"/>
+            <a:ext cx="10972800" cy="457200"/>
+          </a:xfrm>
+          <a:ln>
+            <a:solidFill>
+              <a:schemeClr val="tx1"/>
+            </a:solidFill>
+          </a:ln>
+        </p:spPr>
+        <p:txBody>
+          <a:bodyPr anchor="ctr">
+            <a:noAutofit/>
+          </a:bodyPr>
+          <a:lstStyle/>
+          <a:p>
+            <a:r>
+              <a:rPr lang="en-US" sz="3000" b="1" dirty="0"/>
+              <a:t>Features ~ Phases</a:t>
+            </a:r>
+            <a:endParaRPr lang="en-GB" sz="3000" b="1" dirty="0"/>
+          </a:p>
+        </p:txBody>
+      </p:sp>
+      <p:sp>
+        <p:nvSpPr>
+          <p:cNvPr id="6" name="Text Placeholder 5">
+            <a:extLst>
+              <a:ext uri="{FF2B5EF4-FFF2-40B4-BE49-F238E27FC236}">
+                <a16:creationId xmlns:a16="http://schemas.microsoft.com/office/drawing/2014/main" id="{281D5DE3-2913-0700-B818-661824D303F3}"/>
+              </a:ext>
+            </a:extLst>
+          </p:cNvPr>
+          <p:cNvSpPr>
+            <a:spLocks noGrp="1"/>
+          </p:cNvSpPr>
+          <p:nvPr>
+            <p:ph type="subTitle" idx="1"/>
+          </p:nvPr>
+        </p:nvSpPr>
+        <p:spPr>
+          <a:xfrm>
+            <a:off x="599954" y="1620456"/>
+            <a:ext cx="5372583" cy="4780343"/>
+          </a:xfrm>
+          <a:noFill/>
+          <a:ln>
+            <a:solidFill>
+              <a:schemeClr val="tx1"/>
+            </a:solidFill>
+          </a:ln>
+        </p:spPr>
+        <p:txBody>
+          <a:bodyPr anchor="ctr">
+            <a:noAutofit/>
+          </a:bodyPr>
+          <a:lstStyle/>
+          <a:p>
+            <a:pPr algn="l"/>
+            <a:r>
+              <a:rPr lang="en-US" sz="2000" b="1" dirty="0"/>
+              <a:t>Phase 1:  </a:t>
+            </a:r>
+            <a:br>
+              <a:rPr lang="en-US" sz="2000" b="1" dirty="0"/>
+            </a:br>
+            <a:r>
+              <a:rPr lang="en-GB" sz="2000" b="1" dirty="0"/>
+              <a:t>Dose-Escalation | Human Pharmacology</a:t>
+            </a:r>
+            <a:endParaRPr lang="en-US" sz="2000" b="1" dirty="0"/>
+          </a:p>
+          <a:p>
+            <a:pPr marL="342900" indent="-342900" algn="l">
+              <a:buFont typeface="Arial" panose="020B0604020202020204" pitchFamily="34" charset="0"/>
+              <a:buChar char="•"/>
+            </a:pPr>
+            <a:r>
+              <a:rPr lang="en-US" sz="2000" dirty="0"/>
+              <a:t>Escalating dose ~ Adverse Events (e.g, MTD)</a:t>
+            </a:r>
+          </a:p>
+          <a:p>
+            <a:pPr marL="800100" lvl="1" indent="-342900" algn="l">
+              <a:buFont typeface="Arial" panose="020B0604020202020204" pitchFamily="34" charset="0"/>
+              <a:buChar char="•"/>
+            </a:pPr>
+            <a:endParaRPr lang="en-GB" dirty="0"/>
+          </a:p>
+          <a:p>
+            <a:pPr algn="l"/>
+            <a:r>
+              <a:rPr lang="en-GB" sz="2000" b="1" dirty="0"/>
+              <a:t>Phase 2:  </a:t>
+            </a:r>
+            <a:br>
+              <a:rPr lang="en-GB" sz="2000" b="1" dirty="0"/>
+            </a:br>
+            <a:r>
+              <a:rPr lang="en-GB" sz="2000" b="1" dirty="0"/>
+              <a:t>Therapeutic Exploratory</a:t>
+            </a:r>
+            <a:endParaRPr lang="en-US" sz="2000" b="1" dirty="0"/>
+          </a:p>
+          <a:p>
+            <a:pPr marL="342900" indent="-342900" algn="l">
+              <a:buFont typeface="Arial" panose="020B0604020202020204" pitchFamily="34" charset="0"/>
+              <a:buChar char="•"/>
+            </a:pPr>
+            <a:r>
+              <a:rPr lang="en-US" sz="2000" dirty="0"/>
+              <a:t>Safety, Pharmaco-dynamics-kinetics</a:t>
+            </a:r>
+          </a:p>
+          <a:p>
+            <a:pPr marL="342900" indent="-342900" algn="l">
+              <a:buFont typeface="Arial" panose="020B0604020202020204" pitchFamily="34" charset="0"/>
+              <a:buChar char="•"/>
+            </a:pPr>
+            <a:r>
+              <a:rPr lang="en-US" sz="2000" dirty="0"/>
+              <a:t>1</a:t>
+            </a:r>
+            <a:r>
+              <a:rPr lang="en-US" sz="2000" baseline="30000" dirty="0"/>
+              <a:t>st</a:t>
+            </a:r>
+            <a:r>
+              <a:rPr lang="en-US" sz="2000" dirty="0"/>
+              <a:t> scaled phase</a:t>
+            </a:r>
+          </a:p>
+          <a:p>
+            <a:pPr marL="342900" indent="-342900" algn="l">
+              <a:buFont typeface="Arial" panose="020B0604020202020204" pitchFamily="34" charset="0"/>
+              <a:buChar char="•"/>
+            </a:pPr>
+            <a:r>
+              <a:rPr lang="en-US" sz="2000" dirty="0"/>
+              <a:t>Early</a:t>
+            </a:r>
+            <a:r>
+              <a:rPr lang="el-GR" sz="2000" dirty="0"/>
+              <a:t> </a:t>
+            </a:r>
+            <a:r>
+              <a:rPr lang="en-US" sz="2000" dirty="0"/>
+              <a:t>efficacy data</a:t>
+            </a:r>
+            <a:r>
+              <a:rPr lang="el-GR" sz="2000" dirty="0"/>
+              <a:t> </a:t>
+            </a:r>
+            <a:r>
+              <a:rPr lang="en-GB" sz="2000" dirty="0"/>
+              <a:t>(transitional to phase 3)</a:t>
+            </a:r>
+          </a:p>
+        </p:txBody>
+      </p:sp>
+      <p:sp>
+        <p:nvSpPr>
+          <p:cNvPr id="2" name="Text Placeholder 5">
+            <a:extLst>
+              <a:ext uri="{FF2B5EF4-FFF2-40B4-BE49-F238E27FC236}">
+                <a16:creationId xmlns:a16="http://schemas.microsoft.com/office/drawing/2014/main" id="{86DB2BA2-C66A-5EC1-F184-C2C46DC0A30F}"/>
+              </a:ext>
+            </a:extLst>
+          </p:cNvPr>
+          <p:cNvSpPr txBox="1">
+            <a:spLocks/>
+          </p:cNvSpPr>
+          <p:nvPr/>
+        </p:nvSpPr>
+        <p:spPr>
+          <a:xfrm>
+            <a:off x="6219465" y="1620456"/>
+            <a:ext cx="5362935" cy="4780343"/>
+          </a:xfrm>
+          <a:prstGeom prst="rect">
+            <a:avLst/>
+          </a:prstGeom>
+          <a:ln>
+            <a:solidFill>
+              <a:schemeClr val="tx1"/>
+            </a:solidFill>
+          </a:ln>
+        </p:spPr>
+        <p:txBody>
+          <a:bodyPr vert="horz" lIns="91440" tIns="45720" rIns="91440" bIns="45720" rtlCol="0" anchor="ctr">
+            <a:noAutofit/>
+          </a:bodyPr>
+          <a:lstStyle>
+            <a:lvl1pPr marL="0" indent="0" algn="ctr" defTabSz="914400" rtl="0" eaLnBrk="1" latinLnBrk="0" hangingPunct="1">
+              <a:lnSpc>
+                <a:spcPct val="90000"/>
+              </a:lnSpc>
+              <a:spcBef>
+                <a:spcPts val="1000"/>
+              </a:spcBef>
+              <a:buFont typeface="Arial" panose="020B0604020202020204" pitchFamily="34" charset="0"/>
+              <a:buNone/>
+              <a:defRPr sz="2400" kern="1200">
+                <a:solidFill>
+                  <a:schemeClr val="tx1"/>
+                </a:solidFill>
+                <a:latin typeface="+mn-lt"/>
+                <a:ea typeface="+mn-ea"/>
+                <a:cs typeface="+mn-cs"/>
+              </a:defRPr>
+            </a:lvl1pPr>
+            <a:lvl2pPr marL="457200" indent="0" algn="ctr" defTabSz="914400" rtl="0" eaLnBrk="1" latinLnBrk="0" hangingPunct="1">
+              <a:lnSpc>
+                <a:spcPct val="90000"/>
+              </a:lnSpc>
+              <a:spcBef>
+                <a:spcPts val="500"/>
+              </a:spcBef>
+              <a:buFont typeface="Arial" panose="020B0604020202020204" pitchFamily="34" charset="0"/>
+              <a:buNone/>
+              <a:defRPr sz="2000" kern="1200">
+                <a:solidFill>
+                  <a:schemeClr val="tx1"/>
+                </a:solidFill>
+                <a:latin typeface="+mn-lt"/>
+                <a:ea typeface="+mn-ea"/>
+                <a:cs typeface="+mn-cs"/>
+              </a:defRPr>
+            </a:lvl2pPr>
+            <a:lvl3pPr marL="914400" indent="0" algn="ctr" defTabSz="914400" rtl="0" eaLnBrk="1" latinLnBrk="0" hangingPunct="1">
+              <a:lnSpc>
+                <a:spcPct val="90000"/>
+              </a:lnSpc>
+              <a:spcBef>
+                <a:spcPts val="500"/>
+              </a:spcBef>
+              <a:buFont typeface="Arial" panose="020B0604020202020204" pitchFamily="34" charset="0"/>
+              <a:buNone/>
+              <a:defRPr sz="1800" kern="1200">
+                <a:solidFill>
+                  <a:schemeClr val="tx1"/>
+                </a:solidFill>
+                <a:latin typeface="+mn-lt"/>
+                <a:ea typeface="+mn-ea"/>
+                <a:cs typeface="+mn-cs"/>
+              </a:defRPr>
+            </a:lvl3pPr>
+            <a:lvl4pPr marL="1371600" indent="0" algn="ctr" defTabSz="914400" rtl="0" eaLnBrk="1" latinLnBrk="0" hangingPunct="1">
+              <a:lnSpc>
+                <a:spcPct val="90000"/>
+              </a:lnSpc>
+              <a:spcBef>
+                <a:spcPts val="500"/>
+              </a:spcBef>
+              <a:buFont typeface="Arial" panose="020B0604020202020204" pitchFamily="34" charset="0"/>
+              <a:buNone/>
+              <a:defRPr sz="1600" kern="1200">
+                <a:solidFill>
+                  <a:schemeClr val="tx1"/>
+                </a:solidFill>
+                <a:latin typeface="+mn-lt"/>
+                <a:ea typeface="+mn-ea"/>
+                <a:cs typeface="+mn-cs"/>
+              </a:defRPr>
+            </a:lvl4pPr>
+            <a:lvl5pPr marL="1828800" indent="0" algn="ctr" defTabSz="914400" rtl="0" eaLnBrk="1" latinLnBrk="0" hangingPunct="1">
+              <a:lnSpc>
+                <a:spcPct val="90000"/>
+              </a:lnSpc>
+              <a:spcBef>
+                <a:spcPts val="500"/>
+              </a:spcBef>
+              <a:buFont typeface="Arial" panose="020B0604020202020204" pitchFamily="34" charset="0"/>
+              <a:buNone/>
+              <a:defRPr sz="1600" kern="1200">
+                <a:solidFill>
+                  <a:schemeClr val="tx1"/>
+                </a:solidFill>
+                <a:latin typeface="+mn-lt"/>
+                <a:ea typeface="+mn-ea"/>
+                <a:cs typeface="+mn-cs"/>
+              </a:defRPr>
+            </a:lvl5pPr>
+            <a:lvl6pPr marL="2286000" indent="0" algn="ctr" defTabSz="914400" rtl="0" eaLnBrk="1" latinLnBrk="0" hangingPunct="1">
+              <a:lnSpc>
+                <a:spcPct val="90000"/>
+              </a:lnSpc>
+              <a:spcBef>
+                <a:spcPts val="500"/>
+              </a:spcBef>
+              <a:buFont typeface="Arial" panose="020B0604020202020204" pitchFamily="34" charset="0"/>
+              <a:buNone/>
+              <a:defRPr sz="1600" kern="1200">
+                <a:solidFill>
+                  <a:schemeClr val="tx1"/>
+                </a:solidFill>
+                <a:latin typeface="+mn-lt"/>
+                <a:ea typeface="+mn-ea"/>
+                <a:cs typeface="+mn-cs"/>
+              </a:defRPr>
+            </a:lvl6pPr>
+            <a:lvl7pPr marL="2743200" indent="0" algn="ctr" defTabSz="914400" rtl="0" eaLnBrk="1" latinLnBrk="0" hangingPunct="1">
+              <a:lnSpc>
+                <a:spcPct val="90000"/>
+              </a:lnSpc>
+              <a:spcBef>
+                <a:spcPts val="500"/>
+              </a:spcBef>
+              <a:buFont typeface="Arial" panose="020B0604020202020204" pitchFamily="34" charset="0"/>
+              <a:buNone/>
+              <a:defRPr sz="1600" kern="1200">
+                <a:solidFill>
+                  <a:schemeClr val="tx1"/>
+                </a:solidFill>
+                <a:latin typeface="+mn-lt"/>
+                <a:ea typeface="+mn-ea"/>
+                <a:cs typeface="+mn-cs"/>
+              </a:defRPr>
+            </a:lvl7pPr>
+            <a:lvl8pPr marL="3200400" indent="0" algn="ctr" defTabSz="914400" rtl="0" eaLnBrk="1" latinLnBrk="0" hangingPunct="1">
+              <a:lnSpc>
+                <a:spcPct val="90000"/>
+              </a:lnSpc>
+              <a:spcBef>
+                <a:spcPts val="500"/>
+              </a:spcBef>
+              <a:buFont typeface="Arial" panose="020B0604020202020204" pitchFamily="34" charset="0"/>
+              <a:buNone/>
+              <a:defRPr sz="1600" kern="1200">
+                <a:solidFill>
+                  <a:schemeClr val="tx1"/>
+                </a:solidFill>
+                <a:latin typeface="+mn-lt"/>
+                <a:ea typeface="+mn-ea"/>
+                <a:cs typeface="+mn-cs"/>
+              </a:defRPr>
+            </a:lvl8pPr>
+            <a:lvl9pPr marL="3657600" indent="0" algn="ctr" defTabSz="914400" rtl="0" eaLnBrk="1" latinLnBrk="0" hangingPunct="1">
+              <a:lnSpc>
+                <a:spcPct val="90000"/>
+              </a:lnSpc>
+              <a:spcBef>
+                <a:spcPts val="500"/>
+              </a:spcBef>
+              <a:buFont typeface="Arial" panose="020B0604020202020204" pitchFamily="34" charset="0"/>
+              <a:buNone/>
+              <a:defRPr sz="1600" kern="1200">
+                <a:solidFill>
+                  <a:schemeClr val="tx1"/>
+                </a:solidFill>
+                <a:latin typeface="+mn-lt"/>
+                <a:ea typeface="+mn-ea"/>
+                <a:cs typeface="+mn-cs"/>
+              </a:defRPr>
+            </a:lvl9pPr>
+          </a:lstStyle>
+          <a:p>
+            <a:pPr marL="0" marR="0" lvl="0" indent="0" algn="l" defTabSz="914400" rtl="0" eaLnBrk="1" fontAlgn="auto" latinLnBrk="0" hangingPunct="1">
+              <a:lnSpc>
+                <a:spcPct val="90000"/>
+              </a:lnSpc>
+              <a:spcBef>
+                <a:spcPts val="1000"/>
+              </a:spcBef>
+              <a:spcAft>
+                <a:spcPts val="0"/>
+              </a:spcAft>
+              <a:buClrTx/>
+              <a:buSzTx/>
+              <a:buFont typeface="Arial" panose="020B0604020202020204" pitchFamily="34" charset="0"/>
+              <a:buNone/>
+              <a:tabLst/>
+              <a:defRPr/>
+            </a:pPr>
+            <a:r>
+              <a:rPr kumimoji="0" lang="en-GB" sz="2000" b="1" i="0" u="none" strike="noStrike" kern="1200" cap="none" spc="0" normalizeH="0" baseline="0" noProof="0" dirty="0">
+                <a:ln>
+                  <a:noFill/>
+                </a:ln>
+                <a:solidFill>
+                  <a:prstClr val="black"/>
+                </a:solidFill>
+                <a:effectLst/>
+                <a:uLnTx/>
+                <a:uFillTx/>
+                <a:latin typeface="Aptos" panose="02110004020202020204"/>
+                <a:ea typeface="+mn-ea"/>
+                <a:cs typeface="+mn-cs"/>
+              </a:rPr>
+              <a:t>Phase 3:</a:t>
+            </a:r>
+            <a:r>
+              <a:rPr kumimoji="0" lang="el-GR" sz="2000" b="1" i="0" u="none" strike="noStrike" kern="1200" cap="none" spc="0" normalizeH="0" baseline="0" noProof="0" dirty="0">
+                <a:ln>
+                  <a:noFill/>
+                </a:ln>
+                <a:solidFill>
+                  <a:prstClr val="black"/>
+                </a:solidFill>
+                <a:effectLst/>
+                <a:uLnTx/>
+                <a:uFillTx/>
+                <a:latin typeface="Aptos" panose="02110004020202020204"/>
+                <a:ea typeface="+mn-ea"/>
+                <a:cs typeface="+mn-cs"/>
+              </a:rPr>
+              <a:t> </a:t>
+            </a:r>
+            <a:br>
+              <a:rPr kumimoji="0" lang="en-GB" sz="2000" b="1" i="0" u="none" strike="noStrike" kern="1200" cap="none" spc="0" normalizeH="0" baseline="0" noProof="0" dirty="0">
+                <a:ln>
+                  <a:noFill/>
+                </a:ln>
+                <a:solidFill>
+                  <a:prstClr val="black"/>
+                </a:solidFill>
+                <a:effectLst/>
+                <a:uLnTx/>
+                <a:uFillTx/>
+                <a:latin typeface="Aptos" panose="02110004020202020204"/>
+                <a:ea typeface="+mn-ea"/>
+                <a:cs typeface="+mn-cs"/>
+              </a:rPr>
+            </a:br>
+            <a:r>
+              <a:rPr kumimoji="0" lang="en-GB" sz="2000" b="1" i="0" u="none" strike="noStrike" kern="1200" cap="none" spc="0" normalizeH="0" baseline="0" noProof="0" dirty="0">
+                <a:ln>
+                  <a:noFill/>
+                </a:ln>
+                <a:solidFill>
+                  <a:prstClr val="black"/>
+                </a:solidFill>
+                <a:effectLst/>
+                <a:uLnTx/>
+                <a:uFillTx/>
+                <a:latin typeface="Aptos" panose="02110004020202020204"/>
+                <a:ea typeface="+mn-ea"/>
+                <a:cs typeface="+mn-cs"/>
+              </a:rPr>
+              <a:t>Therapeutic Confirmatory | Comparative Efficacy</a:t>
+            </a:r>
+            <a:endParaRPr kumimoji="0" lang="en-US" sz="2000" b="1" i="0" u="none" strike="noStrike" kern="1200" cap="none" spc="0" normalizeH="0" baseline="0" noProof="0" dirty="0">
+              <a:ln>
+                <a:noFill/>
+              </a:ln>
+              <a:solidFill>
+                <a:prstClr val="black"/>
+              </a:solidFill>
+              <a:effectLst/>
+              <a:uLnTx/>
+              <a:uFillTx/>
+              <a:latin typeface="Aptos" panose="02110004020202020204"/>
+              <a:ea typeface="+mn-ea"/>
+              <a:cs typeface="+mn-cs"/>
+            </a:endParaRPr>
+          </a:p>
+          <a:p>
+            <a:pPr marL="342900" marR="0" lvl="0" indent="-342900" algn="l" defTabSz="914400" rtl="0" eaLnBrk="1" fontAlgn="auto" latinLnBrk="0" hangingPunct="1">
+              <a:lnSpc>
+                <a:spcPct val="90000"/>
+              </a:lnSpc>
+              <a:spcBef>
+                <a:spcPts val="1000"/>
+              </a:spcBef>
+              <a:spcAft>
+                <a:spcPts val="0"/>
+              </a:spcAft>
+              <a:buClrTx/>
+              <a:buSzTx/>
+              <a:buFont typeface="Arial" panose="020B0604020202020204" pitchFamily="34" charset="0"/>
+              <a:buChar char="•"/>
+              <a:tabLst/>
+              <a:defRPr/>
+            </a:pPr>
+            <a:r>
+              <a:rPr kumimoji="0" lang="en-US" sz="2000" b="0" i="0" u="none" strike="noStrike" kern="1200" cap="none" spc="0" normalizeH="0" baseline="0" noProof="0" dirty="0">
+                <a:ln>
+                  <a:noFill/>
+                </a:ln>
+                <a:solidFill>
+                  <a:prstClr val="black"/>
+                </a:solidFill>
+                <a:effectLst/>
+                <a:uLnTx/>
+                <a:uFillTx/>
+                <a:latin typeface="Aptos" panose="02110004020202020204"/>
+                <a:ea typeface="+mn-ea"/>
+                <a:cs typeface="+mn-cs"/>
+              </a:rPr>
+              <a:t>Treatments vs placebo/standard/active</a:t>
+            </a:r>
+          </a:p>
+          <a:p>
+            <a:pPr marL="342900" marR="0" lvl="0" indent="-342900" algn="l" defTabSz="914400" rtl="0" eaLnBrk="1" fontAlgn="auto" latinLnBrk="0" hangingPunct="1">
+              <a:lnSpc>
+                <a:spcPct val="90000"/>
+              </a:lnSpc>
+              <a:spcBef>
+                <a:spcPts val="1000"/>
+              </a:spcBef>
+              <a:spcAft>
+                <a:spcPts val="0"/>
+              </a:spcAft>
+              <a:buClrTx/>
+              <a:buSzTx/>
+              <a:buFont typeface="Arial" panose="020B0604020202020204" pitchFamily="34" charset="0"/>
+              <a:buChar char="•"/>
+              <a:tabLst/>
+              <a:defRPr/>
+            </a:pPr>
+            <a:r>
+              <a:rPr kumimoji="0" lang="en-US" sz="2000" b="0" i="0" u="none" strike="noStrike" kern="1200" cap="none" spc="0" normalizeH="0" baseline="0" noProof="0" dirty="0">
+                <a:ln>
+                  <a:noFill/>
+                </a:ln>
+                <a:solidFill>
+                  <a:prstClr val="black"/>
+                </a:solidFill>
+                <a:effectLst/>
+                <a:uLnTx/>
+                <a:uFillTx/>
+                <a:latin typeface="Aptos" panose="02110004020202020204"/>
+                <a:ea typeface="+mn-ea"/>
+                <a:cs typeface="+mn-cs"/>
+              </a:rPr>
+              <a:t>Frequent Adverse Events</a:t>
+            </a:r>
+            <a:endParaRPr kumimoji="0" lang="en-GB" sz="2000" b="0" i="0" u="none" strike="noStrike" kern="1200" cap="none" spc="0" normalizeH="0" baseline="0" noProof="0" dirty="0">
+              <a:ln>
+                <a:noFill/>
+              </a:ln>
+              <a:solidFill>
+                <a:prstClr val="black"/>
+              </a:solidFill>
+              <a:effectLst/>
+              <a:uLnTx/>
+              <a:uFillTx/>
+              <a:latin typeface="Aptos" panose="02110004020202020204"/>
+              <a:ea typeface="+mn-ea"/>
+              <a:cs typeface="+mn-cs"/>
+            </a:endParaRPr>
+          </a:p>
+          <a:p>
+            <a:pPr marL="342900" marR="0" lvl="0" indent="-342900" algn="l" defTabSz="914400" rtl="0" eaLnBrk="1" fontAlgn="auto" latinLnBrk="0" hangingPunct="1">
+              <a:lnSpc>
+                <a:spcPct val="90000"/>
+              </a:lnSpc>
+              <a:spcBef>
+                <a:spcPts val="1000"/>
+              </a:spcBef>
+              <a:spcAft>
+                <a:spcPts val="0"/>
+              </a:spcAft>
+              <a:buClrTx/>
+              <a:buSzTx/>
+              <a:buFont typeface="Arial" panose="020B0604020202020204" pitchFamily="34" charset="0"/>
+              <a:buChar char="•"/>
+              <a:tabLst/>
+              <a:defRPr/>
+            </a:pPr>
+            <a:r>
+              <a:rPr kumimoji="0" lang="en-US" sz="2000" b="0" i="0" u="none" strike="noStrike" kern="1200" cap="none" spc="0" normalizeH="0" baseline="0" noProof="0" dirty="0">
+                <a:ln>
+                  <a:noFill/>
+                </a:ln>
+                <a:solidFill>
+                  <a:prstClr val="black"/>
+                </a:solidFill>
+                <a:effectLst/>
+                <a:uLnTx/>
+                <a:uFillTx/>
+                <a:latin typeface="Aptos" panose="02110004020202020204"/>
+                <a:ea typeface="+mn-ea"/>
+                <a:cs typeface="+mn-cs"/>
+              </a:rPr>
+              <a:t>Scaled - </a:t>
+            </a:r>
+            <a:r>
+              <a:rPr kumimoji="0" lang="en-GB" sz="2000" b="0" i="0" u="none" strike="noStrike" kern="1200" cap="none" spc="0" normalizeH="0" baseline="0" noProof="0" dirty="0">
+                <a:ln>
+                  <a:noFill/>
+                </a:ln>
+                <a:solidFill>
+                  <a:prstClr val="black"/>
+                </a:solidFill>
+                <a:effectLst/>
+                <a:uLnTx/>
+                <a:uFillTx/>
+                <a:latin typeface="Aptos" panose="02110004020202020204"/>
+                <a:ea typeface="+mn-ea"/>
+                <a:cs typeface="+mn-cs"/>
+              </a:rPr>
+              <a:t>Study Design important</a:t>
+            </a:r>
+            <a:endParaRPr kumimoji="0" lang="en-US" sz="2000" b="0" i="0" u="none" strike="noStrike" kern="1200" cap="none" spc="0" normalizeH="0" baseline="0" noProof="0" dirty="0">
+              <a:ln>
+                <a:noFill/>
+              </a:ln>
+              <a:solidFill>
+                <a:prstClr val="black"/>
+              </a:solidFill>
+              <a:effectLst/>
+              <a:uLnTx/>
+              <a:uFillTx/>
+              <a:latin typeface="Aptos" panose="02110004020202020204"/>
+              <a:ea typeface="+mn-ea"/>
+              <a:cs typeface="+mn-cs"/>
+            </a:endParaRPr>
+          </a:p>
+          <a:p>
+            <a:pPr marL="800100" marR="0" lvl="1" indent="-342900" algn="l" defTabSz="914400" rtl="0" eaLnBrk="1" fontAlgn="auto" latinLnBrk="0" hangingPunct="1">
+              <a:lnSpc>
+                <a:spcPct val="90000"/>
+              </a:lnSpc>
+              <a:spcBef>
+                <a:spcPts val="500"/>
+              </a:spcBef>
+              <a:spcAft>
+                <a:spcPts val="0"/>
+              </a:spcAft>
+              <a:buClrTx/>
+              <a:buSzTx/>
+              <a:buFont typeface="Arial" panose="020B0604020202020204" pitchFamily="34" charset="0"/>
+              <a:buChar char="•"/>
+              <a:tabLst/>
+              <a:defRPr/>
+            </a:pPr>
+            <a:endParaRPr kumimoji="0" lang="en-US" sz="2000" b="0" i="0" u="none" strike="noStrike" kern="1200" cap="none" spc="0" normalizeH="0" baseline="0" noProof="0" dirty="0">
+              <a:ln>
+                <a:noFill/>
+              </a:ln>
+              <a:solidFill>
+                <a:prstClr val="black"/>
+              </a:solidFill>
+              <a:effectLst/>
+              <a:uLnTx/>
+              <a:uFillTx/>
+              <a:latin typeface="Aptos" panose="02110004020202020204"/>
+              <a:ea typeface="+mn-ea"/>
+              <a:cs typeface="+mn-cs"/>
+            </a:endParaRPr>
+          </a:p>
+          <a:p>
+            <a:pPr marL="0" marR="0" lvl="0" indent="0" algn="l" defTabSz="914400" rtl="0" eaLnBrk="1" fontAlgn="auto" latinLnBrk="0" hangingPunct="1">
+              <a:lnSpc>
+                <a:spcPct val="90000"/>
+              </a:lnSpc>
+              <a:spcBef>
+                <a:spcPts val="1000"/>
+              </a:spcBef>
+              <a:spcAft>
+                <a:spcPts val="0"/>
+              </a:spcAft>
+              <a:buClrTx/>
+              <a:buSzTx/>
+              <a:buFont typeface="Arial" panose="020B0604020202020204" pitchFamily="34" charset="0"/>
+              <a:buNone/>
+              <a:tabLst/>
+              <a:defRPr/>
+            </a:pPr>
+            <a:r>
+              <a:rPr kumimoji="0" lang="en-US" sz="2000" b="1" i="0" u="none" strike="noStrike" kern="1200" cap="none" spc="0" normalizeH="0" baseline="0" noProof="0" dirty="0">
+                <a:ln>
+                  <a:noFill/>
+                </a:ln>
+                <a:solidFill>
+                  <a:prstClr val="black"/>
+                </a:solidFill>
+                <a:effectLst/>
+                <a:uLnTx/>
+                <a:uFillTx/>
+                <a:latin typeface="Aptos" panose="02110004020202020204"/>
+                <a:ea typeface="+mn-ea"/>
+                <a:cs typeface="+mn-cs"/>
+              </a:rPr>
+              <a:t>Phase 4: </a:t>
+            </a:r>
+            <a:br>
+              <a:rPr kumimoji="0" lang="en-US" sz="2000" b="1" i="0" u="none" strike="noStrike" kern="1200" cap="none" spc="0" normalizeH="0" baseline="0" noProof="0" dirty="0">
+                <a:ln>
+                  <a:noFill/>
+                </a:ln>
+                <a:solidFill>
+                  <a:prstClr val="black"/>
+                </a:solidFill>
+                <a:effectLst/>
+                <a:uLnTx/>
+                <a:uFillTx/>
+                <a:latin typeface="Aptos" panose="02110004020202020204"/>
+                <a:ea typeface="+mn-ea"/>
+                <a:cs typeface="+mn-cs"/>
+              </a:rPr>
+            </a:br>
+            <a:r>
+              <a:rPr kumimoji="0" lang="en-US" sz="2000" b="1" i="0" u="none" strike="noStrike" kern="1200" cap="none" spc="0" normalizeH="0" baseline="0" noProof="0" dirty="0">
+                <a:ln>
+                  <a:noFill/>
+                </a:ln>
+                <a:solidFill>
+                  <a:prstClr val="black"/>
+                </a:solidFill>
+                <a:effectLst/>
+                <a:uLnTx/>
+                <a:uFillTx/>
+                <a:latin typeface="Aptos" panose="02110004020202020204"/>
+                <a:ea typeface="+mn-ea"/>
+                <a:cs typeface="+mn-cs"/>
+              </a:rPr>
+              <a:t>Therapeutic Use | Post-Marketing</a:t>
+            </a:r>
+          </a:p>
+          <a:p>
+            <a:pPr marL="342900" marR="0" lvl="0" indent="-342900" algn="l" defTabSz="914400" rtl="0" eaLnBrk="1" fontAlgn="auto" latinLnBrk="0" hangingPunct="1">
+              <a:lnSpc>
+                <a:spcPct val="90000"/>
+              </a:lnSpc>
+              <a:spcBef>
+                <a:spcPts val="1000"/>
+              </a:spcBef>
+              <a:spcAft>
+                <a:spcPts val="0"/>
+              </a:spcAft>
+              <a:buClrTx/>
+              <a:buSzTx/>
+              <a:buFont typeface="Arial" panose="020B0604020202020204" pitchFamily="34" charset="0"/>
+              <a:buChar char="•"/>
+              <a:tabLst/>
+              <a:defRPr/>
+            </a:pPr>
+            <a:r>
+              <a:rPr kumimoji="0" lang="en-US" sz="2000" b="0" i="0" u="none" strike="noStrike" kern="1200" cap="none" spc="0" normalizeH="0" baseline="0" noProof="0" dirty="0">
+                <a:ln>
+                  <a:noFill/>
+                </a:ln>
+                <a:solidFill>
+                  <a:prstClr val="black"/>
+                </a:solidFill>
+                <a:effectLst/>
+                <a:uLnTx/>
+                <a:uFillTx/>
+                <a:latin typeface="Aptos" panose="02110004020202020204"/>
+                <a:ea typeface="+mn-ea"/>
+                <a:cs typeface="+mn-cs"/>
+              </a:rPr>
+              <a:t>Rare Adverse Events</a:t>
+            </a:r>
+          </a:p>
+          <a:p>
+            <a:pPr marL="342900" marR="0" lvl="0" indent="-342900" algn="l" defTabSz="914400" rtl="0" eaLnBrk="1" fontAlgn="auto" latinLnBrk="0" hangingPunct="1">
+              <a:lnSpc>
+                <a:spcPct val="90000"/>
+              </a:lnSpc>
+              <a:spcBef>
+                <a:spcPts val="1000"/>
+              </a:spcBef>
+              <a:spcAft>
+                <a:spcPts val="0"/>
+              </a:spcAft>
+              <a:buClrTx/>
+              <a:buSzTx/>
+              <a:buFont typeface="Arial" panose="020B0604020202020204" pitchFamily="34" charset="0"/>
+              <a:buChar char="•"/>
+              <a:tabLst/>
+              <a:defRPr/>
+            </a:pPr>
+            <a:r>
+              <a:rPr kumimoji="0" lang="en-US" sz="2000" b="0" i="0" u="none" strike="noStrike" kern="1200" cap="none" spc="0" normalizeH="0" baseline="0" noProof="0" dirty="0">
+                <a:ln>
+                  <a:noFill/>
+                </a:ln>
+                <a:solidFill>
+                  <a:prstClr val="black"/>
+                </a:solidFill>
+                <a:effectLst/>
+                <a:uLnTx/>
+                <a:uFillTx/>
+                <a:latin typeface="Aptos" panose="02110004020202020204"/>
+                <a:ea typeface="+mn-ea"/>
+                <a:cs typeface="+mn-cs"/>
+              </a:rPr>
+              <a:t>Differences in dose-efficiency in population</a:t>
+            </a:r>
+          </a:p>
+          <a:p>
+            <a:pPr marL="342900" marR="0" lvl="0" indent="-342900" algn="l" defTabSz="914400" rtl="0" eaLnBrk="1" fontAlgn="auto" latinLnBrk="0" hangingPunct="1">
+              <a:lnSpc>
+                <a:spcPct val="90000"/>
+              </a:lnSpc>
+              <a:spcBef>
+                <a:spcPts val="1000"/>
+              </a:spcBef>
+              <a:spcAft>
+                <a:spcPts val="0"/>
+              </a:spcAft>
+              <a:buClrTx/>
+              <a:buSzTx/>
+              <a:buFont typeface="Arial" panose="020B0604020202020204" pitchFamily="34" charset="0"/>
+              <a:buChar char="•"/>
+              <a:tabLst/>
+              <a:defRPr/>
+            </a:pPr>
+            <a:r>
+              <a:rPr kumimoji="0" lang="en-US" sz="2000" b="0" i="0" u="none" strike="noStrike" kern="1200" cap="none" spc="0" normalizeH="0" baseline="0" noProof="0" dirty="0">
+                <a:ln>
+                  <a:noFill/>
+                </a:ln>
+                <a:solidFill>
+                  <a:prstClr val="black"/>
+                </a:solidFill>
+                <a:effectLst/>
+                <a:uLnTx/>
+                <a:uFillTx/>
+                <a:latin typeface="Aptos" panose="02110004020202020204"/>
+                <a:ea typeface="+mn-ea"/>
+                <a:cs typeface="+mn-cs"/>
+              </a:rPr>
+              <a:t>After drug approval - Cost Estimation</a:t>
+            </a:r>
+            <a:endParaRPr kumimoji="0" lang="en-GB" sz="2000" b="0" i="0" u="none" strike="noStrike" kern="1200" cap="none" spc="0" normalizeH="0" baseline="0" noProof="0" dirty="0">
+              <a:ln>
+                <a:noFill/>
+              </a:ln>
+              <a:solidFill>
+                <a:prstClr val="black"/>
+              </a:solidFill>
+              <a:effectLst/>
+              <a:uLnTx/>
+              <a:uFillTx/>
+              <a:latin typeface="Aptos" panose="02110004020202020204"/>
+              <a:ea typeface="+mn-ea"/>
+              <a:cs typeface="+mn-cs"/>
+            </a:endParaRPr>
+          </a:p>
+        </p:txBody>
+      </p:sp>
+      <p:sp>
+        <p:nvSpPr>
+          <p:cNvPr id="3" name="TextBox 2">
+            <a:extLst>
+              <a:ext uri="{FF2B5EF4-FFF2-40B4-BE49-F238E27FC236}">
+                <a16:creationId xmlns:a16="http://schemas.microsoft.com/office/drawing/2014/main" id="{754C2201-BFB4-BE44-95E3-C5031C5EFFD6}"/>
+              </a:ext>
+            </a:extLst>
+          </p:cNvPr>
+          <p:cNvSpPr txBox="1"/>
+          <p:nvPr/>
+        </p:nvSpPr>
+        <p:spPr>
+          <a:xfrm>
+            <a:off x="599954" y="937549"/>
+            <a:ext cx="10982446" cy="400110"/>
+          </a:xfrm>
+          <a:prstGeom prst="rect">
+            <a:avLst/>
+          </a:prstGeom>
+          <a:noFill/>
+        </p:spPr>
+        <p:txBody>
+          <a:bodyPr wrap="square" rtlCol="0">
+            <a:spAutoFit/>
+          </a:bodyPr>
+          <a:lstStyle/>
+          <a:p>
+            <a:pPr marL="0" marR="0" lvl="0" indent="0" algn="ctr" defTabSz="914400" rtl="0" eaLnBrk="1" fontAlgn="auto" latinLnBrk="0" hangingPunct="1">
+              <a:lnSpc>
+                <a:spcPct val="100000"/>
+              </a:lnSpc>
+              <a:spcBef>
+                <a:spcPts val="0"/>
+              </a:spcBef>
+              <a:spcAft>
+                <a:spcPts val="0"/>
+              </a:spcAft>
+              <a:buClrTx/>
+              <a:buSzTx/>
+              <a:buFontTx/>
+              <a:buNone/>
+              <a:tabLst/>
+              <a:defRPr/>
+            </a:pPr>
+            <a:r>
+              <a:rPr kumimoji="0" lang="en-US" sz="2000" b="0" i="0" u="none" strike="noStrike" kern="1200" cap="none" spc="0" normalizeH="0" baseline="0" noProof="0" dirty="0">
+                <a:ln>
+                  <a:noFill/>
+                </a:ln>
+                <a:solidFill>
+                  <a:prstClr val="black"/>
+                </a:solidFill>
+                <a:effectLst/>
+                <a:uLnTx/>
+                <a:uFillTx/>
+                <a:latin typeface="Aptos" panose="02110004020202020204"/>
+                <a:ea typeface="+mn-ea"/>
+                <a:cs typeface="+mn-cs"/>
+              </a:rPr>
+              <a:t>Factors ~ Termination ~ Phase</a:t>
+            </a:r>
+            <a:endParaRPr kumimoji="0" lang="en-GB" sz="2000" b="0" i="0" u="none" strike="noStrike" kern="1200" cap="none" spc="0" normalizeH="0" baseline="0" noProof="0" dirty="0">
+              <a:ln>
+                <a:noFill/>
+              </a:ln>
+              <a:solidFill>
+                <a:prstClr val="black"/>
+              </a:solidFill>
+              <a:effectLst/>
+              <a:uLnTx/>
+              <a:uFillTx/>
+              <a:latin typeface="Aptos" panose="02110004020202020204"/>
+              <a:ea typeface="+mn-ea"/>
+              <a:cs typeface="+mn-cs"/>
+            </a:endParaRPr>
+          </a:p>
+        </p:txBody>
+      </p:sp>
+    </p:spTree>
+    <p:extLst>
+      <p:ext uri="{BB962C8B-B14F-4D97-AF65-F5344CB8AC3E}">
+        <p14:creationId xmlns:p14="http://schemas.microsoft.com/office/powerpoint/2010/main" val="493610102"/>
+      </p:ext>
+    </p:extLst>
+  </p:cSld>
+  <p:clrMapOvr>
+    <a:masterClrMapping/>
+  </p:clrMapOvr>
+</p:sld>
+</file>
+
+<file path=ppt/slides/slide19.xml><?xml version="1.0" encoding="utf-8"?>
+<p:sld xmlns:a="http://schemas.openxmlformats.org/drawingml/2006/main" xmlns:r="http://schemas.openxmlformats.org/officeDocument/2006/relationships" xmlns:p="http://schemas.openxmlformats.org/presentationml/2006/main" show="0">
   <p:cSld>
     <p:spTree>
       <p:nvGrpSpPr>
@@ -18755,949 +19484,6 @@
 </p:sld>
 </file>
 
-<file path=ppt/slides/slide19.xml><?xml version="1.0" encoding="utf-8"?>
-<p:sld xmlns:a="http://schemas.openxmlformats.org/drawingml/2006/main" xmlns:r="http://schemas.openxmlformats.org/officeDocument/2006/relationships" xmlns:p="http://schemas.openxmlformats.org/presentationml/2006/main">
-  <p:cSld>
-    <p:spTree>
-      <p:nvGrpSpPr>
-        <p:cNvPr id="1" name=""/>
-        <p:cNvGrpSpPr/>
-        <p:nvPr/>
-      </p:nvGrpSpPr>
-      <p:grpSpPr>
-        <a:xfrm>
-          <a:off x="0" y="0"/>
-          <a:ext cx="0" cy="0"/>
-          <a:chOff x="0" y="0"/>
-          <a:chExt cx="0" cy="0"/>
-        </a:xfrm>
-      </p:grpSpPr>
-      <p:sp>
-        <p:nvSpPr>
-          <p:cNvPr id="7" name="Title 6">
-            <a:extLst>
-              <a:ext uri="{FF2B5EF4-FFF2-40B4-BE49-F238E27FC236}">
-                <a16:creationId xmlns:a16="http://schemas.microsoft.com/office/drawing/2014/main" id="{0871E4C9-769D-7B7A-AAF4-AA60C90D5ABE}"/>
-              </a:ext>
-            </a:extLst>
-          </p:cNvPr>
-          <p:cNvSpPr>
-            <a:spLocks noGrp="1"/>
-          </p:cNvSpPr>
-          <p:nvPr>
-            <p:ph type="ctrTitle"/>
-          </p:nvPr>
-        </p:nvSpPr>
-        <p:spPr>
-          <a:xfrm>
-            <a:off x="609600" y="323769"/>
-            <a:ext cx="10972800" cy="457200"/>
-          </a:xfrm>
-          <a:ln>
-            <a:solidFill>
-              <a:schemeClr val="tx1"/>
-            </a:solidFill>
-          </a:ln>
-        </p:spPr>
-        <p:txBody>
-          <a:bodyPr anchor="ctr">
-            <a:noAutofit/>
-          </a:bodyPr>
-          <a:lstStyle/>
-          <a:p>
-            <a:r>
-              <a:rPr lang="en-US" sz="3000" b="1" dirty="0"/>
-              <a:t>Features ~ Phases</a:t>
-            </a:r>
-            <a:endParaRPr lang="en-GB" sz="3000" b="1" dirty="0"/>
-          </a:p>
-        </p:txBody>
-      </p:sp>
-      <p:sp>
-        <p:nvSpPr>
-          <p:cNvPr id="6" name="Text Placeholder 5">
-            <a:extLst>
-              <a:ext uri="{FF2B5EF4-FFF2-40B4-BE49-F238E27FC236}">
-                <a16:creationId xmlns:a16="http://schemas.microsoft.com/office/drawing/2014/main" id="{281D5DE3-2913-0700-B818-661824D303F3}"/>
-              </a:ext>
-            </a:extLst>
-          </p:cNvPr>
-          <p:cNvSpPr>
-            <a:spLocks noGrp="1"/>
-          </p:cNvSpPr>
-          <p:nvPr>
-            <p:ph type="subTitle" idx="1"/>
-          </p:nvPr>
-        </p:nvSpPr>
-        <p:spPr>
-          <a:xfrm>
-            <a:off x="599954" y="1620456"/>
-            <a:ext cx="5372583" cy="4780343"/>
-          </a:xfrm>
-          <a:noFill/>
-          <a:ln>
-            <a:solidFill>
-              <a:schemeClr val="tx1"/>
-            </a:solidFill>
-          </a:ln>
-        </p:spPr>
-        <p:txBody>
-          <a:bodyPr anchor="ctr">
-            <a:noAutofit/>
-          </a:bodyPr>
-          <a:lstStyle/>
-          <a:p>
-            <a:pPr algn="l"/>
-            <a:r>
-              <a:rPr lang="en-US" sz="2000" b="1" dirty="0"/>
-              <a:t>Phase 1:  </a:t>
-            </a:r>
-            <a:br>
-              <a:rPr lang="en-US" sz="2000" b="1" dirty="0"/>
-            </a:br>
-            <a:r>
-              <a:rPr lang="en-GB" sz="2000" b="1" dirty="0"/>
-              <a:t>Dose-Escalation | Human Pharmacology</a:t>
-            </a:r>
-            <a:endParaRPr lang="en-US" sz="2000" b="1" dirty="0"/>
-          </a:p>
-          <a:p>
-            <a:pPr marL="342900" indent="-342900" algn="l">
-              <a:buFont typeface="Arial" panose="020B0604020202020204" pitchFamily="34" charset="0"/>
-              <a:buChar char="•"/>
-            </a:pPr>
-            <a:r>
-              <a:rPr lang="en-US" sz="2000" dirty="0"/>
-              <a:t>Escalating dose ~ Adverse Events (e.g, MTD)</a:t>
-            </a:r>
-          </a:p>
-          <a:p>
-            <a:pPr marL="800100" lvl="1" indent="-342900" algn="l">
-              <a:buFont typeface="Arial" panose="020B0604020202020204" pitchFamily="34" charset="0"/>
-              <a:buChar char="•"/>
-            </a:pPr>
-            <a:endParaRPr lang="en-GB" dirty="0"/>
-          </a:p>
-          <a:p>
-            <a:pPr algn="l"/>
-            <a:r>
-              <a:rPr lang="en-GB" sz="2000" b="1" dirty="0"/>
-              <a:t>Phase 2:  </a:t>
-            </a:r>
-            <a:br>
-              <a:rPr lang="en-GB" sz="2000" b="1" dirty="0"/>
-            </a:br>
-            <a:r>
-              <a:rPr lang="en-GB" sz="2000" b="1" dirty="0"/>
-              <a:t>Therapeutic Exploratory</a:t>
-            </a:r>
-            <a:endParaRPr lang="en-US" sz="2000" b="1" dirty="0"/>
-          </a:p>
-          <a:p>
-            <a:pPr marL="342900" indent="-342900" algn="l">
-              <a:buFont typeface="Arial" panose="020B0604020202020204" pitchFamily="34" charset="0"/>
-              <a:buChar char="•"/>
-            </a:pPr>
-            <a:r>
-              <a:rPr lang="en-US" sz="2000" dirty="0"/>
-              <a:t>Safety, Pharmaco-dynamics-kinetics</a:t>
-            </a:r>
-          </a:p>
-          <a:p>
-            <a:pPr marL="342900" indent="-342900" algn="l">
-              <a:buFont typeface="Arial" panose="020B0604020202020204" pitchFamily="34" charset="0"/>
-              <a:buChar char="•"/>
-            </a:pPr>
-            <a:r>
-              <a:rPr lang="en-US" sz="2000" dirty="0"/>
-              <a:t>Early</a:t>
-            </a:r>
-            <a:r>
-              <a:rPr lang="el-GR" sz="2000" dirty="0"/>
-              <a:t> </a:t>
-            </a:r>
-            <a:r>
-              <a:rPr lang="en-US" sz="2000" dirty="0"/>
-              <a:t>efficacy data</a:t>
-            </a:r>
-            <a:r>
-              <a:rPr lang="el-GR" sz="2000" dirty="0"/>
-              <a:t> </a:t>
-            </a:r>
-            <a:r>
-              <a:rPr lang="en-GB" sz="2000" dirty="0"/>
-              <a:t>(transitional to phase 3)</a:t>
-            </a:r>
-          </a:p>
-        </p:txBody>
-      </p:sp>
-      <p:sp>
-        <p:nvSpPr>
-          <p:cNvPr id="2" name="Text Placeholder 5">
-            <a:extLst>
-              <a:ext uri="{FF2B5EF4-FFF2-40B4-BE49-F238E27FC236}">
-                <a16:creationId xmlns:a16="http://schemas.microsoft.com/office/drawing/2014/main" id="{86DB2BA2-C66A-5EC1-F184-C2C46DC0A30F}"/>
-              </a:ext>
-            </a:extLst>
-          </p:cNvPr>
-          <p:cNvSpPr txBox="1">
-            <a:spLocks/>
-          </p:cNvSpPr>
-          <p:nvPr/>
-        </p:nvSpPr>
-        <p:spPr>
-          <a:xfrm>
-            <a:off x="6219465" y="1620456"/>
-            <a:ext cx="5362935" cy="4780343"/>
-          </a:xfrm>
-          <a:prstGeom prst="rect">
-            <a:avLst/>
-          </a:prstGeom>
-          <a:ln>
-            <a:solidFill>
-              <a:schemeClr val="tx1"/>
-            </a:solidFill>
-          </a:ln>
-        </p:spPr>
-        <p:txBody>
-          <a:bodyPr vert="horz" lIns="91440" tIns="45720" rIns="91440" bIns="45720" rtlCol="0" anchor="ctr">
-            <a:noAutofit/>
-          </a:bodyPr>
-          <a:lstStyle>
-            <a:lvl1pPr marL="0" indent="0" algn="ctr" defTabSz="914400" rtl="0" eaLnBrk="1" latinLnBrk="0" hangingPunct="1">
-              <a:lnSpc>
-                <a:spcPct val="90000"/>
-              </a:lnSpc>
-              <a:spcBef>
-                <a:spcPts val="1000"/>
-              </a:spcBef>
-              <a:buFont typeface="Arial" panose="020B0604020202020204" pitchFamily="34" charset="0"/>
-              <a:buNone/>
-              <a:defRPr sz="2400" kern="1200">
-                <a:solidFill>
-                  <a:schemeClr val="tx1"/>
-                </a:solidFill>
-                <a:latin typeface="+mn-lt"/>
-                <a:ea typeface="+mn-ea"/>
-                <a:cs typeface="+mn-cs"/>
-              </a:defRPr>
-            </a:lvl1pPr>
-            <a:lvl2pPr marL="457200" indent="0" algn="ctr" defTabSz="914400" rtl="0" eaLnBrk="1" latinLnBrk="0" hangingPunct="1">
-              <a:lnSpc>
-                <a:spcPct val="90000"/>
-              </a:lnSpc>
-              <a:spcBef>
-                <a:spcPts val="500"/>
-              </a:spcBef>
-              <a:buFont typeface="Arial" panose="020B0604020202020204" pitchFamily="34" charset="0"/>
-              <a:buNone/>
-              <a:defRPr sz="2000" kern="1200">
-                <a:solidFill>
-                  <a:schemeClr val="tx1"/>
-                </a:solidFill>
-                <a:latin typeface="+mn-lt"/>
-                <a:ea typeface="+mn-ea"/>
-                <a:cs typeface="+mn-cs"/>
-              </a:defRPr>
-            </a:lvl2pPr>
-            <a:lvl3pPr marL="914400" indent="0" algn="ctr" defTabSz="914400" rtl="0" eaLnBrk="1" latinLnBrk="0" hangingPunct="1">
-              <a:lnSpc>
-                <a:spcPct val="90000"/>
-              </a:lnSpc>
-              <a:spcBef>
-                <a:spcPts val="500"/>
-              </a:spcBef>
-              <a:buFont typeface="Arial" panose="020B0604020202020204" pitchFamily="34" charset="0"/>
-              <a:buNone/>
-              <a:defRPr sz="1800" kern="1200">
-                <a:solidFill>
-                  <a:schemeClr val="tx1"/>
-                </a:solidFill>
-                <a:latin typeface="+mn-lt"/>
-                <a:ea typeface="+mn-ea"/>
-                <a:cs typeface="+mn-cs"/>
-              </a:defRPr>
-            </a:lvl3pPr>
-            <a:lvl4pPr marL="1371600" indent="0" algn="ctr" defTabSz="914400" rtl="0" eaLnBrk="1" latinLnBrk="0" hangingPunct="1">
-              <a:lnSpc>
-                <a:spcPct val="90000"/>
-              </a:lnSpc>
-              <a:spcBef>
-                <a:spcPts val="500"/>
-              </a:spcBef>
-              <a:buFont typeface="Arial" panose="020B0604020202020204" pitchFamily="34" charset="0"/>
-              <a:buNone/>
-              <a:defRPr sz="1600" kern="1200">
-                <a:solidFill>
-                  <a:schemeClr val="tx1"/>
-                </a:solidFill>
-                <a:latin typeface="+mn-lt"/>
-                <a:ea typeface="+mn-ea"/>
-                <a:cs typeface="+mn-cs"/>
-              </a:defRPr>
-            </a:lvl4pPr>
-            <a:lvl5pPr marL="1828800" indent="0" algn="ctr" defTabSz="914400" rtl="0" eaLnBrk="1" latinLnBrk="0" hangingPunct="1">
-              <a:lnSpc>
-                <a:spcPct val="90000"/>
-              </a:lnSpc>
-              <a:spcBef>
-                <a:spcPts val="500"/>
-              </a:spcBef>
-              <a:buFont typeface="Arial" panose="020B0604020202020204" pitchFamily="34" charset="0"/>
-              <a:buNone/>
-              <a:defRPr sz="1600" kern="1200">
-                <a:solidFill>
-                  <a:schemeClr val="tx1"/>
-                </a:solidFill>
-                <a:latin typeface="+mn-lt"/>
-                <a:ea typeface="+mn-ea"/>
-                <a:cs typeface="+mn-cs"/>
-              </a:defRPr>
-            </a:lvl5pPr>
-            <a:lvl6pPr marL="2286000" indent="0" algn="ctr" defTabSz="914400" rtl="0" eaLnBrk="1" latinLnBrk="0" hangingPunct="1">
-              <a:lnSpc>
-                <a:spcPct val="90000"/>
-              </a:lnSpc>
-              <a:spcBef>
-                <a:spcPts val="500"/>
-              </a:spcBef>
-              <a:buFont typeface="Arial" panose="020B0604020202020204" pitchFamily="34" charset="0"/>
-              <a:buNone/>
-              <a:defRPr sz="1600" kern="1200">
-                <a:solidFill>
-                  <a:schemeClr val="tx1"/>
-                </a:solidFill>
-                <a:latin typeface="+mn-lt"/>
-                <a:ea typeface="+mn-ea"/>
-                <a:cs typeface="+mn-cs"/>
-              </a:defRPr>
-            </a:lvl6pPr>
-            <a:lvl7pPr marL="2743200" indent="0" algn="ctr" defTabSz="914400" rtl="0" eaLnBrk="1" latinLnBrk="0" hangingPunct="1">
-              <a:lnSpc>
-                <a:spcPct val="90000"/>
-              </a:lnSpc>
-              <a:spcBef>
-                <a:spcPts val="500"/>
-              </a:spcBef>
-              <a:buFont typeface="Arial" panose="020B0604020202020204" pitchFamily="34" charset="0"/>
-              <a:buNone/>
-              <a:defRPr sz="1600" kern="1200">
-                <a:solidFill>
-                  <a:schemeClr val="tx1"/>
-                </a:solidFill>
-                <a:latin typeface="+mn-lt"/>
-                <a:ea typeface="+mn-ea"/>
-                <a:cs typeface="+mn-cs"/>
-              </a:defRPr>
-            </a:lvl7pPr>
-            <a:lvl8pPr marL="3200400" indent="0" algn="ctr" defTabSz="914400" rtl="0" eaLnBrk="1" latinLnBrk="0" hangingPunct="1">
-              <a:lnSpc>
-                <a:spcPct val="90000"/>
-              </a:lnSpc>
-              <a:spcBef>
-                <a:spcPts val="500"/>
-              </a:spcBef>
-              <a:buFont typeface="Arial" panose="020B0604020202020204" pitchFamily="34" charset="0"/>
-              <a:buNone/>
-              <a:defRPr sz="1600" kern="1200">
-                <a:solidFill>
-                  <a:schemeClr val="tx1"/>
-                </a:solidFill>
-                <a:latin typeface="+mn-lt"/>
-                <a:ea typeface="+mn-ea"/>
-                <a:cs typeface="+mn-cs"/>
-              </a:defRPr>
-            </a:lvl8pPr>
-            <a:lvl9pPr marL="3657600" indent="0" algn="ctr" defTabSz="914400" rtl="0" eaLnBrk="1" latinLnBrk="0" hangingPunct="1">
-              <a:lnSpc>
-                <a:spcPct val="90000"/>
-              </a:lnSpc>
-              <a:spcBef>
-                <a:spcPts val="500"/>
-              </a:spcBef>
-              <a:buFont typeface="Arial" panose="020B0604020202020204" pitchFamily="34" charset="0"/>
-              <a:buNone/>
-              <a:defRPr sz="1600" kern="1200">
-                <a:solidFill>
-                  <a:schemeClr val="tx1"/>
-                </a:solidFill>
-                <a:latin typeface="+mn-lt"/>
-                <a:ea typeface="+mn-ea"/>
-                <a:cs typeface="+mn-cs"/>
-              </a:defRPr>
-            </a:lvl9pPr>
-          </a:lstStyle>
-          <a:p>
-            <a:pPr marL="0" marR="0" lvl="0" indent="0" algn="l" defTabSz="914400" rtl="0" eaLnBrk="1" fontAlgn="auto" latinLnBrk="0" hangingPunct="1">
-              <a:lnSpc>
-                <a:spcPct val="90000"/>
-              </a:lnSpc>
-              <a:spcBef>
-                <a:spcPts val="1000"/>
-              </a:spcBef>
-              <a:spcAft>
-                <a:spcPts val="0"/>
-              </a:spcAft>
-              <a:buClrTx/>
-              <a:buSzTx/>
-              <a:buFont typeface="Arial" panose="020B0604020202020204" pitchFamily="34" charset="0"/>
-              <a:buNone/>
-              <a:tabLst/>
-              <a:defRPr/>
-            </a:pPr>
-            <a:r>
-              <a:rPr kumimoji="0" lang="en-GB" sz="2000" b="1" i="0" u="none" strike="noStrike" kern="1200" cap="none" spc="0" normalizeH="0" baseline="0" noProof="0" dirty="0">
-                <a:ln>
-                  <a:noFill/>
-                </a:ln>
-                <a:solidFill>
-                  <a:prstClr val="black"/>
-                </a:solidFill>
-                <a:effectLst/>
-                <a:uLnTx/>
-                <a:uFillTx/>
-                <a:latin typeface="Aptos" panose="02110004020202020204"/>
-                <a:ea typeface="+mn-ea"/>
-                <a:cs typeface="+mn-cs"/>
-              </a:rPr>
-              <a:t>Phase 3:</a:t>
-            </a:r>
-            <a:r>
-              <a:rPr kumimoji="0" lang="el-GR" sz="2000" b="1" i="0" u="none" strike="noStrike" kern="1200" cap="none" spc="0" normalizeH="0" baseline="0" noProof="0" dirty="0">
-                <a:ln>
-                  <a:noFill/>
-                </a:ln>
-                <a:solidFill>
-                  <a:prstClr val="black"/>
-                </a:solidFill>
-                <a:effectLst/>
-                <a:uLnTx/>
-                <a:uFillTx/>
-                <a:latin typeface="Aptos" panose="02110004020202020204"/>
-                <a:ea typeface="+mn-ea"/>
-                <a:cs typeface="+mn-cs"/>
-              </a:rPr>
-              <a:t> </a:t>
-            </a:r>
-            <a:br>
-              <a:rPr kumimoji="0" lang="en-GB" sz="2000" b="1" i="0" u="none" strike="noStrike" kern="1200" cap="none" spc="0" normalizeH="0" baseline="0" noProof="0" dirty="0">
-                <a:ln>
-                  <a:noFill/>
-                </a:ln>
-                <a:solidFill>
-                  <a:prstClr val="black"/>
-                </a:solidFill>
-                <a:effectLst/>
-                <a:uLnTx/>
-                <a:uFillTx/>
-                <a:latin typeface="Aptos" panose="02110004020202020204"/>
-                <a:ea typeface="+mn-ea"/>
-                <a:cs typeface="+mn-cs"/>
-              </a:rPr>
-            </a:br>
-            <a:r>
-              <a:rPr kumimoji="0" lang="en-GB" sz="2000" b="1" i="0" u="none" strike="noStrike" kern="1200" cap="none" spc="0" normalizeH="0" baseline="0" noProof="0" dirty="0">
-                <a:ln>
-                  <a:noFill/>
-                </a:ln>
-                <a:solidFill>
-                  <a:prstClr val="black"/>
-                </a:solidFill>
-                <a:effectLst/>
-                <a:uLnTx/>
-                <a:uFillTx/>
-                <a:latin typeface="Aptos" panose="02110004020202020204"/>
-                <a:ea typeface="+mn-ea"/>
-                <a:cs typeface="+mn-cs"/>
-              </a:rPr>
-              <a:t>Therapeutic Confirmatory | Comparative Efficacy</a:t>
-            </a:r>
-            <a:endParaRPr kumimoji="0" lang="en-US" sz="2000" b="1" i="0" u="none" strike="noStrike" kern="1200" cap="none" spc="0" normalizeH="0" baseline="0" noProof="0" dirty="0">
-              <a:ln>
-                <a:noFill/>
-              </a:ln>
-              <a:solidFill>
-                <a:prstClr val="black"/>
-              </a:solidFill>
-              <a:effectLst/>
-              <a:uLnTx/>
-              <a:uFillTx/>
-              <a:latin typeface="Aptos" panose="02110004020202020204"/>
-              <a:ea typeface="+mn-ea"/>
-              <a:cs typeface="+mn-cs"/>
-            </a:endParaRPr>
-          </a:p>
-          <a:p>
-            <a:pPr marL="342900" marR="0" lvl="0" indent="-342900" algn="l" defTabSz="914400" rtl="0" eaLnBrk="1" fontAlgn="auto" latinLnBrk="0" hangingPunct="1">
-              <a:lnSpc>
-                <a:spcPct val="90000"/>
-              </a:lnSpc>
-              <a:spcBef>
-                <a:spcPts val="1000"/>
-              </a:spcBef>
-              <a:spcAft>
-                <a:spcPts val="0"/>
-              </a:spcAft>
-              <a:buClrTx/>
-              <a:buSzTx/>
-              <a:buFont typeface="Arial" panose="020B0604020202020204" pitchFamily="34" charset="0"/>
-              <a:buChar char="•"/>
-              <a:tabLst/>
-              <a:defRPr/>
-            </a:pPr>
-            <a:r>
-              <a:rPr kumimoji="0" lang="en-US" sz="2000" b="0" i="0" u="none" strike="noStrike" kern="1200" cap="none" spc="0" normalizeH="0" baseline="0" noProof="0" dirty="0">
-                <a:ln>
-                  <a:noFill/>
-                </a:ln>
-                <a:solidFill>
-                  <a:prstClr val="black"/>
-                </a:solidFill>
-                <a:effectLst/>
-                <a:uLnTx/>
-                <a:uFillTx/>
-                <a:latin typeface="Aptos" panose="02110004020202020204"/>
-                <a:ea typeface="+mn-ea"/>
-                <a:cs typeface="+mn-cs"/>
-              </a:rPr>
-              <a:t>Treatments vs placebo/standard/active</a:t>
-            </a:r>
-          </a:p>
-          <a:p>
-            <a:pPr marL="342900" marR="0" lvl="0" indent="-342900" algn="l" defTabSz="914400" rtl="0" eaLnBrk="1" fontAlgn="auto" latinLnBrk="0" hangingPunct="1">
-              <a:lnSpc>
-                <a:spcPct val="90000"/>
-              </a:lnSpc>
-              <a:spcBef>
-                <a:spcPts val="1000"/>
-              </a:spcBef>
-              <a:spcAft>
-                <a:spcPts val="0"/>
-              </a:spcAft>
-              <a:buClrTx/>
-              <a:buSzTx/>
-              <a:buFont typeface="Arial" panose="020B0604020202020204" pitchFamily="34" charset="0"/>
-              <a:buChar char="•"/>
-              <a:tabLst/>
-              <a:defRPr/>
-            </a:pPr>
-            <a:r>
-              <a:rPr kumimoji="0" lang="en-US" sz="2000" b="0" i="0" u="none" strike="noStrike" kern="1200" cap="none" spc="0" normalizeH="0" baseline="0" noProof="0" dirty="0">
-                <a:ln>
-                  <a:noFill/>
-                </a:ln>
-                <a:solidFill>
-                  <a:prstClr val="black"/>
-                </a:solidFill>
-                <a:effectLst/>
-                <a:uLnTx/>
-                <a:uFillTx/>
-                <a:latin typeface="Aptos" panose="02110004020202020204"/>
-                <a:ea typeface="+mn-ea"/>
-                <a:cs typeface="+mn-cs"/>
-              </a:rPr>
-              <a:t>Frequent Adverse Events</a:t>
-            </a:r>
-            <a:endParaRPr kumimoji="0" lang="en-GB" sz="2000" b="0" i="0" u="none" strike="noStrike" kern="1200" cap="none" spc="0" normalizeH="0" baseline="0" noProof="0" dirty="0">
-              <a:ln>
-                <a:noFill/>
-              </a:ln>
-              <a:solidFill>
-                <a:prstClr val="black"/>
-              </a:solidFill>
-              <a:effectLst/>
-              <a:uLnTx/>
-              <a:uFillTx/>
-              <a:latin typeface="Aptos" panose="02110004020202020204"/>
-              <a:ea typeface="+mn-ea"/>
-              <a:cs typeface="+mn-cs"/>
-            </a:endParaRPr>
-          </a:p>
-          <a:p>
-            <a:pPr marL="342900" marR="0" lvl="0" indent="-342900" algn="l" defTabSz="914400" rtl="0" eaLnBrk="1" fontAlgn="auto" latinLnBrk="0" hangingPunct="1">
-              <a:lnSpc>
-                <a:spcPct val="90000"/>
-              </a:lnSpc>
-              <a:spcBef>
-                <a:spcPts val="1000"/>
-              </a:spcBef>
-              <a:spcAft>
-                <a:spcPts val="0"/>
-              </a:spcAft>
-              <a:buClrTx/>
-              <a:buSzTx/>
-              <a:buFont typeface="Arial" panose="020B0604020202020204" pitchFamily="34" charset="0"/>
-              <a:buChar char="•"/>
-              <a:tabLst/>
-              <a:defRPr/>
-            </a:pPr>
-            <a:r>
-              <a:rPr kumimoji="0" lang="en-US" sz="2000" b="0" i="0" u="none" strike="noStrike" kern="1200" cap="none" spc="0" normalizeH="0" baseline="0" noProof="0" dirty="0">
-                <a:ln>
-                  <a:noFill/>
-                </a:ln>
-                <a:solidFill>
-                  <a:prstClr val="black"/>
-                </a:solidFill>
-                <a:effectLst/>
-                <a:uLnTx/>
-                <a:uFillTx/>
-                <a:latin typeface="Aptos" panose="02110004020202020204"/>
-                <a:ea typeface="+mn-ea"/>
-                <a:cs typeface="+mn-cs"/>
-              </a:rPr>
-              <a:t>Scaled - </a:t>
-            </a:r>
-            <a:r>
-              <a:rPr kumimoji="0" lang="en-GB" sz="2000" b="0" i="0" u="none" strike="noStrike" kern="1200" cap="none" spc="0" normalizeH="0" baseline="0" noProof="0" dirty="0">
-                <a:ln>
-                  <a:noFill/>
-                </a:ln>
-                <a:solidFill>
-                  <a:prstClr val="black"/>
-                </a:solidFill>
-                <a:effectLst/>
-                <a:uLnTx/>
-                <a:uFillTx/>
-                <a:latin typeface="Aptos" panose="02110004020202020204"/>
-                <a:ea typeface="+mn-ea"/>
-                <a:cs typeface="+mn-cs"/>
-              </a:rPr>
-              <a:t>Study Design important</a:t>
-            </a:r>
-            <a:endParaRPr kumimoji="0" lang="en-US" sz="2000" b="0" i="0" u="none" strike="noStrike" kern="1200" cap="none" spc="0" normalizeH="0" baseline="0" noProof="0" dirty="0">
-              <a:ln>
-                <a:noFill/>
-              </a:ln>
-              <a:solidFill>
-                <a:prstClr val="black"/>
-              </a:solidFill>
-              <a:effectLst/>
-              <a:uLnTx/>
-              <a:uFillTx/>
-              <a:latin typeface="Aptos" panose="02110004020202020204"/>
-              <a:ea typeface="+mn-ea"/>
-              <a:cs typeface="+mn-cs"/>
-            </a:endParaRPr>
-          </a:p>
-          <a:p>
-            <a:pPr marL="800100" marR="0" lvl="1" indent="-342900" algn="l" defTabSz="914400" rtl="0" eaLnBrk="1" fontAlgn="auto" latinLnBrk="0" hangingPunct="1">
-              <a:lnSpc>
-                <a:spcPct val="90000"/>
-              </a:lnSpc>
-              <a:spcBef>
-                <a:spcPts val="500"/>
-              </a:spcBef>
-              <a:spcAft>
-                <a:spcPts val="0"/>
-              </a:spcAft>
-              <a:buClrTx/>
-              <a:buSzTx/>
-              <a:buFont typeface="Arial" panose="020B0604020202020204" pitchFamily="34" charset="0"/>
-              <a:buChar char="•"/>
-              <a:tabLst/>
-              <a:defRPr/>
-            </a:pPr>
-            <a:endParaRPr kumimoji="0" lang="en-US" sz="2000" b="0" i="0" u="none" strike="noStrike" kern="1200" cap="none" spc="0" normalizeH="0" baseline="0" noProof="0" dirty="0">
-              <a:ln>
-                <a:noFill/>
-              </a:ln>
-              <a:solidFill>
-                <a:prstClr val="black"/>
-              </a:solidFill>
-              <a:effectLst/>
-              <a:uLnTx/>
-              <a:uFillTx/>
-              <a:latin typeface="Aptos" panose="02110004020202020204"/>
-              <a:ea typeface="+mn-ea"/>
-              <a:cs typeface="+mn-cs"/>
-            </a:endParaRPr>
-          </a:p>
-          <a:p>
-            <a:pPr marL="0" marR="0" lvl="0" indent="0" algn="l" defTabSz="914400" rtl="0" eaLnBrk="1" fontAlgn="auto" latinLnBrk="0" hangingPunct="1">
-              <a:lnSpc>
-                <a:spcPct val="90000"/>
-              </a:lnSpc>
-              <a:spcBef>
-                <a:spcPts val="1000"/>
-              </a:spcBef>
-              <a:spcAft>
-                <a:spcPts val="0"/>
-              </a:spcAft>
-              <a:buClrTx/>
-              <a:buSzTx/>
-              <a:buFont typeface="Arial" panose="020B0604020202020204" pitchFamily="34" charset="0"/>
-              <a:buNone/>
-              <a:tabLst/>
-              <a:defRPr/>
-            </a:pPr>
-            <a:r>
-              <a:rPr kumimoji="0" lang="en-US" sz="2000" b="1" i="0" u="none" strike="noStrike" kern="1200" cap="none" spc="0" normalizeH="0" baseline="0" noProof="0" dirty="0">
-                <a:ln>
-                  <a:noFill/>
-                </a:ln>
-                <a:solidFill>
-                  <a:prstClr val="black"/>
-                </a:solidFill>
-                <a:effectLst/>
-                <a:uLnTx/>
-                <a:uFillTx/>
-                <a:latin typeface="Aptos" panose="02110004020202020204"/>
-                <a:ea typeface="+mn-ea"/>
-                <a:cs typeface="+mn-cs"/>
-              </a:rPr>
-              <a:t>Phase 4: </a:t>
-            </a:r>
-            <a:br>
-              <a:rPr kumimoji="0" lang="en-US" sz="2000" b="1" i="0" u="none" strike="noStrike" kern="1200" cap="none" spc="0" normalizeH="0" baseline="0" noProof="0" dirty="0">
-                <a:ln>
-                  <a:noFill/>
-                </a:ln>
-                <a:solidFill>
-                  <a:prstClr val="black"/>
-                </a:solidFill>
-                <a:effectLst/>
-                <a:uLnTx/>
-                <a:uFillTx/>
-                <a:latin typeface="Aptos" panose="02110004020202020204"/>
-                <a:ea typeface="+mn-ea"/>
-                <a:cs typeface="+mn-cs"/>
-              </a:rPr>
-            </a:br>
-            <a:r>
-              <a:rPr kumimoji="0" lang="en-US" sz="2000" b="1" i="0" u="none" strike="noStrike" kern="1200" cap="none" spc="0" normalizeH="0" baseline="0" noProof="0" dirty="0">
-                <a:ln>
-                  <a:noFill/>
-                </a:ln>
-                <a:solidFill>
-                  <a:prstClr val="black"/>
-                </a:solidFill>
-                <a:effectLst/>
-                <a:uLnTx/>
-                <a:uFillTx/>
-                <a:latin typeface="Aptos" panose="02110004020202020204"/>
-                <a:ea typeface="+mn-ea"/>
-                <a:cs typeface="+mn-cs"/>
-              </a:rPr>
-              <a:t>Therapeutic Use | Post-Marketing</a:t>
-            </a:r>
-          </a:p>
-          <a:p>
-            <a:pPr marL="342900" marR="0" lvl="0" indent="-342900" algn="l" defTabSz="914400" rtl="0" eaLnBrk="1" fontAlgn="auto" latinLnBrk="0" hangingPunct="1">
-              <a:lnSpc>
-                <a:spcPct val="90000"/>
-              </a:lnSpc>
-              <a:spcBef>
-                <a:spcPts val="1000"/>
-              </a:spcBef>
-              <a:spcAft>
-                <a:spcPts val="0"/>
-              </a:spcAft>
-              <a:buClrTx/>
-              <a:buSzTx/>
-              <a:buFont typeface="Arial" panose="020B0604020202020204" pitchFamily="34" charset="0"/>
-              <a:buChar char="•"/>
-              <a:tabLst/>
-              <a:defRPr/>
-            </a:pPr>
-            <a:r>
-              <a:rPr kumimoji="0" lang="en-US" sz="2000" b="0" i="0" u="none" strike="noStrike" kern="1200" cap="none" spc="0" normalizeH="0" baseline="0" noProof="0" dirty="0">
-                <a:ln>
-                  <a:noFill/>
-                </a:ln>
-                <a:solidFill>
-                  <a:prstClr val="black"/>
-                </a:solidFill>
-                <a:effectLst/>
-                <a:uLnTx/>
-                <a:uFillTx/>
-                <a:latin typeface="Aptos" panose="02110004020202020204"/>
-                <a:ea typeface="+mn-ea"/>
-                <a:cs typeface="+mn-cs"/>
-              </a:rPr>
-              <a:t>Rare Adverse Events</a:t>
-            </a:r>
-          </a:p>
-          <a:p>
-            <a:pPr marL="342900" marR="0" lvl="0" indent="-342900" algn="l" defTabSz="914400" rtl="0" eaLnBrk="1" fontAlgn="auto" latinLnBrk="0" hangingPunct="1">
-              <a:lnSpc>
-                <a:spcPct val="90000"/>
-              </a:lnSpc>
-              <a:spcBef>
-                <a:spcPts val="1000"/>
-              </a:spcBef>
-              <a:spcAft>
-                <a:spcPts val="0"/>
-              </a:spcAft>
-              <a:buClrTx/>
-              <a:buSzTx/>
-              <a:buFont typeface="Arial" panose="020B0604020202020204" pitchFamily="34" charset="0"/>
-              <a:buChar char="•"/>
-              <a:tabLst/>
-              <a:defRPr/>
-            </a:pPr>
-            <a:r>
-              <a:rPr kumimoji="0" lang="en-US" sz="2000" b="0" i="0" u="none" strike="noStrike" kern="1200" cap="none" spc="0" normalizeH="0" baseline="0" noProof="0" dirty="0">
-                <a:ln>
-                  <a:noFill/>
-                </a:ln>
-                <a:solidFill>
-                  <a:prstClr val="black"/>
-                </a:solidFill>
-                <a:effectLst/>
-                <a:uLnTx/>
-                <a:uFillTx/>
-                <a:latin typeface="Aptos" panose="02110004020202020204"/>
-                <a:ea typeface="+mn-ea"/>
-                <a:cs typeface="+mn-cs"/>
-              </a:rPr>
-              <a:t>Differences in dose-efficiency in population</a:t>
-            </a:r>
-          </a:p>
-          <a:p>
-            <a:pPr marL="342900" marR="0" lvl="0" indent="-342900" algn="l" defTabSz="914400" rtl="0" eaLnBrk="1" fontAlgn="auto" latinLnBrk="0" hangingPunct="1">
-              <a:lnSpc>
-                <a:spcPct val="90000"/>
-              </a:lnSpc>
-              <a:spcBef>
-                <a:spcPts val="1000"/>
-              </a:spcBef>
-              <a:spcAft>
-                <a:spcPts val="0"/>
-              </a:spcAft>
-              <a:buClrTx/>
-              <a:buSzTx/>
-              <a:buFont typeface="Arial" panose="020B0604020202020204" pitchFamily="34" charset="0"/>
-              <a:buChar char="•"/>
-              <a:tabLst/>
-              <a:defRPr/>
-            </a:pPr>
-            <a:r>
-              <a:rPr kumimoji="0" lang="en-US" sz="2000" b="0" i="0" u="none" strike="noStrike" kern="1200" cap="none" spc="0" normalizeH="0" baseline="0" noProof="0" dirty="0">
-                <a:ln>
-                  <a:noFill/>
-                </a:ln>
-                <a:solidFill>
-                  <a:prstClr val="black"/>
-                </a:solidFill>
-                <a:effectLst/>
-                <a:uLnTx/>
-                <a:uFillTx/>
-                <a:latin typeface="Aptos" panose="02110004020202020204"/>
-                <a:ea typeface="+mn-ea"/>
-                <a:cs typeface="+mn-cs"/>
-              </a:rPr>
-              <a:t>After drug approval - Cost Estimation</a:t>
-            </a:r>
-            <a:endParaRPr kumimoji="0" lang="en-GB" sz="2000" b="0" i="0" u="none" strike="noStrike" kern="1200" cap="none" spc="0" normalizeH="0" baseline="0" noProof="0" dirty="0">
-              <a:ln>
-                <a:noFill/>
-              </a:ln>
-              <a:solidFill>
-                <a:prstClr val="black"/>
-              </a:solidFill>
-              <a:effectLst/>
-              <a:uLnTx/>
-              <a:uFillTx/>
-              <a:latin typeface="Aptos" panose="02110004020202020204"/>
-              <a:ea typeface="+mn-ea"/>
-              <a:cs typeface="+mn-cs"/>
-            </a:endParaRPr>
-          </a:p>
-        </p:txBody>
-      </p:sp>
-      <p:sp>
-        <p:nvSpPr>
-          <p:cNvPr id="3" name="TextBox 2">
-            <a:extLst>
-              <a:ext uri="{FF2B5EF4-FFF2-40B4-BE49-F238E27FC236}">
-                <a16:creationId xmlns:a16="http://schemas.microsoft.com/office/drawing/2014/main" id="{754C2201-BFB4-BE44-95E3-C5031C5EFFD6}"/>
-              </a:ext>
-            </a:extLst>
-          </p:cNvPr>
-          <p:cNvSpPr txBox="1"/>
-          <p:nvPr/>
-        </p:nvSpPr>
-        <p:spPr>
-          <a:xfrm>
-            <a:off x="599954" y="937549"/>
-            <a:ext cx="10982446" cy="400110"/>
-          </a:xfrm>
-          <a:prstGeom prst="rect">
-            <a:avLst/>
-          </a:prstGeom>
-          <a:noFill/>
-        </p:spPr>
-        <p:txBody>
-          <a:bodyPr wrap="square" rtlCol="0">
-            <a:spAutoFit/>
-          </a:bodyPr>
-          <a:lstStyle/>
-          <a:p>
-            <a:pPr marL="0" marR="0" lvl="0" indent="0" algn="ctr" defTabSz="914400" rtl="0" eaLnBrk="1" fontAlgn="auto" latinLnBrk="0" hangingPunct="1">
-              <a:lnSpc>
-                <a:spcPct val="100000"/>
-              </a:lnSpc>
-              <a:spcBef>
-                <a:spcPts val="0"/>
-              </a:spcBef>
-              <a:spcAft>
-                <a:spcPts val="0"/>
-              </a:spcAft>
-              <a:buClrTx/>
-              <a:buSzTx/>
-              <a:buFontTx/>
-              <a:buNone/>
-              <a:tabLst/>
-              <a:defRPr/>
-            </a:pPr>
-            <a:r>
-              <a:rPr kumimoji="0" lang="en-US" sz="2000" b="0" i="0" u="none" strike="noStrike" kern="1200" cap="none" spc="0" normalizeH="0" baseline="0" noProof="0" dirty="0">
-                <a:ln>
-                  <a:noFill/>
-                </a:ln>
-                <a:solidFill>
-                  <a:prstClr val="black"/>
-                </a:solidFill>
-                <a:effectLst/>
-                <a:uLnTx/>
-                <a:uFillTx/>
-                <a:latin typeface="Aptos" panose="02110004020202020204"/>
-                <a:ea typeface="+mn-ea"/>
-                <a:cs typeface="+mn-cs"/>
-              </a:rPr>
-              <a:t>Factors ~ Termination ~ Phase</a:t>
-            </a:r>
-            <a:endParaRPr kumimoji="0" lang="en-GB" sz="2000" b="0" i="0" u="none" strike="noStrike" kern="1200" cap="none" spc="0" normalizeH="0" baseline="0" noProof="0" dirty="0">
-              <a:ln>
-                <a:noFill/>
-              </a:ln>
-              <a:solidFill>
-                <a:prstClr val="black"/>
-              </a:solidFill>
-              <a:effectLst/>
-              <a:uLnTx/>
-              <a:uFillTx/>
-              <a:latin typeface="Aptos" panose="02110004020202020204"/>
-              <a:ea typeface="+mn-ea"/>
-              <a:cs typeface="+mn-cs"/>
-            </a:endParaRPr>
-          </a:p>
-        </p:txBody>
-      </p:sp>
-    </p:spTree>
-    <p:extLst>
-      <p:ext uri="{BB962C8B-B14F-4D97-AF65-F5344CB8AC3E}">
-        <p14:creationId xmlns:p14="http://schemas.microsoft.com/office/powerpoint/2010/main" val="493610102"/>
-      </p:ext>
-    </p:extLst>
-  </p:cSld>
-  <p:clrMapOvr>
-    <a:masterClrMapping/>
-  </p:clrMapOvr>
-</p:sld>
-</file>
-
 <file path=ppt/slides/slide2.xml><?xml version="1.0" encoding="utf-8"?>
 <p:sld xmlns:a="http://schemas.openxmlformats.org/drawingml/2006/main" xmlns:r="http://schemas.openxmlformats.org/officeDocument/2006/relationships" xmlns:p="http://schemas.openxmlformats.org/presentationml/2006/main">
   <p:cSld>
@@ -19952,6 +19738,249 @@
       </p:grpSpPr>
       <p:sp>
         <p:nvSpPr>
+          <p:cNvPr id="7" name="Content Placeholder 6">
+            <a:extLst>
+              <a:ext uri="{FF2B5EF4-FFF2-40B4-BE49-F238E27FC236}">
+                <a16:creationId xmlns:a16="http://schemas.microsoft.com/office/drawing/2014/main" id="{7379714B-1FF3-323E-6749-EA95E8C454BF}"/>
+              </a:ext>
+            </a:extLst>
+          </p:cNvPr>
+          <p:cNvSpPr>
+            <a:spLocks noGrp="1"/>
+          </p:cNvSpPr>
+          <p:nvPr>
+            <p:ph idx="1"/>
+          </p:nvPr>
+        </p:nvSpPr>
+        <p:spPr>
+          <a:xfrm>
+            <a:off x="609600" y="3321933"/>
+            <a:ext cx="10972800" cy="3211975"/>
+          </a:xfrm>
+          <a:ln>
+            <a:solidFill>
+              <a:schemeClr val="tx1"/>
+            </a:solidFill>
+          </a:ln>
+        </p:spPr>
+        <p:txBody>
+          <a:bodyPr anchor="ctr">
+            <a:noAutofit/>
+          </a:bodyPr>
+          <a:lstStyle/>
+          <a:p>
+            <a:pPr marL="0" indent="0" algn="ctr">
+              <a:buNone/>
+            </a:pPr>
+            <a:r>
+              <a:rPr lang="en-GB" sz="2500" b="1" dirty="0"/>
+              <a:t>Background</a:t>
+            </a:r>
+          </a:p>
+          <a:p>
+            <a:pPr marL="3206750"/>
+            <a:r>
+              <a:rPr lang="en-GB" sz="1800" dirty="0"/>
+              <a:t>Enrollment</a:t>
+            </a:r>
+          </a:p>
+          <a:p>
+            <a:pPr marL="3206750"/>
+            <a:r>
+              <a:rPr lang="en-GB" sz="1800" dirty="0"/>
+              <a:t>Disease category (e.g., neoplasms) </a:t>
+            </a:r>
+            <a:r>
+              <a:rPr lang="en-GB" sz="1800" dirty="0">
+                <a:sym typeface="Wingdings" panose="05000000000000000000" pitchFamily="2" charset="2"/>
+              </a:rPr>
+              <a:t> Affects enrollment</a:t>
+            </a:r>
+            <a:endParaRPr lang="en-GB" sz="1800" dirty="0"/>
+          </a:p>
+          <a:p>
+            <a:pPr marL="3206750"/>
+            <a:r>
+              <a:rPr lang="en-GB" sz="1800" dirty="0"/>
+              <a:t>Number of facilities </a:t>
+            </a:r>
+            <a:r>
+              <a:rPr lang="en-GB" sz="1800" dirty="0">
+                <a:sym typeface="Wingdings" panose="05000000000000000000" pitchFamily="2" charset="2"/>
+              </a:rPr>
+              <a:t> Also, affects enrollment</a:t>
+            </a:r>
+            <a:endParaRPr lang="en-GB" sz="1800" dirty="0"/>
+          </a:p>
+          <a:p>
+            <a:pPr marL="3206750"/>
+            <a:r>
+              <a:rPr lang="en-GB" sz="1800" dirty="0"/>
+              <a:t>Healthy Volunteers</a:t>
+            </a:r>
+          </a:p>
+          <a:p>
+            <a:pPr marL="3206750"/>
+            <a:r>
+              <a:rPr lang="en-GB" sz="1800" dirty="0"/>
+              <a:t>Number of Adverse Events</a:t>
+            </a:r>
+          </a:p>
+          <a:p>
+            <a:pPr marL="3206750"/>
+            <a:r>
+              <a:rPr lang="en-GB" sz="1800" dirty="0"/>
+              <a:t>Funder type (e.g., non-Industry)</a:t>
+            </a:r>
+          </a:p>
+          <a:p>
+            <a:pPr marL="3206750"/>
+            <a:r>
+              <a:rPr lang="en-GB" sz="1800" dirty="0"/>
+              <a:t>Other (e., Administrative, supplies etc.)</a:t>
+            </a:r>
+          </a:p>
+        </p:txBody>
+      </p:sp>
+      <p:sp>
+        <p:nvSpPr>
+          <p:cNvPr id="3" name="Title 1">
+            <a:extLst>
+              <a:ext uri="{FF2B5EF4-FFF2-40B4-BE49-F238E27FC236}">
+                <a16:creationId xmlns:a16="http://schemas.microsoft.com/office/drawing/2014/main" id="{79AA6C9D-2E20-3FDC-E624-B09367AC8F9F}"/>
+              </a:ext>
+            </a:extLst>
+          </p:cNvPr>
+          <p:cNvSpPr>
+            <a:spLocks noGrp="1"/>
+          </p:cNvSpPr>
+          <p:nvPr>
+            <p:ph type="title"/>
+          </p:nvPr>
+        </p:nvSpPr>
+        <p:spPr>
+          <a:xfrm>
+            <a:off x="609600" y="439837"/>
+            <a:ext cx="10972800" cy="457200"/>
+          </a:xfrm>
+          <a:ln>
+            <a:solidFill>
+              <a:schemeClr val="tx1"/>
+            </a:solidFill>
+          </a:ln>
+        </p:spPr>
+        <p:txBody>
+          <a:bodyPr>
+            <a:noAutofit/>
+          </a:bodyPr>
+          <a:lstStyle/>
+          <a:p>
+            <a:pPr algn="ctr"/>
+            <a:r>
+              <a:rPr lang="en-GB" sz="3200" b="1" dirty="0"/>
+              <a:t>db Pivot &amp; Background</a:t>
+            </a:r>
+          </a:p>
+        </p:txBody>
+      </p:sp>
+      <p:sp>
+        <p:nvSpPr>
+          <p:cNvPr id="2" name="TextBox 1">
+            <a:extLst>
+              <a:ext uri="{FF2B5EF4-FFF2-40B4-BE49-F238E27FC236}">
+                <a16:creationId xmlns:a16="http://schemas.microsoft.com/office/drawing/2014/main" id="{608B01A7-91F3-6875-4CD6-3BD2CA6131EB}"/>
+              </a:ext>
+            </a:extLst>
+          </p:cNvPr>
+          <p:cNvSpPr txBox="1"/>
+          <p:nvPr/>
+        </p:nvSpPr>
+        <p:spPr>
+          <a:xfrm>
+            <a:off x="609600" y="2625726"/>
+            <a:ext cx="10972800" cy="400110"/>
+          </a:xfrm>
+          <a:prstGeom prst="rect">
+            <a:avLst/>
+          </a:prstGeom>
+          <a:noFill/>
+        </p:spPr>
+        <p:txBody>
+          <a:bodyPr wrap="square" rtlCol="0" anchor="ctr">
+            <a:spAutoFit/>
+          </a:bodyPr>
+          <a:lstStyle/>
+          <a:p>
+            <a:pPr algn="ctr"/>
+            <a:r>
+              <a:rPr lang="en-US" sz="2000" dirty="0"/>
+              <a:t>Literature Alignment</a:t>
+            </a:r>
+          </a:p>
+        </p:txBody>
+      </p:sp>
+      <p:pic>
+        <p:nvPicPr>
+          <p:cNvPr id="6" name="Picture 5">
+            <a:extLst>
+              <a:ext uri="{FF2B5EF4-FFF2-40B4-BE49-F238E27FC236}">
+                <a16:creationId xmlns:a16="http://schemas.microsoft.com/office/drawing/2014/main" id="{8EC81A22-9F3E-3963-5EB9-300275B01289}"/>
+              </a:ext>
+            </a:extLst>
+          </p:cNvPr>
+          <p:cNvPicPr>
+            <a:picLocks noChangeAspect="1"/>
+          </p:cNvPicPr>
+          <p:nvPr/>
+        </p:nvPicPr>
+        <p:blipFill>
+          <a:blip r:embed="rId2"/>
+          <a:stretch>
+            <a:fillRect/>
+          </a:stretch>
+        </p:blipFill>
+        <p:spPr>
+          <a:xfrm>
+            <a:off x="1828047" y="1212869"/>
+            <a:ext cx="8535906" cy="1163060"/>
+          </a:xfrm>
+          <a:prstGeom prst="rect">
+            <a:avLst/>
+          </a:prstGeom>
+        </p:spPr>
+      </p:pic>
+    </p:spTree>
+    <p:extLst>
+      <p:ext uri="{BB962C8B-B14F-4D97-AF65-F5344CB8AC3E}">
+        <p14:creationId xmlns:p14="http://schemas.microsoft.com/office/powerpoint/2010/main" val="379656155"/>
+      </p:ext>
+    </p:extLst>
+  </p:cSld>
+  <p:clrMapOvr>
+    <a:masterClrMapping/>
+  </p:clrMapOvr>
+</p:sld>
+</file>
+
+<file path=ppt/slides/slide21.xml><?xml version="1.0" encoding="utf-8"?>
+<p:sld xmlns:a="http://schemas.openxmlformats.org/drawingml/2006/main" xmlns:r="http://schemas.openxmlformats.org/officeDocument/2006/relationships" xmlns:p="http://schemas.openxmlformats.org/presentationml/2006/main">
+  <p:cSld>
+    <p:spTree>
+      <p:nvGrpSpPr>
+        <p:cNvPr id="1" name=""/>
+        <p:cNvGrpSpPr/>
+        <p:nvPr/>
+      </p:nvGrpSpPr>
+      <p:grpSpPr>
+        <a:xfrm>
+          <a:off x="0" y="0"/>
+          <a:ext cx="0" cy="0"/>
+          <a:chOff x="0" y="0"/>
+          <a:chExt cx="0" cy="0"/>
+        </a:xfrm>
+      </p:grpSpPr>
+      <p:sp>
+        <p:nvSpPr>
           <p:cNvPr id="2" name="Title 1">
             <a:extLst>
               <a:ext uri="{FF2B5EF4-FFF2-40B4-BE49-F238E27FC236}">
@@ -19994,10 +20023,10 @@
       </p:sp>
       <p:grpSp>
         <p:nvGrpSpPr>
-          <p:cNvPr id="36" name="Group 35">
+          <p:cNvPr id="26" name="Group 25">
             <a:extLst>
               <a:ext uri="{FF2B5EF4-FFF2-40B4-BE49-F238E27FC236}">
-                <a16:creationId xmlns:a16="http://schemas.microsoft.com/office/drawing/2014/main" id="{34B46513-4A49-58D4-8935-B7F54A3BEBBB}"/>
+                <a16:creationId xmlns:a16="http://schemas.microsoft.com/office/drawing/2014/main" id="{1C5C83E6-6CA1-EDD4-B08C-006113AE0A92}"/>
               </a:ext>
             </a:extLst>
           </p:cNvPr>
@@ -20006,18 +20035,18 @@
         </p:nvGrpSpPr>
         <p:grpSpPr>
           <a:xfrm>
-            <a:off x="811332" y="864805"/>
-            <a:ext cx="10547158" cy="5958470"/>
-            <a:chOff x="846057" y="899530"/>
-            <a:chExt cx="10547158" cy="5958470"/>
+            <a:off x="574879" y="848886"/>
+            <a:ext cx="11007522" cy="5856406"/>
+            <a:chOff x="574879" y="848886"/>
+            <a:chExt cx="11007522" cy="5856406"/>
           </a:xfrm>
         </p:grpSpPr>
         <p:pic>
           <p:nvPicPr>
-            <p:cNvPr id="29" name="Picture 28">
+            <p:cNvPr id="17" name="Picture 16">
               <a:extLst>
                 <a:ext uri="{FF2B5EF4-FFF2-40B4-BE49-F238E27FC236}">
-                  <a16:creationId xmlns:a16="http://schemas.microsoft.com/office/drawing/2014/main" id="{0D4ADD35-D2D4-DA05-5903-913AACBA24DD}"/>
+                  <a16:creationId xmlns:a16="http://schemas.microsoft.com/office/drawing/2014/main" id="{D5ECBC4A-2B11-4B08-C8A3-6AFC40E86D04}"/>
                 </a:ext>
               </a:extLst>
             </p:cNvPr>
@@ -20034,8 +20063,8 @@
           </p:blipFill>
           <p:spPr>
             <a:xfrm>
-              <a:off x="846057" y="899531"/>
-              <a:ext cx="5316547" cy="2928367"/>
+              <a:off x="574880" y="848886"/>
+              <a:ext cx="5486400" cy="2938072"/>
             </a:xfrm>
             <a:prstGeom prst="rect">
               <a:avLst/>
@@ -20050,10 +20079,10 @@
         </p:pic>
         <p:pic>
           <p:nvPicPr>
-            <p:cNvPr id="31" name="Picture 30">
+            <p:cNvPr id="21" name="Picture 20">
               <a:extLst>
                 <a:ext uri="{FF2B5EF4-FFF2-40B4-BE49-F238E27FC236}">
-                  <a16:creationId xmlns:a16="http://schemas.microsoft.com/office/drawing/2014/main" id="{FFBEBC9B-A546-B8B1-FD16-74D1E79ADF4C}"/>
+                  <a16:creationId xmlns:a16="http://schemas.microsoft.com/office/drawing/2014/main" id="{6940838F-7595-383B-355B-AEE11B633346}"/>
                 </a:ext>
               </a:extLst>
             </p:cNvPr>
@@ -20070,8 +20099,8 @@
           </p:blipFill>
           <p:spPr>
             <a:xfrm>
-              <a:off x="6187065" y="899530"/>
-              <a:ext cx="5206150" cy="2928368"/>
+              <a:off x="6096000" y="848886"/>
+              <a:ext cx="5486401" cy="2938071"/>
             </a:xfrm>
             <a:prstGeom prst="rect">
               <a:avLst/>
@@ -20086,10 +20115,10 @@
         </p:pic>
         <p:pic>
           <p:nvPicPr>
-            <p:cNvPr id="33" name="Picture 32">
+            <p:cNvPr id="23" name="Picture 22">
               <a:extLst>
                 <a:ext uri="{FF2B5EF4-FFF2-40B4-BE49-F238E27FC236}">
-                  <a16:creationId xmlns:a16="http://schemas.microsoft.com/office/drawing/2014/main" id="{5DDB2D2A-0022-B9CE-0C3A-8A8B40881F2D}"/>
+                  <a16:creationId xmlns:a16="http://schemas.microsoft.com/office/drawing/2014/main" id="{7D899AEF-0831-6AD2-3F78-AF8C38DCF00E}"/>
                 </a:ext>
               </a:extLst>
             </p:cNvPr>
@@ -20106,8 +20135,8 @@
           </p:blipFill>
           <p:spPr>
             <a:xfrm>
-              <a:off x="846058" y="3874197"/>
-              <a:ext cx="5316546" cy="2983803"/>
+              <a:off x="574879" y="3767222"/>
+              <a:ext cx="5486397" cy="2938070"/>
             </a:xfrm>
             <a:prstGeom prst="rect">
               <a:avLst/>
@@ -20122,10 +20151,10 @@
         </p:pic>
         <p:pic>
           <p:nvPicPr>
-            <p:cNvPr id="35" name="Picture 34">
+            <p:cNvPr id="25" name="Picture 24">
               <a:extLst>
                 <a:ext uri="{FF2B5EF4-FFF2-40B4-BE49-F238E27FC236}">
-                  <a16:creationId xmlns:a16="http://schemas.microsoft.com/office/drawing/2014/main" id="{0A91FFED-CDFA-FBE7-D2E8-B94068B2AE35}"/>
+                  <a16:creationId xmlns:a16="http://schemas.microsoft.com/office/drawing/2014/main" id="{42F43B33-35A2-AA1D-7450-44DF1C046865}"/>
                 </a:ext>
               </a:extLst>
             </p:cNvPr>
@@ -20142,8 +20171,8 @@
           </p:blipFill>
           <p:spPr>
             <a:xfrm>
-              <a:off x="6187064" y="3874197"/>
-              <a:ext cx="5206149" cy="2983802"/>
+              <a:off x="6096000" y="3767219"/>
+              <a:ext cx="5486401" cy="2938073"/>
             </a:xfrm>
             <a:prstGeom prst="rect">
               <a:avLst/>
@@ -20170,7 +20199,7 @@
 </p:sld>
 </file>
 
-<file path=ppt/slides/slide21.xml><?xml version="1.0" encoding="utf-8"?>
+<file path=ppt/slides/slide22.xml><?xml version="1.0" encoding="utf-8"?>
 <p:sld xmlns:a="http://schemas.openxmlformats.org/drawingml/2006/main" xmlns:r="http://schemas.openxmlformats.org/officeDocument/2006/relationships" xmlns:p="http://schemas.openxmlformats.org/presentationml/2006/main">
   <p:cSld>
     <p:spTree>
@@ -20187,153 +20216,192 @@
           <a:chExt cx="0" cy="0"/>
         </a:xfrm>
       </p:grpSpPr>
-      <p:pic>
-        <p:nvPicPr>
-          <p:cNvPr id="29" name="Picture 28">
+      <p:grpSp>
+        <p:nvGrpSpPr>
+          <p:cNvPr id="19" name="Group 18">
             <a:extLst>
               <a:ext uri="{FF2B5EF4-FFF2-40B4-BE49-F238E27FC236}">
-                <a16:creationId xmlns:a16="http://schemas.microsoft.com/office/drawing/2014/main" id="{3EBE4DE9-C03D-9837-2223-72ED773D3107}"/>
+                <a16:creationId xmlns:a16="http://schemas.microsoft.com/office/drawing/2014/main" id="{0E7AD118-D083-DDEE-7178-E43F222AB673}"/>
               </a:ext>
             </a:extLst>
           </p:cNvPr>
-          <p:cNvPicPr>
-            <a:picLocks noChangeAspect="1"/>
-          </p:cNvPicPr>
+          <p:cNvGrpSpPr/>
           <p:nvPr/>
-        </p:nvPicPr>
-        <p:blipFill>
-          <a:blip r:embed="rId2"/>
-          <a:srcRect l="1" t="1" r="-1545" b="865"/>
-          <a:stretch>
-            <a:fillRect/>
-          </a:stretch>
-        </p:blipFill>
-        <p:spPr>
+        </p:nvGrpSpPr>
+        <p:grpSpPr>
           <a:xfrm>
-            <a:off x="6005802" y="4403216"/>
-            <a:ext cx="5804384" cy="2109293"/>
+            <a:off x="609601" y="2251960"/>
+            <a:ext cx="10972800" cy="4301240"/>
+            <a:chOff x="985519" y="2414090"/>
+            <a:chExt cx="10220961" cy="3935123"/>
           </a:xfrm>
-          <a:prstGeom prst="rect">
-            <a:avLst/>
-          </a:prstGeom>
-          <a:ln>
-            <a:noFill/>
-          </a:ln>
-          <a:effectLst>
-            <a:softEdge rad="112500"/>
-          </a:effectLst>
-        </p:spPr>
-      </p:pic>
-      <p:pic>
-        <p:nvPicPr>
-          <p:cNvPr id="20" name="Picture 19">
-            <a:extLst>
-              <a:ext uri="{FF2B5EF4-FFF2-40B4-BE49-F238E27FC236}">
-                <a16:creationId xmlns:a16="http://schemas.microsoft.com/office/drawing/2014/main" id="{485A75C3-71D6-FE46-0600-AD372C10CF3B}"/>
-              </a:ext>
-            </a:extLst>
-          </p:cNvPr>
-          <p:cNvPicPr>
-            <a:picLocks noChangeAspect="1"/>
-          </p:cNvPicPr>
-          <p:nvPr/>
-        </p:nvPicPr>
-        <p:blipFill>
-          <a:blip r:embed="rId3"/>
-          <a:srcRect r="1164"/>
-          <a:stretch>
-            <a:fillRect/>
-          </a:stretch>
-        </p:blipFill>
-        <p:spPr>
-          <a:xfrm>
-            <a:off x="6008213" y="2338084"/>
-            <a:ext cx="5730106" cy="2144737"/>
-          </a:xfrm>
-          <a:prstGeom prst="rect">
-            <a:avLst/>
-          </a:prstGeom>
-          <a:ln>
-            <a:noFill/>
-          </a:ln>
-          <a:effectLst>
-            <a:softEdge rad="112500"/>
-          </a:effectLst>
-        </p:spPr>
-      </p:pic>
-      <p:pic>
-        <p:nvPicPr>
-          <p:cNvPr id="22" name="Picture 21">
-            <a:extLst>
-              <a:ext uri="{FF2B5EF4-FFF2-40B4-BE49-F238E27FC236}">
-                <a16:creationId xmlns:a16="http://schemas.microsoft.com/office/drawing/2014/main" id="{2B4BA61B-C5D9-0ADA-6879-916E8C08C114}"/>
-              </a:ext>
-            </a:extLst>
-          </p:cNvPr>
-          <p:cNvPicPr>
-            <a:picLocks noChangeAspect="1"/>
-          </p:cNvPicPr>
-          <p:nvPr/>
-        </p:nvPicPr>
-        <p:blipFill>
-          <a:blip r:embed="rId4"/>
-          <a:stretch>
-            <a:fillRect/>
-          </a:stretch>
-        </p:blipFill>
-        <p:spPr>
-          <a:xfrm>
-            <a:off x="389732" y="4406213"/>
-            <a:ext cx="5730110" cy="2116344"/>
-          </a:xfrm>
-          <a:prstGeom prst="rect">
-            <a:avLst/>
-          </a:prstGeom>
-          <a:ln>
-            <a:noFill/>
-          </a:ln>
-          <a:effectLst>
-            <a:softEdge rad="112500"/>
-          </a:effectLst>
-        </p:spPr>
-      </p:pic>
-      <p:pic>
-        <p:nvPicPr>
-          <p:cNvPr id="17" name="Picture 16">
-            <a:extLst>
-              <a:ext uri="{FF2B5EF4-FFF2-40B4-BE49-F238E27FC236}">
-                <a16:creationId xmlns:a16="http://schemas.microsoft.com/office/drawing/2014/main" id="{486FD39C-0F72-3001-9114-22AD0303F41C}"/>
-              </a:ext>
-            </a:extLst>
-          </p:cNvPr>
-          <p:cNvPicPr>
-            <a:picLocks noChangeAspect="1"/>
-          </p:cNvPicPr>
-          <p:nvPr/>
-        </p:nvPicPr>
-        <p:blipFill>
-          <a:blip r:embed="rId5"/>
-          <a:srcRect t="944" b="2527"/>
-          <a:stretch>
-            <a:fillRect/>
-          </a:stretch>
-        </p:blipFill>
-        <p:spPr>
-          <a:xfrm>
-            <a:off x="389735" y="2338085"/>
-            <a:ext cx="5730106" cy="2144737"/>
-          </a:xfrm>
-          <a:prstGeom prst="rect">
-            <a:avLst/>
-          </a:prstGeom>
-          <a:ln>
-            <a:noFill/>
-          </a:ln>
-          <a:effectLst>
-            <a:softEdge rad="112500"/>
-          </a:effectLst>
-        </p:spPr>
-      </p:pic>
+        </p:grpSpPr>
+        <p:grpSp>
+          <p:nvGrpSpPr>
+            <p:cNvPr id="13" name="Group 12">
+              <a:extLst>
+                <a:ext uri="{FF2B5EF4-FFF2-40B4-BE49-F238E27FC236}">
+                  <a16:creationId xmlns:a16="http://schemas.microsoft.com/office/drawing/2014/main" id="{1A46AA44-BBA8-2CE7-94B5-D18DA91BEFE0}"/>
+                </a:ext>
+              </a:extLst>
+            </p:cNvPr>
+            <p:cNvGrpSpPr/>
+            <p:nvPr/>
+          </p:nvGrpSpPr>
+          <p:grpSpPr>
+            <a:xfrm>
+              <a:off x="985519" y="2414093"/>
+              <a:ext cx="10220961" cy="3935120"/>
+              <a:chOff x="609599" y="2464893"/>
+              <a:chExt cx="10220961" cy="3935120"/>
+            </a:xfrm>
+          </p:grpSpPr>
+          <p:pic>
+            <p:nvPicPr>
+              <p:cNvPr id="6" name="Picture 5">
+                <a:extLst>
+                  <a:ext uri="{FF2B5EF4-FFF2-40B4-BE49-F238E27FC236}">
+                    <a16:creationId xmlns:a16="http://schemas.microsoft.com/office/drawing/2014/main" id="{9EDA3562-9FB6-36FB-68CB-62B11B520B6B}"/>
+                  </a:ext>
+                </a:extLst>
+              </p:cNvPr>
+              <p:cNvPicPr>
+                <a:picLocks noChangeAspect="1"/>
+              </p:cNvPicPr>
+              <p:nvPr/>
+            </p:nvPicPr>
+            <p:blipFill>
+              <a:blip r:embed="rId2"/>
+              <a:stretch>
+                <a:fillRect/>
+              </a:stretch>
+            </p:blipFill>
+            <p:spPr>
+              <a:xfrm>
+                <a:off x="609600" y="2464893"/>
+                <a:ext cx="5033176" cy="1917139"/>
+              </a:xfrm>
+              <a:prstGeom prst="rect">
+                <a:avLst/>
+              </a:prstGeom>
+              <a:ln>
+                <a:noFill/>
+              </a:ln>
+              <a:effectLst>
+                <a:softEdge rad="112500"/>
+              </a:effectLst>
+            </p:spPr>
+          </p:pic>
+          <p:pic>
+            <p:nvPicPr>
+              <p:cNvPr id="10" name="Picture 9">
+                <a:extLst>
+                  <a:ext uri="{FF2B5EF4-FFF2-40B4-BE49-F238E27FC236}">
+                    <a16:creationId xmlns:a16="http://schemas.microsoft.com/office/drawing/2014/main" id="{79234098-89AC-01BC-B93C-378EFF65637E}"/>
+                  </a:ext>
+                </a:extLst>
+              </p:cNvPr>
+              <p:cNvPicPr>
+                <a:picLocks noChangeAspect="1"/>
+              </p:cNvPicPr>
+              <p:nvPr/>
+            </p:nvPicPr>
+            <p:blipFill>
+              <a:blip r:embed="rId3"/>
+              <a:stretch>
+                <a:fillRect/>
+              </a:stretch>
+            </p:blipFill>
+            <p:spPr>
+              <a:xfrm>
+                <a:off x="609599" y="4482875"/>
+                <a:ext cx="5033177" cy="1917138"/>
+              </a:xfrm>
+              <a:prstGeom prst="rect">
+                <a:avLst/>
+              </a:prstGeom>
+              <a:ln>
+                <a:noFill/>
+              </a:ln>
+              <a:effectLst>
+                <a:softEdge rad="112500"/>
+              </a:effectLst>
+            </p:spPr>
+          </p:pic>
+          <p:pic>
+            <p:nvPicPr>
+              <p:cNvPr id="12" name="Picture 11">
+                <a:extLst>
+                  <a:ext uri="{FF2B5EF4-FFF2-40B4-BE49-F238E27FC236}">
+                    <a16:creationId xmlns:a16="http://schemas.microsoft.com/office/drawing/2014/main" id="{0ED05DC4-10F4-02E4-D5C3-814C3B09C2D2}"/>
+                  </a:ext>
+                </a:extLst>
+              </p:cNvPr>
+              <p:cNvPicPr>
+                <a:picLocks noChangeAspect="1"/>
+              </p:cNvPicPr>
+              <p:nvPr/>
+            </p:nvPicPr>
+            <p:blipFill>
+              <a:blip r:embed="rId4"/>
+              <a:stretch>
+                <a:fillRect/>
+              </a:stretch>
+            </p:blipFill>
+            <p:spPr>
+              <a:xfrm>
+                <a:off x="5797383" y="4482875"/>
+                <a:ext cx="5033177" cy="1917138"/>
+              </a:xfrm>
+              <a:prstGeom prst="rect">
+                <a:avLst/>
+              </a:prstGeom>
+              <a:ln>
+                <a:noFill/>
+              </a:ln>
+              <a:effectLst>
+                <a:softEdge rad="112500"/>
+              </a:effectLst>
+            </p:spPr>
+          </p:pic>
+        </p:grpSp>
+        <p:pic>
+          <p:nvPicPr>
+            <p:cNvPr id="18" name="Picture 17">
+              <a:extLst>
+                <a:ext uri="{FF2B5EF4-FFF2-40B4-BE49-F238E27FC236}">
+                  <a16:creationId xmlns:a16="http://schemas.microsoft.com/office/drawing/2014/main" id="{3ABFA820-5483-9521-8C6E-915EE34A5D3A}"/>
+                </a:ext>
+              </a:extLst>
+            </p:cNvPr>
+            <p:cNvPicPr>
+              <a:picLocks noChangeAspect="1"/>
+            </p:cNvPicPr>
+            <p:nvPr/>
+          </p:nvPicPr>
+          <p:blipFill>
+            <a:blip r:embed="rId5"/>
+            <a:stretch>
+              <a:fillRect/>
+            </a:stretch>
+          </p:blipFill>
+          <p:spPr>
+            <a:xfrm>
+              <a:off x="6173303" y="2414090"/>
+              <a:ext cx="5033176" cy="1917139"/>
+            </a:xfrm>
+            <a:prstGeom prst="rect">
+              <a:avLst/>
+            </a:prstGeom>
+            <a:ln>
+              <a:noFill/>
+            </a:ln>
+            <a:effectLst>
+              <a:softEdge rad="112500"/>
+            </a:effectLst>
+          </p:spPr>
+        </p:pic>
+      </p:grpSp>
       <p:sp>
         <p:nvSpPr>
           <p:cNvPr id="5" name="Title 1">
@@ -20409,7 +20477,7 @@
         </p:nvSpPr>
         <p:spPr>
           <a:xfrm>
-            <a:off x="609600" y="1100437"/>
+            <a:off x="609600" y="1123587"/>
             <a:ext cx="10972800" cy="923330"/>
           </a:xfrm>
           <a:prstGeom prst="rect">
@@ -20465,33 +20533,32 @@
               <a:rPr lang="en-US" dirty="0">
                 <a:sym typeface="Wingdings" panose="05000000000000000000" pitchFamily="2" charset="2"/>
               </a:rPr>
-              <a:t>SHAP ≠ Logistic Interpretation  Significance</a:t>
+              <a:t>SHAP ≠ Logistic Interpretation  Significance, Direction</a:t>
             </a:r>
             <a:endParaRPr lang="en-GB" dirty="0"/>
           </a:p>
         </p:txBody>
       </p:sp>
-      <p:sp>
-        <p:nvSpPr>
-          <p:cNvPr id="3" name="Rectangle 2">
+      <p:cxnSp>
+        <p:nvCxnSpPr>
+          <p:cNvPr id="24" name="Straight Connector 23">
             <a:extLst>
               <a:ext uri="{FF2B5EF4-FFF2-40B4-BE49-F238E27FC236}">
-                <a16:creationId xmlns:a16="http://schemas.microsoft.com/office/drawing/2014/main" id="{F10D7D99-F5D5-516F-7D30-BB964DA8BD45}"/>
+                <a16:creationId xmlns:a16="http://schemas.microsoft.com/office/drawing/2014/main" id="{47354A09-3670-2A84-AE1A-8F1DBAA5939A}"/>
               </a:ext>
             </a:extLst>
           </p:cNvPr>
-          <p:cNvSpPr/>
+          <p:cNvCxnSpPr/>
           <p:nvPr/>
-        </p:nvSpPr>
+        </p:nvCxnSpPr>
         <p:spPr>
           <a:xfrm>
-            <a:off x="1991360" y="2966720"/>
-            <a:ext cx="538480" cy="203200"/>
+            <a:off x="2377440" y="2950464"/>
+            <a:ext cx="548640" cy="0"/>
           </a:xfrm>
-          <a:prstGeom prst="rect">
+          <a:prstGeom prst="line">
             <a:avLst/>
           </a:prstGeom>
-          <a:noFill/>
           <a:ln>
             <a:solidFill>
               <a:schemeClr val="accent5"/>
@@ -20500,50 +20567,39 @@
         </p:spPr>
         <p:style>
           <a:lnRef idx="2">
-            <a:schemeClr val="accent1">
-              <a:shade val="15000"/>
-            </a:schemeClr>
+            <a:schemeClr val="accent1"/>
           </a:lnRef>
-          <a:fillRef idx="1">
+          <a:fillRef idx="0">
             <a:schemeClr val="accent1"/>
           </a:fillRef>
-          <a:effectRef idx="0">
+          <a:effectRef idx="1">
             <a:schemeClr val="accent1"/>
           </a:effectRef>
           <a:fontRef idx="minor">
-            <a:schemeClr val="lt1"/>
+            <a:schemeClr val="tx1"/>
           </a:fontRef>
         </p:style>
-        <p:txBody>
-          <a:bodyPr rtlCol="0" anchor="ctr"/>
-          <a:lstStyle/>
-          <a:p>
-            <a:pPr algn="ctr"/>
-            <a:endParaRPr lang="en-GB"/>
-          </a:p>
-        </p:txBody>
-      </p:sp>
-      <p:sp>
-        <p:nvSpPr>
-          <p:cNvPr id="4" name="Rectangle 3">
+      </p:cxnSp>
+      <p:cxnSp>
+        <p:nvCxnSpPr>
+          <p:cNvPr id="25" name="Straight Connector 24">
             <a:extLst>
               <a:ext uri="{FF2B5EF4-FFF2-40B4-BE49-F238E27FC236}">
-                <a16:creationId xmlns:a16="http://schemas.microsoft.com/office/drawing/2014/main" id="{59382B80-BBED-E474-12E9-F26C56CAA46D}"/>
+                <a16:creationId xmlns:a16="http://schemas.microsoft.com/office/drawing/2014/main" id="{ED3CAE37-E11C-EC06-E5DD-09A661000FF9}"/>
               </a:ext>
             </a:extLst>
           </p:cNvPr>
-          <p:cNvSpPr/>
+          <p:cNvCxnSpPr/>
           <p:nvPr/>
-        </p:nvSpPr>
+        </p:nvCxnSpPr>
         <p:spPr>
           <a:xfrm>
-            <a:off x="9794240" y="3636333"/>
-            <a:ext cx="538480" cy="203200"/>
+            <a:off x="8540496" y="3517392"/>
+            <a:ext cx="548640" cy="0"/>
           </a:xfrm>
-          <a:prstGeom prst="rect">
+          <a:prstGeom prst="line">
             <a:avLst/>
           </a:prstGeom>
-          <a:noFill/>
           <a:ln>
             <a:solidFill>
               <a:schemeClr val="accent5"/>
@@ -20552,29 +20608,60 @@
         </p:spPr>
         <p:style>
           <a:lnRef idx="2">
-            <a:schemeClr val="accent1">
-              <a:shade val="15000"/>
-            </a:schemeClr>
+            <a:schemeClr val="accent1"/>
           </a:lnRef>
-          <a:fillRef idx="1">
+          <a:fillRef idx="0">
             <a:schemeClr val="accent1"/>
           </a:fillRef>
-          <a:effectRef idx="0">
+          <a:effectRef idx="1">
             <a:schemeClr val="accent1"/>
           </a:effectRef>
           <a:fontRef idx="minor">
-            <a:schemeClr val="lt1"/>
+            <a:schemeClr val="tx1"/>
           </a:fontRef>
         </p:style>
-        <p:txBody>
-          <a:bodyPr rtlCol="0" anchor="ctr"/>
-          <a:lstStyle/>
-          <a:p>
-            <a:pPr algn="ctr"/>
-            <a:endParaRPr lang="en-GB"/>
-          </a:p>
-        </p:txBody>
-      </p:sp>
+      </p:cxnSp>
+      <p:cxnSp>
+        <p:nvCxnSpPr>
+          <p:cNvPr id="26" name="Straight Connector 25">
+            <a:extLst>
+              <a:ext uri="{FF2B5EF4-FFF2-40B4-BE49-F238E27FC236}">
+                <a16:creationId xmlns:a16="http://schemas.microsoft.com/office/drawing/2014/main" id="{4C1DC3F0-9B34-D374-BE71-99BCAC8E9ADA}"/>
+              </a:ext>
+            </a:extLst>
+          </p:cNvPr>
+          <p:cNvCxnSpPr/>
+          <p:nvPr/>
+        </p:nvCxnSpPr>
+        <p:spPr>
+          <a:xfrm>
+            <a:off x="10003536" y="3517392"/>
+            <a:ext cx="548640" cy="0"/>
+          </a:xfrm>
+          <a:prstGeom prst="line">
+            <a:avLst/>
+          </a:prstGeom>
+          <a:ln>
+            <a:solidFill>
+              <a:schemeClr val="accent5"/>
+            </a:solidFill>
+          </a:ln>
+        </p:spPr>
+        <p:style>
+          <a:lnRef idx="2">
+            <a:schemeClr val="accent1"/>
+          </a:lnRef>
+          <a:fillRef idx="0">
+            <a:schemeClr val="accent1"/>
+          </a:fillRef>
+          <a:effectRef idx="1">
+            <a:schemeClr val="accent1"/>
+          </a:effectRef>
+          <a:fontRef idx="minor">
+            <a:schemeClr val="tx1"/>
+          </a:fontRef>
+        </p:style>
+      </p:cxnSp>
     </p:spTree>
     <p:extLst>
       <p:ext uri="{BB962C8B-B14F-4D97-AF65-F5344CB8AC3E}">
@@ -20588,7 +20675,7 @@
 </p:sld>
 </file>
 
-<file path=ppt/slides/slide22.xml><?xml version="1.0" encoding="utf-8"?>
+<file path=ppt/slides/slide23.xml><?xml version="1.0" encoding="utf-8"?>
 <p:sld xmlns:a="http://schemas.openxmlformats.org/drawingml/2006/main" xmlns:r="http://schemas.openxmlformats.org/officeDocument/2006/relationships" xmlns:p="http://schemas.openxmlformats.org/presentationml/2006/main">
   <p:cSld>
     <p:spTree>
@@ -20680,7 +20767,7 @@
         </p:spPr>
         <p:txBody>
           <a:bodyPr anchor="ctr">
-            <a:normAutofit fontScale="92500" lnSpcReduction="10000"/>
+            <a:normAutofit fontScale="92500" lnSpcReduction="20000"/>
           </a:bodyPr>
           <a:lstStyle/>
           <a:p>
@@ -20895,7 +20982,7 @@
         </p:spPr>
         <p:txBody>
           <a:bodyPr>
-            <a:normAutofit fontScale="92500" lnSpcReduction="10000"/>
+            <a:normAutofit fontScale="92500" lnSpcReduction="20000"/>
           </a:bodyPr>
           <a:lstStyle/>
           <a:p>
@@ -20920,37 +21007,38 @@
             <a:endParaRPr lang="en-US" sz="2600" b="1" u="sng" dirty="0"/>
           </a:p>
           <a:p>
-            <a:r>
-              <a:rPr lang="en-US" sz="2400" dirty="0"/>
-              <a:t>Top Predictors ~ Phases : </a:t>
-            </a:r>
-          </a:p>
-          <a:p>
-            <a:pPr lvl="1"/>
-            <a:r>
-              <a:rPr lang="en-US" dirty="0">
-                <a:sym typeface="Wingdings" panose="05000000000000000000" pitchFamily="2" charset="2"/>
-              </a:rPr>
-              <a:t>Phase  1 - New intervention  Participants’ Health status </a:t>
-            </a:r>
-            <a:endParaRPr lang="en-US" dirty="0"/>
-          </a:p>
-          <a:p>
-            <a:pPr lvl="1"/>
-            <a:r>
-              <a:rPr lang="en-US" dirty="0">
-                <a:sym typeface="Wingdings" panose="05000000000000000000" pitchFamily="2" charset="2"/>
-              </a:rPr>
-              <a:t>Phase 2-4  # Adverse, Design </a:t>
-            </a:r>
-          </a:p>
-          <a:p>
-            <a:pPr lvl="1"/>
-            <a:r>
-              <a:rPr lang="en-US" dirty="0">
-                <a:sym typeface="Wingdings" panose="05000000000000000000" pitchFamily="2" charset="2"/>
-              </a:rPr>
-              <a:t>Phases 3  Study design, Treatment</a:t>
+            <a:pPr lvl="0"/>
+            <a:r>
+              <a:rPr lang="en-GB" sz="2400" dirty="0"/>
+              <a:t>Phase 1: New treatment ~ </a:t>
+            </a:r>
+            <a:br>
+              <a:rPr lang="en-GB" sz="2400" dirty="0"/>
+            </a:br>
+            <a:r>
+              <a:rPr lang="en-GB" sz="2400" dirty="0"/>
+              <a:t>Health status </a:t>
+            </a:r>
+          </a:p>
+          <a:p>
+            <a:pPr lvl="0"/>
+            <a:r>
+              <a:rPr lang="en-GB" sz="2400" dirty="0"/>
+              <a:t>Phase 2: Safety, Pharmacokinetics ~ Adverse, Therapeutic, Sponsor</a:t>
+            </a:r>
+          </a:p>
+          <a:p>
+            <a:pPr lvl="0"/>
+            <a:r>
+              <a:rPr lang="en-GB" sz="2400" dirty="0"/>
+              <a:t>Phase 3: Design, Treatment comp. ~ Design, Treatment characteristics</a:t>
+            </a:r>
+          </a:p>
+          <a:p>
+            <a:pPr lvl="0"/>
+            <a:r>
+              <a:rPr lang="en-GB" sz="2400" dirty="0"/>
+              <a:t>Phase 4: Approved Treatment ~ Intervention characteristics</a:t>
             </a:r>
           </a:p>
           <a:p>
@@ -21051,7 +21139,7 @@
 </p:sld>
 </file>
 
-<file path=ppt/slides/slide23.xml><?xml version="1.0" encoding="utf-8"?>
+<file path=ppt/slides/slide24.xml><?xml version="1.0" encoding="utf-8"?>
 <p:sld xmlns:a="http://schemas.openxmlformats.org/drawingml/2006/main" xmlns:r="http://schemas.openxmlformats.org/officeDocument/2006/relationships" xmlns:p="http://schemas.openxmlformats.org/presentationml/2006/main">
   <p:cSld>
     <p:spTree>
@@ -21124,8 +21212,8 @@
         </p:nvSpPr>
         <p:spPr>
           <a:xfrm>
-            <a:off x="9818658" y="4483942"/>
-            <a:ext cx="1763742" cy="2031325"/>
+            <a:off x="6289860" y="4483942"/>
+            <a:ext cx="5292538" cy="2031325"/>
           </a:xfrm>
           <a:prstGeom prst="rect">
             <a:avLst/>
@@ -21324,10 +21412,10 @@
       </p:sp>
       <p:pic>
         <p:nvPicPr>
-          <p:cNvPr id="6" name="Picture 5">
+          <p:cNvPr id="10" name="Picture 9">
             <a:extLst>
               <a:ext uri="{FF2B5EF4-FFF2-40B4-BE49-F238E27FC236}">
-                <a16:creationId xmlns:a16="http://schemas.microsoft.com/office/drawing/2014/main" id="{3B1FBFAB-7CB4-71D7-BB90-40702C41FA07}"/>
+                <a16:creationId xmlns:a16="http://schemas.microsoft.com/office/drawing/2014/main" id="{A6401FBF-FCA8-A5E3-357F-3BAF58495F00}"/>
               </a:ext>
             </a:extLst>
           </p:cNvPr>
@@ -21344,8 +21432,8 @@
         </p:blipFill>
         <p:spPr>
           <a:xfrm>
-            <a:off x="609599" y="1577785"/>
-            <a:ext cx="5307860" cy="2723124"/>
+            <a:off x="609599" y="1675048"/>
+            <a:ext cx="5292539" cy="2686685"/>
           </a:xfrm>
           <a:prstGeom prst="rect">
             <a:avLst/>
@@ -21360,10 +21448,10 @@
       </p:pic>
       <p:pic>
         <p:nvPicPr>
-          <p:cNvPr id="11" name="Picture 10">
+          <p:cNvPr id="13" name="Picture 12">
             <a:extLst>
               <a:ext uri="{FF2B5EF4-FFF2-40B4-BE49-F238E27FC236}">
-                <a16:creationId xmlns:a16="http://schemas.microsoft.com/office/drawing/2014/main" id="{C1B0C6D8-89CB-A205-CDFC-9B7AA4058CD0}"/>
+                <a16:creationId xmlns:a16="http://schemas.microsoft.com/office/drawing/2014/main" id="{909FF48F-CED8-DBEB-9B3C-AE89FB7B2295}"/>
               </a:ext>
             </a:extLst>
           </p:cNvPr>
@@ -21380,8 +21468,8 @@
         </p:blipFill>
         <p:spPr>
           <a:xfrm>
-            <a:off x="609600" y="4652318"/>
-            <a:ext cx="4073544" cy="1945781"/>
+            <a:off x="1164302" y="4483942"/>
+            <a:ext cx="4214457" cy="2031325"/>
           </a:xfrm>
           <a:prstGeom prst="rect">
             <a:avLst/>
@@ -21396,10 +21484,10 @@
       </p:pic>
       <p:pic>
         <p:nvPicPr>
-          <p:cNvPr id="16" name="Picture 15">
+          <p:cNvPr id="24" name="Picture 23">
             <a:extLst>
               <a:ext uri="{FF2B5EF4-FFF2-40B4-BE49-F238E27FC236}">
-                <a16:creationId xmlns:a16="http://schemas.microsoft.com/office/drawing/2014/main" id="{B7667F01-A309-14B3-6009-732618CFAEB1}"/>
+                <a16:creationId xmlns:a16="http://schemas.microsoft.com/office/drawing/2014/main" id="{FF6916B7-18EC-378D-B63E-A62C2B29BD56}"/>
               </a:ext>
             </a:extLst>
           </p:cNvPr>
@@ -21416,44 +21504,8 @@
         </p:blipFill>
         <p:spPr>
           <a:xfrm>
-            <a:off x="5992591" y="1577785"/>
-            <a:ext cx="5589810" cy="2772546"/>
-          </a:xfrm>
-          <a:prstGeom prst="rect">
-            <a:avLst/>
-          </a:prstGeom>
-          <a:ln>
-            <a:noFill/>
-          </a:ln>
-          <a:effectLst>
-            <a:softEdge rad="112500"/>
-          </a:effectLst>
-        </p:spPr>
-      </p:pic>
-      <p:pic>
-        <p:nvPicPr>
-          <p:cNvPr id="7" name="Picture 6">
-            <a:extLst>
-              <a:ext uri="{FF2B5EF4-FFF2-40B4-BE49-F238E27FC236}">
-                <a16:creationId xmlns:a16="http://schemas.microsoft.com/office/drawing/2014/main" id="{B799462F-A4F7-3D43-AE01-D02AF21C2CC4}"/>
-              </a:ext>
-            </a:extLst>
-          </p:cNvPr>
-          <p:cNvPicPr>
-            <a:picLocks noChangeAspect="1"/>
-          </p:cNvPicPr>
-          <p:nvPr/>
-        </p:nvPicPr>
-        <p:blipFill>
-          <a:blip r:embed="rId5"/>
-          <a:stretch>
-            <a:fillRect/>
-          </a:stretch>
-        </p:blipFill>
-        <p:spPr>
-          <a:xfrm>
-            <a:off x="4683144" y="4483943"/>
-            <a:ext cx="4906910" cy="2114156"/>
+            <a:off x="6357599" y="1675048"/>
+            <a:ext cx="5224799" cy="2686685"/>
           </a:xfrm>
           <a:prstGeom prst="rect">
             <a:avLst/>
@@ -21470,479 +21522,6 @@
     <p:extLst>
       <p:ext uri="{BB962C8B-B14F-4D97-AF65-F5344CB8AC3E}">
         <p14:creationId xmlns:p14="http://schemas.microsoft.com/office/powerpoint/2010/main" val="634262476"/>
-      </p:ext>
-    </p:extLst>
-  </p:cSld>
-  <p:clrMapOvr>
-    <a:masterClrMapping/>
-  </p:clrMapOvr>
-</p:sld>
-</file>
-
-<file path=ppt/slides/slide24.xml><?xml version="1.0" encoding="utf-8"?>
-<p:sld xmlns:a="http://schemas.openxmlformats.org/drawingml/2006/main" xmlns:r="http://schemas.openxmlformats.org/officeDocument/2006/relationships" xmlns:p="http://schemas.openxmlformats.org/presentationml/2006/main">
-  <p:cSld>
-    <p:spTree>
-      <p:nvGrpSpPr>
-        <p:cNvPr id="1" name=""/>
-        <p:cNvGrpSpPr/>
-        <p:nvPr/>
-      </p:nvGrpSpPr>
-      <p:grpSpPr>
-        <a:xfrm>
-          <a:off x="0" y="0"/>
-          <a:ext cx="0" cy="0"/>
-          <a:chOff x="0" y="0"/>
-          <a:chExt cx="0" cy="0"/>
-        </a:xfrm>
-      </p:grpSpPr>
-      <p:sp>
-        <p:nvSpPr>
-          <p:cNvPr id="7" name="Content Placeholder 6">
-            <a:extLst>
-              <a:ext uri="{FF2B5EF4-FFF2-40B4-BE49-F238E27FC236}">
-                <a16:creationId xmlns:a16="http://schemas.microsoft.com/office/drawing/2014/main" id="{7379714B-1FF3-323E-6749-EA95E8C454BF}"/>
-              </a:ext>
-            </a:extLst>
-          </p:cNvPr>
-          <p:cNvSpPr>
-            <a:spLocks noGrp="1"/>
-          </p:cNvSpPr>
-          <p:nvPr>
-            <p:ph idx="1"/>
-          </p:nvPr>
-        </p:nvSpPr>
-        <p:spPr>
-          <a:xfrm>
-            <a:off x="609600" y="2909421"/>
-            <a:ext cx="5235615" cy="3647638"/>
-          </a:xfrm>
-          <a:ln>
-            <a:solidFill>
-              <a:schemeClr val="tx1"/>
-            </a:solidFill>
-          </a:ln>
-        </p:spPr>
-        <p:txBody>
-          <a:bodyPr anchor="ctr">
-            <a:noAutofit/>
-          </a:bodyPr>
-          <a:lstStyle/>
-          <a:p>
-            <a:pPr marL="0" indent="0" algn="ctr">
-              <a:buNone/>
-            </a:pPr>
-            <a:r>
-              <a:rPr lang="en-GB" sz="1800" b="1" dirty="0"/>
-              <a:t>Background</a:t>
-            </a:r>
-          </a:p>
-          <a:p>
-            <a:r>
-              <a:rPr lang="en-GB" sz="1800" dirty="0"/>
-              <a:t>Enrollment</a:t>
-            </a:r>
-          </a:p>
-          <a:p>
-            <a:r>
-              <a:rPr lang="en-GB" sz="1800" dirty="0"/>
-              <a:t>Disease category (e.g., neoplasms) </a:t>
-            </a:r>
-            <a:r>
-              <a:rPr lang="en-GB" sz="1800" dirty="0">
-                <a:sym typeface="Wingdings" panose="05000000000000000000" pitchFamily="2" charset="2"/>
-              </a:rPr>
-              <a:t> Affects enrollment</a:t>
-            </a:r>
-            <a:endParaRPr lang="en-GB" sz="1800" dirty="0"/>
-          </a:p>
-          <a:p>
-            <a:r>
-              <a:rPr lang="en-GB" sz="1800" dirty="0"/>
-              <a:t>Number of facilities </a:t>
-            </a:r>
-            <a:r>
-              <a:rPr lang="en-GB" sz="1800" dirty="0">
-                <a:sym typeface="Wingdings" panose="05000000000000000000" pitchFamily="2" charset="2"/>
-              </a:rPr>
-              <a:t> Also, affects enrollment</a:t>
-            </a:r>
-            <a:endParaRPr lang="en-GB" sz="1800" dirty="0"/>
-          </a:p>
-          <a:p>
-            <a:r>
-              <a:rPr lang="en-GB" sz="1800" dirty="0"/>
-              <a:t>Healthy Volunteers</a:t>
-            </a:r>
-          </a:p>
-          <a:p>
-            <a:r>
-              <a:rPr lang="en-GB" sz="1800" dirty="0"/>
-              <a:t>Number of Adverse Events</a:t>
-            </a:r>
-          </a:p>
-          <a:p>
-            <a:r>
-              <a:rPr lang="en-GB" sz="1800" dirty="0"/>
-              <a:t>Funder type (e.g., non-Industry)</a:t>
-            </a:r>
-          </a:p>
-          <a:p>
-            <a:r>
-              <a:rPr lang="en-GB" sz="1800" dirty="0"/>
-              <a:t>Other (e., Administrative, supplies etc.)</a:t>
-            </a:r>
-          </a:p>
-        </p:txBody>
-      </p:sp>
-      <p:sp>
-        <p:nvSpPr>
-          <p:cNvPr id="3" name="Title 1">
-            <a:extLst>
-              <a:ext uri="{FF2B5EF4-FFF2-40B4-BE49-F238E27FC236}">
-                <a16:creationId xmlns:a16="http://schemas.microsoft.com/office/drawing/2014/main" id="{79AA6C9D-2E20-3FDC-E624-B09367AC8F9F}"/>
-              </a:ext>
-            </a:extLst>
-          </p:cNvPr>
-          <p:cNvSpPr>
-            <a:spLocks noGrp="1"/>
-          </p:cNvSpPr>
-          <p:nvPr>
-            <p:ph type="title"/>
-          </p:nvPr>
-        </p:nvSpPr>
-        <p:spPr>
-          <a:xfrm>
-            <a:off x="609600" y="439837"/>
-            <a:ext cx="10972800" cy="457200"/>
-          </a:xfrm>
-          <a:ln>
-            <a:solidFill>
-              <a:schemeClr val="tx1"/>
-            </a:solidFill>
-          </a:ln>
-        </p:spPr>
-        <p:txBody>
-          <a:bodyPr>
-            <a:noAutofit/>
-          </a:bodyPr>
-          <a:lstStyle/>
-          <a:p>
-            <a:pPr algn="ctr"/>
-            <a:r>
-              <a:rPr lang="en-GB" sz="3200" b="1" dirty="0"/>
-              <a:t>Background Research &amp; Summary</a:t>
-            </a:r>
-          </a:p>
-        </p:txBody>
-      </p:sp>
-      <p:sp>
-        <p:nvSpPr>
-          <p:cNvPr id="2" name="TextBox 1">
-            <a:extLst>
-              <a:ext uri="{FF2B5EF4-FFF2-40B4-BE49-F238E27FC236}">
-                <a16:creationId xmlns:a16="http://schemas.microsoft.com/office/drawing/2014/main" id="{608B01A7-91F3-6875-4CD6-3BD2CA6131EB}"/>
-              </a:ext>
-            </a:extLst>
-          </p:cNvPr>
-          <p:cNvSpPr txBox="1"/>
-          <p:nvPr/>
-        </p:nvSpPr>
-        <p:spPr>
-          <a:xfrm>
-            <a:off x="609600" y="1070753"/>
-            <a:ext cx="10972800" cy="400110"/>
-          </a:xfrm>
-          <a:prstGeom prst="rect">
-            <a:avLst/>
-          </a:prstGeom>
-          <a:noFill/>
-        </p:spPr>
-        <p:txBody>
-          <a:bodyPr wrap="square" rtlCol="0" anchor="ctr">
-            <a:spAutoFit/>
-          </a:bodyPr>
-          <a:lstStyle/>
-          <a:p>
-            <a:pPr algn="ctr"/>
-            <a:r>
-              <a:rPr lang="en-US" sz="2000" dirty="0"/>
-              <a:t>Literature Alignment</a:t>
-            </a:r>
-          </a:p>
-        </p:txBody>
-      </p:sp>
-      <p:sp>
-        <p:nvSpPr>
-          <p:cNvPr id="4" name="Content Placeholder 6">
-            <a:extLst>
-              <a:ext uri="{FF2B5EF4-FFF2-40B4-BE49-F238E27FC236}">
-                <a16:creationId xmlns:a16="http://schemas.microsoft.com/office/drawing/2014/main" id="{385A9581-03F7-49F9-A93D-E221AD38613E}"/>
-              </a:ext>
-            </a:extLst>
-          </p:cNvPr>
-          <p:cNvSpPr txBox="1">
-            <a:spLocks/>
-          </p:cNvSpPr>
-          <p:nvPr/>
-        </p:nvSpPr>
-        <p:spPr>
-          <a:xfrm>
-            <a:off x="6346787" y="2909421"/>
-            <a:ext cx="5235615" cy="3647638"/>
-          </a:xfrm>
-          <a:prstGeom prst="rect">
-            <a:avLst/>
-          </a:prstGeom>
-          <a:ln>
-            <a:solidFill>
-              <a:schemeClr val="tx1"/>
-            </a:solidFill>
-          </a:ln>
-        </p:spPr>
-        <p:txBody>
-          <a:bodyPr vert="horz" lIns="91440" tIns="45720" rIns="91440" bIns="45720" rtlCol="0" anchor="t">
-            <a:noAutofit/>
-          </a:bodyPr>
-          <a:lstStyle>
-            <a:lvl1pPr marL="228600" indent="-228600" algn="l" defTabSz="914400" rtl="0" eaLnBrk="1" latinLnBrk="0" hangingPunct="1">
-              <a:lnSpc>
-                <a:spcPct val="90000"/>
-              </a:lnSpc>
-              <a:spcBef>
-                <a:spcPts val="1000"/>
-              </a:spcBef>
-              <a:buFont typeface="Arial" panose="020B0604020202020204" pitchFamily="34" charset="0"/>
-              <a:buChar char="•"/>
-              <a:defRPr sz="2800" kern="1200">
-                <a:solidFill>
-                  <a:schemeClr val="tx1"/>
-                </a:solidFill>
-                <a:latin typeface="+mn-lt"/>
-                <a:ea typeface="+mn-ea"/>
-                <a:cs typeface="+mn-cs"/>
-              </a:defRPr>
-            </a:lvl1pPr>
-            <a:lvl2pPr marL="685800" indent="-228600" algn="l" defTabSz="914400" rtl="0" eaLnBrk="1" latinLnBrk="0" hangingPunct="1">
-              <a:lnSpc>
-                <a:spcPct val="90000"/>
-              </a:lnSpc>
-              <a:spcBef>
-                <a:spcPts val="500"/>
-              </a:spcBef>
-              <a:buFont typeface="Arial" panose="020B0604020202020204" pitchFamily="34" charset="0"/>
-              <a:buChar char="•"/>
-              <a:defRPr sz="2400" kern="1200">
-                <a:solidFill>
-                  <a:schemeClr val="tx1"/>
-                </a:solidFill>
-                <a:latin typeface="+mn-lt"/>
-                <a:ea typeface="+mn-ea"/>
-                <a:cs typeface="+mn-cs"/>
-              </a:defRPr>
-            </a:lvl2pPr>
-            <a:lvl3pPr marL="1143000" indent="-228600" algn="l" defTabSz="914400" rtl="0" eaLnBrk="1" latinLnBrk="0" hangingPunct="1">
-              <a:lnSpc>
-                <a:spcPct val="90000"/>
-              </a:lnSpc>
-              <a:spcBef>
-                <a:spcPts val="500"/>
-              </a:spcBef>
-              <a:buFont typeface="Arial" panose="020B0604020202020204" pitchFamily="34" charset="0"/>
-              <a:buChar char="•"/>
-              <a:defRPr sz="2000" kern="1200">
-                <a:solidFill>
-                  <a:schemeClr val="tx1"/>
-                </a:solidFill>
-                <a:latin typeface="+mn-lt"/>
-                <a:ea typeface="+mn-ea"/>
-                <a:cs typeface="+mn-cs"/>
-              </a:defRPr>
-            </a:lvl3pPr>
-            <a:lvl4pPr marL="1600200" indent="-228600" algn="l" defTabSz="914400" rtl="0" eaLnBrk="1" latinLnBrk="0" hangingPunct="1">
-              <a:lnSpc>
-                <a:spcPct val="90000"/>
-              </a:lnSpc>
-              <a:spcBef>
-                <a:spcPts val="500"/>
-              </a:spcBef>
-              <a:buFont typeface="Arial" panose="020B0604020202020204" pitchFamily="34" charset="0"/>
-              <a:buChar char="•"/>
-              <a:defRPr sz="1800" kern="1200">
-                <a:solidFill>
-                  <a:schemeClr val="tx1"/>
-                </a:solidFill>
-                <a:latin typeface="+mn-lt"/>
-                <a:ea typeface="+mn-ea"/>
-                <a:cs typeface="+mn-cs"/>
-              </a:defRPr>
-            </a:lvl4pPr>
-            <a:lvl5pPr marL="2057400" indent="-228600" algn="l" defTabSz="914400" rtl="0" eaLnBrk="1" latinLnBrk="0" hangingPunct="1">
-              <a:lnSpc>
-                <a:spcPct val="90000"/>
-              </a:lnSpc>
-              <a:spcBef>
-                <a:spcPts val="500"/>
-              </a:spcBef>
-              <a:buFont typeface="Arial" panose="020B0604020202020204" pitchFamily="34" charset="0"/>
-              <a:buChar char="•"/>
-              <a:defRPr sz="1800" kern="1200">
-                <a:solidFill>
-                  <a:schemeClr val="tx1"/>
-                </a:solidFill>
-                <a:latin typeface="+mn-lt"/>
-                <a:ea typeface="+mn-ea"/>
-                <a:cs typeface="+mn-cs"/>
-              </a:defRPr>
-            </a:lvl5pPr>
-            <a:lvl6pPr marL="2514600" indent="-228600" algn="l" defTabSz="914400" rtl="0" eaLnBrk="1" latinLnBrk="0" hangingPunct="1">
-              <a:lnSpc>
-                <a:spcPct val="90000"/>
-              </a:lnSpc>
-              <a:spcBef>
-                <a:spcPts val="500"/>
-              </a:spcBef>
-              <a:buFont typeface="Arial" panose="020B0604020202020204" pitchFamily="34" charset="0"/>
-              <a:buChar char="•"/>
-              <a:defRPr sz="1800" kern="1200">
-                <a:solidFill>
-                  <a:schemeClr val="tx1"/>
-                </a:solidFill>
-                <a:latin typeface="+mn-lt"/>
-                <a:ea typeface="+mn-ea"/>
-                <a:cs typeface="+mn-cs"/>
-              </a:defRPr>
-            </a:lvl6pPr>
-            <a:lvl7pPr marL="2971800" indent="-228600" algn="l" defTabSz="914400" rtl="0" eaLnBrk="1" latinLnBrk="0" hangingPunct="1">
-              <a:lnSpc>
-                <a:spcPct val="90000"/>
-              </a:lnSpc>
-              <a:spcBef>
-                <a:spcPts val="500"/>
-              </a:spcBef>
-              <a:buFont typeface="Arial" panose="020B0604020202020204" pitchFamily="34" charset="0"/>
-              <a:buChar char="•"/>
-              <a:defRPr sz="1800" kern="1200">
-                <a:solidFill>
-                  <a:schemeClr val="tx1"/>
-                </a:solidFill>
-                <a:latin typeface="+mn-lt"/>
-                <a:ea typeface="+mn-ea"/>
-                <a:cs typeface="+mn-cs"/>
-              </a:defRPr>
-            </a:lvl7pPr>
-            <a:lvl8pPr marL="3429000" indent="-228600" algn="l" defTabSz="914400" rtl="0" eaLnBrk="1" latinLnBrk="0" hangingPunct="1">
-              <a:lnSpc>
-                <a:spcPct val="90000"/>
-              </a:lnSpc>
-              <a:spcBef>
-                <a:spcPts val="500"/>
-              </a:spcBef>
-              <a:buFont typeface="Arial" panose="020B0604020202020204" pitchFamily="34" charset="0"/>
-              <a:buChar char="•"/>
-              <a:defRPr sz="1800" kern="1200">
-                <a:solidFill>
-                  <a:schemeClr val="tx1"/>
-                </a:solidFill>
-                <a:latin typeface="+mn-lt"/>
-                <a:ea typeface="+mn-ea"/>
-                <a:cs typeface="+mn-cs"/>
-              </a:defRPr>
-            </a:lvl8pPr>
-            <a:lvl9pPr marL="3886200" indent="-228600" algn="l" defTabSz="914400" rtl="0" eaLnBrk="1" latinLnBrk="0" hangingPunct="1">
-              <a:lnSpc>
-                <a:spcPct val="90000"/>
-              </a:lnSpc>
-              <a:spcBef>
-                <a:spcPts val="500"/>
-              </a:spcBef>
-              <a:buFont typeface="Arial" panose="020B0604020202020204" pitchFamily="34" charset="0"/>
-              <a:buChar char="•"/>
-              <a:defRPr sz="1800" kern="1200">
-                <a:solidFill>
-                  <a:schemeClr val="tx1"/>
-                </a:solidFill>
-                <a:latin typeface="+mn-lt"/>
-                <a:ea typeface="+mn-ea"/>
-                <a:cs typeface="+mn-cs"/>
-              </a:defRPr>
-            </a:lvl9pPr>
-          </a:lstStyle>
-          <a:p>
-            <a:pPr marL="0" indent="0" algn="ctr">
-              <a:buNone/>
-            </a:pPr>
-            <a:endParaRPr lang="en-GB" sz="2000" b="1" dirty="0"/>
-          </a:p>
-          <a:p>
-            <a:pPr marL="0" indent="0" algn="ctr">
-              <a:buNone/>
-            </a:pPr>
-            <a:r>
-              <a:rPr lang="en-GB" sz="2000" b="1" dirty="0"/>
-              <a:t>Features ~ Phase</a:t>
-            </a:r>
-          </a:p>
-          <a:p>
-            <a:r>
-              <a:rPr lang="en-GB" sz="2000" dirty="0"/>
-              <a:t>Phase 1: New treatment ~ Health status </a:t>
-            </a:r>
-          </a:p>
-          <a:p>
-            <a:r>
-              <a:rPr lang="en-GB" sz="2000" dirty="0"/>
-              <a:t>Phase 2: Adverse, Therapeutic</a:t>
-            </a:r>
-          </a:p>
-          <a:p>
-            <a:r>
-              <a:rPr lang="en-GB" sz="2000" dirty="0"/>
-              <a:t>Phase 3: Design, Treatment comparison</a:t>
-            </a:r>
-          </a:p>
-          <a:p>
-            <a:r>
-              <a:rPr lang="en-GB" sz="2000" dirty="0"/>
-              <a:t>Phase 4: Approved Treatment~ Interv. Model</a:t>
-            </a:r>
-          </a:p>
-        </p:txBody>
-      </p:sp>
-      <p:pic>
-        <p:nvPicPr>
-          <p:cNvPr id="6" name="Picture 5">
-            <a:extLst>
-              <a:ext uri="{FF2B5EF4-FFF2-40B4-BE49-F238E27FC236}">
-                <a16:creationId xmlns:a16="http://schemas.microsoft.com/office/drawing/2014/main" id="{8EC81A22-9F3E-3963-5EB9-300275B01289}"/>
-              </a:ext>
-            </a:extLst>
-          </p:cNvPr>
-          <p:cNvPicPr>
-            <a:picLocks noChangeAspect="1"/>
-          </p:cNvPicPr>
-          <p:nvPr/>
-        </p:nvPicPr>
-        <p:blipFill>
-          <a:blip r:embed="rId2"/>
-          <a:stretch>
-            <a:fillRect/>
-          </a:stretch>
-        </p:blipFill>
-        <p:spPr>
-          <a:xfrm>
-            <a:off x="2468577" y="1695887"/>
-            <a:ext cx="7254845" cy="988509"/>
-          </a:xfrm>
-          <a:prstGeom prst="rect">
-            <a:avLst/>
-          </a:prstGeom>
-        </p:spPr>
-      </p:pic>
-    </p:spTree>
-    <p:extLst>
-      <p:ext uri="{BB962C8B-B14F-4D97-AF65-F5344CB8AC3E}">
-        <p14:creationId xmlns:p14="http://schemas.microsoft.com/office/powerpoint/2010/main" val="379656155"/>
       </p:ext>
     </p:extLst>
   </p:cSld>
@@ -22056,6 +21635,269 @@
           <p:cNvPr id="2" name="Title 1">
             <a:extLst>
               <a:ext uri="{FF2B5EF4-FFF2-40B4-BE49-F238E27FC236}">
+                <a16:creationId xmlns:a16="http://schemas.microsoft.com/office/drawing/2014/main" id="{691FB1F2-9B2C-952D-6552-CDCF58BA3473}"/>
+              </a:ext>
+            </a:extLst>
+          </p:cNvPr>
+          <p:cNvSpPr>
+            <a:spLocks noGrp="1"/>
+          </p:cNvSpPr>
+          <p:nvPr>
+            <p:ph type="title"/>
+          </p:nvPr>
+        </p:nvSpPr>
+        <p:spPr>
+          <a:xfrm>
+            <a:off x="609600" y="358800"/>
+            <a:ext cx="10972800" cy="457200"/>
+          </a:xfrm>
+          <a:ln>
+            <a:solidFill>
+              <a:schemeClr val="tx1"/>
+            </a:solidFill>
+          </a:ln>
+        </p:spPr>
+        <p:txBody>
+          <a:bodyPr>
+            <a:noAutofit/>
+          </a:bodyPr>
+          <a:lstStyle/>
+          <a:p>
+            <a:pPr algn="ctr"/>
+            <a:r>
+              <a:rPr lang="en-US" sz="3000" b="1" dirty="0"/>
+              <a:t>Future Research</a:t>
+            </a:r>
+            <a:endParaRPr lang="en-GB" sz="3000" b="1" dirty="0"/>
+          </a:p>
+        </p:txBody>
+      </p:sp>
+      <p:sp>
+        <p:nvSpPr>
+          <p:cNvPr id="3" name="Content Placeholder 2">
+            <a:extLst>
+              <a:ext uri="{FF2B5EF4-FFF2-40B4-BE49-F238E27FC236}">
+                <a16:creationId xmlns:a16="http://schemas.microsoft.com/office/drawing/2014/main" id="{F231BD6F-33DE-5ED7-7A3C-3B8D40A5DEF5}"/>
+              </a:ext>
+            </a:extLst>
+          </p:cNvPr>
+          <p:cNvSpPr>
+            <a:spLocks noGrp="1"/>
+          </p:cNvSpPr>
+          <p:nvPr>
+            <p:ph sz="half" idx="1"/>
+          </p:nvPr>
+        </p:nvSpPr>
+        <p:spPr>
+          <a:xfrm>
+            <a:off x="609598" y="995424"/>
+            <a:ext cx="10972799" cy="4502552"/>
+          </a:xfrm>
+          <a:ln>
+            <a:solidFill>
+              <a:schemeClr val="tx1"/>
+            </a:solidFill>
+          </a:ln>
+        </p:spPr>
+        <p:txBody>
+          <a:bodyPr anchor="ctr">
+            <a:noAutofit/>
+          </a:bodyPr>
+          <a:lstStyle/>
+          <a:p>
+            <a:r>
+              <a:rPr lang="en-US" sz="2000" b="1" dirty="0"/>
+              <a:t>Underlying factors </a:t>
+            </a:r>
+            <a:r>
+              <a:rPr lang="en-US" sz="2000" b="1" dirty="0">
+                <a:sym typeface="Wingdings" panose="05000000000000000000" pitchFamily="2" charset="2"/>
+              </a:rPr>
+              <a:t> E</a:t>
+            </a:r>
+            <a:r>
+              <a:rPr lang="en-US" sz="2000" b="1" dirty="0"/>
+              <a:t>arly termination</a:t>
+            </a:r>
+          </a:p>
+          <a:p>
+            <a:pPr lvl="1"/>
+            <a:r>
+              <a:rPr lang="en-US" sz="2000" dirty="0"/>
+              <a:t>Interactions (Enrollment x Other Features, Funder x Intervention etc.) </a:t>
+            </a:r>
+          </a:p>
+          <a:p>
+            <a:pPr lvl="1"/>
+            <a:r>
+              <a:rPr lang="en-US" sz="2000" dirty="0"/>
+              <a:t>Enrollment </a:t>
+            </a:r>
+          </a:p>
+          <a:p>
+            <a:pPr lvl="1"/>
+            <a:r>
+              <a:rPr lang="en-US" sz="2000" dirty="0"/>
+              <a:t>Conditions</a:t>
+            </a:r>
+          </a:p>
+          <a:p>
+            <a:pPr lvl="1"/>
+            <a:r>
+              <a:rPr lang="en-US" sz="2000" dirty="0"/>
+              <a:t>Phase ~ Features </a:t>
+            </a:r>
+          </a:p>
+          <a:p>
+            <a:pPr lvl="1"/>
+            <a:r>
+              <a:rPr lang="en-US" sz="2000" dirty="0"/>
+              <a:t>Study Status: Withdrawn, Terminated, Suspended etc. </a:t>
+            </a:r>
+            <a:r>
+              <a:rPr lang="en-US" sz="2000" dirty="0">
+                <a:sym typeface="Wingdings" panose="05000000000000000000" pitchFamily="2" charset="2"/>
+              </a:rPr>
+              <a:t> S</a:t>
+            </a:r>
+            <a:r>
+              <a:rPr lang="en-US" sz="2000" dirty="0"/>
+              <a:t>eparately | Combined</a:t>
+            </a:r>
+          </a:p>
+          <a:p>
+            <a:r>
+              <a:rPr lang="en-US" sz="2000" b="1" dirty="0"/>
+              <a:t>Alternative Models of best performing Boosting method’s</a:t>
+            </a:r>
+          </a:p>
+          <a:p>
+            <a:pPr lvl="1"/>
+            <a:r>
+              <a:rPr lang="en-US" sz="2000" dirty="0"/>
+              <a:t>Interpretability</a:t>
+            </a:r>
+            <a:r>
+              <a:rPr lang="en-US" sz="2000" b="1" dirty="0"/>
+              <a:t> </a:t>
+            </a:r>
+          </a:p>
+          <a:p>
+            <a:r>
+              <a:rPr lang="en-US" sz="2000" b="1" dirty="0"/>
+              <a:t>Later years trials registrations</a:t>
+            </a:r>
+            <a:r>
+              <a:rPr lang="en-US" sz="2000" dirty="0"/>
+              <a:t> : Less optional field completion </a:t>
+            </a:r>
+            <a:r>
+              <a:rPr lang="en-US" sz="2000" dirty="0">
+                <a:sym typeface="Wingdings" panose="05000000000000000000" pitchFamily="2" charset="2"/>
+              </a:rPr>
+              <a:t> Accuracy</a:t>
+            </a:r>
+            <a:endParaRPr lang="en-US" sz="2000" b="1" dirty="0"/>
+          </a:p>
+          <a:p>
+            <a:r>
+              <a:rPr lang="en-US" sz="2000" b="1" dirty="0"/>
+              <a:t>Mapping Key findings</a:t>
+            </a:r>
+          </a:p>
+          <a:p>
+            <a:pPr lvl="1"/>
+            <a:r>
+              <a:rPr lang="en-US" sz="2000" dirty="0"/>
+              <a:t>Literature alignment, Registries</a:t>
+            </a:r>
+          </a:p>
+        </p:txBody>
+      </p:sp>
+      <p:sp>
+        <p:nvSpPr>
+          <p:cNvPr id="5" name="TextBox 4">
+            <a:extLst>
+              <a:ext uri="{FF2B5EF4-FFF2-40B4-BE49-F238E27FC236}">
+                <a16:creationId xmlns:a16="http://schemas.microsoft.com/office/drawing/2014/main" id="{2F2D7F9C-8C80-0702-9D66-F91BA0E31612}"/>
+              </a:ext>
+            </a:extLst>
+          </p:cNvPr>
+          <p:cNvSpPr txBox="1"/>
+          <p:nvPr/>
+        </p:nvSpPr>
+        <p:spPr>
+          <a:xfrm>
+            <a:off x="609598" y="5797889"/>
+            <a:ext cx="10972799" cy="707886"/>
+          </a:xfrm>
+          <a:prstGeom prst="rect">
+            <a:avLst/>
+          </a:prstGeom>
+          <a:noFill/>
+          <a:ln>
+            <a:solidFill>
+              <a:schemeClr val="tx1"/>
+            </a:solidFill>
+          </a:ln>
+        </p:spPr>
+        <p:txBody>
+          <a:bodyPr wrap="square" rtlCol="0">
+            <a:spAutoFit/>
+          </a:bodyPr>
+          <a:lstStyle/>
+          <a:p>
+            <a:pPr algn="ctr"/>
+            <a:r>
+              <a:rPr lang="en-US" sz="2000" dirty="0"/>
+              <a:t>Establish well performed models/methods for real world health data</a:t>
+            </a:r>
+          </a:p>
+          <a:p>
+            <a:pPr algn="ctr"/>
+            <a:r>
+              <a:rPr lang="en-US" sz="2000" dirty="0"/>
+              <a:t>and analysis of corresponding problems</a:t>
+            </a:r>
+            <a:endParaRPr lang="en-GB" sz="2000" b="1" dirty="0"/>
+          </a:p>
+        </p:txBody>
+      </p:sp>
+    </p:spTree>
+    <p:extLst>
+      <p:ext uri="{BB962C8B-B14F-4D97-AF65-F5344CB8AC3E}">
+        <p14:creationId xmlns:p14="http://schemas.microsoft.com/office/powerpoint/2010/main" val="1725771169"/>
+      </p:ext>
+    </p:extLst>
+  </p:cSld>
+  <p:clrMapOvr>
+    <a:masterClrMapping/>
+  </p:clrMapOvr>
+</p:sld>
+</file>
+
+<file path=ppt/slides/slide27.xml><?xml version="1.0" encoding="utf-8"?>
+<p:sld xmlns:a="http://schemas.openxmlformats.org/drawingml/2006/main" xmlns:r="http://schemas.openxmlformats.org/officeDocument/2006/relationships" xmlns:p="http://schemas.openxmlformats.org/presentationml/2006/main">
+  <p:cSld>
+    <p:spTree>
+      <p:nvGrpSpPr>
+        <p:cNvPr id="1" name=""/>
+        <p:cNvGrpSpPr/>
+        <p:nvPr/>
+      </p:nvGrpSpPr>
+      <p:grpSpPr>
+        <a:xfrm>
+          <a:off x="0" y="0"/>
+          <a:ext cx="0" cy="0"/>
+          <a:chOff x="0" y="0"/>
+          <a:chExt cx="0" cy="0"/>
+        </a:xfrm>
+      </p:grpSpPr>
+      <p:sp>
+        <p:nvSpPr>
+          <p:cNvPr id="2" name="Title 1">
+            <a:extLst>
+              <a:ext uri="{FF2B5EF4-FFF2-40B4-BE49-F238E27FC236}">
                 <a16:creationId xmlns:a16="http://schemas.microsoft.com/office/drawing/2014/main" id="{FB03F8E8-2E98-47AD-EA90-7034E59DE430}"/>
               </a:ext>
             </a:extLst>
@@ -22489,269 +22331,6 @@
     <p:extLst>
       <p:ext uri="{BB962C8B-B14F-4D97-AF65-F5344CB8AC3E}">
         <p14:creationId xmlns:p14="http://schemas.microsoft.com/office/powerpoint/2010/main" val="2946716891"/>
-      </p:ext>
-    </p:extLst>
-  </p:cSld>
-  <p:clrMapOvr>
-    <a:masterClrMapping/>
-  </p:clrMapOvr>
-</p:sld>
-</file>
-
-<file path=ppt/slides/slide27.xml><?xml version="1.0" encoding="utf-8"?>
-<p:sld xmlns:a="http://schemas.openxmlformats.org/drawingml/2006/main" xmlns:r="http://schemas.openxmlformats.org/officeDocument/2006/relationships" xmlns:p="http://schemas.openxmlformats.org/presentationml/2006/main">
-  <p:cSld>
-    <p:spTree>
-      <p:nvGrpSpPr>
-        <p:cNvPr id="1" name=""/>
-        <p:cNvGrpSpPr/>
-        <p:nvPr/>
-      </p:nvGrpSpPr>
-      <p:grpSpPr>
-        <a:xfrm>
-          <a:off x="0" y="0"/>
-          <a:ext cx="0" cy="0"/>
-          <a:chOff x="0" y="0"/>
-          <a:chExt cx="0" cy="0"/>
-        </a:xfrm>
-      </p:grpSpPr>
-      <p:sp>
-        <p:nvSpPr>
-          <p:cNvPr id="2" name="Title 1">
-            <a:extLst>
-              <a:ext uri="{FF2B5EF4-FFF2-40B4-BE49-F238E27FC236}">
-                <a16:creationId xmlns:a16="http://schemas.microsoft.com/office/drawing/2014/main" id="{691FB1F2-9B2C-952D-6552-CDCF58BA3473}"/>
-              </a:ext>
-            </a:extLst>
-          </p:cNvPr>
-          <p:cNvSpPr>
-            <a:spLocks noGrp="1"/>
-          </p:cNvSpPr>
-          <p:nvPr>
-            <p:ph type="title"/>
-          </p:nvPr>
-        </p:nvSpPr>
-        <p:spPr>
-          <a:xfrm>
-            <a:off x="609600" y="358800"/>
-            <a:ext cx="10972800" cy="457200"/>
-          </a:xfrm>
-          <a:ln>
-            <a:solidFill>
-              <a:schemeClr val="tx1"/>
-            </a:solidFill>
-          </a:ln>
-        </p:spPr>
-        <p:txBody>
-          <a:bodyPr>
-            <a:noAutofit/>
-          </a:bodyPr>
-          <a:lstStyle/>
-          <a:p>
-            <a:pPr algn="ctr"/>
-            <a:r>
-              <a:rPr lang="en-US" sz="3000" b="1" dirty="0"/>
-              <a:t>Future Research</a:t>
-            </a:r>
-            <a:endParaRPr lang="en-GB" sz="3000" b="1" dirty="0"/>
-          </a:p>
-        </p:txBody>
-      </p:sp>
-      <p:sp>
-        <p:nvSpPr>
-          <p:cNvPr id="3" name="Content Placeholder 2">
-            <a:extLst>
-              <a:ext uri="{FF2B5EF4-FFF2-40B4-BE49-F238E27FC236}">
-                <a16:creationId xmlns:a16="http://schemas.microsoft.com/office/drawing/2014/main" id="{F231BD6F-33DE-5ED7-7A3C-3B8D40A5DEF5}"/>
-              </a:ext>
-            </a:extLst>
-          </p:cNvPr>
-          <p:cNvSpPr>
-            <a:spLocks noGrp="1"/>
-          </p:cNvSpPr>
-          <p:nvPr>
-            <p:ph sz="half" idx="1"/>
-          </p:nvPr>
-        </p:nvSpPr>
-        <p:spPr>
-          <a:xfrm>
-            <a:off x="609598" y="995424"/>
-            <a:ext cx="10972799" cy="4502552"/>
-          </a:xfrm>
-          <a:ln>
-            <a:solidFill>
-              <a:schemeClr val="tx1"/>
-            </a:solidFill>
-          </a:ln>
-        </p:spPr>
-        <p:txBody>
-          <a:bodyPr anchor="ctr">
-            <a:noAutofit/>
-          </a:bodyPr>
-          <a:lstStyle/>
-          <a:p>
-            <a:r>
-              <a:rPr lang="en-US" sz="2000" b="1" dirty="0"/>
-              <a:t>Underlying factors </a:t>
-            </a:r>
-            <a:r>
-              <a:rPr lang="en-US" sz="2000" b="1" dirty="0">
-                <a:sym typeface="Wingdings" panose="05000000000000000000" pitchFamily="2" charset="2"/>
-              </a:rPr>
-              <a:t> E</a:t>
-            </a:r>
-            <a:r>
-              <a:rPr lang="en-US" sz="2000" b="1" dirty="0"/>
-              <a:t>arly termination</a:t>
-            </a:r>
-          </a:p>
-          <a:p>
-            <a:pPr lvl="1"/>
-            <a:r>
-              <a:rPr lang="en-US" sz="2000" dirty="0"/>
-              <a:t>Interactions (Enrollment x Other Features, Funder x Intervention etc.) </a:t>
-            </a:r>
-          </a:p>
-          <a:p>
-            <a:pPr lvl="1"/>
-            <a:r>
-              <a:rPr lang="en-US" sz="2000" dirty="0"/>
-              <a:t>Enrollment </a:t>
-            </a:r>
-          </a:p>
-          <a:p>
-            <a:pPr lvl="1"/>
-            <a:r>
-              <a:rPr lang="en-US" sz="2000" dirty="0"/>
-              <a:t>Conditions</a:t>
-            </a:r>
-          </a:p>
-          <a:p>
-            <a:pPr lvl="1"/>
-            <a:r>
-              <a:rPr lang="en-US" sz="2000" dirty="0"/>
-              <a:t>Phase ~ Features </a:t>
-            </a:r>
-          </a:p>
-          <a:p>
-            <a:pPr lvl="1"/>
-            <a:r>
-              <a:rPr lang="en-US" sz="2000" dirty="0"/>
-              <a:t>Study Status: Withdrawn, Terminated, Suspended etc. </a:t>
-            </a:r>
-            <a:r>
-              <a:rPr lang="en-US" sz="2000" dirty="0">
-                <a:sym typeface="Wingdings" panose="05000000000000000000" pitchFamily="2" charset="2"/>
-              </a:rPr>
-              <a:t> S</a:t>
-            </a:r>
-            <a:r>
-              <a:rPr lang="en-US" sz="2000" dirty="0"/>
-              <a:t>eparately | Combined</a:t>
-            </a:r>
-          </a:p>
-          <a:p>
-            <a:r>
-              <a:rPr lang="en-US" sz="2000" b="1" dirty="0"/>
-              <a:t>Alternative Models of best performing Boosting method’s</a:t>
-            </a:r>
-          </a:p>
-          <a:p>
-            <a:pPr lvl="1"/>
-            <a:r>
-              <a:rPr lang="en-US" sz="2000" dirty="0"/>
-              <a:t>Interpretability</a:t>
-            </a:r>
-            <a:r>
-              <a:rPr lang="en-US" sz="2000" b="1" dirty="0"/>
-              <a:t> </a:t>
-            </a:r>
-          </a:p>
-          <a:p>
-            <a:r>
-              <a:rPr lang="en-US" sz="2000" b="1" dirty="0"/>
-              <a:t>Later years trials registrations</a:t>
-            </a:r>
-            <a:r>
-              <a:rPr lang="en-US" sz="2000" dirty="0"/>
-              <a:t> : Less optional field completion </a:t>
-            </a:r>
-            <a:r>
-              <a:rPr lang="en-US" sz="2000" dirty="0">
-                <a:sym typeface="Wingdings" panose="05000000000000000000" pitchFamily="2" charset="2"/>
-              </a:rPr>
-              <a:t> Accuracy</a:t>
-            </a:r>
-            <a:endParaRPr lang="en-US" sz="2000" b="1" dirty="0"/>
-          </a:p>
-          <a:p>
-            <a:r>
-              <a:rPr lang="en-US" sz="2000" b="1" dirty="0"/>
-              <a:t>Mapping Key findings</a:t>
-            </a:r>
-          </a:p>
-          <a:p>
-            <a:pPr lvl="1"/>
-            <a:r>
-              <a:rPr lang="en-US" sz="2000" dirty="0"/>
-              <a:t>Literature alignment, Registries</a:t>
-            </a:r>
-          </a:p>
-        </p:txBody>
-      </p:sp>
-      <p:sp>
-        <p:nvSpPr>
-          <p:cNvPr id="5" name="TextBox 4">
-            <a:extLst>
-              <a:ext uri="{FF2B5EF4-FFF2-40B4-BE49-F238E27FC236}">
-                <a16:creationId xmlns:a16="http://schemas.microsoft.com/office/drawing/2014/main" id="{2F2D7F9C-8C80-0702-9D66-F91BA0E31612}"/>
-              </a:ext>
-            </a:extLst>
-          </p:cNvPr>
-          <p:cNvSpPr txBox="1"/>
-          <p:nvPr/>
-        </p:nvSpPr>
-        <p:spPr>
-          <a:xfrm>
-            <a:off x="609598" y="5797889"/>
-            <a:ext cx="10972799" cy="707886"/>
-          </a:xfrm>
-          <a:prstGeom prst="rect">
-            <a:avLst/>
-          </a:prstGeom>
-          <a:noFill/>
-          <a:ln>
-            <a:solidFill>
-              <a:schemeClr val="tx1"/>
-            </a:solidFill>
-          </a:ln>
-        </p:spPr>
-        <p:txBody>
-          <a:bodyPr wrap="square" rtlCol="0">
-            <a:spAutoFit/>
-          </a:bodyPr>
-          <a:lstStyle/>
-          <a:p>
-            <a:pPr algn="ctr"/>
-            <a:r>
-              <a:rPr lang="en-US" sz="2000" dirty="0"/>
-              <a:t>Establish well performed models/methods for real world health data</a:t>
-            </a:r>
-          </a:p>
-          <a:p>
-            <a:pPr algn="ctr"/>
-            <a:r>
-              <a:rPr lang="en-US" sz="2000" dirty="0"/>
-              <a:t>and analysis of corresponding problems</a:t>
-            </a:r>
-            <a:endParaRPr lang="en-GB" sz="2000" b="1" dirty="0"/>
-          </a:p>
-        </p:txBody>
-      </p:sp>
-    </p:spTree>
-    <p:extLst>
-      <p:ext uri="{BB962C8B-B14F-4D97-AF65-F5344CB8AC3E}">
-        <p14:creationId xmlns:p14="http://schemas.microsoft.com/office/powerpoint/2010/main" val="1725771169"/>
       </p:ext>
     </p:extLst>
   </p:cSld>
@@ -23982,8 +23561,8 @@
         </p:nvSpPr>
         <p:spPr>
           <a:xfrm>
-            <a:off x="609600" y="5556590"/>
-            <a:ext cx="10972800" cy="948190"/>
+            <a:off x="609600" y="5440101"/>
+            <a:ext cx="10972800" cy="1226917"/>
           </a:xfrm>
           <a:prstGeom prst="rect">
             <a:avLst/>
@@ -24162,55 +23741,55 @@
           </a:lstStyle>
           <a:p>
             <a:r>
-              <a:rPr lang="en-GB" sz="1800" dirty="0"/>
+              <a:rPr lang="en-GB" sz="2000" dirty="0"/>
               <a:t>CTs’ characteristics  </a:t>
             </a:r>
             <a:r>
-              <a:rPr lang="en-GB" sz="1800" dirty="0">
+              <a:rPr lang="en-GB" sz="2000" dirty="0">
                 <a:sym typeface="Wingdings" panose="05000000000000000000" pitchFamily="2" charset="2"/>
               </a:rPr>
               <a:t> </a:t>
             </a:r>
             <a:r>
-              <a:rPr lang="en-GB" sz="1800" dirty="0"/>
+              <a:rPr lang="en-GB" sz="2000" dirty="0"/>
               <a:t>Registries’</a:t>
             </a:r>
             <a:r>
-              <a:rPr lang="en-GB" sz="1800" dirty="0">
+              <a:rPr lang="en-GB" sz="2000" dirty="0">
                 <a:sym typeface="Wingdings" panose="05000000000000000000" pitchFamily="2" charset="2"/>
               </a:rPr>
               <a:t> </a:t>
             </a:r>
             <a:r>
-              <a:rPr lang="en-GB" sz="1800" dirty="0"/>
+              <a:rPr lang="en-GB" sz="2000" dirty="0"/>
               <a:t>Analysis </a:t>
             </a:r>
             <a:r>
-              <a:rPr lang="en-GB" sz="1800" dirty="0">
+              <a:rPr lang="en-GB" sz="2000" dirty="0">
                 <a:sym typeface="Wingdings" panose="05000000000000000000" pitchFamily="2" charset="2"/>
               </a:rPr>
               <a:t></a:t>
             </a:r>
             <a:r>
-              <a:rPr lang="en-GB" sz="1800" dirty="0"/>
+              <a:rPr lang="en-GB" sz="2000" dirty="0"/>
               <a:t> Early termination relations </a:t>
             </a:r>
           </a:p>
           <a:p>
             <a:r>
-              <a:rPr lang="en-GB" sz="1800" dirty="0"/>
-              <a:t>Non-transparent registry </a:t>
-            </a:r>
-            <a:r>
-              <a:rPr lang="en-GB" sz="1800" dirty="0">
+              <a:rPr lang="en-GB" sz="2000" dirty="0"/>
+              <a:t>Inaccurate registry </a:t>
+            </a:r>
+            <a:r>
+              <a:rPr lang="en-GB" sz="2000" dirty="0">
                 <a:sym typeface="Wingdings" panose="05000000000000000000" pitchFamily="2" charset="2"/>
               </a:rPr>
-              <a:t> Unethical </a:t>
-            </a:r>
-          </a:p>
-          <a:p>
-            <a:r>
-              <a:rPr lang="en-GB" sz="1800" dirty="0">
+              <a:t> Researchers, Clinicians, Unethical </a:t>
+            </a:r>
+          </a:p>
+          <a:p>
+            <a:r>
+              <a:rPr lang="en-GB" sz="2000" dirty="0">
                 <a:sym typeface="Wingdings" panose="05000000000000000000" pitchFamily="2" charset="2"/>
               </a:rPr>
               <a:t>Missing, Optional, False inputs</a:t>
@@ -24455,7 +24034,7 @@
               <a:rPr lang="en-US" sz="2000" dirty="0">
                 <a:sym typeface="Wingdings" panose="05000000000000000000" pitchFamily="2" charset="2"/>
               </a:rPr>
-              <a:t>Phase 1: (21012, 73) | Phase 2: (19747, 73) | Phase 3: (13317, 73) | Phase 4: (12420, 73)</a:t>
+              <a:t>Phase 1: (21012, 54) | Phase 2: (19747, 54) | Phase 3: (13317, 54) | Phase 4: (12420, 54)</a:t>
             </a:r>
             <a:endParaRPr lang="en-GB" sz="2000" dirty="0"/>
           </a:p>
@@ -25311,6 +24890,16 @@
             </a:r>
           </a:p>
           <a:p>
+            <a:r>
+              <a:rPr lang="en-US" sz="2000" dirty="0"/>
+              <a:t>Real world data </a:t>
+            </a:r>
+            <a:r>
+              <a:rPr lang="en-US" sz="2000" dirty="0">
+                <a:sym typeface="Wingdings" panose="05000000000000000000" pitchFamily="2" charset="2"/>
+              </a:rPr>
+              <a:t> </a:t>
+            </a:r>
             <a:r>
               <a:rPr lang="en-US" sz="2000" dirty="0"/>
               <a:t>Skew data</a:t>
@@ -25876,13 +25465,15 @@
           </p:cNvPr>
           <p:cNvCxnSpPr>
             <a:cxnSpLocks/>
+            <a:stCxn id="30" idx="2"/>
+            <a:endCxn id="4" idx="0"/>
           </p:cNvCxnSpPr>
           <p:nvPr/>
         </p:nvCxnSpPr>
         <p:spPr>
-          <a:xfrm>
-            <a:off x="8847948" y="3343486"/>
-            <a:ext cx="1100650" cy="1202993"/>
+          <a:xfrm flipH="1">
+            <a:off x="10725837" y="3798959"/>
+            <a:ext cx="17661" cy="519920"/>
           </a:xfrm>
           <a:prstGeom prst="straightConnector1">
             <a:avLst/>
@@ -27423,7 +27014,7 @@
                   <a:schemeClr val="bg1"/>
                 </a:solidFill>
               </a:rPr>
-              <a:t>Classification Report </a:t>
+              <a:t>Imbalance Sensitive Metrics</a:t>
             </a:r>
             <a:endParaRPr lang="en-GB" dirty="0">
               <a:solidFill>
@@ -27531,7 +27122,7 @@
         </p:nvSpPr>
         <p:spPr>
           <a:xfrm>
-            <a:off x="9905303" y="4089279"/>
+            <a:off x="9887642" y="5683911"/>
             <a:ext cx="1676390" cy="914400"/>
           </a:xfrm>
           <a:prstGeom prst="roundRect">
@@ -27612,6 +27203,137 @@
           </a:p>
         </p:txBody>
       </p:sp>
+      <p:sp>
+        <p:nvSpPr>
+          <p:cNvPr id="4" name="Rectangle: Rounded Corners 3">
+            <a:extLst>
+              <a:ext uri="{FF2B5EF4-FFF2-40B4-BE49-F238E27FC236}">
+                <a16:creationId xmlns:a16="http://schemas.microsoft.com/office/drawing/2014/main" id="{6AFCAC43-C708-DC96-979E-E018B10CB4C5}"/>
+              </a:ext>
+            </a:extLst>
+          </p:cNvPr>
+          <p:cNvSpPr/>
+          <p:nvPr/>
+        </p:nvSpPr>
+        <p:spPr>
+          <a:xfrm>
+            <a:off x="9948597" y="4318879"/>
+            <a:ext cx="1554480" cy="891412"/>
+          </a:xfrm>
+          <a:prstGeom prst="roundRect">
+            <a:avLst/>
+          </a:prstGeom>
+          <a:solidFill>
+            <a:schemeClr val="bg2">
+              <a:lumMod val="10000"/>
+            </a:schemeClr>
+          </a:solidFill>
+          <a:ln>
+            <a:noFill/>
+          </a:ln>
+          <a:effectLst>
+            <a:outerShdw blurRad="44450" dist="27940" dir="5400000" algn="ctr">
+              <a:srgbClr val="000000">
+                <a:alpha val="32000"/>
+              </a:srgbClr>
+            </a:outerShdw>
+          </a:effectLst>
+          <a:scene3d>
+            <a:camera prst="orthographicFront">
+              <a:rot lat="0" lon="0" rev="0"/>
+            </a:camera>
+            <a:lightRig rig="balanced" dir="t">
+              <a:rot lat="0" lon="0" rev="8700000"/>
+            </a:lightRig>
+          </a:scene3d>
+          <a:sp3d>
+            <a:bevelT w="190500" h="38100"/>
+          </a:sp3d>
+        </p:spPr>
+        <p:style>
+          <a:lnRef idx="3">
+            <a:schemeClr val="lt1"/>
+          </a:lnRef>
+          <a:fillRef idx="1">
+            <a:schemeClr val="dk1"/>
+          </a:fillRef>
+          <a:effectRef idx="1">
+            <a:schemeClr val="dk1"/>
+          </a:effectRef>
+          <a:fontRef idx="minor">
+            <a:schemeClr val="lt1"/>
+          </a:fontRef>
+        </p:style>
+        <p:txBody>
+          <a:bodyPr rtlCol="0" anchor="ctr"/>
+          <a:lstStyle/>
+          <a:p>
+            <a:pPr algn="ctr"/>
+            <a:r>
+              <a:rPr lang="en-US" dirty="0">
+                <a:solidFill>
+                  <a:schemeClr val="bg1"/>
+                </a:solidFill>
+              </a:rPr>
+              <a:t>Best Model</a:t>
+            </a:r>
+            <a:endParaRPr lang="en-GB" dirty="0">
+              <a:solidFill>
+                <a:schemeClr val="bg1"/>
+              </a:solidFill>
+            </a:endParaRPr>
+          </a:p>
+        </p:txBody>
+      </p:sp>
+      <p:cxnSp>
+        <p:nvCxnSpPr>
+          <p:cNvPr id="5" name="Straight Arrow Connector 4">
+            <a:extLst>
+              <a:ext uri="{FF2B5EF4-FFF2-40B4-BE49-F238E27FC236}">
+                <a16:creationId xmlns:a16="http://schemas.microsoft.com/office/drawing/2014/main" id="{490C4B18-1583-B250-C3AE-EE36D3B5F407}"/>
+              </a:ext>
+            </a:extLst>
+          </p:cNvPr>
+          <p:cNvCxnSpPr>
+            <a:cxnSpLocks/>
+            <a:stCxn id="4" idx="2"/>
+            <a:endCxn id="31" idx="0"/>
+          </p:cNvCxnSpPr>
+          <p:nvPr/>
+        </p:nvCxnSpPr>
+        <p:spPr>
+          <a:xfrm>
+            <a:off x="10725837" y="5210291"/>
+            <a:ext cx="0" cy="473620"/>
+          </a:xfrm>
+          <a:prstGeom prst="straightConnector1">
+            <a:avLst/>
+          </a:prstGeom>
+          <a:ln w="57150">
+            <a:solidFill>
+              <a:schemeClr val="accent5">
+                <a:lumMod val="50000"/>
+              </a:schemeClr>
+            </a:solidFill>
+            <a:headEnd type="none" w="med" len="med"/>
+            <a:tailEnd type="arrow" w="med" len="med"/>
+          </a:ln>
+        </p:spPr>
+        <p:style>
+          <a:lnRef idx="3">
+            <a:schemeClr val="accent5"/>
+          </a:lnRef>
+          <a:fillRef idx="0">
+            <a:schemeClr val="accent5"/>
+          </a:fillRef>
+          <a:effectRef idx="2">
+            <a:schemeClr val="accent5"/>
+          </a:effectRef>
+          <a:fontRef idx="minor">
+            <a:schemeClr val="tx1"/>
+          </a:fontRef>
+        </p:style>
+      </p:cxnSp>
     </p:spTree>
     <p:extLst>
       <p:ext uri="{BB962C8B-B14F-4D97-AF65-F5344CB8AC3E}">
@@ -27658,7 +27380,7 @@
             <p:ph sz="half" idx="1"/>
             <p:extLst>
               <p:ext uri="{D42A27DB-BD31-4B8C-83A1-F6EECF244321}">
-                <p14:modId xmlns:p14="http://schemas.microsoft.com/office/powerpoint/2010/main" val="1990017838"/>
+                <p14:modId xmlns:p14="http://schemas.microsoft.com/office/powerpoint/2010/main" val="1123387990"/>
               </p:ext>
             </p:extLst>
           </p:nvPr>
@@ -27689,7 +27411,7 @@
             <p:ph sz="half" idx="2"/>
             <p:extLst>
               <p:ext uri="{D42A27DB-BD31-4B8C-83A1-F6EECF244321}">
-                <p14:modId xmlns:p14="http://schemas.microsoft.com/office/powerpoint/2010/main" val="976065068"/>
+                <p14:modId xmlns:p14="http://schemas.microsoft.com/office/powerpoint/2010/main" val="1027557931"/>
               </p:ext>
             </p:extLst>
           </p:nvPr>

--- a/Thesis_Presentation.pptx
+++ b/Thesis_Presentation.pptx
@@ -188,7 +188,7 @@
   <pc:docChgLst>
     <pc:chgData name="Evgenia Andreou" userId="8e89e74f621e7047" providerId="LiveId" clId="{EF53017E-E624-4052-9F70-6403551E244D}"/>
     <pc:docChg chg="undo redo custSel addSld delSld modSld sldOrd modMainMaster addSection delSection modSection">
-      <pc:chgData name="Evgenia Andreou" userId="8e89e74f621e7047" providerId="LiveId" clId="{EF53017E-E624-4052-9F70-6403551E244D}" dt="2025-12-01T18:55:26.044" v="41021" actId="255"/>
+      <pc:chgData name="Evgenia Andreou" userId="8e89e74f621e7047" providerId="LiveId" clId="{EF53017E-E624-4052-9F70-6403551E244D}" dt="2025-12-02T14:39:55.966" v="41026" actId="20577"/>
       <pc:docMkLst>
         <pc:docMk/>
       </pc:docMkLst>
@@ -404,7 +404,7 @@
         </pc:spChg>
       </pc:sldChg>
       <pc:sldChg chg="addSp delSp modSp new mod setBg modClrScheme chgLayout">
-        <pc:chgData name="Evgenia Andreou" userId="8e89e74f621e7047" providerId="LiveId" clId="{EF53017E-E624-4052-9F70-6403551E244D}" dt="2025-12-01T18:03:06.748" v="40905" actId="20577"/>
+        <pc:chgData name="Evgenia Andreou" userId="8e89e74f621e7047" providerId="LiveId" clId="{EF53017E-E624-4052-9F70-6403551E244D}" dt="2025-12-02T14:39:55.966" v="41026" actId="20577"/>
         <pc:sldMkLst>
           <pc:docMk/>
           <pc:sldMk cId="1969514135" sldId="266"/>
@@ -426,7 +426,7 @@
           </ac:graphicFrameMkLst>
         </pc:graphicFrameChg>
         <pc:graphicFrameChg chg="add mod modGraphic">
-          <ac:chgData name="Evgenia Andreou" userId="8e89e74f621e7047" providerId="LiveId" clId="{EF53017E-E624-4052-9F70-6403551E244D}" dt="2025-12-01T18:03:06.748" v="40905" actId="20577"/>
+          <ac:chgData name="Evgenia Andreou" userId="8e89e74f621e7047" providerId="LiveId" clId="{EF53017E-E624-4052-9F70-6403551E244D}" dt="2025-12-02T14:39:55.966" v="41026" actId="20577"/>
           <ac:graphicFrameMkLst>
             <pc:docMk/>
             <pc:sldMk cId="1969514135" sldId="266"/>
@@ -5063,7 +5063,7 @@
           </a:pPr>
           <a:r>
             <a:rPr lang="en-US" sz="1500" dirty="0"/>
-            <a:t>Logistic, LDA, QDA </a:t>
+            <a:t>Logistic (L1), LDA, QDA </a:t>
           </a:r>
           <a:endParaRPr lang="en-GB" sz="1500" dirty="0"/>
         </a:p>
@@ -7503,7 +7503,7 @@
           </a:pPr>
           <a:r>
             <a:rPr lang="en-US" sz="1500" kern="1200" dirty="0"/>
-            <a:t>Logistic, LDA, QDA </a:t>
+            <a:t>Logistic (L1), LDA, QDA </a:t>
           </a:r>
           <a:endParaRPr lang="en-GB" sz="1500" kern="1200" dirty="0"/>
         </a:p>
@@ -12299,7 +12299,7 @@
           <a:p>
             <a:fld id="{C1A9776D-B584-4D4B-981C-FA97E36C0636}" type="datetimeFigureOut">
               <a:rPr lang="en-GB" smtClean="0"/>
-              <a:t>29/11/2025</a:t>
+              <a:t>02/12/2025</a:t>
             </a:fld>
             <a:endParaRPr lang="en-GB"/>
           </a:p>
@@ -12499,7 +12499,7 @@
           <a:p>
             <a:fld id="{C1A9776D-B584-4D4B-981C-FA97E36C0636}" type="datetimeFigureOut">
               <a:rPr lang="en-GB" smtClean="0"/>
-              <a:t>29/11/2025</a:t>
+              <a:t>02/12/2025</a:t>
             </a:fld>
             <a:endParaRPr lang="en-GB"/>
           </a:p>
@@ -12709,7 +12709,7 @@
           <a:p>
             <a:fld id="{C1A9776D-B584-4D4B-981C-FA97E36C0636}" type="datetimeFigureOut">
               <a:rPr lang="en-GB" smtClean="0"/>
-              <a:t>29/11/2025</a:t>
+              <a:t>02/12/2025</a:t>
             </a:fld>
             <a:endParaRPr lang="en-GB"/>
           </a:p>
@@ -12909,7 +12909,7 @@
           <a:p>
             <a:fld id="{C1A9776D-B584-4D4B-981C-FA97E36C0636}" type="datetimeFigureOut">
               <a:rPr lang="en-GB" smtClean="0"/>
-              <a:t>29/11/2025</a:t>
+              <a:t>02/12/2025</a:t>
             </a:fld>
             <a:endParaRPr lang="en-GB"/>
           </a:p>
@@ -13185,7 +13185,7 @@
           <a:p>
             <a:fld id="{C1A9776D-B584-4D4B-981C-FA97E36C0636}" type="datetimeFigureOut">
               <a:rPr lang="en-GB" smtClean="0"/>
-              <a:t>29/11/2025</a:t>
+              <a:t>02/12/2025</a:t>
             </a:fld>
             <a:endParaRPr lang="en-GB"/>
           </a:p>
@@ -13453,7 +13453,7 @@
           <a:p>
             <a:fld id="{C1A9776D-B584-4D4B-981C-FA97E36C0636}" type="datetimeFigureOut">
               <a:rPr lang="en-GB" smtClean="0"/>
-              <a:t>29/11/2025</a:t>
+              <a:t>02/12/2025</a:t>
             </a:fld>
             <a:endParaRPr lang="en-GB"/>
           </a:p>
@@ -13868,7 +13868,7 @@
           <a:p>
             <a:fld id="{C1A9776D-B584-4D4B-981C-FA97E36C0636}" type="datetimeFigureOut">
               <a:rPr lang="en-GB" smtClean="0"/>
-              <a:t>29/11/2025</a:t>
+              <a:t>02/12/2025</a:t>
             </a:fld>
             <a:endParaRPr lang="en-GB"/>
           </a:p>
@@ -14010,7 +14010,7 @@
           <a:p>
             <a:fld id="{C1A9776D-B584-4D4B-981C-FA97E36C0636}" type="datetimeFigureOut">
               <a:rPr lang="en-GB" smtClean="0"/>
-              <a:t>29/11/2025</a:t>
+              <a:t>02/12/2025</a:t>
             </a:fld>
             <a:endParaRPr lang="en-GB"/>
           </a:p>
@@ -14123,7 +14123,7 @@
           <a:p>
             <a:fld id="{C1A9776D-B584-4D4B-981C-FA97E36C0636}" type="datetimeFigureOut">
               <a:rPr lang="en-GB" smtClean="0"/>
-              <a:t>29/11/2025</a:t>
+              <a:t>02/12/2025</a:t>
             </a:fld>
             <a:endParaRPr lang="en-GB"/>
           </a:p>
@@ -14436,7 +14436,7 @@
           <a:p>
             <a:fld id="{C1A9776D-B584-4D4B-981C-FA97E36C0636}" type="datetimeFigureOut">
               <a:rPr lang="en-GB" smtClean="0"/>
-              <a:t>29/11/2025</a:t>
+              <a:t>02/12/2025</a:t>
             </a:fld>
             <a:endParaRPr lang="en-GB"/>
           </a:p>
@@ -14725,7 +14725,7 @@
           <a:p>
             <a:fld id="{C1A9776D-B584-4D4B-981C-FA97E36C0636}" type="datetimeFigureOut">
               <a:rPr lang="en-GB" smtClean="0"/>
-              <a:t>29/11/2025</a:t>
+              <a:t>02/12/2025</a:t>
             </a:fld>
             <a:endParaRPr lang="en-GB"/>
           </a:p>
@@ -14981,7 +14981,7 @@
           <a:p>
             <a:fld id="{C1A9776D-B584-4D4B-981C-FA97E36C0636}" type="datetimeFigureOut">
               <a:rPr lang="en-GB" smtClean="0"/>
-              <a:t>29/11/2025</a:t>
+              <a:t>02/12/2025</a:t>
             </a:fld>
             <a:endParaRPr lang="en-GB"/>
           </a:p>
@@ -27411,7 +27411,7 @@
             <p:ph sz="half" idx="2"/>
             <p:extLst>
               <p:ext uri="{D42A27DB-BD31-4B8C-83A1-F6EECF244321}">
-                <p14:modId xmlns:p14="http://schemas.microsoft.com/office/powerpoint/2010/main" val="1027557931"/>
+                <p14:modId xmlns:p14="http://schemas.microsoft.com/office/powerpoint/2010/main" val="1644039606"/>
               </p:ext>
             </p:extLst>
           </p:nvPr>

--- a/Thesis_Presentation.pptx
+++ b/Thesis_Presentation.pptx
@@ -9,30 +9,33 @@
     <p:sldId id="257" r:id="rId3"/>
     <p:sldId id="271" r:id="rId4"/>
     <p:sldId id="280" r:id="rId5"/>
-    <p:sldId id="260" r:id="rId6"/>
-    <p:sldId id="270" r:id="rId7"/>
+    <p:sldId id="295" r:id="rId6"/>
+    <p:sldId id="260" r:id="rId7"/>
     <p:sldId id="281" r:id="rId8"/>
-    <p:sldId id="262" r:id="rId9"/>
-    <p:sldId id="266" r:id="rId10"/>
-    <p:sldId id="269" r:id="rId11"/>
-    <p:sldId id="275" r:id="rId12"/>
-    <p:sldId id="274" r:id="rId13"/>
-    <p:sldId id="273" r:id="rId14"/>
-    <p:sldId id="290" r:id="rId15"/>
-    <p:sldId id="268" r:id="rId16"/>
-    <p:sldId id="279" r:id="rId17"/>
-    <p:sldId id="267" r:id="rId18"/>
-    <p:sldId id="264" r:id="rId19"/>
-    <p:sldId id="291" r:id="rId20"/>
-    <p:sldId id="263" r:id="rId21"/>
-    <p:sldId id="276" r:id="rId22"/>
-    <p:sldId id="293" r:id="rId23"/>
-    <p:sldId id="284" r:id="rId24"/>
-    <p:sldId id="292" r:id="rId25"/>
-    <p:sldId id="285" r:id="rId26"/>
-    <p:sldId id="278" r:id="rId27"/>
-    <p:sldId id="277" r:id="rId28"/>
-    <p:sldId id="294" r:id="rId29"/>
+    <p:sldId id="270" r:id="rId9"/>
+    <p:sldId id="262" r:id="rId10"/>
+    <p:sldId id="266" r:id="rId11"/>
+    <p:sldId id="269" r:id="rId12"/>
+    <p:sldId id="275" r:id="rId13"/>
+    <p:sldId id="274" r:id="rId14"/>
+    <p:sldId id="273" r:id="rId15"/>
+    <p:sldId id="296" r:id="rId16"/>
+    <p:sldId id="290" r:id="rId17"/>
+    <p:sldId id="268" r:id="rId18"/>
+    <p:sldId id="279" r:id="rId19"/>
+    <p:sldId id="267" r:id="rId20"/>
+    <p:sldId id="297" r:id="rId21"/>
+    <p:sldId id="264" r:id="rId22"/>
+    <p:sldId id="291" r:id="rId23"/>
+    <p:sldId id="276" r:id="rId24"/>
+    <p:sldId id="293" r:id="rId25"/>
+    <p:sldId id="284" r:id="rId26"/>
+    <p:sldId id="263" r:id="rId27"/>
+    <p:sldId id="292" r:id="rId28"/>
+    <p:sldId id="285" r:id="rId29"/>
+    <p:sldId id="278" r:id="rId30"/>
+    <p:sldId id="277" r:id="rId31"/>
+    <p:sldId id="294" r:id="rId32"/>
   </p:sldIdLst>
   <p:sldSz cx="12192000" cy="6858000"/>
   <p:notesSz cx="6858000" cy="9144000"/>
@@ -140,25 +143,28 @@
             <p14:sldId id="257"/>
             <p14:sldId id="271"/>
             <p14:sldId id="280"/>
+            <p14:sldId id="295"/>
             <p14:sldId id="260"/>
+            <p14:sldId id="281"/>
             <p14:sldId id="270"/>
-            <p14:sldId id="281"/>
             <p14:sldId id="262"/>
             <p14:sldId id="266"/>
             <p14:sldId id="269"/>
             <p14:sldId id="275"/>
             <p14:sldId id="274"/>
             <p14:sldId id="273"/>
+            <p14:sldId id="296"/>
             <p14:sldId id="290"/>
             <p14:sldId id="268"/>
             <p14:sldId id="279"/>
             <p14:sldId id="267"/>
+            <p14:sldId id="297"/>
             <p14:sldId id="264"/>
             <p14:sldId id="291"/>
-            <p14:sldId id="263"/>
             <p14:sldId id="276"/>
             <p14:sldId id="293"/>
             <p14:sldId id="284"/>
+            <p14:sldId id="263"/>
             <p14:sldId id="292"/>
             <p14:sldId id="285"/>
             <p14:sldId id="278"/>
@@ -178,7 +184,7 @@
 <file path=ppt/revisionInfo.xml><?xml version="1.0" encoding="utf-8"?>
 <p1510:revInfo xmlns:a="http://schemas.openxmlformats.org/drawingml/2006/main" xmlns:r="http://schemas.openxmlformats.org/officeDocument/2006/relationships" xmlns:p1510="http://schemas.microsoft.com/office/powerpoint/2015/10/main">
   <p1510:revLst>
-    <p1510:client id="{6F7D2D08-A2CD-4302-88FB-740D1140D192}" v="1728" dt="2025-12-01T18:07:37.252"/>
+    <p1510:client id="{6F7D2D08-A2CD-4302-88FB-740D1140D192}" v="1758" dt="2026-01-05T21:01:41.446"/>
   </p1510:revLst>
 </p1510:revInfo>
 </file>
@@ -188,49 +194,18 @@
   <pc:docChgLst>
     <pc:chgData name="Evgenia Andreou" userId="8e89e74f621e7047" providerId="LiveId" clId="{EF53017E-E624-4052-9F70-6403551E244D}"/>
     <pc:docChg chg="undo redo custSel addSld delSld modSld sldOrd modMainMaster addSection delSection modSection">
-      <pc:chgData name="Evgenia Andreou" userId="8e89e74f621e7047" providerId="LiveId" clId="{EF53017E-E624-4052-9F70-6403551E244D}" dt="2025-12-02T14:39:55.966" v="41026" actId="20577"/>
+      <pc:chgData name="Evgenia Andreou" userId="8e89e74f621e7047" providerId="LiveId" clId="{EF53017E-E624-4052-9F70-6403551E244D}" dt="2026-01-05T21:02:15.164" v="42174" actId="20577"/>
       <pc:docMkLst>
         <pc:docMk/>
       </pc:docMkLst>
-      <pc:sldChg chg="addSp delSp modSp new mod setBg">
-        <pc:chgData name="Evgenia Andreou" userId="8e89e74f621e7047" providerId="LiveId" clId="{EF53017E-E624-4052-9F70-6403551E244D}" dt="2025-11-21T00:49:58.598" v="34954" actId="20577"/>
-        <pc:sldMkLst>
-          <pc:docMk/>
-          <pc:sldMk cId="568867521" sldId="257"/>
-        </pc:sldMkLst>
-        <pc:spChg chg="add mod">
-          <ac:chgData name="Evgenia Andreou" userId="8e89e74f621e7047" providerId="LiveId" clId="{EF53017E-E624-4052-9F70-6403551E244D}" dt="2025-11-21T00:49:58.598" v="34954" actId="20577"/>
-          <ac:spMkLst>
-            <pc:docMk/>
-            <pc:sldMk cId="568867521" sldId="257"/>
-            <ac:spMk id="4" creationId="{DA253F5B-969C-ED7C-E6DD-0409268E6EFB}"/>
-          </ac:spMkLst>
-        </pc:spChg>
-      </pc:sldChg>
-      <pc:sldChg chg="addSp delSp modSp new mod ord setBg modClrScheme chgLayout">
-        <pc:chgData name="Evgenia Andreou" userId="8e89e74f621e7047" providerId="LiveId" clId="{EF53017E-E624-4052-9F70-6403551E244D}" dt="2025-12-01T18:55:26.044" v="41021" actId="255"/>
+      <pc:sldChg chg="modSp mod">
+        <pc:chgData name="Evgenia Andreou" userId="8e89e74f621e7047" providerId="LiveId" clId="{EF53017E-E624-4052-9F70-6403551E244D}" dt="2026-01-05T14:30:06.900" v="41600" actId="6549"/>
         <pc:sldMkLst>
           <pc:docMk/>
           <pc:sldMk cId="3253723412" sldId="260"/>
         </pc:sldMkLst>
-        <pc:spChg chg="add mod">
-          <ac:chgData name="Evgenia Andreou" userId="8e89e74f621e7047" providerId="LiveId" clId="{EF53017E-E624-4052-9F70-6403551E244D}" dt="2025-11-21T01:02:19.481" v="35228" actId="1076"/>
-          <ac:spMkLst>
-            <pc:docMk/>
-            <pc:sldMk cId="3253723412" sldId="260"/>
-            <ac:spMk id="5" creationId="{E7DEE60B-D404-7827-DCD6-007CA5735B35}"/>
-          </ac:spMkLst>
-        </pc:spChg>
-        <pc:spChg chg="add mod">
-          <ac:chgData name="Evgenia Andreou" userId="8e89e74f621e7047" providerId="LiveId" clId="{EF53017E-E624-4052-9F70-6403551E244D}" dt="2025-11-21T01:02:11.243" v="35226" actId="1076"/>
-          <ac:spMkLst>
-            <pc:docMk/>
-            <pc:sldMk cId="3253723412" sldId="260"/>
-            <ac:spMk id="6" creationId="{CD9BB61E-EA88-626A-DB6A-1C88B5382EEA}"/>
-          </ac:spMkLst>
-        </pc:spChg>
-        <pc:spChg chg="add mod">
-          <ac:chgData name="Evgenia Andreou" userId="8e89e74f621e7047" providerId="LiveId" clId="{EF53017E-E624-4052-9F70-6403551E244D}" dt="2025-12-01T18:55:26.044" v="41021" actId="255"/>
+        <pc:spChg chg="mod">
+          <ac:chgData name="Evgenia Andreou" userId="8e89e74f621e7047" providerId="LiveId" clId="{EF53017E-E624-4052-9F70-6403551E244D}" dt="2026-01-05T14:30:06.900" v="41600" actId="6549"/>
           <ac:spMkLst>
             <pc:docMk/>
             <pc:sldMk cId="3253723412" sldId="260"/>
@@ -238,117 +213,14 @@
           </ac:spMkLst>
         </pc:spChg>
       </pc:sldChg>
-      <pc:sldChg chg="addSp delSp modSp new mod setBg modClrScheme chgLayout">
-        <pc:chgData name="Evgenia Andreou" userId="8e89e74f621e7047" providerId="LiveId" clId="{EF53017E-E624-4052-9F70-6403551E244D}" dt="2025-12-01T18:03:14.550" v="40908" actId="20577"/>
-        <pc:sldMkLst>
-          <pc:docMk/>
-          <pc:sldMk cId="1363710211" sldId="262"/>
-        </pc:sldMkLst>
-        <pc:spChg chg="add mod">
-          <ac:chgData name="Evgenia Andreou" userId="8e89e74f621e7047" providerId="LiveId" clId="{EF53017E-E624-4052-9F70-6403551E244D}" dt="2025-12-01T17:41:56.571" v="40765" actId="1036"/>
-          <ac:spMkLst>
-            <pc:docMk/>
-            <pc:sldMk cId="1363710211" sldId="262"/>
-            <ac:spMk id="4" creationId="{6AFCAC43-C708-DC96-979E-E018B10CB4C5}"/>
-          </ac:spMkLst>
-        </pc:spChg>
-        <pc:spChg chg="mod">
-          <ac:chgData name="Evgenia Andreou" userId="8e89e74f621e7047" providerId="LiveId" clId="{EF53017E-E624-4052-9F70-6403551E244D}" dt="2025-11-28T03:50:14.574" v="40310" actId="20577"/>
-          <ac:spMkLst>
-            <pc:docMk/>
-            <pc:sldMk cId="1363710211" sldId="262"/>
-            <ac:spMk id="20" creationId="{D3BA573A-42F1-DA45-C0FD-BC1655434B77}"/>
-          </ac:spMkLst>
-        </pc:spChg>
-        <pc:spChg chg="mod">
-          <ac:chgData name="Evgenia Andreou" userId="8e89e74f621e7047" providerId="LiveId" clId="{EF53017E-E624-4052-9F70-6403551E244D}" dt="2025-11-28T02:11:34.509" v="39412" actId="1036"/>
-          <ac:spMkLst>
-            <pc:docMk/>
-            <pc:sldMk cId="1363710211" sldId="262"/>
-            <ac:spMk id="24" creationId="{E1FABA48-E7BA-FC06-2FF3-7550185F508C}"/>
-          </ac:spMkLst>
-        </pc:spChg>
-        <pc:spChg chg="mod">
-          <ac:chgData name="Evgenia Andreou" userId="8e89e74f621e7047" providerId="LiveId" clId="{EF53017E-E624-4052-9F70-6403551E244D}" dt="2025-12-01T18:03:14.550" v="40908" actId="20577"/>
-          <ac:spMkLst>
-            <pc:docMk/>
-            <pc:sldMk cId="1363710211" sldId="262"/>
-            <ac:spMk id="29" creationId="{23EC8373-4835-1D54-AC63-3CAC68B40C09}"/>
-          </ac:spMkLst>
-        </pc:spChg>
-        <pc:spChg chg="add mod">
-          <ac:chgData name="Evgenia Andreou" userId="8e89e74f621e7047" providerId="LiveId" clId="{EF53017E-E624-4052-9F70-6403551E244D}" dt="2025-12-01T17:41:51.763" v="40763" actId="1076"/>
-          <ac:spMkLst>
-            <pc:docMk/>
-            <pc:sldMk cId="1363710211" sldId="262"/>
-            <ac:spMk id="31" creationId="{E4151066-3F48-9700-D69C-E46E31D40C83}"/>
-          </ac:spMkLst>
-        </pc:spChg>
-        <pc:spChg chg="mod">
-          <ac:chgData name="Evgenia Andreou" userId="8e89e74f621e7047" providerId="LiveId" clId="{EF53017E-E624-4052-9F70-6403551E244D}" dt="2025-11-28T02:11:11.870" v="39408" actId="1076"/>
-          <ac:spMkLst>
-            <pc:docMk/>
-            <pc:sldMk cId="1363710211" sldId="262"/>
-            <ac:spMk id="65" creationId="{BC395692-D7A5-4CC4-921A-B43C008650B1}"/>
-          </ac:spMkLst>
-        </pc:spChg>
-        <pc:spChg chg="add mod">
-          <ac:chgData name="Evgenia Andreou" userId="8e89e74f621e7047" providerId="LiveId" clId="{EF53017E-E624-4052-9F70-6403551E244D}" dt="2025-11-21T01:05:32.978" v="35284" actId="20577"/>
-          <ac:spMkLst>
-            <pc:docMk/>
-            <pc:sldMk cId="1363710211" sldId="262"/>
-            <ac:spMk id="677" creationId="{1263351C-9AB9-9F3E-1A06-CBF996165FBC}"/>
-          </ac:spMkLst>
-        </pc:spChg>
-        <pc:cxnChg chg="add mod">
-          <ac:chgData name="Evgenia Andreou" userId="8e89e74f621e7047" providerId="LiveId" clId="{EF53017E-E624-4052-9F70-6403551E244D}" dt="2025-12-01T17:41:56.571" v="40765" actId="1036"/>
-          <ac:cxnSpMkLst>
-            <pc:docMk/>
-            <pc:sldMk cId="1363710211" sldId="262"/>
-            <ac:cxnSpMk id="5" creationId="{490C4B18-1583-B250-C3AE-EE36D3B5F407}"/>
-          </ac:cxnSpMkLst>
-        </pc:cxnChg>
-        <pc:cxnChg chg="mod">
-          <ac:chgData name="Evgenia Andreou" userId="8e89e74f621e7047" providerId="LiveId" clId="{EF53017E-E624-4052-9F70-6403551E244D}" dt="2025-12-01T17:41:56.571" v="40765" actId="1036"/>
-          <ac:cxnSpMkLst>
-            <pc:docMk/>
-            <pc:sldMk cId="1363710211" sldId="262"/>
-            <ac:cxnSpMk id="75" creationId="{4CC1E783-18E4-8F6D-ECF6-34DDBB6B81E0}"/>
-          </ac:cxnSpMkLst>
-        </pc:cxnChg>
-        <pc:cxnChg chg="mod">
-          <ac:chgData name="Evgenia Andreou" userId="8e89e74f621e7047" providerId="LiveId" clId="{EF53017E-E624-4052-9F70-6403551E244D}" dt="2025-11-28T02:11:11.870" v="39408" actId="1076"/>
-          <ac:cxnSpMkLst>
-            <pc:docMk/>
-            <pc:sldMk cId="1363710211" sldId="262"/>
-            <ac:cxnSpMk id="85" creationId="{78652D68-0DB3-6990-6918-EE78DE3D987D}"/>
-          </ac:cxnSpMkLst>
-        </pc:cxnChg>
-        <pc:cxnChg chg="mod">
-          <ac:chgData name="Evgenia Andreou" userId="8e89e74f621e7047" providerId="LiveId" clId="{EF53017E-E624-4052-9F70-6403551E244D}" dt="2025-11-28T02:11:41.641" v="39414" actId="14100"/>
-          <ac:cxnSpMkLst>
-            <pc:docMk/>
-            <pc:sldMk cId="1363710211" sldId="262"/>
-            <ac:cxnSpMk id="87" creationId="{1132FF9E-F1BD-E667-E01F-0E0BEB517FC0}"/>
-          </ac:cxnSpMkLst>
-        </pc:cxnChg>
-        <pc:cxnChg chg="mod">
-          <ac:chgData name="Evgenia Andreou" userId="8e89e74f621e7047" providerId="LiveId" clId="{EF53017E-E624-4052-9F70-6403551E244D}" dt="2025-11-28T02:11:38.005" v="39413" actId="14100"/>
-          <ac:cxnSpMkLst>
-            <pc:docMk/>
-            <pc:sldMk cId="1363710211" sldId="262"/>
-            <ac:cxnSpMk id="624" creationId="{0E2627AA-30FB-8252-5A08-C663C633D9C7}"/>
-          </ac:cxnSpMkLst>
-        </pc:cxnChg>
-      </pc:sldChg>
-      <pc:sldChg chg="addSp delSp modSp add mod ord">
-        <pc:chgData name="Evgenia Andreou" userId="8e89e74f621e7047" providerId="LiveId" clId="{EF53017E-E624-4052-9F70-6403551E244D}" dt="2025-12-01T18:08:45.397" v="40972" actId="1035"/>
+      <pc:sldChg chg="addSp delSp modSp mod ord">
+        <pc:chgData name="Evgenia Andreou" userId="8e89e74f621e7047" providerId="LiveId" clId="{EF53017E-E624-4052-9F70-6403551E244D}" dt="2026-01-05T14:44:26.649" v="41720" actId="20577"/>
         <pc:sldMkLst>
           <pc:docMk/>
           <pc:sldMk cId="379656155" sldId="263"/>
         </pc:sldMkLst>
-        <pc:spChg chg="add mod">
-          <ac:chgData name="Evgenia Andreou" userId="8e89e74f621e7047" providerId="LiveId" clId="{EF53017E-E624-4052-9F70-6403551E244D}" dt="2025-12-01T18:08:36.650" v="40964" actId="1076"/>
+        <pc:spChg chg="add del mod">
+          <ac:chgData name="Evgenia Andreou" userId="8e89e74f621e7047" providerId="LiveId" clId="{EF53017E-E624-4052-9F70-6403551E244D}" dt="2026-01-05T14:44:00.199" v="41685" actId="1076"/>
           <ac:spMkLst>
             <pc:docMk/>
             <pc:sldMk cId="379656155" sldId="263"/>
@@ -356,23 +228,31 @@
           </ac:spMkLst>
         </pc:spChg>
         <pc:spChg chg="mod">
-          <ac:chgData name="Evgenia Andreou" userId="8e89e74f621e7047" providerId="LiveId" clId="{EF53017E-E624-4052-9F70-6403551E244D}" dt="2025-12-01T18:07:38.341" v="40960" actId="20577"/>
+          <ac:chgData name="Evgenia Andreou" userId="8e89e74f621e7047" providerId="LiveId" clId="{EF53017E-E624-4052-9F70-6403551E244D}" dt="2026-01-05T14:44:26.649" v="41720" actId="20577"/>
           <ac:spMkLst>
             <pc:docMk/>
             <pc:sldMk cId="379656155" sldId="263"/>
             <ac:spMk id="3" creationId="{79AA6C9D-2E20-3FDC-E624-B09367AC8F9F}"/>
           </ac:spMkLst>
         </pc:spChg>
+        <pc:spChg chg="add mod">
+          <ac:chgData name="Evgenia Andreou" userId="8e89e74f621e7047" providerId="LiveId" clId="{EF53017E-E624-4052-9F70-6403551E244D}" dt="2026-01-05T14:43:56.068" v="41684" actId="1036"/>
+          <ac:spMkLst>
+            <pc:docMk/>
+            <pc:sldMk cId="379656155" sldId="263"/>
+            <ac:spMk id="4" creationId="{450E4AEB-EFCC-184B-E286-4074CCA76B6D}"/>
+          </ac:spMkLst>
+        </pc:spChg>
         <pc:spChg chg="mod">
-          <ac:chgData name="Evgenia Andreou" userId="8e89e74f621e7047" providerId="LiveId" clId="{EF53017E-E624-4052-9F70-6403551E244D}" dt="2025-12-01T18:08:45.397" v="40972" actId="1035"/>
+          <ac:chgData name="Evgenia Andreou" userId="8e89e74f621e7047" providerId="LiveId" clId="{EF53017E-E624-4052-9F70-6403551E244D}" dt="2026-01-05T14:43:56.068" v="41684" actId="1036"/>
           <ac:spMkLst>
             <pc:docMk/>
             <pc:sldMk cId="379656155" sldId="263"/>
             <ac:spMk id="7" creationId="{7379714B-1FF3-323E-6749-EA95E8C454BF}"/>
           </ac:spMkLst>
         </pc:spChg>
-        <pc:picChg chg="add mod">
-          <ac:chgData name="Evgenia Andreou" userId="8e89e74f621e7047" providerId="LiveId" clId="{EF53017E-E624-4052-9F70-6403551E244D}" dt="2025-12-01T18:08:39.600" v="40970" actId="1036"/>
+        <pc:picChg chg="mod">
+          <ac:chgData name="Evgenia Andreou" userId="8e89e74f621e7047" providerId="LiveId" clId="{EF53017E-E624-4052-9F70-6403551E244D}" dt="2026-01-05T14:43:56.068" v="41684" actId="1036"/>
           <ac:picMkLst>
             <pc:docMk/>
             <pc:sldMk cId="379656155" sldId="263"/>
@@ -380,14 +260,30 @@
           </ac:picMkLst>
         </pc:picChg>
       </pc:sldChg>
-      <pc:sldChg chg="modSp add mod ord">
-        <pc:chgData name="Evgenia Andreou" userId="8e89e74f621e7047" providerId="LiveId" clId="{EF53017E-E624-4052-9F70-6403551E244D}" dt="2025-12-01T18:06:49.114" v="40919"/>
+      <pc:sldChg chg="delSp modSp mod modShow">
+        <pc:chgData name="Evgenia Andreou" userId="8e89e74f621e7047" providerId="LiveId" clId="{EF53017E-E624-4052-9F70-6403551E244D}" dt="2026-01-05T15:28:32.942" v="42034" actId="729"/>
         <pc:sldMkLst>
           <pc:docMk/>
           <pc:sldMk cId="493610102" sldId="264"/>
         </pc:sldMkLst>
         <pc:spChg chg="mod">
-          <ac:chgData name="Evgenia Andreou" userId="8e89e74f621e7047" providerId="LiveId" clId="{EF53017E-E624-4052-9F70-6403551E244D}" dt="2025-12-01T17:20:02.156" v="40690" actId="20577"/>
+          <ac:chgData name="Evgenia Andreou" userId="8e89e74f621e7047" providerId="LiveId" clId="{EF53017E-E624-4052-9F70-6403551E244D}" dt="2026-01-05T14:55:29.115" v="41788" actId="20577"/>
+          <ac:spMkLst>
+            <pc:docMk/>
+            <pc:sldMk cId="493610102" sldId="264"/>
+            <ac:spMk id="2" creationId="{86DB2BA2-C66A-5EC1-F184-C2C46DC0A30F}"/>
+          </ac:spMkLst>
+        </pc:spChg>
+        <pc:spChg chg="del">
+          <ac:chgData name="Evgenia Andreou" userId="8e89e74f621e7047" providerId="LiveId" clId="{EF53017E-E624-4052-9F70-6403551E244D}" dt="2026-01-05T15:05:19.944" v="41889" actId="478"/>
+          <ac:spMkLst>
+            <pc:docMk/>
+            <pc:sldMk cId="493610102" sldId="264"/>
+            <ac:spMk id="3" creationId="{754C2201-BFB4-BE44-95E3-C5031C5EFFD6}"/>
+          </ac:spMkLst>
+        </pc:spChg>
+        <pc:spChg chg="mod">
+          <ac:chgData name="Evgenia Andreou" userId="8e89e74f621e7047" providerId="LiveId" clId="{EF53017E-E624-4052-9F70-6403551E244D}" dt="2026-01-05T14:54:22.685" v="41730" actId="20577"/>
           <ac:spMkLst>
             <pc:docMk/>
             <pc:sldMk cId="493610102" sldId="264"/>
@@ -395,7 +291,7 @@
           </ac:spMkLst>
         </pc:spChg>
         <pc:spChg chg="mod">
-          <ac:chgData name="Evgenia Andreou" userId="8e89e74f621e7047" providerId="LiveId" clId="{EF53017E-E624-4052-9F70-6403551E244D}" dt="2025-11-25T20:26:05.952" v="38914" actId="20577"/>
+          <ac:chgData name="Evgenia Andreou" userId="8e89e74f621e7047" providerId="LiveId" clId="{EF53017E-E624-4052-9F70-6403551E244D}" dt="2026-01-05T15:05:36.958" v="41891"/>
           <ac:spMkLst>
             <pc:docMk/>
             <pc:sldMk cId="493610102" sldId="264"/>
@@ -403,45 +299,37 @@
           </ac:spMkLst>
         </pc:spChg>
       </pc:sldChg>
-      <pc:sldChg chg="addSp delSp modSp new mod setBg modClrScheme chgLayout">
-        <pc:chgData name="Evgenia Andreou" userId="8e89e74f621e7047" providerId="LiveId" clId="{EF53017E-E624-4052-9F70-6403551E244D}" dt="2025-12-02T14:39:55.966" v="41026" actId="20577"/>
+      <pc:sldChg chg="modSp mod">
+        <pc:chgData name="Evgenia Andreou" userId="8e89e74f621e7047" providerId="LiveId" clId="{EF53017E-E624-4052-9F70-6403551E244D}" dt="2026-01-05T21:02:15.164" v="42174" actId="20577"/>
         <pc:sldMkLst>
           <pc:docMk/>
           <pc:sldMk cId="1969514135" sldId="266"/>
         </pc:sldMkLst>
         <pc:spChg chg="mod">
-          <ac:chgData name="Evgenia Andreou" userId="8e89e74f621e7047" providerId="LiveId" clId="{EF53017E-E624-4052-9F70-6403551E244D}" dt="2025-11-28T02:51:23.331" v="39869" actId="1076"/>
+          <ac:chgData name="Evgenia Andreou" userId="8e89e74f621e7047" providerId="LiveId" clId="{EF53017E-E624-4052-9F70-6403551E244D}" dt="2026-01-04T22:21:13.560" v="41220" actId="20577"/>
           <ac:spMkLst>
             <pc:docMk/>
             <pc:sldMk cId="1969514135" sldId="266"/>
             <ac:spMk id="42" creationId="{2DFEE1D9-3445-82AA-690D-F8B09B9501C3}"/>
           </ac:spMkLst>
         </pc:spChg>
-        <pc:graphicFrameChg chg="add mod modGraphic">
-          <ac:chgData name="Evgenia Andreou" userId="8e89e74f621e7047" providerId="LiveId" clId="{EF53017E-E624-4052-9F70-6403551E244D}" dt="2025-12-01T18:00:34.935" v="40846" actId="20577"/>
+        <pc:graphicFrameChg chg="mod modGraphic">
+          <ac:chgData name="Evgenia Andreou" userId="8e89e74f621e7047" providerId="LiveId" clId="{EF53017E-E624-4052-9F70-6403551E244D}" dt="2026-01-05T21:02:15.164" v="42174" actId="20577"/>
           <ac:graphicFrameMkLst>
             <pc:docMk/>
             <pc:sldMk cId="1969514135" sldId="266"/>
             <ac:graphicFrameMk id="9" creationId="{573E6068-02CB-5172-F662-3212E8C1CE9F}"/>
           </ac:graphicFrameMkLst>
         </pc:graphicFrameChg>
-        <pc:graphicFrameChg chg="add mod modGraphic">
-          <ac:chgData name="Evgenia Andreou" userId="8e89e74f621e7047" providerId="LiveId" clId="{EF53017E-E624-4052-9F70-6403551E244D}" dt="2025-12-02T14:39:55.966" v="41026" actId="20577"/>
-          <ac:graphicFrameMkLst>
-            <pc:docMk/>
-            <pc:sldMk cId="1969514135" sldId="266"/>
-            <ac:graphicFrameMk id="20" creationId="{97A848B3-A454-77E9-2411-EE831EF40542}"/>
-          </ac:graphicFrameMkLst>
-        </pc:graphicFrameChg>
       </pc:sldChg>
-      <pc:sldChg chg="addSp delSp modSp new mod ord setBg">
-        <pc:chgData name="Evgenia Andreou" userId="8e89e74f621e7047" providerId="LiveId" clId="{EF53017E-E624-4052-9F70-6403551E244D}" dt="2025-12-01T18:06:36.999" v="40917" actId="1076"/>
+      <pc:sldChg chg="addSp modSp mod">
+        <pc:chgData name="Evgenia Andreou" userId="8e89e74f621e7047" providerId="LiveId" clId="{EF53017E-E624-4052-9F70-6403551E244D}" dt="2026-01-05T15:02:41.001" v="41874" actId="1076"/>
         <pc:sldMkLst>
           <pc:docMk/>
           <pc:sldMk cId="4231469208" sldId="267"/>
         </pc:sldMkLst>
         <pc:spChg chg="mod">
-          <ac:chgData name="Evgenia Andreou" userId="8e89e74f621e7047" providerId="LiveId" clId="{EF53017E-E624-4052-9F70-6403551E244D}" dt="2025-11-21T02:00:40.356" v="35689" actId="1036"/>
+          <ac:chgData name="Evgenia Andreou" userId="8e89e74f621e7047" providerId="LiveId" clId="{EF53017E-E624-4052-9F70-6403551E244D}" dt="2026-01-05T15:01:15.831" v="41872" actId="313"/>
           <ac:spMkLst>
             <pc:docMk/>
             <pc:sldMk cId="4231469208" sldId="267"/>
@@ -449,172 +337,133 @@
           </ac:spMkLst>
         </pc:spChg>
         <pc:spChg chg="mod">
-          <ac:chgData name="Evgenia Andreou" userId="8e89e74f621e7047" providerId="LiveId" clId="{EF53017E-E624-4052-9F70-6403551E244D}" dt="2025-12-01T18:06:36.641" v="40916" actId="20577"/>
+          <ac:chgData name="Evgenia Andreou" userId="8e89e74f621e7047" providerId="LiveId" clId="{EF53017E-E624-4052-9F70-6403551E244D}" dt="2026-01-05T15:01:09.762" v="41869" actId="20577"/>
           <ac:spMkLst>
             <pc:docMk/>
             <pc:sldMk cId="4231469208" sldId="267"/>
             <ac:spMk id="3" creationId="{8C8DAC97-AA0F-A07F-8A56-4E882F374D1B}"/>
           </ac:spMkLst>
         </pc:spChg>
-        <pc:spChg chg="add mod">
-          <ac:chgData name="Evgenia Andreou" userId="8e89e74f621e7047" providerId="LiveId" clId="{EF53017E-E624-4052-9F70-6403551E244D}" dt="2025-12-01T18:06:36.999" v="40917" actId="1076"/>
+        <pc:spChg chg="mod">
+          <ac:chgData name="Evgenia Andreou" userId="8e89e74f621e7047" providerId="LiveId" clId="{EF53017E-E624-4052-9F70-6403551E244D}" dt="2026-01-05T15:02:38.414" v="41873" actId="1076"/>
           <ac:spMkLst>
             <pc:docMk/>
             <pc:sldMk cId="4231469208" sldId="267"/>
             <ac:spMk id="4" creationId="{C69DB7BB-6B63-9805-5112-B71254956724}"/>
           </ac:spMkLst>
         </pc:spChg>
+        <pc:spChg chg="add mod">
+          <ac:chgData name="Evgenia Andreou" userId="8e89e74f621e7047" providerId="LiveId" clId="{EF53017E-E624-4052-9F70-6403551E244D}" dt="2026-01-05T15:02:41.001" v="41874" actId="1076"/>
+          <ac:spMkLst>
+            <pc:docMk/>
+            <pc:sldMk cId="4231469208" sldId="267"/>
+            <ac:spMk id="5" creationId="{03AEC85B-41AE-A96A-89D9-AED487ACF81E}"/>
+          </ac:spMkLst>
+        </pc:spChg>
       </pc:sldChg>
-      <pc:sldChg chg="addSp delSp modSp new mod">
-        <pc:chgData name="Evgenia Andreou" userId="8e89e74f621e7047" providerId="LiveId" clId="{EF53017E-E624-4052-9F70-6403551E244D}" dt="2025-11-28T22:12:19.061" v="40352" actId="1036"/>
+      <pc:sldChg chg="ord">
+        <pc:chgData name="Evgenia Andreou" userId="8e89e74f621e7047" providerId="LiveId" clId="{EF53017E-E624-4052-9F70-6403551E244D}" dt="2026-01-04T22:13:46.677" v="41136"/>
         <pc:sldMkLst>
           <pc:docMk/>
-          <pc:sldMk cId="3208481001" sldId="268"/>
+          <pc:sldMk cId="2295317214" sldId="270"/>
         </pc:sldMkLst>
-        <pc:spChg chg="mod">
-          <ac:chgData name="Evgenia Andreou" userId="8e89e74f621e7047" providerId="LiveId" clId="{EF53017E-E624-4052-9F70-6403551E244D}" dt="2025-11-24T05:13:10.939" v="38633" actId="1036"/>
-          <ac:spMkLst>
-            <pc:docMk/>
-            <pc:sldMk cId="3208481001" sldId="268"/>
-            <ac:spMk id="2" creationId="{CD8A3B03-5129-00F7-346A-0DAC09CCDBDF}"/>
-          </ac:spMkLst>
-        </pc:spChg>
-        <pc:grpChg chg="add mod">
-          <ac:chgData name="Evgenia Andreou" userId="8e89e74f621e7047" providerId="LiveId" clId="{EF53017E-E624-4052-9F70-6403551E244D}" dt="2025-11-28T22:12:19.061" v="40352" actId="1036"/>
-          <ac:grpSpMkLst>
-            <pc:docMk/>
-            <pc:sldMk cId="3208481001" sldId="268"/>
-            <ac:grpSpMk id="12" creationId="{01DA6A5A-7725-B1F0-134E-0173B6564A6F}"/>
-          </ac:grpSpMkLst>
-        </pc:grpChg>
-        <pc:picChg chg="add mod">
-          <ac:chgData name="Evgenia Andreou" userId="8e89e74f621e7047" providerId="LiveId" clId="{EF53017E-E624-4052-9F70-6403551E244D}" dt="2025-11-28T22:12:06.618" v="40345" actId="1076"/>
-          <ac:picMkLst>
-            <pc:docMk/>
-            <pc:sldMk cId="3208481001" sldId="268"/>
-            <ac:picMk id="4" creationId="{66A154A8-F09D-B696-5854-6A2A6B3F738B}"/>
-          </ac:picMkLst>
-        </pc:picChg>
-        <pc:picChg chg="add mod">
-          <ac:chgData name="Evgenia Andreou" userId="8e89e74f621e7047" providerId="LiveId" clId="{EF53017E-E624-4052-9F70-6403551E244D}" dt="2025-11-28T22:12:04.399" v="40344" actId="1076"/>
-          <ac:picMkLst>
-            <pc:docMk/>
-            <pc:sldMk cId="3208481001" sldId="268"/>
-            <ac:picMk id="6" creationId="{FC6DEAD2-832A-A984-36BA-12DB48E818B9}"/>
-          </ac:picMkLst>
-        </pc:picChg>
-        <pc:picChg chg="add mod">
-          <ac:chgData name="Evgenia Andreou" userId="8e89e74f621e7047" providerId="LiveId" clId="{EF53017E-E624-4052-9F70-6403551E244D}" dt="2025-11-28T22:12:06.618" v="40345" actId="1076"/>
-          <ac:picMkLst>
-            <pc:docMk/>
-            <pc:sldMk cId="3208481001" sldId="268"/>
-            <ac:picMk id="8" creationId="{DD8F1152-8CB3-CBE7-36DA-47565F00501D}"/>
-          </ac:picMkLst>
-        </pc:picChg>
-        <pc:picChg chg="add mod">
-          <ac:chgData name="Evgenia Andreou" userId="8e89e74f621e7047" providerId="LiveId" clId="{EF53017E-E624-4052-9F70-6403551E244D}" dt="2025-11-28T22:12:04.399" v="40344" actId="1076"/>
-          <ac:picMkLst>
-            <pc:docMk/>
-            <pc:sldMk cId="3208481001" sldId="268"/>
-            <ac:picMk id="11" creationId="{8088072D-F3D7-458A-C1F7-966B504994F2}"/>
-          </ac:picMkLst>
-        </pc:picChg>
       </pc:sldChg>
-      <pc:sldChg chg="addSp delSp modSp new mod modShow">
-        <pc:chgData name="Evgenia Andreou" userId="8e89e74f621e7047" providerId="LiveId" clId="{EF53017E-E624-4052-9F70-6403551E244D}" dt="2025-11-21T01:45:17.071" v="35623" actId="1076"/>
-        <pc:sldMkLst>
-          <pc:docMk/>
-          <pc:sldMk cId="201207592" sldId="274"/>
-        </pc:sldMkLst>
-        <pc:spChg chg="mod">
-          <ac:chgData name="Evgenia Andreou" userId="8e89e74f621e7047" providerId="LiveId" clId="{EF53017E-E624-4052-9F70-6403551E244D}" dt="2025-11-21T01:45:09.648" v="35622" actId="14100"/>
-          <ac:spMkLst>
-            <pc:docMk/>
-            <pc:sldMk cId="201207592" sldId="274"/>
-            <ac:spMk id="3" creationId="{A3AF1BF4-48AB-F18F-B99C-6D42C28D6198}"/>
-          </ac:spMkLst>
-        </pc:spChg>
-        <pc:picChg chg="mod">
-          <ac:chgData name="Evgenia Andreou" userId="8e89e74f621e7047" providerId="LiveId" clId="{EF53017E-E624-4052-9F70-6403551E244D}" dt="2025-11-21T01:45:17.071" v="35623" actId="1076"/>
-          <ac:picMkLst>
-            <pc:docMk/>
-            <pc:sldMk cId="201207592" sldId="274"/>
-            <ac:picMk id="6" creationId="{443DDD4E-E012-875F-8BEF-2790662F02DE}"/>
-          </ac:picMkLst>
-        </pc:picChg>
-        <pc:picChg chg="mod">
-          <ac:chgData name="Evgenia Andreou" userId="8e89e74f621e7047" providerId="LiveId" clId="{EF53017E-E624-4052-9F70-6403551E244D}" dt="2025-11-21T01:45:17.071" v="35623" actId="1076"/>
-          <ac:picMkLst>
-            <pc:docMk/>
-            <pc:sldMk cId="201207592" sldId="274"/>
-            <ac:picMk id="8" creationId="{9ED4859F-8361-86CF-2C9A-AB29747D9211}"/>
-          </ac:picMkLst>
-        </pc:picChg>
-        <pc:picChg chg="add mod">
-          <ac:chgData name="Evgenia Andreou" userId="8e89e74f621e7047" providerId="LiveId" clId="{EF53017E-E624-4052-9F70-6403551E244D}" dt="2025-11-21T01:45:17.071" v="35623" actId="1076"/>
-          <ac:picMkLst>
-            <pc:docMk/>
-            <pc:sldMk cId="201207592" sldId="274"/>
-            <ac:picMk id="9" creationId="{493D4F5F-5BE2-95A5-1B45-EBA09F5722A6}"/>
-          </ac:picMkLst>
-        </pc:picChg>
-        <pc:picChg chg="mod">
-          <ac:chgData name="Evgenia Andreou" userId="8e89e74f621e7047" providerId="LiveId" clId="{EF53017E-E624-4052-9F70-6403551E244D}" dt="2025-11-21T01:45:17.071" v="35623" actId="1076"/>
-          <ac:picMkLst>
-            <pc:docMk/>
-            <pc:sldMk cId="201207592" sldId="274"/>
-            <ac:picMk id="12" creationId="{BFE3335F-C327-808D-A219-1554D422FB47}"/>
-          </ac:picMkLst>
-        </pc:picChg>
-      </pc:sldChg>
-      <pc:sldChg chg="addSp delSp modSp new mod setBg">
-        <pc:chgData name="Evgenia Andreou" userId="8e89e74f621e7047" providerId="LiveId" clId="{EF53017E-E624-4052-9F70-6403551E244D}" dt="2025-11-29T01:23:58.529" v="40596" actId="1038"/>
+      <pc:sldChg chg="addSp delSp modSp mod">
+        <pc:chgData name="Evgenia Andreou" userId="8e89e74f621e7047" providerId="LiveId" clId="{EF53017E-E624-4052-9F70-6403551E244D}" dt="2026-01-05T16:45:30.173" v="42068" actId="1035"/>
         <pc:sldMkLst>
           <pc:docMk/>
           <pc:sldMk cId="1839987358" sldId="276"/>
         </pc:sldMkLst>
         <pc:spChg chg="mod">
-          <ac:chgData name="Evgenia Andreou" userId="8e89e74f621e7047" providerId="LiveId" clId="{EF53017E-E624-4052-9F70-6403551E244D}" dt="2025-11-24T05:10:41.875" v="38583" actId="313"/>
+          <ac:chgData name="Evgenia Andreou" userId="8e89e74f621e7047" providerId="LiveId" clId="{EF53017E-E624-4052-9F70-6403551E244D}" dt="2026-01-05T15:30:26.792" v="42052" actId="1035"/>
           <ac:spMkLst>
             <pc:docMk/>
             <pc:sldMk cId="1839987358" sldId="276"/>
             <ac:spMk id="2" creationId="{2266DF65-6188-8376-76BA-FBFCD6D58A83}"/>
           </ac:spMkLst>
         </pc:spChg>
-        <pc:grpChg chg="add mod">
-          <ac:chgData name="Evgenia Andreou" userId="8e89e74f621e7047" providerId="LiveId" clId="{EF53017E-E624-4052-9F70-6403551E244D}" dt="2025-11-29T01:20:57.755" v="40570" actId="164"/>
+        <pc:spChg chg="add del mod">
+          <ac:chgData name="Evgenia Andreou" userId="8e89e74f621e7047" providerId="LiveId" clId="{EF53017E-E624-4052-9F70-6403551E244D}" dt="2026-01-05T15:18:43.590" v="41904"/>
+          <ac:spMkLst>
+            <pc:docMk/>
+            <pc:sldMk cId="1839987358" sldId="276"/>
+            <ac:spMk id="3" creationId="{FCE6A253-430D-8674-5D72-CD87CC9E242A}"/>
+          </ac:spMkLst>
+        </pc:spChg>
+        <pc:spChg chg="add del">
+          <ac:chgData name="Evgenia Andreou" userId="8e89e74f621e7047" providerId="LiveId" clId="{EF53017E-E624-4052-9F70-6403551E244D}" dt="2026-01-05T15:18:45.740" v="41906" actId="22"/>
+          <ac:spMkLst>
+            <pc:docMk/>
+            <pc:sldMk cId="1839987358" sldId="276"/>
+            <ac:spMk id="5" creationId="{BC0EBF30-179C-402F-B6EF-5F5E69EA6143}"/>
+          </ac:spMkLst>
+        </pc:spChg>
+        <pc:spChg chg="add mod">
+          <ac:chgData name="Evgenia Andreou" userId="8e89e74f621e7047" providerId="LiveId" clId="{EF53017E-E624-4052-9F70-6403551E244D}" dt="2026-01-05T16:44:59.786" v="42055" actId="1076"/>
+          <ac:spMkLst>
+            <pc:docMk/>
+            <pc:sldMk cId="1839987358" sldId="276"/>
+            <ac:spMk id="6" creationId="{4157105E-7036-C9DB-AF3D-6B1F8BACAAB8}"/>
+          </ac:spMkLst>
+        </pc:spChg>
+        <pc:spChg chg="add mod">
+          <ac:chgData name="Evgenia Andreou" userId="8e89e74f621e7047" providerId="LiveId" clId="{EF53017E-E624-4052-9F70-6403551E244D}" dt="2026-01-05T16:44:59.786" v="42055" actId="1076"/>
+          <ac:spMkLst>
+            <pc:docMk/>
+            <pc:sldMk cId="1839987358" sldId="276"/>
+            <ac:spMk id="7" creationId="{B913CD2D-5BC6-5FE6-BAF8-EE6413BD5ECA}"/>
+          </ac:spMkLst>
+        </pc:spChg>
+        <pc:spChg chg="add mod">
+          <ac:chgData name="Evgenia Andreou" userId="8e89e74f621e7047" providerId="LiveId" clId="{EF53017E-E624-4052-9F70-6403551E244D}" dt="2026-01-05T15:30:26.792" v="42052" actId="1035"/>
+          <ac:spMkLst>
+            <pc:docMk/>
+            <pc:sldMk cId="1839987358" sldId="276"/>
+            <ac:spMk id="8" creationId="{79A98218-EA23-4A6D-9448-7DE23C28E4B4}"/>
+          </ac:spMkLst>
+        </pc:spChg>
+        <pc:spChg chg="add mod">
+          <ac:chgData name="Evgenia Andreou" userId="8e89e74f621e7047" providerId="LiveId" clId="{EF53017E-E624-4052-9F70-6403551E244D}" dt="2026-01-05T15:30:37.958" v="42053" actId="14100"/>
+          <ac:spMkLst>
+            <pc:docMk/>
+            <pc:sldMk cId="1839987358" sldId="276"/>
+            <ac:spMk id="9" creationId="{209E670E-5B45-0FA6-9975-323AFAF49A6A}"/>
+          </ac:spMkLst>
+        </pc:spChg>
+        <pc:grpChg chg="mod">
+          <ac:chgData name="Evgenia Andreou" userId="8e89e74f621e7047" providerId="LiveId" clId="{EF53017E-E624-4052-9F70-6403551E244D}" dt="2026-01-05T15:30:26.792" v="42052" actId="1035"/>
           <ac:grpSpMkLst>
             <pc:docMk/>
             <pc:sldMk cId="1839987358" sldId="276"/>
             <ac:grpSpMk id="26" creationId="{1C5C83E6-6CA1-EDD4-B08C-006113AE0A92}"/>
           </ac:grpSpMkLst>
         </pc:grpChg>
-        <pc:picChg chg="add mod">
-          <ac:chgData name="Evgenia Andreou" userId="8e89e74f621e7047" providerId="LiveId" clId="{EF53017E-E624-4052-9F70-6403551E244D}" dt="2025-11-29T01:23:58.529" v="40596" actId="1038"/>
+        <pc:picChg chg="mod">
+          <ac:chgData name="Evgenia Andreou" userId="8e89e74f621e7047" providerId="LiveId" clId="{EF53017E-E624-4052-9F70-6403551E244D}" dt="2026-01-05T16:45:30.173" v="42068" actId="1035"/>
           <ac:picMkLst>
             <pc:docMk/>
             <pc:sldMk cId="1839987358" sldId="276"/>
             <ac:picMk id="17" creationId="{D5ECBC4A-2B11-4B08-C8A3-6AFC40E86D04}"/>
           </ac:picMkLst>
         </pc:picChg>
-        <pc:picChg chg="add mod">
-          <ac:chgData name="Evgenia Andreou" userId="8e89e74f621e7047" providerId="LiveId" clId="{EF53017E-E624-4052-9F70-6403551E244D}" dt="2025-11-29T01:23:39.757" v="40571" actId="1440"/>
+        <pc:picChg chg="mod">
+          <ac:chgData name="Evgenia Andreou" userId="8e89e74f621e7047" providerId="LiveId" clId="{EF53017E-E624-4052-9F70-6403551E244D}" dt="2026-01-05T16:45:30.173" v="42068" actId="1035"/>
           <ac:picMkLst>
             <pc:docMk/>
             <pc:sldMk cId="1839987358" sldId="276"/>
             <ac:picMk id="21" creationId="{6940838F-7595-383B-355B-AEE11B633346}"/>
           </ac:picMkLst>
         </pc:picChg>
-        <pc:picChg chg="add mod">
-          <ac:chgData name="Evgenia Andreou" userId="8e89e74f621e7047" providerId="LiveId" clId="{EF53017E-E624-4052-9F70-6403551E244D}" dt="2025-11-29T01:23:58.529" v="40596" actId="1038"/>
+        <pc:picChg chg="mod">
+          <ac:chgData name="Evgenia Andreou" userId="8e89e74f621e7047" providerId="LiveId" clId="{EF53017E-E624-4052-9F70-6403551E244D}" dt="2026-01-05T16:45:21.993" v="42063" actId="1035"/>
           <ac:picMkLst>
             <pc:docMk/>
             <pc:sldMk cId="1839987358" sldId="276"/>
             <ac:picMk id="23" creationId="{7D899AEF-0831-6AD2-3F78-AF8C38DCF00E}"/>
           </ac:picMkLst>
         </pc:picChg>
-        <pc:picChg chg="add mod">
-          <ac:chgData name="Evgenia Andreou" userId="8e89e74f621e7047" providerId="LiveId" clId="{EF53017E-E624-4052-9F70-6403551E244D}" dt="2025-11-29T01:23:46.523" v="40585" actId="1036"/>
+        <pc:picChg chg="mod">
+          <ac:chgData name="Evgenia Andreou" userId="8e89e74f621e7047" providerId="LiveId" clId="{EF53017E-E624-4052-9F70-6403551E244D}" dt="2026-01-05T16:45:21.993" v="42063" actId="1035"/>
           <ac:picMkLst>
             <pc:docMk/>
             <pc:sldMk cId="1839987358" sldId="276"/>
@@ -622,178 +471,29 @@
           </ac:picMkLst>
         </pc:picChg>
       </pc:sldChg>
-      <pc:sldChg chg="addSp delSp modSp new mod ord">
-        <pc:chgData name="Evgenia Andreou" userId="8e89e74f621e7047" providerId="LiveId" clId="{EF53017E-E624-4052-9F70-6403551E244D}" dt="2025-12-01T17:32:17.658" v="40732" actId="20577"/>
-        <pc:sldMkLst>
-          <pc:docMk/>
-          <pc:sldMk cId="2946716891" sldId="277"/>
-        </pc:sldMkLst>
-        <pc:spChg chg="mod">
-          <ac:chgData name="Evgenia Andreou" userId="8e89e74f621e7047" providerId="LiveId" clId="{EF53017E-E624-4052-9F70-6403551E244D}" dt="2025-11-28T03:18:51.895" v="40159" actId="20577"/>
-          <ac:spMkLst>
-            <pc:docMk/>
-            <pc:sldMk cId="2946716891" sldId="277"/>
-            <ac:spMk id="3" creationId="{1ABCE21A-3F83-3DDC-7BD2-BF9D4DD5C680}"/>
-          </ac:spMkLst>
-        </pc:spChg>
-        <pc:spChg chg="mod">
-          <ac:chgData name="Evgenia Andreou" userId="8e89e74f621e7047" providerId="LiveId" clId="{EF53017E-E624-4052-9F70-6403551E244D}" dt="2025-12-01T17:32:17.658" v="40732" actId="20577"/>
-          <ac:spMkLst>
-            <pc:docMk/>
-            <pc:sldMk cId="2946716891" sldId="277"/>
-            <ac:spMk id="4" creationId="{401DE421-F807-3BEB-AAE2-D3F1FCDFEE89}"/>
-          </ac:spMkLst>
-        </pc:spChg>
-        <pc:spChg chg="add mod">
-          <ac:chgData name="Evgenia Andreou" userId="8e89e74f621e7047" providerId="LiveId" clId="{EF53017E-E624-4052-9F70-6403551E244D}" dt="2025-11-23T03:08:10.362" v="38200" actId="1076"/>
-          <ac:spMkLst>
-            <pc:docMk/>
-            <pc:sldMk cId="2946716891" sldId="277"/>
-            <ac:spMk id="8" creationId="{41458E01-EEDC-C559-906A-803FD00F9A27}"/>
-          </ac:spMkLst>
-        </pc:spChg>
-        <pc:spChg chg="add mod">
-          <ac:chgData name="Evgenia Andreou" userId="8e89e74f621e7047" providerId="LiveId" clId="{EF53017E-E624-4052-9F70-6403551E244D}" dt="2025-11-23T03:08:12.399" v="38201" actId="1076"/>
-          <ac:spMkLst>
-            <pc:docMk/>
-            <pc:sldMk cId="2946716891" sldId="277"/>
-            <ac:spMk id="9" creationId="{CED2D915-7AF7-0AF9-12A6-E25870A2516B}"/>
-          </ac:spMkLst>
-        </pc:spChg>
-      </pc:sldChg>
-      <pc:sldChg chg="addSp delSp modSp new mod">
-        <pc:chgData name="Evgenia Andreou" userId="8e89e74f621e7047" providerId="LiveId" clId="{EF53017E-E624-4052-9F70-6403551E244D}" dt="2025-11-28T02:43:35.062" v="39858" actId="20577"/>
+      <pc:sldChg chg="modSp mod">
+        <pc:chgData name="Evgenia Andreou" userId="8e89e74f621e7047" providerId="LiveId" clId="{EF53017E-E624-4052-9F70-6403551E244D}" dt="2026-01-04T23:02:14.442" v="41578" actId="5793"/>
         <pc:sldMkLst>
           <pc:docMk/>
           <pc:sldMk cId="1725771169" sldId="278"/>
         </pc:sldMkLst>
         <pc:spChg chg="mod">
-          <ac:chgData name="Evgenia Andreou" userId="8e89e74f621e7047" providerId="LiveId" clId="{EF53017E-E624-4052-9F70-6403551E244D}" dt="2025-11-28T02:43:35.062" v="39858" actId="20577"/>
+          <ac:chgData name="Evgenia Andreou" userId="8e89e74f621e7047" providerId="LiveId" clId="{EF53017E-E624-4052-9F70-6403551E244D}" dt="2026-01-04T23:02:14.442" v="41578" actId="5793"/>
           <ac:spMkLst>
             <pc:docMk/>
             <pc:sldMk cId="1725771169" sldId="278"/>
             <ac:spMk id="3" creationId="{F231BD6F-33DE-5ED7-7A3C-3B8D40A5DEF5}"/>
           </ac:spMkLst>
         </pc:spChg>
-        <pc:spChg chg="add mod">
-          <ac:chgData name="Evgenia Andreou" userId="8e89e74f621e7047" providerId="LiveId" clId="{EF53017E-E624-4052-9F70-6403551E244D}" dt="2025-11-23T01:19:27.165" v="37572" actId="692"/>
-          <ac:spMkLst>
-            <pc:docMk/>
-            <pc:sldMk cId="1725771169" sldId="278"/>
-            <ac:spMk id="5" creationId="{2F2D7F9C-8C80-0702-9D66-F91BA0E31612}"/>
-          </ac:spMkLst>
-        </pc:spChg>
       </pc:sldChg>
-      <pc:sldChg chg="addSp delSp modSp new mod setBg">
-        <pc:chgData name="Evgenia Andreou" userId="8e89e74f621e7047" providerId="LiveId" clId="{EF53017E-E624-4052-9F70-6403551E244D}" dt="2025-11-28T22:14:44.982" v="40364" actId="164"/>
-        <pc:sldMkLst>
-          <pc:docMk/>
-          <pc:sldMk cId="1267936960" sldId="279"/>
-        </pc:sldMkLst>
-        <pc:grpChg chg="add mod">
-          <ac:chgData name="Evgenia Andreou" userId="8e89e74f621e7047" providerId="LiveId" clId="{EF53017E-E624-4052-9F70-6403551E244D}" dt="2025-11-28T22:14:44.982" v="40364" actId="164"/>
-          <ac:grpSpMkLst>
-            <pc:docMk/>
-            <pc:sldMk cId="1267936960" sldId="279"/>
-            <ac:grpSpMk id="11" creationId="{5946AAF6-E98E-7729-EA74-A8B8F228C3C6}"/>
-          </ac:grpSpMkLst>
-        </pc:grpChg>
-        <pc:picChg chg="add mod">
-          <ac:chgData name="Evgenia Andreou" userId="8e89e74f621e7047" providerId="LiveId" clId="{EF53017E-E624-4052-9F70-6403551E244D}" dt="2025-11-28T22:14:44.982" v="40364" actId="164"/>
-          <ac:picMkLst>
-            <pc:docMk/>
-            <pc:sldMk cId="1267936960" sldId="279"/>
-            <ac:picMk id="4" creationId="{7F0AC793-C44A-7E13-0626-EC68CE352B83}"/>
-          </ac:picMkLst>
-        </pc:picChg>
-        <pc:picChg chg="add mod">
-          <ac:chgData name="Evgenia Andreou" userId="8e89e74f621e7047" providerId="LiveId" clId="{EF53017E-E624-4052-9F70-6403551E244D}" dt="2025-11-28T22:14:44.982" v="40364" actId="164"/>
-          <ac:picMkLst>
-            <pc:docMk/>
-            <pc:sldMk cId="1267936960" sldId="279"/>
-            <ac:picMk id="6" creationId="{0F0D2BD4-36D9-2A89-A21F-CE9F7C8DAB1B}"/>
-          </ac:picMkLst>
-        </pc:picChg>
-        <pc:picChg chg="add mod">
-          <ac:chgData name="Evgenia Andreou" userId="8e89e74f621e7047" providerId="LiveId" clId="{EF53017E-E624-4052-9F70-6403551E244D}" dt="2025-11-28T22:14:44.982" v="40364" actId="164"/>
-          <ac:picMkLst>
-            <pc:docMk/>
-            <pc:sldMk cId="1267936960" sldId="279"/>
-            <ac:picMk id="8" creationId="{05A8B557-4FC9-1FDB-8CD5-080B95C8D03E}"/>
-          </ac:picMkLst>
-        </pc:picChg>
-        <pc:picChg chg="add mod">
-          <ac:chgData name="Evgenia Andreou" userId="8e89e74f621e7047" providerId="LiveId" clId="{EF53017E-E624-4052-9F70-6403551E244D}" dt="2025-11-28T22:14:44.982" v="40364" actId="164"/>
-          <ac:picMkLst>
-            <pc:docMk/>
-            <pc:sldMk cId="1267936960" sldId="279"/>
-            <ac:picMk id="10" creationId="{135DCF66-D4C2-8A23-E855-7C5B6D1C9A00}"/>
-          </ac:picMkLst>
-        </pc:picChg>
-      </pc:sldChg>
-      <pc:sldChg chg="addSp delSp modSp new mod setBg modClrScheme chgLayout">
-        <pc:chgData name="Evgenia Andreou" userId="8e89e74f621e7047" providerId="LiveId" clId="{EF53017E-E624-4052-9F70-6403551E244D}" dt="2025-11-28T02:04:59.020" v="39378" actId="1036"/>
-        <pc:sldMkLst>
-          <pc:docMk/>
-          <pc:sldMk cId="2646428108" sldId="280"/>
-        </pc:sldMkLst>
-        <pc:spChg chg="mod ord">
-          <ac:chgData name="Evgenia Andreou" userId="8e89e74f621e7047" providerId="LiveId" clId="{EF53017E-E624-4052-9F70-6403551E244D}" dt="2025-11-22T20:31:06.489" v="36109" actId="1076"/>
-          <ac:spMkLst>
-            <pc:docMk/>
-            <pc:sldMk cId="2646428108" sldId="280"/>
-            <ac:spMk id="2" creationId="{CF22C3FE-4952-8B04-EE9E-11D16A30959E}"/>
-          </ac:spMkLst>
-        </pc:spChg>
-        <pc:spChg chg="add mod">
-          <ac:chgData name="Evgenia Andreou" userId="8e89e74f621e7047" providerId="LiveId" clId="{EF53017E-E624-4052-9F70-6403551E244D}" dt="2025-11-22T20:30:39.130" v="36103" actId="1076"/>
-          <ac:spMkLst>
-            <pc:docMk/>
-            <pc:sldMk cId="2646428108" sldId="280"/>
-            <ac:spMk id="4" creationId="{09E12B7C-A56F-6A62-B5DD-62E3B3441FAC}"/>
-          </ac:spMkLst>
-        </pc:spChg>
-        <pc:spChg chg="add mod">
-          <ac:chgData name="Evgenia Andreou" userId="8e89e74f621e7047" providerId="LiveId" clId="{EF53017E-E624-4052-9F70-6403551E244D}" dt="2025-11-22T20:31:15.053" v="36114" actId="1036"/>
-          <ac:spMkLst>
-            <pc:docMk/>
-            <pc:sldMk cId="2646428108" sldId="280"/>
-            <ac:spMk id="5" creationId="{478943A5-0C0E-B40C-BF7E-B0721302C28E}"/>
-          </ac:spMkLst>
-        </pc:spChg>
-        <pc:spChg chg="add mod">
-          <ac:chgData name="Evgenia Andreou" userId="8e89e74f621e7047" providerId="LiveId" clId="{EF53017E-E624-4052-9F70-6403551E244D}" dt="2025-11-23T03:21:24.931" v="38314" actId="1076"/>
-          <ac:spMkLst>
-            <pc:docMk/>
-            <pc:sldMk cId="2646428108" sldId="280"/>
-            <ac:spMk id="6" creationId="{425F8027-D067-F729-F98F-5BF830061C66}"/>
-          </ac:spMkLst>
-        </pc:spChg>
-        <pc:spChg chg="add mod">
-          <ac:chgData name="Evgenia Andreou" userId="8e89e74f621e7047" providerId="LiveId" clId="{EF53017E-E624-4052-9F70-6403551E244D}" dt="2025-11-23T03:21:24.741" v="38313" actId="1076"/>
-          <ac:spMkLst>
-            <pc:docMk/>
-            <pc:sldMk cId="2646428108" sldId="280"/>
-            <ac:spMk id="7" creationId="{4CAD9BB0-1F82-1511-FDEC-D74329C882B9}"/>
-          </ac:spMkLst>
-        </pc:spChg>
-        <pc:graphicFrameChg chg="add mod modGraphic">
-          <ac:chgData name="Evgenia Andreou" userId="8e89e74f621e7047" providerId="LiveId" clId="{EF53017E-E624-4052-9F70-6403551E244D}" dt="2025-11-28T02:04:59.020" v="39378" actId="1036"/>
-          <ac:graphicFrameMkLst>
-            <pc:docMk/>
-            <pc:sldMk cId="2646428108" sldId="280"/>
-            <ac:graphicFrameMk id="10" creationId="{E8E1A626-B7C4-9314-0D62-B97468983BC1}"/>
-          </ac:graphicFrameMkLst>
-        </pc:graphicFrameChg>
-      </pc:sldChg>
-      <pc:sldChg chg="addSp delSp modSp new mod setBg">
-        <pc:chgData name="Evgenia Andreou" userId="8e89e74f621e7047" providerId="LiveId" clId="{EF53017E-E624-4052-9F70-6403551E244D}" dt="2025-12-01T17:36:08.887" v="40740"/>
+      <pc:sldChg chg="modSp mod">
+        <pc:chgData name="Evgenia Andreou" userId="8e89e74f621e7047" providerId="LiveId" clId="{EF53017E-E624-4052-9F70-6403551E244D}" dt="2026-01-05T20:57:56.545" v="42146" actId="20577"/>
         <pc:sldMkLst>
           <pc:docMk/>
           <pc:sldMk cId="2935283230" sldId="281"/>
         </pc:sldMkLst>
         <pc:spChg chg="mod">
-          <ac:chgData name="Evgenia Andreou" userId="8e89e74f621e7047" providerId="LiveId" clId="{EF53017E-E624-4052-9F70-6403551E244D}" dt="2025-11-28T02:09:09.328" v="39382" actId="14100"/>
+          <ac:chgData name="Evgenia Andreou" userId="8e89e74f621e7047" providerId="LiveId" clId="{EF53017E-E624-4052-9F70-6403551E244D}" dt="2026-01-04T22:14:04.077" v="41137" actId="20577"/>
           <ac:spMkLst>
             <pc:docMk/>
             <pc:sldMk cId="2935283230" sldId="281"/>
@@ -801,39 +501,39 @@
           </ac:spMkLst>
         </pc:spChg>
         <pc:spChg chg="mod">
-          <ac:chgData name="Evgenia Andreou" userId="8e89e74f621e7047" providerId="LiveId" clId="{EF53017E-E624-4052-9F70-6403551E244D}" dt="2025-12-01T17:36:08.887" v="40740"/>
+          <ac:chgData name="Evgenia Andreou" userId="8e89e74f621e7047" providerId="LiveId" clId="{EF53017E-E624-4052-9F70-6403551E244D}" dt="2026-01-05T14:29:24.435" v="41584" actId="20577"/>
           <ac:spMkLst>
             <pc:docMk/>
             <pc:sldMk cId="2935283230" sldId="281"/>
             <ac:spMk id="3" creationId="{9770C937-D67E-0A40-7F75-05BDEA92620B}"/>
           </ac:spMkLst>
         </pc:spChg>
-        <pc:spChg chg="add mod">
-          <ac:chgData name="Evgenia Andreou" userId="8e89e74f621e7047" providerId="LiveId" clId="{EF53017E-E624-4052-9F70-6403551E244D}" dt="2025-11-28T02:10:07.001" v="39406" actId="1036"/>
+        <pc:spChg chg="mod">
+          <ac:chgData name="Evgenia Andreou" userId="8e89e74f621e7047" providerId="LiveId" clId="{EF53017E-E624-4052-9F70-6403551E244D}" dt="2026-01-04T22:16:49.222" v="41159" actId="1076"/>
           <ac:spMkLst>
             <pc:docMk/>
             <pc:sldMk cId="2935283230" sldId="281"/>
             <ac:spMk id="5" creationId="{C3C8EA0A-F462-758F-BA11-97260070A3A6}"/>
           </ac:spMkLst>
         </pc:spChg>
-        <pc:spChg chg="add mod">
-          <ac:chgData name="Evgenia Andreou" userId="8e89e74f621e7047" providerId="LiveId" clId="{EF53017E-E624-4052-9F70-6403551E244D}" dt="2025-11-28T02:10:00.756" v="39403" actId="1036"/>
+        <pc:spChg chg="mod">
+          <ac:chgData name="Evgenia Andreou" userId="8e89e74f621e7047" providerId="LiveId" clId="{EF53017E-E624-4052-9F70-6403551E244D}" dt="2026-01-04T22:18:06.321" v="41199" actId="1035"/>
           <ac:spMkLst>
             <pc:docMk/>
             <pc:sldMk cId="2935283230" sldId="281"/>
             <ac:spMk id="6" creationId="{0ACD9B0C-3CE0-400E-CB68-9AF9FB1B59DD}"/>
           </ac:spMkLst>
         </pc:spChg>
-        <pc:spChg chg="add mod">
-          <ac:chgData name="Evgenia Andreou" userId="8e89e74f621e7047" providerId="LiveId" clId="{EF53017E-E624-4052-9F70-6403551E244D}" dt="2025-11-28T02:10:00.756" v="39403" actId="1036"/>
+        <pc:spChg chg="mod">
+          <ac:chgData name="Evgenia Andreou" userId="8e89e74f621e7047" providerId="LiveId" clId="{EF53017E-E624-4052-9F70-6403551E244D}" dt="2026-01-04T22:18:00.177" v="41192" actId="20577"/>
           <ac:spMkLst>
             <pc:docMk/>
             <pc:sldMk cId="2935283230" sldId="281"/>
             <ac:spMk id="7" creationId="{F35A33DB-46F9-29EA-5ED4-6F3291D206A4}"/>
           </ac:spMkLst>
         </pc:spChg>
-        <pc:spChg chg="add mod">
-          <ac:chgData name="Evgenia Andreou" userId="8e89e74f621e7047" providerId="LiveId" clId="{EF53017E-E624-4052-9F70-6403551E244D}" dt="2025-12-01T17:11:03.716" v="40664" actId="20577"/>
+        <pc:spChg chg="mod">
+          <ac:chgData name="Evgenia Andreou" userId="8e89e74f621e7047" providerId="LiveId" clId="{EF53017E-E624-4052-9F70-6403551E244D}" dt="2026-01-05T20:57:56.545" v="42146" actId="20577"/>
           <ac:spMkLst>
             <pc:docMk/>
             <pc:sldMk cId="2935283230" sldId="281"/>
@@ -841,38 +541,22 @@
           </ac:spMkLst>
         </pc:spChg>
       </pc:sldChg>
-      <pc:sldChg chg="addSp delSp modSp new mod ord">
-        <pc:chgData name="Evgenia Andreou" userId="8e89e74f621e7047" providerId="LiveId" clId="{EF53017E-E624-4052-9F70-6403551E244D}" dt="2025-11-29T02:48:48.394" v="40643" actId="20577"/>
+      <pc:sldChg chg="modSp mod">
+        <pc:chgData name="Evgenia Andreou" userId="8e89e74f621e7047" providerId="LiveId" clId="{EF53017E-E624-4052-9F70-6403551E244D}" dt="2026-01-04T22:58:11.966" v="41573" actId="27636"/>
         <pc:sldMkLst>
           <pc:docMk/>
           <pc:sldMk cId="1583996442" sldId="284"/>
         </pc:sldMkLst>
         <pc:spChg chg="mod">
-          <ac:chgData name="Evgenia Andreou" userId="8e89e74f621e7047" providerId="LiveId" clId="{EF53017E-E624-4052-9F70-6403551E244D}" dt="2025-11-28T04:01:49.488" v="40319" actId="20577"/>
-          <ac:spMkLst>
-            <pc:docMk/>
-            <pc:sldMk cId="1583996442" sldId="284"/>
-            <ac:spMk id="2" creationId="{D78BB8F6-86CD-F67C-A5AC-A96346005AB1}"/>
-          </ac:spMkLst>
-        </pc:spChg>
-        <pc:spChg chg="add mod">
-          <ac:chgData name="Evgenia Andreou" userId="8e89e74f621e7047" providerId="LiveId" clId="{EF53017E-E624-4052-9F70-6403551E244D}" dt="2025-11-23T01:00:42.080" v="37251" actId="6549"/>
-          <ac:spMkLst>
-            <pc:docMk/>
-            <pc:sldMk cId="1583996442" sldId="284"/>
-            <ac:spMk id="3" creationId="{8A52800C-A200-F692-1890-42672D83430D}"/>
-          </ac:spMkLst>
-        </pc:spChg>
-        <pc:spChg chg="add mod">
-          <ac:chgData name="Evgenia Andreou" userId="8e89e74f621e7047" providerId="LiveId" clId="{EF53017E-E624-4052-9F70-6403551E244D}" dt="2025-11-29T02:48:39.623" v="40641" actId="27636"/>
+          <ac:chgData name="Evgenia Andreou" userId="8e89e74f621e7047" providerId="LiveId" clId="{EF53017E-E624-4052-9F70-6403551E244D}" dt="2026-01-04T22:58:11.963" v="41572" actId="27636"/>
           <ac:spMkLst>
             <pc:docMk/>
             <pc:sldMk cId="1583996442" sldId="284"/>
             <ac:spMk id="5" creationId="{997345AD-832D-F3D6-8EAB-FB12F55F6DFF}"/>
           </ac:spMkLst>
         </pc:spChg>
-        <pc:spChg chg="add mod">
-          <ac:chgData name="Evgenia Andreou" userId="8e89e74f621e7047" providerId="LiveId" clId="{EF53017E-E624-4052-9F70-6403551E244D}" dt="2025-11-29T02:48:48.394" v="40643" actId="20577"/>
+        <pc:spChg chg="mod">
+          <ac:chgData name="Evgenia Andreou" userId="8e89e74f621e7047" providerId="LiveId" clId="{EF53017E-E624-4052-9F70-6403551E244D}" dt="2026-01-04T22:58:11.966" v="41573" actId="27636"/>
           <ac:spMkLst>
             <pc:docMk/>
             <pc:sldMk cId="1583996442" sldId="284"/>
@@ -880,45 +564,22 @@
           </ac:spMkLst>
         </pc:spChg>
       </pc:sldChg>
-      <pc:sldChg chg="addSp delSp modSp new mod">
-        <pc:chgData name="Evgenia Andreou" userId="8e89e74f621e7047" providerId="LiveId" clId="{EF53017E-E624-4052-9F70-6403551E244D}" dt="2025-11-23T03:31:42.512" v="38405" actId="20577"/>
-        <pc:sldMkLst>
-          <pc:docMk/>
-          <pc:sldMk cId="1568349809" sldId="290"/>
-        </pc:sldMkLst>
-        <pc:spChg chg="mod">
-          <ac:chgData name="Evgenia Andreou" userId="8e89e74f621e7047" providerId="LiveId" clId="{EF53017E-E624-4052-9F70-6403551E244D}" dt="2025-11-23T03:31:42.512" v="38405" actId="20577"/>
-          <ac:spMkLst>
-            <pc:docMk/>
-            <pc:sldMk cId="1568349809" sldId="290"/>
-            <ac:spMk id="3" creationId="{04B7BC3B-5F63-AD93-DF81-0FE7E566E573}"/>
-          </ac:spMkLst>
-        </pc:spChg>
-        <pc:spChg chg="add mod">
-          <ac:chgData name="Evgenia Andreou" userId="8e89e74f621e7047" providerId="LiveId" clId="{EF53017E-E624-4052-9F70-6403551E244D}" dt="2025-11-21T01:23:00.590" v="35469" actId="255"/>
-          <ac:spMkLst>
-            <pc:docMk/>
-            <pc:sldMk cId="1568349809" sldId="290"/>
-            <ac:spMk id="4" creationId="{BCDF1454-93C9-84FC-C387-A62EDE27D4BC}"/>
-          </ac:spMkLst>
-        </pc:spChg>
-      </pc:sldChg>
-      <pc:sldChg chg="addSp delSp modSp new mod ord modShow">
-        <pc:chgData name="Evgenia Andreou" userId="8e89e74f621e7047" providerId="LiveId" clId="{EF53017E-E624-4052-9F70-6403551E244D}" dt="2025-11-29T01:56:52.169" v="40622" actId="729"/>
+      <pc:sldChg chg="modSp mod">
+        <pc:chgData name="Evgenia Andreou" userId="8e89e74f621e7047" providerId="LiveId" clId="{EF53017E-E624-4052-9F70-6403551E244D}" dt="2026-01-05T14:56:19.407" v="41795" actId="14100"/>
         <pc:sldMkLst>
           <pc:docMk/>
           <pc:sldMk cId="3019405516" sldId="291"/>
         </pc:sldMkLst>
-        <pc:spChg chg="add mod">
-          <ac:chgData name="Evgenia Andreou" userId="8e89e74f621e7047" providerId="LiveId" clId="{EF53017E-E624-4052-9F70-6403551E244D}" dt="2025-11-24T05:10:31.655" v="38581" actId="1076"/>
+        <pc:spChg chg="mod">
+          <ac:chgData name="Evgenia Andreou" userId="8e89e74f621e7047" providerId="LiveId" clId="{EF53017E-E624-4052-9F70-6403551E244D}" dt="2026-01-05T14:56:19.407" v="41795" actId="14100"/>
           <ac:spMkLst>
             <pc:docMk/>
             <pc:sldMk cId="3019405516" sldId="291"/>
             <ac:spMk id="5" creationId="{C718A182-FD34-0FCF-F841-2D21F0DFE300}"/>
           </ac:spMkLst>
         </pc:spChg>
-        <pc:picChg chg="add mod">
-          <ac:chgData name="Evgenia Andreou" userId="8e89e74f621e7047" providerId="LiveId" clId="{EF53017E-E624-4052-9F70-6403551E244D}" dt="2025-11-24T05:10:31.655" v="38581" actId="1076"/>
+        <pc:picChg chg="mod">
+          <ac:chgData name="Evgenia Andreou" userId="8e89e74f621e7047" providerId="LiveId" clId="{EF53017E-E624-4052-9F70-6403551E244D}" dt="2026-01-05T14:56:08.399" v="41793" actId="14100"/>
           <ac:picMkLst>
             <pc:docMk/>
             <pc:sldMk cId="3019405516" sldId="291"/>
@@ -926,173 +587,62 @@
           </ac:picMkLst>
         </pc:picChg>
       </pc:sldChg>
-      <pc:sldChg chg="addSp delSp modSp new mod">
-        <pc:chgData name="Evgenia Andreou" userId="8e89e74f621e7047" providerId="LiveId" clId="{EF53017E-E624-4052-9F70-6403551E244D}" dt="2025-11-29T01:53:18.322" v="40612" actId="1440"/>
-        <pc:sldMkLst>
-          <pc:docMk/>
-          <pc:sldMk cId="634262476" sldId="292"/>
-        </pc:sldMkLst>
-        <pc:spChg chg="add mod">
-          <ac:chgData name="Evgenia Andreou" userId="8e89e74f621e7047" providerId="LiveId" clId="{EF53017E-E624-4052-9F70-6403551E244D}" dt="2025-11-28T22:51:36.797" v="40520" actId="14100"/>
-          <ac:spMkLst>
-            <pc:docMk/>
-            <pc:sldMk cId="634262476" sldId="292"/>
-            <ac:spMk id="3" creationId="{049D6BE7-05AE-64F8-4DB8-D2CE59F9D843}"/>
-          </ac:spMkLst>
-        </pc:spChg>
-        <pc:spChg chg="add mod">
-          <ac:chgData name="Evgenia Andreou" userId="8e89e74f621e7047" providerId="LiveId" clId="{EF53017E-E624-4052-9F70-6403551E244D}" dt="2025-11-28T03:12:32.118" v="40093" actId="1035"/>
-          <ac:spMkLst>
-            <pc:docMk/>
-            <pc:sldMk cId="634262476" sldId="292"/>
-            <ac:spMk id="4" creationId="{C2BDC2C3-357E-2FCF-83FD-9EEBB4031356}"/>
-          </ac:spMkLst>
-        </pc:spChg>
-        <pc:spChg chg="add mod">
-          <ac:chgData name="Evgenia Andreou" userId="8e89e74f621e7047" providerId="LiveId" clId="{EF53017E-E624-4052-9F70-6403551E244D}" dt="2025-11-23T03:41:25.896" v="38426" actId="1076"/>
-          <ac:spMkLst>
-            <pc:docMk/>
-            <pc:sldMk cId="634262476" sldId="292"/>
-            <ac:spMk id="5" creationId="{A19BEF67-252A-CEAE-43ED-F027351B452C}"/>
-          </ac:spMkLst>
-        </pc:spChg>
-        <pc:picChg chg="add mod">
-          <ac:chgData name="Evgenia Andreou" userId="8e89e74f621e7047" providerId="LiveId" clId="{EF53017E-E624-4052-9F70-6403551E244D}" dt="2025-11-28T22:51:44.304" v="40521" actId="1440"/>
-          <ac:picMkLst>
-            <pc:docMk/>
-            <pc:sldMk cId="634262476" sldId="292"/>
-            <ac:picMk id="10" creationId="{A6401FBF-FCA8-A5E3-357F-3BAF58495F00}"/>
-          </ac:picMkLst>
-        </pc:picChg>
-        <pc:picChg chg="add mod">
-          <ac:chgData name="Evgenia Andreou" userId="8e89e74f621e7047" providerId="LiveId" clId="{EF53017E-E624-4052-9F70-6403551E244D}" dt="2025-11-28T23:03:07.835" v="40523" actId="1076"/>
-          <ac:picMkLst>
-            <pc:docMk/>
-            <pc:sldMk cId="634262476" sldId="292"/>
-            <ac:picMk id="13" creationId="{909FF48F-CED8-DBEB-9B3C-AE89FB7B2295}"/>
-          </ac:picMkLst>
-        </pc:picChg>
-        <pc:picChg chg="add mod">
-          <ac:chgData name="Evgenia Andreou" userId="8e89e74f621e7047" providerId="LiveId" clId="{EF53017E-E624-4052-9F70-6403551E244D}" dt="2025-11-29T01:53:18.322" v="40612" actId="1440"/>
-          <ac:picMkLst>
-            <pc:docMk/>
-            <pc:sldMk cId="634262476" sldId="292"/>
-            <ac:picMk id="24" creationId="{FF6916B7-18EC-378D-B63E-A62C2B29BD56}"/>
-          </ac:picMkLst>
-        </pc:picChg>
-      </pc:sldChg>
-      <pc:sldChg chg="addSp delSp modSp new mod ord">
-        <pc:chgData name="Evgenia Andreou" userId="8e89e74f621e7047" providerId="LiveId" clId="{EF53017E-E624-4052-9F70-6403551E244D}" dt="2025-12-01T18:25:07.302" v="40974" actId="1036"/>
+      <pc:sldChg chg="addSp modSp mod">
+        <pc:chgData name="Evgenia Andreou" userId="8e89e74f621e7047" providerId="LiveId" clId="{EF53017E-E624-4052-9F70-6403551E244D}" dt="2026-01-05T15:08:58.691" v="41894" actId="20577"/>
         <pc:sldMkLst>
           <pc:docMk/>
           <pc:sldMk cId="3402175388" sldId="293"/>
         </pc:sldMkLst>
-        <pc:spChg chg="add del mod">
-          <ac:chgData name="Evgenia Andreou" userId="8e89e74f621e7047" providerId="LiveId" clId="{EF53017E-E624-4052-9F70-6403551E244D}" dt="2025-12-01T17:25:36.041" v="40691" actId="478"/>
-          <ac:spMkLst>
-            <pc:docMk/>
-            <pc:sldMk cId="3402175388" sldId="293"/>
-            <ac:spMk id="3" creationId="{F10D7D99-F5D5-516F-7D30-BB964DA8BD45}"/>
-          </ac:spMkLst>
-        </pc:spChg>
-        <pc:spChg chg="add del mod">
-          <ac:chgData name="Evgenia Andreou" userId="8e89e74f621e7047" providerId="LiveId" clId="{EF53017E-E624-4052-9F70-6403551E244D}" dt="2025-12-01T17:25:46.068" v="40695" actId="478"/>
-          <ac:spMkLst>
-            <pc:docMk/>
-            <pc:sldMk cId="3402175388" sldId="293"/>
-            <ac:spMk id="4" creationId="{59382B80-BBED-E474-12E9-F26C56CAA46D}"/>
-          </ac:spMkLst>
-        </pc:spChg>
-        <pc:spChg chg="add mod">
-          <ac:chgData name="Evgenia Andreou" userId="8e89e74f621e7047" providerId="LiveId" clId="{EF53017E-E624-4052-9F70-6403551E244D}" dt="2025-11-28T03:07:36.968" v="39963" actId="1076"/>
+        <pc:spChg chg="mod">
+          <ac:chgData name="Evgenia Andreou" userId="8e89e74f621e7047" providerId="LiveId" clId="{EF53017E-E624-4052-9F70-6403551E244D}" dt="2026-01-04T22:56:33.302" v="41566" actId="1076"/>
           <ac:spMkLst>
             <pc:docMk/>
             <pc:sldMk cId="3402175388" sldId="293"/>
             <ac:spMk id="5" creationId="{0A267CFC-FE1A-6148-04CC-A306D34EA55F}"/>
           </ac:spMkLst>
         </pc:spChg>
-        <pc:spChg chg="add del mod">
-          <ac:chgData name="Evgenia Andreou" userId="8e89e74f621e7047" providerId="LiveId" clId="{EF53017E-E624-4052-9F70-6403551E244D}" dt="2025-12-01T17:25:43.431" v="40694" actId="478"/>
-          <ac:spMkLst>
-            <pc:docMk/>
-            <pc:sldMk cId="3402175388" sldId="293"/>
-            <ac:spMk id="21" creationId="{3B968F3D-A51A-0ACD-D6AF-8F117FC71011}"/>
-          </ac:spMkLst>
-        </pc:spChg>
-        <pc:spChg chg="add mod">
-          <ac:chgData name="Evgenia Andreou" userId="8e89e74f621e7047" providerId="LiveId" clId="{EF53017E-E624-4052-9F70-6403551E244D}" dt="2025-12-01T18:25:07.302" v="40974" actId="1036"/>
+        <pc:spChg chg="mod">
+          <ac:chgData name="Evgenia Andreou" userId="8e89e74f621e7047" providerId="LiveId" clId="{EF53017E-E624-4052-9F70-6403551E244D}" dt="2026-01-05T15:08:58.691" v="41894" actId="20577"/>
           <ac:spMkLst>
             <pc:docMk/>
             <pc:sldMk cId="3402175388" sldId="293"/>
             <ac:spMk id="28" creationId="{663BBFA7-4629-E836-75B9-68C844D60F68}"/>
           </ac:spMkLst>
         </pc:spChg>
-        <pc:grpChg chg="add mod ord">
-          <ac:chgData name="Evgenia Andreou" userId="8e89e74f621e7047" providerId="LiveId" clId="{EF53017E-E624-4052-9F70-6403551E244D}" dt="2025-11-28T22:33:09.974" v="40471" actId="164"/>
+        <pc:grpChg chg="add mod">
+          <ac:chgData name="Evgenia Andreou" userId="8e89e74f621e7047" providerId="LiveId" clId="{EF53017E-E624-4052-9F70-6403551E244D}" dt="2026-01-04T22:57:17.865" v="41570" actId="164"/>
           <ac:grpSpMkLst>
             <pc:docMk/>
             <pc:sldMk cId="3402175388" sldId="293"/>
-            <ac:grpSpMk id="13" creationId="{1A46AA44-BBA8-2CE7-94B5-D18DA91BEFE0}"/>
+            <ac:grpSpMk id="2" creationId="{B4DE4CD8-CDD8-E203-2B16-4FACB812C622}"/>
           </ac:grpSpMkLst>
         </pc:grpChg>
-        <pc:grpChg chg="add del mod">
-          <ac:chgData name="Evgenia Andreou" userId="8e89e74f621e7047" providerId="LiveId" clId="{EF53017E-E624-4052-9F70-6403551E244D}" dt="2025-12-01T17:25:40.399" v="40693" actId="478"/>
+        <pc:grpChg chg="mod">
+          <ac:chgData name="Evgenia Andreou" userId="8e89e74f621e7047" providerId="LiveId" clId="{EF53017E-E624-4052-9F70-6403551E244D}" dt="2026-01-04T22:57:17.865" v="41570" actId="164"/>
           <ac:grpSpMkLst>
             <pc:docMk/>
             <pc:sldMk cId="3402175388" sldId="293"/>
             <ac:grpSpMk id="19" creationId="{0E7AD118-D083-DDEE-7178-E43F222AB673}"/>
           </ac:grpSpMkLst>
         </pc:grpChg>
-        <pc:picChg chg="add mod ord">
-          <ac:chgData name="Evgenia Andreou" userId="8e89e74f621e7047" providerId="LiveId" clId="{EF53017E-E624-4052-9F70-6403551E244D}" dt="2025-11-28T22:33:12.892" v="40472" actId="1440"/>
-          <ac:picMkLst>
-            <pc:docMk/>
-            <pc:sldMk cId="3402175388" sldId="293"/>
-            <ac:picMk id="6" creationId="{9EDA3562-9FB6-36FB-68CB-62B11B520B6B}"/>
-          </ac:picMkLst>
-        </pc:picChg>
-        <pc:picChg chg="add mod">
-          <ac:chgData name="Evgenia Andreou" userId="8e89e74f621e7047" providerId="LiveId" clId="{EF53017E-E624-4052-9F70-6403551E244D}" dt="2025-11-28T22:33:12.892" v="40472" actId="1440"/>
-          <ac:picMkLst>
-            <pc:docMk/>
-            <pc:sldMk cId="3402175388" sldId="293"/>
-            <ac:picMk id="10" creationId="{79234098-89AC-01BC-B93C-378EFF65637E}"/>
-          </ac:picMkLst>
-        </pc:picChg>
-        <pc:picChg chg="add mod">
-          <ac:chgData name="Evgenia Andreou" userId="8e89e74f621e7047" providerId="LiveId" clId="{EF53017E-E624-4052-9F70-6403551E244D}" dt="2025-11-28T22:33:12.892" v="40472" actId="1440"/>
-          <ac:picMkLst>
-            <pc:docMk/>
-            <pc:sldMk cId="3402175388" sldId="293"/>
-            <ac:picMk id="12" creationId="{0ED05DC4-10F4-02E4-D5C3-814C3B09C2D2}"/>
-          </ac:picMkLst>
-        </pc:picChg>
-        <pc:picChg chg="add mod ord">
-          <ac:chgData name="Evgenia Andreou" userId="8e89e74f621e7047" providerId="LiveId" clId="{EF53017E-E624-4052-9F70-6403551E244D}" dt="2025-11-28T22:33:34.369" v="40478" actId="14100"/>
-          <ac:picMkLst>
-            <pc:docMk/>
-            <pc:sldMk cId="3402175388" sldId="293"/>
-            <ac:picMk id="18" creationId="{3ABFA820-5483-9521-8C6E-915EE34A5D3A}"/>
-          </ac:picMkLst>
-        </pc:picChg>
-        <pc:cxnChg chg="add mod">
-          <ac:chgData name="Evgenia Andreou" userId="8e89e74f621e7047" providerId="LiveId" clId="{EF53017E-E624-4052-9F70-6403551E244D}" dt="2025-12-01T17:26:00.704" v="40699" actId="1038"/>
+        <pc:cxnChg chg="mod">
+          <ac:chgData name="Evgenia Andreou" userId="8e89e74f621e7047" providerId="LiveId" clId="{EF53017E-E624-4052-9F70-6403551E244D}" dt="2026-01-04T22:57:17.865" v="41570" actId="164"/>
           <ac:cxnSpMkLst>
             <pc:docMk/>
             <pc:sldMk cId="3402175388" sldId="293"/>
             <ac:cxnSpMk id="24" creationId="{47354A09-3670-2A84-AE1A-8F1DBAA5939A}"/>
           </ac:cxnSpMkLst>
         </pc:cxnChg>
-        <pc:cxnChg chg="add mod">
-          <ac:chgData name="Evgenia Andreou" userId="8e89e74f621e7047" providerId="LiveId" clId="{EF53017E-E624-4052-9F70-6403551E244D}" dt="2025-12-01T17:26:08.618" v="40701" actId="1076"/>
+        <pc:cxnChg chg="mod">
+          <ac:chgData name="Evgenia Andreou" userId="8e89e74f621e7047" providerId="LiveId" clId="{EF53017E-E624-4052-9F70-6403551E244D}" dt="2026-01-04T22:57:17.865" v="41570" actId="164"/>
           <ac:cxnSpMkLst>
             <pc:docMk/>
             <pc:sldMk cId="3402175388" sldId="293"/>
             <ac:cxnSpMk id="25" creationId="{ED3CAE37-E11C-EC06-E5DD-09A661000FF9}"/>
           </ac:cxnSpMkLst>
         </pc:cxnChg>
-        <pc:cxnChg chg="add mod">
-          <ac:chgData name="Evgenia Andreou" userId="8e89e74f621e7047" providerId="LiveId" clId="{EF53017E-E624-4052-9F70-6403551E244D}" dt="2025-12-01T17:26:15.830" v="40703" actId="1076"/>
+        <pc:cxnChg chg="mod">
+          <ac:chgData name="Evgenia Andreou" userId="8e89e74f621e7047" providerId="LiveId" clId="{EF53017E-E624-4052-9F70-6403551E244D}" dt="2026-01-04T22:57:17.865" v="41570" actId="164"/>
           <ac:cxnSpMkLst>
             <pc:docMk/>
             <pc:sldMk cId="3402175388" sldId="293"/>
@@ -1100,36 +650,50 @@
           </ac:cxnSpMkLst>
         </pc:cxnChg>
       </pc:sldChg>
-      <pc:sldChg chg="addSp delSp modSp new mod">
-        <pc:chgData name="Evgenia Andreou" userId="8e89e74f621e7047" providerId="LiveId" clId="{EF53017E-E624-4052-9F70-6403551E244D}" dt="2025-11-23T03:49:48.286" v="38477" actId="1076"/>
+      <pc:sldChg chg="modSp add mod">
+        <pc:chgData name="Evgenia Andreou" userId="8e89e74f621e7047" providerId="LiveId" clId="{EF53017E-E624-4052-9F70-6403551E244D}" dt="2026-01-04T22:08:41.626" v="41081" actId="255"/>
         <pc:sldMkLst>
           <pc:docMk/>
-          <pc:sldMk cId="2209188368" sldId="294"/>
+          <pc:sldMk cId="562415862" sldId="295"/>
         </pc:sldMkLst>
-        <pc:spChg chg="add mod">
-          <ac:chgData name="Evgenia Andreou" userId="8e89e74f621e7047" providerId="LiveId" clId="{EF53017E-E624-4052-9F70-6403551E244D}" dt="2025-11-23T03:16:06.851" v="38290" actId="20577"/>
+        <pc:spChg chg="mod">
+          <ac:chgData name="Evgenia Andreou" userId="8e89e74f621e7047" providerId="LiveId" clId="{EF53017E-E624-4052-9F70-6403551E244D}" dt="2026-01-04T22:08:41.626" v="41081" actId="255"/>
           <ac:spMkLst>
             <pc:docMk/>
-            <pc:sldMk cId="2209188368" sldId="294"/>
-            <ac:spMk id="5" creationId="{30A49731-B402-B077-FC6B-D2B661F79CCE}"/>
+            <pc:sldMk cId="562415862" sldId="295"/>
+            <ac:spMk id="2" creationId="{A139D3FD-4075-7801-EEA3-5C627734C182}"/>
           </ac:spMkLst>
         </pc:spChg>
-        <pc:picChg chg="add mod">
-          <ac:chgData name="Evgenia Andreou" userId="8e89e74f621e7047" providerId="LiveId" clId="{EF53017E-E624-4052-9F70-6403551E244D}" dt="2025-11-23T03:49:44.618" v="38475" actId="1076"/>
-          <ac:picMkLst>
+      </pc:sldChg>
+      <pc:sldChg chg="modSp add mod">
+        <pc:chgData name="Evgenia Andreou" userId="8e89e74f621e7047" providerId="LiveId" clId="{EF53017E-E624-4052-9F70-6403551E244D}" dt="2026-01-05T14:39:57.521" v="41635" actId="20577"/>
+        <pc:sldMkLst>
+          <pc:docMk/>
+          <pc:sldMk cId="408775488" sldId="296"/>
+        </pc:sldMkLst>
+        <pc:spChg chg="mod">
+          <ac:chgData name="Evgenia Andreou" userId="8e89e74f621e7047" providerId="LiveId" clId="{EF53017E-E624-4052-9F70-6403551E244D}" dt="2026-01-05T14:39:57.521" v="41635" actId="20577"/>
+          <ac:spMkLst>
             <pc:docMk/>
-            <pc:sldMk cId="2209188368" sldId="294"/>
-            <ac:picMk id="11" creationId="{91CD17B4-6875-F425-0782-42205BDD1269}"/>
-          </ac:picMkLst>
-        </pc:picChg>
-        <pc:picChg chg="add mod">
-          <ac:chgData name="Evgenia Andreou" userId="8e89e74f621e7047" providerId="LiveId" clId="{EF53017E-E624-4052-9F70-6403551E244D}" dt="2025-11-23T03:49:48.286" v="38477" actId="1076"/>
-          <ac:picMkLst>
+            <pc:sldMk cId="408775488" sldId="296"/>
+            <ac:spMk id="2" creationId="{FD08B98B-948F-1006-86BA-3DFAC22F36D6}"/>
+          </ac:spMkLst>
+        </pc:spChg>
+      </pc:sldChg>
+      <pc:sldChg chg="modSp add mod">
+        <pc:chgData name="Evgenia Andreou" userId="8e89e74f621e7047" providerId="LiveId" clId="{EF53017E-E624-4052-9F70-6403551E244D}" dt="2026-01-05T14:40:11.382" v="41654" actId="20577"/>
+        <pc:sldMkLst>
+          <pc:docMk/>
+          <pc:sldMk cId="730092505" sldId="297"/>
+        </pc:sldMkLst>
+        <pc:spChg chg="mod">
+          <ac:chgData name="Evgenia Andreou" userId="8e89e74f621e7047" providerId="LiveId" clId="{EF53017E-E624-4052-9F70-6403551E244D}" dt="2026-01-05T14:40:11.382" v="41654" actId="20577"/>
+          <ac:spMkLst>
             <pc:docMk/>
-            <pc:sldMk cId="2209188368" sldId="294"/>
-            <ac:picMk id="13" creationId="{14234742-40E1-70A1-3E10-B0701DAEDD51}"/>
-          </ac:picMkLst>
-        </pc:picChg>
+            <pc:sldMk cId="730092505" sldId="297"/>
+            <ac:spMk id="2" creationId="{534ED583-2CAB-0ED2-E987-A4E0E320A1A6}"/>
+          </ac:spMkLst>
+        </pc:spChg>
       </pc:sldChg>
     </pc:docChg>
   </pc:docChgLst>
@@ -4131,11 +3695,11 @@
             <a:buNone/>
           </a:pPr>
           <a:r>
-            <a:rPr lang="en-US" sz="1500" dirty="0"/>
+            <a:rPr lang="en-US" sz="1500"/>
             <a:t>Exploratory Analysis </a:t>
           </a:r>
           <a:r>
-            <a:rPr lang="en-US" sz="1500" dirty="0">
+            <a:rPr lang="en-US" sz="1500">
               <a:sym typeface="Wingdings" panose="05000000000000000000" pitchFamily="2" charset="2"/>
             </a:rPr>
             <a:t> </a:t>
@@ -4632,6 +4196,21 @@
             <a:rPr lang="en-GB" sz="1500" dirty="0"/>
             <a:t>Merge levels </a:t>
           </a:r>
+          <a:r>
+            <a:rPr lang="en-GB" sz="1500" dirty="0">
+              <a:sym typeface="Wingdings" panose="05000000000000000000" pitchFamily="2" charset="2"/>
+            </a:rPr>
+            <a:t> </a:t>
+          </a:r>
+          <a:r>
+            <a:rPr lang="en-US" sz="1500" b="1" dirty="0"/>
+            <a:t>X </a:t>
+          </a:r>
+          <a:r>
+            <a:rPr lang="en-US" sz="1500" b="0" dirty="0"/>
+            <a:t>rows dropped</a:t>
+          </a:r>
+          <a:endParaRPr lang="en-GB" sz="1500" b="0" dirty="0"/>
         </a:p>
       </dgm:t>
     </dgm:pt>
@@ -4710,7 +4289,17 @@
           </a:pPr>
           <a:r>
             <a:rPr lang="en-GB" sz="1500" dirty="0"/>
-            <a:t>Real world skewed data  Log scale</a:t>
+            <a:t>Real world skewed data </a:t>
+          </a:r>
+          <a:r>
+            <a:rPr lang="en-GB" sz="1500" dirty="0">
+              <a:sym typeface="Wingdings" panose="05000000000000000000" pitchFamily="2" charset="2"/>
+            </a:rPr>
+            <a:t></a:t>
+          </a:r>
+          <a:r>
+            <a:rPr lang="en-GB" sz="1500" dirty="0"/>
+            <a:t> Log scale</a:t>
           </a:r>
         </a:p>
       </dgm:t>
@@ -6812,11 +6401,11 @@
             <a:buNone/>
           </a:pPr>
           <a:r>
-            <a:rPr lang="en-US" sz="1500" kern="1200" dirty="0"/>
+            <a:rPr lang="en-US" sz="1500" kern="1200"/>
             <a:t>Exploratory Analysis </a:t>
           </a:r>
           <a:r>
-            <a:rPr lang="en-US" sz="1500" kern="1200" dirty="0">
+            <a:rPr lang="en-US" sz="1500" kern="1200">
               <a:sym typeface="Wingdings" panose="05000000000000000000" pitchFamily="2" charset="2"/>
             </a:rPr>
             <a:t> </a:t>
@@ -6862,6 +6451,21 @@
             <a:rPr lang="en-GB" sz="1500" kern="1200" dirty="0"/>
             <a:t>Merge levels </a:t>
           </a:r>
+          <a:r>
+            <a:rPr lang="en-GB" sz="1500" kern="1200" dirty="0">
+              <a:sym typeface="Wingdings" panose="05000000000000000000" pitchFamily="2" charset="2"/>
+            </a:rPr>
+            <a:t> </a:t>
+          </a:r>
+          <a:r>
+            <a:rPr lang="en-US" sz="1500" b="1" kern="1200" dirty="0"/>
+            <a:t>X </a:t>
+          </a:r>
+          <a:r>
+            <a:rPr lang="en-US" sz="1500" b="0" kern="1200" dirty="0"/>
+            <a:t>rows dropped</a:t>
+          </a:r>
+          <a:endParaRPr lang="en-GB" sz="1500" b="0" kern="1200" dirty="0"/>
         </a:p>
         <a:p>
           <a:pPr marL="114300" lvl="1" indent="-114300" algn="l" defTabSz="666750">
@@ -6898,7 +6502,17 @@
           </a:pPr>
           <a:r>
             <a:rPr lang="en-GB" sz="1500" kern="1200" dirty="0"/>
-            <a:t>Real world skewed data  Log scale</a:t>
+            <a:t>Real world skewed data </a:t>
+          </a:r>
+          <a:r>
+            <a:rPr lang="en-GB" sz="1500" kern="1200" dirty="0">
+              <a:sym typeface="Wingdings" panose="05000000000000000000" pitchFamily="2" charset="2"/>
+            </a:rPr>
+            <a:t></a:t>
+          </a:r>
+          <a:r>
+            <a:rPr lang="en-GB" sz="1500" kern="1200" dirty="0"/>
+            <a:t> Log scale</a:t>
           </a:r>
         </a:p>
         <a:p>
@@ -12299,7 +11913,7 @@
           <a:p>
             <a:fld id="{C1A9776D-B584-4D4B-981C-FA97E36C0636}" type="datetimeFigureOut">
               <a:rPr lang="en-GB" smtClean="0"/>
-              <a:t>02/12/2025</a:t>
+              <a:t>05/01/2026</a:t>
             </a:fld>
             <a:endParaRPr lang="en-GB"/>
           </a:p>
@@ -12499,7 +12113,7 @@
           <a:p>
             <a:fld id="{C1A9776D-B584-4D4B-981C-FA97E36C0636}" type="datetimeFigureOut">
               <a:rPr lang="en-GB" smtClean="0"/>
-              <a:t>02/12/2025</a:t>
+              <a:t>05/01/2026</a:t>
             </a:fld>
             <a:endParaRPr lang="en-GB"/>
           </a:p>
@@ -12709,7 +12323,7 @@
           <a:p>
             <a:fld id="{C1A9776D-B584-4D4B-981C-FA97E36C0636}" type="datetimeFigureOut">
               <a:rPr lang="en-GB" smtClean="0"/>
-              <a:t>02/12/2025</a:t>
+              <a:t>05/01/2026</a:t>
             </a:fld>
             <a:endParaRPr lang="en-GB"/>
           </a:p>
@@ -12909,7 +12523,7 @@
           <a:p>
             <a:fld id="{C1A9776D-B584-4D4B-981C-FA97E36C0636}" type="datetimeFigureOut">
               <a:rPr lang="en-GB" smtClean="0"/>
-              <a:t>02/12/2025</a:t>
+              <a:t>05/01/2026</a:t>
             </a:fld>
             <a:endParaRPr lang="en-GB"/>
           </a:p>
@@ -13185,7 +12799,7 @@
           <a:p>
             <a:fld id="{C1A9776D-B584-4D4B-981C-FA97E36C0636}" type="datetimeFigureOut">
               <a:rPr lang="en-GB" smtClean="0"/>
-              <a:t>02/12/2025</a:t>
+              <a:t>05/01/2026</a:t>
             </a:fld>
             <a:endParaRPr lang="en-GB"/>
           </a:p>
@@ -13453,7 +13067,7 @@
           <a:p>
             <a:fld id="{C1A9776D-B584-4D4B-981C-FA97E36C0636}" type="datetimeFigureOut">
               <a:rPr lang="en-GB" smtClean="0"/>
-              <a:t>02/12/2025</a:t>
+              <a:t>05/01/2026</a:t>
             </a:fld>
             <a:endParaRPr lang="en-GB"/>
           </a:p>
@@ -13868,7 +13482,7 @@
           <a:p>
             <a:fld id="{C1A9776D-B584-4D4B-981C-FA97E36C0636}" type="datetimeFigureOut">
               <a:rPr lang="en-GB" smtClean="0"/>
-              <a:t>02/12/2025</a:t>
+              <a:t>05/01/2026</a:t>
             </a:fld>
             <a:endParaRPr lang="en-GB"/>
           </a:p>
@@ -14010,7 +13624,7 @@
           <a:p>
             <a:fld id="{C1A9776D-B584-4D4B-981C-FA97E36C0636}" type="datetimeFigureOut">
               <a:rPr lang="en-GB" smtClean="0"/>
-              <a:t>02/12/2025</a:t>
+              <a:t>05/01/2026</a:t>
             </a:fld>
             <a:endParaRPr lang="en-GB"/>
           </a:p>
@@ -14123,7 +13737,7 @@
           <a:p>
             <a:fld id="{C1A9776D-B584-4D4B-981C-FA97E36C0636}" type="datetimeFigureOut">
               <a:rPr lang="en-GB" smtClean="0"/>
-              <a:t>02/12/2025</a:t>
+              <a:t>05/01/2026</a:t>
             </a:fld>
             <a:endParaRPr lang="en-GB"/>
           </a:p>
@@ -14436,7 +14050,7 @@
           <a:p>
             <a:fld id="{C1A9776D-B584-4D4B-981C-FA97E36C0636}" type="datetimeFigureOut">
               <a:rPr lang="en-GB" smtClean="0"/>
-              <a:t>02/12/2025</a:t>
+              <a:t>05/01/2026</a:t>
             </a:fld>
             <a:endParaRPr lang="en-GB"/>
           </a:p>
@@ -14725,7 +14339,7 @@
           <a:p>
             <a:fld id="{C1A9776D-B584-4D4B-981C-FA97E36C0636}" type="datetimeFigureOut">
               <a:rPr lang="en-GB" smtClean="0"/>
-              <a:t>02/12/2025</a:t>
+              <a:t>05/01/2026</a:t>
             </a:fld>
             <a:endParaRPr lang="en-GB"/>
           </a:p>
@@ -14981,7 +14595,7 @@
           <a:p>
             <a:fld id="{C1A9776D-B584-4D4B-981C-FA97E36C0636}" type="datetimeFigureOut">
               <a:rPr lang="en-GB" smtClean="0"/>
-              <a:t>02/12/2025</a:t>
+              <a:t>05/01/2026</a:t>
             </a:fld>
             <a:endParaRPr lang="en-GB"/>
           </a:p>
@@ -15519,6 +15133,140 @@
 </file>
 
 <file path=ppt/slides/slide10.xml><?xml version="1.0" encoding="utf-8"?>
+<p:sld xmlns:a="http://schemas.openxmlformats.org/drawingml/2006/main" xmlns:r="http://schemas.openxmlformats.org/officeDocument/2006/relationships" xmlns:p="http://schemas.openxmlformats.org/presentationml/2006/main">
+  <p:cSld>
+    <p:spTree>
+      <p:nvGrpSpPr>
+        <p:cNvPr id="1" name=""/>
+        <p:cNvGrpSpPr/>
+        <p:nvPr/>
+      </p:nvGrpSpPr>
+      <p:grpSpPr>
+        <a:xfrm>
+          <a:off x="0" y="0"/>
+          <a:ext cx="0" cy="0"/>
+          <a:chOff x="0" y="0"/>
+          <a:chExt cx="0" cy="0"/>
+        </a:xfrm>
+      </p:grpSpPr>
+      <p:graphicFrame>
+        <p:nvGraphicFramePr>
+          <p:cNvPr id="9" name="Content Placeholder 8">
+            <a:extLst>
+              <a:ext uri="{FF2B5EF4-FFF2-40B4-BE49-F238E27FC236}">
+                <a16:creationId xmlns:a16="http://schemas.microsoft.com/office/drawing/2014/main" id="{573E6068-02CB-5172-F662-3212E8C1CE9F}"/>
+              </a:ext>
+            </a:extLst>
+          </p:cNvPr>
+          <p:cNvGraphicFramePr>
+            <a:graphicFrameLocks noGrp="1"/>
+          </p:cNvGraphicFramePr>
+          <p:nvPr>
+            <p:ph sz="half" idx="1"/>
+            <p:extLst>
+              <p:ext uri="{D42A27DB-BD31-4B8C-83A1-F6EECF244321}">
+                <p14:modId xmlns:p14="http://schemas.microsoft.com/office/powerpoint/2010/main" val="3491887642"/>
+              </p:ext>
+            </p:extLst>
+          </p:nvPr>
+        </p:nvGraphicFramePr>
+        <p:xfrm>
+          <a:off x="170725" y="876783"/>
+          <a:ext cx="5847145" cy="5914663"/>
+        </p:xfrm>
+        <a:graphic>
+          <a:graphicData uri="http://schemas.openxmlformats.org/drawingml/2006/diagram">
+            <dgm:relIds xmlns:dgm="http://schemas.openxmlformats.org/drawingml/2006/diagram" xmlns:r="http://schemas.openxmlformats.org/officeDocument/2006/relationships" r:dm="rId2" r:lo="rId3" r:qs="rId4" r:cs="rId5"/>
+          </a:graphicData>
+        </a:graphic>
+      </p:graphicFrame>
+      <p:graphicFrame>
+        <p:nvGraphicFramePr>
+          <p:cNvPr id="20" name="Content Placeholder 19">
+            <a:extLst>
+              <a:ext uri="{FF2B5EF4-FFF2-40B4-BE49-F238E27FC236}">
+                <a16:creationId xmlns:a16="http://schemas.microsoft.com/office/drawing/2014/main" id="{97A848B3-A454-77E9-2411-EE831EF40542}"/>
+              </a:ext>
+            </a:extLst>
+          </p:cNvPr>
+          <p:cNvGraphicFramePr>
+            <a:graphicFrameLocks noGrp="1"/>
+          </p:cNvGraphicFramePr>
+          <p:nvPr>
+            <p:ph sz="half" idx="2"/>
+            <p:extLst>
+              <p:ext uri="{D42A27DB-BD31-4B8C-83A1-F6EECF244321}">
+                <p14:modId xmlns:p14="http://schemas.microsoft.com/office/powerpoint/2010/main" val="1644039606"/>
+              </p:ext>
+            </p:extLst>
+          </p:nvPr>
+        </p:nvGraphicFramePr>
+        <p:xfrm>
+          <a:off x="6174130" y="876783"/>
+          <a:ext cx="5847145" cy="5914663"/>
+        </p:xfrm>
+        <a:graphic>
+          <a:graphicData uri="http://schemas.openxmlformats.org/drawingml/2006/diagram">
+            <dgm:relIds xmlns:dgm="http://schemas.openxmlformats.org/drawingml/2006/diagram" xmlns:r="http://schemas.openxmlformats.org/officeDocument/2006/relationships" r:dm="rId7" r:lo="rId8" r:qs="rId9" r:cs="rId10"/>
+          </a:graphicData>
+        </a:graphic>
+      </p:graphicFrame>
+      <p:sp>
+        <p:nvSpPr>
+          <p:cNvPr id="42" name="TextBox 41">
+            <a:extLst>
+              <a:ext uri="{FF2B5EF4-FFF2-40B4-BE49-F238E27FC236}">
+                <a16:creationId xmlns:a16="http://schemas.microsoft.com/office/drawing/2014/main" id="{2DFEE1D9-3445-82AA-690D-F8B09B9501C3}"/>
+              </a:ext>
+            </a:extLst>
+          </p:cNvPr>
+          <p:cNvSpPr txBox="1"/>
+          <p:nvPr/>
+        </p:nvSpPr>
+        <p:spPr>
+          <a:xfrm>
+            <a:off x="609600" y="168625"/>
+            <a:ext cx="10972800" cy="553998"/>
+          </a:xfrm>
+          <a:prstGeom prst="rect">
+            <a:avLst/>
+          </a:prstGeom>
+          <a:noFill/>
+          <a:ln>
+            <a:solidFill>
+              <a:schemeClr val="tx1"/>
+            </a:solidFill>
+          </a:ln>
+        </p:spPr>
+        <p:txBody>
+          <a:bodyPr wrap="square" rtlCol="0" anchor="ctr">
+            <a:spAutoFit/>
+          </a:bodyPr>
+          <a:lstStyle/>
+          <a:p>
+            <a:pPr algn="ctr"/>
+            <a:r>
+              <a:rPr lang="en-US" sz="3000" b="1" dirty="0"/>
+              <a:t>Methodology in Detail</a:t>
+            </a:r>
+            <a:endParaRPr lang="en-GB" sz="3000" b="1" dirty="0"/>
+          </a:p>
+        </p:txBody>
+      </p:sp>
+    </p:spTree>
+    <p:extLst>
+      <p:ext uri="{BB962C8B-B14F-4D97-AF65-F5344CB8AC3E}">
+        <p14:creationId xmlns:p14="http://schemas.microsoft.com/office/powerpoint/2010/main" val="1969514135"/>
+      </p:ext>
+    </p:extLst>
+  </p:cSld>
+  <p:clrMapOvr>
+    <a:masterClrMapping/>
+  </p:clrMapOvr>
+</p:sld>
+</file>
+
+<file path=ppt/slides/slide11.xml><?xml version="1.0" encoding="utf-8"?>
 <p:sld xmlns:a="http://schemas.openxmlformats.org/drawingml/2006/main" xmlns:r="http://schemas.openxmlformats.org/officeDocument/2006/relationships" xmlns:p="http://schemas.openxmlformats.org/presentationml/2006/main" show="0">
   <p:cSld>
     <p:spTree>
@@ -15988,7 +15736,7 @@
 </p:sld>
 </file>
 
-<file path=ppt/slides/slide11.xml><?xml version="1.0" encoding="utf-8"?>
+<file path=ppt/slides/slide12.xml><?xml version="1.0" encoding="utf-8"?>
 <p:sld xmlns:a="http://schemas.openxmlformats.org/drawingml/2006/main" xmlns:r="http://schemas.openxmlformats.org/officeDocument/2006/relationships" xmlns:p="http://schemas.openxmlformats.org/presentationml/2006/main" show="0">
   <p:cSld>
     <p:spTree>
@@ -16723,7 +16471,7 @@
 </p:sld>
 </file>
 
-<file path=ppt/slides/slide12.xml><?xml version="1.0" encoding="utf-8"?>
+<file path=ppt/slides/slide13.xml><?xml version="1.0" encoding="utf-8"?>
 <p:sld xmlns:a="http://schemas.openxmlformats.org/drawingml/2006/main" xmlns:r="http://schemas.openxmlformats.org/officeDocument/2006/relationships" xmlns:p="http://schemas.openxmlformats.org/presentationml/2006/main" show="0">
   <p:cSld>
     <p:spTree>
@@ -17079,7 +16827,7 @@
 </p:sld>
 </file>
 
-<file path=ppt/slides/slide13.xml><?xml version="1.0" encoding="utf-8"?>
+<file path=ppt/slides/slide14.xml><?xml version="1.0" encoding="utf-8"?>
 <p:sld xmlns:a="http://schemas.openxmlformats.org/drawingml/2006/main" xmlns:r="http://schemas.openxmlformats.org/officeDocument/2006/relationships" xmlns:p="http://schemas.openxmlformats.org/presentationml/2006/main">
   <p:cSld>
     <p:spTree>
@@ -17160,7 +16908,95 @@
 </p:sld>
 </file>
 
-<file path=ppt/slides/slide14.xml><?xml version="1.0" encoding="utf-8"?>
+<file path=ppt/slides/slide15.xml><?xml version="1.0" encoding="utf-8"?>
+<p:sld xmlns:a="http://schemas.openxmlformats.org/drawingml/2006/main" xmlns:r="http://schemas.openxmlformats.org/officeDocument/2006/relationships" xmlns:p="http://schemas.openxmlformats.org/presentationml/2006/main">
+  <p:cSld>
+    <p:spTree>
+      <p:nvGrpSpPr>
+        <p:cNvPr id="1" name="">
+          <a:extLst>
+            <a:ext uri="{FF2B5EF4-FFF2-40B4-BE49-F238E27FC236}">
+              <a16:creationId xmlns:a16="http://schemas.microsoft.com/office/drawing/2014/main" id="{478069C1-F747-F6ED-0E60-1F80B0DD4684}"/>
+            </a:ext>
+          </a:extLst>
+        </p:cNvPr>
+        <p:cNvGrpSpPr/>
+        <p:nvPr/>
+      </p:nvGrpSpPr>
+      <p:grpSpPr>
+        <a:xfrm>
+          <a:off x="0" y="0"/>
+          <a:ext cx="0" cy="0"/>
+          <a:chOff x="0" y="0"/>
+          <a:chExt cx="0" cy="0"/>
+        </a:xfrm>
+      </p:grpSpPr>
+      <p:sp>
+        <p:nvSpPr>
+          <p:cNvPr id="2" name="Title 1">
+            <a:extLst>
+              <a:ext uri="{FF2B5EF4-FFF2-40B4-BE49-F238E27FC236}">
+                <a16:creationId xmlns:a16="http://schemas.microsoft.com/office/drawing/2014/main" id="{FD08B98B-948F-1006-86BA-3DFAC22F36D6}"/>
+              </a:ext>
+            </a:extLst>
+          </p:cNvPr>
+          <p:cNvSpPr>
+            <a:spLocks noGrp="1"/>
+          </p:cNvSpPr>
+          <p:nvPr>
+            <p:ph type="title"/>
+          </p:nvPr>
+        </p:nvSpPr>
+        <p:spPr>
+          <a:xfrm>
+            <a:off x="2720050" y="1821566"/>
+            <a:ext cx="6751899" cy="3214868"/>
+          </a:xfrm>
+          <a:prstGeom prst="plaque">
+            <a:avLst/>
+          </a:prstGeom>
+          <a:noFill/>
+          <a:ln w="19050">
+            <a:solidFill>
+              <a:schemeClr val="tx1"/>
+            </a:solidFill>
+          </a:ln>
+          <a:effectLst>
+            <a:outerShdw blurRad="63500" sx="102000" sy="102000" algn="ctr" rotWithShape="0">
+              <a:prstClr val="black">
+                <a:alpha val="40000"/>
+              </a:prstClr>
+            </a:outerShdw>
+          </a:effectLst>
+        </p:spPr>
+        <p:txBody>
+          <a:bodyPr>
+            <a:normAutofit/>
+          </a:bodyPr>
+          <a:lstStyle/>
+          <a:p>
+            <a:pPr algn="ctr"/>
+            <a:r>
+              <a:rPr lang="en-GB" sz="4000" b="1" dirty="0"/>
+              <a:t>Models</a:t>
+            </a:r>
+          </a:p>
+        </p:txBody>
+      </p:sp>
+    </p:spTree>
+    <p:extLst>
+      <p:ext uri="{BB962C8B-B14F-4D97-AF65-F5344CB8AC3E}">
+        <p14:creationId xmlns:p14="http://schemas.microsoft.com/office/powerpoint/2010/main" val="408775488"/>
+      </p:ext>
+    </p:extLst>
+  </p:cSld>
+  <p:clrMapOvr>
+    <a:masterClrMapping/>
+  </p:clrMapOvr>
+</p:sld>
+</file>
+
+<file path=ppt/slides/slide16.xml><?xml version="1.0" encoding="utf-8"?>
 <p:sld xmlns:a="http://schemas.openxmlformats.org/drawingml/2006/main" xmlns:r="http://schemas.openxmlformats.org/officeDocument/2006/relationships" xmlns:p="http://schemas.openxmlformats.org/presentationml/2006/main">
   <p:cSld>
     <p:spTree>
@@ -17377,7 +17213,7 @@
 </p:sld>
 </file>
 
-<file path=ppt/slides/slide15.xml><?xml version="1.0" encoding="utf-8"?>
+<file path=ppt/slides/slide17.xml><?xml version="1.0" encoding="utf-8"?>
 <p:sld xmlns:a="http://schemas.openxmlformats.org/drawingml/2006/main" xmlns:r="http://schemas.openxmlformats.org/officeDocument/2006/relationships" xmlns:p="http://schemas.openxmlformats.org/presentationml/2006/main">
   <p:cSld>
     <p:spTree>
@@ -17614,7 +17450,7 @@
 </p:sld>
 </file>
 
-<file path=ppt/slides/slide16.xml><?xml version="1.0" encoding="utf-8"?>
+<file path=ppt/slides/slide18.xml><?xml version="1.0" encoding="utf-8"?>
 <p:sld xmlns:a="http://schemas.openxmlformats.org/drawingml/2006/main" xmlns:r="http://schemas.openxmlformats.org/officeDocument/2006/relationships" xmlns:p="http://schemas.openxmlformats.org/presentationml/2006/main">
   <p:cSld>
     <p:spTree>
@@ -17827,7 +17663,7 @@
 </p:sld>
 </file>
 
-<file path=ppt/slides/slide17.xml><?xml version="1.0" encoding="utf-8"?>
+<file path=ppt/slides/slide19.xml><?xml version="1.0" encoding="utf-8"?>
 <p:sld xmlns:a="http://schemas.openxmlformats.org/drawingml/2006/main" xmlns:r="http://schemas.openxmlformats.org/officeDocument/2006/relationships" xmlns:p="http://schemas.openxmlformats.org/presentationml/2006/main">
   <p:cSld>
     <p:spTree>
@@ -17862,7 +17698,7 @@
         </p:nvSpPr>
         <p:spPr>
           <a:xfrm>
-            <a:off x="609600" y="470562"/>
+            <a:off x="609600" y="320093"/>
             <a:ext cx="10972800" cy="457200"/>
           </a:xfrm>
           <a:ln>
@@ -17880,7 +17716,7 @@
             <a:pPr algn="ctr"/>
             <a:r>
               <a:rPr lang="en-US" sz="3000" b="1" dirty="0"/>
-              <a:t>Model Performance</a:t>
+              <a:t>Models’ Performance</a:t>
             </a:r>
             <a:endParaRPr lang="en-GB" sz="3000" b="1" dirty="0"/>
           </a:p>
@@ -17904,8 +17740,8 @@
         </p:nvSpPr>
         <p:spPr>
           <a:xfrm>
-            <a:off x="609600" y="1041722"/>
-            <a:ext cx="10972800" cy="4733262"/>
+            <a:off x="609600" y="878220"/>
+            <a:ext cx="10972800" cy="3645654"/>
           </a:xfrm>
           <a:ln>
             <a:noFill/>
@@ -17924,18 +17760,22 @@
               <a:rPr lang="en-US" sz="1800" b="1" dirty="0"/>
               <a:t>Boosting Models </a:t>
             </a:r>
-          </a:p>
-          <a:p>
-            <a:pPr marL="0" indent="0" algn="ctr">
+            <a:r>
+              <a:rPr lang="en-US" sz="1800" b="1" dirty="0">
+                <a:sym typeface="Wingdings" panose="05000000000000000000" pitchFamily="2" charset="2"/>
+              </a:rPr>
+              <a:t> </a:t>
+            </a:r>
+            <a:r>
+              <a:rPr lang="en-US" sz="1800" dirty="0"/>
+              <a:t>XGBoost, LightBoost outperformed</a:t>
+            </a:r>
+          </a:p>
+          <a:p>
+            <a:pPr marL="0" indent="0">
               <a:buNone/>
             </a:pPr>
             <a:r>
-              <a:rPr lang="en-US" sz="1800" dirty="0"/>
-              <a:t>XGBoost, LightBoost outperformed</a:t>
-            </a:r>
-          </a:p>
-          <a:p>
-            <a:r>
               <a:rPr lang="en-US" sz="1800" b="1" dirty="0"/>
               <a:t>Stable Results in different </a:t>
             </a:r>
@@ -17969,6 +17809,9 @@
             </a:r>
           </a:p>
           <a:p>
+            <a:pPr marL="0" indent="0">
+              <a:buNone/>
+            </a:pPr>
             <a:r>
               <a:rPr lang="en-US" sz="1800" b="1" dirty="0"/>
               <a:t>Benefits</a:t>
@@ -17994,41 +17837,6 @@
               <a:rPr lang="en-US" sz="1800" dirty="0"/>
               <a:t>Faster - Large Datasets</a:t>
             </a:r>
-          </a:p>
-          <a:p>
-            <a:r>
-              <a:rPr lang="en-US" sz="1800" b="1" dirty="0"/>
-              <a:t>Drawbacks</a:t>
-            </a:r>
-          </a:p>
-          <a:p>
-            <a:pPr lvl="1"/>
-            <a:r>
-              <a:rPr lang="en-US" sz="1800" dirty="0"/>
-              <a:t>3</a:t>
-            </a:r>
-            <a:r>
-              <a:rPr lang="en-US" sz="1800" baseline="30000" dirty="0"/>
-              <a:t>rd</a:t>
-            </a:r>
-            <a:r>
-              <a:rPr lang="en-US" sz="1800" dirty="0"/>
-              <a:t> decimal between top classifiers</a:t>
-            </a:r>
-          </a:p>
-          <a:p>
-            <a:pPr lvl="1"/>
-            <a:r>
-              <a:rPr lang="en-US" sz="1800" dirty="0"/>
-              <a:t>Boost: Not proper HPO </a:t>
-            </a:r>
-            <a:r>
-              <a:rPr lang="en-US" sz="1800" dirty="0">
-                <a:sym typeface="Wingdings" panose="05000000000000000000" pitchFamily="2" charset="2"/>
-              </a:rPr>
-              <a:t> Overfit</a:t>
-            </a:r>
-            <a:endParaRPr lang="en-US" sz="1800" dirty="0"/>
           </a:p>
         </p:txBody>
       </p:sp>
@@ -18046,7 +17854,7 @@
         </p:nvSpPr>
         <p:spPr>
           <a:xfrm>
-            <a:off x="609600" y="5987328"/>
+            <a:off x="609600" y="4523874"/>
             <a:ext cx="10972800" cy="400110"/>
           </a:xfrm>
           <a:prstGeom prst="rect">
@@ -18079,6 +17887,253 @@
           </a:p>
         </p:txBody>
       </p:sp>
+      <p:sp>
+        <p:nvSpPr>
+          <p:cNvPr id="5" name="Content Placeholder 2">
+            <a:extLst>
+              <a:ext uri="{FF2B5EF4-FFF2-40B4-BE49-F238E27FC236}">
+                <a16:creationId xmlns:a16="http://schemas.microsoft.com/office/drawing/2014/main" id="{03AEC85B-41AE-A96A-89D9-AED487ACF81E}"/>
+              </a:ext>
+            </a:extLst>
+          </p:cNvPr>
+          <p:cNvSpPr txBox="1">
+            <a:spLocks/>
+          </p:cNvSpPr>
+          <p:nvPr/>
+        </p:nvSpPr>
+        <p:spPr>
+          <a:xfrm>
+            <a:off x="609600" y="5010091"/>
+            <a:ext cx="10972800" cy="1446682"/>
+          </a:xfrm>
+          <a:prstGeom prst="rect">
+            <a:avLst/>
+          </a:prstGeom>
+          <a:ln>
+            <a:noFill/>
+          </a:ln>
+        </p:spPr>
+        <p:txBody>
+          <a:bodyPr vert="horz" lIns="91440" tIns="45720" rIns="91440" bIns="45720" rtlCol="0" anchor="ctr">
+            <a:noAutofit/>
+          </a:bodyPr>
+          <a:lstStyle>
+            <a:lvl1pPr marL="228600" indent="-228600" algn="l" defTabSz="914400" rtl="0" eaLnBrk="1" latinLnBrk="0" hangingPunct="1">
+              <a:lnSpc>
+                <a:spcPct val="90000"/>
+              </a:lnSpc>
+              <a:spcBef>
+                <a:spcPts val="1000"/>
+              </a:spcBef>
+              <a:buFont typeface="Arial" panose="020B0604020202020204" pitchFamily="34" charset="0"/>
+              <a:buChar char="•"/>
+              <a:defRPr sz="2800" kern="1200">
+                <a:solidFill>
+                  <a:schemeClr val="tx1"/>
+                </a:solidFill>
+                <a:latin typeface="+mn-lt"/>
+                <a:ea typeface="+mn-ea"/>
+                <a:cs typeface="+mn-cs"/>
+              </a:defRPr>
+            </a:lvl1pPr>
+            <a:lvl2pPr marL="685800" indent="-228600" algn="l" defTabSz="914400" rtl="0" eaLnBrk="1" latinLnBrk="0" hangingPunct="1">
+              <a:lnSpc>
+                <a:spcPct val="90000"/>
+              </a:lnSpc>
+              <a:spcBef>
+                <a:spcPts val="500"/>
+              </a:spcBef>
+              <a:buFont typeface="Arial" panose="020B0604020202020204" pitchFamily="34" charset="0"/>
+              <a:buChar char="•"/>
+              <a:defRPr sz="2400" kern="1200">
+                <a:solidFill>
+                  <a:schemeClr val="tx1"/>
+                </a:solidFill>
+                <a:latin typeface="+mn-lt"/>
+                <a:ea typeface="+mn-ea"/>
+                <a:cs typeface="+mn-cs"/>
+              </a:defRPr>
+            </a:lvl2pPr>
+            <a:lvl3pPr marL="1143000" indent="-228600" algn="l" defTabSz="914400" rtl="0" eaLnBrk="1" latinLnBrk="0" hangingPunct="1">
+              <a:lnSpc>
+                <a:spcPct val="90000"/>
+              </a:lnSpc>
+              <a:spcBef>
+                <a:spcPts val="500"/>
+              </a:spcBef>
+              <a:buFont typeface="Arial" panose="020B0604020202020204" pitchFamily="34" charset="0"/>
+              <a:buChar char="•"/>
+              <a:defRPr sz="2000" kern="1200">
+                <a:solidFill>
+                  <a:schemeClr val="tx1"/>
+                </a:solidFill>
+                <a:latin typeface="+mn-lt"/>
+                <a:ea typeface="+mn-ea"/>
+                <a:cs typeface="+mn-cs"/>
+              </a:defRPr>
+            </a:lvl3pPr>
+            <a:lvl4pPr marL="1600200" indent="-228600" algn="l" defTabSz="914400" rtl="0" eaLnBrk="1" latinLnBrk="0" hangingPunct="1">
+              <a:lnSpc>
+                <a:spcPct val="90000"/>
+              </a:lnSpc>
+              <a:spcBef>
+                <a:spcPts val="500"/>
+              </a:spcBef>
+              <a:buFont typeface="Arial" panose="020B0604020202020204" pitchFamily="34" charset="0"/>
+              <a:buChar char="•"/>
+              <a:defRPr sz="1800" kern="1200">
+                <a:solidFill>
+                  <a:schemeClr val="tx1"/>
+                </a:solidFill>
+                <a:latin typeface="+mn-lt"/>
+                <a:ea typeface="+mn-ea"/>
+                <a:cs typeface="+mn-cs"/>
+              </a:defRPr>
+            </a:lvl4pPr>
+            <a:lvl5pPr marL="2057400" indent="-228600" algn="l" defTabSz="914400" rtl="0" eaLnBrk="1" latinLnBrk="0" hangingPunct="1">
+              <a:lnSpc>
+                <a:spcPct val="90000"/>
+              </a:lnSpc>
+              <a:spcBef>
+                <a:spcPts val="500"/>
+              </a:spcBef>
+              <a:buFont typeface="Arial" panose="020B0604020202020204" pitchFamily="34" charset="0"/>
+              <a:buChar char="•"/>
+              <a:defRPr sz="1800" kern="1200">
+                <a:solidFill>
+                  <a:schemeClr val="tx1"/>
+                </a:solidFill>
+                <a:latin typeface="+mn-lt"/>
+                <a:ea typeface="+mn-ea"/>
+                <a:cs typeface="+mn-cs"/>
+              </a:defRPr>
+            </a:lvl5pPr>
+            <a:lvl6pPr marL="2514600" indent="-228600" algn="l" defTabSz="914400" rtl="0" eaLnBrk="1" latinLnBrk="0" hangingPunct="1">
+              <a:lnSpc>
+                <a:spcPct val="90000"/>
+              </a:lnSpc>
+              <a:spcBef>
+                <a:spcPts val="500"/>
+              </a:spcBef>
+              <a:buFont typeface="Arial" panose="020B0604020202020204" pitchFamily="34" charset="0"/>
+              <a:buChar char="•"/>
+              <a:defRPr sz="1800" kern="1200">
+                <a:solidFill>
+                  <a:schemeClr val="tx1"/>
+                </a:solidFill>
+                <a:latin typeface="+mn-lt"/>
+                <a:ea typeface="+mn-ea"/>
+                <a:cs typeface="+mn-cs"/>
+              </a:defRPr>
+            </a:lvl6pPr>
+            <a:lvl7pPr marL="2971800" indent="-228600" algn="l" defTabSz="914400" rtl="0" eaLnBrk="1" latinLnBrk="0" hangingPunct="1">
+              <a:lnSpc>
+                <a:spcPct val="90000"/>
+              </a:lnSpc>
+              <a:spcBef>
+                <a:spcPts val="500"/>
+              </a:spcBef>
+              <a:buFont typeface="Arial" panose="020B0604020202020204" pitchFamily="34" charset="0"/>
+              <a:buChar char="•"/>
+              <a:defRPr sz="1800" kern="1200">
+                <a:solidFill>
+                  <a:schemeClr val="tx1"/>
+                </a:solidFill>
+                <a:latin typeface="+mn-lt"/>
+                <a:ea typeface="+mn-ea"/>
+                <a:cs typeface="+mn-cs"/>
+              </a:defRPr>
+            </a:lvl7pPr>
+            <a:lvl8pPr marL="3429000" indent="-228600" algn="l" defTabSz="914400" rtl="0" eaLnBrk="1" latinLnBrk="0" hangingPunct="1">
+              <a:lnSpc>
+                <a:spcPct val="90000"/>
+              </a:lnSpc>
+              <a:spcBef>
+                <a:spcPts val="500"/>
+              </a:spcBef>
+              <a:buFont typeface="Arial" panose="020B0604020202020204" pitchFamily="34" charset="0"/>
+              <a:buChar char="•"/>
+              <a:defRPr sz="1800" kern="1200">
+                <a:solidFill>
+                  <a:schemeClr val="tx1"/>
+                </a:solidFill>
+                <a:latin typeface="+mn-lt"/>
+                <a:ea typeface="+mn-ea"/>
+                <a:cs typeface="+mn-cs"/>
+              </a:defRPr>
+            </a:lvl8pPr>
+            <a:lvl9pPr marL="3886200" indent="-228600" algn="l" defTabSz="914400" rtl="0" eaLnBrk="1" latinLnBrk="0" hangingPunct="1">
+              <a:lnSpc>
+                <a:spcPct val="90000"/>
+              </a:lnSpc>
+              <a:spcBef>
+                <a:spcPts val="500"/>
+              </a:spcBef>
+              <a:buFont typeface="Arial" panose="020B0604020202020204" pitchFamily="34" charset="0"/>
+              <a:buChar char="•"/>
+              <a:defRPr sz="1800" kern="1200">
+                <a:solidFill>
+                  <a:schemeClr val="tx1"/>
+                </a:solidFill>
+                <a:latin typeface="+mn-lt"/>
+                <a:ea typeface="+mn-ea"/>
+                <a:cs typeface="+mn-cs"/>
+              </a:defRPr>
+            </a:lvl9pPr>
+          </a:lstStyle>
+          <a:p>
+            <a:pPr marL="0" indent="0">
+              <a:buFont typeface="Arial" panose="020B0604020202020204" pitchFamily="34" charset="0"/>
+              <a:buNone/>
+            </a:pPr>
+            <a:r>
+              <a:rPr lang="en-US" sz="1800" b="1" dirty="0"/>
+              <a:t>Drawbacks</a:t>
+            </a:r>
+          </a:p>
+          <a:p>
+            <a:pPr lvl="1"/>
+            <a:r>
+              <a:rPr lang="en-US" sz="1800" dirty="0"/>
+              <a:t>Boosting algorithms: Not proper HPO </a:t>
+            </a:r>
+            <a:r>
+              <a:rPr lang="en-US" sz="1800" dirty="0">
+                <a:sym typeface="Wingdings" panose="05000000000000000000" pitchFamily="2" charset="2"/>
+              </a:rPr>
+              <a:t> Overfit</a:t>
+            </a:r>
+          </a:p>
+          <a:p>
+            <a:pPr marL="0" indent="0">
+              <a:buFont typeface="Arial" panose="020B0604020202020204" pitchFamily="34" charset="0"/>
+              <a:buNone/>
+            </a:pPr>
+            <a:r>
+              <a:rPr lang="en-US" sz="1800" b="1" dirty="0">
+                <a:sym typeface="Wingdings" panose="05000000000000000000" pitchFamily="2" charset="2"/>
+              </a:rPr>
+              <a:t>Notes</a:t>
+            </a:r>
+            <a:endParaRPr lang="en-US" sz="1800" b="1" dirty="0"/>
+          </a:p>
+          <a:p>
+            <a:pPr lvl="1"/>
+            <a:r>
+              <a:rPr lang="en-US" sz="1800" dirty="0"/>
+              <a:t>3</a:t>
+            </a:r>
+            <a:r>
+              <a:rPr lang="en-US" sz="1800" baseline="30000" dirty="0"/>
+              <a:t>rd</a:t>
+            </a:r>
+            <a:r>
+              <a:rPr lang="en-US" sz="1800" dirty="0"/>
+              <a:t> decimal difference between top classifiers</a:t>
+            </a:r>
+          </a:p>
+        </p:txBody>
+      </p:sp>
     </p:spTree>
     <p:extLst>
       <p:ext uri="{BB962C8B-B14F-4D97-AF65-F5344CB8AC3E}">
@@ -18092,8 +18147,331 @@
 </p:sld>
 </file>
 
-<file path=ppt/slides/slide18.xml><?xml version="1.0" encoding="utf-8"?>
+<file path=ppt/slides/slide2.xml><?xml version="1.0" encoding="utf-8"?>
 <p:sld xmlns:a="http://schemas.openxmlformats.org/drawingml/2006/main" xmlns:r="http://schemas.openxmlformats.org/officeDocument/2006/relationships" xmlns:p="http://schemas.openxmlformats.org/presentationml/2006/main">
+  <p:cSld>
+    <p:spTree>
+      <p:nvGrpSpPr>
+        <p:cNvPr id="1" name=""/>
+        <p:cNvGrpSpPr/>
+        <p:nvPr/>
+      </p:nvGrpSpPr>
+      <p:grpSpPr>
+        <a:xfrm>
+          <a:off x="0" y="0"/>
+          <a:ext cx="0" cy="0"/>
+          <a:chOff x="0" y="0"/>
+          <a:chExt cx="0" cy="0"/>
+        </a:xfrm>
+      </p:grpSpPr>
+      <p:sp>
+        <p:nvSpPr>
+          <p:cNvPr id="3" name="Title 1">
+            <a:extLst>
+              <a:ext uri="{FF2B5EF4-FFF2-40B4-BE49-F238E27FC236}">
+                <a16:creationId xmlns:a16="http://schemas.microsoft.com/office/drawing/2014/main" id="{09FB8F2E-C1EA-0356-22BA-7189EA91775F}"/>
+              </a:ext>
+            </a:extLst>
+          </p:cNvPr>
+          <p:cNvSpPr txBox="1">
+            <a:spLocks/>
+          </p:cNvSpPr>
+          <p:nvPr/>
+        </p:nvSpPr>
+        <p:spPr>
+          <a:xfrm>
+            <a:off x="838200" y="5530769"/>
+            <a:ext cx="10515600" cy="1002175"/>
+          </a:xfrm>
+          <a:prstGeom prst="rect">
+            <a:avLst/>
+          </a:prstGeom>
+          <a:noFill/>
+          <a:ln>
+            <a:noFill/>
+          </a:ln>
+        </p:spPr>
+        <p:txBody>
+          <a:bodyPr vert="horz" lIns="91440" tIns="45720" rIns="91440" bIns="45720" rtlCol="0" anchor="ctr">
+            <a:normAutofit fontScale="97500"/>
+          </a:bodyPr>
+          <a:lstStyle>
+            <a:lvl1pPr algn="l" defTabSz="914400" rtl="0" eaLnBrk="1" latinLnBrk="0" hangingPunct="1">
+              <a:lnSpc>
+                <a:spcPct val="90000"/>
+              </a:lnSpc>
+              <a:spcBef>
+                <a:spcPct val="0"/>
+              </a:spcBef>
+              <a:buNone/>
+              <a:defRPr sz="4400" kern="1200">
+                <a:solidFill>
+                  <a:schemeClr val="tx1"/>
+                </a:solidFill>
+                <a:latin typeface="+mj-lt"/>
+                <a:ea typeface="+mj-ea"/>
+                <a:cs typeface="+mj-cs"/>
+              </a:defRPr>
+            </a:lvl1pPr>
+          </a:lstStyle>
+          <a:p>
+            <a:pPr algn="ctr"/>
+            <a:r>
+              <a:rPr lang="el-GR" sz="1800" b="1" dirty="0"/>
+              <a:t>Φοιτητής/τρια: Ανδρέου Ευγενία</a:t>
+            </a:r>
+          </a:p>
+          <a:p>
+            <a:pPr algn="ctr"/>
+            <a:r>
+              <a:rPr lang="el-GR" sz="1800" b="1" dirty="0"/>
+              <a:t>Επιβλέπων Καθηγητής: Δεναξάς Σπυρίδων</a:t>
+            </a:r>
+            <a:endParaRPr lang="en-GB" sz="1800" b="1" dirty="0"/>
+          </a:p>
+        </p:txBody>
+      </p:sp>
+      <p:sp>
+        <p:nvSpPr>
+          <p:cNvPr id="4" name="Title 1">
+            <a:extLst>
+              <a:ext uri="{FF2B5EF4-FFF2-40B4-BE49-F238E27FC236}">
+                <a16:creationId xmlns:a16="http://schemas.microsoft.com/office/drawing/2014/main" id="{DA253F5B-969C-ED7C-E6DD-0409268E6EFB}"/>
+              </a:ext>
+            </a:extLst>
+          </p:cNvPr>
+          <p:cNvSpPr txBox="1">
+            <a:spLocks/>
+          </p:cNvSpPr>
+          <p:nvPr/>
+        </p:nvSpPr>
+        <p:spPr>
+          <a:xfrm>
+            <a:off x="609600" y="2674891"/>
+            <a:ext cx="10972800" cy="2558004"/>
+          </a:xfrm>
+          <a:prstGeom prst="rect">
+            <a:avLst/>
+          </a:prstGeom>
+          <a:ln>
+            <a:solidFill>
+              <a:schemeClr val="tx1"/>
+            </a:solidFill>
+          </a:ln>
+        </p:spPr>
+        <p:txBody>
+          <a:bodyPr vert="horz" lIns="91440" tIns="45720" rIns="91440" bIns="45720" rtlCol="0" anchor="ctr">
+            <a:noAutofit/>
+          </a:bodyPr>
+          <a:lstStyle>
+            <a:lvl1pPr algn="l" defTabSz="914400" rtl="0" eaLnBrk="1" latinLnBrk="0" hangingPunct="1">
+              <a:lnSpc>
+                <a:spcPct val="90000"/>
+              </a:lnSpc>
+              <a:spcBef>
+                <a:spcPct val="0"/>
+              </a:spcBef>
+              <a:buNone/>
+              <a:defRPr sz="4400" kern="1200">
+                <a:solidFill>
+                  <a:schemeClr val="tx1"/>
+                </a:solidFill>
+                <a:latin typeface="+mj-lt"/>
+                <a:ea typeface="+mj-ea"/>
+                <a:cs typeface="+mj-cs"/>
+              </a:defRPr>
+            </a:lvl1pPr>
+          </a:lstStyle>
+          <a:p>
+            <a:pPr algn="ctr"/>
+            <a:r>
+              <a:rPr lang="en-GB" sz="3000" b="1" dirty="0"/>
+              <a:t>Predicting early termination of clinical trials, with machine learning vs classical regression models, based on analysis of their design characteristics</a:t>
+            </a:r>
+          </a:p>
+        </p:txBody>
+      </p:sp>
+      <p:pic>
+        <p:nvPicPr>
+          <p:cNvPr id="2" name="Picture 1">
+            <a:extLst>
+              <a:ext uri="{FF2B5EF4-FFF2-40B4-BE49-F238E27FC236}">
+                <a16:creationId xmlns:a16="http://schemas.microsoft.com/office/drawing/2014/main" id="{5D46DE69-A32F-DC72-8928-3B97AD27BEA8}"/>
+              </a:ext>
+            </a:extLst>
+          </p:cNvPr>
+          <p:cNvPicPr>
+            <a:picLocks noChangeAspect="1"/>
+          </p:cNvPicPr>
+          <p:nvPr/>
+        </p:nvPicPr>
+        <p:blipFill>
+          <a:blip r:embed="rId2"/>
+          <a:stretch>
+            <a:fillRect/>
+          </a:stretch>
+        </p:blipFill>
+        <p:spPr>
+          <a:xfrm>
+            <a:off x="609600" y="438968"/>
+            <a:ext cx="3247663" cy="1090818"/>
+          </a:xfrm>
+          <a:prstGeom prst="rect">
+            <a:avLst/>
+          </a:prstGeom>
+          <a:ln>
+            <a:noFill/>
+          </a:ln>
+          <a:effectLst>
+            <a:softEdge rad="112500"/>
+          </a:effectLst>
+        </p:spPr>
+      </p:pic>
+      <p:sp>
+        <p:nvSpPr>
+          <p:cNvPr id="5" name="Title 1">
+            <a:extLst>
+              <a:ext uri="{FF2B5EF4-FFF2-40B4-BE49-F238E27FC236}">
+                <a16:creationId xmlns:a16="http://schemas.microsoft.com/office/drawing/2014/main" id="{7F59F5FB-A94B-31DE-2AAA-445E59F01FC2}"/>
+              </a:ext>
+            </a:extLst>
+          </p:cNvPr>
+          <p:cNvSpPr>
+            <a:spLocks noGrp="1"/>
+          </p:cNvSpPr>
+          <p:nvPr>
+            <p:ph type="title"/>
+          </p:nvPr>
+        </p:nvSpPr>
+        <p:spPr>
+          <a:xfrm>
+            <a:off x="609600" y="1919818"/>
+            <a:ext cx="10972800" cy="457200"/>
+          </a:xfrm>
+          <a:ln>
+            <a:solidFill>
+              <a:schemeClr val="tx1"/>
+            </a:solidFill>
+          </a:ln>
+        </p:spPr>
+        <p:txBody>
+          <a:bodyPr>
+            <a:noAutofit/>
+          </a:bodyPr>
+          <a:lstStyle/>
+          <a:p>
+            <a:pPr algn="ctr"/>
+            <a:r>
+              <a:rPr lang="en-US" sz="3000" b="1" dirty="0"/>
+              <a:t>Title</a:t>
+            </a:r>
+            <a:endParaRPr lang="el-GR" sz="3000" b="1" dirty="0"/>
+          </a:p>
+        </p:txBody>
+      </p:sp>
+    </p:spTree>
+    <p:extLst>
+      <p:ext uri="{BB962C8B-B14F-4D97-AF65-F5344CB8AC3E}">
+        <p14:creationId xmlns:p14="http://schemas.microsoft.com/office/powerpoint/2010/main" val="568867521"/>
+      </p:ext>
+    </p:extLst>
+  </p:cSld>
+  <p:clrMapOvr>
+    <a:masterClrMapping/>
+  </p:clrMapOvr>
+</p:sld>
+</file>
+
+<file path=ppt/slides/slide20.xml><?xml version="1.0" encoding="utf-8"?>
+<p:sld xmlns:a="http://schemas.openxmlformats.org/drawingml/2006/main" xmlns:r="http://schemas.openxmlformats.org/officeDocument/2006/relationships" xmlns:p="http://schemas.openxmlformats.org/presentationml/2006/main">
+  <p:cSld>
+    <p:spTree>
+      <p:nvGrpSpPr>
+        <p:cNvPr id="1" name="">
+          <a:extLst>
+            <a:ext uri="{FF2B5EF4-FFF2-40B4-BE49-F238E27FC236}">
+              <a16:creationId xmlns:a16="http://schemas.microsoft.com/office/drawing/2014/main" id="{FF76255C-EA62-FEF1-9694-58748D2C0BBB}"/>
+            </a:ext>
+          </a:extLst>
+        </p:cNvPr>
+        <p:cNvGrpSpPr/>
+        <p:nvPr/>
+      </p:nvGrpSpPr>
+      <p:grpSpPr>
+        <a:xfrm>
+          <a:off x="0" y="0"/>
+          <a:ext cx="0" cy="0"/>
+          <a:chOff x="0" y="0"/>
+          <a:chExt cx="0" cy="0"/>
+        </a:xfrm>
+      </p:grpSpPr>
+      <p:sp>
+        <p:nvSpPr>
+          <p:cNvPr id="2" name="Title 1">
+            <a:extLst>
+              <a:ext uri="{FF2B5EF4-FFF2-40B4-BE49-F238E27FC236}">
+                <a16:creationId xmlns:a16="http://schemas.microsoft.com/office/drawing/2014/main" id="{534ED583-2CAB-0ED2-E987-A4E0E320A1A6}"/>
+              </a:ext>
+            </a:extLst>
+          </p:cNvPr>
+          <p:cNvSpPr>
+            <a:spLocks noGrp="1"/>
+          </p:cNvSpPr>
+          <p:nvPr>
+            <p:ph type="title"/>
+          </p:nvPr>
+        </p:nvSpPr>
+        <p:spPr>
+          <a:xfrm>
+            <a:off x="2720050" y="1821566"/>
+            <a:ext cx="6751899" cy="3214868"/>
+          </a:xfrm>
+          <a:prstGeom prst="plaque">
+            <a:avLst/>
+          </a:prstGeom>
+          <a:noFill/>
+          <a:ln w="19050">
+            <a:solidFill>
+              <a:schemeClr val="tx1"/>
+            </a:solidFill>
+          </a:ln>
+          <a:effectLst>
+            <a:outerShdw blurRad="63500" sx="102000" sy="102000" algn="ctr" rotWithShape="0">
+              <a:prstClr val="black">
+                <a:alpha val="40000"/>
+              </a:prstClr>
+            </a:outerShdw>
+          </a:effectLst>
+        </p:spPr>
+        <p:txBody>
+          <a:bodyPr>
+            <a:normAutofit/>
+          </a:bodyPr>
+          <a:lstStyle/>
+          <a:p>
+            <a:pPr algn="ctr"/>
+            <a:r>
+              <a:rPr lang="en-GB" sz="4000" b="1" dirty="0"/>
+              <a:t>Predictors</a:t>
+            </a:r>
+          </a:p>
+        </p:txBody>
+      </p:sp>
+    </p:spTree>
+    <p:extLst>
+      <p:ext uri="{BB962C8B-B14F-4D97-AF65-F5344CB8AC3E}">
+        <p14:creationId xmlns:p14="http://schemas.microsoft.com/office/powerpoint/2010/main" val="730092505"/>
+      </p:ext>
+    </p:extLst>
+  </p:cSld>
+  <p:clrMapOvr>
+    <a:masterClrMapping/>
+  </p:clrMapOvr>
+</p:sld>
+</file>
+
+<file path=ppt/slides/slide21.xml><?xml version="1.0" encoding="utf-8"?>
+<p:sld xmlns:a="http://schemas.openxmlformats.org/drawingml/2006/main" xmlns:r="http://schemas.openxmlformats.org/officeDocument/2006/relationships" xmlns:p="http://schemas.openxmlformats.org/presentationml/2006/main" show="0">
   <p:cSld>
     <p:spTree>
       <p:nvGrpSpPr>
@@ -18144,7 +18522,7 @@
           <a:p>
             <a:r>
               <a:rPr lang="en-US" sz="3000" b="1" dirty="0"/>
-              <a:t>Features ~ Phases</a:t>
+              <a:t>Features ~ Termination ~ Phases</a:t>
             </a:r>
             <a:endParaRPr lang="en-GB" sz="3000" b="1" dirty="0"/>
           </a:p>
@@ -18189,12 +18567,9 @@
               <a:rPr lang="en-US" sz="2000" b="1" dirty="0"/>
               <a:t>Phase 1:  </a:t>
             </a:r>
-            <a:br>
-              <a:rPr lang="en-US" sz="2000" b="1" dirty="0"/>
-            </a:br>
             <a:r>
               <a:rPr lang="en-GB" sz="2000" b="1" dirty="0"/>
-              <a:t>Dose-Escalation | Human Pharmacology</a:t>
+              <a:t>Dose-Escalation | Pharmacology</a:t>
             </a:r>
             <a:endParaRPr lang="en-US" sz="2000" b="1" dirty="0"/>
           </a:p>
@@ -18219,14 +18594,7 @@
             <a:pPr algn="l"/>
             <a:r>
               <a:rPr lang="en-GB" sz="2000" b="1" dirty="0"/>
-              <a:t>Phase 2:  </a:t>
-            </a:r>
-            <a:br>
-              <a:rPr lang="en-GB" sz="2000" b="1" dirty="0"/>
-            </a:br>
-            <a:r>
-              <a:rPr lang="en-GB" sz="2000" b="1" dirty="0"/>
-              <a:t>Therapeutic Exploratory</a:t>
+              <a:t>Phase 2:  Therapeutic Exploratory</a:t>
             </a:r>
             <a:endParaRPr lang="en-US" sz="2000" b="1" dirty="0"/>
           </a:p>
@@ -18247,15 +18615,23 @@
             </a:pPr>
             <a:r>
               <a:rPr lang="en-US" sz="2000" dirty="0"/>
-              <a:t>1</a:t>
-            </a:r>
-            <a:r>
-              <a:rPr lang="en-US" sz="2000" baseline="30000" dirty="0"/>
-              <a:t>st</a:t>
+              <a:t>Early</a:t>
+            </a:r>
+            <a:r>
+              <a:rPr lang="el-GR" sz="2000" dirty="0"/>
+              <a:t> </a:t>
             </a:r>
             <a:r>
               <a:rPr lang="en-US" sz="2000" dirty="0"/>
-              <a:t> scaled phase</a:t>
+              <a:t>efficacy data</a:t>
+            </a:r>
+            <a:r>
+              <a:rPr lang="el-GR" sz="2000" dirty="0"/>
+              <a:t> </a:t>
+            </a:r>
+            <a:r>
+              <a:rPr lang="en-GB" sz="2000" dirty="0"/>
+              <a:t>(transitional to phase 3)</a:t>
             </a:r>
           </a:p>
           <a:p>
@@ -18265,23 +18641,15 @@
             </a:pPr>
             <a:r>
               <a:rPr lang="en-US" sz="2000" dirty="0"/>
-              <a:t>Early</a:t>
-            </a:r>
-            <a:r>
-              <a:rPr lang="el-GR" sz="2000" dirty="0"/>
-              <a:t> </a:t>
+              <a:t>1</a:t>
+            </a:r>
+            <a:r>
+              <a:rPr lang="en-US" sz="2000" baseline="30000" dirty="0"/>
+              <a:t>st</a:t>
             </a:r>
             <a:r>
               <a:rPr lang="en-US" sz="2000" dirty="0"/>
-              <a:t>efficacy data</a:t>
-            </a:r>
-            <a:r>
-              <a:rPr lang="el-GR" sz="2000" dirty="0"/>
-              <a:t> </a:t>
-            </a:r>
-            <a:r>
-              <a:rPr lang="en-GB" sz="2000" dirty="0"/>
-              <a:t>(transitional to phase 3)</a:t>
+              <a:t> scaled phase</a:t>
             </a:r>
           </a:p>
         </p:txBody>
@@ -18534,22 +18902,6 @@
               </a:rPr>
               <a:t> </a:t>
             </a:r>
-            <a:br>
-              <a:rPr kumimoji="0" lang="en-GB" sz="2000" b="1" i="0" u="none" strike="noStrike" kern="1200" cap="none" spc="0" normalizeH="0" baseline="0" noProof="0" dirty="0">
-                <a:ln>
-                  <a:noFill/>
-                </a:ln>
-                <a:solidFill>
-                  <a:prstClr val="black"/>
-                </a:solidFill>
-                <a:effectLst/>
-                <a:uLnTx/>
-                <a:uFillTx/>
-                <a:latin typeface="Aptos" panose="02110004020202020204"/>
-                <a:ea typeface="+mn-ea"/>
-                <a:cs typeface="+mn-cs"/>
-              </a:rPr>
-            </a:br>
             <a:r>
               <a:rPr kumimoji="0" lang="en-GB" sz="2000" b="1" i="0" u="none" strike="noStrike" kern="1200" cap="none" spc="0" normalizeH="0" baseline="0" noProof="0" dirty="0">
                 <a:ln>
@@ -18687,23 +19039,6 @@
               <a:defRPr/>
             </a:pPr>
             <a:r>
-              <a:rPr kumimoji="0" lang="en-US" sz="2000" b="0" i="0" u="none" strike="noStrike" kern="1200" cap="none" spc="0" normalizeH="0" baseline="0" noProof="0" dirty="0">
-                <a:ln>
-                  <a:noFill/>
-                </a:ln>
-                <a:solidFill>
-                  <a:prstClr val="black"/>
-                </a:solidFill>
-                <a:effectLst/>
-                <a:uLnTx/>
-                <a:uFillTx/>
-                <a:latin typeface="Aptos" panose="02110004020202020204"/>
-                <a:ea typeface="+mn-ea"/>
-                <a:cs typeface="+mn-cs"/>
-              </a:rPr>
-              <a:t>Scaled - </a:t>
-            </a:r>
-            <a:r>
               <a:rPr kumimoji="0" lang="en-GB" sz="2000" b="0" i="0" u="none" strike="noStrike" kern="1200" cap="none" spc="0" normalizeH="0" baseline="0" noProof="0" dirty="0">
                 <a:ln>
                   <a:noFill/>
@@ -18718,7 +19053,33 @@
                 <a:ea typeface="+mn-ea"/>
                 <a:cs typeface="+mn-cs"/>
               </a:rPr>
-              <a:t>Study Design important</a:t>
+              <a:t>Study Design highly important </a:t>
+            </a:r>
+            <a:r>
+              <a:rPr lang="en-GB" sz="2000" dirty="0">
+                <a:solidFill>
+                  <a:prstClr val="black"/>
+                </a:solidFill>
+                <a:latin typeface="Aptos" panose="02110004020202020204"/>
+              </a:rPr>
+              <a:t>- </a:t>
+            </a:r>
+            <a:r>
+              <a:rPr kumimoji="0" lang="en-GB" sz="2000" b="0" i="0" u="none" strike="noStrike" kern="1200" cap="none" spc="0" normalizeH="0" baseline="0" noProof="0" dirty="0">
+                <a:ln>
+                  <a:noFill/>
+                </a:ln>
+                <a:solidFill>
+                  <a:prstClr val="black"/>
+                </a:solidFill>
+                <a:effectLst/>
+                <a:uLnTx/>
+                <a:uFillTx/>
+                <a:latin typeface="Aptos" panose="02110004020202020204"/>
+                <a:ea typeface="+mn-ea"/>
+                <a:cs typeface="+mn-cs"/>
+              </a:rPr>
+              <a:t>Scaled</a:t>
             </a:r>
             <a:endParaRPr kumimoji="0" lang="en-US" sz="2000" b="0" i="0" u="none" strike="noStrike" kern="1200" cap="none" spc="0" normalizeH="0" baseline="0" noProof="0" dirty="0">
               <a:ln>
@@ -18801,40 +19162,7 @@
                 <a:ea typeface="+mn-ea"/>
                 <a:cs typeface="+mn-cs"/>
               </a:rPr>
-              <a:t>Phase 4: </a:t>
-            </a:r>
-            <a:br>
-              <a:rPr kumimoji="0" lang="en-US" sz="2000" b="1" i="0" u="none" strike="noStrike" kern="1200" cap="none" spc="0" normalizeH="0" baseline="0" noProof="0" dirty="0">
-                <a:ln>
-                  <a:noFill/>
-                </a:ln>
-                <a:solidFill>
-                  <a:prstClr val="black"/>
-                </a:solidFill>
-                <a:effectLst/>
-                <a:uLnTx/>
-                <a:uFillTx/>
-                <a:latin typeface="Aptos" panose="02110004020202020204"/>
-                <a:ea typeface="+mn-ea"/>
-                <a:cs typeface="+mn-cs"/>
-              </a:rPr>
-            </a:br>
-            <a:r>
-              <a:rPr kumimoji="0" lang="en-US" sz="2000" b="1" i="0" u="none" strike="noStrike" kern="1200" cap="none" spc="0" normalizeH="0" baseline="0" noProof="0" dirty="0">
-                <a:ln>
-                  <a:noFill/>
-                </a:ln>
-                <a:solidFill>
-                  <a:prstClr val="black"/>
-                </a:solidFill>
-                <a:effectLst/>
-                <a:uLnTx/>
-                <a:uFillTx/>
-                <a:latin typeface="Aptos" panose="02110004020202020204"/>
-                <a:ea typeface="+mn-ea"/>
-                <a:cs typeface="+mn-cs"/>
-              </a:rPr>
-              <a:t>Therapeutic Use | Post-Marketing</a:t>
+              <a:t>Phase 4: Therapeutic Use | Post-Marketing</a:t>
             </a:r>
           </a:p>
           <a:p>
@@ -18961,85 +19289,6 @@
           </a:p>
         </p:txBody>
       </p:sp>
-      <p:sp>
-        <p:nvSpPr>
-          <p:cNvPr id="3" name="TextBox 2">
-            <a:extLst>
-              <a:ext uri="{FF2B5EF4-FFF2-40B4-BE49-F238E27FC236}">
-                <a16:creationId xmlns:a16="http://schemas.microsoft.com/office/drawing/2014/main" id="{754C2201-BFB4-BE44-95E3-C5031C5EFFD6}"/>
-              </a:ext>
-            </a:extLst>
-          </p:cNvPr>
-          <p:cNvSpPr txBox="1"/>
-          <p:nvPr/>
-        </p:nvSpPr>
-        <p:spPr>
-          <a:xfrm>
-            <a:off x="599954" y="937549"/>
-            <a:ext cx="10982446" cy="400110"/>
-          </a:xfrm>
-          <a:prstGeom prst="rect">
-            <a:avLst/>
-          </a:prstGeom>
-          <a:noFill/>
-        </p:spPr>
-        <p:txBody>
-          <a:bodyPr wrap="square" rtlCol="0">
-            <a:spAutoFit/>
-          </a:bodyPr>
-          <a:lstStyle/>
-          <a:p>
-            <a:pPr marL="0" marR="0" lvl="0" indent="0" algn="ctr" defTabSz="914400" rtl="0" eaLnBrk="1" fontAlgn="auto" latinLnBrk="0" hangingPunct="1">
-              <a:lnSpc>
-                <a:spcPct val="100000"/>
-              </a:lnSpc>
-              <a:spcBef>
-                <a:spcPts val="0"/>
-              </a:spcBef>
-              <a:spcAft>
-                <a:spcPts val="0"/>
-              </a:spcAft>
-              <a:buClrTx/>
-              <a:buSzTx/>
-              <a:buFontTx/>
-              <a:buNone/>
-              <a:tabLst/>
-              <a:defRPr/>
-            </a:pPr>
-            <a:r>
-              <a:rPr kumimoji="0" lang="en-US" sz="2000" b="0" i="0" u="none" strike="noStrike" kern="1200" cap="none" spc="0" normalizeH="0" baseline="0" noProof="0" dirty="0">
-                <a:ln>
-                  <a:noFill/>
-                </a:ln>
-                <a:solidFill>
-                  <a:prstClr val="black"/>
-                </a:solidFill>
-                <a:effectLst/>
-                <a:uLnTx/>
-                <a:uFillTx/>
-                <a:latin typeface="Aptos" panose="02110004020202020204"/>
-                <a:ea typeface="+mn-ea"/>
-                <a:cs typeface="+mn-cs"/>
-              </a:rPr>
-              <a:t>Factors ~ Termination ~ Phase</a:t>
-            </a:r>
-            <a:endParaRPr kumimoji="0" lang="en-GB" sz="2000" b="0" i="0" u="none" strike="noStrike" kern="1200" cap="none" spc="0" normalizeH="0" baseline="0" noProof="0" dirty="0">
-              <a:ln>
-                <a:noFill/>
-              </a:ln>
-              <a:solidFill>
-                <a:prstClr val="black"/>
-              </a:solidFill>
-              <a:effectLst/>
-              <a:uLnTx/>
-              <a:uFillTx/>
-              <a:latin typeface="Aptos" panose="02110004020202020204"/>
-              <a:ea typeface="+mn-ea"/>
-              <a:cs typeface="+mn-cs"/>
-            </a:endParaRPr>
-          </a:p>
-        </p:txBody>
-      </p:sp>
     </p:spTree>
     <p:extLst>
       <p:ext uri="{BB962C8B-B14F-4D97-AF65-F5344CB8AC3E}">
@@ -19053,7 +19302,7 @@
 </p:sld>
 </file>
 
-<file path=ppt/slides/slide19.xml><?xml version="1.0" encoding="utf-8"?>
+<file path=ppt/slides/slide22.xml><?xml version="1.0" encoding="utf-8"?>
 <p:sld xmlns:a="http://schemas.openxmlformats.org/drawingml/2006/main" xmlns:r="http://schemas.openxmlformats.org/officeDocument/2006/relationships" xmlns:p="http://schemas.openxmlformats.org/presentationml/2006/main" show="0">
   <p:cSld>
     <p:spTree>
@@ -19086,8 +19335,8 @@
         </p:nvSpPr>
         <p:spPr>
           <a:xfrm>
-            <a:off x="609601" y="1852440"/>
-            <a:ext cx="6786623" cy="4085260"/>
+            <a:off x="609601" y="1817225"/>
+            <a:ext cx="6913943" cy="4213185"/>
           </a:xfrm>
           <a:prstGeom prst="rect">
             <a:avLst/>
@@ -19455,8 +19704,8 @@
         </p:blipFill>
         <p:spPr>
           <a:xfrm>
-            <a:off x="8140423" y="1852439"/>
-            <a:ext cx="3441977" cy="4085260"/>
+            <a:off x="7878501" y="1724738"/>
+            <a:ext cx="3703898" cy="4396132"/>
           </a:xfrm>
           <a:prstGeom prst="rect">
             <a:avLst/>
@@ -19484,485 +19733,7 @@
 </p:sld>
 </file>
 
-<file path=ppt/slides/slide2.xml><?xml version="1.0" encoding="utf-8"?>
-<p:sld xmlns:a="http://schemas.openxmlformats.org/drawingml/2006/main" xmlns:r="http://schemas.openxmlformats.org/officeDocument/2006/relationships" xmlns:p="http://schemas.openxmlformats.org/presentationml/2006/main">
-  <p:cSld>
-    <p:spTree>
-      <p:nvGrpSpPr>
-        <p:cNvPr id="1" name=""/>
-        <p:cNvGrpSpPr/>
-        <p:nvPr/>
-      </p:nvGrpSpPr>
-      <p:grpSpPr>
-        <a:xfrm>
-          <a:off x="0" y="0"/>
-          <a:ext cx="0" cy="0"/>
-          <a:chOff x="0" y="0"/>
-          <a:chExt cx="0" cy="0"/>
-        </a:xfrm>
-      </p:grpSpPr>
-      <p:sp>
-        <p:nvSpPr>
-          <p:cNvPr id="3" name="Title 1">
-            <a:extLst>
-              <a:ext uri="{FF2B5EF4-FFF2-40B4-BE49-F238E27FC236}">
-                <a16:creationId xmlns:a16="http://schemas.microsoft.com/office/drawing/2014/main" id="{09FB8F2E-C1EA-0356-22BA-7189EA91775F}"/>
-              </a:ext>
-            </a:extLst>
-          </p:cNvPr>
-          <p:cNvSpPr txBox="1">
-            <a:spLocks/>
-          </p:cNvSpPr>
-          <p:nvPr/>
-        </p:nvSpPr>
-        <p:spPr>
-          <a:xfrm>
-            <a:off x="838200" y="5530769"/>
-            <a:ext cx="10515600" cy="1002175"/>
-          </a:xfrm>
-          <a:prstGeom prst="rect">
-            <a:avLst/>
-          </a:prstGeom>
-          <a:noFill/>
-          <a:ln>
-            <a:noFill/>
-          </a:ln>
-        </p:spPr>
-        <p:txBody>
-          <a:bodyPr vert="horz" lIns="91440" tIns="45720" rIns="91440" bIns="45720" rtlCol="0" anchor="ctr">
-            <a:normAutofit fontScale="97500"/>
-          </a:bodyPr>
-          <a:lstStyle>
-            <a:lvl1pPr algn="l" defTabSz="914400" rtl="0" eaLnBrk="1" latinLnBrk="0" hangingPunct="1">
-              <a:lnSpc>
-                <a:spcPct val="90000"/>
-              </a:lnSpc>
-              <a:spcBef>
-                <a:spcPct val="0"/>
-              </a:spcBef>
-              <a:buNone/>
-              <a:defRPr sz="4400" kern="1200">
-                <a:solidFill>
-                  <a:schemeClr val="tx1"/>
-                </a:solidFill>
-                <a:latin typeface="+mj-lt"/>
-                <a:ea typeface="+mj-ea"/>
-                <a:cs typeface="+mj-cs"/>
-              </a:defRPr>
-            </a:lvl1pPr>
-          </a:lstStyle>
-          <a:p>
-            <a:pPr algn="ctr"/>
-            <a:r>
-              <a:rPr lang="el-GR" sz="1800" b="1" dirty="0"/>
-              <a:t>Φοιτητής/τρια: Ανδρέου Ευγενία</a:t>
-            </a:r>
-          </a:p>
-          <a:p>
-            <a:pPr algn="ctr"/>
-            <a:r>
-              <a:rPr lang="el-GR" sz="1800" b="1" dirty="0"/>
-              <a:t>Επιβλέπων Καθηγητής: Δεναξάς Σπυρίδων</a:t>
-            </a:r>
-            <a:endParaRPr lang="en-GB" sz="1800" b="1" dirty="0"/>
-          </a:p>
-        </p:txBody>
-      </p:sp>
-      <p:sp>
-        <p:nvSpPr>
-          <p:cNvPr id="4" name="Title 1">
-            <a:extLst>
-              <a:ext uri="{FF2B5EF4-FFF2-40B4-BE49-F238E27FC236}">
-                <a16:creationId xmlns:a16="http://schemas.microsoft.com/office/drawing/2014/main" id="{DA253F5B-969C-ED7C-E6DD-0409268E6EFB}"/>
-              </a:ext>
-            </a:extLst>
-          </p:cNvPr>
-          <p:cNvSpPr txBox="1">
-            <a:spLocks/>
-          </p:cNvSpPr>
-          <p:nvPr/>
-        </p:nvSpPr>
-        <p:spPr>
-          <a:xfrm>
-            <a:off x="609600" y="2674891"/>
-            <a:ext cx="10972800" cy="2558004"/>
-          </a:xfrm>
-          <a:prstGeom prst="rect">
-            <a:avLst/>
-          </a:prstGeom>
-          <a:ln>
-            <a:solidFill>
-              <a:schemeClr val="tx1"/>
-            </a:solidFill>
-          </a:ln>
-        </p:spPr>
-        <p:txBody>
-          <a:bodyPr vert="horz" lIns="91440" tIns="45720" rIns="91440" bIns="45720" rtlCol="0" anchor="ctr">
-            <a:noAutofit/>
-          </a:bodyPr>
-          <a:lstStyle>
-            <a:lvl1pPr algn="l" defTabSz="914400" rtl="0" eaLnBrk="1" latinLnBrk="0" hangingPunct="1">
-              <a:lnSpc>
-                <a:spcPct val="90000"/>
-              </a:lnSpc>
-              <a:spcBef>
-                <a:spcPct val="0"/>
-              </a:spcBef>
-              <a:buNone/>
-              <a:defRPr sz="4400" kern="1200">
-                <a:solidFill>
-                  <a:schemeClr val="tx1"/>
-                </a:solidFill>
-                <a:latin typeface="+mj-lt"/>
-                <a:ea typeface="+mj-ea"/>
-                <a:cs typeface="+mj-cs"/>
-              </a:defRPr>
-            </a:lvl1pPr>
-          </a:lstStyle>
-          <a:p>
-            <a:pPr algn="ctr"/>
-            <a:r>
-              <a:rPr lang="en-GB" sz="3000" b="1" dirty="0"/>
-              <a:t>Predicting early termination of clinical trials, with machine learning vs classical regression models, based on analysis of their design characteristics</a:t>
-            </a:r>
-          </a:p>
-        </p:txBody>
-      </p:sp>
-      <p:pic>
-        <p:nvPicPr>
-          <p:cNvPr id="2" name="Picture 1">
-            <a:extLst>
-              <a:ext uri="{FF2B5EF4-FFF2-40B4-BE49-F238E27FC236}">
-                <a16:creationId xmlns:a16="http://schemas.microsoft.com/office/drawing/2014/main" id="{5D46DE69-A32F-DC72-8928-3B97AD27BEA8}"/>
-              </a:ext>
-            </a:extLst>
-          </p:cNvPr>
-          <p:cNvPicPr>
-            <a:picLocks noChangeAspect="1"/>
-          </p:cNvPicPr>
-          <p:nvPr/>
-        </p:nvPicPr>
-        <p:blipFill>
-          <a:blip r:embed="rId2"/>
-          <a:stretch>
-            <a:fillRect/>
-          </a:stretch>
-        </p:blipFill>
-        <p:spPr>
-          <a:xfrm>
-            <a:off x="609600" y="438968"/>
-            <a:ext cx="3247663" cy="1090818"/>
-          </a:xfrm>
-          <a:prstGeom prst="rect">
-            <a:avLst/>
-          </a:prstGeom>
-          <a:ln>
-            <a:noFill/>
-          </a:ln>
-          <a:effectLst>
-            <a:softEdge rad="112500"/>
-          </a:effectLst>
-        </p:spPr>
-      </p:pic>
-      <p:sp>
-        <p:nvSpPr>
-          <p:cNvPr id="5" name="Title 1">
-            <a:extLst>
-              <a:ext uri="{FF2B5EF4-FFF2-40B4-BE49-F238E27FC236}">
-                <a16:creationId xmlns:a16="http://schemas.microsoft.com/office/drawing/2014/main" id="{7F59F5FB-A94B-31DE-2AAA-445E59F01FC2}"/>
-              </a:ext>
-            </a:extLst>
-          </p:cNvPr>
-          <p:cNvSpPr>
-            <a:spLocks noGrp="1"/>
-          </p:cNvSpPr>
-          <p:nvPr>
-            <p:ph type="title"/>
-          </p:nvPr>
-        </p:nvSpPr>
-        <p:spPr>
-          <a:xfrm>
-            <a:off x="609600" y="1919818"/>
-            <a:ext cx="10972800" cy="457200"/>
-          </a:xfrm>
-          <a:ln>
-            <a:solidFill>
-              <a:schemeClr val="tx1"/>
-            </a:solidFill>
-          </a:ln>
-        </p:spPr>
-        <p:txBody>
-          <a:bodyPr>
-            <a:noAutofit/>
-          </a:bodyPr>
-          <a:lstStyle/>
-          <a:p>
-            <a:pPr algn="ctr"/>
-            <a:r>
-              <a:rPr lang="en-US" sz="3000" b="1" dirty="0"/>
-              <a:t>Title</a:t>
-            </a:r>
-            <a:endParaRPr lang="el-GR" sz="3000" b="1" dirty="0"/>
-          </a:p>
-        </p:txBody>
-      </p:sp>
-    </p:spTree>
-    <p:extLst>
-      <p:ext uri="{BB962C8B-B14F-4D97-AF65-F5344CB8AC3E}">
-        <p14:creationId xmlns:p14="http://schemas.microsoft.com/office/powerpoint/2010/main" val="568867521"/>
-      </p:ext>
-    </p:extLst>
-  </p:cSld>
-  <p:clrMapOvr>
-    <a:masterClrMapping/>
-  </p:clrMapOvr>
-</p:sld>
-</file>
-
-<file path=ppt/slides/slide20.xml><?xml version="1.0" encoding="utf-8"?>
-<p:sld xmlns:a="http://schemas.openxmlformats.org/drawingml/2006/main" xmlns:r="http://schemas.openxmlformats.org/officeDocument/2006/relationships" xmlns:p="http://schemas.openxmlformats.org/presentationml/2006/main">
-  <p:cSld>
-    <p:spTree>
-      <p:nvGrpSpPr>
-        <p:cNvPr id="1" name=""/>
-        <p:cNvGrpSpPr/>
-        <p:nvPr/>
-      </p:nvGrpSpPr>
-      <p:grpSpPr>
-        <a:xfrm>
-          <a:off x="0" y="0"/>
-          <a:ext cx="0" cy="0"/>
-          <a:chOff x="0" y="0"/>
-          <a:chExt cx="0" cy="0"/>
-        </a:xfrm>
-      </p:grpSpPr>
-      <p:sp>
-        <p:nvSpPr>
-          <p:cNvPr id="7" name="Content Placeholder 6">
-            <a:extLst>
-              <a:ext uri="{FF2B5EF4-FFF2-40B4-BE49-F238E27FC236}">
-                <a16:creationId xmlns:a16="http://schemas.microsoft.com/office/drawing/2014/main" id="{7379714B-1FF3-323E-6749-EA95E8C454BF}"/>
-              </a:ext>
-            </a:extLst>
-          </p:cNvPr>
-          <p:cNvSpPr>
-            <a:spLocks noGrp="1"/>
-          </p:cNvSpPr>
-          <p:nvPr>
-            <p:ph idx="1"/>
-          </p:nvPr>
-        </p:nvSpPr>
-        <p:spPr>
-          <a:xfrm>
-            <a:off x="609600" y="3321933"/>
-            <a:ext cx="10972800" cy="3211975"/>
-          </a:xfrm>
-          <a:ln>
-            <a:solidFill>
-              <a:schemeClr val="tx1"/>
-            </a:solidFill>
-          </a:ln>
-        </p:spPr>
-        <p:txBody>
-          <a:bodyPr anchor="ctr">
-            <a:noAutofit/>
-          </a:bodyPr>
-          <a:lstStyle/>
-          <a:p>
-            <a:pPr marL="0" indent="0" algn="ctr">
-              <a:buNone/>
-            </a:pPr>
-            <a:r>
-              <a:rPr lang="en-GB" sz="2500" b="1" dirty="0"/>
-              <a:t>Background</a:t>
-            </a:r>
-          </a:p>
-          <a:p>
-            <a:pPr marL="3206750"/>
-            <a:r>
-              <a:rPr lang="en-GB" sz="1800" dirty="0"/>
-              <a:t>Enrollment</a:t>
-            </a:r>
-          </a:p>
-          <a:p>
-            <a:pPr marL="3206750"/>
-            <a:r>
-              <a:rPr lang="en-GB" sz="1800" dirty="0"/>
-              <a:t>Disease category (e.g., neoplasms) </a:t>
-            </a:r>
-            <a:r>
-              <a:rPr lang="en-GB" sz="1800" dirty="0">
-                <a:sym typeface="Wingdings" panose="05000000000000000000" pitchFamily="2" charset="2"/>
-              </a:rPr>
-              <a:t> Affects enrollment</a:t>
-            </a:r>
-            <a:endParaRPr lang="en-GB" sz="1800" dirty="0"/>
-          </a:p>
-          <a:p>
-            <a:pPr marL="3206750"/>
-            <a:r>
-              <a:rPr lang="en-GB" sz="1800" dirty="0"/>
-              <a:t>Number of facilities </a:t>
-            </a:r>
-            <a:r>
-              <a:rPr lang="en-GB" sz="1800" dirty="0">
-                <a:sym typeface="Wingdings" panose="05000000000000000000" pitchFamily="2" charset="2"/>
-              </a:rPr>
-              <a:t> Also, affects enrollment</a:t>
-            </a:r>
-            <a:endParaRPr lang="en-GB" sz="1800" dirty="0"/>
-          </a:p>
-          <a:p>
-            <a:pPr marL="3206750"/>
-            <a:r>
-              <a:rPr lang="en-GB" sz="1800" dirty="0"/>
-              <a:t>Healthy Volunteers</a:t>
-            </a:r>
-          </a:p>
-          <a:p>
-            <a:pPr marL="3206750"/>
-            <a:r>
-              <a:rPr lang="en-GB" sz="1800" dirty="0"/>
-              <a:t>Number of Adverse Events</a:t>
-            </a:r>
-          </a:p>
-          <a:p>
-            <a:pPr marL="3206750"/>
-            <a:r>
-              <a:rPr lang="en-GB" sz="1800" dirty="0"/>
-              <a:t>Funder type (e.g., non-Industry)</a:t>
-            </a:r>
-          </a:p>
-          <a:p>
-            <a:pPr marL="3206750"/>
-            <a:r>
-              <a:rPr lang="en-GB" sz="1800" dirty="0"/>
-              <a:t>Other (e., Administrative, supplies etc.)</a:t>
-            </a:r>
-          </a:p>
-        </p:txBody>
-      </p:sp>
-      <p:sp>
-        <p:nvSpPr>
-          <p:cNvPr id="3" name="Title 1">
-            <a:extLst>
-              <a:ext uri="{FF2B5EF4-FFF2-40B4-BE49-F238E27FC236}">
-                <a16:creationId xmlns:a16="http://schemas.microsoft.com/office/drawing/2014/main" id="{79AA6C9D-2E20-3FDC-E624-B09367AC8F9F}"/>
-              </a:ext>
-            </a:extLst>
-          </p:cNvPr>
-          <p:cNvSpPr>
-            <a:spLocks noGrp="1"/>
-          </p:cNvSpPr>
-          <p:nvPr>
-            <p:ph type="title"/>
-          </p:nvPr>
-        </p:nvSpPr>
-        <p:spPr>
-          <a:xfrm>
-            <a:off x="609600" y="439837"/>
-            <a:ext cx="10972800" cy="457200"/>
-          </a:xfrm>
-          <a:ln>
-            <a:solidFill>
-              <a:schemeClr val="tx1"/>
-            </a:solidFill>
-          </a:ln>
-        </p:spPr>
-        <p:txBody>
-          <a:bodyPr>
-            <a:noAutofit/>
-          </a:bodyPr>
-          <a:lstStyle/>
-          <a:p>
-            <a:pPr algn="ctr"/>
-            <a:r>
-              <a:rPr lang="en-GB" sz="3200" b="1" dirty="0"/>
-              <a:t>db Pivot &amp; Background</a:t>
-            </a:r>
-          </a:p>
-        </p:txBody>
-      </p:sp>
-      <p:sp>
-        <p:nvSpPr>
-          <p:cNvPr id="2" name="TextBox 1">
-            <a:extLst>
-              <a:ext uri="{FF2B5EF4-FFF2-40B4-BE49-F238E27FC236}">
-                <a16:creationId xmlns:a16="http://schemas.microsoft.com/office/drawing/2014/main" id="{608B01A7-91F3-6875-4CD6-3BD2CA6131EB}"/>
-              </a:ext>
-            </a:extLst>
-          </p:cNvPr>
-          <p:cNvSpPr txBox="1"/>
-          <p:nvPr/>
-        </p:nvSpPr>
-        <p:spPr>
-          <a:xfrm>
-            <a:off x="609600" y="2625726"/>
-            <a:ext cx="10972800" cy="400110"/>
-          </a:xfrm>
-          <a:prstGeom prst="rect">
-            <a:avLst/>
-          </a:prstGeom>
-          <a:noFill/>
-        </p:spPr>
-        <p:txBody>
-          <a:bodyPr wrap="square" rtlCol="0" anchor="ctr">
-            <a:spAutoFit/>
-          </a:bodyPr>
-          <a:lstStyle/>
-          <a:p>
-            <a:pPr algn="ctr"/>
-            <a:r>
-              <a:rPr lang="en-US" sz="2000" dirty="0"/>
-              <a:t>Literature Alignment</a:t>
-            </a:r>
-          </a:p>
-        </p:txBody>
-      </p:sp>
-      <p:pic>
-        <p:nvPicPr>
-          <p:cNvPr id="6" name="Picture 5">
-            <a:extLst>
-              <a:ext uri="{FF2B5EF4-FFF2-40B4-BE49-F238E27FC236}">
-                <a16:creationId xmlns:a16="http://schemas.microsoft.com/office/drawing/2014/main" id="{8EC81A22-9F3E-3963-5EB9-300275B01289}"/>
-              </a:ext>
-            </a:extLst>
-          </p:cNvPr>
-          <p:cNvPicPr>
-            <a:picLocks noChangeAspect="1"/>
-          </p:cNvPicPr>
-          <p:nvPr/>
-        </p:nvPicPr>
-        <p:blipFill>
-          <a:blip r:embed="rId2"/>
-          <a:stretch>
-            <a:fillRect/>
-          </a:stretch>
-        </p:blipFill>
-        <p:spPr>
-          <a:xfrm>
-            <a:off x="1828047" y="1212869"/>
-            <a:ext cx="8535906" cy="1163060"/>
-          </a:xfrm>
-          <a:prstGeom prst="rect">
-            <a:avLst/>
-          </a:prstGeom>
-        </p:spPr>
-      </p:pic>
-    </p:spTree>
-    <p:extLst>
-      <p:ext uri="{BB962C8B-B14F-4D97-AF65-F5344CB8AC3E}">
-        <p14:creationId xmlns:p14="http://schemas.microsoft.com/office/powerpoint/2010/main" val="379656155"/>
-      </p:ext>
-    </p:extLst>
-  </p:cSld>
-  <p:clrMapOvr>
-    <a:masterClrMapping/>
-  </p:clrMapOvr>
-</p:sld>
-</file>
-
-<file path=ppt/slides/slide21.xml><?xml version="1.0" encoding="utf-8"?>
+<file path=ppt/slides/slide23.xml><?xml version="1.0" encoding="utf-8"?>
 <p:sld xmlns:a="http://schemas.openxmlformats.org/drawingml/2006/main" xmlns:r="http://schemas.openxmlformats.org/officeDocument/2006/relationships" xmlns:p="http://schemas.openxmlformats.org/presentationml/2006/main">
   <p:cSld>
     <p:spTree>
@@ -19997,7 +19768,7 @@
         </p:nvSpPr>
         <p:spPr>
           <a:xfrm>
-            <a:off x="609600" y="295675"/>
+            <a:off x="609599" y="80042"/>
             <a:ext cx="10972800" cy="457200"/>
           </a:xfrm>
           <a:ln>
@@ -20008,16 +19779,16 @@
         </p:spPr>
         <p:txBody>
           <a:bodyPr>
-            <a:normAutofit fontScale="90000"/>
+            <a:noAutofit/>
           </a:bodyPr>
           <a:lstStyle/>
           <a:p>
             <a:pPr algn="ctr"/>
             <a:r>
-              <a:rPr lang="en-US" sz="3000" b="1" dirty="0"/>
-              <a:t>Features’ Evaluation</a:t>
-            </a:r>
-            <a:endParaRPr lang="en-GB" sz="3000" b="1" dirty="0"/>
+              <a:rPr lang="en-US" sz="2500" b="1" dirty="0"/>
+              <a:t>Features ~ Termination ~ Phases</a:t>
+            </a:r>
+            <a:endParaRPr lang="en-GB" sz="2500" b="1" dirty="0"/>
           </a:p>
         </p:txBody>
       </p:sp>
@@ -20035,10 +19806,10 @@
         </p:nvGrpSpPr>
         <p:grpSpPr>
           <a:xfrm>
-            <a:off x="574879" y="848886"/>
-            <a:ext cx="11007522" cy="5856406"/>
-            <a:chOff x="574879" y="848886"/>
-            <a:chExt cx="11007522" cy="5856406"/>
+            <a:off x="609584" y="1372515"/>
+            <a:ext cx="10972809" cy="5493080"/>
+            <a:chOff x="-1216942" y="-167604"/>
+            <a:chExt cx="13772730" cy="7308093"/>
           </a:xfrm>
         </p:grpSpPr>
         <p:pic>
@@ -20063,8 +19834,8 @@
           </p:blipFill>
           <p:spPr>
             <a:xfrm>
-              <a:off x="574880" y="848886"/>
-              <a:ext cx="5486400" cy="2938072"/>
+              <a:off x="-1216942" y="-106705"/>
+              <a:ext cx="6009820" cy="3076677"/>
             </a:xfrm>
             <a:prstGeom prst="rect">
               <a:avLst/>
@@ -20099,8 +19870,8 @@
           </p:blipFill>
           <p:spPr>
             <a:xfrm>
-              <a:off x="6096000" y="848886"/>
-              <a:ext cx="5486401" cy="2938071"/>
+              <a:off x="6545968" y="-167604"/>
+              <a:ext cx="6009820" cy="3183113"/>
             </a:xfrm>
             <a:prstGeom prst="rect">
               <a:avLst/>
@@ -20135,8 +19906,8 @@
           </p:blipFill>
           <p:spPr>
             <a:xfrm>
-              <a:off x="574879" y="3767222"/>
-              <a:ext cx="5486397" cy="2938070"/>
+              <a:off x="-1216937" y="4083595"/>
+              <a:ext cx="6009818" cy="3056893"/>
             </a:xfrm>
             <a:prstGeom prst="rect">
               <a:avLst/>
@@ -20171,8 +19942,8 @@
           </p:blipFill>
           <p:spPr>
             <a:xfrm>
-              <a:off x="6096000" y="3767219"/>
-              <a:ext cx="5486401" cy="2938073"/>
+              <a:off x="6545971" y="4083592"/>
+              <a:ext cx="6009817" cy="3056897"/>
             </a:xfrm>
             <a:prstGeom prst="rect">
               <a:avLst/>
@@ -20186,6 +19957,340 @@
           </p:spPr>
         </p:pic>
       </p:grpSp>
+      <p:sp>
+        <p:nvSpPr>
+          <p:cNvPr id="6" name="TextBox 5">
+            <a:extLst>
+              <a:ext uri="{FF2B5EF4-FFF2-40B4-BE49-F238E27FC236}">
+                <a16:creationId xmlns:a16="http://schemas.microsoft.com/office/drawing/2014/main" id="{4157105E-7036-C9DB-AF3D-6B1F8BACAAB8}"/>
+              </a:ext>
+            </a:extLst>
+          </p:cNvPr>
+          <p:cNvSpPr txBox="1"/>
+          <p:nvPr/>
+        </p:nvSpPr>
+        <p:spPr>
+          <a:xfrm>
+            <a:off x="609585" y="586338"/>
+            <a:ext cx="5486401" cy="523220"/>
+          </a:xfrm>
+          <a:prstGeom prst="rect">
+            <a:avLst/>
+          </a:prstGeom>
+          <a:noFill/>
+        </p:spPr>
+        <p:txBody>
+          <a:bodyPr wrap="square" rtlCol="0">
+            <a:spAutoFit/>
+          </a:bodyPr>
+          <a:lstStyle/>
+          <a:p>
+            <a:r>
+              <a:rPr lang="en-US" sz="1400" b="1" dirty="0"/>
+              <a:t>Phase 1:  </a:t>
+            </a:r>
+            <a:r>
+              <a:rPr lang="en-GB" sz="1400" b="1" dirty="0"/>
+              <a:t>Dose-Escalation | Pharmacology</a:t>
+            </a:r>
+            <a:endParaRPr lang="en-US" sz="1400" b="1" dirty="0"/>
+          </a:p>
+          <a:p>
+            <a:pPr marL="342900" indent="-342900">
+              <a:buFont typeface="Arial" panose="020B0604020202020204" pitchFamily="34" charset="0"/>
+              <a:buChar char="•"/>
+            </a:pPr>
+            <a:r>
+              <a:rPr lang="en-US" sz="1400" dirty="0"/>
+              <a:t>Escalating dose ~ Adverse Events (e.g, MTD)</a:t>
+            </a:r>
+          </a:p>
+        </p:txBody>
+      </p:sp>
+      <p:sp>
+        <p:nvSpPr>
+          <p:cNvPr id="7" name="TextBox 6">
+            <a:extLst>
+              <a:ext uri="{FF2B5EF4-FFF2-40B4-BE49-F238E27FC236}">
+                <a16:creationId xmlns:a16="http://schemas.microsoft.com/office/drawing/2014/main" id="{B913CD2D-5BC6-5FE6-BAF8-EE6413BD5ECA}"/>
+              </a:ext>
+            </a:extLst>
+          </p:cNvPr>
+          <p:cNvSpPr txBox="1"/>
+          <p:nvPr/>
+        </p:nvSpPr>
+        <p:spPr>
+          <a:xfrm>
+            <a:off x="6794350" y="586338"/>
+            <a:ext cx="4788029" cy="954107"/>
+          </a:xfrm>
+          <a:prstGeom prst="rect">
+            <a:avLst/>
+          </a:prstGeom>
+          <a:noFill/>
+        </p:spPr>
+        <p:txBody>
+          <a:bodyPr wrap="square" rtlCol="0">
+            <a:spAutoFit/>
+          </a:bodyPr>
+          <a:lstStyle/>
+          <a:p>
+            <a:r>
+              <a:rPr lang="en-GB" sz="1400" b="1" dirty="0"/>
+              <a:t>Phase 2:  Therapeutic Exploratory</a:t>
+            </a:r>
+            <a:endParaRPr lang="en-US" sz="1400" b="1" dirty="0"/>
+          </a:p>
+          <a:p>
+            <a:pPr marL="342900" indent="-342900">
+              <a:buFont typeface="Arial" panose="020B0604020202020204" pitchFamily="34" charset="0"/>
+              <a:buChar char="•"/>
+            </a:pPr>
+            <a:r>
+              <a:rPr lang="en-US" sz="1400" dirty="0"/>
+              <a:t>Safety, Pharmaco-dynamics-kinetics</a:t>
+            </a:r>
+          </a:p>
+          <a:p>
+            <a:pPr marL="342900" indent="-342900">
+              <a:buFont typeface="Arial" panose="020B0604020202020204" pitchFamily="34" charset="0"/>
+              <a:buChar char="•"/>
+            </a:pPr>
+            <a:r>
+              <a:rPr lang="en-US" sz="1400" dirty="0"/>
+              <a:t>Early</a:t>
+            </a:r>
+            <a:r>
+              <a:rPr lang="el-GR" sz="1400" dirty="0"/>
+              <a:t> </a:t>
+            </a:r>
+            <a:r>
+              <a:rPr lang="en-US" sz="1400" dirty="0"/>
+              <a:t>efficacy data</a:t>
+            </a:r>
+            <a:r>
+              <a:rPr lang="el-GR" sz="1400" dirty="0"/>
+              <a:t> </a:t>
+            </a:r>
+            <a:r>
+              <a:rPr lang="en-GB" sz="1400" dirty="0"/>
+              <a:t>(transitional to phase 3)</a:t>
+            </a:r>
+          </a:p>
+          <a:p>
+            <a:pPr marL="342900" indent="-342900">
+              <a:buFont typeface="Arial" panose="020B0604020202020204" pitchFamily="34" charset="0"/>
+              <a:buChar char="•"/>
+            </a:pPr>
+            <a:r>
+              <a:rPr lang="en-US" sz="1400" dirty="0"/>
+              <a:t>1</a:t>
+            </a:r>
+            <a:r>
+              <a:rPr lang="en-US" sz="1400" baseline="30000" dirty="0"/>
+              <a:t>st</a:t>
+            </a:r>
+            <a:r>
+              <a:rPr lang="en-US" sz="1400" dirty="0"/>
+              <a:t> scaled phase</a:t>
+            </a:r>
+            <a:endParaRPr lang="en-GB" sz="1400" dirty="0"/>
+          </a:p>
+        </p:txBody>
+      </p:sp>
+      <p:sp>
+        <p:nvSpPr>
+          <p:cNvPr id="8" name="TextBox 7">
+            <a:extLst>
+              <a:ext uri="{FF2B5EF4-FFF2-40B4-BE49-F238E27FC236}">
+                <a16:creationId xmlns:a16="http://schemas.microsoft.com/office/drawing/2014/main" id="{79A98218-EA23-4A6D-9448-7DE23C28E4B4}"/>
+              </a:ext>
+            </a:extLst>
+          </p:cNvPr>
+          <p:cNvSpPr txBox="1"/>
+          <p:nvPr/>
+        </p:nvSpPr>
+        <p:spPr>
+          <a:xfrm>
+            <a:off x="609584" y="3730356"/>
+            <a:ext cx="5486400" cy="954107"/>
+          </a:xfrm>
+          <a:prstGeom prst="rect">
+            <a:avLst/>
+          </a:prstGeom>
+          <a:noFill/>
+        </p:spPr>
+        <p:txBody>
+          <a:bodyPr wrap="square" rtlCol="0">
+            <a:spAutoFit/>
+          </a:bodyPr>
+          <a:lstStyle/>
+          <a:p>
+            <a:pPr lvl="0">
+              <a:spcBef>
+                <a:spcPts val="1000"/>
+              </a:spcBef>
+              <a:defRPr/>
+            </a:pPr>
+            <a:r>
+              <a:rPr lang="en-GB" sz="1400" b="1" dirty="0">
+                <a:solidFill>
+                  <a:prstClr val="black"/>
+                </a:solidFill>
+              </a:rPr>
+              <a:t>Phase 3:</a:t>
+            </a:r>
+            <a:r>
+              <a:rPr lang="el-GR" sz="1400" b="1" dirty="0">
+                <a:solidFill>
+                  <a:prstClr val="black"/>
+                </a:solidFill>
+              </a:rPr>
+              <a:t> </a:t>
+            </a:r>
+            <a:r>
+              <a:rPr lang="en-GB" sz="1400" b="1" dirty="0">
+                <a:solidFill>
+                  <a:prstClr val="black"/>
+                </a:solidFill>
+              </a:rPr>
+              <a:t>Therapeutic Confirmatory | Comparative Efficacy</a:t>
+            </a:r>
+            <a:endParaRPr lang="en-US" sz="1400" b="1" dirty="0">
+              <a:solidFill>
+                <a:prstClr val="black"/>
+              </a:solidFill>
+            </a:endParaRPr>
+          </a:p>
+          <a:p>
+            <a:pPr marL="342900" lvl="0" indent="-342900">
+              <a:buFont typeface="Arial" panose="020B0604020202020204" pitchFamily="34" charset="0"/>
+              <a:buChar char="•"/>
+              <a:defRPr/>
+            </a:pPr>
+            <a:r>
+              <a:rPr lang="en-US" sz="1400" dirty="0"/>
+              <a:t>Treatments vs placebo/standard/active</a:t>
+            </a:r>
+          </a:p>
+          <a:p>
+            <a:pPr marL="342900" lvl="0" indent="-342900">
+              <a:buFont typeface="Arial" panose="020B0604020202020204" pitchFamily="34" charset="0"/>
+              <a:buChar char="•"/>
+              <a:defRPr/>
+            </a:pPr>
+            <a:r>
+              <a:rPr lang="en-US" sz="1400" dirty="0"/>
+              <a:t>Frequent Adverse Events</a:t>
+            </a:r>
+            <a:endParaRPr lang="en-GB" sz="1400" dirty="0"/>
+          </a:p>
+          <a:p>
+            <a:pPr marL="342900" lvl="0" indent="-342900">
+              <a:buFont typeface="Arial" panose="020B0604020202020204" pitchFamily="34" charset="0"/>
+              <a:buChar char="•"/>
+              <a:defRPr/>
+            </a:pPr>
+            <a:r>
+              <a:rPr lang="en-GB" sz="1400" dirty="0"/>
+              <a:t>Study Design highly important - Scaled</a:t>
+            </a:r>
+            <a:endParaRPr lang="en-US" sz="1400" dirty="0"/>
+          </a:p>
+        </p:txBody>
+      </p:sp>
+      <p:sp>
+        <p:nvSpPr>
+          <p:cNvPr id="9" name="TextBox 8">
+            <a:extLst>
+              <a:ext uri="{FF2B5EF4-FFF2-40B4-BE49-F238E27FC236}">
+                <a16:creationId xmlns:a16="http://schemas.microsoft.com/office/drawing/2014/main" id="{209E670E-5B45-0FA6-9975-323AFAF49A6A}"/>
+              </a:ext>
+            </a:extLst>
+          </p:cNvPr>
+          <p:cNvSpPr txBox="1"/>
+          <p:nvPr/>
+        </p:nvSpPr>
+        <p:spPr>
+          <a:xfrm>
+            <a:off x="6794325" y="3730356"/>
+            <a:ext cx="4788054" cy="954107"/>
+          </a:xfrm>
+          <a:prstGeom prst="rect">
+            <a:avLst/>
+          </a:prstGeom>
+          <a:noFill/>
+        </p:spPr>
+        <p:txBody>
+          <a:bodyPr wrap="square" rtlCol="0">
+            <a:spAutoFit/>
+          </a:bodyPr>
+          <a:lstStyle/>
+          <a:p>
+            <a:pPr lvl="0">
+              <a:defRPr/>
+            </a:pPr>
+            <a:r>
+              <a:rPr lang="en-US" sz="1400" b="1" dirty="0">
+                <a:solidFill>
+                  <a:prstClr val="black"/>
+                </a:solidFill>
+              </a:rPr>
+              <a:t>Phase 4: Therapeutic Use | Post-Marketing</a:t>
+            </a:r>
+          </a:p>
+          <a:p>
+            <a:pPr marL="342900" lvl="0" indent="-342900">
+              <a:buFont typeface="Arial" panose="020B0604020202020204" pitchFamily="34" charset="0"/>
+              <a:buChar char="•"/>
+              <a:defRPr/>
+            </a:pPr>
+            <a:r>
+              <a:rPr lang="en-US" sz="1400" dirty="0">
+                <a:solidFill>
+                  <a:prstClr val="black"/>
+                </a:solidFill>
+              </a:rPr>
+              <a:t>Rare Adverse Events</a:t>
+            </a:r>
+          </a:p>
+          <a:p>
+            <a:pPr marL="342900" lvl="0" indent="-342900">
+              <a:buFont typeface="Arial" panose="020B0604020202020204" pitchFamily="34" charset="0"/>
+              <a:buChar char="•"/>
+              <a:defRPr/>
+            </a:pPr>
+            <a:r>
+              <a:rPr lang="en-US" sz="1400" dirty="0">
+                <a:solidFill>
+                  <a:prstClr val="black"/>
+                </a:solidFill>
+              </a:rPr>
+              <a:t>Differences in dose-efficiency in population</a:t>
+            </a:r>
+          </a:p>
+          <a:p>
+            <a:pPr marL="342900" lvl="0" indent="-342900">
+              <a:buFont typeface="Arial" panose="020B0604020202020204" pitchFamily="34" charset="0"/>
+              <a:buChar char="•"/>
+              <a:defRPr/>
+            </a:pPr>
+            <a:r>
+              <a:rPr lang="en-US" sz="1400" dirty="0">
+                <a:solidFill>
+                  <a:prstClr val="black"/>
+                </a:solidFill>
+              </a:rPr>
+              <a:t>After drug approval - Cost Estimation</a:t>
+            </a:r>
+            <a:endParaRPr lang="en-GB" sz="1400" dirty="0">
+              <a:solidFill>
+                <a:prstClr val="black"/>
+              </a:solidFill>
+            </a:endParaRPr>
+          </a:p>
+        </p:txBody>
+      </p:sp>
     </p:spTree>
     <p:extLst>
       <p:ext uri="{BB962C8B-B14F-4D97-AF65-F5344CB8AC3E}">
@@ -20199,7 +20304,7 @@
 </p:sld>
 </file>
 
-<file path=ppt/slides/slide22.xml><?xml version="1.0" encoding="utf-8"?>
+<file path=ppt/slides/slide24.xml><?xml version="1.0" encoding="utf-8"?>
 <p:sld xmlns:a="http://schemas.openxmlformats.org/drawingml/2006/main" xmlns:r="http://schemas.openxmlformats.org/officeDocument/2006/relationships" xmlns:p="http://schemas.openxmlformats.org/presentationml/2006/main">
   <p:cSld>
     <p:spTree>
@@ -20216,192 +20321,6 @@
           <a:chExt cx="0" cy="0"/>
         </a:xfrm>
       </p:grpSpPr>
-      <p:grpSp>
-        <p:nvGrpSpPr>
-          <p:cNvPr id="19" name="Group 18">
-            <a:extLst>
-              <a:ext uri="{FF2B5EF4-FFF2-40B4-BE49-F238E27FC236}">
-                <a16:creationId xmlns:a16="http://schemas.microsoft.com/office/drawing/2014/main" id="{0E7AD118-D083-DDEE-7178-E43F222AB673}"/>
-              </a:ext>
-            </a:extLst>
-          </p:cNvPr>
-          <p:cNvGrpSpPr/>
-          <p:nvPr/>
-        </p:nvGrpSpPr>
-        <p:grpSpPr>
-          <a:xfrm>
-            <a:off x="609601" y="2251960"/>
-            <a:ext cx="10972800" cy="4301240"/>
-            <a:chOff x="985519" y="2414090"/>
-            <a:chExt cx="10220961" cy="3935123"/>
-          </a:xfrm>
-        </p:grpSpPr>
-        <p:grpSp>
-          <p:nvGrpSpPr>
-            <p:cNvPr id="13" name="Group 12">
-              <a:extLst>
-                <a:ext uri="{FF2B5EF4-FFF2-40B4-BE49-F238E27FC236}">
-                  <a16:creationId xmlns:a16="http://schemas.microsoft.com/office/drawing/2014/main" id="{1A46AA44-BBA8-2CE7-94B5-D18DA91BEFE0}"/>
-                </a:ext>
-              </a:extLst>
-            </p:cNvPr>
-            <p:cNvGrpSpPr/>
-            <p:nvPr/>
-          </p:nvGrpSpPr>
-          <p:grpSpPr>
-            <a:xfrm>
-              <a:off x="985519" y="2414093"/>
-              <a:ext cx="10220961" cy="3935120"/>
-              <a:chOff x="609599" y="2464893"/>
-              <a:chExt cx="10220961" cy="3935120"/>
-            </a:xfrm>
-          </p:grpSpPr>
-          <p:pic>
-            <p:nvPicPr>
-              <p:cNvPr id="6" name="Picture 5">
-                <a:extLst>
-                  <a:ext uri="{FF2B5EF4-FFF2-40B4-BE49-F238E27FC236}">
-                    <a16:creationId xmlns:a16="http://schemas.microsoft.com/office/drawing/2014/main" id="{9EDA3562-9FB6-36FB-68CB-62B11B520B6B}"/>
-                  </a:ext>
-                </a:extLst>
-              </p:cNvPr>
-              <p:cNvPicPr>
-                <a:picLocks noChangeAspect="1"/>
-              </p:cNvPicPr>
-              <p:nvPr/>
-            </p:nvPicPr>
-            <p:blipFill>
-              <a:blip r:embed="rId2"/>
-              <a:stretch>
-                <a:fillRect/>
-              </a:stretch>
-            </p:blipFill>
-            <p:spPr>
-              <a:xfrm>
-                <a:off x="609600" y="2464893"/>
-                <a:ext cx="5033176" cy="1917139"/>
-              </a:xfrm>
-              <a:prstGeom prst="rect">
-                <a:avLst/>
-              </a:prstGeom>
-              <a:ln>
-                <a:noFill/>
-              </a:ln>
-              <a:effectLst>
-                <a:softEdge rad="112500"/>
-              </a:effectLst>
-            </p:spPr>
-          </p:pic>
-          <p:pic>
-            <p:nvPicPr>
-              <p:cNvPr id="10" name="Picture 9">
-                <a:extLst>
-                  <a:ext uri="{FF2B5EF4-FFF2-40B4-BE49-F238E27FC236}">
-                    <a16:creationId xmlns:a16="http://schemas.microsoft.com/office/drawing/2014/main" id="{79234098-89AC-01BC-B93C-378EFF65637E}"/>
-                  </a:ext>
-                </a:extLst>
-              </p:cNvPr>
-              <p:cNvPicPr>
-                <a:picLocks noChangeAspect="1"/>
-              </p:cNvPicPr>
-              <p:nvPr/>
-            </p:nvPicPr>
-            <p:blipFill>
-              <a:blip r:embed="rId3"/>
-              <a:stretch>
-                <a:fillRect/>
-              </a:stretch>
-            </p:blipFill>
-            <p:spPr>
-              <a:xfrm>
-                <a:off x="609599" y="4482875"/>
-                <a:ext cx="5033177" cy="1917138"/>
-              </a:xfrm>
-              <a:prstGeom prst="rect">
-                <a:avLst/>
-              </a:prstGeom>
-              <a:ln>
-                <a:noFill/>
-              </a:ln>
-              <a:effectLst>
-                <a:softEdge rad="112500"/>
-              </a:effectLst>
-            </p:spPr>
-          </p:pic>
-          <p:pic>
-            <p:nvPicPr>
-              <p:cNvPr id="12" name="Picture 11">
-                <a:extLst>
-                  <a:ext uri="{FF2B5EF4-FFF2-40B4-BE49-F238E27FC236}">
-                    <a16:creationId xmlns:a16="http://schemas.microsoft.com/office/drawing/2014/main" id="{0ED05DC4-10F4-02E4-D5C3-814C3B09C2D2}"/>
-                  </a:ext>
-                </a:extLst>
-              </p:cNvPr>
-              <p:cNvPicPr>
-                <a:picLocks noChangeAspect="1"/>
-              </p:cNvPicPr>
-              <p:nvPr/>
-            </p:nvPicPr>
-            <p:blipFill>
-              <a:blip r:embed="rId4"/>
-              <a:stretch>
-                <a:fillRect/>
-              </a:stretch>
-            </p:blipFill>
-            <p:spPr>
-              <a:xfrm>
-                <a:off x="5797383" y="4482875"/>
-                <a:ext cx="5033177" cy="1917138"/>
-              </a:xfrm>
-              <a:prstGeom prst="rect">
-                <a:avLst/>
-              </a:prstGeom>
-              <a:ln>
-                <a:noFill/>
-              </a:ln>
-              <a:effectLst>
-                <a:softEdge rad="112500"/>
-              </a:effectLst>
-            </p:spPr>
-          </p:pic>
-        </p:grpSp>
-        <p:pic>
-          <p:nvPicPr>
-            <p:cNvPr id="18" name="Picture 17">
-              <a:extLst>
-                <a:ext uri="{FF2B5EF4-FFF2-40B4-BE49-F238E27FC236}">
-                  <a16:creationId xmlns:a16="http://schemas.microsoft.com/office/drawing/2014/main" id="{3ABFA820-5483-9521-8C6E-915EE34A5D3A}"/>
-                </a:ext>
-              </a:extLst>
-            </p:cNvPr>
-            <p:cNvPicPr>
-              <a:picLocks noChangeAspect="1"/>
-            </p:cNvPicPr>
-            <p:nvPr/>
-          </p:nvPicPr>
-          <p:blipFill>
-            <a:blip r:embed="rId5"/>
-            <a:stretch>
-              <a:fillRect/>
-            </a:stretch>
-          </p:blipFill>
-          <p:spPr>
-            <a:xfrm>
-              <a:off x="6173303" y="2414090"/>
-              <a:ext cx="5033176" cy="1917139"/>
-            </a:xfrm>
-            <a:prstGeom prst="rect">
-              <a:avLst/>
-            </a:prstGeom>
-            <a:ln>
-              <a:noFill/>
-            </a:ln>
-            <a:effectLst>
-              <a:softEdge rad="112500"/>
-            </a:effectLst>
-          </p:spPr>
-        </p:pic>
-      </p:grpSp>
       <p:sp>
         <p:nvSpPr>
           <p:cNvPr id="5" name="Title 1">
@@ -20418,7 +20337,7 @@
         </p:nvSpPr>
         <p:spPr>
           <a:xfrm>
-            <a:off x="609600" y="415045"/>
+            <a:off x="609599" y="182572"/>
             <a:ext cx="10972800" cy="457200"/>
           </a:xfrm>
           <a:prstGeom prst="rect">
@@ -20477,8 +20396,8 @@
         </p:nvSpPr>
         <p:spPr>
           <a:xfrm>
-            <a:off x="609600" y="1123587"/>
-            <a:ext cx="10972800" cy="923330"/>
+            <a:off x="609599" y="692211"/>
+            <a:ext cx="10972800" cy="1754326"/>
           </a:xfrm>
           <a:prstGeom prst="rect">
             <a:avLst/>
@@ -20510,12 +20429,36 @@
               <a:rPr lang="en-US" dirty="0">
                 <a:sym typeface="Wingdings" panose="05000000000000000000" pitchFamily="2" charset="2"/>
               </a:rPr>
-              <a:t> 8 top features</a:t>
+              <a:t> 8 top features (Dimension/Noise ~ Logistic &amp; Pattern)</a:t>
             </a:r>
             <a:endParaRPr lang="en-US" dirty="0"/>
           </a:p>
           <a:p>
             <a:pPr algn="ctr"/>
+            <a:endParaRPr lang="en-US" dirty="0">
+              <a:sym typeface="Wingdings" panose="05000000000000000000" pitchFamily="2" charset="2"/>
+            </a:endParaRPr>
+          </a:p>
+          <a:p>
+            <a:pPr algn="ctr"/>
+            <a:r>
+              <a:rPr lang="en-US" dirty="0">
+                <a:sym typeface="Wingdings" panose="05000000000000000000" pitchFamily="2" charset="2"/>
+              </a:rPr>
+              <a:t>SHAP ≠ Logistic Interpretation  Significance, Direction </a:t>
+            </a:r>
+          </a:p>
+          <a:p>
+            <a:pPr algn="ctr"/>
+            <a:endParaRPr lang="en-US" dirty="0">
+              <a:sym typeface="Wingdings" panose="05000000000000000000" pitchFamily="2" charset="2"/>
+            </a:endParaRPr>
+          </a:p>
+          <a:p>
+            <a:pPr marL="285750" indent="-285750" algn="ctr">
+              <a:buFont typeface="Arial" panose="020B0604020202020204" pitchFamily="34" charset="0"/>
+              <a:buChar char="•"/>
+            </a:pPr>
             <a:r>
               <a:rPr lang="en-US" dirty="0"/>
               <a:t>Enrollment </a:t>
@@ -20528,140 +20471,350 @@
             </a:r>
           </a:p>
           <a:p>
-            <a:pPr algn="ctr"/>
+            <a:pPr marL="285750" indent="-285750" algn="ctr">
+              <a:buFont typeface="Arial" panose="020B0604020202020204" pitchFamily="34" charset="0"/>
+              <a:buChar char="•"/>
+            </a:pPr>
             <a:r>
               <a:rPr lang="en-US" dirty="0">
                 <a:sym typeface="Wingdings" panose="05000000000000000000" pitchFamily="2" charset="2"/>
               </a:rPr>
-              <a:t>SHAP ≠ Logistic Interpretation  Significance, Direction</a:t>
+              <a:t>Adverse  Non-sig.  Non-linear relationship (SHAP overlap)</a:t>
             </a:r>
             <a:endParaRPr lang="en-GB" dirty="0"/>
           </a:p>
         </p:txBody>
       </p:sp>
-      <p:cxnSp>
-        <p:nvCxnSpPr>
-          <p:cNvPr id="24" name="Straight Connector 23">
+      <p:grpSp>
+        <p:nvGrpSpPr>
+          <p:cNvPr id="2" name="Group 1">
             <a:extLst>
               <a:ext uri="{FF2B5EF4-FFF2-40B4-BE49-F238E27FC236}">
-                <a16:creationId xmlns:a16="http://schemas.microsoft.com/office/drawing/2014/main" id="{47354A09-3670-2A84-AE1A-8F1DBAA5939A}"/>
+                <a16:creationId xmlns:a16="http://schemas.microsoft.com/office/drawing/2014/main" id="{B4DE4CD8-CDD8-E203-2B16-4FACB812C622}"/>
               </a:ext>
             </a:extLst>
           </p:cNvPr>
-          <p:cNvCxnSpPr/>
+          <p:cNvGrpSpPr/>
           <p:nvPr/>
-        </p:nvCxnSpPr>
-        <p:spPr>
+        </p:nvGrpSpPr>
+        <p:grpSpPr>
           <a:xfrm>
-            <a:off x="2377440" y="2950464"/>
-            <a:ext cx="548640" cy="0"/>
+            <a:off x="609599" y="2556760"/>
+            <a:ext cx="10972800" cy="4301240"/>
+            <a:chOff x="609599" y="2556760"/>
+            <a:chExt cx="10972800" cy="4301240"/>
           </a:xfrm>
-          <a:prstGeom prst="line">
-            <a:avLst/>
-          </a:prstGeom>
-          <a:ln>
-            <a:solidFill>
-              <a:schemeClr val="accent5"/>
-            </a:solidFill>
-          </a:ln>
-        </p:spPr>
-        <p:style>
-          <a:lnRef idx="2">
-            <a:schemeClr val="accent1"/>
-          </a:lnRef>
-          <a:fillRef idx="0">
-            <a:schemeClr val="accent1"/>
-          </a:fillRef>
-          <a:effectRef idx="1">
-            <a:schemeClr val="accent1"/>
-          </a:effectRef>
-          <a:fontRef idx="minor">
-            <a:schemeClr val="tx1"/>
-          </a:fontRef>
-        </p:style>
-      </p:cxnSp>
-      <p:cxnSp>
-        <p:nvCxnSpPr>
-          <p:cNvPr id="25" name="Straight Connector 24">
-            <a:extLst>
-              <a:ext uri="{FF2B5EF4-FFF2-40B4-BE49-F238E27FC236}">
-                <a16:creationId xmlns:a16="http://schemas.microsoft.com/office/drawing/2014/main" id="{ED3CAE37-E11C-EC06-E5DD-09A661000FF9}"/>
-              </a:ext>
-            </a:extLst>
-          </p:cNvPr>
-          <p:cNvCxnSpPr/>
-          <p:nvPr/>
-        </p:nvCxnSpPr>
-        <p:spPr>
-          <a:xfrm>
-            <a:off x="8540496" y="3517392"/>
-            <a:ext cx="548640" cy="0"/>
-          </a:xfrm>
-          <a:prstGeom prst="line">
-            <a:avLst/>
-          </a:prstGeom>
-          <a:ln>
-            <a:solidFill>
-              <a:schemeClr val="accent5"/>
-            </a:solidFill>
-          </a:ln>
-        </p:spPr>
-        <p:style>
-          <a:lnRef idx="2">
-            <a:schemeClr val="accent1"/>
-          </a:lnRef>
-          <a:fillRef idx="0">
-            <a:schemeClr val="accent1"/>
-          </a:fillRef>
-          <a:effectRef idx="1">
-            <a:schemeClr val="accent1"/>
-          </a:effectRef>
-          <a:fontRef idx="minor">
-            <a:schemeClr val="tx1"/>
-          </a:fontRef>
-        </p:style>
-      </p:cxnSp>
-      <p:cxnSp>
-        <p:nvCxnSpPr>
-          <p:cNvPr id="26" name="Straight Connector 25">
-            <a:extLst>
-              <a:ext uri="{FF2B5EF4-FFF2-40B4-BE49-F238E27FC236}">
-                <a16:creationId xmlns:a16="http://schemas.microsoft.com/office/drawing/2014/main" id="{4C1DC3F0-9B34-D374-BE71-99BCAC8E9ADA}"/>
-              </a:ext>
-            </a:extLst>
-          </p:cNvPr>
-          <p:cNvCxnSpPr/>
-          <p:nvPr/>
-        </p:nvCxnSpPr>
-        <p:spPr>
-          <a:xfrm>
-            <a:off x="10003536" y="3517392"/>
-            <a:ext cx="548640" cy="0"/>
-          </a:xfrm>
-          <a:prstGeom prst="line">
-            <a:avLst/>
-          </a:prstGeom>
-          <a:ln>
-            <a:solidFill>
-              <a:schemeClr val="accent5"/>
-            </a:solidFill>
-          </a:ln>
-        </p:spPr>
-        <p:style>
-          <a:lnRef idx="2">
-            <a:schemeClr val="accent1"/>
-          </a:lnRef>
-          <a:fillRef idx="0">
-            <a:schemeClr val="accent1"/>
-          </a:fillRef>
-          <a:effectRef idx="1">
-            <a:schemeClr val="accent1"/>
-          </a:effectRef>
-          <a:fontRef idx="minor">
-            <a:schemeClr val="tx1"/>
-          </a:fontRef>
-        </p:style>
-      </p:cxnSp>
+        </p:grpSpPr>
+        <p:grpSp>
+          <p:nvGrpSpPr>
+            <p:cNvPr id="19" name="Group 18">
+              <a:extLst>
+                <a:ext uri="{FF2B5EF4-FFF2-40B4-BE49-F238E27FC236}">
+                  <a16:creationId xmlns:a16="http://schemas.microsoft.com/office/drawing/2014/main" id="{0E7AD118-D083-DDEE-7178-E43F222AB673}"/>
+                </a:ext>
+              </a:extLst>
+            </p:cNvPr>
+            <p:cNvGrpSpPr/>
+            <p:nvPr/>
+          </p:nvGrpSpPr>
+          <p:grpSpPr>
+            <a:xfrm>
+              <a:off x="609599" y="2556760"/>
+              <a:ext cx="10972800" cy="4301240"/>
+              <a:chOff x="985519" y="2414090"/>
+              <a:chExt cx="10220961" cy="3935123"/>
+            </a:xfrm>
+          </p:grpSpPr>
+          <p:grpSp>
+            <p:nvGrpSpPr>
+              <p:cNvPr id="13" name="Group 12">
+                <a:extLst>
+                  <a:ext uri="{FF2B5EF4-FFF2-40B4-BE49-F238E27FC236}">
+                    <a16:creationId xmlns:a16="http://schemas.microsoft.com/office/drawing/2014/main" id="{1A46AA44-BBA8-2CE7-94B5-D18DA91BEFE0}"/>
+                  </a:ext>
+                </a:extLst>
+              </p:cNvPr>
+              <p:cNvGrpSpPr/>
+              <p:nvPr/>
+            </p:nvGrpSpPr>
+            <p:grpSpPr>
+              <a:xfrm>
+                <a:off x="985519" y="2414093"/>
+                <a:ext cx="10220961" cy="3935120"/>
+                <a:chOff x="609599" y="2464893"/>
+                <a:chExt cx="10220961" cy="3935120"/>
+              </a:xfrm>
+            </p:grpSpPr>
+            <p:pic>
+              <p:nvPicPr>
+                <p:cNvPr id="6" name="Picture 5">
+                  <a:extLst>
+                    <a:ext uri="{FF2B5EF4-FFF2-40B4-BE49-F238E27FC236}">
+                      <a16:creationId xmlns:a16="http://schemas.microsoft.com/office/drawing/2014/main" id="{9EDA3562-9FB6-36FB-68CB-62B11B520B6B}"/>
+                    </a:ext>
+                  </a:extLst>
+                </p:cNvPr>
+                <p:cNvPicPr>
+                  <a:picLocks noChangeAspect="1"/>
+                </p:cNvPicPr>
+                <p:nvPr/>
+              </p:nvPicPr>
+              <p:blipFill>
+                <a:blip r:embed="rId2"/>
+                <a:stretch>
+                  <a:fillRect/>
+                </a:stretch>
+              </p:blipFill>
+              <p:spPr>
+                <a:xfrm>
+                  <a:off x="609600" y="2464893"/>
+                  <a:ext cx="5033176" cy="1917139"/>
+                </a:xfrm>
+                <a:prstGeom prst="rect">
+                  <a:avLst/>
+                </a:prstGeom>
+                <a:ln>
+                  <a:noFill/>
+                </a:ln>
+                <a:effectLst>
+                  <a:softEdge rad="112500"/>
+                </a:effectLst>
+              </p:spPr>
+            </p:pic>
+            <p:pic>
+              <p:nvPicPr>
+                <p:cNvPr id="10" name="Picture 9">
+                  <a:extLst>
+                    <a:ext uri="{FF2B5EF4-FFF2-40B4-BE49-F238E27FC236}">
+                      <a16:creationId xmlns:a16="http://schemas.microsoft.com/office/drawing/2014/main" id="{79234098-89AC-01BC-B93C-378EFF65637E}"/>
+                    </a:ext>
+                  </a:extLst>
+                </p:cNvPr>
+                <p:cNvPicPr>
+                  <a:picLocks noChangeAspect="1"/>
+                </p:cNvPicPr>
+                <p:nvPr/>
+              </p:nvPicPr>
+              <p:blipFill>
+                <a:blip r:embed="rId3"/>
+                <a:stretch>
+                  <a:fillRect/>
+                </a:stretch>
+              </p:blipFill>
+              <p:spPr>
+                <a:xfrm>
+                  <a:off x="609599" y="4482875"/>
+                  <a:ext cx="5033177" cy="1917138"/>
+                </a:xfrm>
+                <a:prstGeom prst="rect">
+                  <a:avLst/>
+                </a:prstGeom>
+                <a:ln>
+                  <a:noFill/>
+                </a:ln>
+                <a:effectLst>
+                  <a:softEdge rad="112500"/>
+                </a:effectLst>
+              </p:spPr>
+            </p:pic>
+            <p:pic>
+              <p:nvPicPr>
+                <p:cNvPr id="12" name="Picture 11">
+                  <a:extLst>
+                    <a:ext uri="{FF2B5EF4-FFF2-40B4-BE49-F238E27FC236}">
+                      <a16:creationId xmlns:a16="http://schemas.microsoft.com/office/drawing/2014/main" id="{0ED05DC4-10F4-02E4-D5C3-814C3B09C2D2}"/>
+                    </a:ext>
+                  </a:extLst>
+                </p:cNvPr>
+                <p:cNvPicPr>
+                  <a:picLocks noChangeAspect="1"/>
+                </p:cNvPicPr>
+                <p:nvPr/>
+              </p:nvPicPr>
+              <p:blipFill>
+                <a:blip r:embed="rId4"/>
+                <a:stretch>
+                  <a:fillRect/>
+                </a:stretch>
+              </p:blipFill>
+              <p:spPr>
+                <a:xfrm>
+                  <a:off x="5797383" y="4482875"/>
+                  <a:ext cx="5033177" cy="1917138"/>
+                </a:xfrm>
+                <a:prstGeom prst="rect">
+                  <a:avLst/>
+                </a:prstGeom>
+                <a:ln>
+                  <a:noFill/>
+                </a:ln>
+                <a:effectLst>
+                  <a:softEdge rad="112500"/>
+                </a:effectLst>
+              </p:spPr>
+            </p:pic>
+          </p:grpSp>
+          <p:pic>
+            <p:nvPicPr>
+              <p:cNvPr id="18" name="Picture 17">
+                <a:extLst>
+                  <a:ext uri="{FF2B5EF4-FFF2-40B4-BE49-F238E27FC236}">
+                    <a16:creationId xmlns:a16="http://schemas.microsoft.com/office/drawing/2014/main" id="{3ABFA820-5483-9521-8C6E-915EE34A5D3A}"/>
+                  </a:ext>
+                </a:extLst>
+              </p:cNvPr>
+              <p:cNvPicPr>
+                <a:picLocks noChangeAspect="1"/>
+              </p:cNvPicPr>
+              <p:nvPr/>
+            </p:nvPicPr>
+            <p:blipFill>
+              <a:blip r:embed="rId5"/>
+              <a:stretch>
+                <a:fillRect/>
+              </a:stretch>
+            </p:blipFill>
+            <p:spPr>
+              <a:xfrm>
+                <a:off x="6173303" y="2414090"/>
+                <a:ext cx="5033176" cy="1917139"/>
+              </a:xfrm>
+              <a:prstGeom prst="rect">
+                <a:avLst/>
+              </a:prstGeom>
+              <a:ln>
+                <a:noFill/>
+              </a:ln>
+              <a:effectLst>
+                <a:softEdge rad="112500"/>
+              </a:effectLst>
+            </p:spPr>
+          </p:pic>
+        </p:grpSp>
+        <p:cxnSp>
+          <p:nvCxnSpPr>
+            <p:cNvPr id="24" name="Straight Connector 23">
+              <a:extLst>
+                <a:ext uri="{FF2B5EF4-FFF2-40B4-BE49-F238E27FC236}">
+                  <a16:creationId xmlns:a16="http://schemas.microsoft.com/office/drawing/2014/main" id="{47354A09-3670-2A84-AE1A-8F1DBAA5939A}"/>
+                </a:ext>
+              </a:extLst>
+            </p:cNvPr>
+            <p:cNvCxnSpPr/>
+            <p:nvPr/>
+          </p:nvCxnSpPr>
+          <p:spPr>
+            <a:xfrm>
+              <a:off x="2389015" y="3286129"/>
+              <a:ext cx="548640" cy="0"/>
+            </a:xfrm>
+            <a:prstGeom prst="line">
+              <a:avLst/>
+            </a:prstGeom>
+            <a:ln>
+              <a:solidFill>
+                <a:schemeClr val="accent5"/>
+              </a:solidFill>
+            </a:ln>
+          </p:spPr>
+          <p:style>
+            <a:lnRef idx="2">
+              <a:schemeClr val="accent1"/>
+            </a:lnRef>
+            <a:fillRef idx="0">
+              <a:schemeClr val="accent1"/>
+            </a:fillRef>
+            <a:effectRef idx="1">
+              <a:schemeClr val="accent1"/>
+            </a:effectRef>
+            <a:fontRef idx="minor">
+              <a:schemeClr val="tx1"/>
+            </a:fontRef>
+          </p:style>
+        </p:cxnSp>
+        <p:cxnSp>
+          <p:nvCxnSpPr>
+            <p:cNvPr id="25" name="Straight Connector 24">
+              <a:extLst>
+                <a:ext uri="{FF2B5EF4-FFF2-40B4-BE49-F238E27FC236}">
+                  <a16:creationId xmlns:a16="http://schemas.microsoft.com/office/drawing/2014/main" id="{ED3CAE37-E11C-EC06-E5DD-09A661000FF9}"/>
+                </a:ext>
+              </a:extLst>
+            </p:cNvPr>
+            <p:cNvCxnSpPr/>
+            <p:nvPr/>
+          </p:nvCxnSpPr>
+          <p:spPr>
+            <a:xfrm>
+              <a:off x="8563645" y="3818334"/>
+              <a:ext cx="548640" cy="0"/>
+            </a:xfrm>
+            <a:prstGeom prst="line">
+              <a:avLst/>
+            </a:prstGeom>
+            <a:ln>
+              <a:solidFill>
+                <a:schemeClr val="accent5"/>
+              </a:solidFill>
+            </a:ln>
+          </p:spPr>
+          <p:style>
+            <a:lnRef idx="2">
+              <a:schemeClr val="accent1"/>
+            </a:lnRef>
+            <a:fillRef idx="0">
+              <a:schemeClr val="accent1"/>
+            </a:fillRef>
+            <a:effectRef idx="1">
+              <a:schemeClr val="accent1"/>
+            </a:effectRef>
+            <a:fontRef idx="minor">
+              <a:schemeClr val="tx1"/>
+            </a:fontRef>
+          </p:style>
+        </p:cxnSp>
+        <p:cxnSp>
+          <p:nvCxnSpPr>
+            <p:cNvPr id="26" name="Straight Connector 25">
+              <a:extLst>
+                <a:ext uri="{FF2B5EF4-FFF2-40B4-BE49-F238E27FC236}">
+                  <a16:creationId xmlns:a16="http://schemas.microsoft.com/office/drawing/2014/main" id="{4C1DC3F0-9B34-D374-BE71-99BCAC8E9ADA}"/>
+                </a:ext>
+              </a:extLst>
+            </p:cNvPr>
+            <p:cNvCxnSpPr/>
+            <p:nvPr/>
+          </p:nvCxnSpPr>
+          <p:spPr>
+            <a:xfrm>
+              <a:off x="10026685" y="3818334"/>
+              <a:ext cx="548640" cy="0"/>
+            </a:xfrm>
+            <a:prstGeom prst="line">
+              <a:avLst/>
+            </a:prstGeom>
+            <a:ln>
+              <a:solidFill>
+                <a:schemeClr val="accent5"/>
+              </a:solidFill>
+            </a:ln>
+          </p:spPr>
+          <p:style>
+            <a:lnRef idx="2">
+              <a:schemeClr val="accent1"/>
+            </a:lnRef>
+            <a:fillRef idx="0">
+              <a:schemeClr val="accent1"/>
+            </a:fillRef>
+            <a:effectRef idx="1">
+              <a:schemeClr val="accent1"/>
+            </a:effectRef>
+            <a:fontRef idx="minor">
+              <a:schemeClr val="tx1"/>
+            </a:fontRef>
+          </p:style>
+        </p:cxnSp>
+      </p:grpSp>
     </p:spTree>
     <p:extLst>
       <p:ext uri="{BB962C8B-B14F-4D97-AF65-F5344CB8AC3E}">
@@ -20675,7 +20828,7 @@
 </p:sld>
 </file>
 
-<file path=ppt/slides/slide23.xml><?xml version="1.0" encoding="utf-8"?>
+<file path=ppt/slides/slide25.xml><?xml version="1.0" encoding="utf-8"?>
 <p:sld xmlns:a="http://schemas.openxmlformats.org/drawingml/2006/main" xmlns:r="http://schemas.openxmlformats.org/officeDocument/2006/relationships" xmlns:p="http://schemas.openxmlformats.org/presentationml/2006/main">
   <p:cSld>
     <p:spTree>
@@ -20767,7 +20920,7 @@
         </p:spPr>
         <p:txBody>
           <a:bodyPr anchor="ctr">
-            <a:normAutofit fontScale="92500" lnSpcReduction="20000"/>
+            <a:normAutofit fontScale="92500" lnSpcReduction="10000"/>
           </a:bodyPr>
           <a:lstStyle/>
           <a:p>
@@ -20982,7 +21135,7 @@
         </p:spPr>
         <p:txBody>
           <a:bodyPr>
-            <a:normAutofit fontScale="92500" lnSpcReduction="20000"/>
+            <a:normAutofit fontScale="92500" lnSpcReduction="10000"/>
           </a:bodyPr>
           <a:lstStyle/>
           <a:p>
@@ -21010,14 +21163,7 @@
             <a:pPr lvl="0"/>
             <a:r>
               <a:rPr lang="en-GB" sz="2400" dirty="0"/>
-              <a:t>Phase 1: New treatment ~ </a:t>
-            </a:r>
-            <a:br>
-              <a:rPr lang="en-GB" sz="2400" dirty="0"/>
-            </a:br>
-            <a:r>
-              <a:rPr lang="en-GB" sz="2400" dirty="0"/>
-              <a:t>Health status </a:t>
+              <a:t>Phase 1: New treatment ~ Health status </a:t>
             </a:r>
           </a:p>
           <a:p>
@@ -21139,7 +21285,304 @@
 </p:sld>
 </file>
 
-<file path=ppt/slides/slide24.xml><?xml version="1.0" encoding="utf-8"?>
+<file path=ppt/slides/slide26.xml><?xml version="1.0" encoding="utf-8"?>
+<p:sld xmlns:a="http://schemas.openxmlformats.org/drawingml/2006/main" xmlns:r="http://schemas.openxmlformats.org/officeDocument/2006/relationships" xmlns:p="http://schemas.openxmlformats.org/presentationml/2006/main">
+  <p:cSld>
+    <p:spTree>
+      <p:nvGrpSpPr>
+        <p:cNvPr id="1" name=""/>
+        <p:cNvGrpSpPr/>
+        <p:nvPr/>
+      </p:nvGrpSpPr>
+      <p:grpSpPr>
+        <a:xfrm>
+          <a:off x="0" y="0"/>
+          <a:ext cx="0" cy="0"/>
+          <a:chOff x="0" y="0"/>
+          <a:chExt cx="0" cy="0"/>
+        </a:xfrm>
+      </p:grpSpPr>
+      <p:sp>
+        <p:nvSpPr>
+          <p:cNvPr id="7" name="Content Placeholder 6">
+            <a:extLst>
+              <a:ext uri="{FF2B5EF4-FFF2-40B4-BE49-F238E27FC236}">
+                <a16:creationId xmlns:a16="http://schemas.microsoft.com/office/drawing/2014/main" id="{7379714B-1FF3-323E-6749-EA95E8C454BF}"/>
+              </a:ext>
+            </a:extLst>
+          </p:cNvPr>
+          <p:cNvSpPr>
+            <a:spLocks noGrp="1"/>
+          </p:cNvSpPr>
+          <p:nvPr>
+            <p:ph idx="1"/>
+          </p:nvPr>
+        </p:nvSpPr>
+        <p:spPr>
+          <a:xfrm>
+            <a:off x="609600" y="4078580"/>
+            <a:ext cx="10972800" cy="2657890"/>
+          </a:xfrm>
+          <a:ln>
+            <a:noFill/>
+          </a:ln>
+        </p:spPr>
+        <p:txBody>
+          <a:bodyPr anchor="ctr">
+            <a:noAutofit/>
+          </a:bodyPr>
+          <a:lstStyle/>
+          <a:p>
+            <a:pPr marL="3206750"/>
+            <a:r>
+              <a:rPr lang="en-GB" sz="1800" dirty="0"/>
+              <a:t>Enrollment</a:t>
+            </a:r>
+          </a:p>
+          <a:p>
+            <a:pPr marL="3206750"/>
+            <a:r>
+              <a:rPr lang="en-GB" sz="1800" dirty="0"/>
+              <a:t>Disease category (e.g., neoplasms) </a:t>
+            </a:r>
+            <a:r>
+              <a:rPr lang="en-GB" sz="1800" dirty="0">
+                <a:sym typeface="Wingdings" panose="05000000000000000000" pitchFamily="2" charset="2"/>
+              </a:rPr>
+              <a:t> Affects enrollment</a:t>
+            </a:r>
+            <a:endParaRPr lang="en-GB" sz="1800" dirty="0"/>
+          </a:p>
+          <a:p>
+            <a:pPr marL="3206750"/>
+            <a:r>
+              <a:rPr lang="en-GB" sz="1800" dirty="0"/>
+              <a:t>Number of facilities </a:t>
+            </a:r>
+            <a:r>
+              <a:rPr lang="en-GB" sz="1800" dirty="0">
+                <a:sym typeface="Wingdings" panose="05000000000000000000" pitchFamily="2" charset="2"/>
+              </a:rPr>
+              <a:t> Also, affects enrollment</a:t>
+            </a:r>
+            <a:endParaRPr lang="en-GB" sz="1800" dirty="0"/>
+          </a:p>
+          <a:p>
+            <a:pPr marL="3206750"/>
+            <a:r>
+              <a:rPr lang="en-GB" sz="1800" dirty="0"/>
+              <a:t>Healthy Volunteers</a:t>
+            </a:r>
+          </a:p>
+          <a:p>
+            <a:pPr marL="3206750"/>
+            <a:r>
+              <a:rPr lang="en-GB" sz="1800" dirty="0"/>
+              <a:t>Number of Adverse Events</a:t>
+            </a:r>
+          </a:p>
+          <a:p>
+            <a:pPr marL="3206750"/>
+            <a:r>
+              <a:rPr lang="en-GB" sz="1800" dirty="0"/>
+              <a:t>Funder type (e.g., non-Industry)</a:t>
+            </a:r>
+          </a:p>
+          <a:p>
+            <a:pPr marL="3206750"/>
+            <a:r>
+              <a:rPr lang="en-GB" sz="1800" dirty="0"/>
+              <a:t>Other (e., Administrative, supplies etc.)</a:t>
+            </a:r>
+          </a:p>
+        </p:txBody>
+      </p:sp>
+      <p:sp>
+        <p:nvSpPr>
+          <p:cNvPr id="3" name="Title 1">
+            <a:extLst>
+              <a:ext uri="{FF2B5EF4-FFF2-40B4-BE49-F238E27FC236}">
+                <a16:creationId xmlns:a16="http://schemas.microsoft.com/office/drawing/2014/main" id="{79AA6C9D-2E20-3FDC-E624-B09367AC8F9F}"/>
+              </a:ext>
+            </a:extLst>
+          </p:cNvPr>
+          <p:cNvSpPr>
+            <a:spLocks noGrp="1"/>
+          </p:cNvSpPr>
+          <p:nvPr>
+            <p:ph type="title"/>
+          </p:nvPr>
+        </p:nvSpPr>
+        <p:spPr>
+          <a:xfrm>
+            <a:off x="609600" y="1226916"/>
+            <a:ext cx="10972800" cy="457200"/>
+          </a:xfrm>
+          <a:ln>
+            <a:solidFill>
+              <a:schemeClr val="tx1"/>
+            </a:solidFill>
+          </a:ln>
+        </p:spPr>
+        <p:txBody>
+          <a:bodyPr>
+            <a:noAutofit/>
+          </a:bodyPr>
+          <a:lstStyle/>
+          <a:p>
+            <a:pPr algn="ctr"/>
+            <a:r>
+              <a:rPr lang="en-GB" sz="3200" b="1" dirty="0"/>
+              <a:t>Termination Descriptives (db)</a:t>
+            </a:r>
+          </a:p>
+        </p:txBody>
+      </p:sp>
+      <p:sp>
+        <p:nvSpPr>
+          <p:cNvPr id="2" name="TextBox 1">
+            <a:extLst>
+              <a:ext uri="{FF2B5EF4-FFF2-40B4-BE49-F238E27FC236}">
+                <a16:creationId xmlns:a16="http://schemas.microsoft.com/office/drawing/2014/main" id="{608B01A7-91F3-6875-4CD6-3BD2CA6131EB}"/>
+              </a:ext>
+            </a:extLst>
+          </p:cNvPr>
+          <p:cNvSpPr txBox="1"/>
+          <p:nvPr/>
+        </p:nvSpPr>
+        <p:spPr>
+          <a:xfrm>
+            <a:off x="609600" y="241776"/>
+            <a:ext cx="10972800" cy="584775"/>
+          </a:xfrm>
+          <a:prstGeom prst="rect">
+            <a:avLst/>
+          </a:prstGeom>
+          <a:noFill/>
+          <a:ln>
+            <a:solidFill>
+              <a:schemeClr val="tx1"/>
+            </a:solidFill>
+          </a:ln>
+        </p:spPr>
+        <p:txBody>
+          <a:bodyPr wrap="square" rtlCol="0" anchor="ctr">
+            <a:spAutoFit/>
+          </a:bodyPr>
+          <a:lstStyle/>
+          <a:p>
+            <a:pPr algn="ctr"/>
+            <a:r>
+              <a:rPr lang="en-US" sz="3200" b="1" dirty="0"/>
+              <a:t>Current – Background Research Alignment</a:t>
+            </a:r>
+          </a:p>
+        </p:txBody>
+      </p:sp>
+      <p:pic>
+        <p:nvPicPr>
+          <p:cNvPr id="6" name="Picture 5">
+            <a:extLst>
+              <a:ext uri="{FF2B5EF4-FFF2-40B4-BE49-F238E27FC236}">
+                <a16:creationId xmlns:a16="http://schemas.microsoft.com/office/drawing/2014/main" id="{8EC81A22-9F3E-3963-5EB9-300275B01289}"/>
+              </a:ext>
+            </a:extLst>
+          </p:cNvPr>
+          <p:cNvPicPr>
+            <a:picLocks noChangeAspect="1"/>
+          </p:cNvPicPr>
+          <p:nvPr/>
+        </p:nvPicPr>
+        <p:blipFill>
+          <a:blip r:embed="rId2"/>
+          <a:stretch>
+            <a:fillRect/>
+          </a:stretch>
+        </p:blipFill>
+        <p:spPr>
+          <a:xfrm>
+            <a:off x="1828047" y="1999948"/>
+            <a:ext cx="8535906" cy="1163060"/>
+          </a:xfrm>
+          <a:prstGeom prst="rect">
+            <a:avLst/>
+          </a:prstGeom>
+        </p:spPr>
+      </p:pic>
+      <p:sp>
+        <p:nvSpPr>
+          <p:cNvPr id="4" name="Title 1">
+            <a:extLst>
+              <a:ext uri="{FF2B5EF4-FFF2-40B4-BE49-F238E27FC236}">
+                <a16:creationId xmlns:a16="http://schemas.microsoft.com/office/drawing/2014/main" id="{450E4AEB-EFCC-184B-E286-4074CCA76B6D}"/>
+              </a:ext>
+            </a:extLst>
+          </p:cNvPr>
+          <p:cNvSpPr txBox="1">
+            <a:spLocks/>
+          </p:cNvSpPr>
+          <p:nvPr/>
+        </p:nvSpPr>
+        <p:spPr>
+          <a:xfrm>
+            <a:off x="609600" y="3478840"/>
+            <a:ext cx="10972800" cy="457200"/>
+          </a:xfrm>
+          <a:prstGeom prst="rect">
+            <a:avLst/>
+          </a:prstGeom>
+          <a:ln>
+            <a:solidFill>
+              <a:schemeClr val="tx1"/>
+            </a:solidFill>
+          </a:ln>
+        </p:spPr>
+        <p:txBody>
+          <a:bodyPr vert="horz" lIns="91440" tIns="45720" rIns="91440" bIns="45720" rtlCol="0" anchor="ctr">
+            <a:noAutofit/>
+          </a:bodyPr>
+          <a:lstStyle>
+            <a:lvl1pPr algn="l" defTabSz="914400" rtl="0" eaLnBrk="1" latinLnBrk="0" hangingPunct="1">
+              <a:lnSpc>
+                <a:spcPct val="90000"/>
+              </a:lnSpc>
+              <a:spcBef>
+                <a:spcPct val="0"/>
+              </a:spcBef>
+              <a:buNone/>
+              <a:defRPr sz="4400" kern="1200">
+                <a:solidFill>
+                  <a:schemeClr val="tx1"/>
+                </a:solidFill>
+                <a:latin typeface="+mj-lt"/>
+                <a:ea typeface="+mj-ea"/>
+                <a:cs typeface="+mj-cs"/>
+              </a:defRPr>
+            </a:lvl1pPr>
+          </a:lstStyle>
+          <a:p>
+            <a:pPr algn="ctr"/>
+            <a:r>
+              <a:rPr lang="en-GB" sz="3200" b="1" dirty="0"/>
+              <a:t>Background Research</a:t>
+            </a:r>
+          </a:p>
+        </p:txBody>
+      </p:sp>
+    </p:spTree>
+    <p:extLst>
+      <p:ext uri="{BB962C8B-B14F-4D97-AF65-F5344CB8AC3E}">
+        <p14:creationId xmlns:p14="http://schemas.microsoft.com/office/powerpoint/2010/main" val="379656155"/>
+      </p:ext>
+    </p:extLst>
+  </p:cSld>
+  <p:clrMapOvr>
+    <a:masterClrMapping/>
+  </p:clrMapOvr>
+</p:sld>
+</file>
+
+<file path=ppt/slides/slide27.xml><?xml version="1.0" encoding="utf-8"?>
 <p:sld xmlns:a="http://schemas.openxmlformats.org/drawingml/2006/main" xmlns:r="http://schemas.openxmlformats.org/officeDocument/2006/relationships" xmlns:p="http://schemas.openxmlformats.org/presentationml/2006/main">
   <p:cSld>
     <p:spTree>
@@ -21531,7 +21974,7 @@
 </p:sld>
 </file>
 
-<file path=ppt/slides/slide25.xml><?xml version="1.0" encoding="utf-8"?>
+<file path=ppt/slides/slide28.xml><?xml version="1.0" encoding="utf-8"?>
 <p:sld xmlns:a="http://schemas.openxmlformats.org/drawingml/2006/main" xmlns:r="http://schemas.openxmlformats.org/officeDocument/2006/relationships" xmlns:p="http://schemas.openxmlformats.org/presentationml/2006/main">
   <p:cSld>
     <p:spTree>
@@ -21613,7 +22056,7 @@
 </p:sld>
 </file>
 
-<file path=ppt/slides/slide26.xml><?xml version="1.0" encoding="utf-8"?>
+<file path=ppt/slides/slide29.xml><?xml version="1.0" encoding="utf-8"?>
 <p:sld xmlns:a="http://schemas.openxmlformats.org/drawingml/2006/main" xmlns:r="http://schemas.openxmlformats.org/officeDocument/2006/relationships" xmlns:p="http://schemas.openxmlformats.org/presentationml/2006/main">
   <p:cSld>
     <p:spTree>
@@ -21694,9 +22137,7 @@
             <a:ext cx="10972799" cy="4502552"/>
           </a:xfrm>
           <a:ln>
-            <a:solidFill>
-              <a:schemeClr val="tx1"/>
-            </a:solidFill>
+            <a:noFill/>
           </a:ln>
         </p:spPr>
         <p:txBody>
@@ -21705,6 +22146,9 @@
           </a:bodyPr>
           <a:lstStyle/>
           <a:p>
+            <a:pPr marL="0" indent="0">
+              <a:buNone/>
+            </a:pPr>
             <a:r>
               <a:rPr lang="en-US" sz="2000" b="1" dirty="0"/>
               <a:t>Underlying factors </a:t>
@@ -21766,6 +22210,9 @@
             </a:r>
           </a:p>
           <a:p>
+            <a:pPr marL="0" indent="0">
+              <a:buNone/>
+            </a:pPr>
             <a:r>
               <a:rPr lang="en-US" sz="2000" b="1" dirty="0"/>
               <a:t>Alternative Models of best performing Boosting method’s</a:t>
@@ -21783,6 +22230,9 @@
             </a:r>
           </a:p>
           <a:p>
+            <a:pPr marL="0" indent="0">
+              <a:buNone/>
+            </a:pPr>
             <a:r>
               <a:rPr lang="en-US" sz="2000" b="1" dirty="0"/>
               <a:t>Later years trials registrations</a:t>
@@ -21800,6 +22250,9 @@
             <a:endParaRPr lang="en-US" sz="2000" b="1" dirty="0"/>
           </a:p>
           <a:p>
+            <a:pPr marL="0" indent="0">
+              <a:buNone/>
+            </a:pPr>
             <a:r>
               <a:rPr lang="en-US" sz="2000" b="1" dirty="0"/>
               <a:t>Mapping Key findings</a:t>
@@ -21876,7 +22329,89 @@
 </p:sld>
 </file>
 
-<file path=ppt/slides/slide27.xml><?xml version="1.0" encoding="utf-8"?>
+<file path=ppt/slides/slide3.xml><?xml version="1.0" encoding="utf-8"?>
+<p:sld xmlns:a="http://schemas.openxmlformats.org/drawingml/2006/main" xmlns:r="http://schemas.openxmlformats.org/officeDocument/2006/relationships" xmlns:p="http://schemas.openxmlformats.org/presentationml/2006/main">
+  <p:cSld>
+    <p:spTree>
+      <p:nvGrpSpPr>
+        <p:cNvPr id="1" name=""/>
+        <p:cNvGrpSpPr/>
+        <p:nvPr/>
+      </p:nvGrpSpPr>
+      <p:grpSpPr>
+        <a:xfrm>
+          <a:off x="0" y="0"/>
+          <a:ext cx="0" cy="0"/>
+          <a:chOff x="0" y="0"/>
+          <a:chExt cx="0" cy="0"/>
+        </a:xfrm>
+      </p:grpSpPr>
+      <p:sp>
+        <p:nvSpPr>
+          <p:cNvPr id="2" name="Title 1">
+            <a:extLst>
+              <a:ext uri="{FF2B5EF4-FFF2-40B4-BE49-F238E27FC236}">
+                <a16:creationId xmlns:a16="http://schemas.microsoft.com/office/drawing/2014/main" id="{CDD171AF-4846-67D2-CC20-E35F25A49F78}"/>
+              </a:ext>
+            </a:extLst>
+          </p:cNvPr>
+          <p:cNvSpPr>
+            <a:spLocks noGrp="1"/>
+          </p:cNvSpPr>
+          <p:nvPr>
+            <p:ph type="title"/>
+          </p:nvPr>
+        </p:nvSpPr>
+        <p:spPr>
+          <a:xfrm>
+            <a:off x="609600" y="685800"/>
+            <a:ext cx="10972800" cy="5486400"/>
+          </a:xfrm>
+          <a:prstGeom prst="plaque">
+            <a:avLst/>
+          </a:prstGeom>
+          <a:noFill/>
+          <a:ln w="19050">
+            <a:solidFill>
+              <a:schemeClr val="tx1"/>
+            </a:solidFill>
+          </a:ln>
+          <a:effectLst>
+            <a:outerShdw blurRad="63500" sx="102000" sy="102000" algn="ctr" rotWithShape="0">
+              <a:prstClr val="black">
+                <a:alpha val="40000"/>
+              </a:prstClr>
+            </a:outerShdw>
+          </a:effectLst>
+        </p:spPr>
+        <p:txBody>
+          <a:bodyPr>
+            <a:normAutofit/>
+          </a:bodyPr>
+          <a:lstStyle/>
+          <a:p>
+            <a:pPr algn="ctr"/>
+            <a:r>
+              <a:rPr lang="en-GB" sz="5000" b="1" dirty="0"/>
+              <a:t>Introduction</a:t>
+            </a:r>
+          </a:p>
+        </p:txBody>
+      </p:sp>
+    </p:spTree>
+    <p:extLst>
+      <p:ext uri="{BB962C8B-B14F-4D97-AF65-F5344CB8AC3E}">
+        <p14:creationId xmlns:p14="http://schemas.microsoft.com/office/powerpoint/2010/main" val="2301623070"/>
+      </p:ext>
+    </p:extLst>
+  </p:cSld>
+  <p:clrMapOvr>
+    <a:masterClrMapping/>
+  </p:clrMapOvr>
+</p:sld>
+</file>
+
+<file path=ppt/slides/slide30.xml><?xml version="1.0" encoding="utf-8"?>
 <p:sld xmlns:a="http://schemas.openxmlformats.org/drawingml/2006/main" xmlns:r="http://schemas.openxmlformats.org/officeDocument/2006/relationships" xmlns:p="http://schemas.openxmlformats.org/presentationml/2006/main">
   <p:cSld>
     <p:spTree>
@@ -22340,7 +22875,7 @@
 </p:sld>
 </file>
 
-<file path=ppt/slides/slide28.xml><?xml version="1.0" encoding="utf-8"?>
+<file path=ppt/slides/slide31.xml><?xml version="1.0" encoding="utf-8"?>
 <p:sld xmlns:a="http://schemas.openxmlformats.org/drawingml/2006/main" xmlns:r="http://schemas.openxmlformats.org/officeDocument/2006/relationships" xmlns:p="http://schemas.openxmlformats.org/presentationml/2006/main">
   <p:cSld>
     <p:spTree>
@@ -22489,88 +23024,6 @@
     <p:extLst>
       <p:ext uri="{BB962C8B-B14F-4D97-AF65-F5344CB8AC3E}">
         <p14:creationId xmlns:p14="http://schemas.microsoft.com/office/powerpoint/2010/main" val="2209188368"/>
-      </p:ext>
-    </p:extLst>
-  </p:cSld>
-  <p:clrMapOvr>
-    <a:masterClrMapping/>
-  </p:clrMapOvr>
-</p:sld>
-</file>
-
-<file path=ppt/slides/slide3.xml><?xml version="1.0" encoding="utf-8"?>
-<p:sld xmlns:a="http://schemas.openxmlformats.org/drawingml/2006/main" xmlns:r="http://schemas.openxmlformats.org/officeDocument/2006/relationships" xmlns:p="http://schemas.openxmlformats.org/presentationml/2006/main">
-  <p:cSld>
-    <p:spTree>
-      <p:nvGrpSpPr>
-        <p:cNvPr id="1" name=""/>
-        <p:cNvGrpSpPr/>
-        <p:nvPr/>
-      </p:nvGrpSpPr>
-      <p:grpSpPr>
-        <a:xfrm>
-          <a:off x="0" y="0"/>
-          <a:ext cx="0" cy="0"/>
-          <a:chOff x="0" y="0"/>
-          <a:chExt cx="0" cy="0"/>
-        </a:xfrm>
-      </p:grpSpPr>
-      <p:sp>
-        <p:nvSpPr>
-          <p:cNvPr id="2" name="Title 1">
-            <a:extLst>
-              <a:ext uri="{FF2B5EF4-FFF2-40B4-BE49-F238E27FC236}">
-                <a16:creationId xmlns:a16="http://schemas.microsoft.com/office/drawing/2014/main" id="{CDD171AF-4846-67D2-CC20-E35F25A49F78}"/>
-              </a:ext>
-            </a:extLst>
-          </p:cNvPr>
-          <p:cNvSpPr>
-            <a:spLocks noGrp="1"/>
-          </p:cNvSpPr>
-          <p:nvPr>
-            <p:ph type="title"/>
-          </p:nvPr>
-        </p:nvSpPr>
-        <p:spPr>
-          <a:xfrm>
-            <a:off x="609600" y="685800"/>
-            <a:ext cx="10972800" cy="5486400"/>
-          </a:xfrm>
-          <a:prstGeom prst="plaque">
-            <a:avLst/>
-          </a:prstGeom>
-          <a:noFill/>
-          <a:ln w="19050">
-            <a:solidFill>
-              <a:schemeClr val="tx1"/>
-            </a:solidFill>
-          </a:ln>
-          <a:effectLst>
-            <a:outerShdw blurRad="63500" sx="102000" sy="102000" algn="ctr" rotWithShape="0">
-              <a:prstClr val="black">
-                <a:alpha val="40000"/>
-              </a:prstClr>
-            </a:outerShdw>
-          </a:effectLst>
-        </p:spPr>
-        <p:txBody>
-          <a:bodyPr>
-            <a:normAutofit/>
-          </a:bodyPr>
-          <a:lstStyle/>
-          <a:p>
-            <a:pPr algn="ctr"/>
-            <a:r>
-              <a:rPr lang="en-GB" sz="5000" b="1" dirty="0"/>
-              <a:t>Introduction</a:t>
-            </a:r>
-          </a:p>
-        </p:txBody>
-      </p:sp>
-    </p:spTree>
-    <p:extLst>
-      <p:ext uri="{BB962C8B-B14F-4D97-AF65-F5344CB8AC3E}">
-        <p14:creationId xmlns:p14="http://schemas.microsoft.com/office/powerpoint/2010/main" val="2301623070"/>
       </p:ext>
     </p:extLst>
   </p:cSld>
@@ -23212,6 +23665,94 @@
   <p:cSld>
     <p:spTree>
       <p:nvGrpSpPr>
+        <p:cNvPr id="1" name="">
+          <a:extLst>
+            <a:ext uri="{FF2B5EF4-FFF2-40B4-BE49-F238E27FC236}">
+              <a16:creationId xmlns:a16="http://schemas.microsoft.com/office/drawing/2014/main" id="{0DD1EB9D-753F-B833-FABF-DF0A643257A6}"/>
+            </a:ext>
+          </a:extLst>
+        </p:cNvPr>
+        <p:cNvGrpSpPr/>
+        <p:nvPr/>
+      </p:nvGrpSpPr>
+      <p:grpSpPr>
+        <a:xfrm>
+          <a:off x="0" y="0"/>
+          <a:ext cx="0" cy="0"/>
+          <a:chOff x="0" y="0"/>
+          <a:chExt cx="0" cy="0"/>
+        </a:xfrm>
+      </p:grpSpPr>
+      <p:sp>
+        <p:nvSpPr>
+          <p:cNvPr id="2" name="Title 1">
+            <a:extLst>
+              <a:ext uri="{FF2B5EF4-FFF2-40B4-BE49-F238E27FC236}">
+                <a16:creationId xmlns:a16="http://schemas.microsoft.com/office/drawing/2014/main" id="{A139D3FD-4075-7801-EEA3-5C627734C182}"/>
+              </a:ext>
+            </a:extLst>
+          </p:cNvPr>
+          <p:cNvSpPr>
+            <a:spLocks noGrp="1"/>
+          </p:cNvSpPr>
+          <p:nvPr>
+            <p:ph type="title"/>
+          </p:nvPr>
+        </p:nvSpPr>
+        <p:spPr>
+          <a:xfrm>
+            <a:off x="2720050" y="1821566"/>
+            <a:ext cx="6751899" cy="3214868"/>
+          </a:xfrm>
+          <a:prstGeom prst="plaque">
+            <a:avLst/>
+          </a:prstGeom>
+          <a:noFill/>
+          <a:ln w="19050">
+            <a:solidFill>
+              <a:schemeClr val="tx1"/>
+            </a:solidFill>
+          </a:ln>
+          <a:effectLst>
+            <a:outerShdw blurRad="63500" sx="102000" sy="102000" algn="ctr" rotWithShape="0">
+              <a:prstClr val="black">
+                <a:alpha val="40000"/>
+              </a:prstClr>
+            </a:outerShdw>
+          </a:effectLst>
+        </p:spPr>
+        <p:txBody>
+          <a:bodyPr>
+            <a:normAutofit/>
+          </a:bodyPr>
+          <a:lstStyle/>
+          <a:p>
+            <a:pPr algn="ctr"/>
+            <a:r>
+              <a:rPr lang="en-GB" sz="4000" b="1" dirty="0"/>
+              <a:t>Data Source ClinicalTrials.gov</a:t>
+            </a:r>
+          </a:p>
+        </p:txBody>
+      </p:sp>
+    </p:spTree>
+    <p:extLst>
+      <p:ext uri="{BB962C8B-B14F-4D97-AF65-F5344CB8AC3E}">
+        <p14:creationId xmlns:p14="http://schemas.microsoft.com/office/powerpoint/2010/main" val="562415862"/>
+      </p:ext>
+    </p:extLst>
+  </p:cSld>
+  <p:clrMapOvr>
+    <a:masterClrMapping/>
+  </p:clrMapOvr>
+</p:sld>
+</file>
+
+<file path=ppt/slides/slide6.xml><?xml version="1.0" encoding="utf-8"?>
+<p:sld xmlns:a="http://schemas.openxmlformats.org/drawingml/2006/main" xmlns:r="http://schemas.openxmlformats.org/officeDocument/2006/relationships" xmlns:p="http://schemas.openxmlformats.org/presentationml/2006/main">
+  <p:cSld>
+    <p:spTree>
+      <p:nvGrpSpPr>
         <p:cNvPr id="1" name=""/>
         <p:cNvGrpSpPr/>
         <p:nvPr/>
@@ -23787,119 +24328,12 @@
               <a:t> Researchers, Clinicians, Unethical </a:t>
             </a:r>
           </a:p>
-          <a:p>
-            <a:r>
-              <a:rPr lang="en-GB" sz="2000" dirty="0">
-                <a:sym typeface="Wingdings" panose="05000000000000000000" pitchFamily="2" charset="2"/>
-              </a:rPr>
-              <a:t>Missing, Optional, False inputs</a:t>
-            </a:r>
-          </a:p>
         </p:txBody>
       </p:sp>
     </p:spTree>
     <p:extLst>
       <p:ext uri="{BB962C8B-B14F-4D97-AF65-F5344CB8AC3E}">
         <p14:creationId xmlns:p14="http://schemas.microsoft.com/office/powerpoint/2010/main" val="3253723412"/>
-      </p:ext>
-    </p:extLst>
-  </p:cSld>
-  <p:clrMapOvr>
-    <a:masterClrMapping/>
-  </p:clrMapOvr>
-</p:sld>
-</file>
-
-<file path=ppt/slides/slide6.xml><?xml version="1.0" encoding="utf-8"?>
-<p:sld xmlns:a="http://schemas.openxmlformats.org/drawingml/2006/main" xmlns:r="http://schemas.openxmlformats.org/officeDocument/2006/relationships" xmlns:p="http://schemas.openxmlformats.org/presentationml/2006/main">
-  <p:cSld>
-    <p:spTree>
-      <p:nvGrpSpPr>
-        <p:cNvPr id="1" name=""/>
-        <p:cNvGrpSpPr/>
-        <p:nvPr/>
-      </p:nvGrpSpPr>
-      <p:grpSpPr>
-        <a:xfrm>
-          <a:off x="0" y="0"/>
-          <a:ext cx="0" cy="0"/>
-          <a:chOff x="0" y="0"/>
-          <a:chExt cx="0" cy="0"/>
-        </a:xfrm>
-      </p:grpSpPr>
-      <p:sp>
-        <p:nvSpPr>
-          <p:cNvPr id="3" name="Title 1">
-            <a:extLst>
-              <a:ext uri="{FF2B5EF4-FFF2-40B4-BE49-F238E27FC236}">
-                <a16:creationId xmlns:a16="http://schemas.microsoft.com/office/drawing/2014/main" id="{E1977896-C24B-9F1A-D777-D502E6AF5937}"/>
-              </a:ext>
-            </a:extLst>
-          </p:cNvPr>
-          <p:cNvSpPr txBox="1">
-            <a:spLocks/>
-          </p:cNvSpPr>
-          <p:nvPr/>
-        </p:nvSpPr>
-        <p:spPr>
-          <a:xfrm>
-            <a:off x="609600" y="685800"/>
-            <a:ext cx="10972800" cy="5486400"/>
-          </a:xfrm>
-          <a:prstGeom prst="plaque">
-            <a:avLst/>
-          </a:prstGeom>
-          <a:noFill/>
-          <a:ln w="19050">
-            <a:solidFill>
-              <a:schemeClr val="tx1"/>
-            </a:solidFill>
-          </a:ln>
-          <a:effectLst>
-            <a:outerShdw blurRad="63500" sx="102000" sy="102000" algn="ctr" rotWithShape="0">
-              <a:prstClr val="black">
-                <a:alpha val="40000"/>
-              </a:prstClr>
-            </a:outerShdw>
-          </a:effectLst>
-        </p:spPr>
-        <p:txBody>
-          <a:bodyPr vert="horz" lIns="91440" tIns="45720" rIns="91440" bIns="45720" rtlCol="0" anchor="ctr">
-            <a:normAutofit/>
-          </a:bodyPr>
-          <a:lstStyle>
-            <a:lvl1pPr algn="l" defTabSz="914400" rtl="0" eaLnBrk="1" latinLnBrk="0" hangingPunct="1">
-              <a:lnSpc>
-                <a:spcPct val="90000"/>
-              </a:lnSpc>
-              <a:spcBef>
-                <a:spcPct val="0"/>
-              </a:spcBef>
-              <a:buNone/>
-              <a:defRPr sz="4400" kern="1200">
-                <a:solidFill>
-                  <a:schemeClr val="tx1"/>
-                </a:solidFill>
-                <a:latin typeface="+mj-lt"/>
-                <a:ea typeface="+mj-ea"/>
-                <a:cs typeface="+mj-cs"/>
-              </a:defRPr>
-            </a:lvl1pPr>
-          </a:lstStyle>
-          <a:p>
-            <a:pPr algn="ctr"/>
-            <a:r>
-              <a:rPr lang="en-US" sz="5000" b="1" dirty="0"/>
-              <a:t>Methodology</a:t>
-            </a:r>
-            <a:endParaRPr lang="en-GB" sz="5000" b="1" dirty="0"/>
-          </a:p>
-        </p:txBody>
-      </p:sp>
-    </p:spTree>
-    <p:extLst>
-      <p:ext uri="{BB962C8B-B14F-4D97-AF65-F5344CB8AC3E}">
-        <p14:creationId xmlns:p14="http://schemas.microsoft.com/office/powerpoint/2010/main" val="2295317214"/>
       </p:ext>
     </p:extLst>
   </p:cSld>
@@ -23962,7 +24396,7 @@
             <a:pPr algn="ctr"/>
             <a:r>
               <a:rPr lang="en-US" sz="3000" b="1" dirty="0"/>
-              <a:t>Data Source</a:t>
+              <a:t>Data Format</a:t>
             </a:r>
             <a:endParaRPr lang="en-GB" sz="3000" b="1" dirty="0"/>
           </a:p>
@@ -23986,8 +24420,8 @@
         </p:nvSpPr>
         <p:spPr>
           <a:xfrm>
-            <a:off x="609600" y="2701280"/>
-            <a:ext cx="10972800" cy="2125367"/>
+            <a:off x="609600" y="2229979"/>
+            <a:ext cx="10972800" cy="2349972"/>
           </a:xfrm>
           <a:ln>
             <a:noFill/>
@@ -24019,7 +24453,7 @@
               <a:rPr lang="en-US" sz="2000" dirty="0">
                 <a:sym typeface="Wingdings" panose="05000000000000000000" pitchFamily="2" charset="2"/>
               </a:rPr>
-              <a:t>Status: Completed, Terminated | Completed, Withdrawn</a:t>
+              <a:t>Study Status: Completed, Terminated | Completed, Withdrawn</a:t>
             </a:r>
           </a:p>
           <a:p>
@@ -24027,8 +24461,21 @@
               <a:rPr lang="en-GB" sz="2000" dirty="0"/>
               <a:t>Phases: 1, 2, 3, 4</a:t>
             </a:r>
+            <a:endParaRPr lang="en-US" sz="2000" dirty="0">
+              <a:sym typeface="Wingdings" panose="05000000000000000000" pitchFamily="2" charset="2"/>
+            </a:endParaRPr>
+          </a:p>
+          <a:p>
+            <a:r>
+              <a:rPr lang="en-US" sz="2000" dirty="0">
+                <a:sym typeface="Wingdings" panose="05000000000000000000" pitchFamily="2" charset="2"/>
+              </a:rPr>
+              <a:t>67000 records  </a:t>
+            </a:r>
             <a:br>
-              <a:rPr lang="en-GB" sz="2000" dirty="0"/>
+              <a:rPr lang="en-US" sz="2000" dirty="0">
+                <a:sym typeface="Wingdings" panose="05000000000000000000" pitchFamily="2" charset="2"/>
+              </a:rPr>
             </a:br>
             <a:r>
               <a:rPr lang="en-US" sz="2000" dirty="0">
@@ -24056,8 +24503,8 @@
         </p:nvSpPr>
         <p:spPr>
           <a:xfrm>
-            <a:off x="609600" y="953901"/>
-            <a:ext cx="10972800" cy="1107886"/>
+            <a:off x="609600" y="934543"/>
+            <a:ext cx="10972800" cy="759157"/>
           </a:xfrm>
           <a:prstGeom prst="rect">
             <a:avLst/>
@@ -24237,35 +24684,35 @@
           <a:p>
             <a:r>
               <a:rPr lang="en-US" sz="2000" dirty="0"/>
-              <a:t>AACT db </a:t>
+              <a:t>Format: 1. AACT </a:t>
+            </a:r>
+            <a:r>
+              <a:rPr lang="en-US" sz="2000" b="1" dirty="0"/>
+              <a:t>db</a:t>
+            </a:r>
+            <a:r>
+              <a:rPr lang="en-US" sz="2000" dirty="0"/>
+              <a:t> </a:t>
             </a:r>
             <a:r>
               <a:rPr lang="en-US" sz="2000" dirty="0">
                 <a:sym typeface="Wingdings" panose="05000000000000000000" pitchFamily="2" charset="2"/>
               </a:rPr>
-              <a:t> Variety, Structured</a:t>
-            </a:r>
-            <a:endParaRPr lang="en-US" sz="2000" dirty="0"/>
-          </a:p>
-          <a:p>
+              <a:t>(Variety, Structured)  |  2. </a:t>
+            </a:r>
             <a:r>
               <a:rPr lang="en-US" sz="2000" dirty="0"/>
               <a:t>ClinicalTrials.gov website </a:t>
             </a:r>
             <a:r>
-              <a:rPr lang="en-US" sz="2000" dirty="0">
+              <a:rPr lang="en-US" sz="2000" b="1" dirty="0">
                 <a:sym typeface="Wingdings" panose="05000000000000000000" pitchFamily="2" charset="2"/>
               </a:rPr>
-              <a:t>(csv)</a:t>
-            </a:r>
-          </a:p>
-          <a:p>
-            <a:r>
-              <a:rPr lang="en-US" sz="2000" dirty="0">
-                <a:sym typeface="Wingdings" panose="05000000000000000000" pitchFamily="2" charset="2"/>
-              </a:rPr>
-              <a:t>67000 records</a:t>
-            </a:r>
+              <a:t>csv</a:t>
+            </a:r>
+            <a:endParaRPr lang="en-US" sz="2000" dirty="0">
+              <a:sym typeface="Wingdings" panose="05000000000000000000" pitchFamily="2" charset="2"/>
+            </a:endParaRPr>
           </a:p>
         </p:txBody>
       </p:sp>
@@ -24285,7 +24732,7 @@
         </p:nvSpPr>
         <p:spPr>
           <a:xfrm>
-            <a:off x="609600" y="2203842"/>
+            <a:off x="609600" y="1716936"/>
             <a:ext cx="10972800" cy="457200"/>
           </a:xfrm>
           <a:prstGeom prst="rect">
@@ -24474,7 +24921,7 @@
               <a:rPr lang="en-US" sz="3000" b="1" dirty="0">
                 <a:sym typeface="Wingdings" panose="05000000000000000000" pitchFamily="2" charset="2"/>
               </a:rPr>
-              <a:t>Trials</a:t>
+              <a:t>Selected Trials</a:t>
             </a:r>
           </a:p>
         </p:txBody>
@@ -24495,7 +24942,7 @@
         </p:nvSpPr>
         <p:spPr>
           <a:xfrm>
-            <a:off x="609600" y="4911964"/>
+            <a:off x="609600" y="4755798"/>
             <a:ext cx="10972800" cy="457200"/>
           </a:xfrm>
           <a:prstGeom prst="rect">
@@ -24684,7 +25131,7 @@
               <a:rPr lang="en-US" sz="3000" b="1" dirty="0">
                 <a:sym typeface="Wingdings" panose="05000000000000000000" pitchFamily="2" charset="2"/>
               </a:rPr>
-              <a:t>Characteristics</a:t>
+              <a:t>Dataset Notes</a:t>
             </a:r>
           </a:p>
         </p:txBody>
@@ -24705,7 +25152,7 @@
         </p:nvSpPr>
         <p:spPr>
           <a:xfrm>
-            <a:off x="609600" y="5418445"/>
+            <a:off x="609600" y="5307820"/>
             <a:ext cx="10972800" cy="1192557"/>
           </a:xfrm>
           <a:prstGeom prst="rect">
@@ -24898,18 +25345,41 @@
               <a:rPr lang="en-US" sz="2000" dirty="0">
                 <a:sym typeface="Wingdings" panose="05000000000000000000" pitchFamily="2" charset="2"/>
               </a:rPr>
+              <a:t> Large datasets, </a:t>
+            </a:r>
+            <a:r>
+              <a:rPr lang="en-US" sz="2000" dirty="0"/>
+              <a:t>Skewed data</a:t>
+            </a:r>
+          </a:p>
+          <a:p>
+            <a:r>
+              <a:rPr lang="en-GB" sz="2000" dirty="0"/>
+              <a:t>Inaccurate registries </a:t>
+            </a:r>
+            <a:r>
+              <a:rPr lang="en-GB" sz="2000" dirty="0">
+                <a:sym typeface="Wingdings" panose="05000000000000000000" pitchFamily="2" charset="2"/>
+              </a:rPr>
               <a:t> </a:t>
             </a:r>
             <a:r>
-              <a:rPr lang="en-US" sz="2000" dirty="0"/>
-              <a:t>Skew data</a:t>
-            </a:r>
-          </a:p>
-          <a:p>
-            <a:r>
               <a:rPr lang="en-GB" sz="2000" dirty="0"/>
-              <a:t>Missing, Optional, Wrong, Inaccurate registries, </a:t>
-            </a:r>
+              <a:t>Missing, Optional, False inputs </a:t>
+            </a:r>
+            <a:r>
+              <a:rPr lang="en-GB" sz="2000" dirty="0">
+                <a:sym typeface="Wingdings" panose="05000000000000000000" pitchFamily="2" charset="2"/>
+              </a:rPr>
+              <a:t> </a:t>
+            </a:r>
+            <a:r>
+              <a:rPr lang="en-US" sz="2000" dirty="0">
+                <a:sym typeface="Wingdings" panose="05000000000000000000" pitchFamily="2" charset="2"/>
+              </a:rPr>
+              <a:t>Data processing complication </a:t>
+            </a:r>
+            <a:endParaRPr lang="en-GB" sz="2000" dirty="0"/>
           </a:p>
         </p:txBody>
       </p:sp>
@@ -24927,6 +25397,105 @@
 </file>
 
 <file path=ppt/slides/slide8.xml><?xml version="1.0" encoding="utf-8"?>
+<p:sld xmlns:a="http://schemas.openxmlformats.org/drawingml/2006/main" xmlns:r="http://schemas.openxmlformats.org/officeDocument/2006/relationships" xmlns:p="http://schemas.openxmlformats.org/presentationml/2006/main">
+  <p:cSld>
+    <p:spTree>
+      <p:nvGrpSpPr>
+        <p:cNvPr id="1" name=""/>
+        <p:cNvGrpSpPr/>
+        <p:nvPr/>
+      </p:nvGrpSpPr>
+      <p:grpSpPr>
+        <a:xfrm>
+          <a:off x="0" y="0"/>
+          <a:ext cx="0" cy="0"/>
+          <a:chOff x="0" y="0"/>
+          <a:chExt cx="0" cy="0"/>
+        </a:xfrm>
+      </p:grpSpPr>
+      <p:sp>
+        <p:nvSpPr>
+          <p:cNvPr id="3" name="Title 1">
+            <a:extLst>
+              <a:ext uri="{FF2B5EF4-FFF2-40B4-BE49-F238E27FC236}">
+                <a16:creationId xmlns:a16="http://schemas.microsoft.com/office/drawing/2014/main" id="{E1977896-C24B-9F1A-D777-D502E6AF5937}"/>
+              </a:ext>
+            </a:extLst>
+          </p:cNvPr>
+          <p:cNvSpPr txBox="1">
+            <a:spLocks/>
+          </p:cNvSpPr>
+          <p:nvPr/>
+        </p:nvSpPr>
+        <p:spPr>
+          <a:xfrm>
+            <a:off x="609600" y="685800"/>
+            <a:ext cx="10972800" cy="5486400"/>
+          </a:xfrm>
+          <a:prstGeom prst="plaque">
+            <a:avLst/>
+          </a:prstGeom>
+          <a:noFill/>
+          <a:ln w="19050">
+            <a:solidFill>
+              <a:schemeClr val="tx1"/>
+            </a:solidFill>
+          </a:ln>
+          <a:effectLst>
+            <a:outerShdw blurRad="63500" sx="102000" sy="102000" algn="ctr" rotWithShape="0">
+              <a:prstClr val="black">
+                <a:alpha val="40000"/>
+              </a:prstClr>
+            </a:outerShdw>
+          </a:effectLst>
+        </p:spPr>
+        <p:txBody>
+          <a:bodyPr vert="horz" lIns="91440" tIns="45720" rIns="91440" bIns="45720" rtlCol="0" anchor="ctr">
+            <a:normAutofit/>
+          </a:bodyPr>
+          <a:lstStyle>
+            <a:lvl1pPr algn="l" defTabSz="914400" rtl="0" eaLnBrk="1" latinLnBrk="0" hangingPunct="1">
+              <a:lnSpc>
+                <a:spcPct val="90000"/>
+              </a:lnSpc>
+              <a:spcBef>
+                <a:spcPct val="0"/>
+              </a:spcBef>
+              <a:buNone/>
+              <a:defRPr sz="4400" kern="1200">
+                <a:solidFill>
+                  <a:schemeClr val="tx1"/>
+                </a:solidFill>
+                <a:latin typeface="+mj-lt"/>
+                <a:ea typeface="+mj-ea"/>
+                <a:cs typeface="+mj-cs"/>
+              </a:defRPr>
+            </a:lvl1pPr>
+          </a:lstStyle>
+          <a:p>
+            <a:pPr algn="ctr"/>
+            <a:r>
+              <a:rPr lang="en-US" sz="5000" b="1" dirty="0"/>
+              <a:t>Methodology</a:t>
+            </a:r>
+            <a:endParaRPr lang="en-GB" sz="5000" b="1" dirty="0"/>
+          </a:p>
+        </p:txBody>
+      </p:sp>
+    </p:spTree>
+    <p:extLst>
+      <p:ext uri="{BB962C8B-B14F-4D97-AF65-F5344CB8AC3E}">
+        <p14:creationId xmlns:p14="http://schemas.microsoft.com/office/powerpoint/2010/main" val="2295317214"/>
+      </p:ext>
+    </p:extLst>
+  </p:cSld>
+  <p:clrMapOvr>
+    <a:masterClrMapping/>
+  </p:clrMapOvr>
+</p:sld>
+</file>
+
+<file path=ppt/slides/slide9.xml><?xml version="1.0" encoding="utf-8"?>
 <p:sld xmlns:a="http://schemas.openxmlformats.org/drawingml/2006/main" xmlns:r="http://schemas.openxmlformats.org/officeDocument/2006/relationships" xmlns:p="http://schemas.openxmlformats.org/presentationml/2006/main">
   <p:cSld>
     <p:spTree>
@@ -27347,140 +27916,6 @@
 </p:sld>
 </file>
 
-<file path=ppt/slides/slide9.xml><?xml version="1.0" encoding="utf-8"?>
-<p:sld xmlns:a="http://schemas.openxmlformats.org/drawingml/2006/main" xmlns:r="http://schemas.openxmlformats.org/officeDocument/2006/relationships" xmlns:p="http://schemas.openxmlformats.org/presentationml/2006/main">
-  <p:cSld>
-    <p:spTree>
-      <p:nvGrpSpPr>
-        <p:cNvPr id="1" name=""/>
-        <p:cNvGrpSpPr/>
-        <p:nvPr/>
-      </p:nvGrpSpPr>
-      <p:grpSpPr>
-        <a:xfrm>
-          <a:off x="0" y="0"/>
-          <a:ext cx="0" cy="0"/>
-          <a:chOff x="0" y="0"/>
-          <a:chExt cx="0" cy="0"/>
-        </a:xfrm>
-      </p:grpSpPr>
-      <p:graphicFrame>
-        <p:nvGraphicFramePr>
-          <p:cNvPr id="9" name="Content Placeholder 8">
-            <a:extLst>
-              <a:ext uri="{FF2B5EF4-FFF2-40B4-BE49-F238E27FC236}">
-                <a16:creationId xmlns:a16="http://schemas.microsoft.com/office/drawing/2014/main" id="{573E6068-02CB-5172-F662-3212E8C1CE9F}"/>
-              </a:ext>
-            </a:extLst>
-          </p:cNvPr>
-          <p:cNvGraphicFramePr>
-            <a:graphicFrameLocks noGrp="1"/>
-          </p:cNvGraphicFramePr>
-          <p:nvPr>
-            <p:ph sz="half" idx="1"/>
-            <p:extLst>
-              <p:ext uri="{D42A27DB-BD31-4B8C-83A1-F6EECF244321}">
-                <p14:modId xmlns:p14="http://schemas.microsoft.com/office/powerpoint/2010/main" val="1123387990"/>
-              </p:ext>
-            </p:extLst>
-          </p:nvPr>
-        </p:nvGraphicFramePr>
-        <p:xfrm>
-          <a:off x="170725" y="876783"/>
-          <a:ext cx="5847145" cy="5914663"/>
-        </p:xfrm>
-        <a:graphic>
-          <a:graphicData uri="http://schemas.openxmlformats.org/drawingml/2006/diagram">
-            <dgm:relIds xmlns:dgm="http://schemas.openxmlformats.org/drawingml/2006/diagram" xmlns:r="http://schemas.openxmlformats.org/officeDocument/2006/relationships" r:dm="rId2" r:lo="rId3" r:qs="rId4" r:cs="rId5"/>
-          </a:graphicData>
-        </a:graphic>
-      </p:graphicFrame>
-      <p:graphicFrame>
-        <p:nvGraphicFramePr>
-          <p:cNvPr id="20" name="Content Placeholder 19">
-            <a:extLst>
-              <a:ext uri="{FF2B5EF4-FFF2-40B4-BE49-F238E27FC236}">
-                <a16:creationId xmlns:a16="http://schemas.microsoft.com/office/drawing/2014/main" id="{97A848B3-A454-77E9-2411-EE831EF40542}"/>
-              </a:ext>
-            </a:extLst>
-          </p:cNvPr>
-          <p:cNvGraphicFramePr>
-            <a:graphicFrameLocks noGrp="1"/>
-          </p:cNvGraphicFramePr>
-          <p:nvPr>
-            <p:ph sz="half" idx="2"/>
-            <p:extLst>
-              <p:ext uri="{D42A27DB-BD31-4B8C-83A1-F6EECF244321}">
-                <p14:modId xmlns:p14="http://schemas.microsoft.com/office/powerpoint/2010/main" val="1644039606"/>
-              </p:ext>
-            </p:extLst>
-          </p:nvPr>
-        </p:nvGraphicFramePr>
-        <p:xfrm>
-          <a:off x="6174130" y="876783"/>
-          <a:ext cx="5847145" cy="5914663"/>
-        </p:xfrm>
-        <a:graphic>
-          <a:graphicData uri="http://schemas.openxmlformats.org/drawingml/2006/diagram">
-            <dgm:relIds xmlns:dgm="http://schemas.openxmlformats.org/drawingml/2006/diagram" xmlns:r="http://schemas.openxmlformats.org/officeDocument/2006/relationships" r:dm="rId7" r:lo="rId8" r:qs="rId9" r:cs="rId10"/>
-          </a:graphicData>
-        </a:graphic>
-      </p:graphicFrame>
-      <p:sp>
-        <p:nvSpPr>
-          <p:cNvPr id="42" name="TextBox 41">
-            <a:extLst>
-              <a:ext uri="{FF2B5EF4-FFF2-40B4-BE49-F238E27FC236}">
-                <a16:creationId xmlns:a16="http://schemas.microsoft.com/office/drawing/2014/main" id="{2DFEE1D9-3445-82AA-690D-F8B09B9501C3}"/>
-              </a:ext>
-            </a:extLst>
-          </p:cNvPr>
-          <p:cNvSpPr txBox="1"/>
-          <p:nvPr/>
-        </p:nvSpPr>
-        <p:spPr>
-          <a:xfrm>
-            <a:off x="609600" y="217024"/>
-            <a:ext cx="10972800" cy="457200"/>
-          </a:xfrm>
-          <a:prstGeom prst="rect">
-            <a:avLst/>
-          </a:prstGeom>
-          <a:noFill/>
-          <a:ln>
-            <a:solidFill>
-              <a:schemeClr val="tx1"/>
-            </a:solidFill>
-          </a:ln>
-        </p:spPr>
-        <p:txBody>
-          <a:bodyPr wrap="square" rtlCol="0" anchor="ctr">
-            <a:spAutoFit/>
-          </a:bodyPr>
-          <a:lstStyle/>
-          <a:p>
-            <a:pPr algn="ctr"/>
-            <a:r>
-              <a:rPr lang="en-US" sz="3000" b="1" dirty="0"/>
-              <a:t>Schema</a:t>
-            </a:r>
-            <a:endParaRPr lang="en-GB" sz="3000" b="1" dirty="0"/>
-          </a:p>
-        </p:txBody>
-      </p:sp>
-    </p:spTree>
-    <p:extLst>
-      <p:ext uri="{BB962C8B-B14F-4D97-AF65-F5344CB8AC3E}">
-        <p14:creationId xmlns:p14="http://schemas.microsoft.com/office/powerpoint/2010/main" val="1969514135"/>
-      </p:ext>
-    </p:extLst>
-  </p:cSld>
-  <p:clrMapOvr>
-    <a:masterClrMapping/>
-  </p:clrMapOvr>
-</p:sld>
-</file>
-
 <file path=ppt/theme/theme1.xml><?xml version="1.0" encoding="utf-8"?>
 <a:theme xmlns:a="http://schemas.openxmlformats.org/drawingml/2006/main" name="Office Theme">
   <a:themeElements>

--- a/Thesis_Presentation.pptx
+++ b/Thesis_Presentation.pptx
@@ -30,11 +30,11 @@
     <p:sldId id="276" r:id="rId24"/>
     <p:sldId id="293" r:id="rId25"/>
     <p:sldId id="284" r:id="rId26"/>
-    <p:sldId id="263" r:id="rId27"/>
-    <p:sldId id="292" r:id="rId28"/>
+    <p:sldId id="292" r:id="rId27"/>
+    <p:sldId id="263" r:id="rId28"/>
     <p:sldId id="285" r:id="rId29"/>
-    <p:sldId id="278" r:id="rId30"/>
-    <p:sldId id="277" r:id="rId31"/>
+    <p:sldId id="277" r:id="rId30"/>
+    <p:sldId id="278" r:id="rId31"/>
     <p:sldId id="294" r:id="rId32"/>
   </p:sldIdLst>
   <p:sldSz cx="12192000" cy="6858000"/>
@@ -164,11 +164,11 @@
             <p14:sldId id="276"/>
             <p14:sldId id="293"/>
             <p14:sldId id="284"/>
+            <p14:sldId id="292"/>
             <p14:sldId id="263"/>
-            <p14:sldId id="292"/>
             <p14:sldId id="285"/>
+            <p14:sldId id="277"/>
             <p14:sldId id="278"/>
-            <p14:sldId id="277"/>
             <p14:sldId id="294"/>
           </p14:sldIdLst>
         </p14:section>
@@ -184,7 +184,7 @@
 <file path=ppt/revisionInfo.xml><?xml version="1.0" encoding="utf-8"?>
 <p1510:revInfo xmlns:a="http://schemas.openxmlformats.org/drawingml/2006/main" xmlns:r="http://schemas.openxmlformats.org/officeDocument/2006/relationships" xmlns:p1510="http://schemas.microsoft.com/office/powerpoint/2015/10/main">
   <p1510:revLst>
-    <p1510:client id="{6F7D2D08-A2CD-4302-88FB-740D1140D192}" v="1758" dt="2026-01-05T21:01:41.446"/>
+    <p1510:client id="{6F7D2D08-A2CD-4302-88FB-740D1140D192}" v="1777" dt="2026-01-10T00:11:52.673"/>
   </p1510:revLst>
 </p1510:revInfo>
 </file>
@@ -194,16 +194,39 @@
   <pc:docChgLst>
     <pc:chgData name="Evgenia Andreou" userId="8e89e74f621e7047" providerId="LiveId" clId="{EF53017E-E624-4052-9F70-6403551E244D}"/>
     <pc:docChg chg="undo redo custSel addSld delSld modSld sldOrd modMainMaster addSection delSection modSection">
-      <pc:chgData name="Evgenia Andreou" userId="8e89e74f621e7047" providerId="LiveId" clId="{EF53017E-E624-4052-9F70-6403551E244D}" dt="2026-01-05T21:02:15.164" v="42174" actId="20577"/>
+      <pc:chgData name="Evgenia Andreou" userId="8e89e74f621e7047" providerId="LiveId" clId="{EF53017E-E624-4052-9F70-6403551E244D}" dt="2026-01-11T23:31:39.272" v="42468" actId="20577"/>
       <pc:docMkLst>
         <pc:docMk/>
       </pc:docMkLst>
       <pc:sldChg chg="modSp mod">
-        <pc:chgData name="Evgenia Andreou" userId="8e89e74f621e7047" providerId="LiveId" clId="{EF53017E-E624-4052-9F70-6403551E244D}" dt="2026-01-05T14:30:06.900" v="41600" actId="6549"/>
+        <pc:chgData name="Evgenia Andreou" userId="8e89e74f621e7047" providerId="LiveId" clId="{EF53017E-E624-4052-9F70-6403551E244D}" dt="2026-01-09T02:02:16.438" v="42374" actId="20577"/>
+        <pc:sldMkLst>
+          <pc:docMk/>
+          <pc:sldMk cId="568867521" sldId="257"/>
+        </pc:sldMkLst>
+        <pc:spChg chg="mod">
+          <ac:chgData name="Evgenia Andreou" userId="8e89e74f621e7047" providerId="LiveId" clId="{EF53017E-E624-4052-9F70-6403551E244D}" dt="2026-01-09T02:02:16.438" v="42374" actId="20577"/>
+          <ac:spMkLst>
+            <pc:docMk/>
+            <pc:sldMk cId="568867521" sldId="257"/>
+            <ac:spMk id="3" creationId="{09FB8F2E-C1EA-0356-22BA-7189EA91775F}"/>
+          </ac:spMkLst>
+        </pc:spChg>
+      </pc:sldChg>
+      <pc:sldChg chg="modSp mod">
+        <pc:chgData name="Evgenia Andreou" userId="8e89e74f621e7047" providerId="LiveId" clId="{EF53017E-E624-4052-9F70-6403551E244D}" dt="2026-01-06T00:43:07.874" v="42219" actId="20577"/>
         <pc:sldMkLst>
           <pc:docMk/>
           <pc:sldMk cId="3253723412" sldId="260"/>
         </pc:sldMkLst>
+        <pc:spChg chg="mod">
+          <ac:chgData name="Evgenia Andreou" userId="8e89e74f621e7047" providerId="LiveId" clId="{EF53017E-E624-4052-9F70-6403551E244D}" dt="2026-01-06T00:43:07.874" v="42219" actId="20577"/>
+          <ac:spMkLst>
+            <pc:docMk/>
+            <pc:sldMk cId="3253723412" sldId="260"/>
+            <ac:spMk id="5" creationId="{E7DEE60B-D404-7827-DCD6-007CA5735B35}"/>
+          </ac:spMkLst>
+        </pc:spChg>
         <pc:spChg chg="mod">
           <ac:chgData name="Evgenia Andreou" userId="8e89e74f621e7047" providerId="LiveId" clId="{EF53017E-E624-4052-9F70-6403551E244D}" dt="2026-01-05T14:30:06.900" v="41600" actId="6549"/>
           <ac:spMkLst>
@@ -214,7 +237,7 @@
         </pc:spChg>
       </pc:sldChg>
       <pc:sldChg chg="addSp delSp modSp mod ord">
-        <pc:chgData name="Evgenia Andreou" userId="8e89e74f621e7047" providerId="LiveId" clId="{EF53017E-E624-4052-9F70-6403551E244D}" dt="2026-01-05T14:44:26.649" v="41720" actId="20577"/>
+        <pc:chgData name="Evgenia Andreou" userId="8e89e74f621e7047" providerId="LiveId" clId="{EF53017E-E624-4052-9F70-6403551E244D}" dt="2026-01-09T01:15:44.321" v="42354"/>
         <pc:sldMkLst>
           <pc:docMk/>
           <pc:sldMk cId="379656155" sldId="263"/>
@@ -274,14 +297,6 @@
             <ac:spMk id="2" creationId="{86DB2BA2-C66A-5EC1-F184-C2C46DC0A30F}"/>
           </ac:spMkLst>
         </pc:spChg>
-        <pc:spChg chg="del">
-          <ac:chgData name="Evgenia Andreou" userId="8e89e74f621e7047" providerId="LiveId" clId="{EF53017E-E624-4052-9F70-6403551E244D}" dt="2026-01-05T15:05:19.944" v="41889" actId="478"/>
-          <ac:spMkLst>
-            <pc:docMk/>
-            <pc:sldMk cId="493610102" sldId="264"/>
-            <ac:spMk id="3" creationId="{754C2201-BFB4-BE44-95E3-C5031C5EFFD6}"/>
-          </ac:spMkLst>
-        </pc:spChg>
         <pc:spChg chg="mod">
           <ac:chgData name="Evgenia Andreou" userId="8e89e74f621e7047" providerId="LiveId" clId="{EF53017E-E624-4052-9F70-6403551E244D}" dt="2026-01-05T14:54:22.685" v="41730" actId="20577"/>
           <ac:spMkLst>
@@ -300,7 +315,7 @@
         </pc:spChg>
       </pc:sldChg>
       <pc:sldChg chg="modSp mod">
-        <pc:chgData name="Evgenia Andreou" userId="8e89e74f621e7047" providerId="LiveId" clId="{EF53017E-E624-4052-9F70-6403551E244D}" dt="2026-01-05T21:02:15.164" v="42174" actId="20577"/>
+        <pc:chgData name="Evgenia Andreou" userId="8e89e74f621e7047" providerId="LiveId" clId="{EF53017E-E624-4052-9F70-6403551E244D}" dt="2026-01-09T00:52:08.392" v="42345" actId="20577"/>
         <pc:sldMkLst>
           <pc:docMk/>
           <pc:sldMk cId="1969514135" sldId="266"/>
@@ -314,7 +329,7 @@
           </ac:spMkLst>
         </pc:spChg>
         <pc:graphicFrameChg chg="mod modGraphic">
-          <ac:chgData name="Evgenia Andreou" userId="8e89e74f621e7047" providerId="LiveId" clId="{EF53017E-E624-4052-9F70-6403551E244D}" dt="2026-01-05T21:02:15.164" v="42174" actId="20577"/>
+          <ac:chgData name="Evgenia Andreou" userId="8e89e74f621e7047" providerId="LiveId" clId="{EF53017E-E624-4052-9F70-6403551E244D}" dt="2026-01-09T00:52:08.392" v="42345" actId="20577"/>
           <ac:graphicFrameMkLst>
             <pc:docMk/>
             <pc:sldMk cId="1969514135" sldId="266"/>
@@ -322,14 +337,14 @@
           </ac:graphicFrameMkLst>
         </pc:graphicFrameChg>
       </pc:sldChg>
-      <pc:sldChg chg="addSp modSp mod">
-        <pc:chgData name="Evgenia Andreou" userId="8e89e74f621e7047" providerId="LiveId" clId="{EF53017E-E624-4052-9F70-6403551E244D}" dt="2026-01-05T15:02:41.001" v="41874" actId="1076"/>
+      <pc:sldChg chg="addSp delSp modSp mod">
+        <pc:chgData name="Evgenia Andreou" userId="8e89e74f621e7047" providerId="LiveId" clId="{EF53017E-E624-4052-9F70-6403551E244D}" dt="2026-01-11T23:31:39.272" v="42468" actId="20577"/>
         <pc:sldMkLst>
           <pc:docMk/>
           <pc:sldMk cId="4231469208" sldId="267"/>
         </pc:sldMkLst>
         <pc:spChg chg="mod">
-          <ac:chgData name="Evgenia Andreou" userId="8e89e74f621e7047" providerId="LiveId" clId="{EF53017E-E624-4052-9F70-6403551E244D}" dt="2026-01-05T15:01:15.831" v="41872" actId="313"/>
+          <ac:chgData name="Evgenia Andreou" userId="8e89e74f621e7047" providerId="LiveId" clId="{EF53017E-E624-4052-9F70-6403551E244D}" dt="2026-01-11T23:19:29.283" v="42431" actId="1076"/>
           <ac:spMkLst>
             <pc:docMk/>
             <pc:sldMk cId="4231469208" sldId="267"/>
@@ -337,7 +352,7 @@
           </ac:spMkLst>
         </pc:spChg>
         <pc:spChg chg="mod">
-          <ac:chgData name="Evgenia Andreou" userId="8e89e74f621e7047" providerId="LiveId" clId="{EF53017E-E624-4052-9F70-6403551E244D}" dt="2026-01-05T15:01:09.762" v="41869" actId="20577"/>
+          <ac:chgData name="Evgenia Andreou" userId="8e89e74f621e7047" providerId="LiveId" clId="{EF53017E-E624-4052-9F70-6403551E244D}" dt="2026-01-11T23:31:39.272" v="42468" actId="20577"/>
           <ac:spMkLst>
             <pc:docMk/>
             <pc:sldMk cId="4231469208" sldId="267"/>
@@ -345,15 +360,15 @@
           </ac:spMkLst>
         </pc:spChg>
         <pc:spChg chg="mod">
-          <ac:chgData name="Evgenia Andreou" userId="8e89e74f621e7047" providerId="LiveId" clId="{EF53017E-E624-4052-9F70-6403551E244D}" dt="2026-01-05T15:02:38.414" v="41873" actId="1076"/>
+          <ac:chgData name="Evgenia Andreou" userId="8e89e74f621e7047" providerId="LiveId" clId="{EF53017E-E624-4052-9F70-6403551E244D}" dt="2026-01-11T23:19:39.641" v="42433" actId="1076"/>
           <ac:spMkLst>
             <pc:docMk/>
             <pc:sldMk cId="4231469208" sldId="267"/>
             <ac:spMk id="4" creationId="{C69DB7BB-6B63-9805-5112-B71254956724}"/>
           </ac:spMkLst>
         </pc:spChg>
-        <pc:spChg chg="add mod">
-          <ac:chgData name="Evgenia Andreou" userId="8e89e74f621e7047" providerId="LiveId" clId="{EF53017E-E624-4052-9F70-6403551E244D}" dt="2026-01-05T15:02:41.001" v="41874" actId="1076"/>
+        <pc:spChg chg="add del mod">
+          <ac:chgData name="Evgenia Andreou" userId="8e89e74f621e7047" providerId="LiveId" clId="{EF53017E-E624-4052-9F70-6403551E244D}" dt="2026-01-11T23:19:03.226" v="42424" actId="478"/>
           <ac:spMkLst>
             <pc:docMk/>
             <pc:sldMk cId="4231469208" sldId="267"/>
@@ -369,7 +384,7 @@
         </pc:sldMkLst>
       </pc:sldChg>
       <pc:sldChg chg="addSp delSp modSp mod">
-        <pc:chgData name="Evgenia Andreou" userId="8e89e74f621e7047" providerId="LiveId" clId="{EF53017E-E624-4052-9F70-6403551E244D}" dt="2026-01-05T16:45:30.173" v="42068" actId="1035"/>
+        <pc:chgData name="Evgenia Andreou" userId="8e89e74f621e7047" providerId="LiveId" clId="{EF53017E-E624-4052-9F70-6403551E244D}" dt="2026-01-09T23:00:10.657" v="42412" actId="20577"/>
         <pc:sldMkLst>
           <pc:docMk/>
           <pc:sldMk cId="1839987358" sldId="276"/>
@@ -382,24 +397,8 @@
             <ac:spMk id="2" creationId="{2266DF65-6188-8376-76BA-FBFCD6D58A83}"/>
           </ac:spMkLst>
         </pc:spChg>
-        <pc:spChg chg="add del mod">
-          <ac:chgData name="Evgenia Andreou" userId="8e89e74f621e7047" providerId="LiveId" clId="{EF53017E-E624-4052-9F70-6403551E244D}" dt="2026-01-05T15:18:43.590" v="41904"/>
-          <ac:spMkLst>
-            <pc:docMk/>
-            <pc:sldMk cId="1839987358" sldId="276"/>
-            <ac:spMk id="3" creationId="{FCE6A253-430D-8674-5D72-CD87CC9E242A}"/>
-          </ac:spMkLst>
-        </pc:spChg>
-        <pc:spChg chg="add del">
-          <ac:chgData name="Evgenia Andreou" userId="8e89e74f621e7047" providerId="LiveId" clId="{EF53017E-E624-4052-9F70-6403551E244D}" dt="2026-01-05T15:18:45.740" v="41906" actId="22"/>
-          <ac:spMkLst>
-            <pc:docMk/>
-            <pc:sldMk cId="1839987358" sldId="276"/>
-            <ac:spMk id="5" creationId="{BC0EBF30-179C-402F-B6EF-5F5E69EA6143}"/>
-          </ac:spMkLst>
-        </pc:spChg>
         <pc:spChg chg="add mod">
-          <ac:chgData name="Evgenia Andreou" userId="8e89e74f621e7047" providerId="LiveId" clId="{EF53017E-E624-4052-9F70-6403551E244D}" dt="2026-01-05T16:44:59.786" v="42055" actId="1076"/>
+          <ac:chgData name="Evgenia Andreou" userId="8e89e74f621e7047" providerId="LiveId" clId="{EF53017E-E624-4052-9F70-6403551E244D}" dt="2026-01-09T22:58:55.221" v="42392" actId="20577"/>
           <ac:spMkLst>
             <pc:docMk/>
             <pc:sldMk cId="1839987358" sldId="276"/>
@@ -407,7 +406,7 @@
           </ac:spMkLst>
         </pc:spChg>
         <pc:spChg chg="add mod">
-          <ac:chgData name="Evgenia Andreou" userId="8e89e74f621e7047" providerId="LiveId" clId="{EF53017E-E624-4052-9F70-6403551E244D}" dt="2026-01-05T16:44:59.786" v="42055" actId="1076"/>
+          <ac:chgData name="Evgenia Andreou" userId="8e89e74f621e7047" providerId="LiveId" clId="{EF53017E-E624-4052-9F70-6403551E244D}" dt="2026-01-09T23:00:10.657" v="42412" actId="20577"/>
           <ac:spMkLst>
             <pc:docMk/>
             <pc:sldMk cId="1839987358" sldId="276"/>
@@ -471,14 +470,14 @@
           </ac:picMkLst>
         </pc:picChg>
       </pc:sldChg>
-      <pc:sldChg chg="modSp mod">
-        <pc:chgData name="Evgenia Andreou" userId="8e89e74f621e7047" providerId="LiveId" clId="{EF53017E-E624-4052-9F70-6403551E244D}" dt="2026-01-04T23:02:14.442" v="41578" actId="5793"/>
+      <pc:sldChg chg="modSp mod ord">
+        <pc:chgData name="Evgenia Andreou" userId="8e89e74f621e7047" providerId="LiveId" clId="{EF53017E-E624-4052-9F70-6403551E244D}" dt="2026-01-09T00:55:25.735" v="42347"/>
         <pc:sldMkLst>
           <pc:docMk/>
           <pc:sldMk cId="1725771169" sldId="278"/>
         </pc:sldMkLst>
         <pc:spChg chg="mod">
-          <ac:chgData name="Evgenia Andreou" userId="8e89e74f621e7047" providerId="LiveId" clId="{EF53017E-E624-4052-9F70-6403551E244D}" dt="2026-01-04T23:02:14.442" v="41578" actId="5793"/>
+          <ac:chgData name="Evgenia Andreou" userId="8e89e74f621e7047" providerId="LiveId" clId="{EF53017E-E624-4052-9F70-6403551E244D}" dt="2026-01-06T01:05:22.343" v="42252" actId="6549"/>
           <ac:spMkLst>
             <pc:docMk/>
             <pc:sldMk cId="1725771169" sldId="278"/>
@@ -487,7 +486,7 @@
         </pc:spChg>
       </pc:sldChg>
       <pc:sldChg chg="modSp mod">
-        <pc:chgData name="Evgenia Andreou" userId="8e89e74f621e7047" providerId="LiveId" clId="{EF53017E-E624-4052-9F70-6403551E244D}" dt="2026-01-05T20:57:56.545" v="42146" actId="20577"/>
+        <pc:chgData name="Evgenia Andreou" userId="8e89e74f621e7047" providerId="LiveId" clId="{EF53017E-E624-4052-9F70-6403551E244D}" dt="2026-01-10T00:11:53.758" v="42423" actId="27636"/>
         <pc:sldMkLst>
           <pc:docMk/>
           <pc:sldMk cId="2935283230" sldId="281"/>
@@ -501,7 +500,7 @@
           </ac:spMkLst>
         </pc:spChg>
         <pc:spChg chg="mod">
-          <ac:chgData name="Evgenia Andreou" userId="8e89e74f621e7047" providerId="LiveId" clId="{EF53017E-E624-4052-9F70-6403551E244D}" dt="2026-01-05T14:29:24.435" v="41584" actId="20577"/>
+          <ac:chgData name="Evgenia Andreou" userId="8e89e74f621e7047" providerId="LiveId" clId="{EF53017E-E624-4052-9F70-6403551E244D}" dt="2026-01-09T00:58:17.155" v="42352" actId="20577"/>
           <ac:spMkLst>
             <pc:docMk/>
             <pc:sldMk cId="2935283230" sldId="281"/>
@@ -533,7 +532,7 @@
           </ac:spMkLst>
         </pc:spChg>
         <pc:spChg chg="mod">
-          <ac:chgData name="Evgenia Andreou" userId="8e89e74f621e7047" providerId="LiveId" clId="{EF53017E-E624-4052-9F70-6403551E244D}" dt="2026-01-05T20:57:56.545" v="42146" actId="20577"/>
+          <ac:chgData name="Evgenia Andreou" userId="8e89e74f621e7047" providerId="LiveId" clId="{EF53017E-E624-4052-9F70-6403551E244D}" dt="2026-01-10T00:11:53.758" v="42423" actId="27636"/>
           <ac:spMkLst>
             <pc:docMk/>
             <pc:sldMk cId="2935283230" sldId="281"/>
@@ -586,6 +585,21 @@
             <ac:picMk id="11" creationId="{DC1F51DB-A1C3-E7AE-73E7-24425577EC79}"/>
           </ac:picMkLst>
         </pc:picChg>
+      </pc:sldChg>
+      <pc:sldChg chg="modSp mod">
+        <pc:chgData name="Evgenia Andreou" userId="8e89e74f621e7047" providerId="LiveId" clId="{EF53017E-E624-4052-9F70-6403551E244D}" dt="2026-01-09T23:04:20.423" v="42416" actId="20577"/>
+        <pc:sldMkLst>
+          <pc:docMk/>
+          <pc:sldMk cId="634262476" sldId="292"/>
+        </pc:sldMkLst>
+        <pc:spChg chg="mod">
+          <ac:chgData name="Evgenia Andreou" userId="8e89e74f621e7047" providerId="LiveId" clId="{EF53017E-E624-4052-9F70-6403551E244D}" dt="2026-01-09T23:04:20.423" v="42416" actId="20577"/>
+          <ac:spMkLst>
+            <pc:docMk/>
+            <pc:sldMk cId="634262476" sldId="292"/>
+            <ac:spMk id="3" creationId="{049D6BE7-05AE-64F8-4DB8-D2CE59F9D843}"/>
+          </ac:spMkLst>
+        </pc:spChg>
       </pc:sldChg>
       <pc:sldChg chg="addSp modSp mod">
         <pc:chgData name="Evgenia Andreou" userId="8e89e74f621e7047" providerId="LiveId" clId="{EF53017E-E624-4052-9F70-6403551E244D}" dt="2026-01-05T15:08:58.691" v="41894" actId="20577"/>
@@ -3691,41 +3705,50 @@
         <a:bodyPr/>
         <a:lstStyle/>
         <a:p>
-          <a:pPr algn="l">
+          <a:pPr marL="114300" lvl="1" indent="0" algn="l" defTabSz="666750">
+            <a:lnSpc>
+              <a:spcPct val="90000"/>
+            </a:lnSpc>
+            <a:spcBef>
+              <a:spcPct val="0"/>
+            </a:spcBef>
+            <a:spcAft>
+              <a:spcPct val="15000"/>
+            </a:spcAft>
             <a:buNone/>
           </a:pPr>
           <a:r>
-            <a:rPr lang="en-US" sz="1500"/>
+            <a:rPr lang="en-US" sz="1500" kern="1200" dirty="0"/>
             <a:t>Exploratory Analysis </a:t>
           </a:r>
           <a:r>
-            <a:rPr lang="en-US" sz="1500">
+            <a:rPr lang="en-US" sz="1500" kern="1200" dirty="0">
               <a:sym typeface="Wingdings" panose="05000000000000000000" pitchFamily="2" charset="2"/>
             </a:rPr>
             <a:t> </a:t>
           </a:r>
           <a:r>
-            <a:rPr lang="en-US" sz="1500" dirty="0"/>
+            <a:rPr lang="en-US" sz="1500" kern="1200" dirty="0"/>
             <a:t>Train set </a:t>
           </a:r>
           <a:r>
-            <a:rPr lang="en-US" sz="1500" dirty="0">
+            <a:rPr lang="en-US" sz="1500" kern="1200" dirty="0">
               <a:sym typeface="Wingdings" panose="05000000000000000000" pitchFamily="2" charset="2"/>
             </a:rPr>
             <a:t> </a:t>
           </a:r>
           <a:r>
-            <a:rPr lang="en-US" sz="1500" b="1" dirty="0"/>
+            <a:rPr lang="en-US" sz="1500" b="1" kern="1200" dirty="0"/>
             <a:t>X</a:t>
           </a:r>
           <a:r>
-            <a:rPr lang="en-US" sz="1500" dirty="0"/>
+            <a:rPr lang="en-US" sz="1500" kern="1200" dirty="0"/>
             <a:t> information leakage</a:t>
           </a:r>
           <a:br>
-            <a:rPr lang="en-US" sz="1500" dirty="0"/>
+            <a:rPr lang="en-US" sz="1500" kern="1200" dirty="0"/>
           </a:br>
-          <a:endParaRPr lang="en-GB" sz="1500" dirty="0"/>
+          <a:endParaRPr lang="en-GB" sz="1500" kern="1200" dirty="0"/>
         </a:p>
       </dgm:t>
     </dgm:pt>
@@ -3762,15 +3785,24 @@
         <a:bodyPr/>
         <a:lstStyle/>
         <a:p>
-          <a:pPr algn="l">
+          <a:pPr marL="114300" lvl="1" indent="0" algn="l" defTabSz="666750">
+            <a:lnSpc>
+              <a:spcPct val="90000"/>
+            </a:lnSpc>
+            <a:spcBef>
+              <a:spcPct val="0"/>
+            </a:spcBef>
+            <a:spcAft>
+              <a:spcPct val="15000"/>
+            </a:spcAft>
             <a:buFont typeface="Arial" panose="020B0604020202020204" pitchFamily="34" charset="0"/>
             <a:buChar char="•"/>
           </a:pPr>
           <a:r>
-            <a:rPr lang="en-US" sz="1500" dirty="0"/>
+            <a:rPr lang="en-US" sz="1500" kern="1200" dirty="0"/>
             <a:t>Frequency tables</a:t>
           </a:r>
-          <a:endParaRPr lang="en-GB" sz="1500" dirty="0"/>
+          <a:endParaRPr lang="en-GB" sz="1500" kern="1200" dirty="0"/>
         </a:p>
       </dgm:t>
     </dgm:pt>
@@ -3807,15 +3839,24 @@
         <a:bodyPr/>
         <a:lstStyle/>
         <a:p>
-          <a:pPr algn="l">
+          <a:pPr marL="114300" lvl="1" indent="0" algn="l" defTabSz="666750">
+            <a:lnSpc>
+              <a:spcPct val="90000"/>
+            </a:lnSpc>
+            <a:spcBef>
+              <a:spcPct val="0"/>
+            </a:spcBef>
+            <a:spcAft>
+              <a:spcPct val="15000"/>
+            </a:spcAft>
             <a:buFont typeface="Arial" panose="020B0604020202020204" pitchFamily="34" charset="0"/>
             <a:buChar char="•"/>
           </a:pPr>
           <a:r>
-            <a:rPr lang="en-US" sz="1500" dirty="0"/>
+            <a:rPr lang="en-US" sz="1500" kern="1200" dirty="0"/>
             <a:t>Univariable analysis: Logistic, Chi-square, Mann-Whitney test</a:t>
           </a:r>
-          <a:endParaRPr lang="en-GB" sz="1500" dirty="0"/>
+          <a:endParaRPr lang="en-GB" sz="1500" kern="1200" dirty="0"/>
         </a:p>
       </dgm:t>
     </dgm:pt>
@@ -3852,46 +3893,55 @@
         <a:bodyPr/>
         <a:lstStyle/>
         <a:p>
-          <a:pPr algn="l">
+          <a:pPr marL="114300" lvl="1" indent="0" algn="l" defTabSz="666750">
+            <a:lnSpc>
+              <a:spcPct val="90000"/>
+            </a:lnSpc>
+            <a:spcBef>
+              <a:spcPct val="0"/>
+            </a:spcBef>
+            <a:spcAft>
+              <a:spcPct val="15000"/>
+            </a:spcAft>
             <a:buFont typeface="Arial" panose="020B0604020202020204" pitchFamily="34" charset="0"/>
             <a:buChar char="•"/>
           </a:pPr>
           <a:r>
-            <a:rPr lang="en-GB" sz="1500" dirty="0"/>
+            <a:rPr lang="en-GB" sz="1500" kern="1200" dirty="0"/>
             <a:t>Correlation: Spearman, X</a:t>
           </a:r>
           <a:r>
-            <a:rPr lang="en-GB" sz="1500" baseline="30000" dirty="0"/>
+            <a:rPr lang="en-GB" sz="1500" kern="1200" baseline="30000" dirty="0"/>
             <a:t>2</a:t>
           </a:r>
           <a:r>
-            <a:rPr lang="en-GB" sz="1500" dirty="0"/>
+            <a:rPr lang="en-GB" sz="1500" kern="1200" dirty="0"/>
             <a:t> (Phi), 1-way-Anova</a:t>
           </a:r>
           <a:r>
-            <a:rPr lang="el-GR" sz="1500" dirty="0"/>
+            <a:rPr lang="el-GR" sz="1500" kern="1200" dirty="0"/>
             <a:t>(η</a:t>
           </a:r>
           <a:r>
-            <a:rPr lang="el-GR" sz="1500" baseline="30000" dirty="0"/>
+            <a:rPr lang="el-GR" sz="1500" kern="1200" baseline="30000" dirty="0"/>
             <a:t>2</a:t>
           </a:r>
           <a:r>
-            <a:rPr lang="el-GR" sz="1500" dirty="0"/>
+            <a:rPr lang="el-GR" sz="1500" kern="1200" dirty="0"/>
             <a:t>)</a:t>
           </a:r>
           <a:r>
-            <a:rPr lang="en-GB" sz="1500" dirty="0"/>
+            <a:rPr lang="en-GB" sz="1500" kern="1200" dirty="0"/>
             <a:t> , </a:t>
           </a:r>
           <a:r>
-            <a:rPr lang="en-GB" sz="1500" dirty="0">
+            <a:rPr lang="en-GB" sz="1500" kern="1200" dirty="0">
               <a:sym typeface="Wingdings" panose="05000000000000000000" pitchFamily="2" charset="2"/>
             </a:rPr>
             <a:t>Heatmaps, VIF </a:t>
           </a:r>
           <a:r>
-            <a:rPr lang="en-GB" sz="1500" dirty="0"/>
+            <a:rPr lang="en-GB" sz="1500" kern="1200" dirty="0"/>
             <a:t>≥10</a:t>
           </a:r>
         </a:p>
@@ -3930,12 +3980,21 @@
         <a:bodyPr/>
         <a:lstStyle/>
         <a:p>
-          <a:pPr algn="l">
+          <a:pPr marL="114300" lvl="1" indent="0" algn="l" defTabSz="666750">
+            <a:lnSpc>
+              <a:spcPct val="90000"/>
+            </a:lnSpc>
+            <a:spcBef>
+              <a:spcPct val="0"/>
+            </a:spcBef>
+            <a:spcAft>
+              <a:spcPct val="15000"/>
+            </a:spcAft>
             <a:buFont typeface="Arial" panose="020B0604020202020204" pitchFamily="34" charset="0"/>
             <a:buChar char="•"/>
           </a:pPr>
           <a:r>
-            <a:rPr lang="en-GB" sz="1500" dirty="0"/>
+            <a:rPr lang="en-GB" sz="1500" kern="1200" dirty="0"/>
             <a:t>Sparsity Risk: EPV ≥25</a:t>
           </a:r>
         </a:p>
@@ -3974,12 +4033,21 @@
         <a:bodyPr/>
         <a:lstStyle/>
         <a:p>
-          <a:pPr algn="l">
+          <a:pPr marL="114300" lvl="1" indent="0" algn="l" defTabSz="666750">
+            <a:lnSpc>
+              <a:spcPct val="90000"/>
+            </a:lnSpc>
+            <a:spcBef>
+              <a:spcPct val="0"/>
+            </a:spcBef>
+            <a:spcAft>
+              <a:spcPct val="15000"/>
+            </a:spcAft>
             <a:buFont typeface="Arial" panose="020B0604020202020204" pitchFamily="34" charset="0"/>
             <a:buChar char="•"/>
           </a:pPr>
           <a:r>
-            <a:rPr lang="en-GB" sz="1500" dirty="0"/>
+            <a:rPr lang="en-GB" sz="1500" kern="1200" dirty="0"/>
             <a:t>Outliers</a:t>
           </a:r>
         </a:p>
@@ -4063,12 +4131,21 @@
         <a:bodyPr/>
         <a:lstStyle/>
         <a:p>
-          <a:pPr algn="l">
+          <a:pPr marL="114300" lvl="1" indent="0" algn="l" defTabSz="666750">
+            <a:lnSpc>
+              <a:spcPct val="90000"/>
+            </a:lnSpc>
+            <a:spcBef>
+              <a:spcPct val="0"/>
+            </a:spcBef>
+            <a:spcAft>
+              <a:spcPct val="15000"/>
+            </a:spcAft>
             <a:buFont typeface="Arial" panose="020B0604020202020204" pitchFamily="34" charset="0"/>
             <a:buChar char="•"/>
           </a:pPr>
           <a:r>
-            <a:rPr lang="en-GB" sz="1500" dirty="0"/>
+            <a:rPr lang="en-GB" sz="1500" kern="1200" dirty="0"/>
             <a:t>AIC, p values, CL</a:t>
           </a:r>
         </a:p>
@@ -4107,15 +4184,24 @@
         <a:bodyPr/>
         <a:lstStyle/>
         <a:p>
-          <a:pPr algn="l">
+          <a:pPr marL="114300" lvl="1" indent="0" algn="l" defTabSz="666750">
+            <a:lnSpc>
+              <a:spcPct val="90000"/>
+            </a:lnSpc>
+            <a:spcBef>
+              <a:spcPct val="0"/>
+            </a:spcBef>
+            <a:spcAft>
+              <a:spcPct val="15000"/>
+            </a:spcAft>
             <a:buFont typeface="Arial" panose="020B0604020202020204" pitchFamily="34" charset="0"/>
             <a:buChar char="•"/>
           </a:pPr>
           <a:r>
-            <a:rPr lang="en-US" sz="1500" dirty="0"/>
+            <a:rPr lang="en-US" sz="1500" kern="1200" dirty="0"/>
             <a:t>Distribution Plots (Bar, Kde, Count)</a:t>
           </a:r>
-          <a:endParaRPr lang="en-GB" sz="1500" dirty="0"/>
+          <a:endParaRPr lang="en-GB" sz="1500" kern="1200" dirty="0"/>
         </a:p>
       </dgm:t>
     </dgm:pt>
@@ -4141,7 +4227,7 @@
         </a:p>
       </dgm:t>
     </dgm:pt>
-    <dgm:pt modelId="{59FC4D82-540C-47F6-A92D-064DDDE4834B}">
+    <dgm:pt modelId="{26DA9842-ADC7-46F7-9EE2-32CF7183EBB1}">
       <dgm:prSet custT="1"/>
       <dgm:spPr>
         <a:ln>
@@ -4152,14 +4238,24 @@
         <a:bodyPr/>
         <a:lstStyle/>
         <a:p>
-          <a:pPr algn="l">
-            <a:buNone/>
+          <a:pPr marL="114300" lvl="1" indent="0" algn="l" defTabSz="666750">
+            <a:lnSpc>
+              <a:spcPct val="90000"/>
+            </a:lnSpc>
+            <a:spcBef>
+              <a:spcPct val="0"/>
+            </a:spcBef>
+            <a:spcAft>
+              <a:spcPct val="15000"/>
+            </a:spcAft>
+            <a:buFont typeface="Arial" panose="020B0604020202020204" pitchFamily="34" charset="0"/>
+            <a:buChar char="•"/>
           </a:pPr>
-          <a:endParaRPr lang="en-GB" sz="1500" dirty="0"/>
+          <a:endParaRPr lang="en-GB" sz="1500" kern="1200" dirty="0"/>
         </a:p>
       </dgm:t>
     </dgm:pt>
-    <dgm:pt modelId="{A97469FD-60FE-4D9E-8FA7-8C84F2E8EE4C}" type="parTrans" cxnId="{BF915D32-B530-4188-ADE0-8CBDF58E1C29}">
+    <dgm:pt modelId="{0C85E99A-CEB6-449F-B829-A56B3491545C}" type="parTrans" cxnId="{D2E888B8-6F96-4038-A5BB-B685E8DB8386}">
       <dgm:prSet/>
       <dgm:spPr/>
       <dgm:t>
@@ -4170,7 +4266,7 @@
         </a:p>
       </dgm:t>
     </dgm:pt>
-    <dgm:pt modelId="{420482DB-355C-431E-9A72-720643C34E9A}" type="sibTrans" cxnId="{BF915D32-B530-4188-ADE0-8CBDF58E1C29}">
+    <dgm:pt modelId="{5E2DCDC2-3C52-4A98-979C-DFEDC2223258}" type="sibTrans" cxnId="{D2E888B8-6F96-4038-A5BB-B685E8DB8386}">
       <dgm:prSet/>
       <dgm:spPr/>
       <dgm:t>
@@ -4181,40 +4277,53 @@
         </a:p>
       </dgm:t>
     </dgm:pt>
-    <dgm:pt modelId="{14D5ABE9-6FAF-4920-B3C3-45FCB82139B0}">
+    <dgm:pt modelId="{736A7D57-B0F2-4BAB-B205-1C2C3B99A6A3}">
       <dgm:prSet custT="1"/>
-      <dgm:spPr/>
+      <dgm:spPr>
+        <a:ln>
+          <a:noFill/>
+        </a:ln>
+      </dgm:spPr>
       <dgm:t>
         <a:bodyPr/>
         <a:lstStyle/>
         <a:p>
-          <a:pPr algn="l">
+          <a:pPr marL="114300" lvl="1" indent="0" algn="l" defTabSz="666750">
+            <a:lnSpc>
+              <a:spcPct val="90000"/>
+            </a:lnSpc>
+            <a:spcBef>
+              <a:spcPct val="0"/>
+            </a:spcBef>
+            <a:spcAft>
+              <a:spcPct val="15000"/>
+            </a:spcAft>
             <a:buFont typeface="Wingdings" panose="05000000000000000000" pitchFamily="2" charset="2"/>
             <a:buChar char="Ø"/>
           </a:pPr>
           <a:r>
-            <a:rPr lang="en-GB" sz="1500" dirty="0"/>
+            <a:rPr lang="en-GB" sz="1500" kern="1200" dirty="0"/>
             <a:t>Merge levels </a:t>
           </a:r>
           <a:r>
-            <a:rPr lang="en-GB" sz="1500" dirty="0">
+            <a:rPr lang="en-GB" sz="1500" kern="1200" dirty="0">
               <a:sym typeface="Wingdings" panose="05000000000000000000" pitchFamily="2" charset="2"/>
             </a:rPr>
             <a:t> </a:t>
           </a:r>
           <a:r>
-            <a:rPr lang="en-US" sz="1500" b="1" dirty="0"/>
+            <a:rPr lang="en-US" sz="1500" b="1" kern="1200" dirty="0"/>
             <a:t>X </a:t>
           </a:r>
           <a:r>
-            <a:rPr lang="en-US" sz="1500" b="0" dirty="0"/>
+            <a:rPr lang="en-US" sz="1500" b="0" kern="1200" dirty="0"/>
             <a:t>rows dropped</a:t>
           </a:r>
-          <a:endParaRPr lang="en-GB" sz="1500" b="0" dirty="0"/>
+          <a:endParaRPr lang="en-GB" sz="1500" kern="1200" dirty="0"/>
         </a:p>
       </dgm:t>
     </dgm:pt>
-    <dgm:pt modelId="{1EDB6088-5BA5-4363-80B9-D4137011A457}" type="parTrans" cxnId="{C8935F94-3ECD-4E3A-B712-C961CF94FFDF}">
+    <dgm:pt modelId="{8713C7AD-357C-4BD1-A70D-C92712260DA4}" type="parTrans" cxnId="{FA4D4F92-1F0C-4ADA-B59C-2DE097BC5208}">
       <dgm:prSet/>
       <dgm:spPr/>
       <dgm:t>
@@ -4225,7 +4334,7 @@
         </a:p>
       </dgm:t>
     </dgm:pt>
-    <dgm:pt modelId="{6397023F-B25B-4A36-A5D2-30D87AB487CC}" type="sibTrans" cxnId="{C8935F94-3ECD-4E3A-B712-C961CF94FFDF}">
+    <dgm:pt modelId="{F6AFAD1D-E444-452A-9CDB-622B62E1A36A}" type="sibTrans" cxnId="{FA4D4F92-1F0C-4ADA-B59C-2DE097BC5208}">
       <dgm:prSet/>
       <dgm:spPr/>
       <dgm:t>
@@ -4236,25 +4345,57 @@
         </a:p>
       </dgm:t>
     </dgm:pt>
-    <dgm:pt modelId="{2F634E6B-0C04-4EB9-91C3-E1E013618DDA}">
+    <dgm:pt modelId="{B40F690E-7942-44A2-930D-D36AA7BEC538}">
       <dgm:prSet custT="1"/>
-      <dgm:spPr/>
+      <dgm:spPr>
+        <a:ln>
+          <a:noFill/>
+        </a:ln>
+      </dgm:spPr>
       <dgm:t>
         <a:bodyPr/>
         <a:lstStyle/>
         <a:p>
-          <a:pPr algn="l">
+          <a:pPr marL="114300" lvl="1" indent="0" algn="l" defTabSz="666750">
+            <a:lnSpc>
+              <a:spcPct val="90000"/>
+            </a:lnSpc>
+            <a:spcBef>
+              <a:spcPct val="0"/>
+            </a:spcBef>
+            <a:spcAft>
+              <a:spcPct val="15000"/>
+            </a:spcAft>
             <a:buFont typeface="Wingdings" panose="05000000000000000000" pitchFamily="2" charset="2"/>
             <a:buChar char="Ø"/>
           </a:pPr>
           <a:r>
-            <a:rPr lang="en-GB" sz="1500" dirty="0"/>
-            <a:t>Feature Selection</a:t>
+            <a:rPr lang="en-GB" sz="1500" kern="1200" dirty="0">
+              <a:latin typeface="+mn-lt"/>
+            </a:rPr>
+            <a:t>F</a:t>
           </a:r>
+          <a:r>
+            <a:rPr lang="en-GB" sz="1500" kern="1200" dirty="0">
+              <a:solidFill>
+                <a:prstClr val="black">
+                  <a:hueOff val="0"/>
+                  <a:satOff val="0"/>
+                  <a:lumOff val="0"/>
+                  <a:alphaOff val="0"/>
+                </a:prstClr>
+              </a:solidFill>
+              <a:latin typeface="+mn-lt"/>
+              <a:ea typeface="+mn-ea"/>
+              <a:cs typeface="+mn-cs"/>
+            </a:rPr>
+            <a:t>eature Selection</a:t>
+          </a:r>
+          <a:endParaRPr lang="en-GB" sz="1500" kern="1200" dirty="0"/>
         </a:p>
       </dgm:t>
     </dgm:pt>
-    <dgm:pt modelId="{02AE7C93-89C4-484F-AFCE-7A88F797CBE6}" type="parTrans" cxnId="{B9ED93C6-2815-4A9B-914A-5AE99F5774C6}">
+    <dgm:pt modelId="{6F4CF985-3CD5-4A08-A5A3-CC3BED67DC1F}" type="parTrans" cxnId="{56A31696-3ED1-488E-94ED-2E6614BF29AB}">
       <dgm:prSet/>
       <dgm:spPr/>
       <dgm:t>
@@ -4265,7 +4406,7 @@
         </a:p>
       </dgm:t>
     </dgm:pt>
-    <dgm:pt modelId="{4341451F-B376-44F3-B0C6-380A9D93638D}" type="sibTrans" cxnId="{B9ED93C6-2815-4A9B-914A-5AE99F5774C6}">
+    <dgm:pt modelId="{92B4B542-8697-4062-8D0A-E47B00ECD62D}" type="sibTrans" cxnId="{56A31696-3ED1-488E-94ED-2E6614BF29AB}">
       <dgm:prSet/>
       <dgm:spPr/>
       <dgm:t>
@@ -4276,55 +4417,90 @@
         </a:p>
       </dgm:t>
     </dgm:pt>
-    <dgm:pt modelId="{B8855DDA-D3EB-4654-BB8A-E8E526B34804}">
+    <dgm:pt modelId="{0A08F9B5-78CA-4B05-B1C4-3862CF8C5E43}">
       <dgm:prSet custT="1"/>
-      <dgm:spPr/>
+      <dgm:spPr>
+        <a:ln>
+          <a:noFill/>
+        </a:ln>
+      </dgm:spPr>
       <dgm:t>
         <a:bodyPr/>
         <a:lstStyle/>
         <a:p>
-          <a:pPr algn="l">
+          <a:pPr marL="114300" lvl="1" indent="0" algn="l" defTabSz="666750">
+            <a:lnSpc>
+              <a:spcPct val="90000"/>
+            </a:lnSpc>
+            <a:spcBef>
+              <a:spcPct val="0"/>
+            </a:spcBef>
+            <a:spcAft>
+              <a:spcPct val="15000"/>
+            </a:spcAft>
             <a:buFont typeface="Wingdings" panose="05000000000000000000" pitchFamily="2" charset="2"/>
             <a:buChar char="Ø"/>
           </a:pPr>
           <a:r>
-            <a:rPr lang="en-GB" sz="1500" dirty="0"/>
+            <a:rPr lang="en-GB" sz="1500" kern="1200" dirty="0">
+              <a:solidFill>
+                <a:prstClr val="black">
+                  <a:hueOff val="0"/>
+                  <a:satOff val="0"/>
+                  <a:lumOff val="0"/>
+                  <a:alphaOff val="0"/>
+                </a:prstClr>
+              </a:solidFill>
+              <a:latin typeface="+mn-lt"/>
+              <a:ea typeface="+mn-ea"/>
+              <a:cs typeface="+mn-cs"/>
+            </a:rPr>
             <a:t>Real world skewed data </a:t>
           </a:r>
           <a:r>
-            <a:rPr lang="en-GB" sz="1500" dirty="0">
+            <a:rPr lang="en-GB" sz="1500" kern="1200" dirty="0">
+              <a:solidFill>
+                <a:prstClr val="black">
+                  <a:hueOff val="0"/>
+                  <a:satOff val="0"/>
+                  <a:lumOff val="0"/>
+                  <a:alphaOff val="0"/>
+                </a:prstClr>
+              </a:solidFill>
+              <a:latin typeface="+mn-lt"/>
+              <a:ea typeface="+mn-ea"/>
+              <a:cs typeface="+mn-cs"/>
               <a:sym typeface="Wingdings" panose="05000000000000000000" pitchFamily="2" charset="2"/>
             </a:rPr>
             <a:t></a:t>
           </a:r>
           <a:r>
-            <a:rPr lang="en-GB" sz="1500" dirty="0"/>
+            <a:rPr lang="en-GB" sz="1500" kern="1200" dirty="0">
+              <a:solidFill>
+                <a:prstClr val="black">
+                  <a:hueOff val="0"/>
+                  <a:satOff val="0"/>
+                  <a:lumOff val="0"/>
+                  <a:alphaOff val="0"/>
+                </a:prstClr>
+              </a:solidFill>
+              <a:latin typeface="+mn-lt"/>
+              <a:ea typeface="+mn-ea"/>
+              <a:cs typeface="+mn-cs"/>
+            </a:rPr>
             <a:t> Log scale</a:t>
           </a:r>
+          <a:endParaRPr lang="en-GB" sz="1500" kern="1200" dirty="0"/>
         </a:p>
       </dgm:t>
     </dgm:pt>
-    <dgm:pt modelId="{FA3888AD-4681-47CF-9F1E-E3B7BED2734B}" type="parTrans" cxnId="{0865BB91-6514-4383-B5F5-AF387B8A5E3B}">
+    <dgm:pt modelId="{4F297EE7-D4A0-4B30-BAB1-0C70ADEB5254}" type="parTrans" cxnId="{76626F88-35A2-4265-9103-3E3162D5BB2A}">
       <dgm:prSet/>
       <dgm:spPr/>
-      <dgm:t>
-        <a:bodyPr/>
-        <a:lstStyle/>
-        <a:p>
-          <a:endParaRPr lang="en-GB"/>
-        </a:p>
-      </dgm:t>
     </dgm:pt>
-    <dgm:pt modelId="{60C22610-58A9-42A3-89D0-1EA544F9247D}" type="sibTrans" cxnId="{0865BB91-6514-4383-B5F5-AF387B8A5E3B}">
+    <dgm:pt modelId="{C02A50F2-FEA2-46A7-B375-F6405E67E575}" type="sibTrans" cxnId="{76626F88-35A2-4265-9103-3E3162D5BB2A}">
       <dgm:prSet/>
       <dgm:spPr/>
-      <dgm:t>
-        <a:bodyPr/>
-        <a:lstStyle/>
-        <a:p>
-          <a:endParaRPr lang="en-GB"/>
-        </a:p>
-      </dgm:t>
     </dgm:pt>
     <dgm:pt modelId="{8C50726C-E90C-4FFA-B6A0-2ED37CF63F64}" type="pres">
       <dgm:prSet presAssocID="{F0F13D87-64B0-41AD-8624-57471FE85796}" presName="Name0" presStyleCnt="0">
@@ -4386,15 +4562,14 @@
   <dgm:cxnLst>
     <dgm:cxn modelId="{14E21D00-452E-4C18-9C41-7960E487344B}" type="presOf" srcId="{F0F13D87-64B0-41AD-8624-57471FE85796}" destId="{8C50726C-E90C-4FFA-B6A0-2ED37CF63F64}" srcOrd="0" destOrd="0" presId="urn:microsoft.com/office/officeart/2005/8/layout/vList5"/>
     <dgm:cxn modelId="{12FE6C09-00C6-4A02-B542-575FE8B0B255}" srcId="{F0F13D87-64B0-41AD-8624-57471FE85796}" destId="{2F2A67E8-ACD9-4C73-881C-0F727D32AE95}" srcOrd="0" destOrd="0" parTransId="{A275FB55-100D-41BA-A526-40603876FD22}" sibTransId="{7C0B296B-2A0D-4999-A0C4-2B03AA5E5374}"/>
-    <dgm:cxn modelId="{C00F8421-F747-485C-B1B5-20EB97E9EFA4}" srcId="{8B6C3B02-9B97-4461-849D-8C27B7EC535B}" destId="{2F7A7128-86C4-4AA6-BDD2-C0F06335F019}" srcOrd="11" destOrd="0" parTransId="{D99736A6-12EE-4BAE-87C7-CBC8D7CA2323}" sibTransId="{80D44254-ED36-4ABC-9111-50A9B5934201}"/>
-    <dgm:cxn modelId="{69274B22-2FBE-4573-85C9-5F4B548A9279}" type="presOf" srcId="{2F634E6B-0C04-4EB9-91C3-E1E013618DDA}" destId="{4E062ED7-C8B7-4731-A7F1-BE128EC98711}" srcOrd="0" destOrd="2" presId="urn:microsoft.com/office/officeart/2005/8/layout/vList5"/>
-    <dgm:cxn modelId="{EE732523-ACD9-4AD5-A411-721BE0F6D66C}" type="presOf" srcId="{A721B64A-F78D-438C-BD03-ED79A0A4204A}" destId="{4E062ED7-C8B7-4731-A7F1-BE128EC98711}" srcOrd="0" destOrd="9" presId="urn:microsoft.com/office/officeart/2005/8/layout/vList5"/>
-    <dgm:cxn modelId="{F8915129-CB9E-421E-9400-1C4805D1680C}" type="presOf" srcId="{14D5ABE9-6FAF-4920-B3C3-45FCB82139B0}" destId="{4E062ED7-C8B7-4731-A7F1-BE128EC98711}" srcOrd="0" destOrd="1" presId="urn:microsoft.com/office/officeart/2005/8/layout/vList5"/>
-    <dgm:cxn modelId="{BF915D32-B530-4188-ADE0-8CBDF58E1C29}" srcId="{8B6C3B02-9B97-4461-849D-8C27B7EC535B}" destId="{59FC4D82-540C-47F6-A92D-064DDDE4834B}" srcOrd="4" destOrd="0" parTransId="{A97469FD-60FE-4D9E-8FA7-8C84F2E8EE4C}" sibTransId="{420482DB-355C-431E-9A72-720643C34E9A}"/>
+    <dgm:cxn modelId="{C592271D-9C26-45B6-ADE6-4E2B7EAB6B11}" type="presOf" srcId="{B40F690E-7942-44A2-930D-D36AA7BEC538}" destId="{4E062ED7-C8B7-4731-A7F1-BE128EC98711}" srcOrd="0" destOrd="10" presId="urn:microsoft.com/office/officeart/2005/8/layout/vList5"/>
+    <dgm:cxn modelId="{C00F8421-F747-485C-B1B5-20EB97E9EFA4}" srcId="{8B6C3B02-9B97-4461-849D-8C27B7EC535B}" destId="{2F7A7128-86C4-4AA6-BDD2-C0F06335F019}" srcOrd="7" destOrd="0" parTransId="{D99736A6-12EE-4BAE-87C7-CBC8D7CA2323}" sibTransId="{80D44254-ED36-4ABC-9111-50A9B5934201}"/>
+    <dgm:cxn modelId="{EE732523-ACD9-4AD5-A411-721BE0F6D66C}" type="presOf" srcId="{A721B64A-F78D-438C-BD03-ED79A0A4204A}" destId="{4E062ED7-C8B7-4731-A7F1-BE128EC98711}" srcOrd="0" destOrd="5" presId="urn:microsoft.com/office/officeart/2005/8/layout/vList5"/>
+    <dgm:cxn modelId="{C69CD839-54E2-4FB0-AE27-35B575282CE0}" type="presOf" srcId="{26DA9842-ADC7-46F7-9EE2-32CF7183EBB1}" destId="{4E062ED7-C8B7-4731-A7F1-BE128EC98711}" srcOrd="0" destOrd="8" presId="urn:microsoft.com/office/officeart/2005/8/layout/vList5"/>
     <dgm:cxn modelId="{02B59940-76D4-44CD-B093-5E255D8B8128}" srcId="{F0F13D87-64B0-41AD-8624-57471FE85796}" destId="{8B6C3B02-9B97-4461-849D-8C27B7EC535B}" srcOrd="1" destOrd="0" parTransId="{50481D48-BE32-402B-B97D-BE0B16A178F3}" sibTransId="{0362A28F-AA87-4D8E-9250-A7830272AD07}"/>
     <dgm:cxn modelId="{2115EB43-AED9-4C7C-93CF-B85E01E16247}" srcId="{2F2A67E8-ACD9-4C73-881C-0F727D32AE95}" destId="{6685804A-377E-4143-859E-8D132C381ECF}" srcOrd="2" destOrd="0" parTransId="{F5C6F6E8-45D3-4854-8B35-3294023BC47D}" sibTransId="{BF8EC071-F2DF-44DA-A21B-1A8CE3A4C61B}"/>
-    <dgm:cxn modelId="{1F480846-2667-4241-9F3B-7AF9FCFFF1F3}" srcId="{8B6C3B02-9B97-4461-849D-8C27B7EC535B}" destId="{A721B64A-F78D-438C-BD03-ED79A0A4204A}" srcOrd="9" destOrd="0" parTransId="{78C91161-6F7F-4398-B89C-D80D89BC273D}" sibTransId="{94D94A6E-FBF5-4F36-B66B-5C7A69F3C861}"/>
-    <dgm:cxn modelId="{1CF58766-E6CB-4E53-AF1C-9604F4485D46}" type="presOf" srcId="{B8855DDA-D3EB-4654-BB8A-E8E526B34804}" destId="{4E062ED7-C8B7-4731-A7F1-BE128EC98711}" srcOrd="0" destOrd="3" presId="urn:microsoft.com/office/officeart/2005/8/layout/vList5"/>
+    <dgm:cxn modelId="{1F480846-2667-4241-9F3B-7AF9FCFFF1F3}" srcId="{8B6C3B02-9B97-4461-849D-8C27B7EC535B}" destId="{A721B64A-F78D-438C-BD03-ED79A0A4204A}" srcOrd="5" destOrd="0" parTransId="{78C91161-6F7F-4398-B89C-D80D89BC273D}" sibTransId="{94D94A6E-FBF5-4F36-B66B-5C7A69F3C861}"/>
+    <dgm:cxn modelId="{28473F47-0A74-45A4-B3B2-1FCBDE4CFCA0}" type="presOf" srcId="{736A7D57-B0F2-4BAB-B205-1C2C3B99A6A3}" destId="{4E062ED7-C8B7-4731-A7F1-BE128EC98711}" srcOrd="0" destOrd="9" presId="urn:microsoft.com/office/officeart/2005/8/layout/vList5"/>
     <dgm:cxn modelId="{E6674B4B-0059-4698-B67E-3BDCC9F72950}" srcId="{2F2A67E8-ACD9-4C73-881C-0F727D32AE95}" destId="{3CF2DE67-AA0D-447F-AC31-130CB5E04C56}" srcOrd="1" destOrd="0" parTransId="{E794BAA1-87A0-45CC-803A-CA4285B90844}" sibTransId="{9668A633-4F83-4818-8D18-AB26C3CDBAFA}"/>
     <dgm:cxn modelId="{608C324E-7E80-4BF4-8A54-C2C2D7187346}" type="presOf" srcId="{6685804A-377E-4143-859E-8D132C381ECF}" destId="{EFC1B403-9E6E-4411-9B69-79A1584C7937}" srcOrd="0" destOrd="2" presId="urn:microsoft.com/office/officeart/2005/8/layout/vList5"/>
     <dgm:cxn modelId="{454DAC6E-6DA6-4456-AAAB-C6BF68406A55}" type="presOf" srcId="{35BB0A4F-EA77-413C-9E84-DEBFB93A1E88}" destId="{EFC1B403-9E6E-4411-9B69-79A1584C7937}" srcOrd="0" destOrd="0" presId="urn:microsoft.com/office/officeart/2005/8/layout/vList5"/>
@@ -4402,23 +4577,24 @@
     <dgm:cxn modelId="{E8435856-52A4-4837-AFEB-C91AB4BC5B44}" type="presOf" srcId="{8B6C3B02-9B97-4461-849D-8C27B7EC535B}" destId="{9E95D006-3A52-4C9F-915C-CE452CD5CD7D}" srcOrd="0" destOrd="0" presId="urn:microsoft.com/office/officeart/2005/8/layout/vList5"/>
     <dgm:cxn modelId="{D4512F7A-70D2-4B0C-9F02-428A14F88DAB}" type="presOf" srcId="{3CF2DE67-AA0D-447F-AC31-130CB5E04C56}" destId="{EFC1B403-9E6E-4411-9B69-79A1584C7937}" srcOrd="0" destOrd="1" presId="urn:microsoft.com/office/officeart/2005/8/layout/vList5"/>
     <dgm:cxn modelId="{E2A17C7E-3D95-41AA-9F9F-74B88C49C7E8}" srcId="{8B6C3B02-9B97-4461-849D-8C27B7EC535B}" destId="{C80325A7-6A8F-44B1-B610-6BEE0FD37FF7}" srcOrd="0" destOrd="0" parTransId="{08452F9F-4BD9-4B0C-B864-3DD8DC2A2AEE}" sibTransId="{336CBB3D-D79F-42E7-9597-B23C06F58606}"/>
-    <dgm:cxn modelId="{E93DC782-50DD-4B43-A967-4FD2741569FB}" srcId="{8B6C3B02-9B97-4461-849D-8C27B7EC535B}" destId="{798C2C10-662F-4E75-A5B5-D79146484269}" srcOrd="6" destOrd="0" parTransId="{763728CA-2134-4677-A743-846554DEF5FC}" sibTransId="{062818EF-31D5-4693-AAFD-92006D82850B}"/>
-    <dgm:cxn modelId="{86D14886-618B-4044-BE02-A6F2AEF53961}" type="presOf" srcId="{59FC4D82-540C-47F6-A92D-064DDDE4834B}" destId="{4E062ED7-C8B7-4731-A7F1-BE128EC98711}" srcOrd="0" destOrd="4" presId="urn:microsoft.com/office/officeart/2005/8/layout/vList5"/>
-    <dgm:cxn modelId="{6C6FC389-867B-4E86-A3B1-05298DAC166B}" type="presOf" srcId="{798C2C10-662F-4E75-A5B5-D79146484269}" destId="{4E062ED7-C8B7-4731-A7F1-BE128EC98711}" srcOrd="0" destOrd="6" presId="urn:microsoft.com/office/officeart/2005/8/layout/vList5"/>
-    <dgm:cxn modelId="{0865BB91-6514-4383-B5F5-AF387B8A5E3B}" srcId="{8B6C3B02-9B97-4461-849D-8C27B7EC535B}" destId="{B8855DDA-D3EB-4654-BB8A-E8E526B34804}" srcOrd="3" destOrd="0" parTransId="{FA3888AD-4681-47CF-9F1E-E3B7BED2734B}" sibTransId="{60C22610-58A9-42A3-89D0-1EA544F9247D}"/>
-    <dgm:cxn modelId="{C8935F94-3ECD-4E3A-B712-C961CF94FFDF}" srcId="{8B6C3B02-9B97-4461-849D-8C27B7EC535B}" destId="{14D5ABE9-6FAF-4920-B3C3-45FCB82139B0}" srcOrd="1" destOrd="0" parTransId="{1EDB6088-5BA5-4363-80B9-D4137011A457}" sibTransId="{6397023F-B25B-4A36-A5D2-30D87AB487CC}"/>
-    <dgm:cxn modelId="{BFB34CAA-4FCC-4519-A43A-F733455A217C}" srcId="{8B6C3B02-9B97-4461-849D-8C27B7EC535B}" destId="{B89C6407-2BE2-4480-B463-96750AC78FFE}" srcOrd="5" destOrd="0" parTransId="{67F4B6E3-C4CE-4236-BD5B-9D5CFC58F985}" sibTransId="{25E06677-B8A3-440C-80A8-254EF34CE9DE}"/>
-    <dgm:cxn modelId="{81F09BB9-F0A8-4D26-9C8C-78D3DDFF58E4}" srcId="{8B6C3B02-9B97-4461-849D-8C27B7EC535B}" destId="{4A8BA3F3-42C0-41EA-917D-9DDF709CADEA}" srcOrd="10" destOrd="0" parTransId="{1E327B02-6FCB-40C3-BF05-CDA992C2D02D}" sibTransId="{E09862E0-6EE9-45CD-BBC4-0365F337E1F9}"/>
-    <dgm:cxn modelId="{483BF8C4-DBC4-4E2A-B0F4-02F0FF1B5C8E}" type="presOf" srcId="{4A8BA3F3-42C0-41EA-917D-9DDF709CADEA}" destId="{4E062ED7-C8B7-4731-A7F1-BE128EC98711}" srcOrd="0" destOrd="10" presId="urn:microsoft.com/office/officeart/2005/8/layout/vList5"/>
-    <dgm:cxn modelId="{B9ED93C6-2815-4A9B-914A-5AE99F5774C6}" srcId="{8B6C3B02-9B97-4461-849D-8C27B7EC535B}" destId="{2F634E6B-0C04-4EB9-91C3-E1E013618DDA}" srcOrd="2" destOrd="0" parTransId="{02AE7C93-89C4-484F-AFCE-7A88F797CBE6}" sibTransId="{4341451F-B376-44F3-B0C6-380A9D93638D}"/>
-    <dgm:cxn modelId="{420B62D3-FE4F-40A0-B131-C8DF3D0C141F}" srcId="{8B6C3B02-9B97-4461-849D-8C27B7EC535B}" destId="{12639EF0-BB1A-4373-80A6-973906E4B20F}" srcOrd="7" destOrd="0" parTransId="{34C1F691-A67B-43DA-AE71-CA2D5125F70E}" sibTransId="{39822BD4-F533-401C-B29B-EA82A20EF2F0}"/>
-    <dgm:cxn modelId="{961737D5-6121-4BE4-BB5F-0CD5CF455CFF}" type="presOf" srcId="{7276CFAD-4AB0-4615-B7B2-34C290675CFD}" destId="{4E062ED7-C8B7-4731-A7F1-BE128EC98711}" srcOrd="0" destOrd="8" presId="urn:microsoft.com/office/officeart/2005/8/layout/vList5"/>
-    <dgm:cxn modelId="{F99DEAD6-D354-4C2E-A912-E72BD9E0D9A7}" srcId="{8B6C3B02-9B97-4461-849D-8C27B7EC535B}" destId="{7276CFAD-4AB0-4615-B7B2-34C290675CFD}" srcOrd="8" destOrd="0" parTransId="{0D8CAB63-48AE-4EBF-A04A-A0513444996E}" sibTransId="{2F1A55C3-8659-48CC-8E22-711018F2B25A}"/>
+    <dgm:cxn modelId="{E93DC782-50DD-4B43-A967-4FD2741569FB}" srcId="{8B6C3B02-9B97-4461-849D-8C27B7EC535B}" destId="{798C2C10-662F-4E75-A5B5-D79146484269}" srcOrd="2" destOrd="0" parTransId="{763728CA-2134-4677-A743-846554DEF5FC}" sibTransId="{062818EF-31D5-4693-AAFD-92006D82850B}"/>
+    <dgm:cxn modelId="{76626F88-35A2-4265-9103-3E3162D5BB2A}" srcId="{8B6C3B02-9B97-4461-849D-8C27B7EC535B}" destId="{0A08F9B5-78CA-4B05-B1C4-3862CF8C5E43}" srcOrd="11" destOrd="0" parTransId="{4F297EE7-D4A0-4B30-BAB1-0C70ADEB5254}" sibTransId="{C02A50F2-FEA2-46A7-B375-F6405E67E575}"/>
+    <dgm:cxn modelId="{6C6FC389-867B-4E86-A3B1-05298DAC166B}" type="presOf" srcId="{798C2C10-662F-4E75-A5B5-D79146484269}" destId="{4E062ED7-C8B7-4731-A7F1-BE128EC98711}" srcOrd="0" destOrd="2" presId="urn:microsoft.com/office/officeart/2005/8/layout/vList5"/>
+    <dgm:cxn modelId="{FA4D4F92-1F0C-4ADA-B59C-2DE097BC5208}" srcId="{8B6C3B02-9B97-4461-849D-8C27B7EC535B}" destId="{736A7D57-B0F2-4BAB-B205-1C2C3B99A6A3}" srcOrd="9" destOrd="0" parTransId="{8713C7AD-357C-4BD1-A70D-C92712260DA4}" sibTransId="{F6AFAD1D-E444-452A-9CDB-622B62E1A36A}"/>
+    <dgm:cxn modelId="{56A31696-3ED1-488E-94ED-2E6614BF29AB}" srcId="{8B6C3B02-9B97-4461-849D-8C27B7EC535B}" destId="{B40F690E-7942-44A2-930D-D36AA7BEC538}" srcOrd="10" destOrd="0" parTransId="{6F4CF985-3CD5-4A08-A5A3-CC3BED67DC1F}" sibTransId="{92B4B542-8697-4062-8D0A-E47B00ECD62D}"/>
+    <dgm:cxn modelId="{BFB34CAA-4FCC-4519-A43A-F733455A217C}" srcId="{8B6C3B02-9B97-4461-849D-8C27B7EC535B}" destId="{B89C6407-2BE2-4480-B463-96750AC78FFE}" srcOrd="1" destOrd="0" parTransId="{67F4B6E3-C4CE-4236-BD5B-9D5CFC58F985}" sibTransId="{25E06677-B8A3-440C-80A8-254EF34CE9DE}"/>
+    <dgm:cxn modelId="{D2E888B8-6F96-4038-A5BB-B685E8DB8386}" srcId="{8B6C3B02-9B97-4461-849D-8C27B7EC535B}" destId="{26DA9842-ADC7-46F7-9EE2-32CF7183EBB1}" srcOrd="8" destOrd="0" parTransId="{0C85E99A-CEB6-449F-B829-A56B3491545C}" sibTransId="{5E2DCDC2-3C52-4A98-979C-DFEDC2223258}"/>
+    <dgm:cxn modelId="{81F09BB9-F0A8-4D26-9C8C-78D3DDFF58E4}" srcId="{8B6C3B02-9B97-4461-849D-8C27B7EC535B}" destId="{4A8BA3F3-42C0-41EA-917D-9DDF709CADEA}" srcOrd="6" destOrd="0" parTransId="{1E327B02-6FCB-40C3-BF05-CDA992C2D02D}" sibTransId="{E09862E0-6EE9-45CD-BBC4-0365F337E1F9}"/>
+    <dgm:cxn modelId="{483BF8C4-DBC4-4E2A-B0F4-02F0FF1B5C8E}" type="presOf" srcId="{4A8BA3F3-42C0-41EA-917D-9DDF709CADEA}" destId="{4E062ED7-C8B7-4731-A7F1-BE128EC98711}" srcOrd="0" destOrd="6" presId="urn:microsoft.com/office/officeart/2005/8/layout/vList5"/>
+    <dgm:cxn modelId="{420B62D3-FE4F-40A0-B131-C8DF3D0C141F}" srcId="{8B6C3B02-9B97-4461-849D-8C27B7EC535B}" destId="{12639EF0-BB1A-4373-80A6-973906E4B20F}" srcOrd="3" destOrd="0" parTransId="{34C1F691-A67B-43DA-AE71-CA2D5125F70E}" sibTransId="{39822BD4-F533-401C-B29B-EA82A20EF2F0}"/>
+    <dgm:cxn modelId="{961737D5-6121-4BE4-BB5F-0CD5CF455CFF}" type="presOf" srcId="{7276CFAD-4AB0-4615-B7B2-34C290675CFD}" destId="{4E062ED7-C8B7-4731-A7F1-BE128EC98711}" srcOrd="0" destOrd="4" presId="urn:microsoft.com/office/officeart/2005/8/layout/vList5"/>
+    <dgm:cxn modelId="{F99DEAD6-D354-4C2E-A912-E72BD9E0D9A7}" srcId="{8B6C3B02-9B97-4461-849D-8C27B7EC535B}" destId="{7276CFAD-4AB0-4615-B7B2-34C290675CFD}" srcOrd="4" destOrd="0" parTransId="{0D8CAB63-48AE-4EBF-A04A-A0513444996E}" sibTransId="{2F1A55C3-8659-48CC-8E22-711018F2B25A}"/>
     <dgm:cxn modelId="{FE6114DA-E6B4-465B-967B-43E233EA321A}" srcId="{2F2A67E8-ACD9-4C73-881C-0F727D32AE95}" destId="{35BB0A4F-EA77-413C-9E84-DEBFB93A1E88}" srcOrd="0" destOrd="0" parTransId="{D5ED6B98-9411-4F4F-8541-4763B0D1ABCB}" sibTransId="{68D557F7-03D8-49BF-88C8-BA7F7C13F7C3}"/>
-    <dgm:cxn modelId="{9DDA48DA-3C17-4B15-861D-9FB9429F1310}" type="presOf" srcId="{12639EF0-BB1A-4373-80A6-973906E4B20F}" destId="{4E062ED7-C8B7-4731-A7F1-BE128EC98711}" srcOrd="0" destOrd="7" presId="urn:microsoft.com/office/officeart/2005/8/layout/vList5"/>
-    <dgm:cxn modelId="{3CD1C0E7-01F4-4BE9-9ACB-DCCC1007E3E5}" type="presOf" srcId="{B89C6407-2BE2-4480-B463-96750AC78FFE}" destId="{4E062ED7-C8B7-4731-A7F1-BE128EC98711}" srcOrd="0" destOrd="5" presId="urn:microsoft.com/office/officeart/2005/8/layout/vList5"/>
+    <dgm:cxn modelId="{9DDA48DA-3C17-4B15-861D-9FB9429F1310}" type="presOf" srcId="{12639EF0-BB1A-4373-80A6-973906E4B20F}" destId="{4E062ED7-C8B7-4731-A7F1-BE128EC98711}" srcOrd="0" destOrd="3" presId="urn:microsoft.com/office/officeart/2005/8/layout/vList5"/>
+    <dgm:cxn modelId="{3CD1C0E7-01F4-4BE9-9ACB-DCCC1007E3E5}" type="presOf" srcId="{B89C6407-2BE2-4480-B463-96750AC78FFE}" destId="{4E062ED7-C8B7-4731-A7F1-BE128EC98711}" srcOrd="0" destOrd="1" presId="urn:microsoft.com/office/officeart/2005/8/layout/vList5"/>
+    <dgm:cxn modelId="{F67385E8-F86D-47CC-B9CA-87AC4AF1BF40}" type="presOf" srcId="{0A08F9B5-78CA-4B05-B1C4-3862CF8C5E43}" destId="{4E062ED7-C8B7-4731-A7F1-BE128EC98711}" srcOrd="0" destOrd="11" presId="urn:microsoft.com/office/officeart/2005/8/layout/vList5"/>
     <dgm:cxn modelId="{E1987AED-FAC2-4A88-8949-016BDBE1E577}" type="presOf" srcId="{2F2A67E8-ACD9-4C73-881C-0F727D32AE95}" destId="{20EFAA17-3592-4F78-AEAE-2CD118F957A5}" srcOrd="0" destOrd="0" presId="urn:microsoft.com/office/officeart/2005/8/layout/vList5"/>
-    <dgm:cxn modelId="{CB4329F8-377A-4878-B985-8CD9D1BDC248}" type="presOf" srcId="{2F7A7128-86C4-4AA6-BDD2-C0F06335F019}" destId="{4E062ED7-C8B7-4731-A7F1-BE128EC98711}" srcOrd="0" destOrd="11" presId="urn:microsoft.com/office/officeart/2005/8/layout/vList5"/>
+    <dgm:cxn modelId="{CB4329F8-377A-4878-B985-8CD9D1BDC248}" type="presOf" srcId="{2F7A7128-86C4-4AA6-BDD2-C0F06335F019}" destId="{4E062ED7-C8B7-4731-A7F1-BE128EC98711}" srcOrd="0" destOrd="7" presId="urn:microsoft.com/office/officeart/2005/8/layout/vList5"/>
     <dgm:cxn modelId="{0898E643-84BC-4444-98F5-10F22C018DA9}" type="presParOf" srcId="{8C50726C-E90C-4FFA-B6A0-2ED37CF63F64}" destId="{796ABD26-0390-4B39-A62D-E35ED7901557}" srcOrd="0" destOrd="0" presId="urn:microsoft.com/office/officeart/2005/8/layout/vList5"/>
     <dgm:cxn modelId="{A671792A-35BA-44B2-8D4C-47463C93833A}" type="presParOf" srcId="{796ABD26-0390-4B39-A62D-E35ED7901557}" destId="{20EFAA17-3592-4F78-AEAE-2CD118F957A5}" srcOrd="0" destOrd="0" presId="urn:microsoft.com/office/officeart/2005/8/layout/vList5"/>
     <dgm:cxn modelId="{A8B88065-7789-42A7-A8DD-C9A8EEC873E4}" type="presParOf" srcId="{796ABD26-0390-4B39-A62D-E35ED7901557}" destId="{EFC1B403-9E6E-4411-9B69-79A1584C7937}" srcOrd="1" destOrd="0" presId="urn:microsoft.com/office/officeart/2005/8/layout/vList5"/>
@@ -6388,7 +6564,7 @@
         </a:bodyPr>
         <a:lstStyle/>
         <a:p>
-          <a:pPr marL="114300" lvl="1" indent="-114300" algn="l" defTabSz="666750">
+          <a:pPr marL="114300" lvl="1" indent="0" algn="l" defTabSz="666750">
             <a:lnSpc>
               <a:spcPct val="90000"/>
             </a:lnSpc>
@@ -6401,11 +6577,11 @@
             <a:buNone/>
           </a:pPr>
           <a:r>
-            <a:rPr lang="en-US" sz="1500" kern="1200"/>
+            <a:rPr lang="en-US" sz="1500" kern="1200" dirty="0"/>
             <a:t>Exploratory Analysis </a:t>
           </a:r>
           <a:r>
-            <a:rPr lang="en-US" sz="1500" kern="1200">
+            <a:rPr lang="en-US" sz="1500" kern="1200" dirty="0">
               <a:sym typeface="Wingdings" panose="05000000000000000000" pitchFamily="2" charset="2"/>
             </a:rPr>
             <a:t> </a:t>
@@ -6434,104 +6610,7 @@
           <a:endParaRPr lang="en-GB" sz="1500" kern="1200" dirty="0"/>
         </a:p>
         <a:p>
-          <a:pPr marL="114300" lvl="1" indent="-114300" algn="l" defTabSz="666750">
-            <a:lnSpc>
-              <a:spcPct val="90000"/>
-            </a:lnSpc>
-            <a:spcBef>
-              <a:spcPct val="0"/>
-            </a:spcBef>
-            <a:spcAft>
-              <a:spcPct val="15000"/>
-            </a:spcAft>
-            <a:buFont typeface="Wingdings" panose="05000000000000000000" pitchFamily="2" charset="2"/>
-            <a:buChar char="Ø"/>
-          </a:pPr>
-          <a:r>
-            <a:rPr lang="en-GB" sz="1500" kern="1200" dirty="0"/>
-            <a:t>Merge levels </a:t>
-          </a:r>
-          <a:r>
-            <a:rPr lang="en-GB" sz="1500" kern="1200" dirty="0">
-              <a:sym typeface="Wingdings" panose="05000000000000000000" pitchFamily="2" charset="2"/>
-            </a:rPr>
-            <a:t> </a:t>
-          </a:r>
-          <a:r>
-            <a:rPr lang="en-US" sz="1500" b="1" kern="1200" dirty="0"/>
-            <a:t>X </a:t>
-          </a:r>
-          <a:r>
-            <a:rPr lang="en-US" sz="1500" b="0" kern="1200" dirty="0"/>
-            <a:t>rows dropped</a:t>
-          </a:r>
-          <a:endParaRPr lang="en-GB" sz="1500" b="0" kern="1200" dirty="0"/>
-        </a:p>
-        <a:p>
-          <a:pPr marL="114300" lvl="1" indent="-114300" algn="l" defTabSz="666750">
-            <a:lnSpc>
-              <a:spcPct val="90000"/>
-            </a:lnSpc>
-            <a:spcBef>
-              <a:spcPct val="0"/>
-            </a:spcBef>
-            <a:spcAft>
-              <a:spcPct val="15000"/>
-            </a:spcAft>
-            <a:buFont typeface="Wingdings" panose="05000000000000000000" pitchFamily="2" charset="2"/>
-            <a:buChar char="Ø"/>
-          </a:pPr>
-          <a:r>
-            <a:rPr lang="en-GB" sz="1500" kern="1200" dirty="0"/>
-            <a:t>Feature Selection</a:t>
-          </a:r>
-        </a:p>
-        <a:p>
-          <a:pPr marL="114300" lvl="1" indent="-114300" algn="l" defTabSz="666750">
-            <a:lnSpc>
-              <a:spcPct val="90000"/>
-            </a:lnSpc>
-            <a:spcBef>
-              <a:spcPct val="0"/>
-            </a:spcBef>
-            <a:spcAft>
-              <a:spcPct val="15000"/>
-            </a:spcAft>
-            <a:buFont typeface="Wingdings" panose="05000000000000000000" pitchFamily="2" charset="2"/>
-            <a:buChar char="Ø"/>
-          </a:pPr>
-          <a:r>
-            <a:rPr lang="en-GB" sz="1500" kern="1200" dirty="0"/>
-            <a:t>Real world skewed data </a:t>
-          </a:r>
-          <a:r>
-            <a:rPr lang="en-GB" sz="1500" kern="1200" dirty="0">
-              <a:sym typeface="Wingdings" panose="05000000000000000000" pitchFamily="2" charset="2"/>
-            </a:rPr>
-            <a:t></a:t>
-          </a:r>
-          <a:r>
-            <a:rPr lang="en-GB" sz="1500" kern="1200" dirty="0"/>
-            <a:t> Log scale</a:t>
-          </a:r>
-        </a:p>
-        <a:p>
-          <a:pPr marL="114300" lvl="1" indent="-114300" algn="l" defTabSz="666750">
-            <a:lnSpc>
-              <a:spcPct val="90000"/>
-            </a:lnSpc>
-            <a:spcBef>
-              <a:spcPct val="0"/>
-            </a:spcBef>
-            <a:spcAft>
-              <a:spcPct val="15000"/>
-            </a:spcAft>
-            <a:buNone/>
-          </a:pPr>
-          <a:endParaRPr lang="en-GB" sz="1500" kern="1200" dirty="0"/>
-        </a:p>
-        <a:p>
-          <a:pPr marL="114300" lvl="1" indent="-114300" algn="l" defTabSz="666750">
+          <a:pPr marL="114300" lvl="1" indent="0" algn="l" defTabSz="666750">
             <a:lnSpc>
               <a:spcPct val="90000"/>
             </a:lnSpc>
@@ -6551,7 +6630,7 @@
           <a:endParaRPr lang="en-GB" sz="1500" kern="1200" dirty="0"/>
         </a:p>
         <a:p>
-          <a:pPr marL="114300" lvl="1" indent="-114300" algn="l" defTabSz="666750">
+          <a:pPr marL="114300" lvl="1" indent="0" algn="l" defTabSz="666750">
             <a:lnSpc>
               <a:spcPct val="90000"/>
             </a:lnSpc>
@@ -6571,7 +6650,7 @@
           <a:endParaRPr lang="en-GB" sz="1500" kern="1200" dirty="0"/>
         </a:p>
         <a:p>
-          <a:pPr marL="114300" lvl="1" indent="-114300" algn="l" defTabSz="666750">
+          <a:pPr marL="114300" lvl="1" indent="0" algn="l" defTabSz="666750">
             <a:lnSpc>
               <a:spcPct val="90000"/>
             </a:lnSpc>
@@ -6591,7 +6670,7 @@
           <a:endParaRPr lang="en-GB" sz="1500" kern="1200" dirty="0"/>
         </a:p>
         <a:p>
-          <a:pPr marL="114300" lvl="1" indent="-114300" algn="l" defTabSz="666750">
+          <a:pPr marL="114300" lvl="1" indent="0" algn="l" defTabSz="666750">
             <a:lnSpc>
               <a:spcPct val="90000"/>
             </a:lnSpc>
@@ -6610,7 +6689,7 @@
           </a:r>
         </a:p>
         <a:p>
-          <a:pPr marL="114300" lvl="1" indent="-114300" algn="l" defTabSz="666750">
+          <a:pPr marL="114300" lvl="1" indent="0" algn="l" defTabSz="666750">
             <a:lnSpc>
               <a:spcPct val="90000"/>
             </a:lnSpc>
@@ -6629,7 +6708,7 @@
           </a:r>
         </a:p>
         <a:p>
-          <a:pPr marL="114300" lvl="1" indent="-114300" algn="l" defTabSz="666750">
+          <a:pPr marL="114300" lvl="1" indent="0" algn="l" defTabSz="666750">
             <a:lnSpc>
               <a:spcPct val="90000"/>
             </a:lnSpc>
@@ -6682,7 +6761,7 @@
           </a:r>
         </a:p>
         <a:p>
-          <a:pPr marL="114300" lvl="1" indent="-114300" algn="l" defTabSz="666750">
+          <a:pPr marL="114300" lvl="1" indent="0" algn="l" defTabSz="666750">
             <a:lnSpc>
               <a:spcPct val="90000"/>
             </a:lnSpc>
@@ -6699,6 +6778,159 @@
             <a:rPr lang="en-GB" sz="1500" kern="1200" dirty="0"/>
             <a:t>Outliers</a:t>
           </a:r>
+        </a:p>
+        <a:p>
+          <a:pPr marL="114300" lvl="1" indent="0" algn="l" defTabSz="666750">
+            <a:lnSpc>
+              <a:spcPct val="90000"/>
+            </a:lnSpc>
+            <a:spcBef>
+              <a:spcPct val="0"/>
+            </a:spcBef>
+            <a:spcAft>
+              <a:spcPct val="15000"/>
+            </a:spcAft>
+            <a:buFont typeface="Arial" panose="020B0604020202020204" pitchFamily="34" charset="0"/>
+            <a:buChar char="•"/>
+          </a:pPr>
+          <a:endParaRPr lang="en-GB" sz="1500" kern="1200" dirty="0"/>
+        </a:p>
+        <a:p>
+          <a:pPr marL="114300" lvl="1" indent="0" algn="l" defTabSz="666750">
+            <a:lnSpc>
+              <a:spcPct val="90000"/>
+            </a:lnSpc>
+            <a:spcBef>
+              <a:spcPct val="0"/>
+            </a:spcBef>
+            <a:spcAft>
+              <a:spcPct val="15000"/>
+            </a:spcAft>
+            <a:buFont typeface="Wingdings" panose="05000000000000000000" pitchFamily="2" charset="2"/>
+            <a:buChar char="Ø"/>
+          </a:pPr>
+          <a:r>
+            <a:rPr lang="en-GB" sz="1500" kern="1200" dirty="0"/>
+            <a:t>Merge levels </a:t>
+          </a:r>
+          <a:r>
+            <a:rPr lang="en-GB" sz="1500" kern="1200" dirty="0">
+              <a:sym typeface="Wingdings" panose="05000000000000000000" pitchFamily="2" charset="2"/>
+            </a:rPr>
+            <a:t> </a:t>
+          </a:r>
+          <a:r>
+            <a:rPr lang="en-US" sz="1500" b="1" kern="1200" dirty="0"/>
+            <a:t>X </a:t>
+          </a:r>
+          <a:r>
+            <a:rPr lang="en-US" sz="1500" b="0" kern="1200" dirty="0"/>
+            <a:t>rows dropped</a:t>
+          </a:r>
+          <a:endParaRPr lang="en-GB" sz="1500" kern="1200" dirty="0"/>
+        </a:p>
+        <a:p>
+          <a:pPr marL="114300" lvl="1" indent="0" algn="l" defTabSz="666750">
+            <a:lnSpc>
+              <a:spcPct val="90000"/>
+            </a:lnSpc>
+            <a:spcBef>
+              <a:spcPct val="0"/>
+            </a:spcBef>
+            <a:spcAft>
+              <a:spcPct val="15000"/>
+            </a:spcAft>
+            <a:buFont typeface="Wingdings" panose="05000000000000000000" pitchFamily="2" charset="2"/>
+            <a:buChar char="Ø"/>
+          </a:pPr>
+          <a:r>
+            <a:rPr lang="en-GB" sz="1500" kern="1200" dirty="0">
+              <a:latin typeface="+mn-lt"/>
+            </a:rPr>
+            <a:t>F</a:t>
+          </a:r>
+          <a:r>
+            <a:rPr lang="en-GB" sz="1500" kern="1200" dirty="0">
+              <a:solidFill>
+                <a:prstClr val="black">
+                  <a:hueOff val="0"/>
+                  <a:satOff val="0"/>
+                  <a:lumOff val="0"/>
+                  <a:alphaOff val="0"/>
+                </a:prstClr>
+              </a:solidFill>
+              <a:latin typeface="+mn-lt"/>
+              <a:ea typeface="+mn-ea"/>
+              <a:cs typeface="+mn-cs"/>
+            </a:rPr>
+            <a:t>eature Selection</a:t>
+          </a:r>
+          <a:endParaRPr lang="en-GB" sz="1500" kern="1200" dirty="0"/>
+        </a:p>
+        <a:p>
+          <a:pPr marL="114300" lvl="1" indent="0" algn="l" defTabSz="666750">
+            <a:lnSpc>
+              <a:spcPct val="90000"/>
+            </a:lnSpc>
+            <a:spcBef>
+              <a:spcPct val="0"/>
+            </a:spcBef>
+            <a:spcAft>
+              <a:spcPct val="15000"/>
+            </a:spcAft>
+            <a:buFont typeface="Wingdings" panose="05000000000000000000" pitchFamily="2" charset="2"/>
+            <a:buChar char="Ø"/>
+          </a:pPr>
+          <a:r>
+            <a:rPr lang="en-GB" sz="1500" kern="1200" dirty="0">
+              <a:solidFill>
+                <a:prstClr val="black">
+                  <a:hueOff val="0"/>
+                  <a:satOff val="0"/>
+                  <a:lumOff val="0"/>
+                  <a:alphaOff val="0"/>
+                </a:prstClr>
+              </a:solidFill>
+              <a:latin typeface="+mn-lt"/>
+              <a:ea typeface="+mn-ea"/>
+              <a:cs typeface="+mn-cs"/>
+            </a:rPr>
+            <a:t>Real world skewed data </a:t>
+          </a:r>
+          <a:r>
+            <a:rPr lang="en-GB" sz="1500" kern="1200" dirty="0">
+              <a:solidFill>
+                <a:prstClr val="black">
+                  <a:hueOff val="0"/>
+                  <a:satOff val="0"/>
+                  <a:lumOff val="0"/>
+                  <a:alphaOff val="0"/>
+                </a:prstClr>
+              </a:solidFill>
+              <a:latin typeface="+mn-lt"/>
+              <a:ea typeface="+mn-ea"/>
+              <a:cs typeface="+mn-cs"/>
+              <a:sym typeface="Wingdings" panose="05000000000000000000" pitchFamily="2" charset="2"/>
+            </a:rPr>
+            <a:t></a:t>
+          </a:r>
+          <a:r>
+            <a:rPr lang="en-GB" sz="1500" kern="1200" dirty="0">
+              <a:solidFill>
+                <a:prstClr val="black">
+                  <a:hueOff val="0"/>
+                  <a:satOff val="0"/>
+                  <a:lumOff val="0"/>
+                  <a:alphaOff val="0"/>
+                </a:prstClr>
+              </a:solidFill>
+              <a:latin typeface="+mn-lt"/>
+              <a:ea typeface="+mn-ea"/>
+              <a:cs typeface="+mn-cs"/>
+            </a:rPr>
+            <a:t> Log scale</a:t>
+          </a:r>
+          <a:endParaRPr lang="en-GB" sz="1500" kern="1200" dirty="0"/>
         </a:p>
       </dsp:txBody>
       <dsp:txXfrm rot="-5400000">
@@ -11913,7 +12145,7 @@
           <a:p>
             <a:fld id="{C1A9776D-B584-4D4B-981C-FA97E36C0636}" type="datetimeFigureOut">
               <a:rPr lang="en-GB" smtClean="0"/>
-              <a:t>05/01/2026</a:t>
+              <a:t>09/01/2026</a:t>
             </a:fld>
             <a:endParaRPr lang="en-GB"/>
           </a:p>
@@ -12113,7 +12345,7 @@
           <a:p>
             <a:fld id="{C1A9776D-B584-4D4B-981C-FA97E36C0636}" type="datetimeFigureOut">
               <a:rPr lang="en-GB" smtClean="0"/>
-              <a:t>05/01/2026</a:t>
+              <a:t>09/01/2026</a:t>
             </a:fld>
             <a:endParaRPr lang="en-GB"/>
           </a:p>
@@ -12323,7 +12555,7 @@
           <a:p>
             <a:fld id="{C1A9776D-B584-4D4B-981C-FA97E36C0636}" type="datetimeFigureOut">
               <a:rPr lang="en-GB" smtClean="0"/>
-              <a:t>05/01/2026</a:t>
+              <a:t>09/01/2026</a:t>
             </a:fld>
             <a:endParaRPr lang="en-GB"/>
           </a:p>
@@ -12523,7 +12755,7 @@
           <a:p>
             <a:fld id="{C1A9776D-B584-4D4B-981C-FA97E36C0636}" type="datetimeFigureOut">
               <a:rPr lang="en-GB" smtClean="0"/>
-              <a:t>05/01/2026</a:t>
+              <a:t>09/01/2026</a:t>
             </a:fld>
             <a:endParaRPr lang="en-GB"/>
           </a:p>
@@ -12799,7 +13031,7 @@
           <a:p>
             <a:fld id="{C1A9776D-B584-4D4B-981C-FA97E36C0636}" type="datetimeFigureOut">
               <a:rPr lang="en-GB" smtClean="0"/>
-              <a:t>05/01/2026</a:t>
+              <a:t>09/01/2026</a:t>
             </a:fld>
             <a:endParaRPr lang="en-GB"/>
           </a:p>
@@ -13067,7 +13299,7 @@
           <a:p>
             <a:fld id="{C1A9776D-B584-4D4B-981C-FA97E36C0636}" type="datetimeFigureOut">
               <a:rPr lang="en-GB" smtClean="0"/>
-              <a:t>05/01/2026</a:t>
+              <a:t>09/01/2026</a:t>
             </a:fld>
             <a:endParaRPr lang="en-GB"/>
           </a:p>
@@ -13482,7 +13714,7 @@
           <a:p>
             <a:fld id="{C1A9776D-B584-4D4B-981C-FA97E36C0636}" type="datetimeFigureOut">
               <a:rPr lang="en-GB" smtClean="0"/>
-              <a:t>05/01/2026</a:t>
+              <a:t>09/01/2026</a:t>
             </a:fld>
             <a:endParaRPr lang="en-GB"/>
           </a:p>
@@ -13624,7 +13856,7 @@
           <a:p>
             <a:fld id="{C1A9776D-B584-4D4B-981C-FA97E36C0636}" type="datetimeFigureOut">
               <a:rPr lang="en-GB" smtClean="0"/>
-              <a:t>05/01/2026</a:t>
+              <a:t>09/01/2026</a:t>
             </a:fld>
             <a:endParaRPr lang="en-GB"/>
           </a:p>
@@ -13737,7 +13969,7 @@
           <a:p>
             <a:fld id="{C1A9776D-B584-4D4B-981C-FA97E36C0636}" type="datetimeFigureOut">
               <a:rPr lang="en-GB" smtClean="0"/>
-              <a:t>05/01/2026</a:t>
+              <a:t>09/01/2026</a:t>
             </a:fld>
             <a:endParaRPr lang="en-GB"/>
           </a:p>
@@ -14050,7 +14282,7 @@
           <a:p>
             <a:fld id="{C1A9776D-B584-4D4B-981C-FA97E36C0636}" type="datetimeFigureOut">
               <a:rPr lang="en-GB" smtClean="0"/>
-              <a:t>05/01/2026</a:t>
+              <a:t>09/01/2026</a:t>
             </a:fld>
             <a:endParaRPr lang="en-GB"/>
           </a:p>
@@ -14339,7 +14571,7 @@
           <a:p>
             <a:fld id="{C1A9776D-B584-4D4B-981C-FA97E36C0636}" type="datetimeFigureOut">
               <a:rPr lang="en-GB" smtClean="0"/>
-              <a:t>05/01/2026</a:t>
+              <a:t>09/01/2026</a:t>
             </a:fld>
             <a:endParaRPr lang="en-GB"/>
           </a:p>
@@ -14595,7 +14827,7 @@
           <a:p>
             <a:fld id="{C1A9776D-B584-4D4B-981C-FA97E36C0636}" type="datetimeFigureOut">
               <a:rPr lang="en-GB" smtClean="0"/>
-              <a:t>05/01/2026</a:t>
+              <a:t>09/01/2026</a:t>
             </a:fld>
             <a:endParaRPr lang="en-GB"/>
           </a:p>
@@ -15165,7 +15397,7 @@
             <p:ph sz="half" idx="1"/>
             <p:extLst>
               <p:ext uri="{D42A27DB-BD31-4B8C-83A1-F6EECF244321}">
-                <p14:modId xmlns:p14="http://schemas.microsoft.com/office/powerpoint/2010/main" val="3491887642"/>
+                <p14:modId xmlns:p14="http://schemas.microsoft.com/office/powerpoint/2010/main" val="298608188"/>
               </p:ext>
             </p:extLst>
           </p:nvPr>
@@ -17698,7 +17930,7 @@
         </p:nvSpPr>
         <p:spPr>
           <a:xfrm>
-            <a:off x="609600" y="320093"/>
+            <a:off x="609600" y="459717"/>
             <a:ext cx="10972800" cy="457200"/>
           </a:xfrm>
           <a:ln>
@@ -17740,8 +17972,8 @@
         </p:nvSpPr>
         <p:spPr>
           <a:xfrm>
-            <a:off x="609600" y="878220"/>
-            <a:ext cx="10972800" cy="3645654"/>
+            <a:off x="609600" y="1004431"/>
+            <a:ext cx="10972800" cy="4677628"/>
           </a:xfrm>
           <a:ln>
             <a:noFill/>
@@ -17835,7 +18067,14 @@
             <a:pPr lvl="1"/>
             <a:r>
               <a:rPr lang="en-US" sz="1800" dirty="0"/>
-              <a:t>Faster - Large Datasets</a:t>
+              <a:t>Faster - Large – Unbalanced Datasets</a:t>
+            </a:r>
+          </a:p>
+          <a:p>
+            <a:pPr lvl="1"/>
+            <a:r>
+              <a:rPr lang="en-US" sz="1800" dirty="0"/>
+              <a:t>Scalable methods</a:t>
             </a:r>
           </a:p>
         </p:txBody>
@@ -17854,7 +18093,7 @@
         </p:nvSpPr>
         <p:spPr>
           <a:xfrm>
-            <a:off x="609600" y="4523874"/>
+            <a:off x="609600" y="5569518"/>
             <a:ext cx="10972800" cy="400110"/>
           </a:xfrm>
           <a:prstGeom prst="rect">
@@ -17884,253 +18123,6 @@
               <a:t>Clinical practice</a:t>
             </a:r>
             <a:endParaRPr lang="en-US" sz="2000" dirty="0"/>
-          </a:p>
-        </p:txBody>
-      </p:sp>
-      <p:sp>
-        <p:nvSpPr>
-          <p:cNvPr id="5" name="Content Placeholder 2">
-            <a:extLst>
-              <a:ext uri="{FF2B5EF4-FFF2-40B4-BE49-F238E27FC236}">
-                <a16:creationId xmlns:a16="http://schemas.microsoft.com/office/drawing/2014/main" id="{03AEC85B-41AE-A96A-89D9-AED487ACF81E}"/>
-              </a:ext>
-            </a:extLst>
-          </p:cNvPr>
-          <p:cNvSpPr txBox="1">
-            <a:spLocks/>
-          </p:cNvSpPr>
-          <p:nvPr/>
-        </p:nvSpPr>
-        <p:spPr>
-          <a:xfrm>
-            <a:off x="609600" y="5010091"/>
-            <a:ext cx="10972800" cy="1446682"/>
-          </a:xfrm>
-          <a:prstGeom prst="rect">
-            <a:avLst/>
-          </a:prstGeom>
-          <a:ln>
-            <a:noFill/>
-          </a:ln>
-        </p:spPr>
-        <p:txBody>
-          <a:bodyPr vert="horz" lIns="91440" tIns="45720" rIns="91440" bIns="45720" rtlCol="0" anchor="ctr">
-            <a:noAutofit/>
-          </a:bodyPr>
-          <a:lstStyle>
-            <a:lvl1pPr marL="228600" indent="-228600" algn="l" defTabSz="914400" rtl="0" eaLnBrk="1" latinLnBrk="0" hangingPunct="1">
-              <a:lnSpc>
-                <a:spcPct val="90000"/>
-              </a:lnSpc>
-              <a:spcBef>
-                <a:spcPts val="1000"/>
-              </a:spcBef>
-              <a:buFont typeface="Arial" panose="020B0604020202020204" pitchFamily="34" charset="0"/>
-              <a:buChar char="•"/>
-              <a:defRPr sz="2800" kern="1200">
-                <a:solidFill>
-                  <a:schemeClr val="tx1"/>
-                </a:solidFill>
-                <a:latin typeface="+mn-lt"/>
-                <a:ea typeface="+mn-ea"/>
-                <a:cs typeface="+mn-cs"/>
-              </a:defRPr>
-            </a:lvl1pPr>
-            <a:lvl2pPr marL="685800" indent="-228600" algn="l" defTabSz="914400" rtl="0" eaLnBrk="1" latinLnBrk="0" hangingPunct="1">
-              <a:lnSpc>
-                <a:spcPct val="90000"/>
-              </a:lnSpc>
-              <a:spcBef>
-                <a:spcPts val="500"/>
-              </a:spcBef>
-              <a:buFont typeface="Arial" panose="020B0604020202020204" pitchFamily="34" charset="0"/>
-              <a:buChar char="•"/>
-              <a:defRPr sz="2400" kern="1200">
-                <a:solidFill>
-                  <a:schemeClr val="tx1"/>
-                </a:solidFill>
-                <a:latin typeface="+mn-lt"/>
-                <a:ea typeface="+mn-ea"/>
-                <a:cs typeface="+mn-cs"/>
-              </a:defRPr>
-            </a:lvl2pPr>
-            <a:lvl3pPr marL="1143000" indent="-228600" algn="l" defTabSz="914400" rtl="0" eaLnBrk="1" latinLnBrk="0" hangingPunct="1">
-              <a:lnSpc>
-                <a:spcPct val="90000"/>
-              </a:lnSpc>
-              <a:spcBef>
-                <a:spcPts val="500"/>
-              </a:spcBef>
-              <a:buFont typeface="Arial" panose="020B0604020202020204" pitchFamily="34" charset="0"/>
-              <a:buChar char="•"/>
-              <a:defRPr sz="2000" kern="1200">
-                <a:solidFill>
-                  <a:schemeClr val="tx1"/>
-                </a:solidFill>
-                <a:latin typeface="+mn-lt"/>
-                <a:ea typeface="+mn-ea"/>
-                <a:cs typeface="+mn-cs"/>
-              </a:defRPr>
-            </a:lvl3pPr>
-            <a:lvl4pPr marL="1600200" indent="-228600" algn="l" defTabSz="914400" rtl="0" eaLnBrk="1" latinLnBrk="0" hangingPunct="1">
-              <a:lnSpc>
-                <a:spcPct val="90000"/>
-              </a:lnSpc>
-              <a:spcBef>
-                <a:spcPts val="500"/>
-              </a:spcBef>
-              <a:buFont typeface="Arial" panose="020B0604020202020204" pitchFamily="34" charset="0"/>
-              <a:buChar char="•"/>
-              <a:defRPr sz="1800" kern="1200">
-                <a:solidFill>
-                  <a:schemeClr val="tx1"/>
-                </a:solidFill>
-                <a:latin typeface="+mn-lt"/>
-                <a:ea typeface="+mn-ea"/>
-                <a:cs typeface="+mn-cs"/>
-              </a:defRPr>
-            </a:lvl4pPr>
-            <a:lvl5pPr marL="2057400" indent="-228600" algn="l" defTabSz="914400" rtl="0" eaLnBrk="1" latinLnBrk="0" hangingPunct="1">
-              <a:lnSpc>
-                <a:spcPct val="90000"/>
-              </a:lnSpc>
-              <a:spcBef>
-                <a:spcPts val="500"/>
-              </a:spcBef>
-              <a:buFont typeface="Arial" panose="020B0604020202020204" pitchFamily="34" charset="0"/>
-              <a:buChar char="•"/>
-              <a:defRPr sz="1800" kern="1200">
-                <a:solidFill>
-                  <a:schemeClr val="tx1"/>
-                </a:solidFill>
-                <a:latin typeface="+mn-lt"/>
-                <a:ea typeface="+mn-ea"/>
-                <a:cs typeface="+mn-cs"/>
-              </a:defRPr>
-            </a:lvl5pPr>
-            <a:lvl6pPr marL="2514600" indent="-228600" algn="l" defTabSz="914400" rtl="0" eaLnBrk="1" latinLnBrk="0" hangingPunct="1">
-              <a:lnSpc>
-                <a:spcPct val="90000"/>
-              </a:lnSpc>
-              <a:spcBef>
-                <a:spcPts val="500"/>
-              </a:spcBef>
-              <a:buFont typeface="Arial" panose="020B0604020202020204" pitchFamily="34" charset="0"/>
-              <a:buChar char="•"/>
-              <a:defRPr sz="1800" kern="1200">
-                <a:solidFill>
-                  <a:schemeClr val="tx1"/>
-                </a:solidFill>
-                <a:latin typeface="+mn-lt"/>
-                <a:ea typeface="+mn-ea"/>
-                <a:cs typeface="+mn-cs"/>
-              </a:defRPr>
-            </a:lvl6pPr>
-            <a:lvl7pPr marL="2971800" indent="-228600" algn="l" defTabSz="914400" rtl="0" eaLnBrk="1" latinLnBrk="0" hangingPunct="1">
-              <a:lnSpc>
-                <a:spcPct val="90000"/>
-              </a:lnSpc>
-              <a:spcBef>
-                <a:spcPts val="500"/>
-              </a:spcBef>
-              <a:buFont typeface="Arial" panose="020B0604020202020204" pitchFamily="34" charset="0"/>
-              <a:buChar char="•"/>
-              <a:defRPr sz="1800" kern="1200">
-                <a:solidFill>
-                  <a:schemeClr val="tx1"/>
-                </a:solidFill>
-                <a:latin typeface="+mn-lt"/>
-                <a:ea typeface="+mn-ea"/>
-                <a:cs typeface="+mn-cs"/>
-              </a:defRPr>
-            </a:lvl7pPr>
-            <a:lvl8pPr marL="3429000" indent="-228600" algn="l" defTabSz="914400" rtl="0" eaLnBrk="1" latinLnBrk="0" hangingPunct="1">
-              <a:lnSpc>
-                <a:spcPct val="90000"/>
-              </a:lnSpc>
-              <a:spcBef>
-                <a:spcPts val="500"/>
-              </a:spcBef>
-              <a:buFont typeface="Arial" panose="020B0604020202020204" pitchFamily="34" charset="0"/>
-              <a:buChar char="•"/>
-              <a:defRPr sz="1800" kern="1200">
-                <a:solidFill>
-                  <a:schemeClr val="tx1"/>
-                </a:solidFill>
-                <a:latin typeface="+mn-lt"/>
-                <a:ea typeface="+mn-ea"/>
-                <a:cs typeface="+mn-cs"/>
-              </a:defRPr>
-            </a:lvl8pPr>
-            <a:lvl9pPr marL="3886200" indent="-228600" algn="l" defTabSz="914400" rtl="0" eaLnBrk="1" latinLnBrk="0" hangingPunct="1">
-              <a:lnSpc>
-                <a:spcPct val="90000"/>
-              </a:lnSpc>
-              <a:spcBef>
-                <a:spcPts val="500"/>
-              </a:spcBef>
-              <a:buFont typeface="Arial" panose="020B0604020202020204" pitchFamily="34" charset="0"/>
-              <a:buChar char="•"/>
-              <a:defRPr sz="1800" kern="1200">
-                <a:solidFill>
-                  <a:schemeClr val="tx1"/>
-                </a:solidFill>
-                <a:latin typeface="+mn-lt"/>
-                <a:ea typeface="+mn-ea"/>
-                <a:cs typeface="+mn-cs"/>
-              </a:defRPr>
-            </a:lvl9pPr>
-          </a:lstStyle>
-          <a:p>
-            <a:pPr marL="0" indent="0">
-              <a:buFont typeface="Arial" panose="020B0604020202020204" pitchFamily="34" charset="0"/>
-              <a:buNone/>
-            </a:pPr>
-            <a:r>
-              <a:rPr lang="en-US" sz="1800" b="1" dirty="0"/>
-              <a:t>Drawbacks</a:t>
-            </a:r>
-          </a:p>
-          <a:p>
-            <a:pPr lvl="1"/>
-            <a:r>
-              <a:rPr lang="en-US" sz="1800" dirty="0"/>
-              <a:t>Boosting algorithms: Not proper HPO </a:t>
-            </a:r>
-            <a:r>
-              <a:rPr lang="en-US" sz="1800" dirty="0">
-                <a:sym typeface="Wingdings" panose="05000000000000000000" pitchFamily="2" charset="2"/>
-              </a:rPr>
-              <a:t> Overfit</a:t>
-            </a:r>
-          </a:p>
-          <a:p>
-            <a:pPr marL="0" indent="0">
-              <a:buFont typeface="Arial" panose="020B0604020202020204" pitchFamily="34" charset="0"/>
-              <a:buNone/>
-            </a:pPr>
-            <a:r>
-              <a:rPr lang="en-US" sz="1800" b="1" dirty="0">
-                <a:sym typeface="Wingdings" panose="05000000000000000000" pitchFamily="2" charset="2"/>
-              </a:rPr>
-              <a:t>Notes</a:t>
-            </a:r>
-            <a:endParaRPr lang="en-US" sz="1800" b="1" dirty="0"/>
-          </a:p>
-          <a:p>
-            <a:pPr lvl="1"/>
-            <a:r>
-              <a:rPr lang="en-US" sz="1800" dirty="0"/>
-              <a:t>3</a:t>
-            </a:r>
-            <a:r>
-              <a:rPr lang="en-US" sz="1800" baseline="30000" dirty="0"/>
-              <a:t>rd</a:t>
-            </a:r>
-            <a:r>
-              <a:rPr lang="en-US" sz="1800" dirty="0"/>
-              <a:t> decimal difference between top classifiers</a:t>
-            </a:r>
           </a:p>
         </p:txBody>
       </p:sp>
@@ -18225,7 +18217,7 @@
             <a:pPr algn="ctr"/>
             <a:r>
               <a:rPr lang="el-GR" sz="1800" b="1" dirty="0"/>
-              <a:t>Επιβλέπων Καθηγητής: Δεναξάς Σπυρίδων</a:t>
+              <a:t>Επιβλέπων Καθηγητής: Δεναξάς Σπύρος</a:t>
             </a:r>
             <a:endParaRPr lang="en-GB" sz="1800" b="1" dirty="0"/>
           </a:p>
@@ -19972,7 +19964,7 @@
         <p:spPr>
           <a:xfrm>
             <a:off x="609585" y="586338"/>
-            <a:ext cx="5486401" cy="523220"/>
+            <a:ext cx="5486401" cy="738664"/>
           </a:xfrm>
           <a:prstGeom prst="rect">
             <a:avLst/>
@@ -20003,6 +19995,16 @@
             <a:r>
               <a:rPr lang="en-US" sz="1400" dirty="0"/>
               <a:t>Escalating dose ~ Adverse Events (e.g, MTD)</a:t>
+            </a:r>
+          </a:p>
+          <a:p>
+            <a:pPr marL="342900" indent="-342900">
+              <a:buFont typeface="Arial" panose="020B0604020202020204" pitchFamily="34" charset="0"/>
+              <a:buChar char="•"/>
+            </a:pPr>
+            <a:r>
+              <a:rPr lang="en-US" sz="1400" dirty="0"/>
+              <a:t>New treatment</a:t>
             </a:r>
           </a:p>
         </p:txBody>
@@ -20092,7 +20094,13 @@
             </a:r>
             <a:r>
               <a:rPr lang="en-US" sz="1400" dirty="0"/>
-              <a:t> scaled phase</a:t>
+              <a:t> scaled phase </a:t>
+            </a:r>
+            <a:r>
+              <a:rPr lang="en-US" sz="1400" dirty="0">
+                <a:sym typeface="Wingdings" panose="05000000000000000000" pitchFamily="2" charset="2"/>
+              </a:rPr>
+              <a:t> Study Design</a:t>
             </a:r>
             <a:endParaRPr lang="en-GB" sz="1400" dirty="0"/>
           </a:p>
@@ -21304,303 +21312,6 @@
       </p:grpSpPr>
       <p:sp>
         <p:nvSpPr>
-          <p:cNvPr id="7" name="Content Placeholder 6">
-            <a:extLst>
-              <a:ext uri="{FF2B5EF4-FFF2-40B4-BE49-F238E27FC236}">
-                <a16:creationId xmlns:a16="http://schemas.microsoft.com/office/drawing/2014/main" id="{7379714B-1FF3-323E-6749-EA95E8C454BF}"/>
-              </a:ext>
-            </a:extLst>
-          </p:cNvPr>
-          <p:cNvSpPr>
-            <a:spLocks noGrp="1"/>
-          </p:cNvSpPr>
-          <p:nvPr>
-            <p:ph idx="1"/>
-          </p:nvPr>
-        </p:nvSpPr>
-        <p:spPr>
-          <a:xfrm>
-            <a:off x="609600" y="4078580"/>
-            <a:ext cx="10972800" cy="2657890"/>
-          </a:xfrm>
-          <a:ln>
-            <a:noFill/>
-          </a:ln>
-        </p:spPr>
-        <p:txBody>
-          <a:bodyPr anchor="ctr">
-            <a:noAutofit/>
-          </a:bodyPr>
-          <a:lstStyle/>
-          <a:p>
-            <a:pPr marL="3206750"/>
-            <a:r>
-              <a:rPr lang="en-GB" sz="1800" dirty="0"/>
-              <a:t>Enrollment</a:t>
-            </a:r>
-          </a:p>
-          <a:p>
-            <a:pPr marL="3206750"/>
-            <a:r>
-              <a:rPr lang="en-GB" sz="1800" dirty="0"/>
-              <a:t>Disease category (e.g., neoplasms) </a:t>
-            </a:r>
-            <a:r>
-              <a:rPr lang="en-GB" sz="1800" dirty="0">
-                <a:sym typeface="Wingdings" panose="05000000000000000000" pitchFamily="2" charset="2"/>
-              </a:rPr>
-              <a:t> Affects enrollment</a:t>
-            </a:r>
-            <a:endParaRPr lang="en-GB" sz="1800" dirty="0"/>
-          </a:p>
-          <a:p>
-            <a:pPr marL="3206750"/>
-            <a:r>
-              <a:rPr lang="en-GB" sz="1800" dirty="0"/>
-              <a:t>Number of facilities </a:t>
-            </a:r>
-            <a:r>
-              <a:rPr lang="en-GB" sz="1800" dirty="0">
-                <a:sym typeface="Wingdings" panose="05000000000000000000" pitchFamily="2" charset="2"/>
-              </a:rPr>
-              <a:t> Also, affects enrollment</a:t>
-            </a:r>
-            <a:endParaRPr lang="en-GB" sz="1800" dirty="0"/>
-          </a:p>
-          <a:p>
-            <a:pPr marL="3206750"/>
-            <a:r>
-              <a:rPr lang="en-GB" sz="1800" dirty="0"/>
-              <a:t>Healthy Volunteers</a:t>
-            </a:r>
-          </a:p>
-          <a:p>
-            <a:pPr marL="3206750"/>
-            <a:r>
-              <a:rPr lang="en-GB" sz="1800" dirty="0"/>
-              <a:t>Number of Adverse Events</a:t>
-            </a:r>
-          </a:p>
-          <a:p>
-            <a:pPr marL="3206750"/>
-            <a:r>
-              <a:rPr lang="en-GB" sz="1800" dirty="0"/>
-              <a:t>Funder type (e.g., non-Industry)</a:t>
-            </a:r>
-          </a:p>
-          <a:p>
-            <a:pPr marL="3206750"/>
-            <a:r>
-              <a:rPr lang="en-GB" sz="1800" dirty="0"/>
-              <a:t>Other (e., Administrative, supplies etc.)</a:t>
-            </a:r>
-          </a:p>
-        </p:txBody>
-      </p:sp>
-      <p:sp>
-        <p:nvSpPr>
-          <p:cNvPr id="3" name="Title 1">
-            <a:extLst>
-              <a:ext uri="{FF2B5EF4-FFF2-40B4-BE49-F238E27FC236}">
-                <a16:creationId xmlns:a16="http://schemas.microsoft.com/office/drawing/2014/main" id="{79AA6C9D-2E20-3FDC-E624-B09367AC8F9F}"/>
-              </a:ext>
-            </a:extLst>
-          </p:cNvPr>
-          <p:cNvSpPr>
-            <a:spLocks noGrp="1"/>
-          </p:cNvSpPr>
-          <p:nvPr>
-            <p:ph type="title"/>
-          </p:nvPr>
-        </p:nvSpPr>
-        <p:spPr>
-          <a:xfrm>
-            <a:off x="609600" y="1226916"/>
-            <a:ext cx="10972800" cy="457200"/>
-          </a:xfrm>
-          <a:ln>
-            <a:solidFill>
-              <a:schemeClr val="tx1"/>
-            </a:solidFill>
-          </a:ln>
-        </p:spPr>
-        <p:txBody>
-          <a:bodyPr>
-            <a:noAutofit/>
-          </a:bodyPr>
-          <a:lstStyle/>
-          <a:p>
-            <a:pPr algn="ctr"/>
-            <a:r>
-              <a:rPr lang="en-GB" sz="3200" b="1" dirty="0"/>
-              <a:t>Termination Descriptives (db)</a:t>
-            </a:r>
-          </a:p>
-        </p:txBody>
-      </p:sp>
-      <p:sp>
-        <p:nvSpPr>
-          <p:cNvPr id="2" name="TextBox 1">
-            <a:extLst>
-              <a:ext uri="{FF2B5EF4-FFF2-40B4-BE49-F238E27FC236}">
-                <a16:creationId xmlns:a16="http://schemas.microsoft.com/office/drawing/2014/main" id="{608B01A7-91F3-6875-4CD6-3BD2CA6131EB}"/>
-              </a:ext>
-            </a:extLst>
-          </p:cNvPr>
-          <p:cNvSpPr txBox="1"/>
-          <p:nvPr/>
-        </p:nvSpPr>
-        <p:spPr>
-          <a:xfrm>
-            <a:off x="609600" y="241776"/>
-            <a:ext cx="10972800" cy="584775"/>
-          </a:xfrm>
-          <a:prstGeom prst="rect">
-            <a:avLst/>
-          </a:prstGeom>
-          <a:noFill/>
-          <a:ln>
-            <a:solidFill>
-              <a:schemeClr val="tx1"/>
-            </a:solidFill>
-          </a:ln>
-        </p:spPr>
-        <p:txBody>
-          <a:bodyPr wrap="square" rtlCol="0" anchor="ctr">
-            <a:spAutoFit/>
-          </a:bodyPr>
-          <a:lstStyle/>
-          <a:p>
-            <a:pPr algn="ctr"/>
-            <a:r>
-              <a:rPr lang="en-US" sz="3200" b="1" dirty="0"/>
-              <a:t>Current – Background Research Alignment</a:t>
-            </a:r>
-          </a:p>
-        </p:txBody>
-      </p:sp>
-      <p:pic>
-        <p:nvPicPr>
-          <p:cNvPr id="6" name="Picture 5">
-            <a:extLst>
-              <a:ext uri="{FF2B5EF4-FFF2-40B4-BE49-F238E27FC236}">
-                <a16:creationId xmlns:a16="http://schemas.microsoft.com/office/drawing/2014/main" id="{8EC81A22-9F3E-3963-5EB9-300275B01289}"/>
-              </a:ext>
-            </a:extLst>
-          </p:cNvPr>
-          <p:cNvPicPr>
-            <a:picLocks noChangeAspect="1"/>
-          </p:cNvPicPr>
-          <p:nvPr/>
-        </p:nvPicPr>
-        <p:blipFill>
-          <a:blip r:embed="rId2"/>
-          <a:stretch>
-            <a:fillRect/>
-          </a:stretch>
-        </p:blipFill>
-        <p:spPr>
-          <a:xfrm>
-            <a:off x="1828047" y="1999948"/>
-            <a:ext cx="8535906" cy="1163060"/>
-          </a:xfrm>
-          <a:prstGeom prst="rect">
-            <a:avLst/>
-          </a:prstGeom>
-        </p:spPr>
-      </p:pic>
-      <p:sp>
-        <p:nvSpPr>
-          <p:cNvPr id="4" name="Title 1">
-            <a:extLst>
-              <a:ext uri="{FF2B5EF4-FFF2-40B4-BE49-F238E27FC236}">
-                <a16:creationId xmlns:a16="http://schemas.microsoft.com/office/drawing/2014/main" id="{450E4AEB-EFCC-184B-E286-4074CCA76B6D}"/>
-              </a:ext>
-            </a:extLst>
-          </p:cNvPr>
-          <p:cNvSpPr txBox="1">
-            <a:spLocks/>
-          </p:cNvSpPr>
-          <p:nvPr/>
-        </p:nvSpPr>
-        <p:spPr>
-          <a:xfrm>
-            <a:off x="609600" y="3478840"/>
-            <a:ext cx="10972800" cy="457200"/>
-          </a:xfrm>
-          <a:prstGeom prst="rect">
-            <a:avLst/>
-          </a:prstGeom>
-          <a:ln>
-            <a:solidFill>
-              <a:schemeClr val="tx1"/>
-            </a:solidFill>
-          </a:ln>
-        </p:spPr>
-        <p:txBody>
-          <a:bodyPr vert="horz" lIns="91440" tIns="45720" rIns="91440" bIns="45720" rtlCol="0" anchor="ctr">
-            <a:noAutofit/>
-          </a:bodyPr>
-          <a:lstStyle>
-            <a:lvl1pPr algn="l" defTabSz="914400" rtl="0" eaLnBrk="1" latinLnBrk="0" hangingPunct="1">
-              <a:lnSpc>
-                <a:spcPct val="90000"/>
-              </a:lnSpc>
-              <a:spcBef>
-                <a:spcPct val="0"/>
-              </a:spcBef>
-              <a:buNone/>
-              <a:defRPr sz="4400" kern="1200">
-                <a:solidFill>
-                  <a:schemeClr val="tx1"/>
-                </a:solidFill>
-                <a:latin typeface="+mj-lt"/>
-                <a:ea typeface="+mj-ea"/>
-                <a:cs typeface="+mj-cs"/>
-              </a:defRPr>
-            </a:lvl1pPr>
-          </a:lstStyle>
-          <a:p>
-            <a:pPr algn="ctr"/>
-            <a:r>
-              <a:rPr lang="en-GB" sz="3200" b="1" dirty="0"/>
-              <a:t>Background Research</a:t>
-            </a:r>
-          </a:p>
-        </p:txBody>
-      </p:sp>
-    </p:spTree>
-    <p:extLst>
-      <p:ext uri="{BB962C8B-B14F-4D97-AF65-F5344CB8AC3E}">
-        <p14:creationId xmlns:p14="http://schemas.microsoft.com/office/powerpoint/2010/main" val="379656155"/>
-      </p:ext>
-    </p:extLst>
-  </p:cSld>
-  <p:clrMapOvr>
-    <a:masterClrMapping/>
-  </p:clrMapOvr>
-</p:sld>
-</file>
-
-<file path=ppt/slides/slide27.xml><?xml version="1.0" encoding="utf-8"?>
-<p:sld xmlns:a="http://schemas.openxmlformats.org/drawingml/2006/main" xmlns:r="http://schemas.openxmlformats.org/officeDocument/2006/relationships" xmlns:p="http://schemas.openxmlformats.org/presentationml/2006/main">
-  <p:cSld>
-    <p:spTree>
-      <p:nvGrpSpPr>
-        <p:cNvPr id="1" name=""/>
-        <p:cNvGrpSpPr/>
-        <p:nvPr/>
-      </p:nvGrpSpPr>
-      <p:grpSpPr>
-        <a:xfrm>
-          <a:off x="0" y="0"/>
-          <a:ext cx="0" cy="0"/>
-          <a:chOff x="0" y="0"/>
-          <a:chExt cx="0" cy="0"/>
-        </a:xfrm>
-      </p:grpSpPr>
-      <p:sp>
-        <p:nvSpPr>
           <p:cNvPr id="5" name="Title 1">
             <a:extLst>
               <a:ext uri="{FF2B5EF4-FFF2-40B4-BE49-F238E27FC236}">
@@ -21688,8 +21399,17 @@
                   <a:schemeClr val="accent5"/>
                 </a:solidFill>
               </a:rPr>
-              <a:t> – </a:t>
-            </a:r>
+              <a:t> –  </a:t>
+            </a:r>
+            <a:r>
+              <a:rPr lang="en-US" dirty="0"/>
+              <a:t>: Opposite sign</a:t>
+            </a:r>
+            <a:endParaRPr lang="en-US" dirty="0">
+              <a:solidFill>
+                <a:schemeClr val="accent5"/>
+              </a:solidFill>
+            </a:endParaRPr>
           </a:p>
           <a:p>
             <a:pPr marL="285750" indent="-285750">
@@ -21974,6 +21694,303 @@
 </p:sld>
 </file>
 
+<file path=ppt/slides/slide27.xml><?xml version="1.0" encoding="utf-8"?>
+<p:sld xmlns:a="http://schemas.openxmlformats.org/drawingml/2006/main" xmlns:r="http://schemas.openxmlformats.org/officeDocument/2006/relationships" xmlns:p="http://schemas.openxmlformats.org/presentationml/2006/main">
+  <p:cSld>
+    <p:spTree>
+      <p:nvGrpSpPr>
+        <p:cNvPr id="1" name=""/>
+        <p:cNvGrpSpPr/>
+        <p:nvPr/>
+      </p:nvGrpSpPr>
+      <p:grpSpPr>
+        <a:xfrm>
+          <a:off x="0" y="0"/>
+          <a:ext cx="0" cy="0"/>
+          <a:chOff x="0" y="0"/>
+          <a:chExt cx="0" cy="0"/>
+        </a:xfrm>
+      </p:grpSpPr>
+      <p:sp>
+        <p:nvSpPr>
+          <p:cNvPr id="7" name="Content Placeholder 6">
+            <a:extLst>
+              <a:ext uri="{FF2B5EF4-FFF2-40B4-BE49-F238E27FC236}">
+                <a16:creationId xmlns:a16="http://schemas.microsoft.com/office/drawing/2014/main" id="{7379714B-1FF3-323E-6749-EA95E8C454BF}"/>
+              </a:ext>
+            </a:extLst>
+          </p:cNvPr>
+          <p:cNvSpPr>
+            <a:spLocks noGrp="1"/>
+          </p:cNvSpPr>
+          <p:nvPr>
+            <p:ph idx="1"/>
+          </p:nvPr>
+        </p:nvSpPr>
+        <p:spPr>
+          <a:xfrm>
+            <a:off x="609600" y="4078580"/>
+            <a:ext cx="10972800" cy="2657890"/>
+          </a:xfrm>
+          <a:ln>
+            <a:noFill/>
+          </a:ln>
+        </p:spPr>
+        <p:txBody>
+          <a:bodyPr anchor="ctr">
+            <a:noAutofit/>
+          </a:bodyPr>
+          <a:lstStyle/>
+          <a:p>
+            <a:pPr marL="3206750"/>
+            <a:r>
+              <a:rPr lang="en-GB" sz="1800" dirty="0"/>
+              <a:t>Enrollment</a:t>
+            </a:r>
+          </a:p>
+          <a:p>
+            <a:pPr marL="3206750"/>
+            <a:r>
+              <a:rPr lang="en-GB" sz="1800" dirty="0"/>
+              <a:t>Disease category (e.g., neoplasms) </a:t>
+            </a:r>
+            <a:r>
+              <a:rPr lang="en-GB" sz="1800" dirty="0">
+                <a:sym typeface="Wingdings" panose="05000000000000000000" pitchFamily="2" charset="2"/>
+              </a:rPr>
+              <a:t> Affects enrollment</a:t>
+            </a:r>
+            <a:endParaRPr lang="en-GB" sz="1800" dirty="0"/>
+          </a:p>
+          <a:p>
+            <a:pPr marL="3206750"/>
+            <a:r>
+              <a:rPr lang="en-GB" sz="1800" dirty="0"/>
+              <a:t>Number of facilities </a:t>
+            </a:r>
+            <a:r>
+              <a:rPr lang="en-GB" sz="1800" dirty="0">
+                <a:sym typeface="Wingdings" panose="05000000000000000000" pitchFamily="2" charset="2"/>
+              </a:rPr>
+              <a:t> Also, affects enrollment</a:t>
+            </a:r>
+            <a:endParaRPr lang="en-GB" sz="1800" dirty="0"/>
+          </a:p>
+          <a:p>
+            <a:pPr marL="3206750"/>
+            <a:r>
+              <a:rPr lang="en-GB" sz="1800" dirty="0"/>
+              <a:t>Healthy Volunteers</a:t>
+            </a:r>
+          </a:p>
+          <a:p>
+            <a:pPr marL="3206750"/>
+            <a:r>
+              <a:rPr lang="en-GB" sz="1800" dirty="0"/>
+              <a:t>Number of Adverse Events</a:t>
+            </a:r>
+          </a:p>
+          <a:p>
+            <a:pPr marL="3206750"/>
+            <a:r>
+              <a:rPr lang="en-GB" sz="1800" dirty="0"/>
+              <a:t>Funder type (e.g., non-Industry)</a:t>
+            </a:r>
+          </a:p>
+          <a:p>
+            <a:pPr marL="3206750"/>
+            <a:r>
+              <a:rPr lang="en-GB" sz="1800" dirty="0"/>
+              <a:t>Other (e., Administrative, supplies etc.)</a:t>
+            </a:r>
+          </a:p>
+        </p:txBody>
+      </p:sp>
+      <p:sp>
+        <p:nvSpPr>
+          <p:cNvPr id="3" name="Title 1">
+            <a:extLst>
+              <a:ext uri="{FF2B5EF4-FFF2-40B4-BE49-F238E27FC236}">
+                <a16:creationId xmlns:a16="http://schemas.microsoft.com/office/drawing/2014/main" id="{79AA6C9D-2E20-3FDC-E624-B09367AC8F9F}"/>
+              </a:ext>
+            </a:extLst>
+          </p:cNvPr>
+          <p:cNvSpPr>
+            <a:spLocks noGrp="1"/>
+          </p:cNvSpPr>
+          <p:nvPr>
+            <p:ph type="title"/>
+          </p:nvPr>
+        </p:nvSpPr>
+        <p:spPr>
+          <a:xfrm>
+            <a:off x="609600" y="1226916"/>
+            <a:ext cx="10972800" cy="457200"/>
+          </a:xfrm>
+          <a:ln>
+            <a:solidFill>
+              <a:schemeClr val="tx1"/>
+            </a:solidFill>
+          </a:ln>
+        </p:spPr>
+        <p:txBody>
+          <a:bodyPr>
+            <a:noAutofit/>
+          </a:bodyPr>
+          <a:lstStyle/>
+          <a:p>
+            <a:pPr algn="ctr"/>
+            <a:r>
+              <a:rPr lang="en-GB" sz="3200" b="1" dirty="0"/>
+              <a:t>Termination Descriptives (db)</a:t>
+            </a:r>
+          </a:p>
+        </p:txBody>
+      </p:sp>
+      <p:sp>
+        <p:nvSpPr>
+          <p:cNvPr id="2" name="TextBox 1">
+            <a:extLst>
+              <a:ext uri="{FF2B5EF4-FFF2-40B4-BE49-F238E27FC236}">
+                <a16:creationId xmlns:a16="http://schemas.microsoft.com/office/drawing/2014/main" id="{608B01A7-91F3-6875-4CD6-3BD2CA6131EB}"/>
+              </a:ext>
+            </a:extLst>
+          </p:cNvPr>
+          <p:cNvSpPr txBox="1"/>
+          <p:nvPr/>
+        </p:nvSpPr>
+        <p:spPr>
+          <a:xfrm>
+            <a:off x="609600" y="241776"/>
+            <a:ext cx="10972800" cy="584775"/>
+          </a:xfrm>
+          <a:prstGeom prst="rect">
+            <a:avLst/>
+          </a:prstGeom>
+          <a:noFill/>
+          <a:ln>
+            <a:solidFill>
+              <a:schemeClr val="tx1"/>
+            </a:solidFill>
+          </a:ln>
+        </p:spPr>
+        <p:txBody>
+          <a:bodyPr wrap="square" rtlCol="0" anchor="ctr">
+            <a:spAutoFit/>
+          </a:bodyPr>
+          <a:lstStyle/>
+          <a:p>
+            <a:pPr algn="ctr"/>
+            <a:r>
+              <a:rPr lang="en-US" sz="3200" b="1" dirty="0"/>
+              <a:t>Current – Background Research Alignment</a:t>
+            </a:r>
+          </a:p>
+        </p:txBody>
+      </p:sp>
+      <p:pic>
+        <p:nvPicPr>
+          <p:cNvPr id="6" name="Picture 5">
+            <a:extLst>
+              <a:ext uri="{FF2B5EF4-FFF2-40B4-BE49-F238E27FC236}">
+                <a16:creationId xmlns:a16="http://schemas.microsoft.com/office/drawing/2014/main" id="{8EC81A22-9F3E-3963-5EB9-300275B01289}"/>
+              </a:ext>
+            </a:extLst>
+          </p:cNvPr>
+          <p:cNvPicPr>
+            <a:picLocks noChangeAspect="1"/>
+          </p:cNvPicPr>
+          <p:nvPr/>
+        </p:nvPicPr>
+        <p:blipFill>
+          <a:blip r:embed="rId2"/>
+          <a:stretch>
+            <a:fillRect/>
+          </a:stretch>
+        </p:blipFill>
+        <p:spPr>
+          <a:xfrm>
+            <a:off x="1828047" y="1999948"/>
+            <a:ext cx="8535906" cy="1163060"/>
+          </a:xfrm>
+          <a:prstGeom prst="rect">
+            <a:avLst/>
+          </a:prstGeom>
+        </p:spPr>
+      </p:pic>
+      <p:sp>
+        <p:nvSpPr>
+          <p:cNvPr id="4" name="Title 1">
+            <a:extLst>
+              <a:ext uri="{FF2B5EF4-FFF2-40B4-BE49-F238E27FC236}">
+                <a16:creationId xmlns:a16="http://schemas.microsoft.com/office/drawing/2014/main" id="{450E4AEB-EFCC-184B-E286-4074CCA76B6D}"/>
+              </a:ext>
+            </a:extLst>
+          </p:cNvPr>
+          <p:cNvSpPr txBox="1">
+            <a:spLocks/>
+          </p:cNvSpPr>
+          <p:nvPr/>
+        </p:nvSpPr>
+        <p:spPr>
+          <a:xfrm>
+            <a:off x="609600" y="3478840"/>
+            <a:ext cx="10972800" cy="457200"/>
+          </a:xfrm>
+          <a:prstGeom prst="rect">
+            <a:avLst/>
+          </a:prstGeom>
+          <a:ln>
+            <a:solidFill>
+              <a:schemeClr val="tx1"/>
+            </a:solidFill>
+          </a:ln>
+        </p:spPr>
+        <p:txBody>
+          <a:bodyPr vert="horz" lIns="91440" tIns="45720" rIns="91440" bIns="45720" rtlCol="0" anchor="ctr">
+            <a:noAutofit/>
+          </a:bodyPr>
+          <a:lstStyle>
+            <a:lvl1pPr algn="l" defTabSz="914400" rtl="0" eaLnBrk="1" latinLnBrk="0" hangingPunct="1">
+              <a:lnSpc>
+                <a:spcPct val="90000"/>
+              </a:lnSpc>
+              <a:spcBef>
+                <a:spcPct val="0"/>
+              </a:spcBef>
+              <a:buNone/>
+              <a:defRPr sz="4400" kern="1200">
+                <a:solidFill>
+                  <a:schemeClr val="tx1"/>
+                </a:solidFill>
+                <a:latin typeface="+mj-lt"/>
+                <a:ea typeface="+mj-ea"/>
+                <a:cs typeface="+mj-cs"/>
+              </a:defRPr>
+            </a:lvl1pPr>
+          </a:lstStyle>
+          <a:p>
+            <a:pPr algn="ctr"/>
+            <a:r>
+              <a:rPr lang="en-GB" sz="3200" b="1" dirty="0"/>
+              <a:t>Background Research</a:t>
+            </a:r>
+          </a:p>
+        </p:txBody>
+      </p:sp>
+    </p:spTree>
+    <p:extLst>
+      <p:ext uri="{BB962C8B-B14F-4D97-AF65-F5344CB8AC3E}">
+        <p14:creationId xmlns:p14="http://schemas.microsoft.com/office/powerpoint/2010/main" val="379656155"/>
+      </p:ext>
+    </p:extLst>
+  </p:cSld>
+  <p:clrMapOvr>
+    <a:masterClrMapping/>
+  </p:clrMapOvr>
+</p:sld>
+</file>
+
 <file path=ppt/slides/slide28.xml><?xml version="1.0" encoding="utf-8"?>
 <p:sld xmlns:a="http://schemas.openxmlformats.org/drawingml/2006/main" xmlns:r="http://schemas.openxmlformats.org/officeDocument/2006/relationships" xmlns:p="http://schemas.openxmlformats.org/presentationml/2006/main">
   <p:cSld>
@@ -22078,7 +22095,7 @@
           <p:cNvPr id="2" name="Title 1">
             <a:extLst>
               <a:ext uri="{FF2B5EF4-FFF2-40B4-BE49-F238E27FC236}">
-                <a16:creationId xmlns:a16="http://schemas.microsoft.com/office/drawing/2014/main" id="{691FB1F2-9B2C-952D-6552-CDCF58BA3473}"/>
+                <a16:creationId xmlns:a16="http://schemas.microsoft.com/office/drawing/2014/main" id="{FB03F8E8-2E98-47AD-EA90-7034E59DE430}"/>
               </a:ext>
             </a:extLst>
           </p:cNvPr>
@@ -22091,7 +22108,7 @@
         </p:nvSpPr>
         <p:spPr>
           <a:xfrm>
-            <a:off x="609600" y="358800"/>
+            <a:off x="609600" y="290933"/>
             <a:ext cx="10972800" cy="457200"/>
           </a:xfrm>
           <a:ln>
@@ -22102,14 +22119,14 @@
         </p:spPr>
         <p:txBody>
           <a:bodyPr>
-            <a:noAutofit/>
+            <a:normAutofit fontScale="90000"/>
           </a:bodyPr>
           <a:lstStyle/>
           <a:p>
             <a:pPr algn="ctr"/>
             <a:r>
               <a:rPr lang="en-US" sz="3000" b="1" dirty="0"/>
-              <a:t>Future Research</a:t>
+              <a:t>Strengths &amp; Limitations</a:t>
             </a:r>
             <a:endParaRPr lang="en-GB" sz="3000" b="1" dirty="0"/>
           </a:p>
@@ -22120,7 +22137,7 @@
           <p:cNvPr id="3" name="Content Placeholder 2">
             <a:extLst>
               <a:ext uri="{FF2B5EF4-FFF2-40B4-BE49-F238E27FC236}">
-                <a16:creationId xmlns:a16="http://schemas.microsoft.com/office/drawing/2014/main" id="{F231BD6F-33DE-5ED7-7A3C-3B8D40A5DEF5}"/>
+                <a16:creationId xmlns:a16="http://schemas.microsoft.com/office/drawing/2014/main" id="{1ABCE21A-3F83-3DDC-7BD2-BF9D4DD5C680}"/>
               </a:ext>
             </a:extLst>
           </p:cNvPr>
@@ -22133,11 +22150,13 @@
         </p:nvSpPr>
         <p:spPr>
           <a:xfrm>
-            <a:off x="609598" y="995424"/>
-            <a:ext cx="10972799" cy="4502552"/>
+            <a:off x="609599" y="1225850"/>
+            <a:ext cx="5305064" cy="5475892"/>
           </a:xfrm>
           <a:ln>
-            <a:noFill/>
+            <a:solidFill>
+              <a:schemeClr val="tx1"/>
+            </a:solidFill>
           </a:ln>
         </p:spPr>
         <p:txBody>
@@ -22146,133 +22165,298 @@
           </a:bodyPr>
           <a:lstStyle/>
           <a:p>
-            <a:pPr marL="0" indent="0">
+            <a:r>
+              <a:rPr lang="en-GB" sz="2000" b="1" dirty="0"/>
+              <a:t>Per Phases (1-4) Analysis</a:t>
+            </a:r>
+          </a:p>
+          <a:p>
+            <a:r>
+              <a:rPr lang="en-GB" sz="2000" b="1" dirty="0"/>
+              <a:t>More features</a:t>
+            </a:r>
+            <a:br>
+              <a:rPr lang="en-GB" sz="2000" b="1" dirty="0"/>
+            </a:br>
+            <a:r>
+              <a:rPr lang="en-GB" sz="2000" dirty="0"/>
+              <a:t>Interactions, New, scales etc.</a:t>
+            </a:r>
+          </a:p>
+          <a:p>
+            <a:r>
+              <a:rPr lang="en-GB" sz="2000" b="1" dirty="0"/>
+              <a:t>More models </a:t>
+            </a:r>
+            <a:br>
+              <a:rPr lang="en-GB" sz="2000" b="1" dirty="0"/>
+            </a:br>
+            <a:r>
+              <a:rPr lang="en-GB" sz="2000" dirty="0">
+                <a:sym typeface="Wingdings" panose="05000000000000000000" pitchFamily="2" charset="2"/>
+              </a:rPr>
+              <a:t>LightBoost</a:t>
+            </a:r>
+            <a:br>
+              <a:rPr lang="en-GB" sz="2000" b="1" dirty="0">
+                <a:sym typeface="Wingdings" panose="05000000000000000000" pitchFamily="2" charset="2"/>
+              </a:rPr>
+            </a:br>
+            <a:r>
+              <a:rPr lang="en-GB" sz="2000" dirty="0">
+                <a:sym typeface="Wingdings" panose="05000000000000000000" pitchFamily="2" charset="2"/>
+              </a:rPr>
+              <a:t>Clinical practice impact </a:t>
+            </a:r>
+          </a:p>
+          <a:p>
+            <a:r>
+              <a:rPr lang="en-GB" sz="2000" b="1" dirty="0">
+                <a:sym typeface="Wingdings" panose="05000000000000000000" pitchFamily="2" charset="2"/>
+              </a:rPr>
+              <a:t>Imbalance sensitive metrics</a:t>
+            </a:r>
+            <a:br>
+              <a:rPr lang="en-GB" sz="2000" b="1" dirty="0">
+                <a:sym typeface="Wingdings" panose="05000000000000000000" pitchFamily="2" charset="2"/>
+              </a:rPr>
+            </a:br>
+            <a:r>
+              <a:rPr lang="en-GB" sz="2000" dirty="0">
+                <a:sym typeface="Wingdings" panose="05000000000000000000" pitchFamily="2" charset="2"/>
+              </a:rPr>
+              <a:t>MCC, BA, F1, PR Curves</a:t>
+            </a:r>
+          </a:p>
+          <a:p>
+            <a:r>
+              <a:rPr lang="en-GB" sz="2000" b="1" dirty="0">
+                <a:sym typeface="Wingdings" panose="05000000000000000000" pitchFamily="2" charset="2"/>
+              </a:rPr>
+              <a:t>Interpretability of ML </a:t>
+            </a:r>
+            <a:br>
+              <a:rPr lang="en-GB" sz="2000" b="1" dirty="0">
+                <a:sym typeface="Wingdings" panose="05000000000000000000" pitchFamily="2" charset="2"/>
+              </a:rPr>
+            </a:br>
+            <a:r>
+              <a:rPr lang="en-GB" sz="2000" dirty="0">
+                <a:sym typeface="Wingdings" panose="05000000000000000000" pitchFamily="2" charset="2"/>
+              </a:rPr>
+              <a:t>SHAP plots, Logistic</a:t>
+            </a:r>
+          </a:p>
+          <a:p>
+            <a:r>
+              <a:rPr lang="en-GB" sz="2000" b="1" dirty="0">
+                <a:sym typeface="Wingdings" panose="05000000000000000000" pitchFamily="2" charset="2"/>
+              </a:rPr>
+              <a:t>Sample Size</a:t>
+            </a:r>
+          </a:p>
+          <a:p>
+            <a:pPr marL="233363" lvl="1" indent="0">
               <a:buNone/>
             </a:pPr>
             <a:r>
-              <a:rPr lang="en-US" sz="2000" b="1" dirty="0"/>
-              <a:t>Underlying factors </a:t>
-            </a:r>
-            <a:r>
-              <a:rPr lang="en-US" sz="2000" b="1" dirty="0">
+              <a:rPr lang="en-GB" sz="2000" dirty="0">
                 <a:sym typeface="Wingdings" panose="05000000000000000000" pitchFamily="2" charset="2"/>
               </a:rPr>
-              <a:t> E</a:t>
-            </a:r>
-            <a:r>
-              <a:rPr lang="en-US" sz="2000" b="1" dirty="0"/>
-              <a:t>arly termination</a:t>
-            </a:r>
-          </a:p>
-          <a:p>
-            <a:pPr lvl="1"/>
-            <a:r>
-              <a:rPr lang="en-US" sz="2000" dirty="0"/>
-              <a:t>Interactions (Enrollment x Other Features, Funder x Intervention etc.) </a:t>
-            </a:r>
-          </a:p>
-          <a:p>
-            <a:pPr lvl="1"/>
-            <a:r>
-              <a:rPr lang="en-US" sz="2000" dirty="0"/>
-              <a:t>Enrollment </a:t>
-            </a:r>
-          </a:p>
-          <a:p>
-            <a:pPr lvl="1"/>
-            <a:r>
-              <a:rPr lang="en-US" sz="2000" dirty="0"/>
-              <a:t>Conditions</a:t>
-            </a:r>
-          </a:p>
-          <a:p>
-            <a:pPr lvl="1"/>
-            <a:r>
-              <a:rPr lang="en-US" sz="2000" dirty="0"/>
-              <a:t>Phase ~ Features </a:t>
-            </a:r>
-          </a:p>
-          <a:p>
-            <a:pPr lvl="1"/>
-            <a:r>
-              <a:rPr lang="en-US" sz="2000" dirty="0"/>
-              <a:t>Study Status: Withdrawn, Terminated, Suspended etc. </a:t>
-            </a:r>
-            <a:r>
-              <a:rPr lang="en-US" sz="2000" dirty="0">
+              <a:t>Efficiently large: 2011-2024 , EPV</a:t>
+            </a:r>
+            <a:endParaRPr lang="en-GB" sz="2000" b="1" dirty="0">
+              <a:sym typeface="Wingdings" panose="05000000000000000000" pitchFamily="2" charset="2"/>
+            </a:endParaRPr>
+          </a:p>
+          <a:p>
+            <a:r>
+              <a:rPr lang="en-GB" sz="2000" b="1" dirty="0">
                 <a:sym typeface="Wingdings" panose="05000000000000000000" pitchFamily="2" charset="2"/>
               </a:rPr>
-              <a:t> S</a:t>
-            </a:r>
-            <a:r>
-              <a:rPr lang="en-US" sz="2000" dirty="0"/>
-              <a:t>eparately | Combined</a:t>
-            </a:r>
-          </a:p>
-          <a:p>
-            <a:pPr marL="0" indent="0">
-              <a:buNone/>
-            </a:pPr>
-            <a:r>
-              <a:rPr lang="en-US" sz="2000" b="1" dirty="0"/>
-              <a:t>Alternative Models of best performing Boosting method’s</a:t>
-            </a:r>
-          </a:p>
-          <a:p>
-            <a:pPr lvl="1"/>
-            <a:r>
-              <a:rPr lang="en-US" sz="2000" dirty="0"/>
-              <a:t>Interpretability</a:t>
-            </a:r>
-            <a:r>
-              <a:rPr lang="en-US" sz="2000" b="1" dirty="0"/>
-              <a:t> </a:t>
-            </a:r>
-          </a:p>
-          <a:p>
-            <a:pPr marL="0" indent="0">
-              <a:buNone/>
-            </a:pPr>
-            <a:r>
-              <a:rPr lang="en-US" sz="2000" b="1" dirty="0"/>
-              <a:t>Later years trials registrations</a:t>
-            </a:r>
-            <a:r>
-              <a:rPr lang="en-US" sz="2000" dirty="0"/>
-              <a:t> : Less optional field completion </a:t>
-            </a:r>
-            <a:r>
-              <a:rPr lang="en-US" sz="2000" dirty="0">
+              <a:t>Avoid Missing data drop</a:t>
+            </a:r>
+            <a:r>
+              <a:rPr lang="en-GB" sz="2000" dirty="0">
                 <a:sym typeface="Wingdings" panose="05000000000000000000" pitchFamily="2" charset="2"/>
               </a:rPr>
-              <a:t> Accuracy</a:t>
-            </a:r>
-            <a:endParaRPr lang="en-US" sz="2000" b="1" dirty="0"/>
-          </a:p>
-          <a:p>
-            <a:pPr marL="0" indent="0">
-              <a:buNone/>
-            </a:pPr>
-            <a:r>
-              <a:rPr lang="en-US" sz="2000" b="1" dirty="0"/>
-              <a:t>Mapping Key findings</a:t>
-            </a:r>
-          </a:p>
-          <a:p>
-            <a:pPr lvl="1"/>
-            <a:r>
-              <a:rPr lang="en-US" sz="2000" dirty="0"/>
-              <a:t>Literature alignment, Registries</a:t>
+              <a:t> </a:t>
+            </a:r>
+            <a:br>
+              <a:rPr lang="en-GB" sz="2000" dirty="0">
+                <a:sym typeface="Wingdings" panose="05000000000000000000" pitchFamily="2" charset="2"/>
+              </a:rPr>
+            </a:br>
+            <a:r>
+              <a:rPr lang="en-GB" sz="2000" dirty="0">
+                <a:sym typeface="Wingdings" panose="05000000000000000000" pitchFamily="2" charset="2"/>
+              </a:rPr>
+              <a:t>No</a:t>
+            </a:r>
+            <a:r>
+              <a:rPr lang="en-GB" sz="2000" b="1" dirty="0">
+                <a:sym typeface="Wingdings" panose="05000000000000000000" pitchFamily="2" charset="2"/>
+              </a:rPr>
+              <a:t> </a:t>
+            </a:r>
+            <a:r>
+              <a:rPr lang="en-GB" sz="2000" dirty="0">
+                <a:sym typeface="Wingdings" panose="05000000000000000000" pitchFamily="2" charset="2"/>
+              </a:rPr>
+              <a:t>Information loss</a:t>
             </a:r>
           </a:p>
         </p:txBody>
       </p:sp>
       <p:sp>
         <p:nvSpPr>
-          <p:cNvPr id="5" name="TextBox 4">
+          <p:cNvPr id="4" name="Content Placeholder 3">
             <a:extLst>
               <a:ext uri="{FF2B5EF4-FFF2-40B4-BE49-F238E27FC236}">
-                <a16:creationId xmlns:a16="http://schemas.microsoft.com/office/drawing/2014/main" id="{2F2D7F9C-8C80-0702-9D66-F91BA0E31612}"/>
+                <a16:creationId xmlns:a16="http://schemas.microsoft.com/office/drawing/2014/main" id="{401DE421-F807-3BEB-AAE2-D3F1FCDFEE89}"/>
+              </a:ext>
+            </a:extLst>
+          </p:cNvPr>
+          <p:cNvSpPr>
+            <a:spLocks noGrp="1"/>
+          </p:cNvSpPr>
+          <p:nvPr>
+            <p:ph sz="half" idx="2"/>
+          </p:nvPr>
+        </p:nvSpPr>
+        <p:spPr>
+          <a:xfrm>
+            <a:off x="6277334" y="1225850"/>
+            <a:ext cx="5305065" cy="5475892"/>
+          </a:xfrm>
+          <a:ln>
+            <a:solidFill>
+              <a:schemeClr val="tx1"/>
+            </a:solidFill>
+          </a:ln>
+        </p:spPr>
+        <p:txBody>
+          <a:bodyPr anchor="ctr">
+            <a:noAutofit/>
+          </a:bodyPr>
+          <a:lstStyle/>
+          <a:p>
+            <a:r>
+              <a:rPr lang="en-US" sz="2000" b="1" dirty="0"/>
+              <a:t>Missing data </a:t>
+            </a:r>
+            <a:r>
+              <a:rPr lang="en-US" sz="2000" b="1" dirty="0">
+                <a:sym typeface="Wingdings" panose="05000000000000000000" pitchFamily="2" charset="2"/>
+              </a:rPr>
+              <a:t>: </a:t>
+            </a:r>
+            <a:r>
+              <a:rPr lang="en-US" sz="2000" dirty="0"/>
+              <a:t>RegEx  </a:t>
+            </a:r>
+            <a:endParaRPr lang="en-US" sz="2000" dirty="0">
+              <a:sym typeface="Wingdings" panose="05000000000000000000" pitchFamily="2" charset="2"/>
+            </a:endParaRPr>
+          </a:p>
+          <a:p>
+            <a:r>
+              <a:rPr lang="en-US" sz="2000" b="1" dirty="0"/>
+              <a:t>Random Under Sample </a:t>
+            </a:r>
+            <a:r>
+              <a:rPr lang="en-US" sz="2000" b="1" dirty="0">
+                <a:sym typeface="Wingdings" panose="05000000000000000000" pitchFamily="2" charset="2"/>
+              </a:rPr>
+              <a:t>: </a:t>
+            </a:r>
+            <a:r>
+              <a:rPr lang="en-US" sz="2000" dirty="0"/>
+              <a:t>Information loss</a:t>
+            </a:r>
+          </a:p>
+          <a:p>
+            <a:r>
+              <a:rPr lang="en-US" sz="2000" b="1" dirty="0"/>
+              <a:t>EPV &gt;25 </a:t>
+            </a:r>
+            <a:r>
+              <a:rPr lang="en-US" sz="2000" b="1" dirty="0">
+                <a:sym typeface="Wingdings" panose="05000000000000000000" pitchFamily="2" charset="2"/>
+              </a:rPr>
+              <a:t>: </a:t>
+            </a:r>
+            <a:r>
+              <a:rPr lang="en-US" sz="2000" dirty="0"/>
+              <a:t>Inefficient for ML</a:t>
+            </a:r>
+          </a:p>
+          <a:p>
+            <a:r>
+              <a:rPr lang="en-US" sz="2000" b="1" dirty="0"/>
+              <a:t>No alternative classic statistics models</a:t>
+            </a:r>
+          </a:p>
+          <a:p>
+            <a:r>
+              <a:rPr lang="en-US" sz="2000" b="1" dirty="0"/>
+              <a:t>No field specific </a:t>
+            </a:r>
+            <a:r>
+              <a:rPr lang="en-US" sz="2000" b="1" dirty="0">
+                <a:sym typeface="Wingdings" panose="05000000000000000000" pitchFamily="2" charset="2"/>
+              </a:rPr>
+              <a:t>: </a:t>
+            </a:r>
+            <a:r>
+              <a:rPr lang="en-US" sz="2000" dirty="0">
+                <a:sym typeface="Wingdings" panose="05000000000000000000" pitchFamily="2" charset="2"/>
+              </a:rPr>
+              <a:t>High dimension</a:t>
+            </a:r>
+            <a:endParaRPr lang="en-US" sz="2000" dirty="0"/>
+          </a:p>
+          <a:p>
+            <a:r>
+              <a:rPr lang="en-US" sz="2000" b="1" dirty="0"/>
+              <a:t>Phases excluded: </a:t>
+            </a:r>
+            <a:r>
+              <a:rPr lang="en-US" sz="2000" dirty="0"/>
+              <a:t>0, 1|2, 2|3, NA </a:t>
+            </a:r>
+          </a:p>
+          <a:p>
+            <a:r>
+              <a:rPr lang="en-US" sz="2000" b="1" dirty="0"/>
+              <a:t>Study status excluded: </a:t>
+            </a:r>
+            <a:r>
+              <a:rPr lang="en-US" sz="2000" dirty="0"/>
+              <a:t>Suspended etc.</a:t>
+            </a:r>
+          </a:p>
+          <a:p>
+            <a:r>
+              <a:rPr lang="en-US" sz="2000" b="1" dirty="0"/>
+              <a:t>Inaccurate dataset registries  </a:t>
+            </a:r>
+            <a:br>
+              <a:rPr lang="en-US" sz="2000" b="1" dirty="0"/>
+            </a:br>
+            <a:r>
+              <a:rPr lang="en-US" sz="2000" dirty="0"/>
+              <a:t>Wrongly, optimal, Null, Sparse etc.</a:t>
+            </a:r>
+          </a:p>
+        </p:txBody>
+      </p:sp>
+      <p:sp>
+        <p:nvSpPr>
+          <p:cNvPr id="8" name="TextBox 7">
+            <a:extLst>
+              <a:ext uri="{FF2B5EF4-FFF2-40B4-BE49-F238E27FC236}">
+                <a16:creationId xmlns:a16="http://schemas.microsoft.com/office/drawing/2014/main" id="{41458E01-EEDC-C559-906A-803FD00F9A27}"/>
               </a:ext>
             </a:extLst>
           </p:cNvPr>
@@ -22281,18 +22465,13 @@
         </p:nvSpPr>
         <p:spPr>
           <a:xfrm>
-            <a:off x="609598" y="5797889"/>
-            <a:ext cx="10972799" cy="707886"/>
+            <a:off x="609599" y="856518"/>
+            <a:ext cx="5410200" cy="369332"/>
           </a:xfrm>
           <a:prstGeom prst="rect">
             <a:avLst/>
           </a:prstGeom>
           <a:noFill/>
-          <a:ln>
-            <a:solidFill>
-              <a:schemeClr val="tx1"/>
-            </a:solidFill>
-          </a:ln>
         </p:spPr>
         <p:txBody>
           <a:bodyPr wrap="square" rtlCol="0">
@@ -22302,24 +22481,53 @@
           <a:p>
             <a:pPr algn="ctr"/>
             <a:r>
-              <a:rPr lang="en-US" sz="2000" dirty="0"/>
-              <a:t>Establish well performed models/methods for real world health data</a:t>
-            </a:r>
-          </a:p>
+              <a:rPr lang="en-US" b="1" dirty="0"/>
+              <a:t>Strengths</a:t>
+            </a:r>
+            <a:endParaRPr lang="en-GB" b="1" dirty="0"/>
+          </a:p>
+        </p:txBody>
+      </p:sp>
+      <p:sp>
+        <p:nvSpPr>
+          <p:cNvPr id="9" name="TextBox 8">
+            <a:extLst>
+              <a:ext uri="{FF2B5EF4-FFF2-40B4-BE49-F238E27FC236}">
+                <a16:creationId xmlns:a16="http://schemas.microsoft.com/office/drawing/2014/main" id="{CED2D915-7AF7-0AF9-12A6-E25870A2516B}"/>
+              </a:ext>
+            </a:extLst>
+          </p:cNvPr>
+          <p:cNvSpPr txBox="1"/>
+          <p:nvPr/>
+        </p:nvSpPr>
+        <p:spPr>
+          <a:xfrm>
+            <a:off x="6096000" y="856518"/>
+            <a:ext cx="5410200" cy="369332"/>
+          </a:xfrm>
+          <a:prstGeom prst="rect">
+            <a:avLst/>
+          </a:prstGeom>
+          <a:noFill/>
+        </p:spPr>
+        <p:txBody>
+          <a:bodyPr wrap="square" rtlCol="0">
+            <a:spAutoFit/>
+          </a:bodyPr>
+          <a:lstStyle/>
           <a:p>
             <a:pPr algn="ctr"/>
             <a:r>
-              <a:rPr lang="en-US" sz="2000" dirty="0"/>
-              <a:t>and analysis of corresponding problems</a:t>
-            </a:r>
-            <a:endParaRPr lang="en-GB" sz="2000" b="1" dirty="0"/>
+              <a:rPr lang="en-US" b="1" dirty="0"/>
+              <a:t>Limitations</a:t>
+            </a:r>
           </a:p>
         </p:txBody>
       </p:sp>
     </p:spTree>
     <p:extLst>
       <p:ext uri="{BB962C8B-B14F-4D97-AF65-F5344CB8AC3E}">
-        <p14:creationId xmlns:p14="http://schemas.microsoft.com/office/powerpoint/2010/main" val="1725771169"/>
+        <p14:creationId xmlns:p14="http://schemas.microsoft.com/office/powerpoint/2010/main" val="2946716891"/>
       </p:ext>
     </p:extLst>
   </p:cSld>
@@ -22433,7 +22641,7 @@
           <p:cNvPr id="2" name="Title 1">
             <a:extLst>
               <a:ext uri="{FF2B5EF4-FFF2-40B4-BE49-F238E27FC236}">
-                <a16:creationId xmlns:a16="http://schemas.microsoft.com/office/drawing/2014/main" id="{FB03F8E8-2E98-47AD-EA90-7034E59DE430}"/>
+                <a16:creationId xmlns:a16="http://schemas.microsoft.com/office/drawing/2014/main" id="{691FB1F2-9B2C-952D-6552-CDCF58BA3473}"/>
               </a:ext>
             </a:extLst>
           </p:cNvPr>
@@ -22446,7 +22654,7 @@
         </p:nvSpPr>
         <p:spPr>
           <a:xfrm>
-            <a:off x="609600" y="290933"/>
+            <a:off x="609600" y="358800"/>
             <a:ext cx="10972800" cy="457200"/>
           </a:xfrm>
           <a:ln>
@@ -22457,14 +22665,14 @@
         </p:spPr>
         <p:txBody>
           <a:bodyPr>
-            <a:normAutofit fontScale="90000"/>
+            <a:noAutofit/>
           </a:bodyPr>
           <a:lstStyle/>
           <a:p>
             <a:pPr algn="ctr"/>
             <a:r>
               <a:rPr lang="en-US" sz="3000" b="1" dirty="0"/>
-              <a:t>Strengths &amp; Limitations</a:t>
+              <a:t>Future Research</a:t>
             </a:r>
             <a:endParaRPr lang="en-GB" sz="3000" b="1" dirty="0"/>
           </a:p>
@@ -22475,7 +22683,7 @@
           <p:cNvPr id="3" name="Content Placeholder 2">
             <a:extLst>
               <a:ext uri="{FF2B5EF4-FFF2-40B4-BE49-F238E27FC236}">
-                <a16:creationId xmlns:a16="http://schemas.microsoft.com/office/drawing/2014/main" id="{1ABCE21A-3F83-3DDC-7BD2-BF9D4DD5C680}"/>
+                <a16:creationId xmlns:a16="http://schemas.microsoft.com/office/drawing/2014/main" id="{F231BD6F-33DE-5ED7-7A3C-3B8D40A5DEF5}"/>
               </a:ext>
             </a:extLst>
           </p:cNvPr>
@@ -22488,13 +22696,11 @@
         </p:nvSpPr>
         <p:spPr>
           <a:xfrm>
-            <a:off x="609599" y="1225850"/>
-            <a:ext cx="5305064" cy="5475892"/>
+            <a:off x="609598" y="995424"/>
+            <a:ext cx="10972799" cy="4502552"/>
           </a:xfrm>
           <a:ln>
-            <a:solidFill>
-              <a:schemeClr val="tx1"/>
-            </a:solidFill>
+            <a:noFill/>
           </a:ln>
         </p:spPr>
         <p:txBody>
@@ -22503,298 +22709,126 @@
           </a:bodyPr>
           <a:lstStyle/>
           <a:p>
-            <a:r>
-              <a:rPr lang="en-GB" sz="2000" b="1" dirty="0"/>
-              <a:t>Per Phases (1-4) Analysis</a:t>
-            </a:r>
-          </a:p>
-          <a:p>
-            <a:r>
-              <a:rPr lang="en-GB" sz="2000" b="1" dirty="0"/>
-              <a:t>More features</a:t>
-            </a:r>
-            <a:br>
-              <a:rPr lang="en-GB" sz="2000" b="1" dirty="0"/>
-            </a:br>
-            <a:r>
-              <a:rPr lang="en-GB" sz="2000" dirty="0"/>
-              <a:t>Interactions, New, scales etc.</a:t>
-            </a:r>
-          </a:p>
-          <a:p>
-            <a:r>
-              <a:rPr lang="en-GB" sz="2000" b="1" dirty="0"/>
-              <a:t>More models </a:t>
-            </a:r>
-            <a:br>
-              <a:rPr lang="en-GB" sz="2000" b="1" dirty="0"/>
-            </a:br>
-            <a:r>
-              <a:rPr lang="en-GB" sz="2000" dirty="0">
+            <a:pPr marL="0" indent="0">
+              <a:buNone/>
+            </a:pPr>
+            <a:r>
+              <a:rPr lang="en-US" sz="2000" b="1" dirty="0"/>
+              <a:t>Underlying factors </a:t>
+            </a:r>
+            <a:r>
+              <a:rPr lang="en-US" sz="2000" b="1" dirty="0">
                 <a:sym typeface="Wingdings" panose="05000000000000000000" pitchFamily="2" charset="2"/>
               </a:rPr>
-              <a:t>LightBoost</a:t>
-            </a:r>
-            <a:br>
-              <a:rPr lang="en-GB" sz="2000" b="1" dirty="0">
+              <a:t> E</a:t>
+            </a:r>
+            <a:r>
+              <a:rPr lang="en-US" sz="2000" b="1" dirty="0"/>
+              <a:t>arly termination</a:t>
+            </a:r>
+          </a:p>
+          <a:p>
+            <a:pPr lvl="1"/>
+            <a:r>
+              <a:rPr lang="en-US" sz="2000" dirty="0"/>
+              <a:t>Interactions (Enrollment x Other Features, Funder x Intervention etc.) </a:t>
+            </a:r>
+          </a:p>
+          <a:p>
+            <a:pPr lvl="1"/>
+            <a:r>
+              <a:rPr lang="en-US" sz="2000" dirty="0"/>
+              <a:t>Enrollment, Conditions</a:t>
+            </a:r>
+          </a:p>
+          <a:p>
+            <a:pPr lvl="1"/>
+            <a:r>
+              <a:rPr lang="en-US" sz="2000" dirty="0"/>
+              <a:t>Phase ~ Features </a:t>
+            </a:r>
+          </a:p>
+          <a:p>
+            <a:pPr lvl="1"/>
+            <a:r>
+              <a:rPr lang="en-US" sz="2000" dirty="0"/>
+              <a:t>Study Status: Withdrawn, Terminated, Suspended etc. </a:t>
+            </a:r>
+            <a:r>
+              <a:rPr lang="en-US" sz="2000" dirty="0">
                 <a:sym typeface="Wingdings" panose="05000000000000000000" pitchFamily="2" charset="2"/>
               </a:rPr>
-            </a:br>
-            <a:r>
-              <a:rPr lang="en-GB" sz="2000" dirty="0">
+              <a:t> S</a:t>
+            </a:r>
+            <a:r>
+              <a:rPr lang="en-US" sz="2000" dirty="0"/>
+              <a:t>eparately | Combined</a:t>
+            </a:r>
+          </a:p>
+          <a:p>
+            <a:pPr marL="0" indent="0">
+              <a:buNone/>
+            </a:pPr>
+            <a:r>
+              <a:rPr lang="en-US" sz="2000" b="1" dirty="0"/>
+              <a:t>Alternative Models of best performing Boosting method’s</a:t>
+            </a:r>
+          </a:p>
+          <a:p>
+            <a:pPr lvl="1"/>
+            <a:r>
+              <a:rPr lang="en-US" sz="2000" dirty="0"/>
+              <a:t>Interpretability</a:t>
+            </a:r>
+            <a:r>
+              <a:rPr lang="en-US" sz="2000" b="1" dirty="0"/>
+              <a:t> </a:t>
+            </a:r>
+          </a:p>
+          <a:p>
+            <a:pPr marL="0" indent="0">
+              <a:buNone/>
+            </a:pPr>
+            <a:r>
+              <a:rPr lang="en-US" sz="2000" b="1" dirty="0"/>
+              <a:t>Later years trials registrations</a:t>
+            </a:r>
+            <a:r>
+              <a:rPr lang="en-US" sz="2000" dirty="0"/>
+              <a:t> : Less optional field completion </a:t>
+            </a:r>
+            <a:r>
+              <a:rPr lang="en-US" sz="2000" dirty="0">
                 <a:sym typeface="Wingdings" panose="05000000000000000000" pitchFamily="2" charset="2"/>
               </a:rPr>
-              <a:t>Clinical practice impact </a:t>
-            </a:r>
-          </a:p>
-          <a:p>
-            <a:r>
-              <a:rPr lang="en-GB" sz="2000" b="1" dirty="0">
-                <a:sym typeface="Wingdings" panose="05000000000000000000" pitchFamily="2" charset="2"/>
-              </a:rPr>
-              <a:t>Imbalance sensitive metrics</a:t>
-            </a:r>
-            <a:br>
-              <a:rPr lang="en-GB" sz="2000" b="1" dirty="0">
-                <a:sym typeface="Wingdings" panose="05000000000000000000" pitchFamily="2" charset="2"/>
-              </a:rPr>
-            </a:br>
-            <a:r>
-              <a:rPr lang="en-GB" sz="2000" dirty="0">
-                <a:sym typeface="Wingdings" panose="05000000000000000000" pitchFamily="2" charset="2"/>
-              </a:rPr>
-              <a:t>MCC, BA, F1, PR Curves</a:t>
-            </a:r>
-          </a:p>
-          <a:p>
-            <a:r>
-              <a:rPr lang="en-GB" sz="2000" b="1" dirty="0">
-                <a:sym typeface="Wingdings" panose="05000000000000000000" pitchFamily="2" charset="2"/>
-              </a:rPr>
-              <a:t>Interpretability of ML </a:t>
-            </a:r>
-            <a:br>
-              <a:rPr lang="en-GB" sz="2000" b="1" dirty="0">
-                <a:sym typeface="Wingdings" panose="05000000000000000000" pitchFamily="2" charset="2"/>
-              </a:rPr>
-            </a:br>
-            <a:r>
-              <a:rPr lang="en-GB" sz="2000" dirty="0">
-                <a:sym typeface="Wingdings" panose="05000000000000000000" pitchFamily="2" charset="2"/>
-              </a:rPr>
-              <a:t>SHAP plots, Logistic</a:t>
-            </a:r>
-          </a:p>
-          <a:p>
-            <a:r>
-              <a:rPr lang="en-GB" sz="2000" b="1" dirty="0">
-                <a:sym typeface="Wingdings" panose="05000000000000000000" pitchFamily="2" charset="2"/>
-              </a:rPr>
-              <a:t>Sample Size</a:t>
-            </a:r>
-          </a:p>
-          <a:p>
-            <a:pPr marL="233363" lvl="1" indent="0">
+              <a:t> Accuracy</a:t>
+            </a:r>
+            <a:endParaRPr lang="en-US" sz="2000" b="1" dirty="0"/>
+          </a:p>
+          <a:p>
+            <a:pPr marL="0" indent="0">
               <a:buNone/>
             </a:pPr>
             <a:r>
-              <a:rPr lang="en-GB" sz="2000" dirty="0">
-                <a:sym typeface="Wingdings" panose="05000000000000000000" pitchFamily="2" charset="2"/>
-              </a:rPr>
-              <a:t>Efficiently large: 2011-2024 , EPV</a:t>
-            </a:r>
-            <a:endParaRPr lang="en-GB" sz="2000" b="1" dirty="0">
-              <a:sym typeface="Wingdings" panose="05000000000000000000" pitchFamily="2" charset="2"/>
-            </a:endParaRPr>
-          </a:p>
-          <a:p>
-            <a:r>
-              <a:rPr lang="en-GB" sz="2000" b="1" dirty="0">
-                <a:sym typeface="Wingdings" panose="05000000000000000000" pitchFamily="2" charset="2"/>
-              </a:rPr>
-              <a:t>Avoid Missing data drop</a:t>
-            </a:r>
-            <a:r>
-              <a:rPr lang="en-GB" sz="2000" dirty="0">
-                <a:sym typeface="Wingdings" panose="05000000000000000000" pitchFamily="2" charset="2"/>
-              </a:rPr>
-              <a:t> </a:t>
-            </a:r>
-            <a:br>
-              <a:rPr lang="en-GB" sz="2000" dirty="0">
-                <a:sym typeface="Wingdings" panose="05000000000000000000" pitchFamily="2" charset="2"/>
-              </a:rPr>
-            </a:br>
-            <a:r>
-              <a:rPr lang="en-GB" sz="2000" dirty="0">
-                <a:sym typeface="Wingdings" panose="05000000000000000000" pitchFamily="2" charset="2"/>
-              </a:rPr>
-              <a:t>No</a:t>
-            </a:r>
-            <a:r>
-              <a:rPr lang="en-GB" sz="2000" b="1" dirty="0">
-                <a:sym typeface="Wingdings" panose="05000000000000000000" pitchFamily="2" charset="2"/>
-              </a:rPr>
-              <a:t> </a:t>
-            </a:r>
-            <a:r>
-              <a:rPr lang="en-GB" sz="2000" dirty="0">
-                <a:sym typeface="Wingdings" panose="05000000000000000000" pitchFamily="2" charset="2"/>
-              </a:rPr>
-              <a:t>Information loss</a:t>
+              <a:rPr lang="en-US" sz="2000" b="1" dirty="0"/>
+              <a:t>Mapping Key findings</a:t>
+            </a:r>
+          </a:p>
+          <a:p>
+            <a:pPr lvl="1"/>
+            <a:r>
+              <a:rPr lang="en-US" sz="2000" dirty="0"/>
+              <a:t>Literature alignment, Registries</a:t>
             </a:r>
           </a:p>
         </p:txBody>
       </p:sp>
       <p:sp>
         <p:nvSpPr>
-          <p:cNvPr id="4" name="Content Placeholder 3">
+          <p:cNvPr id="5" name="TextBox 4">
             <a:extLst>
               <a:ext uri="{FF2B5EF4-FFF2-40B4-BE49-F238E27FC236}">
-                <a16:creationId xmlns:a16="http://schemas.microsoft.com/office/drawing/2014/main" id="{401DE421-F807-3BEB-AAE2-D3F1FCDFEE89}"/>
-              </a:ext>
-            </a:extLst>
-          </p:cNvPr>
-          <p:cNvSpPr>
-            <a:spLocks noGrp="1"/>
-          </p:cNvSpPr>
-          <p:nvPr>
-            <p:ph sz="half" idx="2"/>
-          </p:nvPr>
-        </p:nvSpPr>
-        <p:spPr>
-          <a:xfrm>
-            <a:off x="6277334" y="1225850"/>
-            <a:ext cx="5305065" cy="5475892"/>
-          </a:xfrm>
-          <a:ln>
-            <a:solidFill>
-              <a:schemeClr val="tx1"/>
-            </a:solidFill>
-          </a:ln>
-        </p:spPr>
-        <p:txBody>
-          <a:bodyPr anchor="ctr">
-            <a:noAutofit/>
-          </a:bodyPr>
-          <a:lstStyle/>
-          <a:p>
-            <a:r>
-              <a:rPr lang="en-US" sz="2000" b="1" dirty="0"/>
-              <a:t>Missing data </a:t>
-            </a:r>
-            <a:r>
-              <a:rPr lang="en-US" sz="2000" b="1" dirty="0">
-                <a:sym typeface="Wingdings" panose="05000000000000000000" pitchFamily="2" charset="2"/>
-              </a:rPr>
-              <a:t>: </a:t>
-            </a:r>
-            <a:r>
-              <a:rPr lang="en-US" sz="2000" dirty="0"/>
-              <a:t>RegEx  </a:t>
-            </a:r>
-            <a:endParaRPr lang="en-US" sz="2000" dirty="0">
-              <a:sym typeface="Wingdings" panose="05000000000000000000" pitchFamily="2" charset="2"/>
-            </a:endParaRPr>
-          </a:p>
-          <a:p>
-            <a:r>
-              <a:rPr lang="en-US" sz="2000" b="1" dirty="0"/>
-              <a:t>Random Under Sample </a:t>
-            </a:r>
-            <a:r>
-              <a:rPr lang="en-US" sz="2000" b="1" dirty="0">
-                <a:sym typeface="Wingdings" panose="05000000000000000000" pitchFamily="2" charset="2"/>
-              </a:rPr>
-              <a:t>: </a:t>
-            </a:r>
-            <a:r>
-              <a:rPr lang="en-US" sz="2000" dirty="0"/>
-              <a:t>Information loss</a:t>
-            </a:r>
-          </a:p>
-          <a:p>
-            <a:r>
-              <a:rPr lang="en-US" sz="2000" b="1" dirty="0"/>
-              <a:t>EPV &gt;25 </a:t>
-            </a:r>
-            <a:r>
-              <a:rPr lang="en-US" sz="2000" b="1" dirty="0">
-                <a:sym typeface="Wingdings" panose="05000000000000000000" pitchFamily="2" charset="2"/>
-              </a:rPr>
-              <a:t>: </a:t>
-            </a:r>
-            <a:r>
-              <a:rPr lang="en-US" sz="2000" dirty="0"/>
-              <a:t>Inefficient for ML</a:t>
-            </a:r>
-          </a:p>
-          <a:p>
-            <a:r>
-              <a:rPr lang="en-US" sz="2000" b="1" dirty="0"/>
-              <a:t>No alternative classic statistics models</a:t>
-            </a:r>
-          </a:p>
-          <a:p>
-            <a:r>
-              <a:rPr lang="en-US" sz="2000" b="1" dirty="0"/>
-              <a:t>No field specific </a:t>
-            </a:r>
-            <a:r>
-              <a:rPr lang="en-US" sz="2000" b="1" dirty="0">
-                <a:sym typeface="Wingdings" panose="05000000000000000000" pitchFamily="2" charset="2"/>
-              </a:rPr>
-              <a:t>: </a:t>
-            </a:r>
-            <a:r>
-              <a:rPr lang="en-US" sz="2000" dirty="0">
-                <a:sym typeface="Wingdings" panose="05000000000000000000" pitchFamily="2" charset="2"/>
-              </a:rPr>
-              <a:t>High dimension</a:t>
-            </a:r>
-            <a:endParaRPr lang="en-US" sz="2000" dirty="0"/>
-          </a:p>
-          <a:p>
-            <a:r>
-              <a:rPr lang="en-US" sz="2000" b="1" dirty="0"/>
-              <a:t>Phases excluded: </a:t>
-            </a:r>
-            <a:r>
-              <a:rPr lang="en-US" sz="2000" dirty="0"/>
-              <a:t>0, 1|2, 2|3, NA </a:t>
-            </a:r>
-          </a:p>
-          <a:p>
-            <a:r>
-              <a:rPr lang="en-US" sz="2000" b="1" dirty="0"/>
-              <a:t>Study status excluded: </a:t>
-            </a:r>
-            <a:r>
-              <a:rPr lang="en-US" sz="2000" dirty="0"/>
-              <a:t>Suspended etc.</a:t>
-            </a:r>
-          </a:p>
-          <a:p>
-            <a:r>
-              <a:rPr lang="en-US" sz="2000" b="1" dirty="0"/>
-              <a:t>Inaccurate dataset registries  </a:t>
-            </a:r>
-            <a:br>
-              <a:rPr lang="en-US" sz="2000" b="1" dirty="0"/>
-            </a:br>
-            <a:r>
-              <a:rPr lang="en-US" sz="2000" dirty="0"/>
-              <a:t>Wrongly, optimal, Null, Sparse etc.</a:t>
-            </a:r>
-          </a:p>
-        </p:txBody>
-      </p:sp>
-      <p:sp>
-        <p:nvSpPr>
-          <p:cNvPr id="8" name="TextBox 7">
-            <a:extLst>
-              <a:ext uri="{FF2B5EF4-FFF2-40B4-BE49-F238E27FC236}">
-                <a16:creationId xmlns:a16="http://schemas.microsoft.com/office/drawing/2014/main" id="{41458E01-EEDC-C559-906A-803FD00F9A27}"/>
+                <a16:creationId xmlns:a16="http://schemas.microsoft.com/office/drawing/2014/main" id="{2F2D7F9C-8C80-0702-9D66-F91BA0E31612}"/>
               </a:ext>
             </a:extLst>
           </p:cNvPr>
@@ -22803,13 +22837,18 @@
         </p:nvSpPr>
         <p:spPr>
           <a:xfrm>
-            <a:off x="609599" y="856518"/>
-            <a:ext cx="5410200" cy="369332"/>
+            <a:off x="609598" y="5797889"/>
+            <a:ext cx="10972799" cy="707886"/>
           </a:xfrm>
           <a:prstGeom prst="rect">
             <a:avLst/>
           </a:prstGeom>
           <a:noFill/>
+          <a:ln>
+            <a:solidFill>
+              <a:schemeClr val="tx1"/>
+            </a:solidFill>
+          </a:ln>
         </p:spPr>
         <p:txBody>
           <a:bodyPr wrap="square" rtlCol="0">
@@ -22819,53 +22858,24 @@
           <a:p>
             <a:pPr algn="ctr"/>
             <a:r>
-              <a:rPr lang="en-US" b="1" dirty="0"/>
-              <a:t>Strengths</a:t>
-            </a:r>
-            <a:endParaRPr lang="en-GB" b="1" dirty="0"/>
-          </a:p>
-        </p:txBody>
-      </p:sp>
-      <p:sp>
-        <p:nvSpPr>
-          <p:cNvPr id="9" name="TextBox 8">
-            <a:extLst>
-              <a:ext uri="{FF2B5EF4-FFF2-40B4-BE49-F238E27FC236}">
-                <a16:creationId xmlns:a16="http://schemas.microsoft.com/office/drawing/2014/main" id="{CED2D915-7AF7-0AF9-12A6-E25870A2516B}"/>
-              </a:ext>
-            </a:extLst>
-          </p:cNvPr>
-          <p:cNvSpPr txBox="1"/>
-          <p:nvPr/>
-        </p:nvSpPr>
-        <p:spPr>
-          <a:xfrm>
-            <a:off x="6096000" y="856518"/>
-            <a:ext cx="5410200" cy="369332"/>
-          </a:xfrm>
-          <a:prstGeom prst="rect">
-            <a:avLst/>
-          </a:prstGeom>
-          <a:noFill/>
-        </p:spPr>
-        <p:txBody>
-          <a:bodyPr wrap="square" rtlCol="0">
-            <a:spAutoFit/>
-          </a:bodyPr>
-          <a:lstStyle/>
+              <a:rPr lang="en-US" sz="2000" dirty="0"/>
+              <a:t>Establish well performed models/methods for real world health data</a:t>
+            </a:r>
+          </a:p>
           <a:p>
             <a:pPr algn="ctr"/>
             <a:r>
-              <a:rPr lang="en-US" b="1" dirty="0"/>
-              <a:t>Limitations</a:t>
-            </a:r>
+              <a:rPr lang="en-US" sz="2000" dirty="0"/>
+              <a:t>and analysis of corresponding problems</a:t>
+            </a:r>
+            <a:endParaRPr lang="en-GB" sz="2000" b="1" dirty="0"/>
           </a:p>
         </p:txBody>
       </p:sp>
     </p:spTree>
     <p:extLst>
       <p:ext uri="{BB962C8B-B14F-4D97-AF65-F5344CB8AC3E}">
-        <p14:creationId xmlns:p14="http://schemas.microsoft.com/office/powerpoint/2010/main" val="2946716891"/>
+        <p14:creationId xmlns:p14="http://schemas.microsoft.com/office/powerpoint/2010/main" val="1725771169"/>
       </p:ext>
     </p:extLst>
   </p:cSld>
@@ -24010,7 +24020,7 @@
         <p:spPr>
           <a:xfrm>
             <a:off x="609600" y="2331275"/>
-            <a:ext cx="10972800" cy="457200"/>
+            <a:ext cx="10972800" cy="477054"/>
           </a:xfrm>
           <a:prstGeom prst="rect">
             <a:avLst/>
@@ -24031,15 +24041,7 @@
             <a:pPr algn="ctr"/>
             <a:r>
               <a:rPr lang="en-US" sz="2500" b="1" dirty="0"/>
-              <a:t>Public Registries</a:t>
-            </a:r>
-            <a:r>
-              <a:rPr lang="el-GR" sz="2500" b="1" dirty="0"/>
-              <a:t> </a:t>
-            </a:r>
-            <a:r>
-              <a:rPr lang="en-US" sz="2500" b="1" dirty="0"/>
-              <a:t>as EHR</a:t>
+              <a:t>ClinicalTrials.gov Public Registry</a:t>
             </a:r>
           </a:p>
         </p:txBody>
@@ -24450,14 +24452,6 @@
           </a:p>
           <a:p>
             <a:r>
-              <a:rPr lang="en-US" sz="2000" dirty="0">
-                <a:sym typeface="Wingdings" panose="05000000000000000000" pitchFamily="2" charset="2"/>
-              </a:rPr>
-              <a:t>Study Status: Completed, Terminated | Completed, Withdrawn</a:t>
-            </a:r>
-          </a:p>
-          <a:p>
-            <a:r>
               <a:rPr lang="en-GB" sz="2000" dirty="0"/>
               <a:t>Phases: 1, 2, 3, 4</a:t>
             </a:r>
@@ -24483,7 +24477,14 @@
               </a:rPr>
               <a:t>Phase 1: (21012, 54) | Phase 2: (19747, 54) | Phase 3: (13317, 54) | Phase 4: (12420, 54)</a:t>
             </a:r>
-            <a:endParaRPr lang="en-GB" sz="2000" dirty="0"/>
+          </a:p>
+          <a:p>
+            <a:r>
+              <a:rPr lang="en-US" sz="2000" dirty="0">
+                <a:sym typeface="Wingdings" panose="05000000000000000000" pitchFamily="2" charset="2"/>
+              </a:rPr>
+              <a:t>Study Status: Completed, Terminated | Completed, Withdrawn</a:t>
+            </a:r>
           </a:p>
         </p:txBody>
       </p:sp>
@@ -25338,6 +25339,34 @@
           </a:p>
           <a:p>
             <a:r>
+              <a:rPr lang="en-GB" sz="2000" dirty="0"/>
+              <a:t>Inaccurate registries </a:t>
+            </a:r>
+            <a:r>
+              <a:rPr lang="en-GB" sz="2000" dirty="0">
+                <a:sym typeface="Wingdings" panose="05000000000000000000" pitchFamily="2" charset="2"/>
+              </a:rPr>
+              <a:t> </a:t>
+            </a:r>
+            <a:r>
+              <a:rPr lang="en-GB" sz="2000" dirty="0"/>
+              <a:t>Missing, Optional, False inputs </a:t>
+            </a:r>
+            <a:r>
+              <a:rPr lang="en-GB" sz="2000" dirty="0">
+                <a:sym typeface="Wingdings" panose="05000000000000000000" pitchFamily="2" charset="2"/>
+              </a:rPr>
+              <a:t> </a:t>
+            </a:r>
+            <a:r>
+              <a:rPr lang="en-US" sz="2000" dirty="0">
+                <a:sym typeface="Wingdings" panose="05000000000000000000" pitchFamily="2" charset="2"/>
+              </a:rPr>
+              <a:t>Data processing complication</a:t>
+            </a:r>
+          </a:p>
+          <a:p>
+            <a:r>
               <a:rPr lang="en-US" sz="2000" dirty="0"/>
               <a:t>Real world data </a:t>
             </a:r>
@@ -25351,33 +25380,11 @@
               <a:rPr lang="en-US" sz="2000" dirty="0"/>
               <a:t>Skewed data</a:t>
             </a:r>
-          </a:p>
-          <a:p>
-            <a:r>
-              <a:rPr lang="en-GB" sz="2000" dirty="0"/>
-              <a:t>Inaccurate registries </a:t>
-            </a:r>
-            <a:r>
-              <a:rPr lang="en-GB" sz="2000" dirty="0">
-                <a:sym typeface="Wingdings" panose="05000000000000000000" pitchFamily="2" charset="2"/>
-              </a:rPr>
-              <a:t> </a:t>
-            </a:r>
-            <a:r>
-              <a:rPr lang="en-GB" sz="2000" dirty="0"/>
-              <a:t>Missing, Optional, False inputs </a:t>
-            </a:r>
-            <a:r>
-              <a:rPr lang="en-GB" sz="2000" dirty="0">
-                <a:sym typeface="Wingdings" panose="05000000000000000000" pitchFamily="2" charset="2"/>
-              </a:rPr>
-              <a:t> </a:t>
-            </a:r>
             <a:r>
               <a:rPr lang="en-US" sz="2000" dirty="0">
                 <a:sym typeface="Wingdings" panose="05000000000000000000" pitchFamily="2" charset="2"/>
               </a:rPr>
-              <a:t>Data processing complication </a:t>
+              <a:t> </a:t>
             </a:r>
             <a:endParaRPr lang="en-GB" sz="2000" dirty="0"/>
           </a:p>

--- a/Thesis_Presentation.pptx
+++ b/Thesis_Presentation.pptx
@@ -194,7 +194,7 @@
   <pc:docChgLst>
     <pc:chgData name="Evgenia Andreou" userId="8e89e74f621e7047" providerId="LiveId" clId="{EF53017E-E624-4052-9F70-6403551E244D}"/>
     <pc:docChg chg="undo redo custSel addSld delSld modSld sldOrd modMainMaster addSection delSection modSection">
-      <pc:chgData name="Evgenia Andreou" userId="8e89e74f621e7047" providerId="LiveId" clId="{EF53017E-E624-4052-9F70-6403551E244D}" dt="2026-01-11T23:31:39.272" v="42468" actId="20577"/>
+      <pc:chgData name="Evgenia Andreou" userId="8e89e74f621e7047" providerId="LiveId" clId="{EF53017E-E624-4052-9F70-6403551E244D}" dt="2026-01-15T17:40:25.494" v="42507" actId="20577"/>
       <pc:docMkLst>
         <pc:docMk/>
       </pc:docMkLst>
@@ -367,14 +367,6 @@
             <ac:spMk id="4" creationId="{C69DB7BB-6B63-9805-5112-B71254956724}"/>
           </ac:spMkLst>
         </pc:spChg>
-        <pc:spChg chg="add del mod">
-          <ac:chgData name="Evgenia Andreou" userId="8e89e74f621e7047" providerId="LiveId" clId="{EF53017E-E624-4052-9F70-6403551E244D}" dt="2026-01-11T23:19:03.226" v="42424" actId="478"/>
-          <ac:spMkLst>
-            <pc:docMk/>
-            <pc:sldMk cId="4231469208" sldId="267"/>
-            <ac:spMk id="5" creationId="{03AEC85B-41AE-A96A-89D9-AED487ACF81E}"/>
-          </ac:spMkLst>
-        </pc:spChg>
       </pc:sldChg>
       <pc:sldChg chg="ord">
         <pc:chgData name="Evgenia Andreou" userId="8e89e74f621e7047" providerId="LiveId" clId="{EF53017E-E624-4052-9F70-6403551E244D}" dt="2026-01-04T22:13:46.677" v="41136"/>
@@ -469,6 +461,21 @@
             <ac:picMk id="25" creationId="{42F43B33-35A2-AA1D-7450-44DF1C046865}"/>
           </ac:picMkLst>
         </pc:picChg>
+      </pc:sldChg>
+      <pc:sldChg chg="modSp mod">
+        <pc:chgData name="Evgenia Andreou" userId="8e89e74f621e7047" providerId="LiveId" clId="{EF53017E-E624-4052-9F70-6403551E244D}" dt="2026-01-15T17:40:25.494" v="42507" actId="20577"/>
+        <pc:sldMkLst>
+          <pc:docMk/>
+          <pc:sldMk cId="2946716891" sldId="277"/>
+        </pc:sldMkLst>
+        <pc:spChg chg="mod">
+          <ac:chgData name="Evgenia Andreou" userId="8e89e74f621e7047" providerId="LiveId" clId="{EF53017E-E624-4052-9F70-6403551E244D}" dt="2026-01-15T17:40:25.494" v="42507" actId="20577"/>
+          <ac:spMkLst>
+            <pc:docMk/>
+            <pc:sldMk cId="2946716891" sldId="277"/>
+            <ac:spMk id="3" creationId="{1ABCE21A-3F83-3DDC-7BD2-BF9D4DD5C680}"/>
+          </ac:spMkLst>
+        </pc:spChg>
       </pc:sldChg>
       <pc:sldChg chg="modSp mod ord">
         <pc:chgData name="Evgenia Andreou" userId="8e89e74f621e7047" providerId="LiveId" clId="{EF53017E-E624-4052-9F70-6403551E244D}" dt="2026-01-09T00:55:25.735" v="42347"/>
@@ -12145,7 +12152,7 @@
           <a:p>
             <a:fld id="{C1A9776D-B584-4D4B-981C-FA97E36C0636}" type="datetimeFigureOut">
               <a:rPr lang="en-GB" smtClean="0"/>
-              <a:t>09/01/2026</a:t>
+              <a:t>15/01/2026</a:t>
             </a:fld>
             <a:endParaRPr lang="en-GB"/>
           </a:p>
@@ -12345,7 +12352,7 @@
           <a:p>
             <a:fld id="{C1A9776D-B584-4D4B-981C-FA97E36C0636}" type="datetimeFigureOut">
               <a:rPr lang="en-GB" smtClean="0"/>
-              <a:t>09/01/2026</a:t>
+              <a:t>15/01/2026</a:t>
             </a:fld>
             <a:endParaRPr lang="en-GB"/>
           </a:p>
@@ -12555,7 +12562,7 @@
           <a:p>
             <a:fld id="{C1A9776D-B584-4D4B-981C-FA97E36C0636}" type="datetimeFigureOut">
               <a:rPr lang="en-GB" smtClean="0"/>
-              <a:t>09/01/2026</a:t>
+              <a:t>15/01/2026</a:t>
             </a:fld>
             <a:endParaRPr lang="en-GB"/>
           </a:p>
@@ -12755,7 +12762,7 @@
           <a:p>
             <a:fld id="{C1A9776D-B584-4D4B-981C-FA97E36C0636}" type="datetimeFigureOut">
               <a:rPr lang="en-GB" smtClean="0"/>
-              <a:t>09/01/2026</a:t>
+              <a:t>15/01/2026</a:t>
             </a:fld>
             <a:endParaRPr lang="en-GB"/>
           </a:p>
@@ -13031,7 +13038,7 @@
           <a:p>
             <a:fld id="{C1A9776D-B584-4D4B-981C-FA97E36C0636}" type="datetimeFigureOut">
               <a:rPr lang="en-GB" smtClean="0"/>
-              <a:t>09/01/2026</a:t>
+              <a:t>15/01/2026</a:t>
             </a:fld>
             <a:endParaRPr lang="en-GB"/>
           </a:p>
@@ -13299,7 +13306,7 @@
           <a:p>
             <a:fld id="{C1A9776D-B584-4D4B-981C-FA97E36C0636}" type="datetimeFigureOut">
               <a:rPr lang="en-GB" smtClean="0"/>
-              <a:t>09/01/2026</a:t>
+              <a:t>15/01/2026</a:t>
             </a:fld>
             <a:endParaRPr lang="en-GB"/>
           </a:p>
@@ -13714,7 +13721,7 @@
           <a:p>
             <a:fld id="{C1A9776D-B584-4D4B-981C-FA97E36C0636}" type="datetimeFigureOut">
               <a:rPr lang="en-GB" smtClean="0"/>
-              <a:t>09/01/2026</a:t>
+              <a:t>15/01/2026</a:t>
             </a:fld>
             <a:endParaRPr lang="en-GB"/>
           </a:p>
@@ -13856,7 +13863,7 @@
           <a:p>
             <a:fld id="{C1A9776D-B584-4D4B-981C-FA97E36C0636}" type="datetimeFigureOut">
               <a:rPr lang="en-GB" smtClean="0"/>
-              <a:t>09/01/2026</a:t>
+              <a:t>15/01/2026</a:t>
             </a:fld>
             <a:endParaRPr lang="en-GB"/>
           </a:p>
@@ -13969,7 +13976,7 @@
           <a:p>
             <a:fld id="{C1A9776D-B584-4D4B-981C-FA97E36C0636}" type="datetimeFigureOut">
               <a:rPr lang="en-GB" smtClean="0"/>
-              <a:t>09/01/2026</a:t>
+              <a:t>15/01/2026</a:t>
             </a:fld>
             <a:endParaRPr lang="en-GB"/>
           </a:p>
@@ -14282,7 +14289,7 @@
           <a:p>
             <a:fld id="{C1A9776D-B584-4D4B-981C-FA97E36C0636}" type="datetimeFigureOut">
               <a:rPr lang="en-GB" smtClean="0"/>
-              <a:t>09/01/2026</a:t>
+              <a:t>15/01/2026</a:t>
             </a:fld>
             <a:endParaRPr lang="en-GB"/>
           </a:p>
@@ -14571,7 +14578,7 @@
           <a:p>
             <a:fld id="{C1A9776D-B584-4D4B-981C-FA97E36C0636}" type="datetimeFigureOut">
               <a:rPr lang="en-GB" smtClean="0"/>
-              <a:t>09/01/2026</a:t>
+              <a:t>15/01/2026</a:t>
             </a:fld>
             <a:endParaRPr lang="en-GB"/>
           </a:p>
@@ -14827,7 +14834,7 @@
           <a:p>
             <a:fld id="{C1A9776D-B584-4D4B-981C-FA97E36C0636}" type="datetimeFigureOut">
               <a:rPr lang="en-GB" smtClean="0"/>
-              <a:t>09/01/2026</a:t>
+              <a:t>15/01/2026</a:t>
             </a:fld>
             <a:endParaRPr lang="en-GB"/>
           </a:p>
@@ -22167,8 +22174,17 @@
           <a:p>
             <a:r>
               <a:rPr lang="en-GB" sz="2000" b="1" dirty="0"/>
-              <a:t>Per Phases (1-4) Analysis</a:t>
-            </a:r>
+              <a:t>Per Phases (1-4)</a:t>
+            </a:r>
+            <a:r>
+              <a:rPr lang="el-GR" sz="2000" b="1" dirty="0"/>
+              <a:t> ~ </a:t>
+            </a:r>
+            <a:r>
+              <a:rPr lang="en-US" sz="2000" b="1"/>
+              <a:t>Feature</a:t>
+            </a:r>
+            <a:endParaRPr lang="en-GB" sz="2000" b="1" dirty="0"/>
           </a:p>
           <a:p>
             <a:r>

--- a/Thesis_Presentation.pptx
+++ b/Thesis_Presentation.pptx
@@ -184,7 +184,7 @@
 <file path=ppt/revisionInfo.xml><?xml version="1.0" encoding="utf-8"?>
 <p1510:revInfo xmlns:a="http://schemas.openxmlformats.org/drawingml/2006/main" xmlns:r="http://schemas.openxmlformats.org/officeDocument/2006/relationships" xmlns:p1510="http://schemas.microsoft.com/office/powerpoint/2015/10/main">
   <p1510:revLst>
-    <p1510:client id="{6F7D2D08-A2CD-4302-88FB-740D1140D192}" v="1777" dt="2026-01-10T00:11:52.673"/>
+    <p1510:client id="{6F7D2D08-A2CD-4302-88FB-740D1140D192}" v="1782" dt="2026-01-18T22:04:53.473"/>
   </p1510:revLst>
 </p1510:revInfo>
 </file>
@@ -194,7 +194,7 @@
   <pc:docChgLst>
     <pc:chgData name="Evgenia Andreou" userId="8e89e74f621e7047" providerId="LiveId" clId="{EF53017E-E624-4052-9F70-6403551E244D}"/>
     <pc:docChg chg="undo redo custSel addSld delSld modSld sldOrd modMainMaster addSection delSection modSection">
-      <pc:chgData name="Evgenia Andreou" userId="8e89e74f621e7047" providerId="LiveId" clId="{EF53017E-E624-4052-9F70-6403551E244D}" dt="2026-01-15T17:40:25.494" v="42507" actId="20577"/>
+      <pc:chgData name="Evgenia Andreou" userId="8e89e74f621e7047" providerId="LiveId" clId="{EF53017E-E624-4052-9F70-6403551E244D}" dt="2026-01-18T22:04:53.471" v="42578" actId="115"/>
       <pc:docMkLst>
         <pc:docMk/>
       </pc:docMkLst>
@@ -237,7 +237,7 @@
         </pc:spChg>
       </pc:sldChg>
       <pc:sldChg chg="addSp delSp modSp mod ord">
-        <pc:chgData name="Evgenia Andreou" userId="8e89e74f621e7047" providerId="LiveId" clId="{EF53017E-E624-4052-9F70-6403551E244D}" dt="2026-01-09T01:15:44.321" v="42354"/>
+        <pc:chgData name="Evgenia Andreou" userId="8e89e74f621e7047" providerId="LiveId" clId="{EF53017E-E624-4052-9F70-6403551E244D}" dt="2026-01-18T19:39:20.174" v="42540" actId="20577"/>
         <pc:sldMkLst>
           <pc:docMk/>
           <pc:sldMk cId="379656155" sldId="263"/>
@@ -251,7 +251,7 @@
           </ac:spMkLst>
         </pc:spChg>
         <pc:spChg chg="mod">
-          <ac:chgData name="Evgenia Andreou" userId="8e89e74f621e7047" providerId="LiveId" clId="{EF53017E-E624-4052-9F70-6403551E244D}" dt="2026-01-05T14:44:26.649" v="41720" actId="20577"/>
+          <ac:chgData name="Evgenia Andreou" userId="8e89e74f621e7047" providerId="LiveId" clId="{EF53017E-E624-4052-9F70-6403551E244D}" dt="2026-01-18T19:39:20.174" v="42540" actId="20577"/>
           <ac:spMkLst>
             <pc:docMk/>
             <pc:sldMk cId="379656155" sldId="263"/>
@@ -315,7 +315,7 @@
         </pc:spChg>
       </pc:sldChg>
       <pc:sldChg chg="modSp mod">
-        <pc:chgData name="Evgenia Andreou" userId="8e89e74f621e7047" providerId="LiveId" clId="{EF53017E-E624-4052-9F70-6403551E244D}" dt="2026-01-09T00:52:08.392" v="42345" actId="20577"/>
+        <pc:chgData name="Evgenia Andreou" userId="8e89e74f621e7047" providerId="LiveId" clId="{EF53017E-E624-4052-9F70-6403551E244D}" dt="2026-01-18T22:04:53.471" v="42578" actId="115"/>
         <pc:sldMkLst>
           <pc:docMk/>
           <pc:sldMk cId="1969514135" sldId="266"/>
@@ -329,16 +329,24 @@
           </ac:spMkLst>
         </pc:spChg>
         <pc:graphicFrameChg chg="mod modGraphic">
-          <ac:chgData name="Evgenia Andreou" userId="8e89e74f621e7047" providerId="LiveId" clId="{EF53017E-E624-4052-9F70-6403551E244D}" dt="2026-01-09T00:52:08.392" v="42345" actId="20577"/>
+          <ac:chgData name="Evgenia Andreou" userId="8e89e74f621e7047" providerId="LiveId" clId="{EF53017E-E624-4052-9F70-6403551E244D}" dt="2026-01-18T22:04:53.471" v="42578" actId="115"/>
           <ac:graphicFrameMkLst>
             <pc:docMk/>
             <pc:sldMk cId="1969514135" sldId="266"/>
             <ac:graphicFrameMk id="9" creationId="{573E6068-02CB-5172-F662-3212E8C1CE9F}"/>
           </ac:graphicFrameMkLst>
         </pc:graphicFrameChg>
+        <pc:graphicFrameChg chg="modGraphic">
+          <ac:chgData name="Evgenia Andreou" userId="8e89e74f621e7047" providerId="LiveId" clId="{EF53017E-E624-4052-9F70-6403551E244D}" dt="2026-01-18T20:09:48.600" v="42551" actId="20577"/>
+          <ac:graphicFrameMkLst>
+            <pc:docMk/>
+            <pc:sldMk cId="1969514135" sldId="266"/>
+            <ac:graphicFrameMk id="20" creationId="{97A848B3-A454-77E9-2411-EE831EF40542}"/>
+          </ac:graphicFrameMkLst>
+        </pc:graphicFrameChg>
       </pc:sldChg>
       <pc:sldChg chg="addSp delSp modSp mod">
-        <pc:chgData name="Evgenia Andreou" userId="8e89e74f621e7047" providerId="LiveId" clId="{EF53017E-E624-4052-9F70-6403551E244D}" dt="2026-01-11T23:31:39.272" v="42468" actId="20577"/>
+        <pc:chgData name="Evgenia Andreou" userId="8e89e74f621e7047" providerId="LiveId" clId="{EF53017E-E624-4052-9F70-6403551E244D}" dt="2026-01-18T18:43:00.154" v="42513" actId="20577"/>
         <pc:sldMkLst>
           <pc:docMk/>
           <pc:sldMk cId="4231469208" sldId="267"/>
@@ -352,7 +360,7 @@
           </ac:spMkLst>
         </pc:spChg>
         <pc:spChg chg="mod">
-          <ac:chgData name="Evgenia Andreou" userId="8e89e74f621e7047" providerId="LiveId" clId="{EF53017E-E624-4052-9F70-6403551E244D}" dt="2026-01-11T23:31:39.272" v="42468" actId="20577"/>
+          <ac:chgData name="Evgenia Andreou" userId="8e89e74f621e7047" providerId="LiveId" clId="{EF53017E-E624-4052-9F70-6403551E244D}" dt="2026-01-18T18:43:00.154" v="42513" actId="20577"/>
           <ac:spMkLst>
             <pc:docMk/>
             <pc:sldMk cId="4231469208" sldId="267"/>
@@ -376,7 +384,7 @@
         </pc:sldMkLst>
       </pc:sldChg>
       <pc:sldChg chg="addSp delSp modSp mod">
-        <pc:chgData name="Evgenia Andreou" userId="8e89e74f621e7047" providerId="LiveId" clId="{EF53017E-E624-4052-9F70-6403551E244D}" dt="2026-01-09T23:00:10.657" v="42412" actId="20577"/>
+        <pc:chgData name="Evgenia Andreou" userId="8e89e74f621e7047" providerId="LiveId" clId="{EF53017E-E624-4052-9F70-6403551E244D}" dt="2026-01-18T19:27:42.228" v="42518" actId="20577"/>
         <pc:sldMkLst>
           <pc:docMk/>
           <pc:sldMk cId="1839987358" sldId="276"/>
@@ -414,7 +422,7 @@
           </ac:spMkLst>
         </pc:spChg>
         <pc:spChg chg="add mod">
-          <ac:chgData name="Evgenia Andreou" userId="8e89e74f621e7047" providerId="LiveId" clId="{EF53017E-E624-4052-9F70-6403551E244D}" dt="2026-01-05T15:30:37.958" v="42053" actId="14100"/>
+          <ac:chgData name="Evgenia Andreou" userId="8e89e74f621e7047" providerId="LiveId" clId="{EF53017E-E624-4052-9F70-6403551E244D}" dt="2026-01-18T19:27:42.228" v="42518" actId="20577"/>
           <ac:spMkLst>
             <pc:docMk/>
             <pc:sldMk cId="1839987358" sldId="276"/>
@@ -478,13 +486,13 @@
         </pc:spChg>
       </pc:sldChg>
       <pc:sldChg chg="modSp mod ord">
-        <pc:chgData name="Evgenia Andreou" userId="8e89e74f621e7047" providerId="LiveId" clId="{EF53017E-E624-4052-9F70-6403551E244D}" dt="2026-01-09T00:55:25.735" v="42347"/>
+        <pc:chgData name="Evgenia Andreou" userId="8e89e74f621e7047" providerId="LiveId" clId="{EF53017E-E624-4052-9F70-6403551E244D}" dt="2026-01-18T20:25:09.439" v="42574" actId="20577"/>
         <pc:sldMkLst>
           <pc:docMk/>
           <pc:sldMk cId="1725771169" sldId="278"/>
         </pc:sldMkLst>
         <pc:spChg chg="mod">
-          <ac:chgData name="Evgenia Andreou" userId="8e89e74f621e7047" providerId="LiveId" clId="{EF53017E-E624-4052-9F70-6403551E244D}" dt="2026-01-06T01:05:22.343" v="42252" actId="6549"/>
+          <ac:chgData name="Evgenia Andreou" userId="8e89e74f621e7047" providerId="LiveId" clId="{EF53017E-E624-4052-9F70-6403551E244D}" dt="2026-01-18T20:25:09.439" v="42574" actId="20577"/>
           <ac:spMkLst>
             <pc:docMk/>
             <pc:sldMk cId="1725771169" sldId="278"/>
@@ -594,13 +602,13 @@
         </pc:picChg>
       </pc:sldChg>
       <pc:sldChg chg="modSp mod">
-        <pc:chgData name="Evgenia Andreou" userId="8e89e74f621e7047" providerId="LiveId" clId="{EF53017E-E624-4052-9F70-6403551E244D}" dt="2026-01-09T23:04:20.423" v="42416" actId="20577"/>
+        <pc:chgData name="Evgenia Andreou" userId="8e89e74f621e7047" providerId="LiveId" clId="{EF53017E-E624-4052-9F70-6403551E244D}" dt="2026-01-18T19:36:30.495" v="42523" actId="6549"/>
         <pc:sldMkLst>
           <pc:docMk/>
           <pc:sldMk cId="634262476" sldId="292"/>
         </pc:sldMkLst>
         <pc:spChg chg="mod">
-          <ac:chgData name="Evgenia Andreou" userId="8e89e74f621e7047" providerId="LiveId" clId="{EF53017E-E624-4052-9F70-6403551E244D}" dt="2026-01-09T23:04:20.423" v="42416" actId="20577"/>
+          <ac:chgData name="Evgenia Andreou" userId="8e89e74f621e7047" providerId="LiveId" clId="{EF53017E-E624-4052-9F70-6403551E244D}" dt="2026-01-18T19:36:30.495" v="42523" actId="6549"/>
           <ac:spMkLst>
             <pc:docMk/>
             <pc:sldMk cId="634262476" sldId="292"/>
@@ -3942,13 +3950,13 @@
             <a:t> , </a:t>
           </a:r>
           <a:r>
-            <a:rPr lang="en-GB" sz="1500" kern="1200" dirty="0">
+            <a:rPr lang="en-GB" sz="1500" u="sng" kern="1200" dirty="0">
               <a:sym typeface="Wingdings" panose="05000000000000000000" pitchFamily="2" charset="2"/>
             </a:rPr>
             <a:t>Heatmaps, VIF </a:t>
           </a:r>
           <a:r>
-            <a:rPr lang="en-GB" sz="1500" kern="1200" dirty="0"/>
+            <a:rPr lang="en-GB" sz="1500" u="sng" kern="1200" dirty="0"/>
             <a:t>≥10</a:t>
           </a:r>
         </a:p>
@@ -4352,78 +4360,6 @@
         </a:p>
       </dgm:t>
     </dgm:pt>
-    <dgm:pt modelId="{B40F690E-7942-44A2-930D-D36AA7BEC538}">
-      <dgm:prSet custT="1"/>
-      <dgm:spPr>
-        <a:ln>
-          <a:noFill/>
-        </a:ln>
-      </dgm:spPr>
-      <dgm:t>
-        <a:bodyPr/>
-        <a:lstStyle/>
-        <a:p>
-          <a:pPr marL="114300" lvl="1" indent="0" algn="l" defTabSz="666750">
-            <a:lnSpc>
-              <a:spcPct val="90000"/>
-            </a:lnSpc>
-            <a:spcBef>
-              <a:spcPct val="0"/>
-            </a:spcBef>
-            <a:spcAft>
-              <a:spcPct val="15000"/>
-            </a:spcAft>
-            <a:buFont typeface="Wingdings" panose="05000000000000000000" pitchFamily="2" charset="2"/>
-            <a:buChar char="Ø"/>
-          </a:pPr>
-          <a:r>
-            <a:rPr lang="en-GB" sz="1500" kern="1200" dirty="0">
-              <a:latin typeface="+mn-lt"/>
-            </a:rPr>
-            <a:t>F</a:t>
-          </a:r>
-          <a:r>
-            <a:rPr lang="en-GB" sz="1500" kern="1200" dirty="0">
-              <a:solidFill>
-                <a:prstClr val="black">
-                  <a:hueOff val="0"/>
-                  <a:satOff val="0"/>
-                  <a:lumOff val="0"/>
-                  <a:alphaOff val="0"/>
-                </a:prstClr>
-              </a:solidFill>
-              <a:latin typeface="+mn-lt"/>
-              <a:ea typeface="+mn-ea"/>
-              <a:cs typeface="+mn-cs"/>
-            </a:rPr>
-            <a:t>eature Selection</a:t>
-          </a:r>
-          <a:endParaRPr lang="en-GB" sz="1500" kern="1200" dirty="0"/>
-        </a:p>
-      </dgm:t>
-    </dgm:pt>
-    <dgm:pt modelId="{6F4CF985-3CD5-4A08-A5A3-CC3BED67DC1F}" type="parTrans" cxnId="{56A31696-3ED1-488E-94ED-2E6614BF29AB}">
-      <dgm:prSet/>
-      <dgm:spPr/>
-      <dgm:t>
-        <a:bodyPr/>
-        <a:lstStyle/>
-        <a:p>
-          <a:endParaRPr lang="en-GB"/>
-        </a:p>
-      </dgm:t>
-    </dgm:pt>
-    <dgm:pt modelId="{92B4B542-8697-4062-8D0A-E47B00ECD62D}" type="sibTrans" cxnId="{56A31696-3ED1-488E-94ED-2E6614BF29AB}">
-      <dgm:prSet/>
-      <dgm:spPr/>
-      <dgm:t>
-        <a:bodyPr/>
-        <a:lstStyle/>
-        <a:p>
-          <a:endParaRPr lang="en-GB"/>
-        </a:p>
-      </dgm:t>
-    </dgm:pt>
     <dgm:pt modelId="{0A08F9B5-78CA-4B05-B1C4-3862CF8C5E43}">
       <dgm:prSet custT="1"/>
       <dgm:spPr>
@@ -4509,6 +4445,64 @@
       <dgm:prSet/>
       <dgm:spPr/>
     </dgm:pt>
+    <dgm:pt modelId="{7B69C202-376B-402A-BE67-3CEC0D34B221}">
+      <dgm:prSet custT="1"/>
+      <dgm:spPr>
+        <a:ln>
+          <a:noFill/>
+        </a:ln>
+      </dgm:spPr>
+      <dgm:t>
+        <a:bodyPr/>
+        <a:lstStyle/>
+        <a:p>
+          <a:pPr marL="114300" lvl="1" indent="0" algn="l" defTabSz="666750">
+            <a:lnSpc>
+              <a:spcPct val="90000"/>
+            </a:lnSpc>
+            <a:spcBef>
+              <a:spcPct val="0"/>
+            </a:spcBef>
+            <a:spcAft>
+              <a:spcPct val="15000"/>
+            </a:spcAft>
+            <a:buFont typeface="Wingdings" panose="05000000000000000000" pitchFamily="2" charset="2"/>
+            <a:buChar char="Ø"/>
+          </a:pPr>
+          <a:r>
+            <a:rPr lang="en-GB" sz="1500" kern="1200" dirty="0">
+              <a:latin typeface="+mn-lt"/>
+            </a:rPr>
+            <a:t>F</a:t>
+          </a:r>
+          <a:r>
+            <a:rPr lang="en-GB" sz="1500" kern="1200" dirty="0">
+              <a:solidFill>
+                <a:prstClr val="black">
+                  <a:hueOff val="0"/>
+                  <a:satOff val="0"/>
+                  <a:lumOff val="0"/>
+                  <a:alphaOff val="0"/>
+                </a:prstClr>
+              </a:solidFill>
+              <a:latin typeface="+mn-lt"/>
+              <a:ea typeface="+mn-ea"/>
+              <a:cs typeface="+mn-cs"/>
+            </a:rPr>
+            <a:t>eature Selection</a:t>
+          </a:r>
+          <a:endParaRPr lang="en-GB" sz="1500" kern="1200" dirty="0"/>
+        </a:p>
+      </dgm:t>
+    </dgm:pt>
+    <dgm:pt modelId="{5C5DC730-FA8C-4D96-A6DA-BD93B211AFCD}" type="parTrans" cxnId="{475CEFC9-32E9-401E-815B-DB5B027BFC8C}">
+      <dgm:prSet/>
+      <dgm:spPr/>
+    </dgm:pt>
+    <dgm:pt modelId="{C1E814EC-51D1-40E5-A36C-D12E45272CF5}" type="sibTrans" cxnId="{475CEFC9-32E9-401E-815B-DB5B027BFC8C}">
+      <dgm:prSet/>
+      <dgm:spPr/>
+    </dgm:pt>
     <dgm:pt modelId="{8C50726C-E90C-4FFA-B6A0-2ED37CF63F64}" type="pres">
       <dgm:prSet presAssocID="{F0F13D87-64B0-41AD-8624-57471FE85796}" presName="Name0" presStyleCnt="0">
         <dgm:presLayoutVars>
@@ -4569,9 +4563,9 @@
   <dgm:cxnLst>
     <dgm:cxn modelId="{14E21D00-452E-4C18-9C41-7960E487344B}" type="presOf" srcId="{F0F13D87-64B0-41AD-8624-57471FE85796}" destId="{8C50726C-E90C-4FFA-B6A0-2ED37CF63F64}" srcOrd="0" destOrd="0" presId="urn:microsoft.com/office/officeart/2005/8/layout/vList5"/>
     <dgm:cxn modelId="{12FE6C09-00C6-4A02-B542-575FE8B0B255}" srcId="{F0F13D87-64B0-41AD-8624-57471FE85796}" destId="{2F2A67E8-ACD9-4C73-881C-0F727D32AE95}" srcOrd="0" destOrd="0" parTransId="{A275FB55-100D-41BA-A526-40603876FD22}" sibTransId="{7C0B296B-2A0D-4999-A0C4-2B03AA5E5374}"/>
-    <dgm:cxn modelId="{C592271D-9C26-45B6-ADE6-4E2B7EAB6B11}" type="presOf" srcId="{B40F690E-7942-44A2-930D-D36AA7BEC538}" destId="{4E062ED7-C8B7-4731-A7F1-BE128EC98711}" srcOrd="0" destOrd="10" presId="urn:microsoft.com/office/officeart/2005/8/layout/vList5"/>
     <dgm:cxn modelId="{C00F8421-F747-485C-B1B5-20EB97E9EFA4}" srcId="{8B6C3B02-9B97-4461-849D-8C27B7EC535B}" destId="{2F7A7128-86C4-4AA6-BDD2-C0F06335F019}" srcOrd="7" destOrd="0" parTransId="{D99736A6-12EE-4BAE-87C7-CBC8D7CA2323}" sibTransId="{80D44254-ED36-4ABC-9111-50A9B5934201}"/>
     <dgm:cxn modelId="{EE732523-ACD9-4AD5-A411-721BE0F6D66C}" type="presOf" srcId="{A721B64A-F78D-438C-BD03-ED79A0A4204A}" destId="{4E062ED7-C8B7-4731-A7F1-BE128EC98711}" srcOrd="0" destOrd="5" presId="urn:microsoft.com/office/officeart/2005/8/layout/vList5"/>
+    <dgm:cxn modelId="{74145A35-0AE2-4306-952B-41C0845ACFFA}" type="presOf" srcId="{7B69C202-376B-402A-BE67-3CEC0D34B221}" destId="{4E062ED7-C8B7-4731-A7F1-BE128EC98711}" srcOrd="0" destOrd="11" presId="urn:microsoft.com/office/officeart/2005/8/layout/vList5"/>
     <dgm:cxn modelId="{C69CD839-54E2-4FB0-AE27-35B575282CE0}" type="presOf" srcId="{26DA9842-ADC7-46F7-9EE2-32CF7183EBB1}" destId="{4E062ED7-C8B7-4731-A7F1-BE128EC98711}" srcOrd="0" destOrd="8" presId="urn:microsoft.com/office/officeart/2005/8/layout/vList5"/>
     <dgm:cxn modelId="{02B59940-76D4-44CD-B093-5E255D8B8128}" srcId="{F0F13D87-64B0-41AD-8624-57471FE85796}" destId="{8B6C3B02-9B97-4461-849D-8C27B7EC535B}" srcOrd="1" destOrd="0" parTransId="{50481D48-BE32-402B-B97D-BE0B16A178F3}" sibTransId="{0362A28F-AA87-4D8E-9250-A7830272AD07}"/>
     <dgm:cxn modelId="{2115EB43-AED9-4C7C-93CF-B85E01E16247}" srcId="{2F2A67E8-ACD9-4C73-881C-0F727D32AE95}" destId="{6685804A-377E-4143-859E-8D132C381ECF}" srcOrd="2" destOrd="0" parTransId="{F5C6F6E8-45D3-4854-8B35-3294023BC47D}" sibTransId="{BF8EC071-F2DF-44DA-A21B-1A8CE3A4C61B}"/>
@@ -4585,21 +4579,21 @@
     <dgm:cxn modelId="{D4512F7A-70D2-4B0C-9F02-428A14F88DAB}" type="presOf" srcId="{3CF2DE67-AA0D-447F-AC31-130CB5E04C56}" destId="{EFC1B403-9E6E-4411-9B69-79A1584C7937}" srcOrd="0" destOrd="1" presId="urn:microsoft.com/office/officeart/2005/8/layout/vList5"/>
     <dgm:cxn modelId="{E2A17C7E-3D95-41AA-9F9F-74B88C49C7E8}" srcId="{8B6C3B02-9B97-4461-849D-8C27B7EC535B}" destId="{C80325A7-6A8F-44B1-B610-6BEE0FD37FF7}" srcOrd="0" destOrd="0" parTransId="{08452F9F-4BD9-4B0C-B864-3DD8DC2A2AEE}" sibTransId="{336CBB3D-D79F-42E7-9597-B23C06F58606}"/>
     <dgm:cxn modelId="{E93DC782-50DD-4B43-A967-4FD2741569FB}" srcId="{8B6C3B02-9B97-4461-849D-8C27B7EC535B}" destId="{798C2C10-662F-4E75-A5B5-D79146484269}" srcOrd="2" destOrd="0" parTransId="{763728CA-2134-4677-A743-846554DEF5FC}" sibTransId="{062818EF-31D5-4693-AAFD-92006D82850B}"/>
-    <dgm:cxn modelId="{76626F88-35A2-4265-9103-3E3162D5BB2A}" srcId="{8B6C3B02-9B97-4461-849D-8C27B7EC535B}" destId="{0A08F9B5-78CA-4B05-B1C4-3862CF8C5E43}" srcOrd="11" destOrd="0" parTransId="{4F297EE7-D4A0-4B30-BAB1-0C70ADEB5254}" sibTransId="{C02A50F2-FEA2-46A7-B375-F6405E67E575}"/>
+    <dgm:cxn modelId="{76626F88-35A2-4265-9103-3E3162D5BB2A}" srcId="{8B6C3B02-9B97-4461-849D-8C27B7EC535B}" destId="{0A08F9B5-78CA-4B05-B1C4-3862CF8C5E43}" srcOrd="10" destOrd="0" parTransId="{4F297EE7-D4A0-4B30-BAB1-0C70ADEB5254}" sibTransId="{C02A50F2-FEA2-46A7-B375-F6405E67E575}"/>
     <dgm:cxn modelId="{6C6FC389-867B-4E86-A3B1-05298DAC166B}" type="presOf" srcId="{798C2C10-662F-4E75-A5B5-D79146484269}" destId="{4E062ED7-C8B7-4731-A7F1-BE128EC98711}" srcOrd="0" destOrd="2" presId="urn:microsoft.com/office/officeart/2005/8/layout/vList5"/>
     <dgm:cxn modelId="{FA4D4F92-1F0C-4ADA-B59C-2DE097BC5208}" srcId="{8B6C3B02-9B97-4461-849D-8C27B7EC535B}" destId="{736A7D57-B0F2-4BAB-B205-1C2C3B99A6A3}" srcOrd="9" destOrd="0" parTransId="{8713C7AD-357C-4BD1-A70D-C92712260DA4}" sibTransId="{F6AFAD1D-E444-452A-9CDB-622B62E1A36A}"/>
-    <dgm:cxn modelId="{56A31696-3ED1-488E-94ED-2E6614BF29AB}" srcId="{8B6C3B02-9B97-4461-849D-8C27B7EC535B}" destId="{B40F690E-7942-44A2-930D-D36AA7BEC538}" srcOrd="10" destOrd="0" parTransId="{6F4CF985-3CD5-4A08-A5A3-CC3BED67DC1F}" sibTransId="{92B4B542-8697-4062-8D0A-E47B00ECD62D}"/>
     <dgm:cxn modelId="{BFB34CAA-4FCC-4519-A43A-F733455A217C}" srcId="{8B6C3B02-9B97-4461-849D-8C27B7EC535B}" destId="{B89C6407-2BE2-4480-B463-96750AC78FFE}" srcOrd="1" destOrd="0" parTransId="{67F4B6E3-C4CE-4236-BD5B-9D5CFC58F985}" sibTransId="{25E06677-B8A3-440C-80A8-254EF34CE9DE}"/>
     <dgm:cxn modelId="{D2E888B8-6F96-4038-A5BB-B685E8DB8386}" srcId="{8B6C3B02-9B97-4461-849D-8C27B7EC535B}" destId="{26DA9842-ADC7-46F7-9EE2-32CF7183EBB1}" srcOrd="8" destOrd="0" parTransId="{0C85E99A-CEB6-449F-B829-A56B3491545C}" sibTransId="{5E2DCDC2-3C52-4A98-979C-DFEDC2223258}"/>
     <dgm:cxn modelId="{81F09BB9-F0A8-4D26-9C8C-78D3DDFF58E4}" srcId="{8B6C3B02-9B97-4461-849D-8C27B7EC535B}" destId="{4A8BA3F3-42C0-41EA-917D-9DDF709CADEA}" srcOrd="6" destOrd="0" parTransId="{1E327B02-6FCB-40C3-BF05-CDA992C2D02D}" sibTransId="{E09862E0-6EE9-45CD-BBC4-0365F337E1F9}"/>
     <dgm:cxn modelId="{483BF8C4-DBC4-4E2A-B0F4-02F0FF1B5C8E}" type="presOf" srcId="{4A8BA3F3-42C0-41EA-917D-9DDF709CADEA}" destId="{4E062ED7-C8B7-4731-A7F1-BE128EC98711}" srcOrd="0" destOrd="6" presId="urn:microsoft.com/office/officeart/2005/8/layout/vList5"/>
+    <dgm:cxn modelId="{475CEFC9-32E9-401E-815B-DB5B027BFC8C}" srcId="{8B6C3B02-9B97-4461-849D-8C27B7EC535B}" destId="{7B69C202-376B-402A-BE67-3CEC0D34B221}" srcOrd="11" destOrd="0" parTransId="{5C5DC730-FA8C-4D96-A6DA-BD93B211AFCD}" sibTransId="{C1E814EC-51D1-40E5-A36C-D12E45272CF5}"/>
     <dgm:cxn modelId="{420B62D3-FE4F-40A0-B131-C8DF3D0C141F}" srcId="{8B6C3B02-9B97-4461-849D-8C27B7EC535B}" destId="{12639EF0-BB1A-4373-80A6-973906E4B20F}" srcOrd="3" destOrd="0" parTransId="{34C1F691-A67B-43DA-AE71-CA2D5125F70E}" sibTransId="{39822BD4-F533-401C-B29B-EA82A20EF2F0}"/>
     <dgm:cxn modelId="{961737D5-6121-4BE4-BB5F-0CD5CF455CFF}" type="presOf" srcId="{7276CFAD-4AB0-4615-B7B2-34C290675CFD}" destId="{4E062ED7-C8B7-4731-A7F1-BE128EC98711}" srcOrd="0" destOrd="4" presId="urn:microsoft.com/office/officeart/2005/8/layout/vList5"/>
     <dgm:cxn modelId="{F99DEAD6-D354-4C2E-A912-E72BD9E0D9A7}" srcId="{8B6C3B02-9B97-4461-849D-8C27B7EC535B}" destId="{7276CFAD-4AB0-4615-B7B2-34C290675CFD}" srcOrd="4" destOrd="0" parTransId="{0D8CAB63-48AE-4EBF-A04A-A0513444996E}" sibTransId="{2F1A55C3-8659-48CC-8E22-711018F2B25A}"/>
     <dgm:cxn modelId="{FE6114DA-E6B4-465B-967B-43E233EA321A}" srcId="{2F2A67E8-ACD9-4C73-881C-0F727D32AE95}" destId="{35BB0A4F-EA77-413C-9E84-DEBFB93A1E88}" srcOrd="0" destOrd="0" parTransId="{D5ED6B98-9411-4F4F-8541-4763B0D1ABCB}" sibTransId="{68D557F7-03D8-49BF-88C8-BA7F7C13F7C3}"/>
     <dgm:cxn modelId="{9DDA48DA-3C17-4B15-861D-9FB9429F1310}" type="presOf" srcId="{12639EF0-BB1A-4373-80A6-973906E4B20F}" destId="{4E062ED7-C8B7-4731-A7F1-BE128EC98711}" srcOrd="0" destOrd="3" presId="urn:microsoft.com/office/officeart/2005/8/layout/vList5"/>
     <dgm:cxn modelId="{3CD1C0E7-01F4-4BE9-9ACB-DCCC1007E3E5}" type="presOf" srcId="{B89C6407-2BE2-4480-B463-96750AC78FFE}" destId="{4E062ED7-C8B7-4731-A7F1-BE128EC98711}" srcOrd="0" destOrd="1" presId="urn:microsoft.com/office/officeart/2005/8/layout/vList5"/>
-    <dgm:cxn modelId="{F67385E8-F86D-47CC-B9CA-87AC4AF1BF40}" type="presOf" srcId="{0A08F9B5-78CA-4B05-B1C4-3862CF8C5E43}" destId="{4E062ED7-C8B7-4731-A7F1-BE128EC98711}" srcOrd="0" destOrd="11" presId="urn:microsoft.com/office/officeart/2005/8/layout/vList5"/>
+    <dgm:cxn modelId="{F67385E8-F86D-47CC-B9CA-87AC4AF1BF40}" type="presOf" srcId="{0A08F9B5-78CA-4B05-B1C4-3862CF8C5E43}" destId="{4E062ED7-C8B7-4731-A7F1-BE128EC98711}" srcOrd="0" destOrd="10" presId="urn:microsoft.com/office/officeart/2005/8/layout/vList5"/>
     <dgm:cxn modelId="{E1987AED-FAC2-4A88-8949-016BDBE1E577}" type="presOf" srcId="{2F2A67E8-ACD9-4C73-881C-0F727D32AE95}" destId="{20EFAA17-3592-4F78-AEAE-2CD118F957A5}" srcOrd="0" destOrd="0" presId="urn:microsoft.com/office/officeart/2005/8/layout/vList5"/>
     <dgm:cxn modelId="{CB4329F8-377A-4878-B985-8CD9D1BDC248}" type="presOf" srcId="{2F7A7128-86C4-4AA6-BDD2-C0F06335F019}" destId="{4E062ED7-C8B7-4731-A7F1-BE128EC98711}" srcOrd="0" destOrd="7" presId="urn:microsoft.com/office/officeart/2005/8/layout/vList5"/>
     <dgm:cxn modelId="{0898E643-84BC-4444-98F5-10F22C018DA9}" type="presParOf" srcId="{8C50726C-E90C-4FFA-B6A0-2ED37CF63F64}" destId="{796ABD26-0390-4B39-A62D-E35ED7901557}" srcOrd="0" destOrd="0" presId="urn:microsoft.com/office/officeart/2005/8/layout/vList5"/>
@@ -6757,13 +6751,13 @@
             <a:t> , </a:t>
           </a:r>
           <a:r>
-            <a:rPr lang="en-GB" sz="1500" kern="1200" dirty="0">
+            <a:rPr lang="en-GB" sz="1500" u="sng" kern="1200" dirty="0">
               <a:sym typeface="Wingdings" panose="05000000000000000000" pitchFamily="2" charset="2"/>
             </a:rPr>
             <a:t>Heatmaps, VIF </a:t>
           </a:r>
           <a:r>
-            <a:rPr lang="en-GB" sz="1500" kern="1200" dirty="0"/>
+            <a:rPr lang="en-GB" sz="1500" u="sng" kern="1200" dirty="0"/>
             <a:t>≥10</a:t>
           </a:r>
         </a:p>
@@ -6852,44 +6846,6 @@
           </a:pPr>
           <a:r>
             <a:rPr lang="en-GB" sz="1500" kern="1200" dirty="0">
-              <a:latin typeface="+mn-lt"/>
-            </a:rPr>
-            <a:t>F</a:t>
-          </a:r>
-          <a:r>
-            <a:rPr lang="en-GB" sz="1500" kern="1200" dirty="0">
-              <a:solidFill>
-                <a:prstClr val="black">
-                  <a:hueOff val="0"/>
-                  <a:satOff val="0"/>
-                  <a:lumOff val="0"/>
-                  <a:alphaOff val="0"/>
-                </a:prstClr>
-              </a:solidFill>
-              <a:latin typeface="+mn-lt"/>
-              <a:ea typeface="+mn-ea"/>
-              <a:cs typeface="+mn-cs"/>
-            </a:rPr>
-            <a:t>eature Selection</a:t>
-          </a:r>
-          <a:endParaRPr lang="en-GB" sz="1500" kern="1200" dirty="0"/>
-        </a:p>
-        <a:p>
-          <a:pPr marL="114300" lvl="1" indent="0" algn="l" defTabSz="666750">
-            <a:lnSpc>
-              <a:spcPct val="90000"/>
-            </a:lnSpc>
-            <a:spcBef>
-              <a:spcPct val="0"/>
-            </a:spcBef>
-            <a:spcAft>
-              <a:spcPct val="15000"/>
-            </a:spcAft>
-            <a:buFont typeface="Wingdings" panose="05000000000000000000" pitchFamily="2" charset="2"/>
-            <a:buChar char="Ø"/>
-          </a:pPr>
-          <a:r>
-            <a:rPr lang="en-GB" sz="1500" kern="1200" dirty="0">
               <a:solidFill>
                 <a:prstClr val="black">
                   <a:hueOff val="0"/>
@@ -6936,6 +6892,44 @@
               <a:cs typeface="+mn-cs"/>
             </a:rPr>
             <a:t> Log scale</a:t>
+          </a:r>
+          <a:endParaRPr lang="en-GB" sz="1500" kern="1200" dirty="0"/>
+        </a:p>
+        <a:p>
+          <a:pPr marL="114300" lvl="1" indent="0" algn="l" defTabSz="666750">
+            <a:lnSpc>
+              <a:spcPct val="90000"/>
+            </a:lnSpc>
+            <a:spcBef>
+              <a:spcPct val="0"/>
+            </a:spcBef>
+            <a:spcAft>
+              <a:spcPct val="15000"/>
+            </a:spcAft>
+            <a:buFont typeface="Wingdings" panose="05000000000000000000" pitchFamily="2" charset="2"/>
+            <a:buChar char="Ø"/>
+          </a:pPr>
+          <a:r>
+            <a:rPr lang="en-GB" sz="1500" kern="1200" dirty="0">
+              <a:latin typeface="+mn-lt"/>
+            </a:rPr>
+            <a:t>F</a:t>
+          </a:r>
+          <a:r>
+            <a:rPr lang="en-GB" sz="1500" kern="1200" dirty="0">
+              <a:solidFill>
+                <a:prstClr val="black">
+                  <a:hueOff val="0"/>
+                  <a:satOff val="0"/>
+                  <a:lumOff val="0"/>
+                  <a:alphaOff val="0"/>
+                </a:prstClr>
+              </a:solidFill>
+              <a:latin typeface="+mn-lt"/>
+              <a:ea typeface="+mn-ea"/>
+              <a:cs typeface="+mn-cs"/>
+            </a:rPr>
+            <a:t>eature Selection</a:t>
           </a:r>
           <a:endParaRPr lang="en-GB" sz="1500" kern="1200" dirty="0"/>
         </a:p>
@@ -12152,7 +12146,7 @@
           <a:p>
             <a:fld id="{C1A9776D-B584-4D4B-981C-FA97E36C0636}" type="datetimeFigureOut">
               <a:rPr lang="en-GB" smtClean="0"/>
-              <a:t>15/01/2026</a:t>
+              <a:t>18/01/2026</a:t>
             </a:fld>
             <a:endParaRPr lang="en-GB"/>
           </a:p>
@@ -12352,7 +12346,7 @@
           <a:p>
             <a:fld id="{C1A9776D-B584-4D4B-981C-FA97E36C0636}" type="datetimeFigureOut">
               <a:rPr lang="en-GB" smtClean="0"/>
-              <a:t>15/01/2026</a:t>
+              <a:t>18/01/2026</a:t>
             </a:fld>
             <a:endParaRPr lang="en-GB"/>
           </a:p>
@@ -12562,7 +12556,7 @@
           <a:p>
             <a:fld id="{C1A9776D-B584-4D4B-981C-FA97E36C0636}" type="datetimeFigureOut">
               <a:rPr lang="en-GB" smtClean="0"/>
-              <a:t>15/01/2026</a:t>
+              <a:t>18/01/2026</a:t>
             </a:fld>
             <a:endParaRPr lang="en-GB"/>
           </a:p>
@@ -12762,7 +12756,7 @@
           <a:p>
             <a:fld id="{C1A9776D-B584-4D4B-981C-FA97E36C0636}" type="datetimeFigureOut">
               <a:rPr lang="en-GB" smtClean="0"/>
-              <a:t>15/01/2026</a:t>
+              <a:t>18/01/2026</a:t>
             </a:fld>
             <a:endParaRPr lang="en-GB"/>
           </a:p>
@@ -13038,7 +13032,7 @@
           <a:p>
             <a:fld id="{C1A9776D-B584-4D4B-981C-FA97E36C0636}" type="datetimeFigureOut">
               <a:rPr lang="en-GB" smtClean="0"/>
-              <a:t>15/01/2026</a:t>
+              <a:t>18/01/2026</a:t>
             </a:fld>
             <a:endParaRPr lang="en-GB"/>
           </a:p>
@@ -13306,7 +13300,7 @@
           <a:p>
             <a:fld id="{C1A9776D-B584-4D4B-981C-FA97E36C0636}" type="datetimeFigureOut">
               <a:rPr lang="en-GB" smtClean="0"/>
-              <a:t>15/01/2026</a:t>
+              <a:t>18/01/2026</a:t>
             </a:fld>
             <a:endParaRPr lang="en-GB"/>
           </a:p>
@@ -13721,7 +13715,7 @@
           <a:p>
             <a:fld id="{C1A9776D-B584-4D4B-981C-FA97E36C0636}" type="datetimeFigureOut">
               <a:rPr lang="en-GB" smtClean="0"/>
-              <a:t>15/01/2026</a:t>
+              <a:t>18/01/2026</a:t>
             </a:fld>
             <a:endParaRPr lang="en-GB"/>
           </a:p>
@@ -13863,7 +13857,7 @@
           <a:p>
             <a:fld id="{C1A9776D-B584-4D4B-981C-FA97E36C0636}" type="datetimeFigureOut">
               <a:rPr lang="en-GB" smtClean="0"/>
-              <a:t>15/01/2026</a:t>
+              <a:t>18/01/2026</a:t>
             </a:fld>
             <a:endParaRPr lang="en-GB"/>
           </a:p>
@@ -13976,7 +13970,7 @@
           <a:p>
             <a:fld id="{C1A9776D-B584-4D4B-981C-FA97E36C0636}" type="datetimeFigureOut">
               <a:rPr lang="en-GB" smtClean="0"/>
-              <a:t>15/01/2026</a:t>
+              <a:t>18/01/2026</a:t>
             </a:fld>
             <a:endParaRPr lang="en-GB"/>
           </a:p>
@@ -14289,7 +14283,7 @@
           <a:p>
             <a:fld id="{C1A9776D-B584-4D4B-981C-FA97E36C0636}" type="datetimeFigureOut">
               <a:rPr lang="en-GB" smtClean="0"/>
-              <a:t>15/01/2026</a:t>
+              <a:t>18/01/2026</a:t>
             </a:fld>
             <a:endParaRPr lang="en-GB"/>
           </a:p>
@@ -14578,7 +14572,7 @@
           <a:p>
             <a:fld id="{C1A9776D-B584-4D4B-981C-FA97E36C0636}" type="datetimeFigureOut">
               <a:rPr lang="en-GB" smtClean="0"/>
-              <a:t>15/01/2026</a:t>
+              <a:t>18/01/2026</a:t>
             </a:fld>
             <a:endParaRPr lang="en-GB"/>
           </a:p>
@@ -14834,7 +14828,7 @@
           <a:p>
             <a:fld id="{C1A9776D-B584-4D4B-981C-FA97E36C0636}" type="datetimeFigureOut">
               <a:rPr lang="en-GB" smtClean="0"/>
-              <a:t>15/01/2026</a:t>
+              <a:t>18/01/2026</a:t>
             </a:fld>
             <a:endParaRPr lang="en-GB"/>
           </a:p>
@@ -15404,7 +15398,7 @@
             <p:ph sz="half" idx="1"/>
             <p:extLst>
               <p:ext uri="{D42A27DB-BD31-4B8C-83A1-F6EECF244321}">
-                <p14:modId xmlns:p14="http://schemas.microsoft.com/office/powerpoint/2010/main" val="298608188"/>
+                <p14:modId xmlns:p14="http://schemas.microsoft.com/office/powerpoint/2010/main" val="489701670"/>
               </p:ext>
             </p:extLst>
           </p:nvPr>
@@ -15435,7 +15429,7 @@
             <p:ph sz="half" idx="2"/>
             <p:extLst>
               <p:ext uri="{D42A27DB-BD31-4B8C-83A1-F6EECF244321}">
-                <p14:modId xmlns:p14="http://schemas.microsoft.com/office/powerpoint/2010/main" val="1644039606"/>
+                <p14:modId xmlns:p14="http://schemas.microsoft.com/office/powerpoint/2010/main" val="3076705623"/>
               </p:ext>
             </p:extLst>
           </p:nvPr>
@@ -18074,7 +18068,7 @@
             <a:pPr lvl="1"/>
             <a:r>
               <a:rPr lang="en-US" sz="1800" dirty="0"/>
-              <a:t>Faster - Large – Unbalanced Datasets</a:t>
+              <a:t>Faster - Large – Imbalanced Datasets</a:t>
             </a:r>
           </a:p>
           <a:p>
@@ -20255,6 +20249,21 @@
             </a:r>
           </a:p>
           <a:p>
+            <a:pPr marL="342900" indent="-342900">
+              <a:buFont typeface="Arial" panose="020B0604020202020204" pitchFamily="34" charset="0"/>
+              <a:buChar char="•"/>
+              <a:defRPr/>
+            </a:pPr>
+            <a:r>
+              <a:rPr lang="en-US" sz="1400" dirty="0">
+                <a:solidFill>
+                  <a:prstClr val="black"/>
+                </a:solidFill>
+              </a:rPr>
+              <a:t>After drug approval - Cost Estimation</a:t>
+            </a:r>
+          </a:p>
+          <a:p>
             <a:pPr marL="342900" lvl="0" indent="-342900">
               <a:buFont typeface="Arial" panose="020B0604020202020204" pitchFamily="34" charset="0"/>
               <a:buChar char="•"/>
@@ -20283,26 +20292,6 @@
               </a:rPr>
               <a:t>Differences in dose-efficiency in population</a:t>
             </a:r>
-          </a:p>
-          <a:p>
-            <a:pPr marL="342900" lvl="0" indent="-342900">
-              <a:buFont typeface="Arial" panose="020B0604020202020204" pitchFamily="34" charset="0"/>
-              <a:buChar char="•"/>
-              <a:defRPr/>
-            </a:pPr>
-            <a:r>
-              <a:rPr lang="en-US" sz="1400" dirty="0">
-                <a:solidFill>
-                  <a:prstClr val="black"/>
-                </a:solidFill>
-              </a:rPr>
-              <a:t>After drug approval - Cost Estimation</a:t>
-            </a:r>
-            <a:endParaRPr lang="en-GB" sz="1400" dirty="0">
-              <a:solidFill>
-                <a:prstClr val="black"/>
-              </a:solidFill>
-            </a:endParaRPr>
           </a:p>
         </p:txBody>
       </p:sp>
@@ -21433,7 +21422,11 @@
                   <a:schemeClr val="accent5"/>
                 </a:solidFill>
               </a:rPr>
-              <a:t>–</a:t>
+              <a:t>–  </a:t>
+            </a:r>
+            <a:r>
+              <a:rPr lang="en-US" dirty="0"/>
+              <a:t>: Opposite sign</a:t>
             </a:r>
           </a:p>
           <a:p>
@@ -21849,7 +21842,7 @@
             <a:pPr algn="ctr"/>
             <a:r>
               <a:rPr lang="en-GB" sz="3200" b="1" dirty="0"/>
-              <a:t>Termination Descriptives (db)</a:t>
+              <a:t>Termination &amp; Withdrawn Descriptives</a:t>
             </a:r>
           </a:p>
         </p:txBody>
@@ -22779,6 +22772,13 @@
             <a:r>
               <a:rPr lang="en-US" sz="2000" dirty="0"/>
               <a:t>eparately | Combined</a:t>
+            </a:r>
+          </a:p>
+          <a:p>
+            <a:pPr lvl="1"/>
+            <a:r>
+              <a:rPr lang="en-US" sz="2000" dirty="0"/>
+              <a:t>Phases: 1|2, 2|3</a:t>
             </a:r>
           </a:p>
           <a:p>

--- a/Thesis_Presentation.pptx
+++ b/Thesis_Presentation.pptx
@@ -181,546 +181,27 @@
 </p:presentation>
 </file>
 
-<file path=ppt/revisionInfo.xml><?xml version="1.0" encoding="utf-8"?>
-<p1510:revInfo xmlns:a="http://schemas.openxmlformats.org/drawingml/2006/main" xmlns:r="http://schemas.openxmlformats.org/officeDocument/2006/relationships" xmlns:p1510="http://schemas.microsoft.com/office/powerpoint/2015/10/main">
-  <p1510:revLst>
-    <p1510:client id="{6F7D2D08-A2CD-4302-88FB-740D1140D192}" v="1782" dt="2026-01-18T22:04:53.473"/>
-  </p1510:revLst>
-</p1510:revInfo>
-</file>
-
 <file path=ppt/changesInfos/changesInfo1.xml><?xml version="1.0" encoding="utf-8"?>
 <pc:chgInfo xmlns:a="http://schemas.openxmlformats.org/drawingml/2006/main" xmlns:r="http://schemas.openxmlformats.org/officeDocument/2006/relationships" xmlns:ac="http://schemas.microsoft.com/office/drawing/2013/main/command" xmlns:pc="http://schemas.microsoft.com/office/powerpoint/2013/main/command">
   <pc:docChgLst>
     <pc:chgData name="Evgenia Andreou" userId="8e89e74f621e7047" providerId="LiveId" clId="{EF53017E-E624-4052-9F70-6403551E244D}"/>
     <pc:docChg chg="undo redo custSel addSld delSld modSld sldOrd modMainMaster addSection delSection modSection">
-      <pc:chgData name="Evgenia Andreou" userId="8e89e74f621e7047" providerId="LiveId" clId="{EF53017E-E624-4052-9F70-6403551E244D}" dt="2026-01-18T22:04:53.471" v="42578" actId="115"/>
+      <pc:chgData name="Evgenia Andreou" userId="8e89e74f621e7047" providerId="LiveId" clId="{EF53017E-E624-4052-9F70-6403551E244D}" dt="2026-02-18T15:19:20.473" v="42583" actId="20577"/>
       <pc:docMkLst>
         <pc:docMk/>
       </pc:docMkLst>
       <pc:sldChg chg="modSp mod">
-        <pc:chgData name="Evgenia Andreou" userId="8e89e74f621e7047" providerId="LiveId" clId="{EF53017E-E624-4052-9F70-6403551E244D}" dt="2026-01-09T02:02:16.438" v="42374" actId="20577"/>
+        <pc:chgData name="Evgenia Andreou" userId="8e89e74f621e7047" providerId="LiveId" clId="{EF53017E-E624-4052-9F70-6403551E244D}" dt="2026-02-18T15:19:20.473" v="42583" actId="20577"/>
         <pc:sldMkLst>
           <pc:docMk/>
           <pc:sldMk cId="568867521" sldId="257"/>
         </pc:sldMkLst>
         <pc:spChg chg="mod">
-          <ac:chgData name="Evgenia Andreou" userId="8e89e74f621e7047" providerId="LiveId" clId="{EF53017E-E624-4052-9F70-6403551E244D}" dt="2026-01-09T02:02:16.438" v="42374" actId="20577"/>
+          <ac:chgData name="Evgenia Andreou" userId="8e89e74f621e7047" providerId="LiveId" clId="{EF53017E-E624-4052-9F70-6403551E244D}" dt="2026-02-18T15:19:20.473" v="42583" actId="20577"/>
           <ac:spMkLst>
             <pc:docMk/>
             <pc:sldMk cId="568867521" sldId="257"/>
-            <ac:spMk id="3" creationId="{09FB8F2E-C1EA-0356-22BA-7189EA91775F}"/>
-          </ac:spMkLst>
-        </pc:spChg>
-      </pc:sldChg>
-      <pc:sldChg chg="modSp mod">
-        <pc:chgData name="Evgenia Andreou" userId="8e89e74f621e7047" providerId="LiveId" clId="{EF53017E-E624-4052-9F70-6403551E244D}" dt="2026-01-06T00:43:07.874" v="42219" actId="20577"/>
-        <pc:sldMkLst>
-          <pc:docMk/>
-          <pc:sldMk cId="3253723412" sldId="260"/>
-        </pc:sldMkLst>
-        <pc:spChg chg="mod">
-          <ac:chgData name="Evgenia Andreou" userId="8e89e74f621e7047" providerId="LiveId" clId="{EF53017E-E624-4052-9F70-6403551E244D}" dt="2026-01-06T00:43:07.874" v="42219" actId="20577"/>
-          <ac:spMkLst>
-            <pc:docMk/>
-            <pc:sldMk cId="3253723412" sldId="260"/>
-            <ac:spMk id="5" creationId="{E7DEE60B-D404-7827-DCD6-007CA5735B35}"/>
-          </ac:spMkLst>
-        </pc:spChg>
-        <pc:spChg chg="mod">
-          <ac:chgData name="Evgenia Andreou" userId="8e89e74f621e7047" providerId="LiveId" clId="{EF53017E-E624-4052-9F70-6403551E244D}" dt="2026-01-05T14:30:06.900" v="41600" actId="6549"/>
-          <ac:spMkLst>
-            <pc:docMk/>
-            <pc:sldMk cId="3253723412" sldId="260"/>
-            <ac:spMk id="7" creationId="{CDDFCFBD-9E04-ECFB-B1C3-F69CFF2F9ACF}"/>
-          </ac:spMkLst>
-        </pc:spChg>
-      </pc:sldChg>
-      <pc:sldChg chg="addSp delSp modSp mod ord">
-        <pc:chgData name="Evgenia Andreou" userId="8e89e74f621e7047" providerId="LiveId" clId="{EF53017E-E624-4052-9F70-6403551E244D}" dt="2026-01-18T19:39:20.174" v="42540" actId="20577"/>
-        <pc:sldMkLst>
-          <pc:docMk/>
-          <pc:sldMk cId="379656155" sldId="263"/>
-        </pc:sldMkLst>
-        <pc:spChg chg="add del mod">
-          <ac:chgData name="Evgenia Andreou" userId="8e89e74f621e7047" providerId="LiveId" clId="{EF53017E-E624-4052-9F70-6403551E244D}" dt="2026-01-05T14:44:00.199" v="41685" actId="1076"/>
-          <ac:spMkLst>
-            <pc:docMk/>
-            <pc:sldMk cId="379656155" sldId="263"/>
-            <ac:spMk id="2" creationId="{608B01A7-91F3-6875-4CD6-3BD2CA6131EB}"/>
-          </ac:spMkLst>
-        </pc:spChg>
-        <pc:spChg chg="mod">
-          <ac:chgData name="Evgenia Andreou" userId="8e89e74f621e7047" providerId="LiveId" clId="{EF53017E-E624-4052-9F70-6403551E244D}" dt="2026-01-18T19:39:20.174" v="42540" actId="20577"/>
-          <ac:spMkLst>
-            <pc:docMk/>
-            <pc:sldMk cId="379656155" sldId="263"/>
-            <ac:spMk id="3" creationId="{79AA6C9D-2E20-3FDC-E624-B09367AC8F9F}"/>
-          </ac:spMkLst>
-        </pc:spChg>
-        <pc:spChg chg="add mod">
-          <ac:chgData name="Evgenia Andreou" userId="8e89e74f621e7047" providerId="LiveId" clId="{EF53017E-E624-4052-9F70-6403551E244D}" dt="2026-01-05T14:43:56.068" v="41684" actId="1036"/>
-          <ac:spMkLst>
-            <pc:docMk/>
-            <pc:sldMk cId="379656155" sldId="263"/>
-            <ac:spMk id="4" creationId="{450E4AEB-EFCC-184B-E286-4074CCA76B6D}"/>
-          </ac:spMkLst>
-        </pc:spChg>
-        <pc:spChg chg="mod">
-          <ac:chgData name="Evgenia Andreou" userId="8e89e74f621e7047" providerId="LiveId" clId="{EF53017E-E624-4052-9F70-6403551E244D}" dt="2026-01-05T14:43:56.068" v="41684" actId="1036"/>
-          <ac:spMkLst>
-            <pc:docMk/>
-            <pc:sldMk cId="379656155" sldId="263"/>
-            <ac:spMk id="7" creationId="{7379714B-1FF3-323E-6749-EA95E8C454BF}"/>
-          </ac:spMkLst>
-        </pc:spChg>
-        <pc:picChg chg="mod">
-          <ac:chgData name="Evgenia Andreou" userId="8e89e74f621e7047" providerId="LiveId" clId="{EF53017E-E624-4052-9F70-6403551E244D}" dt="2026-01-05T14:43:56.068" v="41684" actId="1036"/>
-          <ac:picMkLst>
-            <pc:docMk/>
-            <pc:sldMk cId="379656155" sldId="263"/>
-            <ac:picMk id="6" creationId="{8EC81A22-9F3E-3963-5EB9-300275B01289}"/>
-          </ac:picMkLst>
-        </pc:picChg>
-      </pc:sldChg>
-      <pc:sldChg chg="delSp modSp mod modShow">
-        <pc:chgData name="Evgenia Andreou" userId="8e89e74f621e7047" providerId="LiveId" clId="{EF53017E-E624-4052-9F70-6403551E244D}" dt="2026-01-05T15:28:32.942" v="42034" actId="729"/>
-        <pc:sldMkLst>
-          <pc:docMk/>
-          <pc:sldMk cId="493610102" sldId="264"/>
-        </pc:sldMkLst>
-        <pc:spChg chg="mod">
-          <ac:chgData name="Evgenia Andreou" userId="8e89e74f621e7047" providerId="LiveId" clId="{EF53017E-E624-4052-9F70-6403551E244D}" dt="2026-01-05T14:55:29.115" v="41788" actId="20577"/>
-          <ac:spMkLst>
-            <pc:docMk/>
-            <pc:sldMk cId="493610102" sldId="264"/>
-            <ac:spMk id="2" creationId="{86DB2BA2-C66A-5EC1-F184-C2C46DC0A30F}"/>
-          </ac:spMkLst>
-        </pc:spChg>
-        <pc:spChg chg="mod">
-          <ac:chgData name="Evgenia Andreou" userId="8e89e74f621e7047" providerId="LiveId" clId="{EF53017E-E624-4052-9F70-6403551E244D}" dt="2026-01-05T14:54:22.685" v="41730" actId="20577"/>
-          <ac:spMkLst>
-            <pc:docMk/>
-            <pc:sldMk cId="493610102" sldId="264"/>
-            <ac:spMk id="6" creationId="{281D5DE3-2913-0700-B818-661824D303F3}"/>
-          </ac:spMkLst>
-        </pc:spChg>
-        <pc:spChg chg="mod">
-          <ac:chgData name="Evgenia Andreou" userId="8e89e74f621e7047" providerId="LiveId" clId="{EF53017E-E624-4052-9F70-6403551E244D}" dt="2026-01-05T15:05:36.958" v="41891"/>
-          <ac:spMkLst>
-            <pc:docMk/>
-            <pc:sldMk cId="493610102" sldId="264"/>
-            <ac:spMk id="7" creationId="{0871E4C9-769D-7B7A-AAF4-AA60C90D5ABE}"/>
-          </ac:spMkLst>
-        </pc:spChg>
-      </pc:sldChg>
-      <pc:sldChg chg="modSp mod">
-        <pc:chgData name="Evgenia Andreou" userId="8e89e74f621e7047" providerId="LiveId" clId="{EF53017E-E624-4052-9F70-6403551E244D}" dt="2026-01-18T22:04:53.471" v="42578" actId="115"/>
-        <pc:sldMkLst>
-          <pc:docMk/>
-          <pc:sldMk cId="1969514135" sldId="266"/>
-        </pc:sldMkLst>
-        <pc:spChg chg="mod">
-          <ac:chgData name="Evgenia Andreou" userId="8e89e74f621e7047" providerId="LiveId" clId="{EF53017E-E624-4052-9F70-6403551E244D}" dt="2026-01-04T22:21:13.560" v="41220" actId="20577"/>
-          <ac:spMkLst>
-            <pc:docMk/>
-            <pc:sldMk cId="1969514135" sldId="266"/>
-            <ac:spMk id="42" creationId="{2DFEE1D9-3445-82AA-690D-F8B09B9501C3}"/>
-          </ac:spMkLst>
-        </pc:spChg>
-        <pc:graphicFrameChg chg="mod modGraphic">
-          <ac:chgData name="Evgenia Andreou" userId="8e89e74f621e7047" providerId="LiveId" clId="{EF53017E-E624-4052-9F70-6403551E244D}" dt="2026-01-18T22:04:53.471" v="42578" actId="115"/>
-          <ac:graphicFrameMkLst>
-            <pc:docMk/>
-            <pc:sldMk cId="1969514135" sldId="266"/>
-            <ac:graphicFrameMk id="9" creationId="{573E6068-02CB-5172-F662-3212E8C1CE9F}"/>
-          </ac:graphicFrameMkLst>
-        </pc:graphicFrameChg>
-        <pc:graphicFrameChg chg="modGraphic">
-          <ac:chgData name="Evgenia Andreou" userId="8e89e74f621e7047" providerId="LiveId" clId="{EF53017E-E624-4052-9F70-6403551E244D}" dt="2026-01-18T20:09:48.600" v="42551" actId="20577"/>
-          <ac:graphicFrameMkLst>
-            <pc:docMk/>
-            <pc:sldMk cId="1969514135" sldId="266"/>
-            <ac:graphicFrameMk id="20" creationId="{97A848B3-A454-77E9-2411-EE831EF40542}"/>
-          </ac:graphicFrameMkLst>
-        </pc:graphicFrameChg>
-      </pc:sldChg>
-      <pc:sldChg chg="addSp delSp modSp mod">
-        <pc:chgData name="Evgenia Andreou" userId="8e89e74f621e7047" providerId="LiveId" clId="{EF53017E-E624-4052-9F70-6403551E244D}" dt="2026-01-18T18:43:00.154" v="42513" actId="20577"/>
-        <pc:sldMkLst>
-          <pc:docMk/>
-          <pc:sldMk cId="4231469208" sldId="267"/>
-        </pc:sldMkLst>
-        <pc:spChg chg="mod">
-          <ac:chgData name="Evgenia Andreou" userId="8e89e74f621e7047" providerId="LiveId" clId="{EF53017E-E624-4052-9F70-6403551E244D}" dt="2026-01-11T23:19:29.283" v="42431" actId="1076"/>
-          <ac:spMkLst>
-            <pc:docMk/>
-            <pc:sldMk cId="4231469208" sldId="267"/>
-            <ac:spMk id="2" creationId="{158FA76F-2FAB-0554-AA54-F10AD8DB0CE6}"/>
-          </ac:spMkLst>
-        </pc:spChg>
-        <pc:spChg chg="mod">
-          <ac:chgData name="Evgenia Andreou" userId="8e89e74f621e7047" providerId="LiveId" clId="{EF53017E-E624-4052-9F70-6403551E244D}" dt="2026-01-18T18:43:00.154" v="42513" actId="20577"/>
-          <ac:spMkLst>
-            <pc:docMk/>
-            <pc:sldMk cId="4231469208" sldId="267"/>
-            <ac:spMk id="3" creationId="{8C8DAC97-AA0F-A07F-8A56-4E882F374D1B}"/>
-          </ac:spMkLst>
-        </pc:spChg>
-        <pc:spChg chg="mod">
-          <ac:chgData name="Evgenia Andreou" userId="8e89e74f621e7047" providerId="LiveId" clId="{EF53017E-E624-4052-9F70-6403551E244D}" dt="2026-01-11T23:19:39.641" v="42433" actId="1076"/>
-          <ac:spMkLst>
-            <pc:docMk/>
-            <pc:sldMk cId="4231469208" sldId="267"/>
-            <ac:spMk id="4" creationId="{C69DB7BB-6B63-9805-5112-B71254956724}"/>
-          </ac:spMkLst>
-        </pc:spChg>
-      </pc:sldChg>
-      <pc:sldChg chg="ord">
-        <pc:chgData name="Evgenia Andreou" userId="8e89e74f621e7047" providerId="LiveId" clId="{EF53017E-E624-4052-9F70-6403551E244D}" dt="2026-01-04T22:13:46.677" v="41136"/>
-        <pc:sldMkLst>
-          <pc:docMk/>
-          <pc:sldMk cId="2295317214" sldId="270"/>
-        </pc:sldMkLst>
-      </pc:sldChg>
-      <pc:sldChg chg="addSp delSp modSp mod">
-        <pc:chgData name="Evgenia Andreou" userId="8e89e74f621e7047" providerId="LiveId" clId="{EF53017E-E624-4052-9F70-6403551E244D}" dt="2026-01-18T19:27:42.228" v="42518" actId="20577"/>
-        <pc:sldMkLst>
-          <pc:docMk/>
-          <pc:sldMk cId="1839987358" sldId="276"/>
-        </pc:sldMkLst>
-        <pc:spChg chg="mod">
-          <ac:chgData name="Evgenia Andreou" userId="8e89e74f621e7047" providerId="LiveId" clId="{EF53017E-E624-4052-9F70-6403551E244D}" dt="2026-01-05T15:30:26.792" v="42052" actId="1035"/>
-          <ac:spMkLst>
-            <pc:docMk/>
-            <pc:sldMk cId="1839987358" sldId="276"/>
-            <ac:spMk id="2" creationId="{2266DF65-6188-8376-76BA-FBFCD6D58A83}"/>
-          </ac:spMkLst>
-        </pc:spChg>
-        <pc:spChg chg="add mod">
-          <ac:chgData name="Evgenia Andreou" userId="8e89e74f621e7047" providerId="LiveId" clId="{EF53017E-E624-4052-9F70-6403551E244D}" dt="2026-01-09T22:58:55.221" v="42392" actId="20577"/>
-          <ac:spMkLst>
-            <pc:docMk/>
-            <pc:sldMk cId="1839987358" sldId="276"/>
-            <ac:spMk id="6" creationId="{4157105E-7036-C9DB-AF3D-6B1F8BACAAB8}"/>
-          </ac:spMkLst>
-        </pc:spChg>
-        <pc:spChg chg="add mod">
-          <ac:chgData name="Evgenia Andreou" userId="8e89e74f621e7047" providerId="LiveId" clId="{EF53017E-E624-4052-9F70-6403551E244D}" dt="2026-01-09T23:00:10.657" v="42412" actId="20577"/>
-          <ac:spMkLst>
-            <pc:docMk/>
-            <pc:sldMk cId="1839987358" sldId="276"/>
-            <ac:spMk id="7" creationId="{B913CD2D-5BC6-5FE6-BAF8-EE6413BD5ECA}"/>
-          </ac:spMkLst>
-        </pc:spChg>
-        <pc:spChg chg="add mod">
-          <ac:chgData name="Evgenia Andreou" userId="8e89e74f621e7047" providerId="LiveId" clId="{EF53017E-E624-4052-9F70-6403551E244D}" dt="2026-01-05T15:30:26.792" v="42052" actId="1035"/>
-          <ac:spMkLst>
-            <pc:docMk/>
-            <pc:sldMk cId="1839987358" sldId="276"/>
-            <ac:spMk id="8" creationId="{79A98218-EA23-4A6D-9448-7DE23C28E4B4}"/>
-          </ac:spMkLst>
-        </pc:spChg>
-        <pc:spChg chg="add mod">
-          <ac:chgData name="Evgenia Andreou" userId="8e89e74f621e7047" providerId="LiveId" clId="{EF53017E-E624-4052-9F70-6403551E244D}" dt="2026-01-18T19:27:42.228" v="42518" actId="20577"/>
-          <ac:spMkLst>
-            <pc:docMk/>
-            <pc:sldMk cId="1839987358" sldId="276"/>
-            <ac:spMk id="9" creationId="{209E670E-5B45-0FA6-9975-323AFAF49A6A}"/>
-          </ac:spMkLst>
-        </pc:spChg>
-        <pc:grpChg chg="mod">
-          <ac:chgData name="Evgenia Andreou" userId="8e89e74f621e7047" providerId="LiveId" clId="{EF53017E-E624-4052-9F70-6403551E244D}" dt="2026-01-05T15:30:26.792" v="42052" actId="1035"/>
-          <ac:grpSpMkLst>
-            <pc:docMk/>
-            <pc:sldMk cId="1839987358" sldId="276"/>
-            <ac:grpSpMk id="26" creationId="{1C5C83E6-6CA1-EDD4-B08C-006113AE0A92}"/>
-          </ac:grpSpMkLst>
-        </pc:grpChg>
-        <pc:picChg chg="mod">
-          <ac:chgData name="Evgenia Andreou" userId="8e89e74f621e7047" providerId="LiveId" clId="{EF53017E-E624-4052-9F70-6403551E244D}" dt="2026-01-05T16:45:30.173" v="42068" actId="1035"/>
-          <ac:picMkLst>
-            <pc:docMk/>
-            <pc:sldMk cId="1839987358" sldId="276"/>
-            <ac:picMk id="17" creationId="{D5ECBC4A-2B11-4B08-C8A3-6AFC40E86D04}"/>
-          </ac:picMkLst>
-        </pc:picChg>
-        <pc:picChg chg="mod">
-          <ac:chgData name="Evgenia Andreou" userId="8e89e74f621e7047" providerId="LiveId" clId="{EF53017E-E624-4052-9F70-6403551E244D}" dt="2026-01-05T16:45:30.173" v="42068" actId="1035"/>
-          <ac:picMkLst>
-            <pc:docMk/>
-            <pc:sldMk cId="1839987358" sldId="276"/>
-            <ac:picMk id="21" creationId="{6940838F-7595-383B-355B-AEE11B633346}"/>
-          </ac:picMkLst>
-        </pc:picChg>
-        <pc:picChg chg="mod">
-          <ac:chgData name="Evgenia Andreou" userId="8e89e74f621e7047" providerId="LiveId" clId="{EF53017E-E624-4052-9F70-6403551E244D}" dt="2026-01-05T16:45:21.993" v="42063" actId="1035"/>
-          <ac:picMkLst>
-            <pc:docMk/>
-            <pc:sldMk cId="1839987358" sldId="276"/>
-            <ac:picMk id="23" creationId="{7D899AEF-0831-6AD2-3F78-AF8C38DCF00E}"/>
-          </ac:picMkLst>
-        </pc:picChg>
-        <pc:picChg chg="mod">
-          <ac:chgData name="Evgenia Andreou" userId="8e89e74f621e7047" providerId="LiveId" clId="{EF53017E-E624-4052-9F70-6403551E244D}" dt="2026-01-05T16:45:21.993" v="42063" actId="1035"/>
-          <ac:picMkLst>
-            <pc:docMk/>
-            <pc:sldMk cId="1839987358" sldId="276"/>
-            <ac:picMk id="25" creationId="{42F43B33-35A2-AA1D-7450-44DF1C046865}"/>
-          </ac:picMkLst>
-        </pc:picChg>
-      </pc:sldChg>
-      <pc:sldChg chg="modSp mod">
-        <pc:chgData name="Evgenia Andreou" userId="8e89e74f621e7047" providerId="LiveId" clId="{EF53017E-E624-4052-9F70-6403551E244D}" dt="2026-01-15T17:40:25.494" v="42507" actId="20577"/>
-        <pc:sldMkLst>
-          <pc:docMk/>
-          <pc:sldMk cId="2946716891" sldId="277"/>
-        </pc:sldMkLst>
-        <pc:spChg chg="mod">
-          <ac:chgData name="Evgenia Andreou" userId="8e89e74f621e7047" providerId="LiveId" clId="{EF53017E-E624-4052-9F70-6403551E244D}" dt="2026-01-15T17:40:25.494" v="42507" actId="20577"/>
-          <ac:spMkLst>
-            <pc:docMk/>
-            <pc:sldMk cId="2946716891" sldId="277"/>
-            <ac:spMk id="3" creationId="{1ABCE21A-3F83-3DDC-7BD2-BF9D4DD5C680}"/>
-          </ac:spMkLst>
-        </pc:spChg>
-      </pc:sldChg>
-      <pc:sldChg chg="modSp mod ord">
-        <pc:chgData name="Evgenia Andreou" userId="8e89e74f621e7047" providerId="LiveId" clId="{EF53017E-E624-4052-9F70-6403551E244D}" dt="2026-01-18T20:25:09.439" v="42574" actId="20577"/>
-        <pc:sldMkLst>
-          <pc:docMk/>
-          <pc:sldMk cId="1725771169" sldId="278"/>
-        </pc:sldMkLst>
-        <pc:spChg chg="mod">
-          <ac:chgData name="Evgenia Andreou" userId="8e89e74f621e7047" providerId="LiveId" clId="{EF53017E-E624-4052-9F70-6403551E244D}" dt="2026-01-18T20:25:09.439" v="42574" actId="20577"/>
-          <ac:spMkLst>
-            <pc:docMk/>
-            <pc:sldMk cId="1725771169" sldId="278"/>
-            <ac:spMk id="3" creationId="{F231BD6F-33DE-5ED7-7A3C-3B8D40A5DEF5}"/>
-          </ac:spMkLst>
-        </pc:spChg>
-      </pc:sldChg>
-      <pc:sldChg chg="modSp mod">
-        <pc:chgData name="Evgenia Andreou" userId="8e89e74f621e7047" providerId="LiveId" clId="{EF53017E-E624-4052-9F70-6403551E244D}" dt="2026-01-10T00:11:53.758" v="42423" actId="27636"/>
-        <pc:sldMkLst>
-          <pc:docMk/>
-          <pc:sldMk cId="2935283230" sldId="281"/>
-        </pc:sldMkLst>
-        <pc:spChg chg="mod">
-          <ac:chgData name="Evgenia Andreou" userId="8e89e74f621e7047" providerId="LiveId" clId="{EF53017E-E624-4052-9F70-6403551E244D}" dt="2026-01-04T22:14:04.077" v="41137" actId="20577"/>
-          <ac:spMkLst>
-            <pc:docMk/>
-            <pc:sldMk cId="2935283230" sldId="281"/>
-            <ac:spMk id="2" creationId="{A3D82945-C5A3-891C-124F-4B2A9A7BA511}"/>
-          </ac:spMkLst>
-        </pc:spChg>
-        <pc:spChg chg="mod">
-          <ac:chgData name="Evgenia Andreou" userId="8e89e74f621e7047" providerId="LiveId" clId="{EF53017E-E624-4052-9F70-6403551E244D}" dt="2026-01-09T00:58:17.155" v="42352" actId="20577"/>
-          <ac:spMkLst>
-            <pc:docMk/>
-            <pc:sldMk cId="2935283230" sldId="281"/>
-            <ac:spMk id="3" creationId="{9770C937-D67E-0A40-7F75-05BDEA92620B}"/>
-          </ac:spMkLst>
-        </pc:spChg>
-        <pc:spChg chg="mod">
-          <ac:chgData name="Evgenia Andreou" userId="8e89e74f621e7047" providerId="LiveId" clId="{EF53017E-E624-4052-9F70-6403551E244D}" dt="2026-01-04T22:16:49.222" v="41159" actId="1076"/>
-          <ac:spMkLst>
-            <pc:docMk/>
-            <pc:sldMk cId="2935283230" sldId="281"/>
-            <ac:spMk id="5" creationId="{C3C8EA0A-F462-758F-BA11-97260070A3A6}"/>
-          </ac:spMkLst>
-        </pc:spChg>
-        <pc:spChg chg="mod">
-          <ac:chgData name="Evgenia Andreou" userId="8e89e74f621e7047" providerId="LiveId" clId="{EF53017E-E624-4052-9F70-6403551E244D}" dt="2026-01-04T22:18:06.321" v="41199" actId="1035"/>
-          <ac:spMkLst>
-            <pc:docMk/>
-            <pc:sldMk cId="2935283230" sldId="281"/>
-            <ac:spMk id="6" creationId="{0ACD9B0C-3CE0-400E-CB68-9AF9FB1B59DD}"/>
-          </ac:spMkLst>
-        </pc:spChg>
-        <pc:spChg chg="mod">
-          <ac:chgData name="Evgenia Andreou" userId="8e89e74f621e7047" providerId="LiveId" clId="{EF53017E-E624-4052-9F70-6403551E244D}" dt="2026-01-04T22:18:00.177" v="41192" actId="20577"/>
-          <ac:spMkLst>
-            <pc:docMk/>
-            <pc:sldMk cId="2935283230" sldId="281"/>
-            <ac:spMk id="7" creationId="{F35A33DB-46F9-29EA-5ED4-6F3291D206A4}"/>
-          </ac:spMkLst>
-        </pc:spChg>
-        <pc:spChg chg="mod">
-          <ac:chgData name="Evgenia Andreou" userId="8e89e74f621e7047" providerId="LiveId" clId="{EF53017E-E624-4052-9F70-6403551E244D}" dt="2026-01-10T00:11:53.758" v="42423" actId="27636"/>
-          <ac:spMkLst>
-            <pc:docMk/>
-            <pc:sldMk cId="2935283230" sldId="281"/>
-            <ac:spMk id="8" creationId="{70AC0028-14B1-0B7D-9D13-D0694E0DD6A1}"/>
-          </ac:spMkLst>
-        </pc:spChg>
-      </pc:sldChg>
-      <pc:sldChg chg="modSp mod">
-        <pc:chgData name="Evgenia Andreou" userId="8e89e74f621e7047" providerId="LiveId" clId="{EF53017E-E624-4052-9F70-6403551E244D}" dt="2026-01-04T22:58:11.966" v="41573" actId="27636"/>
-        <pc:sldMkLst>
-          <pc:docMk/>
-          <pc:sldMk cId="1583996442" sldId="284"/>
-        </pc:sldMkLst>
-        <pc:spChg chg="mod">
-          <ac:chgData name="Evgenia Andreou" userId="8e89e74f621e7047" providerId="LiveId" clId="{EF53017E-E624-4052-9F70-6403551E244D}" dt="2026-01-04T22:58:11.963" v="41572" actId="27636"/>
-          <ac:spMkLst>
-            <pc:docMk/>
-            <pc:sldMk cId="1583996442" sldId="284"/>
-            <ac:spMk id="5" creationId="{997345AD-832D-F3D6-8EAB-FB12F55F6DFF}"/>
-          </ac:spMkLst>
-        </pc:spChg>
-        <pc:spChg chg="mod">
-          <ac:chgData name="Evgenia Andreou" userId="8e89e74f621e7047" providerId="LiveId" clId="{EF53017E-E624-4052-9F70-6403551E244D}" dt="2026-01-04T22:58:11.966" v="41573" actId="27636"/>
-          <ac:spMkLst>
-            <pc:docMk/>
-            <pc:sldMk cId="1583996442" sldId="284"/>
-            <ac:spMk id="8" creationId="{AAFD135F-78E3-632E-FA22-F645956311C7}"/>
-          </ac:spMkLst>
-        </pc:spChg>
-      </pc:sldChg>
-      <pc:sldChg chg="modSp mod">
-        <pc:chgData name="Evgenia Andreou" userId="8e89e74f621e7047" providerId="LiveId" clId="{EF53017E-E624-4052-9F70-6403551E244D}" dt="2026-01-05T14:56:19.407" v="41795" actId="14100"/>
-        <pc:sldMkLst>
-          <pc:docMk/>
-          <pc:sldMk cId="3019405516" sldId="291"/>
-        </pc:sldMkLst>
-        <pc:spChg chg="mod">
-          <ac:chgData name="Evgenia Andreou" userId="8e89e74f621e7047" providerId="LiveId" clId="{EF53017E-E624-4052-9F70-6403551E244D}" dt="2026-01-05T14:56:19.407" v="41795" actId="14100"/>
-          <ac:spMkLst>
-            <pc:docMk/>
-            <pc:sldMk cId="3019405516" sldId="291"/>
-            <ac:spMk id="5" creationId="{C718A182-FD34-0FCF-F841-2D21F0DFE300}"/>
-          </ac:spMkLst>
-        </pc:spChg>
-        <pc:picChg chg="mod">
-          <ac:chgData name="Evgenia Andreou" userId="8e89e74f621e7047" providerId="LiveId" clId="{EF53017E-E624-4052-9F70-6403551E244D}" dt="2026-01-05T14:56:08.399" v="41793" actId="14100"/>
-          <ac:picMkLst>
-            <pc:docMk/>
-            <pc:sldMk cId="3019405516" sldId="291"/>
-            <ac:picMk id="11" creationId="{DC1F51DB-A1C3-E7AE-73E7-24425577EC79}"/>
-          </ac:picMkLst>
-        </pc:picChg>
-      </pc:sldChg>
-      <pc:sldChg chg="modSp mod">
-        <pc:chgData name="Evgenia Andreou" userId="8e89e74f621e7047" providerId="LiveId" clId="{EF53017E-E624-4052-9F70-6403551E244D}" dt="2026-01-18T19:36:30.495" v="42523" actId="6549"/>
-        <pc:sldMkLst>
-          <pc:docMk/>
-          <pc:sldMk cId="634262476" sldId="292"/>
-        </pc:sldMkLst>
-        <pc:spChg chg="mod">
-          <ac:chgData name="Evgenia Andreou" userId="8e89e74f621e7047" providerId="LiveId" clId="{EF53017E-E624-4052-9F70-6403551E244D}" dt="2026-01-18T19:36:30.495" v="42523" actId="6549"/>
-          <ac:spMkLst>
-            <pc:docMk/>
-            <pc:sldMk cId="634262476" sldId="292"/>
-            <ac:spMk id="3" creationId="{049D6BE7-05AE-64F8-4DB8-D2CE59F9D843}"/>
-          </ac:spMkLst>
-        </pc:spChg>
-      </pc:sldChg>
-      <pc:sldChg chg="addSp modSp mod">
-        <pc:chgData name="Evgenia Andreou" userId="8e89e74f621e7047" providerId="LiveId" clId="{EF53017E-E624-4052-9F70-6403551E244D}" dt="2026-01-05T15:08:58.691" v="41894" actId="20577"/>
-        <pc:sldMkLst>
-          <pc:docMk/>
-          <pc:sldMk cId="3402175388" sldId="293"/>
-        </pc:sldMkLst>
-        <pc:spChg chg="mod">
-          <ac:chgData name="Evgenia Andreou" userId="8e89e74f621e7047" providerId="LiveId" clId="{EF53017E-E624-4052-9F70-6403551E244D}" dt="2026-01-04T22:56:33.302" v="41566" actId="1076"/>
-          <ac:spMkLst>
-            <pc:docMk/>
-            <pc:sldMk cId="3402175388" sldId="293"/>
-            <ac:spMk id="5" creationId="{0A267CFC-FE1A-6148-04CC-A306D34EA55F}"/>
-          </ac:spMkLst>
-        </pc:spChg>
-        <pc:spChg chg="mod">
-          <ac:chgData name="Evgenia Andreou" userId="8e89e74f621e7047" providerId="LiveId" clId="{EF53017E-E624-4052-9F70-6403551E244D}" dt="2026-01-05T15:08:58.691" v="41894" actId="20577"/>
-          <ac:spMkLst>
-            <pc:docMk/>
-            <pc:sldMk cId="3402175388" sldId="293"/>
-            <ac:spMk id="28" creationId="{663BBFA7-4629-E836-75B9-68C844D60F68}"/>
-          </ac:spMkLst>
-        </pc:spChg>
-        <pc:grpChg chg="add mod">
-          <ac:chgData name="Evgenia Andreou" userId="8e89e74f621e7047" providerId="LiveId" clId="{EF53017E-E624-4052-9F70-6403551E244D}" dt="2026-01-04T22:57:17.865" v="41570" actId="164"/>
-          <ac:grpSpMkLst>
-            <pc:docMk/>
-            <pc:sldMk cId="3402175388" sldId="293"/>
-            <ac:grpSpMk id="2" creationId="{B4DE4CD8-CDD8-E203-2B16-4FACB812C622}"/>
-          </ac:grpSpMkLst>
-        </pc:grpChg>
-        <pc:grpChg chg="mod">
-          <ac:chgData name="Evgenia Andreou" userId="8e89e74f621e7047" providerId="LiveId" clId="{EF53017E-E624-4052-9F70-6403551E244D}" dt="2026-01-04T22:57:17.865" v="41570" actId="164"/>
-          <ac:grpSpMkLst>
-            <pc:docMk/>
-            <pc:sldMk cId="3402175388" sldId="293"/>
-            <ac:grpSpMk id="19" creationId="{0E7AD118-D083-DDEE-7178-E43F222AB673}"/>
-          </ac:grpSpMkLst>
-        </pc:grpChg>
-        <pc:cxnChg chg="mod">
-          <ac:chgData name="Evgenia Andreou" userId="8e89e74f621e7047" providerId="LiveId" clId="{EF53017E-E624-4052-9F70-6403551E244D}" dt="2026-01-04T22:57:17.865" v="41570" actId="164"/>
-          <ac:cxnSpMkLst>
-            <pc:docMk/>
-            <pc:sldMk cId="3402175388" sldId="293"/>
-            <ac:cxnSpMk id="24" creationId="{47354A09-3670-2A84-AE1A-8F1DBAA5939A}"/>
-          </ac:cxnSpMkLst>
-        </pc:cxnChg>
-        <pc:cxnChg chg="mod">
-          <ac:chgData name="Evgenia Andreou" userId="8e89e74f621e7047" providerId="LiveId" clId="{EF53017E-E624-4052-9F70-6403551E244D}" dt="2026-01-04T22:57:17.865" v="41570" actId="164"/>
-          <ac:cxnSpMkLst>
-            <pc:docMk/>
-            <pc:sldMk cId="3402175388" sldId="293"/>
-            <ac:cxnSpMk id="25" creationId="{ED3CAE37-E11C-EC06-E5DD-09A661000FF9}"/>
-          </ac:cxnSpMkLst>
-        </pc:cxnChg>
-        <pc:cxnChg chg="mod">
-          <ac:chgData name="Evgenia Andreou" userId="8e89e74f621e7047" providerId="LiveId" clId="{EF53017E-E624-4052-9F70-6403551E244D}" dt="2026-01-04T22:57:17.865" v="41570" actId="164"/>
-          <ac:cxnSpMkLst>
-            <pc:docMk/>
-            <pc:sldMk cId="3402175388" sldId="293"/>
-            <ac:cxnSpMk id="26" creationId="{4C1DC3F0-9B34-D374-BE71-99BCAC8E9ADA}"/>
-          </ac:cxnSpMkLst>
-        </pc:cxnChg>
-      </pc:sldChg>
-      <pc:sldChg chg="modSp add mod">
-        <pc:chgData name="Evgenia Andreou" userId="8e89e74f621e7047" providerId="LiveId" clId="{EF53017E-E624-4052-9F70-6403551E244D}" dt="2026-01-04T22:08:41.626" v="41081" actId="255"/>
-        <pc:sldMkLst>
-          <pc:docMk/>
-          <pc:sldMk cId="562415862" sldId="295"/>
-        </pc:sldMkLst>
-        <pc:spChg chg="mod">
-          <ac:chgData name="Evgenia Andreou" userId="8e89e74f621e7047" providerId="LiveId" clId="{EF53017E-E624-4052-9F70-6403551E244D}" dt="2026-01-04T22:08:41.626" v="41081" actId="255"/>
-          <ac:spMkLst>
-            <pc:docMk/>
-            <pc:sldMk cId="562415862" sldId="295"/>
-            <ac:spMk id="2" creationId="{A139D3FD-4075-7801-EEA3-5C627734C182}"/>
-          </ac:spMkLst>
-        </pc:spChg>
-      </pc:sldChg>
-      <pc:sldChg chg="modSp add mod">
-        <pc:chgData name="Evgenia Andreou" userId="8e89e74f621e7047" providerId="LiveId" clId="{EF53017E-E624-4052-9F70-6403551E244D}" dt="2026-01-05T14:39:57.521" v="41635" actId="20577"/>
-        <pc:sldMkLst>
-          <pc:docMk/>
-          <pc:sldMk cId="408775488" sldId="296"/>
-        </pc:sldMkLst>
-        <pc:spChg chg="mod">
-          <ac:chgData name="Evgenia Andreou" userId="8e89e74f621e7047" providerId="LiveId" clId="{EF53017E-E624-4052-9F70-6403551E244D}" dt="2026-01-05T14:39:57.521" v="41635" actId="20577"/>
-          <ac:spMkLst>
-            <pc:docMk/>
-            <pc:sldMk cId="408775488" sldId="296"/>
-            <ac:spMk id="2" creationId="{FD08B98B-948F-1006-86BA-3DFAC22F36D6}"/>
-          </ac:spMkLst>
-        </pc:spChg>
-      </pc:sldChg>
-      <pc:sldChg chg="modSp add mod">
-        <pc:chgData name="Evgenia Andreou" userId="8e89e74f621e7047" providerId="LiveId" clId="{EF53017E-E624-4052-9F70-6403551E244D}" dt="2026-01-05T14:40:11.382" v="41654" actId="20577"/>
-        <pc:sldMkLst>
-          <pc:docMk/>
-          <pc:sldMk cId="730092505" sldId="297"/>
-        </pc:sldMkLst>
-        <pc:spChg chg="mod">
-          <ac:chgData name="Evgenia Andreou" userId="8e89e74f621e7047" providerId="LiveId" clId="{EF53017E-E624-4052-9F70-6403551E244D}" dt="2026-01-05T14:40:11.382" v="41654" actId="20577"/>
-          <ac:spMkLst>
-            <pc:docMk/>
-            <pc:sldMk cId="730092505" sldId="297"/>
-            <ac:spMk id="2" creationId="{534ED583-2CAB-0ED2-E987-A4E0E320A1A6}"/>
+            <ac:spMk id="4" creationId="{DA253F5B-969C-ED7C-E6DD-0409268E6EFB}"/>
           </ac:spMkLst>
         </pc:spChg>
       </pc:sldChg>
@@ -12146,7 +11627,7 @@
           <a:p>
             <a:fld id="{C1A9776D-B584-4D4B-981C-FA97E36C0636}" type="datetimeFigureOut">
               <a:rPr lang="en-GB" smtClean="0"/>
-              <a:t>18/01/2026</a:t>
+              <a:t>18/02/2026</a:t>
             </a:fld>
             <a:endParaRPr lang="en-GB"/>
           </a:p>
@@ -12346,7 +11827,7 @@
           <a:p>
             <a:fld id="{C1A9776D-B584-4D4B-981C-FA97E36C0636}" type="datetimeFigureOut">
               <a:rPr lang="en-GB" smtClean="0"/>
-              <a:t>18/01/2026</a:t>
+              <a:t>18/02/2026</a:t>
             </a:fld>
             <a:endParaRPr lang="en-GB"/>
           </a:p>
@@ -12556,7 +12037,7 @@
           <a:p>
             <a:fld id="{C1A9776D-B584-4D4B-981C-FA97E36C0636}" type="datetimeFigureOut">
               <a:rPr lang="en-GB" smtClean="0"/>
-              <a:t>18/01/2026</a:t>
+              <a:t>18/02/2026</a:t>
             </a:fld>
             <a:endParaRPr lang="en-GB"/>
           </a:p>
@@ -12756,7 +12237,7 @@
           <a:p>
             <a:fld id="{C1A9776D-B584-4D4B-981C-FA97E36C0636}" type="datetimeFigureOut">
               <a:rPr lang="en-GB" smtClean="0"/>
-              <a:t>18/01/2026</a:t>
+              <a:t>18/02/2026</a:t>
             </a:fld>
             <a:endParaRPr lang="en-GB"/>
           </a:p>
@@ -13032,7 +12513,7 @@
           <a:p>
             <a:fld id="{C1A9776D-B584-4D4B-981C-FA97E36C0636}" type="datetimeFigureOut">
               <a:rPr lang="en-GB" smtClean="0"/>
-              <a:t>18/01/2026</a:t>
+              <a:t>18/02/2026</a:t>
             </a:fld>
             <a:endParaRPr lang="en-GB"/>
           </a:p>
@@ -13300,7 +12781,7 @@
           <a:p>
             <a:fld id="{C1A9776D-B584-4D4B-981C-FA97E36C0636}" type="datetimeFigureOut">
               <a:rPr lang="en-GB" smtClean="0"/>
-              <a:t>18/01/2026</a:t>
+              <a:t>18/02/2026</a:t>
             </a:fld>
             <a:endParaRPr lang="en-GB"/>
           </a:p>
@@ -13715,7 +13196,7 @@
           <a:p>
             <a:fld id="{C1A9776D-B584-4D4B-981C-FA97E36C0636}" type="datetimeFigureOut">
               <a:rPr lang="en-GB" smtClean="0"/>
-              <a:t>18/01/2026</a:t>
+              <a:t>18/02/2026</a:t>
             </a:fld>
             <a:endParaRPr lang="en-GB"/>
           </a:p>
@@ -13857,7 +13338,7 @@
           <a:p>
             <a:fld id="{C1A9776D-B584-4D4B-981C-FA97E36C0636}" type="datetimeFigureOut">
               <a:rPr lang="en-GB" smtClean="0"/>
-              <a:t>18/01/2026</a:t>
+              <a:t>18/02/2026</a:t>
             </a:fld>
             <a:endParaRPr lang="en-GB"/>
           </a:p>
@@ -13970,7 +13451,7 @@
           <a:p>
             <a:fld id="{C1A9776D-B584-4D4B-981C-FA97E36C0636}" type="datetimeFigureOut">
               <a:rPr lang="en-GB" smtClean="0"/>
-              <a:t>18/01/2026</a:t>
+              <a:t>18/02/2026</a:t>
             </a:fld>
             <a:endParaRPr lang="en-GB"/>
           </a:p>
@@ -14283,7 +13764,7 @@
           <a:p>
             <a:fld id="{C1A9776D-B584-4D4B-981C-FA97E36C0636}" type="datetimeFigureOut">
               <a:rPr lang="en-GB" smtClean="0"/>
-              <a:t>18/01/2026</a:t>
+              <a:t>18/02/2026</a:t>
             </a:fld>
             <a:endParaRPr lang="en-GB"/>
           </a:p>
@@ -14572,7 +14053,7 @@
           <a:p>
             <a:fld id="{C1A9776D-B584-4D4B-981C-FA97E36C0636}" type="datetimeFigureOut">
               <a:rPr lang="en-GB" smtClean="0"/>
-              <a:t>18/01/2026</a:t>
+              <a:t>18/02/2026</a:t>
             </a:fld>
             <a:endParaRPr lang="en-GB"/>
           </a:p>
@@ -14828,7 +14309,7 @@
           <a:p>
             <a:fld id="{C1A9776D-B584-4D4B-981C-FA97E36C0636}" type="datetimeFigureOut">
               <a:rPr lang="en-GB" smtClean="0"/>
-              <a:t>18/01/2026</a:t>
+              <a:t>18/02/2026</a:t>
             </a:fld>
             <a:endParaRPr lang="en-GB"/>
           </a:p>
@@ -18279,7 +17760,15 @@
             <a:pPr algn="ctr"/>
             <a:r>
               <a:rPr lang="en-GB" sz="3000" b="1" dirty="0"/>
-              <a:t>Predicting early termination of clinical trials, with machine learning vs classical regression models, based on analysis of their design characteristics</a:t>
+              <a:t>Predicting early termination of clinical trials</a:t>
+            </a:r>
+            <a:r>
+              <a:rPr lang="en-GB" sz="3000" b="1"/>
+              <a:t>, using </a:t>
+            </a:r>
+            <a:r>
+              <a:rPr lang="en-GB" sz="3000" b="1" dirty="0"/>
+              <a:t>machine learning vs classical regression models, based on analysis of their design characteristics</a:t>
             </a:r>
           </a:p>
         </p:txBody>
